--- a/decks/workshop-2-orchestrator/workshop-2-orchestrator.pptx
+++ b/decks/workshop-2-orchestrator/workshop-2-orchestrator.pptx
@@ -4205,18 +4205,18 @@
         </p:nvSpPr>
         <p:spPr>
           <a:xfrm>
-            <a:off x="365760" y="1645920"/>
-            <a:ext cx="1828800" cy="914400"/>
+            <a:off x="457200" y="2011680"/>
+            <a:ext cx="1645920" cy="822960"/>
           </a:xfrm>
           <a:prstGeom prst="roundRect">
             <a:avLst>
-              <a:gd name="adj" fmla="val 5000"/>
+              <a:gd name="adj" fmla="val 11111"/>
             </a:avLst>
           </a:prstGeom>
           <a:solidFill>
             <a:srgbClr val="0A2540"/>
           </a:solidFill>
-          <a:ln w="12700">
+          <a:ln w="19050">
             <a:solidFill>
               <a:srgbClr val="8B95A5"/>
             </a:solidFill>
@@ -4232,8 +4232,8 @@
         </p:nvSpPr>
         <p:spPr>
           <a:xfrm>
-            <a:off x="365760" y="1645920"/>
-            <a:ext cx="1828800" cy="914400"/>
+            <a:off x="457200" y="2011680"/>
+            <a:ext cx="1645920" cy="822960"/>
           </a:xfrm>
           <a:prstGeom prst="rect">
             <a:avLst/>
@@ -4249,7 +4249,7 @@
               <a:buNone/>
             </a:pPr>
             <a:r>
-              <a:rPr lang="en-US" sz="1400" dirty="0">
+              <a:rPr lang="en-US" sz="1800" b="1" dirty="0">
                 <a:solidFill>
                   <a:srgbClr val="EDEDED"/>
                 </a:solidFill>
@@ -4259,7 +4259,7 @@
               </a:rPr>
               <a:t>Research</a:t>
             </a:r>
-            <a:endParaRPr lang="en-US" sz="1400" dirty="0"/>
+            <a:endParaRPr lang="en-US" sz="1800" dirty="0"/>
           </a:p>
         </p:txBody>
       </p:sp>
@@ -4271,8 +4271,8 @@
         </p:nvSpPr>
         <p:spPr>
           <a:xfrm>
-            <a:off x="2194560" y="1645920"/>
-            <a:ext cx="365760" cy="914400"/>
+            <a:off x="2103120" y="2011680"/>
+            <a:ext cx="548640" cy="822960"/>
           </a:xfrm>
           <a:prstGeom prst="rect">
             <a:avLst/>
@@ -4288,7 +4288,7 @@
               <a:buNone/>
             </a:pPr>
             <a:r>
-              <a:rPr lang="en-US" sz="2200" dirty="0">
+              <a:rPr lang="en-US" sz="2800" b="1" dirty="0">
                 <a:solidFill>
                   <a:srgbClr val="635BFF"/>
                 </a:solidFill>
@@ -4298,7 +4298,7 @@
               </a:rPr>
               <a:t>→</a:t>
             </a:r>
-            <a:endParaRPr lang="en-US" sz="2200" dirty="0"/>
+            <a:endParaRPr lang="en-US" sz="2800" dirty="0"/>
           </a:p>
         </p:txBody>
       </p:sp>
@@ -4310,18 +4310,18 @@
         </p:nvSpPr>
         <p:spPr>
           <a:xfrm>
-            <a:off x="2560320" y="1645920"/>
-            <a:ext cx="1828800" cy="914400"/>
+            <a:off x="2651760" y="2011680"/>
+            <a:ext cx="1645920" cy="822960"/>
           </a:xfrm>
           <a:prstGeom prst="roundRect">
             <a:avLst>
-              <a:gd name="adj" fmla="val 5000"/>
+              <a:gd name="adj" fmla="val 11111"/>
             </a:avLst>
           </a:prstGeom>
           <a:solidFill>
             <a:srgbClr val="0A2540"/>
           </a:solidFill>
-          <a:ln w="12700">
+          <a:ln w="19050">
             <a:solidFill>
               <a:srgbClr val="8B95A5"/>
             </a:solidFill>
@@ -4337,8 +4337,8 @@
         </p:nvSpPr>
         <p:spPr>
           <a:xfrm>
-            <a:off x="2560320" y="1645920"/>
-            <a:ext cx="1828800" cy="914400"/>
+            <a:off x="2651760" y="2011680"/>
+            <a:ext cx="1645920" cy="822960"/>
           </a:xfrm>
           <a:prstGeom prst="rect">
             <a:avLst/>
@@ -4354,7 +4354,7 @@
               <a:buNone/>
             </a:pPr>
             <a:r>
-              <a:rPr lang="en-US" sz="1400" dirty="0">
+              <a:rPr lang="en-US" sz="1800" b="1" dirty="0">
                 <a:solidFill>
                   <a:srgbClr val="EDEDED"/>
                 </a:solidFill>
@@ -4364,7 +4364,7 @@
               </a:rPr>
               <a:t>Draft</a:t>
             </a:r>
-            <a:endParaRPr lang="en-US" sz="1400" dirty="0"/>
+            <a:endParaRPr lang="en-US" sz="1800" dirty="0"/>
           </a:p>
         </p:txBody>
       </p:sp>
@@ -4376,8 +4376,8 @@
         </p:nvSpPr>
         <p:spPr>
           <a:xfrm>
-            <a:off x="4389120" y="1645920"/>
-            <a:ext cx="365760" cy="914400"/>
+            <a:off x="4297680" y="2011680"/>
+            <a:ext cx="548640" cy="822960"/>
           </a:xfrm>
           <a:prstGeom prst="rect">
             <a:avLst/>
@@ -4393,7 +4393,7 @@
               <a:buNone/>
             </a:pPr>
             <a:r>
-              <a:rPr lang="en-US" sz="2200" dirty="0">
+              <a:rPr lang="en-US" sz="2800" b="1" dirty="0">
                 <a:solidFill>
                   <a:srgbClr val="635BFF"/>
                 </a:solidFill>
@@ -4403,7 +4403,7 @@
               </a:rPr>
               <a:t>→</a:t>
             </a:r>
-            <a:endParaRPr lang="en-US" sz="2200" dirty="0"/>
+            <a:endParaRPr lang="en-US" sz="2800" dirty="0"/>
           </a:p>
         </p:txBody>
       </p:sp>
@@ -4415,18 +4415,18 @@
         </p:nvSpPr>
         <p:spPr>
           <a:xfrm>
-            <a:off x="4754880" y="1645920"/>
-            <a:ext cx="1828800" cy="914400"/>
+            <a:off x="4846320" y="2011680"/>
+            <a:ext cx="1645920" cy="822960"/>
           </a:xfrm>
           <a:prstGeom prst="roundRect">
             <a:avLst>
-              <a:gd name="adj" fmla="val 5000"/>
+              <a:gd name="adj" fmla="val 11111"/>
             </a:avLst>
           </a:prstGeom>
           <a:solidFill>
             <a:srgbClr val="0A2540"/>
           </a:solidFill>
-          <a:ln w="12700">
+          <a:ln w="19050">
             <a:solidFill>
               <a:srgbClr val="8B95A5"/>
             </a:solidFill>
@@ -4442,8 +4442,8 @@
         </p:nvSpPr>
         <p:spPr>
           <a:xfrm>
-            <a:off x="4754880" y="1645920"/>
-            <a:ext cx="1828800" cy="914400"/>
+            <a:off x="4846320" y="2011680"/>
+            <a:ext cx="1645920" cy="822960"/>
           </a:xfrm>
           <a:prstGeom prst="rect">
             <a:avLst/>
@@ -4459,7 +4459,7 @@
               <a:buNone/>
             </a:pPr>
             <a:r>
-              <a:rPr lang="en-US" sz="1400" dirty="0">
+              <a:rPr lang="en-US" sz="1800" b="1" dirty="0">
                 <a:solidFill>
                   <a:srgbClr val="EDEDED"/>
                 </a:solidFill>
@@ -4469,7 +4469,7 @@
               </a:rPr>
               <a:t>Review</a:t>
             </a:r>
-            <a:endParaRPr lang="en-US" sz="1400" dirty="0"/>
+            <a:endParaRPr lang="en-US" sz="1800" dirty="0"/>
           </a:p>
         </p:txBody>
       </p:sp>
@@ -4481,8 +4481,8 @@
         </p:nvSpPr>
         <p:spPr>
           <a:xfrm>
-            <a:off x="6583680" y="1645920"/>
-            <a:ext cx="365760" cy="914400"/>
+            <a:off x="6492240" y="2011680"/>
+            <a:ext cx="548640" cy="822960"/>
           </a:xfrm>
           <a:prstGeom prst="rect">
             <a:avLst/>
@@ -4498,7 +4498,7 @@
               <a:buNone/>
             </a:pPr>
             <a:r>
-              <a:rPr lang="en-US" sz="2200" dirty="0">
+              <a:rPr lang="en-US" sz="2800" b="1" dirty="0">
                 <a:solidFill>
                   <a:srgbClr val="635BFF"/>
                 </a:solidFill>
@@ -4508,7 +4508,7 @@
               </a:rPr>
               <a:t>→</a:t>
             </a:r>
-            <a:endParaRPr lang="en-US" sz="2200" dirty="0"/>
+            <a:endParaRPr lang="en-US" sz="2800" dirty="0"/>
           </a:p>
         </p:txBody>
       </p:sp>
@@ -4520,23 +4520,18 @@
         </p:nvSpPr>
         <p:spPr>
           <a:xfrm>
-            <a:off x="6949440" y="1645920"/>
-            <a:ext cx="1828800" cy="914400"/>
+            <a:off x="7040880" y="2011680"/>
+            <a:ext cx="1645920" cy="822960"/>
           </a:xfrm>
           <a:prstGeom prst="roundRect">
             <a:avLst>
-              <a:gd name="adj" fmla="val 5000"/>
+              <a:gd name="adj" fmla="val 11111"/>
             </a:avLst>
           </a:prstGeom>
           <a:solidFill>
             <a:srgbClr val="635BFF"/>
           </a:solidFill>
-          <a:ln w="12700">
-            <a:solidFill>
-              <a:srgbClr val="635BFF"/>
-            </a:solidFill>
-            <a:prstDash val="solid"/>
-          </a:ln>
+          <a:ln/>
         </p:spPr>
       </p:sp>
       <p:sp>
@@ -4547,8 +4542,8 @@
         </p:nvSpPr>
         <p:spPr>
           <a:xfrm>
-            <a:off x="6949440" y="1645920"/>
-            <a:ext cx="1828800" cy="914400"/>
+            <a:off x="7040880" y="2011680"/>
+            <a:ext cx="1645920" cy="822960"/>
           </a:xfrm>
           <a:prstGeom prst="rect">
             <a:avLst/>
@@ -4564,7 +4559,7 @@
               <a:buNone/>
             </a:pPr>
             <a:r>
-              <a:rPr lang="en-US" sz="1400" b="1" dirty="0">
+              <a:rPr lang="en-US" sz="1800" b="1" dirty="0">
                 <a:solidFill>
                   <a:srgbClr val="FFFFFF"/>
                 </a:solidFill>
@@ -4574,7 +4569,7 @@
               </a:rPr>
               <a:t>You</a:t>
             </a:r>
-            <a:endParaRPr lang="en-US" sz="1400" dirty="0"/>
+            <a:endParaRPr lang="en-US" sz="1800" dirty="0"/>
           </a:p>
         </p:txBody>
       </p:sp>
@@ -4586,7 +4581,7 @@
         </p:nvSpPr>
         <p:spPr>
           <a:xfrm>
-            <a:off x="914400" y="3017520"/>
+            <a:off x="914400" y="3291840"/>
             <a:ext cx="7315200" cy="548640"/>
           </a:xfrm>
           <a:prstGeom prst="rect">
@@ -5067,16 +5062,19 @@
         </p:nvSpPr>
         <p:spPr>
           <a:xfrm>
-            <a:off x="4544568" y="1097280"/>
-            <a:ext cx="54864" cy="1828800"/>
-          </a:xfrm>
-          <a:prstGeom prst="rect">
-            <a:avLst/>
-          </a:prstGeom>
-          <a:solidFill>
-            <a:srgbClr val="635BFF"/>
-          </a:solidFill>
-          <a:ln/>
+            <a:off x="4572000" y="914400"/>
+            <a:ext cx="0" cy="2377440"/>
+          </a:xfrm>
+          <a:prstGeom prst="line">
+            <a:avLst/>
+          </a:prstGeom>
+          <a:noFill/>
+          <a:ln w="25400">
+            <a:solidFill>
+              <a:srgbClr val="635BFF"/>
+            </a:solidFill>
+            <a:prstDash val="solid"/>
+          </a:ln>
         </p:spPr>
       </p:sp>
       <p:sp>
@@ -5263,13 +5261,13 @@
           </a:xfrm>
           <a:prstGeom prst="roundRect">
             <a:avLst>
-              <a:gd name="adj" fmla="val 7143"/>
+              <a:gd name="adj" fmla="val 11429"/>
             </a:avLst>
           </a:prstGeom>
           <a:solidFill>
             <a:srgbClr val="0A2540"/>
           </a:solidFill>
-          <a:ln w="12700">
+          <a:ln w="19050">
             <a:solidFill>
               <a:srgbClr val="8B95A5"/>
             </a:solidFill>
@@ -5302,7 +5300,7 @@
               <a:buNone/>
             </a:pPr>
             <a:r>
-              <a:rPr lang="en-US" sz="1100" dirty="0">
+              <a:rPr lang="en-US" sz="1200" dirty="0">
                 <a:solidFill>
                   <a:srgbClr val="8B95A5"/>
                 </a:solidFill>
@@ -5312,7 +5310,7 @@
               </a:rPr>
               <a:t>Skeptic</a:t>
             </a:r>
-            <a:endParaRPr lang="en-US" sz="1100" dirty="0"/>
+            <a:endParaRPr lang="en-US" sz="1200" dirty="0"/>
           </a:p>
         </p:txBody>
       </p:sp>
@@ -5329,13 +5327,13 @@
           </a:xfrm>
           <a:prstGeom prst="roundRect">
             <a:avLst>
-              <a:gd name="adj" fmla="val 7143"/>
+              <a:gd name="adj" fmla="val 11429"/>
             </a:avLst>
           </a:prstGeom>
           <a:solidFill>
             <a:srgbClr val="0A2540"/>
           </a:solidFill>
-          <a:ln w="12700">
+          <a:ln w="19050">
             <a:solidFill>
               <a:srgbClr val="8B95A5"/>
             </a:solidFill>
@@ -5368,7 +5366,7 @@
               <a:buNone/>
             </a:pPr>
             <a:r>
-              <a:rPr lang="en-US" sz="1100" dirty="0">
+              <a:rPr lang="en-US" sz="1200" dirty="0">
                 <a:solidFill>
                   <a:srgbClr val="8B95A5"/>
                 </a:solidFill>
@@ -5378,7 +5376,7 @@
               </a:rPr>
               <a:t>Explorer</a:t>
             </a:r>
-            <a:endParaRPr lang="en-US" sz="1100" dirty="0"/>
+            <a:endParaRPr lang="en-US" sz="1200" dirty="0"/>
           </a:p>
         </p:txBody>
       </p:sp>
@@ -5395,13 +5393,13 @@
           </a:xfrm>
           <a:prstGeom prst="roundRect">
             <a:avLst>
-              <a:gd name="adj" fmla="val 7143"/>
+              <a:gd name="adj" fmla="val 11429"/>
             </a:avLst>
           </a:prstGeom>
           <a:solidFill>
             <a:srgbClr val="0A2540"/>
           </a:solidFill>
-          <a:ln w="12700">
+          <a:ln w="19050">
             <a:solidFill>
               <a:srgbClr val="8B95A5"/>
             </a:solidFill>
@@ -5434,7 +5432,7 @@
               <a:buNone/>
             </a:pPr>
             <a:r>
-              <a:rPr lang="en-US" sz="1100" dirty="0">
+              <a:rPr lang="en-US" sz="1200" dirty="0">
                 <a:solidFill>
                   <a:srgbClr val="8B95A5"/>
                 </a:solidFill>
@@ -5444,7 +5442,7 @@
               </a:rPr>
               <a:t>Whisperer</a:t>
             </a:r>
-            <a:endParaRPr lang="en-US" sz="1100" dirty="0"/>
+            <a:endParaRPr lang="en-US" sz="1200" dirty="0"/>
           </a:p>
         </p:txBody>
       </p:sp>
@@ -5461,13 +5459,13 @@
           </a:xfrm>
           <a:prstGeom prst="roundRect">
             <a:avLst>
-              <a:gd name="adj" fmla="val 7143"/>
+              <a:gd name="adj" fmla="val 11429"/>
             </a:avLst>
           </a:prstGeom>
           <a:solidFill>
             <a:srgbClr val="635BFF"/>
           </a:solidFill>
-          <a:ln w="12700">
+          <a:ln w="19050">
             <a:solidFill>
               <a:srgbClr val="635BFF"/>
             </a:solidFill>
@@ -5500,7 +5498,7 @@
               <a:buNone/>
             </a:pPr>
             <a:r>
-              <a:rPr lang="en-US" sz="1100" b="1" dirty="0">
+              <a:rPr lang="en-US" sz="1200" b="1" dirty="0">
                 <a:solidFill>
                   <a:srgbClr val="FFFFFF"/>
                 </a:solidFill>
@@ -5510,7 +5508,7 @@
               </a:rPr>
               <a:t>Strategist</a:t>
             </a:r>
-            <a:endParaRPr lang="en-US" sz="1100" dirty="0"/>
+            <a:endParaRPr lang="en-US" sz="1200" dirty="0"/>
           </a:p>
         </p:txBody>
       </p:sp>
@@ -5527,13 +5525,13 @@
           </a:xfrm>
           <a:prstGeom prst="roundRect">
             <a:avLst>
-              <a:gd name="adj" fmla="val 7143"/>
+              <a:gd name="adj" fmla="val 11429"/>
             </a:avLst>
           </a:prstGeom>
           <a:solidFill>
             <a:srgbClr val="635BFF"/>
           </a:solidFill>
-          <a:ln w="12700">
+          <a:ln w="19050">
             <a:solidFill>
               <a:srgbClr val="635BFF"/>
             </a:solidFill>
@@ -5566,7 +5564,7 @@
               <a:buNone/>
             </a:pPr>
             <a:r>
-              <a:rPr lang="en-US" sz="1100" b="1" dirty="0">
+              <a:rPr lang="en-US" sz="1200" b="1" dirty="0">
                 <a:solidFill>
                   <a:srgbClr val="FFFFFF"/>
                 </a:solidFill>
@@ -5576,7 +5574,7 @@
               </a:rPr>
               <a:t>Operator</a:t>
             </a:r>
-            <a:endParaRPr lang="en-US" sz="1100" dirty="0"/>
+            <a:endParaRPr lang="en-US" sz="1200" dirty="0"/>
           </a:p>
         </p:txBody>
       </p:sp>
@@ -5593,13 +5591,13 @@
           </a:xfrm>
           <a:prstGeom prst="roundRect">
             <a:avLst>
-              <a:gd name="adj" fmla="val 7143"/>
+              <a:gd name="adj" fmla="val 11429"/>
             </a:avLst>
           </a:prstGeom>
           <a:solidFill>
             <a:srgbClr val="635BFF"/>
           </a:solidFill>
-          <a:ln w="12700">
+          <a:ln w="19050">
             <a:solidFill>
               <a:srgbClr val="635BFF"/>
             </a:solidFill>
@@ -5632,7 +5630,7 @@
               <a:buNone/>
             </a:pPr>
             <a:r>
-              <a:rPr lang="en-US" sz="1100" b="1" dirty="0">
+              <a:rPr lang="en-US" sz="1200" b="1" dirty="0">
                 <a:solidFill>
                   <a:srgbClr val="FFFFFF"/>
                 </a:solidFill>
@@ -5642,7 +5640,7 @@
               </a:rPr>
               <a:t>Orchestrator</a:t>
             </a:r>
-            <a:endParaRPr lang="en-US" sz="1100" dirty="0"/>
+            <a:endParaRPr lang="en-US" sz="1200" dirty="0"/>
           </a:p>
         </p:txBody>
       </p:sp>
@@ -5659,13 +5657,13 @@
           </a:xfrm>
           <a:prstGeom prst="roundRect">
             <a:avLst>
-              <a:gd name="adj" fmla="val 7143"/>
+              <a:gd name="adj" fmla="val 11429"/>
             </a:avLst>
           </a:prstGeom>
           <a:solidFill>
             <a:srgbClr val="0A2540"/>
           </a:solidFill>
-          <a:ln w="12700">
+          <a:ln w="19050">
             <a:solidFill>
               <a:srgbClr val="8B95A5"/>
             </a:solidFill>
@@ -5698,7 +5696,7 @@
               <a:buNone/>
             </a:pPr>
             <a:r>
-              <a:rPr lang="en-US" sz="1100" dirty="0">
+              <a:rPr lang="en-US" sz="1200" dirty="0">
                 <a:solidFill>
                   <a:srgbClr val="8B95A5"/>
                 </a:solidFill>
@@ -5708,7 +5706,7 @@
               </a:rPr>
               <a:t>Builder</a:t>
             </a:r>
-            <a:endParaRPr lang="en-US" sz="1100" dirty="0"/>
+            <a:endParaRPr lang="en-US" sz="1200" dirty="0"/>
           </a:p>
         </p:txBody>
       </p:sp>
@@ -6050,8 +6048,8 @@
         </p:nvSpPr>
         <p:spPr>
           <a:xfrm>
-            <a:off x="914400" y="731520"/>
-            <a:ext cx="7315200" cy="2286000"/>
+            <a:off x="457200" y="914400"/>
+            <a:ext cx="8229600" cy="2286000"/>
           </a:xfrm>
           <a:prstGeom prst="rect">
             <a:avLst/>
@@ -6069,7 +6067,7 @@
             <a:r>
               <a:rPr lang="en-US" sz="12000" b="1" dirty="0">
                 <a:solidFill>
-                  <a:srgbClr val="635BFF"/>
+                  <a:srgbClr val="FF6B8A"/>
                 </a:solidFill>
                 <a:latin typeface="Georgia" pitchFamily="34" charset="0"/>
                 <a:ea typeface="Georgia" pitchFamily="34" charset="-122"/>
@@ -6089,7 +6087,7 @@
         </p:nvSpPr>
         <p:spPr>
           <a:xfrm>
-            <a:off x="1371600" y="3200400"/>
+            <a:off x="1371600" y="3291840"/>
             <a:ext cx="6400800" cy="731520"/>
           </a:xfrm>
           <a:prstGeom prst="rect">
@@ -6106,7 +6104,7 @@
               <a:buNone/>
             </a:pPr>
             <a:r>
-              <a:rPr lang="en-US" sz="2400" dirty="0">
+              <a:rPr lang="en-US" sz="2800" dirty="0">
                 <a:solidFill>
                   <a:srgbClr val="8B95A5"/>
                 </a:solidFill>
@@ -6116,7 +6114,7 @@
               </a:rPr>
               <a:t>of you being the bottleneck</a:t>
             </a:r>
-            <a:endParaRPr lang="en-US" sz="2400" dirty="0"/>
+            <a:endParaRPr lang="en-US" sz="2800" dirty="0"/>
           </a:p>
         </p:txBody>
       </p:sp>
@@ -6182,8 +6180,8 @@
         </p:nvSpPr>
         <p:spPr>
           <a:xfrm>
-            <a:off x="914400" y="731520"/>
-            <a:ext cx="7315200" cy="2286000"/>
+            <a:off x="457200" y="914400"/>
+            <a:ext cx="8229600" cy="2286000"/>
           </a:xfrm>
           <a:prstGeom prst="rect">
             <a:avLst/>
@@ -6201,7 +6199,7 @@
             <a:r>
               <a:rPr lang="en-US" sz="12000" b="1" dirty="0">
                 <a:solidFill>
-                  <a:srgbClr val="635BFF"/>
+                  <a:srgbClr val="09825D"/>
                 </a:solidFill>
                 <a:latin typeface="Georgia" pitchFamily="34" charset="0"/>
                 <a:ea typeface="Georgia" pitchFamily="34" charset="-122"/>
@@ -6221,7 +6219,7 @@
         </p:nvSpPr>
         <p:spPr>
           <a:xfrm>
-            <a:off x="1371600" y="3200400"/>
+            <a:off x="1371600" y="3291840"/>
             <a:ext cx="6400800" cy="731520"/>
           </a:xfrm>
           <a:prstGeom prst="rect">
@@ -6238,7 +6236,7 @@
               <a:buNone/>
             </a:pPr>
             <a:r>
-              <a:rPr lang="en-US" sz="2400" dirty="0">
+              <a:rPr lang="en-US" sz="2800" dirty="0">
                 <a:solidFill>
                   <a:srgbClr val="8B95A5"/>
                 </a:solidFill>
@@ -6248,7 +6246,7 @@
               </a:rPr>
               <a:t>of judgment — the part only humans can do</a:t>
             </a:r>
-            <a:endParaRPr lang="en-US" sz="2400" dirty="0"/>
+            <a:endParaRPr lang="en-US" sz="2800" dirty="0"/>
           </a:p>
         </p:txBody>
       </p:sp>
@@ -6319,13 +6317,13 @@
           </a:xfrm>
           <a:prstGeom prst="roundRect">
             <a:avLst>
-              <a:gd name="adj" fmla="val 7143"/>
+              <a:gd name="adj" fmla="val 11429"/>
             </a:avLst>
           </a:prstGeom>
           <a:solidFill>
             <a:srgbClr val="0A2540"/>
           </a:solidFill>
-          <a:ln w="12700">
+          <a:ln w="19050">
             <a:solidFill>
               <a:srgbClr val="8B95A5"/>
             </a:solidFill>
@@ -6358,7 +6356,7 @@
               <a:buNone/>
             </a:pPr>
             <a:r>
-              <a:rPr lang="en-US" sz="1100" dirty="0">
+              <a:rPr lang="en-US" sz="1200" dirty="0">
                 <a:solidFill>
                   <a:srgbClr val="8B95A5"/>
                 </a:solidFill>
@@ -6368,7 +6366,7 @@
               </a:rPr>
               <a:t>Skeptic</a:t>
             </a:r>
-            <a:endParaRPr lang="en-US" sz="1100" dirty="0"/>
+            <a:endParaRPr lang="en-US" sz="1200" dirty="0"/>
           </a:p>
         </p:txBody>
       </p:sp>
@@ -6385,13 +6383,13 @@
           </a:xfrm>
           <a:prstGeom prst="roundRect">
             <a:avLst>
-              <a:gd name="adj" fmla="val 7143"/>
+              <a:gd name="adj" fmla="val 11429"/>
             </a:avLst>
           </a:prstGeom>
           <a:solidFill>
             <a:srgbClr val="635BFF"/>
           </a:solidFill>
-          <a:ln w="12700">
+          <a:ln w="19050">
             <a:solidFill>
               <a:srgbClr val="635BFF"/>
             </a:solidFill>
@@ -6424,7 +6422,7 @@
               <a:buNone/>
             </a:pPr>
             <a:r>
-              <a:rPr lang="en-US" sz="1100" b="1" dirty="0">
+              <a:rPr lang="en-US" sz="1200" b="1" dirty="0">
                 <a:solidFill>
                   <a:srgbClr val="FFFFFF"/>
                 </a:solidFill>
@@ -6434,7 +6432,7 @@
               </a:rPr>
               <a:t>Explorer</a:t>
             </a:r>
-            <a:endParaRPr lang="en-US" sz="1100" dirty="0"/>
+            <a:endParaRPr lang="en-US" sz="1200" dirty="0"/>
           </a:p>
         </p:txBody>
       </p:sp>
@@ -6451,13 +6449,13 @@
           </a:xfrm>
           <a:prstGeom prst="roundRect">
             <a:avLst>
-              <a:gd name="adj" fmla="val 7143"/>
+              <a:gd name="adj" fmla="val 11429"/>
             </a:avLst>
           </a:prstGeom>
           <a:solidFill>
             <a:srgbClr val="635BFF"/>
           </a:solidFill>
-          <a:ln w="12700">
+          <a:ln w="19050">
             <a:solidFill>
               <a:srgbClr val="635BFF"/>
             </a:solidFill>
@@ -6490,7 +6488,7 @@
               <a:buNone/>
             </a:pPr>
             <a:r>
-              <a:rPr lang="en-US" sz="1100" b="1" dirty="0">
+              <a:rPr lang="en-US" sz="1200" b="1" dirty="0">
                 <a:solidFill>
                   <a:srgbClr val="FFFFFF"/>
                 </a:solidFill>
@@ -6500,7 +6498,7 @@
               </a:rPr>
               <a:t>Whisperer</a:t>
             </a:r>
-            <a:endParaRPr lang="en-US" sz="1100" dirty="0"/>
+            <a:endParaRPr lang="en-US" sz="1200" dirty="0"/>
           </a:p>
         </p:txBody>
       </p:sp>
@@ -6517,13 +6515,13 @@
           </a:xfrm>
           <a:prstGeom prst="roundRect">
             <a:avLst>
-              <a:gd name="adj" fmla="val 7143"/>
+              <a:gd name="adj" fmla="val 11429"/>
             </a:avLst>
           </a:prstGeom>
           <a:solidFill>
             <a:srgbClr val="635BFF"/>
           </a:solidFill>
-          <a:ln w="12700">
+          <a:ln w="19050">
             <a:solidFill>
               <a:srgbClr val="635BFF"/>
             </a:solidFill>
@@ -6556,7 +6554,7 @@
               <a:buNone/>
             </a:pPr>
             <a:r>
-              <a:rPr lang="en-US" sz="1100" b="1" dirty="0">
+              <a:rPr lang="en-US" sz="1200" b="1" dirty="0">
                 <a:solidFill>
                   <a:srgbClr val="FFFFFF"/>
                 </a:solidFill>
@@ -6566,7 +6564,7 @@
               </a:rPr>
               <a:t>Strategist</a:t>
             </a:r>
-            <a:endParaRPr lang="en-US" sz="1100" dirty="0"/>
+            <a:endParaRPr lang="en-US" sz="1200" dirty="0"/>
           </a:p>
         </p:txBody>
       </p:sp>
@@ -6583,13 +6581,13 @@
           </a:xfrm>
           <a:prstGeom prst="roundRect">
             <a:avLst>
-              <a:gd name="adj" fmla="val 7143"/>
+              <a:gd name="adj" fmla="val 11429"/>
             </a:avLst>
           </a:prstGeom>
           <a:solidFill>
             <a:srgbClr val="635BFF"/>
           </a:solidFill>
-          <a:ln w="12700">
+          <a:ln w="19050">
             <a:solidFill>
               <a:srgbClr val="635BFF"/>
             </a:solidFill>
@@ -6622,7 +6620,7 @@
               <a:buNone/>
             </a:pPr>
             <a:r>
-              <a:rPr lang="en-US" sz="1100" b="1" dirty="0">
+              <a:rPr lang="en-US" sz="1200" b="1" dirty="0">
                 <a:solidFill>
                   <a:srgbClr val="FFFFFF"/>
                 </a:solidFill>
@@ -6632,7 +6630,7 @@
               </a:rPr>
               <a:t>Operator</a:t>
             </a:r>
-            <a:endParaRPr lang="en-US" sz="1100" dirty="0"/>
+            <a:endParaRPr lang="en-US" sz="1200" dirty="0"/>
           </a:p>
         </p:txBody>
       </p:sp>
@@ -6649,13 +6647,13 @@
           </a:xfrm>
           <a:prstGeom prst="roundRect">
             <a:avLst>
-              <a:gd name="adj" fmla="val 7143"/>
+              <a:gd name="adj" fmla="val 11429"/>
             </a:avLst>
           </a:prstGeom>
           <a:solidFill>
             <a:srgbClr val="635BFF"/>
           </a:solidFill>
-          <a:ln w="12700">
+          <a:ln w="19050">
             <a:solidFill>
               <a:srgbClr val="635BFF"/>
             </a:solidFill>
@@ -6688,7 +6686,7 @@
               <a:buNone/>
             </a:pPr>
             <a:r>
-              <a:rPr lang="en-US" sz="1100" b="1" dirty="0">
+              <a:rPr lang="en-US" sz="1200" b="1" dirty="0">
                 <a:solidFill>
                   <a:srgbClr val="FFFFFF"/>
                 </a:solidFill>
@@ -6698,7 +6696,7 @@
               </a:rPr>
               <a:t>Orchestrator</a:t>
             </a:r>
-            <a:endParaRPr lang="en-US" sz="1100" dirty="0"/>
+            <a:endParaRPr lang="en-US" sz="1200" dirty="0"/>
           </a:p>
         </p:txBody>
       </p:sp>
@@ -6715,13 +6713,13 @@
           </a:xfrm>
           <a:prstGeom prst="roundRect">
             <a:avLst>
-              <a:gd name="adj" fmla="val 7143"/>
+              <a:gd name="adj" fmla="val 11429"/>
             </a:avLst>
           </a:prstGeom>
           <a:solidFill>
             <a:srgbClr val="0A2540"/>
           </a:solidFill>
-          <a:ln w="12700">
+          <a:ln w="19050">
             <a:solidFill>
               <a:srgbClr val="8B95A5"/>
             </a:solidFill>
@@ -6754,7 +6752,7 @@
               <a:buNone/>
             </a:pPr>
             <a:r>
-              <a:rPr lang="en-US" sz="1100" dirty="0">
+              <a:rPr lang="en-US" sz="1200" dirty="0">
                 <a:solidFill>
                   <a:srgbClr val="8B95A5"/>
                 </a:solidFill>
@@ -6764,7 +6762,7 @@
               </a:rPr>
               <a:t>Builder</a:t>
             </a:r>
-            <a:endParaRPr lang="en-US" sz="1100" dirty="0"/>
+            <a:endParaRPr lang="en-US" sz="1200" dirty="0"/>
           </a:p>
         </p:txBody>
       </p:sp>
@@ -6996,23 +6994,18 @@
         </p:nvSpPr>
         <p:spPr>
           <a:xfrm>
-            <a:off x="365760" y="1645920"/>
-            <a:ext cx="1828800" cy="914400"/>
+            <a:off x="457200" y="2011680"/>
+            <a:ext cx="1645920" cy="822960"/>
           </a:xfrm>
           <a:prstGeom prst="roundRect">
             <a:avLst>
-              <a:gd name="adj" fmla="val 5000"/>
+              <a:gd name="adj" fmla="val 11111"/>
             </a:avLst>
           </a:prstGeom>
           <a:solidFill>
             <a:srgbClr val="635BFF"/>
           </a:solidFill>
-          <a:ln w="12700">
-            <a:solidFill>
-              <a:srgbClr val="635BFF"/>
-            </a:solidFill>
-            <a:prstDash val="solid"/>
-          </a:ln>
+          <a:ln/>
         </p:spPr>
       </p:sp>
       <p:sp>
@@ -7023,8 +7016,8 @@
         </p:nvSpPr>
         <p:spPr>
           <a:xfrm>
-            <a:off x="365760" y="1645920"/>
-            <a:ext cx="1828800" cy="914400"/>
+            <a:off x="457200" y="2011680"/>
+            <a:ext cx="1645920" cy="822960"/>
           </a:xfrm>
           <a:prstGeom prst="rect">
             <a:avLst/>
@@ -7040,7 +7033,7 @@
               <a:buNone/>
             </a:pPr>
             <a:r>
-              <a:rPr lang="en-US" sz="1400" b="1" dirty="0">
+              <a:rPr lang="en-US" sz="1800" b="1" dirty="0">
                 <a:solidFill>
                   <a:srgbClr val="FFFFFF"/>
                 </a:solidFill>
@@ -7050,7 +7043,7 @@
               </a:rPr>
               <a:t>You search</a:t>
             </a:r>
-            <a:endParaRPr lang="en-US" sz="1400" dirty="0"/>
+            <a:endParaRPr lang="en-US" sz="1800" dirty="0"/>
           </a:p>
         </p:txBody>
       </p:sp>
@@ -7062,8 +7055,8 @@
         </p:nvSpPr>
         <p:spPr>
           <a:xfrm>
-            <a:off x="2194560" y="1645920"/>
-            <a:ext cx="365760" cy="914400"/>
+            <a:off x="2103120" y="2011680"/>
+            <a:ext cx="548640" cy="822960"/>
           </a:xfrm>
           <a:prstGeom prst="rect">
             <a:avLst/>
@@ -7079,7 +7072,7 @@
               <a:buNone/>
             </a:pPr>
             <a:r>
-              <a:rPr lang="en-US" sz="2200" dirty="0">
+              <a:rPr lang="en-US" sz="2800" b="1" dirty="0">
                 <a:solidFill>
                   <a:srgbClr val="635BFF"/>
                 </a:solidFill>
@@ -7089,7 +7082,7 @@
               </a:rPr>
               <a:t>→</a:t>
             </a:r>
-            <a:endParaRPr lang="en-US" sz="2200" dirty="0"/>
+            <a:endParaRPr lang="en-US" sz="2800" dirty="0"/>
           </a:p>
         </p:txBody>
       </p:sp>
@@ -7101,23 +7094,18 @@
         </p:nvSpPr>
         <p:spPr>
           <a:xfrm>
-            <a:off x="2560320" y="1645920"/>
-            <a:ext cx="1828800" cy="914400"/>
+            <a:off x="2651760" y="2011680"/>
+            <a:ext cx="1645920" cy="822960"/>
           </a:xfrm>
           <a:prstGeom prst="roundRect">
             <a:avLst>
-              <a:gd name="adj" fmla="val 5000"/>
+              <a:gd name="adj" fmla="val 11111"/>
             </a:avLst>
           </a:prstGeom>
           <a:solidFill>
             <a:srgbClr val="635BFF"/>
           </a:solidFill>
-          <a:ln w="12700">
-            <a:solidFill>
-              <a:srgbClr val="635BFF"/>
-            </a:solidFill>
-            <a:prstDash val="solid"/>
-          </a:ln>
+          <a:ln/>
         </p:spPr>
       </p:sp>
       <p:sp>
@@ -7128,8 +7116,8 @@
         </p:nvSpPr>
         <p:spPr>
           <a:xfrm>
-            <a:off x="2560320" y="1645920"/>
-            <a:ext cx="1828800" cy="914400"/>
+            <a:off x="2651760" y="2011680"/>
+            <a:ext cx="1645920" cy="822960"/>
           </a:xfrm>
           <a:prstGeom prst="rect">
             <a:avLst/>
@@ -7145,7 +7133,7 @@
               <a:buNone/>
             </a:pPr>
             <a:r>
-              <a:rPr lang="en-US" sz="1400" b="1" dirty="0">
+              <a:rPr lang="en-US" sz="1800" b="1" dirty="0">
                 <a:solidFill>
                   <a:srgbClr val="FFFFFF"/>
                 </a:solidFill>
@@ -7155,7 +7143,7 @@
               </a:rPr>
               <a:t>You paste</a:t>
             </a:r>
-            <a:endParaRPr lang="en-US" sz="1400" dirty="0"/>
+            <a:endParaRPr lang="en-US" sz="1800" dirty="0"/>
           </a:p>
         </p:txBody>
       </p:sp>
@@ -7167,8 +7155,8 @@
         </p:nvSpPr>
         <p:spPr>
           <a:xfrm>
-            <a:off x="4389120" y="1645920"/>
-            <a:ext cx="365760" cy="914400"/>
+            <a:off x="4297680" y="2011680"/>
+            <a:ext cx="548640" cy="822960"/>
           </a:xfrm>
           <a:prstGeom prst="rect">
             <a:avLst/>
@@ -7184,7 +7172,7 @@
               <a:buNone/>
             </a:pPr>
             <a:r>
-              <a:rPr lang="en-US" sz="2200" dirty="0">
+              <a:rPr lang="en-US" sz="2800" b="1" dirty="0">
                 <a:solidFill>
                   <a:srgbClr val="635BFF"/>
                 </a:solidFill>
@@ -7194,7 +7182,7 @@
               </a:rPr>
               <a:t>→</a:t>
             </a:r>
-            <a:endParaRPr lang="en-US" sz="2200" dirty="0"/>
+            <a:endParaRPr lang="en-US" sz="2800" dirty="0"/>
           </a:p>
         </p:txBody>
       </p:sp>
@@ -7206,23 +7194,18 @@
         </p:nvSpPr>
         <p:spPr>
           <a:xfrm>
-            <a:off x="4754880" y="1645920"/>
-            <a:ext cx="1828800" cy="914400"/>
+            <a:off x="4846320" y="2011680"/>
+            <a:ext cx="1645920" cy="822960"/>
           </a:xfrm>
           <a:prstGeom prst="roundRect">
             <a:avLst>
-              <a:gd name="adj" fmla="val 5000"/>
+              <a:gd name="adj" fmla="val 11111"/>
             </a:avLst>
           </a:prstGeom>
           <a:solidFill>
             <a:srgbClr val="635BFF"/>
           </a:solidFill>
-          <a:ln w="12700">
-            <a:solidFill>
-              <a:srgbClr val="635BFF"/>
-            </a:solidFill>
-            <a:prstDash val="solid"/>
-          </a:ln>
+          <a:ln/>
         </p:spPr>
       </p:sp>
       <p:sp>
@@ -7233,8 +7216,8 @@
         </p:nvSpPr>
         <p:spPr>
           <a:xfrm>
-            <a:off x="4754880" y="1645920"/>
-            <a:ext cx="1828800" cy="914400"/>
+            <a:off x="4846320" y="2011680"/>
+            <a:ext cx="1645920" cy="822960"/>
           </a:xfrm>
           <a:prstGeom prst="rect">
             <a:avLst/>
@@ -7250,7 +7233,7 @@
               <a:buNone/>
             </a:pPr>
             <a:r>
-              <a:rPr lang="en-US" sz="1400" b="1" dirty="0">
+              <a:rPr lang="en-US" sz="1800" b="1" dirty="0">
                 <a:solidFill>
                   <a:srgbClr val="FFFFFF"/>
                 </a:solidFill>
@@ -7260,7 +7243,7 @@
               </a:rPr>
               <a:t>AI drafts</a:t>
             </a:r>
-            <a:endParaRPr lang="en-US" sz="1400" dirty="0"/>
+            <a:endParaRPr lang="en-US" sz="1800" dirty="0"/>
           </a:p>
         </p:txBody>
       </p:sp>
@@ -7272,8 +7255,8 @@
         </p:nvSpPr>
         <p:spPr>
           <a:xfrm>
-            <a:off x="6583680" y="1645920"/>
-            <a:ext cx="365760" cy="914400"/>
+            <a:off x="6492240" y="2011680"/>
+            <a:ext cx="548640" cy="822960"/>
           </a:xfrm>
           <a:prstGeom prst="rect">
             <a:avLst/>
@@ -7289,7 +7272,7 @@
               <a:buNone/>
             </a:pPr>
             <a:r>
-              <a:rPr lang="en-US" sz="2200" dirty="0">
+              <a:rPr lang="en-US" sz="2800" b="1" dirty="0">
                 <a:solidFill>
                   <a:srgbClr val="635BFF"/>
                 </a:solidFill>
@@ -7299,7 +7282,7 @@
               </a:rPr>
               <a:t>→</a:t>
             </a:r>
-            <a:endParaRPr lang="en-US" sz="2200" dirty="0"/>
+            <a:endParaRPr lang="en-US" sz="2800" dirty="0"/>
           </a:p>
         </p:txBody>
       </p:sp>
@@ -7311,23 +7294,18 @@
         </p:nvSpPr>
         <p:spPr>
           <a:xfrm>
-            <a:off x="6949440" y="1645920"/>
-            <a:ext cx="1828800" cy="914400"/>
+            <a:off x="7040880" y="2011680"/>
+            <a:ext cx="1645920" cy="822960"/>
           </a:xfrm>
           <a:prstGeom prst="roundRect">
             <a:avLst>
-              <a:gd name="adj" fmla="val 5000"/>
+              <a:gd name="adj" fmla="val 11111"/>
             </a:avLst>
           </a:prstGeom>
           <a:solidFill>
             <a:srgbClr val="635BFF"/>
           </a:solidFill>
-          <a:ln w="12700">
-            <a:solidFill>
-              <a:srgbClr val="635BFF"/>
-            </a:solidFill>
-            <a:prstDash val="solid"/>
-          </a:ln>
+          <a:ln/>
         </p:spPr>
       </p:sp>
       <p:sp>
@@ -7338,8 +7316,8 @@
         </p:nvSpPr>
         <p:spPr>
           <a:xfrm>
-            <a:off x="6949440" y="1645920"/>
-            <a:ext cx="1828800" cy="914400"/>
+            <a:off x="7040880" y="2011680"/>
+            <a:ext cx="1645920" cy="822960"/>
           </a:xfrm>
           <a:prstGeom prst="rect">
             <a:avLst/>
@@ -7355,7 +7333,7 @@
               <a:buNone/>
             </a:pPr>
             <a:r>
-              <a:rPr lang="en-US" sz="1400" b="1" dirty="0">
+              <a:rPr lang="en-US" sz="1800" b="1" dirty="0">
                 <a:solidFill>
                   <a:srgbClr val="FFFFFF"/>
                 </a:solidFill>
@@ -7365,7 +7343,7 @@
               </a:rPr>
               <a:t>You apply</a:t>
             </a:r>
-            <a:endParaRPr lang="en-US" sz="1400" dirty="0"/>
+            <a:endParaRPr lang="en-US" sz="1800" dirty="0"/>
           </a:p>
         </p:txBody>
       </p:sp>
@@ -7377,7 +7355,7 @@
         </p:nvSpPr>
         <p:spPr>
           <a:xfrm>
-            <a:off x="914400" y="3017520"/>
+            <a:off x="914400" y="3291840"/>
             <a:ext cx="7315200" cy="548640"/>
           </a:xfrm>
           <a:prstGeom prst="rect">
@@ -7580,18 +7558,18 @@
         </p:nvSpPr>
         <p:spPr>
           <a:xfrm>
-            <a:off x="365760" y="1645920"/>
-            <a:ext cx="1828800" cy="914400"/>
+            <a:off x="457200" y="2011680"/>
+            <a:ext cx="1645920" cy="822960"/>
           </a:xfrm>
           <a:prstGeom prst="roundRect">
             <a:avLst>
-              <a:gd name="adj" fmla="val 5000"/>
+              <a:gd name="adj" fmla="val 11111"/>
             </a:avLst>
           </a:prstGeom>
           <a:solidFill>
             <a:srgbClr val="0A2540"/>
           </a:solidFill>
-          <a:ln w="12700">
+          <a:ln w="19050">
             <a:solidFill>
               <a:srgbClr val="8B95A5"/>
             </a:solidFill>
@@ -7607,8 +7585,8 @@
         </p:nvSpPr>
         <p:spPr>
           <a:xfrm>
-            <a:off x="365760" y="1645920"/>
-            <a:ext cx="1828800" cy="914400"/>
+            <a:off x="457200" y="2011680"/>
+            <a:ext cx="1645920" cy="822960"/>
           </a:xfrm>
           <a:prstGeom prst="rect">
             <a:avLst/>
@@ -7624,7 +7602,7 @@
               <a:buNone/>
             </a:pPr>
             <a:r>
-              <a:rPr lang="en-US" sz="1400" dirty="0">
+              <a:rPr lang="en-US" sz="1800" b="1" dirty="0">
                 <a:solidFill>
                   <a:srgbClr val="EDEDED"/>
                 </a:solidFill>
@@ -7634,7 +7612,7 @@
               </a:rPr>
               <a:t>Agent retrieves</a:t>
             </a:r>
-            <a:endParaRPr lang="en-US" sz="1400" dirty="0"/>
+            <a:endParaRPr lang="en-US" sz="1800" dirty="0"/>
           </a:p>
         </p:txBody>
       </p:sp>
@@ -7646,8 +7624,8 @@
         </p:nvSpPr>
         <p:spPr>
           <a:xfrm>
-            <a:off x="2194560" y="1645920"/>
-            <a:ext cx="365760" cy="914400"/>
+            <a:off x="2103120" y="2011680"/>
+            <a:ext cx="548640" cy="822960"/>
           </a:xfrm>
           <a:prstGeom prst="rect">
             <a:avLst/>
@@ -7663,7 +7641,7 @@
               <a:buNone/>
             </a:pPr>
             <a:r>
-              <a:rPr lang="en-US" sz="2200" dirty="0">
+              <a:rPr lang="en-US" sz="2800" b="1" dirty="0">
                 <a:solidFill>
                   <a:srgbClr val="635BFF"/>
                 </a:solidFill>
@@ -7673,7 +7651,7 @@
               </a:rPr>
               <a:t>→</a:t>
             </a:r>
-            <a:endParaRPr lang="en-US" sz="2200" dirty="0"/>
+            <a:endParaRPr lang="en-US" sz="2800" dirty="0"/>
           </a:p>
         </p:txBody>
       </p:sp>
@@ -7685,18 +7663,18 @@
         </p:nvSpPr>
         <p:spPr>
           <a:xfrm>
-            <a:off x="2560320" y="1645920"/>
-            <a:ext cx="1828800" cy="914400"/>
+            <a:off x="2651760" y="2011680"/>
+            <a:ext cx="1645920" cy="822960"/>
           </a:xfrm>
           <a:prstGeom prst="roundRect">
             <a:avLst>
-              <a:gd name="adj" fmla="val 5000"/>
+              <a:gd name="adj" fmla="val 11111"/>
             </a:avLst>
           </a:prstGeom>
           <a:solidFill>
             <a:srgbClr val="0A2540"/>
           </a:solidFill>
-          <a:ln w="12700">
+          <a:ln w="19050">
             <a:solidFill>
               <a:srgbClr val="8B95A5"/>
             </a:solidFill>
@@ -7712,8 +7690,8 @@
         </p:nvSpPr>
         <p:spPr>
           <a:xfrm>
-            <a:off x="2560320" y="1645920"/>
-            <a:ext cx="1828800" cy="914400"/>
+            <a:off x="2651760" y="2011680"/>
+            <a:ext cx="1645920" cy="822960"/>
           </a:xfrm>
           <a:prstGeom prst="rect">
             <a:avLst/>
@@ -7729,7 +7707,7 @@
               <a:buNone/>
             </a:pPr>
             <a:r>
-              <a:rPr lang="en-US" sz="1400" dirty="0">
+              <a:rPr lang="en-US" sz="1800" b="1" dirty="0">
                 <a:solidFill>
                   <a:srgbClr val="EDEDED"/>
                 </a:solidFill>
@@ -7739,7 +7717,7 @@
               </a:rPr>
               <a:t>Agent identifies</a:t>
             </a:r>
-            <a:endParaRPr lang="en-US" sz="1400" dirty="0"/>
+            <a:endParaRPr lang="en-US" sz="1800" dirty="0"/>
           </a:p>
         </p:txBody>
       </p:sp>
@@ -7751,8 +7729,8 @@
         </p:nvSpPr>
         <p:spPr>
           <a:xfrm>
-            <a:off x="4389120" y="1645920"/>
-            <a:ext cx="365760" cy="914400"/>
+            <a:off x="4297680" y="2011680"/>
+            <a:ext cx="548640" cy="822960"/>
           </a:xfrm>
           <a:prstGeom prst="rect">
             <a:avLst/>
@@ -7768,7 +7746,7 @@
               <a:buNone/>
             </a:pPr>
             <a:r>
-              <a:rPr lang="en-US" sz="2200" dirty="0">
+              <a:rPr lang="en-US" sz="2800" b="1" dirty="0">
                 <a:solidFill>
                   <a:srgbClr val="635BFF"/>
                 </a:solidFill>
@@ -7778,7 +7756,7 @@
               </a:rPr>
               <a:t>→</a:t>
             </a:r>
-            <a:endParaRPr lang="en-US" sz="2200" dirty="0"/>
+            <a:endParaRPr lang="en-US" sz="2800" dirty="0"/>
           </a:p>
         </p:txBody>
       </p:sp>
@@ -7790,18 +7768,18 @@
         </p:nvSpPr>
         <p:spPr>
           <a:xfrm>
-            <a:off x="4754880" y="1645920"/>
-            <a:ext cx="1828800" cy="914400"/>
+            <a:off x="4846320" y="2011680"/>
+            <a:ext cx="1645920" cy="822960"/>
           </a:xfrm>
           <a:prstGeom prst="roundRect">
             <a:avLst>
-              <a:gd name="adj" fmla="val 5000"/>
+              <a:gd name="adj" fmla="val 11111"/>
             </a:avLst>
           </a:prstGeom>
           <a:solidFill>
             <a:srgbClr val="0A2540"/>
           </a:solidFill>
-          <a:ln w="12700">
+          <a:ln w="19050">
             <a:solidFill>
               <a:srgbClr val="8B95A5"/>
             </a:solidFill>
@@ -7817,8 +7795,8 @@
         </p:nvSpPr>
         <p:spPr>
           <a:xfrm>
-            <a:off x="4754880" y="1645920"/>
-            <a:ext cx="1828800" cy="914400"/>
+            <a:off x="4846320" y="2011680"/>
+            <a:ext cx="1645920" cy="822960"/>
           </a:xfrm>
           <a:prstGeom prst="rect">
             <a:avLst/>
@@ -7834,7 +7812,7 @@
               <a:buNone/>
             </a:pPr>
             <a:r>
-              <a:rPr lang="en-US" sz="1400" dirty="0">
+              <a:rPr lang="en-US" sz="1800" b="1" dirty="0">
                 <a:solidFill>
                   <a:srgbClr val="EDEDED"/>
                 </a:solidFill>
@@ -7844,7 +7822,7 @@
               </a:rPr>
               <a:t>Agent creates</a:t>
             </a:r>
-            <a:endParaRPr lang="en-US" sz="1400" dirty="0"/>
+            <a:endParaRPr lang="en-US" sz="1800" dirty="0"/>
           </a:p>
         </p:txBody>
       </p:sp>
@@ -7856,8 +7834,8 @@
         </p:nvSpPr>
         <p:spPr>
           <a:xfrm>
-            <a:off x="6583680" y="1645920"/>
-            <a:ext cx="365760" cy="914400"/>
+            <a:off x="6492240" y="2011680"/>
+            <a:ext cx="548640" cy="822960"/>
           </a:xfrm>
           <a:prstGeom prst="rect">
             <a:avLst/>
@@ -7873,7 +7851,7 @@
               <a:buNone/>
             </a:pPr>
             <a:r>
-              <a:rPr lang="en-US" sz="2200" dirty="0">
+              <a:rPr lang="en-US" sz="2800" b="1" dirty="0">
                 <a:solidFill>
                   <a:srgbClr val="635BFF"/>
                 </a:solidFill>
@@ -7883,7 +7861,7 @@
               </a:rPr>
               <a:t>→</a:t>
             </a:r>
-            <a:endParaRPr lang="en-US" sz="2200" dirty="0"/>
+            <a:endParaRPr lang="en-US" sz="2800" dirty="0"/>
           </a:p>
         </p:txBody>
       </p:sp>
@@ -7895,23 +7873,18 @@
         </p:nvSpPr>
         <p:spPr>
           <a:xfrm>
-            <a:off x="6949440" y="1645920"/>
-            <a:ext cx="1828800" cy="914400"/>
+            <a:off x="7040880" y="2011680"/>
+            <a:ext cx="1645920" cy="822960"/>
           </a:xfrm>
           <a:prstGeom prst="roundRect">
             <a:avLst>
-              <a:gd name="adj" fmla="val 5000"/>
+              <a:gd name="adj" fmla="val 11111"/>
             </a:avLst>
           </a:prstGeom>
           <a:solidFill>
             <a:srgbClr val="635BFF"/>
           </a:solidFill>
-          <a:ln w="12700">
-            <a:solidFill>
-              <a:srgbClr val="635BFF"/>
-            </a:solidFill>
-            <a:prstDash val="solid"/>
-          </a:ln>
+          <a:ln/>
         </p:spPr>
       </p:sp>
       <p:sp>
@@ -7922,8 +7895,8 @@
         </p:nvSpPr>
         <p:spPr>
           <a:xfrm>
-            <a:off x="6949440" y="1645920"/>
-            <a:ext cx="1828800" cy="914400"/>
+            <a:off x="7040880" y="2011680"/>
+            <a:ext cx="1645920" cy="822960"/>
           </a:xfrm>
           <a:prstGeom prst="rect">
             <a:avLst/>
@@ -7939,7 +7912,7 @@
               <a:buNone/>
             </a:pPr>
             <a:r>
-              <a:rPr lang="en-US" sz="1400" b="1" dirty="0">
+              <a:rPr lang="en-US" sz="1800" b="1" dirty="0">
                 <a:solidFill>
                   <a:srgbClr val="FFFFFF"/>
                 </a:solidFill>
@@ -7949,7 +7922,7 @@
               </a:rPr>
               <a:t>You review</a:t>
             </a:r>
-            <a:endParaRPr lang="en-US" sz="1400" dirty="0"/>
+            <a:endParaRPr lang="en-US" sz="1800" dirty="0"/>
           </a:p>
         </p:txBody>
       </p:sp>
@@ -7961,7 +7934,7 @@
         </p:nvSpPr>
         <p:spPr>
           <a:xfrm>
-            <a:off x="914400" y="3017520"/>
+            <a:off x="914400" y="3291840"/>
             <a:ext cx="7315200" cy="548640"/>
           </a:xfrm>
           <a:prstGeom prst="rect">
@@ -8181,7 +8154,7 @@
         </p:nvSpPr>
         <p:spPr>
           <a:xfrm>
-            <a:off x="731520" y="548640"/>
+            <a:off x="731520" y="365760"/>
             <a:ext cx="7680960" cy="1097280"/>
           </a:xfrm>
           <a:prstGeom prst="rect">
@@ -8229,43 +8202,40 @@
           </a:p>
         </p:txBody>
       </p:sp>
-      <p:sp>
-        <p:nvSpPr>
-          <p:cNvPr id="4" name="Shape 2"/>
-          <p:cNvSpPr/>
-          <p:nvPr/>
-        </p:nvSpPr>
-        <p:spPr>
-          <a:xfrm>
-            <a:off x="822960" y="2286000"/>
-            <a:ext cx="1097280" cy="457200"/>
-          </a:xfrm>
-          <a:prstGeom prst="roundRect">
-            <a:avLst>
-              <a:gd name="adj" fmla="val 10000"/>
-            </a:avLst>
-          </a:prstGeom>
-          <a:solidFill>
-            <a:srgbClr val="0A2540"/>
-          </a:solidFill>
-          <a:ln w="19050">
-            <a:solidFill>
-              <a:srgbClr val="635BFF"/>
-            </a:solidFill>
-            <a:prstDash val="solid"/>
-          </a:ln>
-        </p:spPr>
-      </p:sp>
-      <p:sp>
-        <p:nvSpPr>
-          <p:cNvPr id="5" name="Text 3"/>
-          <p:cNvSpPr/>
-          <p:nvPr/>
-        </p:nvSpPr>
-        <p:spPr>
-          <a:xfrm>
-            <a:off x="822960" y="2286000"/>
-            <a:ext cx="1097280" cy="457200"/>
+      <p:pic>
+        <p:nvPicPr>
+          <p:cNvPr id="4" name="Image 0" descr="/Users/michaelengland/Developer/michaelengland/ai-best-practices/decks/ai-best-practices/icons/envelopeW.png">    </p:cNvPr>
+          <p:cNvPicPr>
+            <a:picLocks noChangeAspect="1"/>
+          </p:cNvPicPr>
+          <p:nvPr/>
+        </p:nvPicPr>
+        <p:blipFill>
+          <a:blip r:embed="rId1"/>
+          <a:stretch>
+            <a:fillRect/>
+          </a:stretch>
+        </p:blipFill>
+        <p:spPr>
+          <a:xfrm>
+            <a:off x="1005840" y="1645920"/>
+            <a:ext cx="731520" cy="731520"/>
+          </a:xfrm>
+          <a:prstGeom prst="rect">
+            <a:avLst/>
+          </a:prstGeom>
+        </p:spPr>
+      </p:pic>
+      <p:sp>
+        <p:nvSpPr>
+          <p:cNvPr id="5" name="Text 2"/>
+          <p:cNvSpPr/>
+          <p:nvPr/>
+        </p:nvSpPr>
+        <p:spPr>
+          <a:xfrm>
+            <a:off x="731520" y="2560320"/>
+            <a:ext cx="1280160" cy="548640"/>
           </a:xfrm>
           <a:prstGeom prst="rect">
             <a:avLst/>
@@ -8274,16 +8244,16 @@
           <a:ln/>
         </p:spPr>
         <p:txBody>
-          <a:bodyPr wrap="square" lIns="0" tIns="0" rIns="0" bIns="0" rtlCol="0" anchor="ctr"/>
-          <a:lstStyle/>
-          <a:p>
-            <a:pPr algn="ctr" indent="0" marL="0">
-              <a:buNone/>
-            </a:pPr>
-            <a:r>
-              <a:rPr lang="en-US" sz="1400" b="1" dirty="0">
-                <a:solidFill>
-                  <a:srgbClr val="635BFF"/>
+          <a:bodyPr wrap="square" lIns="0" tIns="0" rIns="0" bIns="0" rtlCol="0" anchor="t"/>
+          <a:lstStyle/>
+          <a:p>
+            <a:pPr algn="ctr" indent="0" marL="0">
+              <a:buNone/>
+            </a:pPr>
+            <a:r>
+              <a:rPr lang="en-US" sz="2000" dirty="0">
+                <a:solidFill>
+                  <a:srgbClr val="8B95A5"/>
                 </a:solidFill>
                 <a:latin typeface="Verdana" pitchFamily="34" charset="0"/>
                 <a:ea typeface="Verdana" pitchFamily="34" charset="-122"/>
@@ -8291,47 +8261,44 @@
               </a:rPr>
               <a:t>Email</a:t>
             </a:r>
-            <a:endParaRPr lang="en-US" sz="1400" dirty="0"/>
-          </a:p>
-        </p:txBody>
-      </p:sp>
-      <p:sp>
-        <p:nvSpPr>
-          <p:cNvPr id="6" name="Shape 4"/>
-          <p:cNvSpPr/>
-          <p:nvPr/>
-        </p:nvSpPr>
-        <p:spPr>
-          <a:xfrm>
-            <a:off x="2103120" y="2286000"/>
-            <a:ext cx="1097280" cy="457200"/>
-          </a:xfrm>
-          <a:prstGeom prst="roundRect">
-            <a:avLst>
-              <a:gd name="adj" fmla="val 10000"/>
-            </a:avLst>
-          </a:prstGeom>
-          <a:solidFill>
-            <a:srgbClr val="0A2540"/>
-          </a:solidFill>
-          <a:ln w="19050">
-            <a:solidFill>
-              <a:srgbClr val="635BFF"/>
-            </a:solidFill>
-            <a:prstDash val="solid"/>
-          </a:ln>
-        </p:spPr>
-      </p:sp>
-      <p:sp>
-        <p:nvSpPr>
-          <p:cNvPr id="7" name="Text 5"/>
-          <p:cNvSpPr/>
-          <p:nvPr/>
-        </p:nvSpPr>
-        <p:spPr>
-          <a:xfrm>
-            <a:off x="2103120" y="2286000"/>
-            <a:ext cx="1097280" cy="457200"/>
+            <a:endParaRPr lang="en-US" sz="2000" dirty="0"/>
+          </a:p>
+        </p:txBody>
+      </p:sp>
+      <p:pic>
+        <p:nvPicPr>
+          <p:cNvPr id="6" name="Image 1" descr="/Users/michaelengland/Developer/michaelengland/ai-best-practices/decks/ai-best-practices/icons/calendarW.png">    </p:cNvPr>
+          <p:cNvPicPr>
+            <a:picLocks noChangeAspect="1"/>
+          </p:cNvPicPr>
+          <p:nvPr/>
+        </p:nvPicPr>
+        <p:blipFill>
+          <a:blip r:embed="rId2"/>
+          <a:stretch>
+            <a:fillRect/>
+          </a:stretch>
+        </p:blipFill>
+        <p:spPr>
+          <a:xfrm>
+            <a:off x="2286000" y="1645920"/>
+            <a:ext cx="731520" cy="731520"/>
+          </a:xfrm>
+          <a:prstGeom prst="rect">
+            <a:avLst/>
+          </a:prstGeom>
+        </p:spPr>
+      </p:pic>
+      <p:sp>
+        <p:nvSpPr>
+          <p:cNvPr id="7" name="Text 3"/>
+          <p:cNvSpPr/>
+          <p:nvPr/>
+        </p:nvSpPr>
+        <p:spPr>
+          <a:xfrm>
+            <a:off x="2011680" y="2560320"/>
+            <a:ext cx="1280160" cy="548640"/>
           </a:xfrm>
           <a:prstGeom prst="rect">
             <a:avLst/>
@@ -8340,16 +8307,16 @@
           <a:ln/>
         </p:spPr>
         <p:txBody>
-          <a:bodyPr wrap="square" lIns="0" tIns="0" rIns="0" bIns="0" rtlCol="0" anchor="ctr"/>
-          <a:lstStyle/>
-          <a:p>
-            <a:pPr algn="ctr" indent="0" marL="0">
-              <a:buNone/>
-            </a:pPr>
-            <a:r>
-              <a:rPr lang="en-US" sz="1400" b="1" dirty="0">
-                <a:solidFill>
-                  <a:srgbClr val="635BFF"/>
+          <a:bodyPr wrap="square" lIns="0" tIns="0" rIns="0" bIns="0" rtlCol="0" anchor="t"/>
+          <a:lstStyle/>
+          <a:p>
+            <a:pPr algn="ctr" indent="0" marL="0">
+              <a:buNone/>
+            </a:pPr>
+            <a:r>
+              <a:rPr lang="en-US" sz="2000" dirty="0">
+                <a:solidFill>
+                  <a:srgbClr val="8B95A5"/>
                 </a:solidFill>
                 <a:latin typeface="Verdana" pitchFamily="34" charset="0"/>
                 <a:ea typeface="Verdana" pitchFamily="34" charset="-122"/>
@@ -8357,47 +8324,44 @@
               </a:rPr>
               <a:t>Calendar</a:t>
             </a:r>
-            <a:endParaRPr lang="en-US" sz="1400" dirty="0"/>
-          </a:p>
-        </p:txBody>
-      </p:sp>
-      <p:sp>
-        <p:nvSpPr>
-          <p:cNvPr id="8" name="Shape 6"/>
-          <p:cNvSpPr/>
-          <p:nvPr/>
-        </p:nvSpPr>
-        <p:spPr>
-          <a:xfrm>
-            <a:off x="3383280" y="2286000"/>
-            <a:ext cx="1097280" cy="457200"/>
-          </a:xfrm>
-          <a:prstGeom prst="roundRect">
-            <a:avLst>
-              <a:gd name="adj" fmla="val 10000"/>
-            </a:avLst>
-          </a:prstGeom>
-          <a:solidFill>
-            <a:srgbClr val="0A2540"/>
-          </a:solidFill>
-          <a:ln w="19050">
-            <a:solidFill>
-              <a:srgbClr val="635BFF"/>
-            </a:solidFill>
-            <a:prstDash val="solid"/>
-          </a:ln>
-        </p:spPr>
-      </p:sp>
-      <p:sp>
-        <p:nvSpPr>
-          <p:cNvPr id="9" name="Text 7"/>
-          <p:cNvSpPr/>
-          <p:nvPr/>
-        </p:nvSpPr>
-        <p:spPr>
-          <a:xfrm>
-            <a:off x="3383280" y="2286000"/>
-            <a:ext cx="1097280" cy="457200"/>
+            <a:endParaRPr lang="en-US" sz="2000" dirty="0"/>
+          </a:p>
+        </p:txBody>
+      </p:sp>
+      <p:pic>
+        <p:nvPicPr>
+          <p:cNvPr id="8" name="Image 2" descr="/Users/michaelengland/Developer/michaelengland/ai-best-practices/decks/ai-best-practices/icons/fileW.png">    </p:cNvPr>
+          <p:cNvPicPr>
+            <a:picLocks noChangeAspect="1"/>
+          </p:cNvPicPr>
+          <p:nvPr/>
+        </p:nvPicPr>
+        <p:blipFill>
+          <a:blip r:embed="rId3"/>
+          <a:stretch>
+            <a:fillRect/>
+          </a:stretch>
+        </p:blipFill>
+        <p:spPr>
+          <a:xfrm>
+            <a:off x="3566160" y="1645920"/>
+            <a:ext cx="731520" cy="731520"/>
+          </a:xfrm>
+          <a:prstGeom prst="rect">
+            <a:avLst/>
+          </a:prstGeom>
+        </p:spPr>
+      </p:pic>
+      <p:sp>
+        <p:nvSpPr>
+          <p:cNvPr id="9" name="Text 4"/>
+          <p:cNvSpPr/>
+          <p:nvPr/>
+        </p:nvSpPr>
+        <p:spPr>
+          <a:xfrm>
+            <a:off x="3291840" y="2560320"/>
+            <a:ext cx="1280160" cy="548640"/>
           </a:xfrm>
           <a:prstGeom prst="rect">
             <a:avLst/>
@@ -8406,16 +8370,16 @@
           <a:ln/>
         </p:spPr>
         <p:txBody>
-          <a:bodyPr wrap="square" lIns="0" tIns="0" rIns="0" bIns="0" rtlCol="0" anchor="ctr"/>
-          <a:lstStyle/>
-          <a:p>
-            <a:pPr algn="ctr" indent="0" marL="0">
-              <a:buNone/>
-            </a:pPr>
-            <a:r>
-              <a:rPr lang="en-US" sz="1400" b="1" dirty="0">
-                <a:solidFill>
-                  <a:srgbClr val="635BFF"/>
+          <a:bodyPr wrap="square" lIns="0" tIns="0" rIns="0" bIns="0" rtlCol="0" anchor="t"/>
+          <a:lstStyle/>
+          <a:p>
+            <a:pPr algn="ctr" indent="0" marL="0">
+              <a:buNone/>
+            </a:pPr>
+            <a:r>
+              <a:rPr lang="en-US" sz="2000" dirty="0">
+                <a:solidFill>
+                  <a:srgbClr val="8B95A5"/>
                 </a:solidFill>
                 <a:latin typeface="Verdana" pitchFamily="34" charset="0"/>
                 <a:ea typeface="Verdana" pitchFamily="34" charset="-122"/>
@@ -8423,47 +8387,44 @@
               </a:rPr>
               <a:t>Files</a:t>
             </a:r>
-            <a:endParaRPr lang="en-US" sz="1400" dirty="0"/>
-          </a:p>
-        </p:txBody>
-      </p:sp>
-      <p:sp>
-        <p:nvSpPr>
-          <p:cNvPr id="10" name="Shape 8"/>
-          <p:cNvSpPr/>
-          <p:nvPr/>
-        </p:nvSpPr>
-        <p:spPr>
-          <a:xfrm>
-            <a:off x="4663440" y="2286000"/>
-            <a:ext cx="1097280" cy="457200"/>
-          </a:xfrm>
-          <a:prstGeom prst="roundRect">
-            <a:avLst>
-              <a:gd name="adj" fmla="val 10000"/>
-            </a:avLst>
-          </a:prstGeom>
-          <a:solidFill>
-            <a:srgbClr val="0A2540"/>
-          </a:solidFill>
-          <a:ln w="19050">
-            <a:solidFill>
-              <a:srgbClr val="635BFF"/>
-            </a:solidFill>
-            <a:prstDash val="solid"/>
-          </a:ln>
-        </p:spPr>
-      </p:sp>
-      <p:sp>
-        <p:nvSpPr>
-          <p:cNvPr id="11" name="Text 9"/>
-          <p:cNvSpPr/>
-          <p:nvPr/>
-        </p:nvSpPr>
-        <p:spPr>
-          <a:xfrm>
-            <a:off x="4663440" y="2286000"/>
-            <a:ext cx="1097280" cy="457200"/>
+            <a:endParaRPr lang="en-US" sz="2000" dirty="0"/>
+          </a:p>
+        </p:txBody>
+      </p:sp>
+      <p:pic>
+        <p:nvPicPr>
+          <p:cNvPr id="10" name="Image 3" descr="/Users/michaelengland/Developer/michaelengland/ai-best-practices/decks/ai-best-practices/icons/puzzleW.png">    </p:cNvPr>
+          <p:cNvPicPr>
+            <a:picLocks noChangeAspect="1"/>
+          </p:cNvPicPr>
+          <p:nvPr/>
+        </p:nvPicPr>
+        <p:blipFill>
+          <a:blip r:embed="rId4"/>
+          <a:stretch>
+            <a:fillRect/>
+          </a:stretch>
+        </p:blipFill>
+        <p:spPr>
+          <a:xfrm>
+            <a:off x="4846320" y="1645920"/>
+            <a:ext cx="731520" cy="731520"/>
+          </a:xfrm>
+          <a:prstGeom prst="rect">
+            <a:avLst/>
+          </a:prstGeom>
+        </p:spPr>
+      </p:pic>
+      <p:sp>
+        <p:nvSpPr>
+          <p:cNvPr id="11" name="Text 5"/>
+          <p:cNvSpPr/>
+          <p:nvPr/>
+        </p:nvSpPr>
+        <p:spPr>
+          <a:xfrm>
+            <a:off x="4572000" y="2560320"/>
+            <a:ext cx="1280160" cy="548640"/>
           </a:xfrm>
           <a:prstGeom prst="rect">
             <a:avLst/>
@@ -8472,16 +8433,16 @@
           <a:ln/>
         </p:spPr>
         <p:txBody>
-          <a:bodyPr wrap="square" lIns="0" tIns="0" rIns="0" bIns="0" rtlCol="0" anchor="ctr"/>
-          <a:lstStyle/>
-          <a:p>
-            <a:pPr algn="ctr" indent="0" marL="0">
-              <a:buNone/>
-            </a:pPr>
-            <a:r>
-              <a:rPr lang="en-US" sz="1400" b="1" dirty="0">
-                <a:solidFill>
-                  <a:srgbClr val="635BFF"/>
+          <a:bodyPr wrap="square" lIns="0" tIns="0" rIns="0" bIns="0" rtlCol="0" anchor="t"/>
+          <a:lstStyle/>
+          <a:p>
+            <a:pPr algn="ctr" indent="0" marL="0">
+              <a:buNone/>
+            </a:pPr>
+            <a:r>
+              <a:rPr lang="en-US" sz="2000" dirty="0">
+                <a:solidFill>
+                  <a:srgbClr val="8B95A5"/>
                 </a:solidFill>
                 <a:latin typeface="Verdana" pitchFamily="34" charset="0"/>
                 <a:ea typeface="Verdana" pitchFamily="34" charset="-122"/>
@@ -8489,47 +8450,44 @@
               </a:rPr>
               <a:t>Chat</a:t>
             </a:r>
-            <a:endParaRPr lang="en-US" sz="1400" dirty="0"/>
-          </a:p>
-        </p:txBody>
-      </p:sp>
-      <p:sp>
-        <p:nvSpPr>
-          <p:cNvPr id="12" name="Shape 10"/>
-          <p:cNvSpPr/>
-          <p:nvPr/>
-        </p:nvSpPr>
-        <p:spPr>
-          <a:xfrm>
-            <a:off x="5943600" y="2286000"/>
-            <a:ext cx="1097280" cy="457200"/>
-          </a:xfrm>
-          <a:prstGeom prst="roundRect">
-            <a:avLst>
-              <a:gd name="adj" fmla="val 10000"/>
-            </a:avLst>
-          </a:prstGeom>
-          <a:solidFill>
-            <a:srgbClr val="0A2540"/>
-          </a:solidFill>
-          <a:ln w="19050">
-            <a:solidFill>
-              <a:srgbClr val="635BFF"/>
-            </a:solidFill>
-            <a:prstDash val="solid"/>
-          </a:ln>
-        </p:spPr>
-      </p:sp>
-      <p:sp>
-        <p:nvSpPr>
-          <p:cNvPr id="13" name="Text 11"/>
-          <p:cNvSpPr/>
-          <p:nvPr/>
-        </p:nvSpPr>
-        <p:spPr>
-          <a:xfrm>
-            <a:off x="5943600" y="2286000"/>
-            <a:ext cx="1097280" cy="457200"/>
+            <a:endParaRPr lang="en-US" sz="2000" dirty="0"/>
+          </a:p>
+        </p:txBody>
+      </p:sp>
+      <p:pic>
+        <p:nvPicPr>
+          <p:cNvPr id="12" name="Image 4" descr="/Users/michaelengland/Developer/michaelengland/ai-best-practices/decks/ai-best-practices/icons/globeW.png">    </p:cNvPr>
+          <p:cNvPicPr>
+            <a:picLocks noChangeAspect="1"/>
+          </p:cNvPicPr>
+          <p:nvPr/>
+        </p:nvPicPr>
+        <p:blipFill>
+          <a:blip r:embed="rId5"/>
+          <a:stretch>
+            <a:fillRect/>
+          </a:stretch>
+        </p:blipFill>
+        <p:spPr>
+          <a:xfrm>
+            <a:off x="6126480" y="1645920"/>
+            <a:ext cx="731520" cy="731520"/>
+          </a:xfrm>
+          <a:prstGeom prst="rect">
+            <a:avLst/>
+          </a:prstGeom>
+        </p:spPr>
+      </p:pic>
+      <p:sp>
+        <p:nvSpPr>
+          <p:cNvPr id="13" name="Text 6"/>
+          <p:cNvSpPr/>
+          <p:nvPr/>
+        </p:nvSpPr>
+        <p:spPr>
+          <a:xfrm>
+            <a:off x="5852160" y="2560320"/>
+            <a:ext cx="1280160" cy="548640"/>
           </a:xfrm>
           <a:prstGeom prst="rect">
             <a:avLst/>
@@ -8538,16 +8496,16 @@
           <a:ln/>
         </p:spPr>
         <p:txBody>
-          <a:bodyPr wrap="square" lIns="0" tIns="0" rIns="0" bIns="0" rtlCol="0" anchor="ctr"/>
-          <a:lstStyle/>
-          <a:p>
-            <a:pPr algn="ctr" indent="0" marL="0">
-              <a:buNone/>
-            </a:pPr>
-            <a:r>
-              <a:rPr lang="en-US" sz="1400" b="1" dirty="0">
-                <a:solidFill>
-                  <a:srgbClr val="635BFF"/>
+          <a:bodyPr wrap="square" lIns="0" tIns="0" rIns="0" bIns="0" rtlCol="0" anchor="t"/>
+          <a:lstStyle/>
+          <a:p>
+            <a:pPr algn="ctr" indent="0" marL="0">
+              <a:buNone/>
+            </a:pPr>
+            <a:r>
+              <a:rPr lang="en-US" sz="2000" dirty="0">
+                <a:solidFill>
+                  <a:srgbClr val="8B95A5"/>
                 </a:solidFill>
                 <a:latin typeface="Verdana" pitchFamily="34" charset="0"/>
                 <a:ea typeface="Verdana" pitchFamily="34" charset="-122"/>
@@ -8555,47 +8513,44 @@
               </a:rPr>
               <a:t>Web</a:t>
             </a:r>
-            <a:endParaRPr lang="en-US" sz="1400" dirty="0"/>
-          </a:p>
-        </p:txBody>
-      </p:sp>
-      <p:sp>
-        <p:nvSpPr>
-          <p:cNvPr id="14" name="Shape 12"/>
-          <p:cNvSpPr/>
-          <p:nvPr/>
-        </p:nvSpPr>
-        <p:spPr>
-          <a:xfrm>
-            <a:off x="7223760" y="2286000"/>
-            <a:ext cx="1097280" cy="457200"/>
-          </a:xfrm>
-          <a:prstGeom prst="roundRect">
-            <a:avLst>
-              <a:gd name="adj" fmla="val 10000"/>
-            </a:avLst>
-          </a:prstGeom>
-          <a:solidFill>
-            <a:srgbClr val="0A2540"/>
-          </a:solidFill>
-          <a:ln w="19050">
-            <a:solidFill>
-              <a:srgbClr val="635BFF"/>
-            </a:solidFill>
-            <a:prstDash val="solid"/>
-          </a:ln>
-        </p:spPr>
-      </p:sp>
-      <p:sp>
-        <p:nvSpPr>
-          <p:cNvPr id="15" name="Text 13"/>
-          <p:cNvSpPr/>
-          <p:nvPr/>
-        </p:nvSpPr>
-        <p:spPr>
-          <a:xfrm>
-            <a:off x="7223760" y="2286000"/>
-            <a:ext cx="1097280" cy="457200"/>
+            <a:endParaRPr lang="en-US" sz="2000" dirty="0"/>
+          </a:p>
+        </p:txBody>
+      </p:sp>
+      <p:pic>
+        <p:nvPicPr>
+          <p:cNvPr id="14" name="Image 5" descr="/Users/michaelengland/Developer/michaelengland/ai-best-practices/decks/ai-best-practices/icons/arrowW.png">    </p:cNvPr>
+          <p:cNvPicPr>
+            <a:picLocks noChangeAspect="1"/>
+          </p:cNvPicPr>
+          <p:nvPr/>
+        </p:nvPicPr>
+        <p:blipFill>
+          <a:blip r:embed="rId6"/>
+          <a:stretch>
+            <a:fillRect/>
+          </a:stretch>
+        </p:blipFill>
+        <p:spPr>
+          <a:xfrm>
+            <a:off x="7406640" y="1645920"/>
+            <a:ext cx="731520" cy="731520"/>
+          </a:xfrm>
+          <a:prstGeom prst="rect">
+            <a:avLst/>
+          </a:prstGeom>
+        </p:spPr>
+      </p:pic>
+      <p:sp>
+        <p:nvSpPr>
+          <p:cNvPr id="15" name="Text 7"/>
+          <p:cNvSpPr/>
+          <p:nvPr/>
+        </p:nvSpPr>
+        <p:spPr>
+          <a:xfrm>
+            <a:off x="7132320" y="2560320"/>
+            <a:ext cx="1280160" cy="548640"/>
           </a:xfrm>
           <a:prstGeom prst="rect">
             <a:avLst/>
@@ -8604,16 +8559,16 @@
           <a:ln/>
         </p:spPr>
         <p:txBody>
-          <a:bodyPr wrap="square" lIns="0" tIns="0" rIns="0" bIns="0" rtlCol="0" anchor="ctr"/>
-          <a:lstStyle/>
-          <a:p>
-            <a:pPr algn="ctr" indent="0" marL="0">
-              <a:buNone/>
-            </a:pPr>
-            <a:r>
-              <a:rPr lang="en-US" sz="1400" b="1" dirty="0">
-                <a:solidFill>
-                  <a:srgbClr val="635BFF"/>
+          <a:bodyPr wrap="square" lIns="0" tIns="0" rIns="0" bIns="0" rtlCol="0" anchor="t"/>
+          <a:lstStyle/>
+          <a:p>
+            <a:pPr algn="ctr" indent="0" marL="0">
+              <a:buNone/>
+            </a:pPr>
+            <a:r>
+              <a:rPr lang="en-US" sz="2000" dirty="0">
+                <a:solidFill>
+                  <a:srgbClr val="8B95A5"/>
                 </a:solidFill>
                 <a:latin typeface="Verdana" pitchFamily="34" charset="0"/>
                 <a:ea typeface="Verdana" pitchFamily="34" charset="-122"/>
@@ -8621,7 +8576,7 @@
               </a:rPr>
               <a:t>Custom</a:t>
             </a:r>
-            <a:endParaRPr lang="en-US" sz="1400" dirty="0"/>
+            <a:endParaRPr lang="en-US" sz="2000" dirty="0"/>
           </a:p>
         </p:txBody>
       </p:sp>

--- a/decks/workshop-2-orchestrator/workshop-2-orchestrator.pptx
+++ b/decks/workshop-2-orchestrator/workshop-2-orchestrator.pptx
@@ -1054,7 +1054,7 @@
           <a:p>
             <a:r>
               <a:rPr lang="en-US" dirty="0"/>
-              <a:t>Group exercise. Facilitator presents a complex task (the onboarding proposal or another multi-step scenario). Discussion with whiteboard or shared doc. Target: 3-4 phases. e.g., Research → Draft → Review → Approval. Don't let it go beyond 4 — more than that overcomplicates the demo. 5-6 minutes.</a:t>
+              <a:t>Group exercise. Facilitator presents a complex task (the tea presentation or another multi-step scenario). Discussion with whiteboard or shared doc. Target: 3-4 phases. e.g., Research → Draft → Review → Approval. Don't let it go beyond 4 — more than that overcomplicates the demo. 5-6 minutes.</a:t>
             </a:r>
             <a:endParaRPr lang="en-US" dirty="0"/>
           </a:p>
@@ -1318,7 +1318,7 @@
           <a:p>
             <a:r>
               <a:rPr lang="en-US" dirty="0"/>
-              <a:t>10 minutes. Attendees choose their running task from Workshop 1 or the prescribed one. Custom GPTs are in the ChatGPT sidebar. Fallback if time runs short: Phase 1 becomes a facilitator demo, attendees do Phase 2 only. The discussion matters more than both phases completing. Ask: "Where did the chain produce better results? Where did the handoff lose something?"</a:t>
+              <a:t>10 minutes. Attendees choose their running task from Workshop 1 or the tea presentation. Custom GPTs are in the ChatGPT sidebar. Fallback if time runs short: Phase 1 becomes a facilitator demo, attendees do Phase 2 only. The discussion matters more than both phases completing. Ask: "Where did the chain produce better results? Where did the handoff lose something?"</a:t>
             </a:r>
             <a:endParaRPr lang="en-US" dirty="0"/>
           </a:p>
@@ -1846,7 +1846,7 @@
           <a:p>
             <a:r>
               <a:rPr lang="en-US" dirty="0"/>
-              <a:t>Chained workflow: agents handle 1 hour 15 minutes of work. You spend 15 minutes on judgment — reviewing, deciding, approving. "Same proposal. The chain gets smarter every time. Your feedback becomes skills."</a:t>
+              <a:t>Chained workflow: agents handle 1 hour 15 minutes of work. You spend 15 minutes on judgment — reviewing, deciding, approving. "Same tea presentation. The chain gets smarter every time. Your feedback becomes skills."</a:t>
             </a:r>
             <a:endParaRPr lang="en-US" dirty="0"/>
           </a:p>

--- a/decks/workshop-2-orchestrator/workshop-2-orchestrator.pptx
+++ b/decks/workshop-2-orchestrator/workshop-2-orchestrator.pptx
@@ -5256,8 +5256,8 @@
         </p:nvSpPr>
         <p:spPr>
           <a:xfrm>
-            <a:off x="457200" y="2011680"/>
-            <a:ext cx="1097280" cy="640080"/>
+            <a:off x="192024" y="2011680"/>
+            <a:ext cx="1188720" cy="640080"/>
           </a:xfrm>
           <a:prstGeom prst="roundRect">
             <a:avLst>
@@ -5265,7 +5265,9 @@
             </a:avLst>
           </a:prstGeom>
           <a:solidFill>
-            <a:srgbClr val="0A2540"/>
+            <a:srgbClr val="0A2540">
+              <a:alpha val="50000"/>
+            </a:srgbClr>
           </a:solidFill>
           <a:ln w="19050">
             <a:solidFill>
@@ -5283,8 +5285,8 @@
         </p:nvSpPr>
         <p:spPr>
           <a:xfrm>
-            <a:off x="457200" y="2011680"/>
-            <a:ext cx="1097280" cy="640080"/>
+            <a:off x="192024" y="2011680"/>
+            <a:ext cx="1188720" cy="640080"/>
           </a:xfrm>
           <a:prstGeom prst="rect">
             <a:avLst/>
@@ -5300,7 +5302,7 @@
               <a:buNone/>
             </a:pPr>
             <a:r>
-              <a:rPr lang="en-US" sz="1200" dirty="0">
+              <a:rPr lang="en-US" sz="1100" b="1" dirty="0">
                 <a:solidFill>
                   <a:srgbClr val="8B95A5"/>
                 </a:solidFill>
@@ -5310,20 +5312,59 @@
               </a:rPr>
               <a:t>Skeptic</a:t>
             </a:r>
-            <a:endParaRPr lang="en-US" sz="1200" dirty="0"/>
-          </a:p>
-        </p:txBody>
-      </p:sp>
-      <p:sp>
-        <p:nvSpPr>
-          <p:cNvPr id="5" name="Shape 3"/>
-          <p:cNvSpPr/>
-          <p:nvPr/>
-        </p:nvSpPr>
-        <p:spPr>
-          <a:xfrm>
-            <a:off x="1645920" y="2011680"/>
-            <a:ext cx="1097280" cy="640080"/>
+            <a:endParaRPr lang="en-US" sz="1100" dirty="0"/>
+          </a:p>
+        </p:txBody>
+      </p:sp>
+      <p:sp>
+        <p:nvSpPr>
+          <p:cNvPr id="5" name="Text 3"/>
+          <p:cNvSpPr/>
+          <p:nvPr/>
+        </p:nvSpPr>
+        <p:spPr>
+          <a:xfrm>
+            <a:off x="1380744" y="2011680"/>
+            <a:ext cx="73152" cy="640080"/>
+          </a:xfrm>
+          <a:prstGeom prst="rect">
+            <a:avLst/>
+          </a:prstGeom>
+          <a:noFill/>
+          <a:ln/>
+        </p:spPr>
+        <p:txBody>
+          <a:bodyPr wrap="square" lIns="0" tIns="0" rIns="0" bIns="0" rtlCol="0" anchor="ctr"/>
+          <a:lstStyle/>
+          <a:p>
+            <a:pPr algn="ctr" indent="0" marL="0">
+              <a:buNone/>
+            </a:pPr>
+            <a:r>
+              <a:rPr lang="en-US" sz="1100" dirty="0">
+                <a:solidFill>
+                  <a:srgbClr val="8B95A5"/>
+                </a:solidFill>
+                <a:latin typeface="Verdana" pitchFamily="34" charset="0"/>
+                <a:ea typeface="Verdana" pitchFamily="34" charset="-122"/>
+                <a:cs typeface="Verdana" pitchFamily="34" charset="-120"/>
+              </a:rPr>
+              <a:t>→</a:t>
+            </a:r>
+            <a:endParaRPr lang="en-US" sz="1100" dirty="0"/>
+          </a:p>
+        </p:txBody>
+      </p:sp>
+      <p:sp>
+        <p:nvSpPr>
+          <p:cNvPr id="6" name="Shape 4"/>
+          <p:cNvSpPr/>
+          <p:nvPr/>
+        </p:nvSpPr>
+        <p:spPr>
+          <a:xfrm>
+            <a:off x="1453896" y="2011680"/>
+            <a:ext cx="1188720" cy="640080"/>
           </a:xfrm>
           <a:prstGeom prst="roundRect">
             <a:avLst>
@@ -5331,7 +5372,9 @@
             </a:avLst>
           </a:prstGeom>
           <a:solidFill>
-            <a:srgbClr val="0A2540"/>
+            <a:srgbClr val="0A2540">
+              <a:alpha val="50000"/>
+            </a:srgbClr>
           </a:solidFill>
           <a:ln w="19050">
             <a:solidFill>
@@ -5343,14 +5386,14 @@
       </p:sp>
       <p:sp>
         <p:nvSpPr>
-          <p:cNvPr id="6" name="Text 4"/>
-          <p:cNvSpPr/>
-          <p:nvPr/>
-        </p:nvSpPr>
-        <p:spPr>
-          <a:xfrm>
-            <a:off x="1645920" y="2011680"/>
-            <a:ext cx="1097280" cy="640080"/>
+          <p:cNvPr id="7" name="Text 5"/>
+          <p:cNvSpPr/>
+          <p:nvPr/>
+        </p:nvSpPr>
+        <p:spPr>
+          <a:xfrm>
+            <a:off x="1453896" y="2011680"/>
+            <a:ext cx="1188720" cy="640080"/>
           </a:xfrm>
           <a:prstGeom prst="rect">
             <a:avLst/>
@@ -5366,7 +5409,7 @@
               <a:buNone/>
             </a:pPr>
             <a:r>
-              <a:rPr lang="en-US" sz="1200" dirty="0">
+              <a:rPr lang="en-US" sz="1100" b="1" dirty="0">
                 <a:solidFill>
                   <a:srgbClr val="8B95A5"/>
                 </a:solidFill>
@@ -5376,20 +5419,59 @@
               </a:rPr>
               <a:t>Explorer</a:t>
             </a:r>
-            <a:endParaRPr lang="en-US" sz="1200" dirty="0"/>
-          </a:p>
-        </p:txBody>
-      </p:sp>
-      <p:sp>
-        <p:nvSpPr>
-          <p:cNvPr id="7" name="Shape 5"/>
-          <p:cNvSpPr/>
-          <p:nvPr/>
-        </p:nvSpPr>
-        <p:spPr>
-          <a:xfrm>
-            <a:off x="2834640" y="2011680"/>
-            <a:ext cx="1097280" cy="640080"/>
+            <a:endParaRPr lang="en-US" sz="1100" dirty="0"/>
+          </a:p>
+        </p:txBody>
+      </p:sp>
+      <p:sp>
+        <p:nvSpPr>
+          <p:cNvPr id="8" name="Text 6"/>
+          <p:cNvSpPr/>
+          <p:nvPr/>
+        </p:nvSpPr>
+        <p:spPr>
+          <a:xfrm>
+            <a:off x="2642616" y="2011680"/>
+            <a:ext cx="73152" cy="640080"/>
+          </a:xfrm>
+          <a:prstGeom prst="rect">
+            <a:avLst/>
+          </a:prstGeom>
+          <a:noFill/>
+          <a:ln/>
+        </p:spPr>
+        <p:txBody>
+          <a:bodyPr wrap="square" lIns="0" tIns="0" rIns="0" bIns="0" rtlCol="0" anchor="ctr"/>
+          <a:lstStyle/>
+          <a:p>
+            <a:pPr algn="ctr" indent="0" marL="0">
+              <a:buNone/>
+            </a:pPr>
+            <a:r>
+              <a:rPr lang="en-US" sz="1100" dirty="0">
+                <a:solidFill>
+                  <a:srgbClr val="8B95A5"/>
+                </a:solidFill>
+                <a:latin typeface="Verdana" pitchFamily="34" charset="0"/>
+                <a:ea typeface="Verdana" pitchFamily="34" charset="-122"/>
+                <a:cs typeface="Verdana" pitchFamily="34" charset="-120"/>
+              </a:rPr>
+              <a:t>→</a:t>
+            </a:r>
+            <a:endParaRPr lang="en-US" sz="1100" dirty="0"/>
+          </a:p>
+        </p:txBody>
+      </p:sp>
+      <p:sp>
+        <p:nvSpPr>
+          <p:cNvPr id="9" name="Shape 7"/>
+          <p:cNvSpPr/>
+          <p:nvPr/>
+        </p:nvSpPr>
+        <p:spPr>
+          <a:xfrm>
+            <a:off x="2715768" y="2011680"/>
+            <a:ext cx="1188720" cy="640080"/>
           </a:xfrm>
           <a:prstGeom prst="roundRect">
             <a:avLst>
@@ -5397,7 +5479,9 @@
             </a:avLst>
           </a:prstGeom>
           <a:solidFill>
-            <a:srgbClr val="0A2540"/>
+            <a:srgbClr val="0A2540">
+              <a:alpha val="50000"/>
+            </a:srgbClr>
           </a:solidFill>
           <a:ln w="19050">
             <a:solidFill>
@@ -5409,14 +5493,14 @@
       </p:sp>
       <p:sp>
         <p:nvSpPr>
-          <p:cNvPr id="8" name="Text 6"/>
-          <p:cNvSpPr/>
-          <p:nvPr/>
-        </p:nvSpPr>
-        <p:spPr>
-          <a:xfrm>
-            <a:off x="2834640" y="2011680"/>
-            <a:ext cx="1097280" cy="640080"/>
+          <p:cNvPr id="10" name="Text 8"/>
+          <p:cNvSpPr/>
+          <p:nvPr/>
+        </p:nvSpPr>
+        <p:spPr>
+          <a:xfrm>
+            <a:off x="2715768" y="2011680"/>
+            <a:ext cx="1188720" cy="640080"/>
           </a:xfrm>
           <a:prstGeom prst="rect">
             <a:avLst/>
@@ -5432,7 +5516,7 @@
               <a:buNone/>
             </a:pPr>
             <a:r>
-              <a:rPr lang="en-US" sz="1200" dirty="0">
+              <a:rPr lang="en-US" sz="1100" b="1" dirty="0">
                 <a:solidFill>
                   <a:srgbClr val="8B95A5"/>
                 </a:solidFill>
@@ -5442,20 +5526,59 @@
               </a:rPr>
               <a:t>Whisperer</a:t>
             </a:r>
-            <a:endParaRPr lang="en-US" sz="1200" dirty="0"/>
-          </a:p>
-        </p:txBody>
-      </p:sp>
-      <p:sp>
-        <p:nvSpPr>
-          <p:cNvPr id="9" name="Shape 7"/>
-          <p:cNvSpPr/>
-          <p:nvPr/>
-        </p:nvSpPr>
-        <p:spPr>
-          <a:xfrm>
-            <a:off x="4023360" y="2011680"/>
-            <a:ext cx="1097280" cy="640080"/>
+            <a:endParaRPr lang="en-US" sz="1100" dirty="0"/>
+          </a:p>
+        </p:txBody>
+      </p:sp>
+      <p:sp>
+        <p:nvSpPr>
+          <p:cNvPr id="11" name="Text 9"/>
+          <p:cNvSpPr/>
+          <p:nvPr/>
+        </p:nvSpPr>
+        <p:spPr>
+          <a:xfrm>
+            <a:off x="3904488" y="2011680"/>
+            <a:ext cx="73152" cy="640080"/>
+          </a:xfrm>
+          <a:prstGeom prst="rect">
+            <a:avLst/>
+          </a:prstGeom>
+          <a:noFill/>
+          <a:ln/>
+        </p:spPr>
+        <p:txBody>
+          <a:bodyPr wrap="square" lIns="0" tIns="0" rIns="0" bIns="0" rtlCol="0" anchor="ctr"/>
+          <a:lstStyle/>
+          <a:p>
+            <a:pPr algn="ctr" indent="0" marL="0">
+              <a:buNone/>
+            </a:pPr>
+            <a:r>
+              <a:rPr lang="en-US" sz="1100" dirty="0">
+                <a:solidFill>
+                  <a:srgbClr val="8B95A5"/>
+                </a:solidFill>
+                <a:latin typeface="Verdana" pitchFamily="34" charset="0"/>
+                <a:ea typeface="Verdana" pitchFamily="34" charset="-122"/>
+                <a:cs typeface="Verdana" pitchFamily="34" charset="-120"/>
+              </a:rPr>
+              <a:t>→</a:t>
+            </a:r>
+            <a:endParaRPr lang="en-US" sz="1100" dirty="0"/>
+          </a:p>
+        </p:txBody>
+      </p:sp>
+      <p:sp>
+        <p:nvSpPr>
+          <p:cNvPr id="12" name="Shape 10"/>
+          <p:cNvSpPr/>
+          <p:nvPr/>
+        </p:nvSpPr>
+        <p:spPr>
+          <a:xfrm>
+            <a:off x="3977640" y="2011680"/>
+            <a:ext cx="1188720" cy="640080"/>
           </a:xfrm>
           <a:prstGeom prst="roundRect">
             <a:avLst>
@@ -5475,14 +5598,14 @@
       </p:sp>
       <p:sp>
         <p:nvSpPr>
-          <p:cNvPr id="10" name="Text 8"/>
-          <p:cNvSpPr/>
-          <p:nvPr/>
-        </p:nvSpPr>
-        <p:spPr>
-          <a:xfrm>
-            <a:off x="4023360" y="2011680"/>
-            <a:ext cx="1097280" cy="640080"/>
+          <p:cNvPr id="13" name="Text 11"/>
+          <p:cNvSpPr/>
+          <p:nvPr/>
+        </p:nvSpPr>
+        <p:spPr>
+          <a:xfrm>
+            <a:off x="3977640" y="2011680"/>
+            <a:ext cx="1188720" cy="640080"/>
           </a:xfrm>
           <a:prstGeom prst="rect">
             <a:avLst/>
@@ -5498,7 +5621,7 @@
               <a:buNone/>
             </a:pPr>
             <a:r>
-              <a:rPr lang="en-US" sz="1200" b="1" dirty="0">
+              <a:rPr lang="en-US" sz="1100" b="1" dirty="0">
                 <a:solidFill>
                   <a:srgbClr val="FFFFFF"/>
                 </a:solidFill>
@@ -5508,20 +5631,59 @@
               </a:rPr>
               <a:t>Strategist</a:t>
             </a:r>
-            <a:endParaRPr lang="en-US" sz="1200" dirty="0"/>
-          </a:p>
-        </p:txBody>
-      </p:sp>
-      <p:sp>
-        <p:nvSpPr>
-          <p:cNvPr id="11" name="Shape 9"/>
-          <p:cNvSpPr/>
-          <p:nvPr/>
-        </p:nvSpPr>
-        <p:spPr>
-          <a:xfrm>
-            <a:off x="5212080" y="2011680"/>
-            <a:ext cx="1097280" cy="640080"/>
+            <a:endParaRPr lang="en-US" sz="1100" dirty="0"/>
+          </a:p>
+        </p:txBody>
+      </p:sp>
+      <p:sp>
+        <p:nvSpPr>
+          <p:cNvPr id="14" name="Text 12"/>
+          <p:cNvSpPr/>
+          <p:nvPr/>
+        </p:nvSpPr>
+        <p:spPr>
+          <a:xfrm>
+            <a:off x="5166360" y="2011680"/>
+            <a:ext cx="73152" cy="640080"/>
+          </a:xfrm>
+          <a:prstGeom prst="rect">
+            <a:avLst/>
+          </a:prstGeom>
+          <a:noFill/>
+          <a:ln/>
+        </p:spPr>
+        <p:txBody>
+          <a:bodyPr wrap="square" lIns="0" tIns="0" rIns="0" bIns="0" rtlCol="0" anchor="ctr"/>
+          <a:lstStyle/>
+          <a:p>
+            <a:pPr algn="ctr" indent="0" marL="0">
+              <a:buNone/>
+            </a:pPr>
+            <a:r>
+              <a:rPr lang="en-US" sz="1100" dirty="0">
+                <a:solidFill>
+                  <a:srgbClr val="8B95A5"/>
+                </a:solidFill>
+                <a:latin typeface="Verdana" pitchFamily="34" charset="0"/>
+                <a:ea typeface="Verdana" pitchFamily="34" charset="-122"/>
+                <a:cs typeface="Verdana" pitchFamily="34" charset="-120"/>
+              </a:rPr>
+              <a:t>→</a:t>
+            </a:r>
+            <a:endParaRPr lang="en-US" sz="1100" dirty="0"/>
+          </a:p>
+        </p:txBody>
+      </p:sp>
+      <p:sp>
+        <p:nvSpPr>
+          <p:cNvPr id="15" name="Shape 13"/>
+          <p:cNvSpPr/>
+          <p:nvPr/>
+        </p:nvSpPr>
+        <p:spPr>
+          <a:xfrm>
+            <a:off x="5239512" y="2011680"/>
+            <a:ext cx="1188720" cy="640080"/>
           </a:xfrm>
           <a:prstGeom prst="roundRect">
             <a:avLst>
@@ -5541,14 +5703,14 @@
       </p:sp>
       <p:sp>
         <p:nvSpPr>
-          <p:cNvPr id="12" name="Text 10"/>
-          <p:cNvSpPr/>
-          <p:nvPr/>
-        </p:nvSpPr>
-        <p:spPr>
-          <a:xfrm>
-            <a:off x="5212080" y="2011680"/>
-            <a:ext cx="1097280" cy="640080"/>
+          <p:cNvPr id="16" name="Text 14"/>
+          <p:cNvSpPr/>
+          <p:nvPr/>
+        </p:nvSpPr>
+        <p:spPr>
+          <a:xfrm>
+            <a:off x="5239512" y="2011680"/>
+            <a:ext cx="1188720" cy="640080"/>
           </a:xfrm>
           <a:prstGeom prst="rect">
             <a:avLst/>
@@ -5564,7 +5726,7 @@
               <a:buNone/>
             </a:pPr>
             <a:r>
-              <a:rPr lang="en-US" sz="1200" b="1" dirty="0">
+              <a:rPr lang="en-US" sz="1100" b="1" dirty="0">
                 <a:solidFill>
                   <a:srgbClr val="FFFFFF"/>
                 </a:solidFill>
@@ -5574,20 +5736,59 @@
               </a:rPr>
               <a:t>Operator</a:t>
             </a:r>
-            <a:endParaRPr lang="en-US" sz="1200" dirty="0"/>
-          </a:p>
-        </p:txBody>
-      </p:sp>
-      <p:sp>
-        <p:nvSpPr>
-          <p:cNvPr id="13" name="Shape 11"/>
-          <p:cNvSpPr/>
-          <p:nvPr/>
-        </p:nvSpPr>
-        <p:spPr>
-          <a:xfrm>
-            <a:off x="6400800" y="2011680"/>
-            <a:ext cx="1097280" cy="640080"/>
+            <a:endParaRPr lang="en-US" sz="1100" dirty="0"/>
+          </a:p>
+        </p:txBody>
+      </p:sp>
+      <p:sp>
+        <p:nvSpPr>
+          <p:cNvPr id="17" name="Text 15"/>
+          <p:cNvSpPr/>
+          <p:nvPr/>
+        </p:nvSpPr>
+        <p:spPr>
+          <a:xfrm>
+            <a:off x="6428232" y="2011680"/>
+            <a:ext cx="73152" cy="640080"/>
+          </a:xfrm>
+          <a:prstGeom prst="rect">
+            <a:avLst/>
+          </a:prstGeom>
+          <a:noFill/>
+          <a:ln/>
+        </p:spPr>
+        <p:txBody>
+          <a:bodyPr wrap="square" lIns="0" tIns="0" rIns="0" bIns="0" rtlCol="0" anchor="ctr"/>
+          <a:lstStyle/>
+          <a:p>
+            <a:pPr algn="ctr" indent="0" marL="0">
+              <a:buNone/>
+            </a:pPr>
+            <a:r>
+              <a:rPr lang="en-US" sz="1100" dirty="0">
+                <a:solidFill>
+                  <a:srgbClr val="8B95A5"/>
+                </a:solidFill>
+                <a:latin typeface="Verdana" pitchFamily="34" charset="0"/>
+                <a:ea typeface="Verdana" pitchFamily="34" charset="-122"/>
+                <a:cs typeface="Verdana" pitchFamily="34" charset="-120"/>
+              </a:rPr>
+              <a:t>→</a:t>
+            </a:r>
+            <a:endParaRPr lang="en-US" sz="1100" dirty="0"/>
+          </a:p>
+        </p:txBody>
+      </p:sp>
+      <p:sp>
+        <p:nvSpPr>
+          <p:cNvPr id="18" name="Shape 16"/>
+          <p:cNvSpPr/>
+          <p:nvPr/>
+        </p:nvSpPr>
+        <p:spPr>
+          <a:xfrm>
+            <a:off x="6501384" y="2011680"/>
+            <a:ext cx="1188720" cy="640080"/>
           </a:xfrm>
           <a:prstGeom prst="roundRect">
             <a:avLst>
@@ -5607,14 +5808,14 @@
       </p:sp>
       <p:sp>
         <p:nvSpPr>
-          <p:cNvPr id="14" name="Text 12"/>
-          <p:cNvSpPr/>
-          <p:nvPr/>
-        </p:nvSpPr>
-        <p:spPr>
-          <a:xfrm>
-            <a:off x="6400800" y="2011680"/>
-            <a:ext cx="1097280" cy="640080"/>
+          <p:cNvPr id="19" name="Text 17"/>
+          <p:cNvSpPr/>
+          <p:nvPr/>
+        </p:nvSpPr>
+        <p:spPr>
+          <a:xfrm>
+            <a:off x="6501384" y="2011680"/>
+            <a:ext cx="1188720" cy="640080"/>
           </a:xfrm>
           <a:prstGeom prst="rect">
             <a:avLst/>
@@ -5630,7 +5831,7 @@
               <a:buNone/>
             </a:pPr>
             <a:r>
-              <a:rPr lang="en-US" sz="1200" b="1" dirty="0">
+              <a:rPr lang="en-US" sz="1100" b="1" dirty="0">
                 <a:solidFill>
                   <a:srgbClr val="FFFFFF"/>
                 </a:solidFill>
@@ -5640,20 +5841,59 @@
               </a:rPr>
               <a:t>Orchestrator</a:t>
             </a:r>
-            <a:endParaRPr lang="en-US" sz="1200" dirty="0"/>
-          </a:p>
-        </p:txBody>
-      </p:sp>
-      <p:sp>
-        <p:nvSpPr>
-          <p:cNvPr id="15" name="Shape 13"/>
-          <p:cNvSpPr/>
-          <p:nvPr/>
-        </p:nvSpPr>
-        <p:spPr>
-          <a:xfrm>
-            <a:off x="7589520" y="2011680"/>
-            <a:ext cx="1097280" cy="640080"/>
+            <a:endParaRPr lang="en-US" sz="1100" dirty="0"/>
+          </a:p>
+        </p:txBody>
+      </p:sp>
+      <p:sp>
+        <p:nvSpPr>
+          <p:cNvPr id="20" name="Text 18"/>
+          <p:cNvSpPr/>
+          <p:nvPr/>
+        </p:nvSpPr>
+        <p:spPr>
+          <a:xfrm>
+            <a:off x="7690104" y="2011680"/>
+            <a:ext cx="73152" cy="640080"/>
+          </a:xfrm>
+          <a:prstGeom prst="rect">
+            <a:avLst/>
+          </a:prstGeom>
+          <a:noFill/>
+          <a:ln/>
+        </p:spPr>
+        <p:txBody>
+          <a:bodyPr wrap="square" lIns="0" tIns="0" rIns="0" bIns="0" rtlCol="0" anchor="ctr"/>
+          <a:lstStyle/>
+          <a:p>
+            <a:pPr algn="ctr" indent="0" marL="0">
+              <a:buNone/>
+            </a:pPr>
+            <a:r>
+              <a:rPr lang="en-US" sz="1100" dirty="0">
+                <a:solidFill>
+                  <a:srgbClr val="8B95A5"/>
+                </a:solidFill>
+                <a:latin typeface="Verdana" pitchFamily="34" charset="0"/>
+                <a:ea typeface="Verdana" pitchFamily="34" charset="-122"/>
+                <a:cs typeface="Verdana" pitchFamily="34" charset="-120"/>
+              </a:rPr>
+              <a:t>→</a:t>
+            </a:r>
+            <a:endParaRPr lang="en-US" sz="1100" dirty="0"/>
+          </a:p>
+        </p:txBody>
+      </p:sp>
+      <p:sp>
+        <p:nvSpPr>
+          <p:cNvPr id="21" name="Shape 19"/>
+          <p:cNvSpPr/>
+          <p:nvPr/>
+        </p:nvSpPr>
+        <p:spPr>
+          <a:xfrm>
+            <a:off x="7763256" y="2011680"/>
+            <a:ext cx="1188720" cy="640080"/>
           </a:xfrm>
           <a:prstGeom prst="roundRect">
             <a:avLst>
@@ -5661,26 +5901,28 @@
             </a:avLst>
           </a:prstGeom>
           <a:solidFill>
-            <a:srgbClr val="0A2540"/>
+            <a:srgbClr val="0A2540">
+              <a:alpha val="50000"/>
+            </a:srgbClr>
           </a:solidFill>
           <a:ln w="19050">
             <a:solidFill>
               <a:srgbClr val="8B95A5"/>
             </a:solidFill>
-            <a:prstDash val="solid"/>
+            <a:prstDash val="dash"/>
           </a:ln>
         </p:spPr>
       </p:sp>
       <p:sp>
         <p:nvSpPr>
-          <p:cNvPr id="16" name="Text 14"/>
-          <p:cNvSpPr/>
-          <p:nvPr/>
-        </p:nvSpPr>
-        <p:spPr>
-          <a:xfrm>
-            <a:off x="7589520" y="2011680"/>
-            <a:ext cx="1097280" cy="640080"/>
+          <p:cNvPr id="22" name="Text 20"/>
+          <p:cNvSpPr/>
+          <p:nvPr/>
+        </p:nvSpPr>
+        <p:spPr>
+          <a:xfrm>
+            <a:off x="7763256" y="2011680"/>
+            <a:ext cx="1188720" cy="640080"/>
           </a:xfrm>
           <a:prstGeom prst="rect">
             <a:avLst/>
@@ -5696,7 +5938,7 @@
               <a:buNone/>
             </a:pPr>
             <a:r>
-              <a:rPr lang="en-US" sz="1200" dirty="0">
+              <a:rPr lang="en-US" sz="1100" b="1" dirty="0">
                 <a:solidFill>
                   <a:srgbClr val="8B95A5"/>
                 </a:solidFill>
@@ -5706,13 +5948,13 @@
               </a:rPr>
               <a:t>Builder</a:t>
             </a:r>
-            <a:endParaRPr lang="en-US" sz="1200" dirty="0"/>
-          </a:p>
-        </p:txBody>
-      </p:sp>
-      <p:sp>
-        <p:nvSpPr>
-          <p:cNvPr id="17" name="Text 15"/>
+            <a:endParaRPr lang="en-US" sz="1100" dirty="0"/>
+          </a:p>
+        </p:txBody>
+      </p:sp>
+      <p:sp>
+        <p:nvSpPr>
+          <p:cNvPr id="23" name="Text 21"/>
           <p:cNvSpPr/>
           <p:nvPr/>
         </p:nvSpPr>
@@ -5735,17 +5977,17 @@
               <a:buNone/>
             </a:pPr>
             <a:r>
-              <a:rPr lang="en-US" sz="2200" dirty="0">
-                <a:solidFill>
-                  <a:srgbClr val="8B95A5"/>
-                </a:solidFill>
-                <a:latin typeface="Verdana" pitchFamily="34" charset="0"/>
-                <a:ea typeface="Verdana" pitchFamily="34" charset="-122"/>
-                <a:cs typeface="Verdana" pitchFamily="34" charset="-120"/>
-              </a:rPr>
-              <a:t>Two more levels. By the end, you're an Orchestrator.</a:t>
-            </a:r>
-            <a:endParaRPr lang="en-US" sz="2200" dirty="0"/>
+              <a:rPr lang="en-US" sz="2400" b="1" dirty="0">
+                <a:solidFill>
+                  <a:srgbClr val="635BFF"/>
+                </a:solidFill>
+                <a:latin typeface="Georgia" pitchFamily="34" charset="0"/>
+                <a:ea typeface="Georgia" pitchFamily="34" charset="-122"/>
+                <a:cs typeface="Georgia" pitchFamily="34" charset="-120"/>
+              </a:rPr>
+              <a:t>Two more levels. By the end, you’re an Orchestrator.</a:t>
+            </a:r>
+            <a:endParaRPr lang="en-US" sz="2400" dirty="0"/>
           </a:p>
         </p:txBody>
       </p:sp>
@@ -6312,8 +6554,8 @@
         </p:nvSpPr>
         <p:spPr>
           <a:xfrm>
-            <a:off x="457200" y="1645920"/>
-            <a:ext cx="1097280" cy="640080"/>
+            <a:off x="192024" y="2011680"/>
+            <a:ext cx="1188720" cy="640080"/>
           </a:xfrm>
           <a:prstGeom prst="roundRect">
             <a:avLst>
@@ -6321,7 +6563,9 @@
             </a:avLst>
           </a:prstGeom>
           <a:solidFill>
-            <a:srgbClr val="0A2540"/>
+            <a:srgbClr val="0A2540">
+              <a:alpha val="50000"/>
+            </a:srgbClr>
           </a:solidFill>
           <a:ln w="19050">
             <a:solidFill>
@@ -6339,8 +6583,8 @@
         </p:nvSpPr>
         <p:spPr>
           <a:xfrm>
-            <a:off x="457200" y="1645920"/>
-            <a:ext cx="1097280" cy="640080"/>
+            <a:off x="192024" y="2011680"/>
+            <a:ext cx="1188720" cy="640080"/>
           </a:xfrm>
           <a:prstGeom prst="rect">
             <a:avLst/>
@@ -6356,7 +6600,7 @@
               <a:buNone/>
             </a:pPr>
             <a:r>
-              <a:rPr lang="en-US" sz="1200" dirty="0">
+              <a:rPr lang="en-US" sz="1100" b="1" dirty="0">
                 <a:solidFill>
                   <a:srgbClr val="8B95A5"/>
                 </a:solidFill>
@@ -6366,20 +6610,59 @@
               </a:rPr>
               <a:t>Skeptic</a:t>
             </a:r>
-            <a:endParaRPr lang="en-US" sz="1200" dirty="0"/>
-          </a:p>
-        </p:txBody>
-      </p:sp>
-      <p:sp>
-        <p:nvSpPr>
-          <p:cNvPr id="5" name="Shape 3"/>
-          <p:cNvSpPr/>
-          <p:nvPr/>
-        </p:nvSpPr>
-        <p:spPr>
-          <a:xfrm>
-            <a:off x="1645920" y="1645920"/>
-            <a:ext cx="1097280" cy="640080"/>
+            <a:endParaRPr lang="en-US" sz="1100" dirty="0"/>
+          </a:p>
+        </p:txBody>
+      </p:sp>
+      <p:sp>
+        <p:nvSpPr>
+          <p:cNvPr id="5" name="Text 3"/>
+          <p:cNvSpPr/>
+          <p:nvPr/>
+        </p:nvSpPr>
+        <p:spPr>
+          <a:xfrm>
+            <a:off x="1380744" y="2011680"/>
+            <a:ext cx="73152" cy="640080"/>
+          </a:xfrm>
+          <a:prstGeom prst="rect">
+            <a:avLst/>
+          </a:prstGeom>
+          <a:noFill/>
+          <a:ln/>
+        </p:spPr>
+        <p:txBody>
+          <a:bodyPr wrap="square" lIns="0" tIns="0" rIns="0" bIns="0" rtlCol="0" anchor="ctr"/>
+          <a:lstStyle/>
+          <a:p>
+            <a:pPr algn="ctr" indent="0" marL="0">
+              <a:buNone/>
+            </a:pPr>
+            <a:r>
+              <a:rPr lang="en-US" sz="1100" dirty="0">
+                <a:solidFill>
+                  <a:srgbClr val="8B95A5"/>
+                </a:solidFill>
+                <a:latin typeface="Verdana" pitchFamily="34" charset="0"/>
+                <a:ea typeface="Verdana" pitchFamily="34" charset="-122"/>
+                <a:cs typeface="Verdana" pitchFamily="34" charset="-120"/>
+              </a:rPr>
+              <a:t>→</a:t>
+            </a:r>
+            <a:endParaRPr lang="en-US" sz="1100" dirty="0"/>
+          </a:p>
+        </p:txBody>
+      </p:sp>
+      <p:sp>
+        <p:nvSpPr>
+          <p:cNvPr id="6" name="Shape 4"/>
+          <p:cNvSpPr/>
+          <p:nvPr/>
+        </p:nvSpPr>
+        <p:spPr>
+          <a:xfrm>
+            <a:off x="1453896" y="2011680"/>
+            <a:ext cx="1188720" cy="640080"/>
           </a:xfrm>
           <a:prstGeom prst="roundRect">
             <a:avLst>
@@ -6399,14 +6682,14 @@
       </p:sp>
       <p:sp>
         <p:nvSpPr>
-          <p:cNvPr id="6" name="Text 4"/>
-          <p:cNvSpPr/>
-          <p:nvPr/>
-        </p:nvSpPr>
-        <p:spPr>
-          <a:xfrm>
-            <a:off x="1645920" y="1645920"/>
-            <a:ext cx="1097280" cy="640080"/>
+          <p:cNvPr id="7" name="Text 5"/>
+          <p:cNvSpPr/>
+          <p:nvPr/>
+        </p:nvSpPr>
+        <p:spPr>
+          <a:xfrm>
+            <a:off x="1453896" y="2011680"/>
+            <a:ext cx="1188720" cy="640080"/>
           </a:xfrm>
           <a:prstGeom prst="rect">
             <a:avLst/>
@@ -6422,7 +6705,7 @@
               <a:buNone/>
             </a:pPr>
             <a:r>
-              <a:rPr lang="en-US" sz="1200" b="1" dirty="0">
+              <a:rPr lang="en-US" sz="1100" b="1" dirty="0">
                 <a:solidFill>
                   <a:srgbClr val="FFFFFF"/>
                 </a:solidFill>
@@ -6432,20 +6715,59 @@
               </a:rPr>
               <a:t>Explorer</a:t>
             </a:r>
-            <a:endParaRPr lang="en-US" sz="1200" dirty="0"/>
-          </a:p>
-        </p:txBody>
-      </p:sp>
-      <p:sp>
-        <p:nvSpPr>
-          <p:cNvPr id="7" name="Shape 5"/>
-          <p:cNvSpPr/>
-          <p:nvPr/>
-        </p:nvSpPr>
-        <p:spPr>
-          <a:xfrm>
-            <a:off x="2834640" y="1645920"/>
-            <a:ext cx="1097280" cy="640080"/>
+            <a:endParaRPr lang="en-US" sz="1100" dirty="0"/>
+          </a:p>
+        </p:txBody>
+      </p:sp>
+      <p:sp>
+        <p:nvSpPr>
+          <p:cNvPr id="8" name="Text 6"/>
+          <p:cNvSpPr/>
+          <p:nvPr/>
+        </p:nvSpPr>
+        <p:spPr>
+          <a:xfrm>
+            <a:off x="2642616" y="2011680"/>
+            <a:ext cx="73152" cy="640080"/>
+          </a:xfrm>
+          <a:prstGeom prst="rect">
+            <a:avLst/>
+          </a:prstGeom>
+          <a:noFill/>
+          <a:ln/>
+        </p:spPr>
+        <p:txBody>
+          <a:bodyPr wrap="square" lIns="0" tIns="0" rIns="0" bIns="0" rtlCol="0" anchor="ctr"/>
+          <a:lstStyle/>
+          <a:p>
+            <a:pPr algn="ctr" indent="0" marL="0">
+              <a:buNone/>
+            </a:pPr>
+            <a:r>
+              <a:rPr lang="en-US" sz="1100" dirty="0">
+                <a:solidFill>
+                  <a:srgbClr val="8B95A5"/>
+                </a:solidFill>
+                <a:latin typeface="Verdana" pitchFamily="34" charset="0"/>
+                <a:ea typeface="Verdana" pitchFamily="34" charset="-122"/>
+                <a:cs typeface="Verdana" pitchFamily="34" charset="-120"/>
+              </a:rPr>
+              <a:t>→</a:t>
+            </a:r>
+            <a:endParaRPr lang="en-US" sz="1100" dirty="0"/>
+          </a:p>
+        </p:txBody>
+      </p:sp>
+      <p:sp>
+        <p:nvSpPr>
+          <p:cNvPr id="9" name="Shape 7"/>
+          <p:cNvSpPr/>
+          <p:nvPr/>
+        </p:nvSpPr>
+        <p:spPr>
+          <a:xfrm>
+            <a:off x="2715768" y="2011680"/>
+            <a:ext cx="1188720" cy="640080"/>
           </a:xfrm>
           <a:prstGeom prst="roundRect">
             <a:avLst>
@@ -6465,14 +6787,14 @@
       </p:sp>
       <p:sp>
         <p:nvSpPr>
-          <p:cNvPr id="8" name="Text 6"/>
-          <p:cNvSpPr/>
-          <p:nvPr/>
-        </p:nvSpPr>
-        <p:spPr>
-          <a:xfrm>
-            <a:off x="2834640" y="1645920"/>
-            <a:ext cx="1097280" cy="640080"/>
+          <p:cNvPr id="10" name="Text 8"/>
+          <p:cNvSpPr/>
+          <p:nvPr/>
+        </p:nvSpPr>
+        <p:spPr>
+          <a:xfrm>
+            <a:off x="2715768" y="2011680"/>
+            <a:ext cx="1188720" cy="640080"/>
           </a:xfrm>
           <a:prstGeom prst="rect">
             <a:avLst/>
@@ -6488,7 +6810,7 @@
               <a:buNone/>
             </a:pPr>
             <a:r>
-              <a:rPr lang="en-US" sz="1200" b="1" dirty="0">
+              <a:rPr lang="en-US" sz="1100" b="1" dirty="0">
                 <a:solidFill>
                   <a:srgbClr val="FFFFFF"/>
                 </a:solidFill>
@@ -6498,20 +6820,59 @@
               </a:rPr>
               <a:t>Whisperer</a:t>
             </a:r>
-            <a:endParaRPr lang="en-US" sz="1200" dirty="0"/>
-          </a:p>
-        </p:txBody>
-      </p:sp>
-      <p:sp>
-        <p:nvSpPr>
-          <p:cNvPr id="9" name="Shape 7"/>
-          <p:cNvSpPr/>
-          <p:nvPr/>
-        </p:nvSpPr>
-        <p:spPr>
-          <a:xfrm>
-            <a:off x="4023360" y="1645920"/>
-            <a:ext cx="1097280" cy="640080"/>
+            <a:endParaRPr lang="en-US" sz="1100" dirty="0"/>
+          </a:p>
+        </p:txBody>
+      </p:sp>
+      <p:sp>
+        <p:nvSpPr>
+          <p:cNvPr id="11" name="Text 9"/>
+          <p:cNvSpPr/>
+          <p:nvPr/>
+        </p:nvSpPr>
+        <p:spPr>
+          <a:xfrm>
+            <a:off x="3904488" y="2011680"/>
+            <a:ext cx="73152" cy="640080"/>
+          </a:xfrm>
+          <a:prstGeom prst="rect">
+            <a:avLst/>
+          </a:prstGeom>
+          <a:noFill/>
+          <a:ln/>
+        </p:spPr>
+        <p:txBody>
+          <a:bodyPr wrap="square" lIns="0" tIns="0" rIns="0" bIns="0" rtlCol="0" anchor="ctr"/>
+          <a:lstStyle/>
+          <a:p>
+            <a:pPr algn="ctr" indent="0" marL="0">
+              <a:buNone/>
+            </a:pPr>
+            <a:r>
+              <a:rPr lang="en-US" sz="1100" dirty="0">
+                <a:solidFill>
+                  <a:srgbClr val="8B95A5"/>
+                </a:solidFill>
+                <a:latin typeface="Verdana" pitchFamily="34" charset="0"/>
+                <a:ea typeface="Verdana" pitchFamily="34" charset="-122"/>
+                <a:cs typeface="Verdana" pitchFamily="34" charset="-120"/>
+              </a:rPr>
+              <a:t>→</a:t>
+            </a:r>
+            <a:endParaRPr lang="en-US" sz="1100" dirty="0"/>
+          </a:p>
+        </p:txBody>
+      </p:sp>
+      <p:sp>
+        <p:nvSpPr>
+          <p:cNvPr id="12" name="Shape 10"/>
+          <p:cNvSpPr/>
+          <p:nvPr/>
+        </p:nvSpPr>
+        <p:spPr>
+          <a:xfrm>
+            <a:off x="3977640" y="2011680"/>
+            <a:ext cx="1188720" cy="640080"/>
           </a:xfrm>
           <a:prstGeom prst="roundRect">
             <a:avLst>
@@ -6531,14 +6892,14 @@
       </p:sp>
       <p:sp>
         <p:nvSpPr>
-          <p:cNvPr id="10" name="Text 8"/>
-          <p:cNvSpPr/>
-          <p:nvPr/>
-        </p:nvSpPr>
-        <p:spPr>
-          <a:xfrm>
-            <a:off x="4023360" y="1645920"/>
-            <a:ext cx="1097280" cy="640080"/>
+          <p:cNvPr id="13" name="Text 11"/>
+          <p:cNvSpPr/>
+          <p:nvPr/>
+        </p:nvSpPr>
+        <p:spPr>
+          <a:xfrm>
+            <a:off x="3977640" y="2011680"/>
+            <a:ext cx="1188720" cy="640080"/>
           </a:xfrm>
           <a:prstGeom prst="rect">
             <a:avLst/>
@@ -6554,7 +6915,7 @@
               <a:buNone/>
             </a:pPr>
             <a:r>
-              <a:rPr lang="en-US" sz="1200" b="1" dirty="0">
+              <a:rPr lang="en-US" sz="1100" b="1" dirty="0">
                 <a:solidFill>
                   <a:srgbClr val="FFFFFF"/>
                 </a:solidFill>
@@ -6564,20 +6925,59 @@
               </a:rPr>
               <a:t>Strategist</a:t>
             </a:r>
-            <a:endParaRPr lang="en-US" sz="1200" dirty="0"/>
-          </a:p>
-        </p:txBody>
-      </p:sp>
-      <p:sp>
-        <p:nvSpPr>
-          <p:cNvPr id="11" name="Shape 9"/>
-          <p:cNvSpPr/>
-          <p:nvPr/>
-        </p:nvSpPr>
-        <p:spPr>
-          <a:xfrm>
-            <a:off x="5212080" y="1645920"/>
-            <a:ext cx="1097280" cy="640080"/>
+            <a:endParaRPr lang="en-US" sz="1100" dirty="0"/>
+          </a:p>
+        </p:txBody>
+      </p:sp>
+      <p:sp>
+        <p:nvSpPr>
+          <p:cNvPr id="14" name="Text 12"/>
+          <p:cNvSpPr/>
+          <p:nvPr/>
+        </p:nvSpPr>
+        <p:spPr>
+          <a:xfrm>
+            <a:off x="5166360" y="2011680"/>
+            <a:ext cx="73152" cy="640080"/>
+          </a:xfrm>
+          <a:prstGeom prst="rect">
+            <a:avLst/>
+          </a:prstGeom>
+          <a:noFill/>
+          <a:ln/>
+        </p:spPr>
+        <p:txBody>
+          <a:bodyPr wrap="square" lIns="0" tIns="0" rIns="0" bIns="0" rtlCol="0" anchor="ctr"/>
+          <a:lstStyle/>
+          <a:p>
+            <a:pPr algn="ctr" indent="0" marL="0">
+              <a:buNone/>
+            </a:pPr>
+            <a:r>
+              <a:rPr lang="en-US" sz="1100" dirty="0">
+                <a:solidFill>
+                  <a:srgbClr val="8B95A5"/>
+                </a:solidFill>
+                <a:latin typeface="Verdana" pitchFamily="34" charset="0"/>
+                <a:ea typeface="Verdana" pitchFamily="34" charset="-122"/>
+                <a:cs typeface="Verdana" pitchFamily="34" charset="-120"/>
+              </a:rPr>
+              <a:t>→</a:t>
+            </a:r>
+            <a:endParaRPr lang="en-US" sz="1100" dirty="0"/>
+          </a:p>
+        </p:txBody>
+      </p:sp>
+      <p:sp>
+        <p:nvSpPr>
+          <p:cNvPr id="15" name="Shape 13"/>
+          <p:cNvSpPr/>
+          <p:nvPr/>
+        </p:nvSpPr>
+        <p:spPr>
+          <a:xfrm>
+            <a:off x="5239512" y="2011680"/>
+            <a:ext cx="1188720" cy="640080"/>
           </a:xfrm>
           <a:prstGeom prst="roundRect">
             <a:avLst>
@@ -6597,14 +6997,14 @@
       </p:sp>
       <p:sp>
         <p:nvSpPr>
-          <p:cNvPr id="12" name="Text 10"/>
-          <p:cNvSpPr/>
-          <p:nvPr/>
-        </p:nvSpPr>
-        <p:spPr>
-          <a:xfrm>
-            <a:off x="5212080" y="1645920"/>
-            <a:ext cx="1097280" cy="640080"/>
+          <p:cNvPr id="16" name="Text 14"/>
+          <p:cNvSpPr/>
+          <p:nvPr/>
+        </p:nvSpPr>
+        <p:spPr>
+          <a:xfrm>
+            <a:off x="5239512" y="2011680"/>
+            <a:ext cx="1188720" cy="640080"/>
           </a:xfrm>
           <a:prstGeom prst="rect">
             <a:avLst/>
@@ -6620,7 +7020,7 @@
               <a:buNone/>
             </a:pPr>
             <a:r>
-              <a:rPr lang="en-US" sz="1200" b="1" dirty="0">
+              <a:rPr lang="en-US" sz="1100" b="1" dirty="0">
                 <a:solidFill>
                   <a:srgbClr val="FFFFFF"/>
                 </a:solidFill>
@@ -6630,20 +7030,59 @@
               </a:rPr>
               <a:t>Operator</a:t>
             </a:r>
-            <a:endParaRPr lang="en-US" sz="1200" dirty="0"/>
-          </a:p>
-        </p:txBody>
-      </p:sp>
-      <p:sp>
-        <p:nvSpPr>
-          <p:cNvPr id="13" name="Shape 11"/>
-          <p:cNvSpPr/>
-          <p:nvPr/>
-        </p:nvSpPr>
-        <p:spPr>
-          <a:xfrm>
-            <a:off x="6400800" y="1645920"/>
-            <a:ext cx="1097280" cy="640080"/>
+            <a:endParaRPr lang="en-US" sz="1100" dirty="0"/>
+          </a:p>
+        </p:txBody>
+      </p:sp>
+      <p:sp>
+        <p:nvSpPr>
+          <p:cNvPr id="17" name="Text 15"/>
+          <p:cNvSpPr/>
+          <p:nvPr/>
+        </p:nvSpPr>
+        <p:spPr>
+          <a:xfrm>
+            <a:off x="6428232" y="2011680"/>
+            <a:ext cx="73152" cy="640080"/>
+          </a:xfrm>
+          <a:prstGeom prst="rect">
+            <a:avLst/>
+          </a:prstGeom>
+          <a:noFill/>
+          <a:ln/>
+        </p:spPr>
+        <p:txBody>
+          <a:bodyPr wrap="square" lIns="0" tIns="0" rIns="0" bIns="0" rtlCol="0" anchor="ctr"/>
+          <a:lstStyle/>
+          <a:p>
+            <a:pPr algn="ctr" indent="0" marL="0">
+              <a:buNone/>
+            </a:pPr>
+            <a:r>
+              <a:rPr lang="en-US" sz="1100" dirty="0">
+                <a:solidFill>
+                  <a:srgbClr val="8B95A5"/>
+                </a:solidFill>
+                <a:latin typeface="Verdana" pitchFamily="34" charset="0"/>
+                <a:ea typeface="Verdana" pitchFamily="34" charset="-122"/>
+                <a:cs typeface="Verdana" pitchFamily="34" charset="-120"/>
+              </a:rPr>
+              <a:t>→</a:t>
+            </a:r>
+            <a:endParaRPr lang="en-US" sz="1100" dirty="0"/>
+          </a:p>
+        </p:txBody>
+      </p:sp>
+      <p:sp>
+        <p:nvSpPr>
+          <p:cNvPr id="18" name="Shape 16"/>
+          <p:cNvSpPr/>
+          <p:nvPr/>
+        </p:nvSpPr>
+        <p:spPr>
+          <a:xfrm>
+            <a:off x="6501384" y="2011680"/>
+            <a:ext cx="1188720" cy="640080"/>
           </a:xfrm>
           <a:prstGeom prst="roundRect">
             <a:avLst>
@@ -6663,14 +7102,14 @@
       </p:sp>
       <p:sp>
         <p:nvSpPr>
-          <p:cNvPr id="14" name="Text 12"/>
-          <p:cNvSpPr/>
-          <p:nvPr/>
-        </p:nvSpPr>
-        <p:spPr>
-          <a:xfrm>
-            <a:off x="6400800" y="1645920"/>
-            <a:ext cx="1097280" cy="640080"/>
+          <p:cNvPr id="19" name="Text 17"/>
+          <p:cNvSpPr/>
+          <p:nvPr/>
+        </p:nvSpPr>
+        <p:spPr>
+          <a:xfrm>
+            <a:off x="6501384" y="2011680"/>
+            <a:ext cx="1188720" cy="640080"/>
           </a:xfrm>
           <a:prstGeom prst="rect">
             <a:avLst/>
@@ -6686,7 +7125,7 @@
               <a:buNone/>
             </a:pPr>
             <a:r>
-              <a:rPr lang="en-US" sz="1200" b="1" dirty="0">
+              <a:rPr lang="en-US" sz="1100" b="1" dirty="0">
                 <a:solidFill>
                   <a:srgbClr val="FFFFFF"/>
                 </a:solidFill>
@@ -6696,20 +7135,59 @@
               </a:rPr>
               <a:t>Orchestrator</a:t>
             </a:r>
-            <a:endParaRPr lang="en-US" sz="1200" dirty="0"/>
-          </a:p>
-        </p:txBody>
-      </p:sp>
-      <p:sp>
-        <p:nvSpPr>
-          <p:cNvPr id="15" name="Shape 13"/>
-          <p:cNvSpPr/>
-          <p:nvPr/>
-        </p:nvSpPr>
-        <p:spPr>
-          <a:xfrm>
-            <a:off x="7589520" y="1645920"/>
-            <a:ext cx="1097280" cy="640080"/>
+            <a:endParaRPr lang="en-US" sz="1100" dirty="0"/>
+          </a:p>
+        </p:txBody>
+      </p:sp>
+      <p:sp>
+        <p:nvSpPr>
+          <p:cNvPr id="20" name="Text 18"/>
+          <p:cNvSpPr/>
+          <p:nvPr/>
+        </p:nvSpPr>
+        <p:spPr>
+          <a:xfrm>
+            <a:off x="7690104" y="2011680"/>
+            <a:ext cx="73152" cy="640080"/>
+          </a:xfrm>
+          <a:prstGeom prst="rect">
+            <a:avLst/>
+          </a:prstGeom>
+          <a:noFill/>
+          <a:ln/>
+        </p:spPr>
+        <p:txBody>
+          <a:bodyPr wrap="square" lIns="0" tIns="0" rIns="0" bIns="0" rtlCol="0" anchor="ctr"/>
+          <a:lstStyle/>
+          <a:p>
+            <a:pPr algn="ctr" indent="0" marL="0">
+              <a:buNone/>
+            </a:pPr>
+            <a:r>
+              <a:rPr lang="en-US" sz="1100" dirty="0">
+                <a:solidFill>
+                  <a:srgbClr val="8B95A5"/>
+                </a:solidFill>
+                <a:latin typeface="Verdana" pitchFamily="34" charset="0"/>
+                <a:ea typeface="Verdana" pitchFamily="34" charset="-122"/>
+                <a:cs typeface="Verdana" pitchFamily="34" charset="-120"/>
+              </a:rPr>
+              <a:t>→</a:t>
+            </a:r>
+            <a:endParaRPr lang="en-US" sz="1100" dirty="0"/>
+          </a:p>
+        </p:txBody>
+      </p:sp>
+      <p:sp>
+        <p:nvSpPr>
+          <p:cNvPr id="21" name="Shape 19"/>
+          <p:cNvSpPr/>
+          <p:nvPr/>
+        </p:nvSpPr>
+        <p:spPr>
+          <a:xfrm>
+            <a:off x="7763256" y="2011680"/>
+            <a:ext cx="1188720" cy="640080"/>
           </a:xfrm>
           <a:prstGeom prst="roundRect">
             <a:avLst>
@@ -6717,26 +7195,28 @@
             </a:avLst>
           </a:prstGeom>
           <a:solidFill>
-            <a:srgbClr val="0A2540"/>
+            <a:srgbClr val="0A2540">
+              <a:alpha val="50000"/>
+            </a:srgbClr>
           </a:solidFill>
           <a:ln w="19050">
             <a:solidFill>
               <a:srgbClr val="8B95A5"/>
             </a:solidFill>
-            <a:prstDash val="solid"/>
+            <a:prstDash val="dash"/>
           </a:ln>
         </p:spPr>
       </p:sp>
       <p:sp>
         <p:nvSpPr>
-          <p:cNvPr id="16" name="Text 14"/>
-          <p:cNvSpPr/>
-          <p:nvPr/>
-        </p:nvSpPr>
-        <p:spPr>
-          <a:xfrm>
-            <a:off x="7589520" y="1645920"/>
-            <a:ext cx="1097280" cy="640080"/>
+          <p:cNvPr id="22" name="Text 20"/>
+          <p:cNvSpPr/>
+          <p:nvPr/>
+        </p:nvSpPr>
+        <p:spPr>
+          <a:xfrm>
+            <a:off x="7763256" y="2011680"/>
+            <a:ext cx="1188720" cy="640080"/>
           </a:xfrm>
           <a:prstGeom prst="rect">
             <a:avLst/>
@@ -6752,7 +7232,7 @@
               <a:buNone/>
             </a:pPr>
             <a:r>
-              <a:rPr lang="en-US" sz="1200" dirty="0">
+              <a:rPr lang="en-US" sz="1100" b="1" dirty="0">
                 <a:solidFill>
                   <a:srgbClr val="8B95A5"/>
                 </a:solidFill>
@@ -6762,19 +7242,19 @@
               </a:rPr>
               <a:t>Builder</a:t>
             </a:r>
-            <a:endParaRPr lang="en-US" sz="1200" dirty="0"/>
-          </a:p>
-        </p:txBody>
-      </p:sp>
-      <p:sp>
-        <p:nvSpPr>
-          <p:cNvPr id="17" name="Text 15"/>
-          <p:cNvSpPr/>
-          <p:nvPr/>
-        </p:nvSpPr>
-        <p:spPr>
-          <a:xfrm>
-            <a:off x="914400" y="2743200"/>
+            <a:endParaRPr lang="en-US" sz="1100" dirty="0"/>
+          </a:p>
+        </p:txBody>
+      </p:sp>
+      <p:sp>
+        <p:nvSpPr>
+          <p:cNvPr id="23" name="Text 21"/>
+          <p:cNvSpPr/>
+          <p:nvPr/>
+        </p:nvSpPr>
+        <p:spPr>
+          <a:xfrm>
+            <a:off x="914400" y="3108960"/>
             <a:ext cx="7315200" cy="914400"/>
           </a:xfrm>
           <a:prstGeom prst="rect">
@@ -6791,13 +7271,13 @@
               <a:buNone/>
             </a:pPr>
             <a:r>
-              <a:rPr lang="en-US" sz="2400" dirty="0">
-                <a:solidFill>
-                  <a:srgbClr val="8B95A5"/>
-                </a:solidFill>
-                <a:latin typeface="Verdana" pitchFamily="34" charset="0"/>
-                <a:ea typeface="Verdana" pitchFamily="34" charset="-122"/>
-                <a:cs typeface="Verdana" pitchFamily="34" charset="-120"/>
+              <a:rPr lang="en-US" sz="2400" b="1" dirty="0">
+                <a:solidFill>
+                  <a:srgbClr val="635BFF"/>
+                </a:solidFill>
+                <a:latin typeface="Georgia" pitchFamily="34" charset="0"/>
+                <a:ea typeface="Georgia" pitchFamily="34" charset="-122"/>
+                <a:cs typeface="Georgia" pitchFamily="34" charset="-120"/>
               </a:rPr>
               <a:t>You started as an Explorer.</a:t>
             </a:r>
@@ -6808,15 +7288,15 @@
               <a:buNone/>
             </a:pPr>
             <a:r>
-              <a:rPr lang="en-US" sz="2400" dirty="0">
-                <a:solidFill>
-                  <a:srgbClr val="8B95A5"/>
-                </a:solidFill>
-                <a:latin typeface="Verdana" pitchFamily="34" charset="0"/>
-                <a:ea typeface="Verdana" pitchFamily="34" charset="-122"/>
-                <a:cs typeface="Verdana" pitchFamily="34" charset="-120"/>
-              </a:rPr>
-              <a:t>You're now an Orchestrator.</a:t>
+              <a:rPr lang="en-US" sz="2400" b="1" dirty="0">
+                <a:solidFill>
+                  <a:srgbClr val="635BFF"/>
+                </a:solidFill>
+                <a:latin typeface="Georgia" pitchFamily="34" charset="0"/>
+                <a:ea typeface="Georgia" pitchFamily="34" charset="-122"/>
+                <a:cs typeface="Georgia" pitchFamily="34" charset="-120"/>
+              </a:rPr>
+              <a:t>You’re now an Orchestrator.</a:t>
             </a:r>
             <a:endParaRPr lang="en-US" sz="2400" dirty="0"/>
           </a:p>

--- a/decks/workshop-2-orchestrator/workshop-2-orchestrator.pptx
+++ b/decks/workshop-2-orchestrator/workshop-2-orchestrator.pptx
@@ -30,9 +30,11 @@
     <p:sldId id="278" r:id="rId24"/>
     <p:sldId id="279" r:id="rId25"/>
     <p:sldId id="280" r:id="rId26"/>
+    <p:sldId id="281" r:id="rId27"/>
+    <p:sldId id="282" r:id="rId28"/>
   </p:sldIdLst>
   <p:notesMasterIdLst>
-    <p:notesMasterId r:id="rId27"/>
+    <p:notesMasterId r:id="rId29"/>
   </p:notesMasterIdLst>
   <p:sldSz cx="9144000" cy="5143500"/>
   <p:notesSz cx="5143500" cy="9144000"/>
@@ -526,7 +528,7 @@
           <a:p>
             <a:r>
               <a:rPr lang="en-US" dirty="0"/>
-              <a:t>Workshop 2 of 2 in the AI Academy series. 1 hour, hands-on. Everyone needs ChatGPT Org open on their laptop. Pre-req: facilitator must have enabled Gmail/apps in Workspace Settings → Apps and created three Custom GPTs (Research, Draft, Review) published to the org workspace.</a:t>
+              <a:t>Workshop 2 of 2 in the AI Academy series. 1 hour, hands-on. Everyone needs Claude open on their laptop. Pre-req: facilitator must have created and provisioned three org Skills (Research, Draft, Review) before the session.</a:t>
             </a:r>
             <a:endParaRPr lang="en-US" dirty="0"/>
           </a:p>
@@ -614,7 +616,7 @@
           <a:p>
             <a:r>
               <a:rPr lang="en-US" dirty="0"/>
-              <a:t>Transition to trust. This is the most important mindset shift in the entire series. Four simple rules. The last one catches people: ChatGPT Org's privacy guarantee means your data isn't used for training, but that says nothing about whether the output is accurate. Don't conflate safety with correctness.</a:t>
+              <a:t>This is the bigger wow. Claude reads multiple files from their Mac — not uploaded, not copy-pasted, just... there. Cowork runs in a sandboxed VM so their files are safe. Have a sample folder with 2-3 documents ready for anyone without their own. Ask: "How long would it take you to read three documents and write a summary?" If time is tight, this can be a facilitator demo — but the individual experience is much stronger.</a:t>
             </a:r>
             <a:endParaRPr lang="en-US" dirty="0"/>
           </a:p>
@@ -702,7 +704,7 @@
           <a:p>
             <a:r>
               <a:rPr lang="en-US" dirty="0"/>
-              <a:t>Can be individual or group discussion if time is tight — but don't skip it. The "feels right" moment is the key insight: AI output often reads with high confidence regardless of accuracy. The most dangerous outputs are the ones that feel right but aren't. 3-4 minutes.</a:t>
+              <a:t>This slide names what they just experienced. Three sources, zero copy-paste. The principle: give Claude the source, stop being the courier. And there's more — Google Drive, Slack, Calendar, and other integrations are all connectable. These three are just the start.</a:t>
             </a:r>
             <a:endParaRPr lang="en-US" dirty="0"/>
           </a:p>
@@ -790,7 +792,7 @@
           <a:p>
             <a:r>
               <a:rPr lang="en-US" dirty="0"/>
-              <a:t>An AI coding agent autonomously deleted a user's entire codebase while trying to fix a bug. The user had trusted the agent to work autonomously. Months of work, gone in seconds. This is the gut punch that makes the trust rules feel necessary, not theoretical. Source: https://www.theregister.co.uk/2025/07/15/replit_ai_agent_deletes_codebase/</a:t>
+              <a:t>Transition to trust. This is the most important mindset shift in the entire series. Four simple rules. The last one catches people: Claude Team/Enterprise's privacy guarantee means your data isn't used for training, but that says nothing about whether the output is accurate. Don't conflate safety with correctness.</a:t>
             </a:r>
             <a:endParaRPr lang="en-US" dirty="0"/>
           </a:p>
@@ -878,7 +880,7 @@
           <a:p>
             <a:r>
               <a:rPr lang="en-US" dirty="0"/>
-              <a:t>End the trust section firmly. "You review. You judge. You approve. The agent does the grunt work." This earns them the right to hand agents more complex work in Act 3 — they've proven they can verify.</a:t>
+              <a:t>Can be individual or group discussion if time is tight — but don't skip it. The "feels right" moment is the key insight: AI output often reads with high confidence regardless of accuracy. The most dangerous outputs are the ones that feel right but aren't. 3-4 minutes.</a:t>
             </a:r>
             <a:endParaRPr lang="en-US" dirty="0"/>
           </a:p>
@@ -966,7 +968,7 @@
           <a:p>
             <a:r>
               <a:rPr lang="en-US" dirty="0"/>
-              <a:t>Quick pivot beat. The kitchen brigade metaphor: "One chef doing a 10-course dinner alone? Burnout. Mistakes. Forgotten appetiser. A kitchen brigade — each chef at a station — serves everything perfectly." Plant the word "specialised." Then move on.</a:t>
+              <a:t>An AI coding agent autonomously deleted a user's entire codebase while trying to fix a bug. The user had trusted the agent to work autonomously. Months of work, gone in seconds. This is the gut punch that makes the trust rules feel necessary, not theoretical. Source: https://www.theregister.co.uk/2025/07/15/replit_ai_agent_deletes_codebase/</a:t>
             </a:r>
             <a:endParaRPr lang="en-US" dirty="0"/>
           </a:p>
@@ -1054,7 +1056,7 @@
           <a:p>
             <a:r>
               <a:rPr lang="en-US" dirty="0"/>
-              <a:t>Group exercise. Facilitator presents a complex task (the tea presentation or another multi-step scenario). Discussion with whiteboard or shared doc. Target: 3-4 phases. e.g., Research → Draft → Review → Approval. Don't let it go beyond 4 — more than that overcomplicates the demo. 5-6 minutes.</a:t>
+              <a:t>End the trust section firmly. "You review. You judge. You approve. Claude does the grunt work." This earns them the right to hand agents more complex work in Act 3 — they've proven they can verify.</a:t>
             </a:r>
             <a:endParaRPr lang="en-US" dirty="0"/>
           </a:p>
@@ -1142,7 +1144,7 @@
           <a:p>
             <a:r>
               <a:rPr lang="en-US" dirty="0"/>
-              <a:t>This visual should mirror the copy-paste trap (Slide 3) and agent way (Slide 5) — same layout, same four-step pattern. But now each step is a specialised agent. Only human at the final step. "Write this down: break big tasks into focused steps. Pass results forward. Filter context between each."</a:t>
+              <a:t>Quick pivot beat. The kitchen brigade metaphor: "One chef doing a 10-course dinner alone? Burnout. Mistakes. Forgotten appetiser. A kitchen brigade — each chef at a station — serves everything perfectly." Plant the word "specialised." Then move on.</a:t>
             </a:r>
             <a:endParaRPr lang="en-US" dirty="0"/>
           </a:p>
@@ -1230,7 +1232,7 @@
           <a:p>
             <a:r>
               <a:rPr lang="en-US" dirty="0"/>
-              <a:t>Facilitator switches to ChatGPT for the live demo. Run the chain using pre-built Custom GPTs: (1) Open Research Agent → give it the task → show the structured brief output. (2) Open Draft Agent → paste the brief → show the polished proposal. (3) Open Review Agent → paste the draft + original brief → show the critique. Narrate every step. Point out what Draft Agent doesn't know: it never saw the raw research, only the structured brief. That's filtered context. Compare final output to what a single ChatGPT conversation would have produced. Take your time — this demo earns the exercise that follows. ~7 minutes.</a:t>
+              <a:t>Group exercise. Facilitator presents a complex task (the tea presentation or another multi-step scenario). Discussion with whiteboard or shared doc. Target: 3-4 phases. e.g., Research → Draft → Review → Approval. Don't let it go beyond 4 — more than that overcomplicates the demo. 5-6 minutes.</a:t>
             </a:r>
             <a:endParaRPr lang="en-US" dirty="0"/>
           </a:p>
@@ -1318,7 +1320,7 @@
           <a:p>
             <a:r>
               <a:rPr lang="en-US" dirty="0"/>
-              <a:t>10 minutes. Attendees choose their running task from Workshop 1 or the tea presentation. Custom GPTs are in the ChatGPT sidebar. Fallback if time runs short: Phase 1 becomes a facilitator demo, attendees do Phase 2 only. The discussion matters more than both phases completing. Ask: "Where did the chain produce better results? Where did the handoff lose something?"</a:t>
+              <a:t>This visual should mirror the copy-paste trap (Slide 3) and agent way (Slide 5) — same layout, same four-step pattern. But now each step is a specialised Skill. Only human at the final step. "Write this down: break big tasks into focused steps. Pass results forward. Filter context between each."</a:t>
             </a:r>
             <a:endParaRPr lang="en-US" dirty="0"/>
           </a:p>
@@ -1406,7 +1408,7 @@
           <a:p>
             <a:r>
               <a:rPr lang="en-US" dirty="0"/>
-              <a:t>The Workshop 1 callback. In the last session they set up custom instructions for themselves. Each Custom GPT is the same idea — but for a specific agent with a specific job. They've been building skills since last session; now each agent gets its own.</a:t>
+              <a:t>Facilitator switches to Claude for the live demo. Run the chain using pre-built org Skills: (1) New conversation → give it the research task → the Research Skill kicks in → show the structured brief output. (2) New conversation → paste the brief → the Draft Skill kicks in → show the polished proposal. (3) New conversation → paste the draft + original brief → the Review Skill kicks in → show the critique. Narrate every step. Point out what the Draft Skill doesn't know: it never saw the raw research, only the structured brief. That's filtered context — each new conversation provides isolation. Compare final output to what a single Claude conversation would have produced. Take your time — this demo earns the exercise that follows. ~7 minutes.</a:t>
             </a:r>
             <a:endParaRPr lang="en-US" dirty="0"/>
           </a:p>
@@ -1582,7 +1584,7 @@
           <a:p>
             <a:r>
               <a:rPr lang="en-US" dirty="0"/>
-              <a:t>Show where to find the system prompt (click Custom GPT name → configure). Take 2-3 suggestions from the group. Discuss what difference each change would make. The system prompt is tangible — they can see it, read it, edit it. "When you edit that prompt, every future run gets better. Your feedback becomes the skill."</a:t>
+              <a:t>10 minutes. Attendees choose their running task from Workshop 1 or the tea presentation. The org Skills auto-activate based on the task. Fallback if time runs short: Phase 1 becomes a facilitator demo, attendees do Phase 2 only. The discussion matters more than both phases completing. Ask: "Where did the chain produce better results? Where did the handoff lose something?"</a:t>
             </a:r>
             <a:endParaRPr lang="en-US" dirty="0"/>
           </a:p>
@@ -1670,7 +1672,7 @@
           <a:p>
             <a:r>
               <a:rPr lang="en-US" dirty="0"/>
-              <a:t>Emotional climax. Give this a full beat. "And in ChatGPT Org, when you improve a shared agent, everyone benefits." This is the payoff of the entire skills arc that started in Workshop 1.</a:t>
+              <a:t>The Workshop 1 callback. In the last session they set up personal preferences (rules) and enabled Skills. Each org Skill in the chain is the same idea taken further — specific instructions for a specific role with a specific job. They've been building persistent context since last session; now each agent gets its own.</a:t>
             </a:r>
             <a:endParaRPr lang="en-US" dirty="0"/>
           </a:p>
@@ -1758,7 +1760,7 @@
           <a:p>
             <a:r>
               <a:rPr lang="en-US" dirty="0"/>
-              <a:t>The rational payoff begins. Manual workflow: search, copy-paste, draft, re-prompt, reformat, review, apply. All the steps they recognised in Slide 3. "1.5 hours of grunt work where you're the bottleneck at every step."</a:t>
+              <a:t>Show where to find the Skill instructions (Customize → Skills → click the Skill). Take 2-3 suggestions from the group. Discuss what difference each change would make. The SKILL.md is tangible — they can see it, read it, edit it. "When you edit that SKILL.md, every future use gets better. Your feedback becomes the skill."</a:t>
             </a:r>
             <a:endParaRPr lang="en-US" dirty="0"/>
           </a:p>
@@ -1846,7 +1848,7 @@
           <a:p>
             <a:r>
               <a:rPr lang="en-US" dirty="0"/>
-              <a:t>Chained workflow: agents handle 1 hour 15 minutes of work. You spend 15 minutes on judgment — reviewing, deciding, approving. "Same tea presentation. The chain gets smarter every time. Your feedback becomes skills."</a:t>
+              <a:t>Emotional climax. Give this a full beat. "And as an org Skill, when you improve it, everyone benefits." This is the payoff of the entire skills arc that started in Workshop 1. For Pro plan audiences: "Every future use benefits."</a:t>
             </a:r>
             <a:endParaRPr lang="en-US" dirty="0"/>
           </a:p>
@@ -1934,7 +1936,7 @@
           <a:p>
             <a:r>
               <a:rPr lang="en-US" dirty="0"/>
-              <a:t>Graduation moment. "You learned to whisper. You became a strategist. You let agents operate. You orchestrated the brigade." This is the emotional payoff. Make it feel earned — they completed a 2-session AI Academy. Builder is still dimmed — that's the horizon for those who want to go further.</a:t>
+              <a:t>The rational payoff begins. Manual workflow: search, copy-paste, draft, re-prompt, reformat, review, apply. All the steps they recognised in Slide 3. "1.5 hours of grunt work where you're the bottleneck at every step."</a:t>
             </a:r>
             <a:endParaRPr lang="en-US" dirty="0"/>
           </a:p>
@@ -2022,7 +2024,7 @@
           <a:p>
             <a:r>
               <a:rPr lang="en-US" dirty="0"/>
-              <a:t>Final CTA. "Now go try it — one task, this week." Builder tease for the curious: "And if you want to go further — building plugins, connecting agents to your actual systems, automating entire workflows — that's the Builder level. That's what's next." But don't oversell — most attendees won't go there, and that's fine.</a:t>
+              <a:t>Chained workflow: Skills handle 1 hour 15 minutes of work. You spend 15 minutes on judgment — reviewing, deciding, approving. "Same tea presentation. The chain gets smarter every time. Your feedback becomes Skills."</a:t>
             </a:r>
             <a:endParaRPr lang="en-US" dirty="0"/>
           </a:p>
@@ -2046,6 +2048,182 @@
             <a:fld id="{F7021451-1387-4CA6-816F-3879F97B5CBC}" type="slidenum">
               <a:rPr lang="en-US"/>
               <a:t>25</a:t>
+            </a:fld>
+            <a:endParaRPr lang="en-US"/>
+          </a:p>
+        </p:txBody>
+      </p:sp>
+    </p:spTree>
+    <p:extLst>
+      <p:ext uri="{BB962C8B-B14F-4D97-AF65-F5344CB8AC3E}">
+        <p14:creationId xmlns:p14="http://schemas.microsoft.com/office/powerpoint/2010/main" val="1024086991"/>
+      </p:ext>
+    </p:extLst>
+  </p:cSld>
+  <p:clrMapOvr>
+    <a:masterClrMapping/>
+  </p:clrMapOvr>
+</p:notes>
+</file>
+
+<file path=ppt/notesSlides/notesSlide26.xml><?xml version="1.0" encoding="utf-8"?>
+<p:notes xmlns:a="http://schemas.openxmlformats.org/drawingml/2006/main" xmlns:r="http://schemas.openxmlformats.org/officeDocument/2006/relationships" xmlns:p="http://schemas.openxmlformats.org/presentationml/2006/main">
+  <p:cSld>
+    <p:spTree>
+      <p:nvGrpSpPr>
+        <p:cNvPr id="1" name=""/>
+        <p:cNvGrpSpPr/>
+        <p:nvPr/>
+      </p:nvGrpSpPr>
+      <p:grpSpPr>
+        <a:xfrm>
+          <a:off x="0" y="0"/>
+          <a:ext cx="0" cy="0"/>
+          <a:chOff x="0" y="0"/>
+          <a:chExt cx="0" cy="0"/>
+        </a:xfrm>
+      </p:grpSpPr>
+      <p:sp>
+        <p:nvSpPr>
+          <p:cNvPr id="2" name="Slide Image Placeholder 1"/>
+          <p:cNvSpPr>
+            <a:spLocks noGrp="1" noRot="1" noChangeAspect="1"/>
+          </p:cNvSpPr>
+          <p:nvPr>
+            <p:ph type="sldImg"/>
+          </p:nvPr>
+        </p:nvSpPr>
+        <p:spPr/>
+      </p:sp>
+      <p:sp>
+        <p:nvSpPr>
+          <p:cNvPr id="3" name="Notes Placeholder 2"/>
+          <p:cNvSpPr>
+            <a:spLocks noGrp="1"/>
+          </p:cNvSpPr>
+          <p:nvPr>
+            <p:ph type="body" idx="1"/>
+          </p:nvPr>
+        </p:nvSpPr>
+        <p:spPr/>
+        <p:txBody>
+          <a:bodyPr/>
+          <a:lstStyle/>
+          <a:p>
+            <a:r>
+              <a:rPr lang="en-US" dirty="0"/>
+              <a:t>Graduation moment. "You learned to whisper. You became a strategist. You let Claude operate. You orchestrated the brigade." This is the emotional payoff. Make it feel earned — they completed a 2-session AI Academy. Builder is still dimmed — that's the horizon for those who want to go further.</a:t>
+            </a:r>
+            <a:endParaRPr lang="en-US" dirty="0"/>
+          </a:p>
+        </p:txBody>
+      </p:sp>
+      <p:sp>
+        <p:nvSpPr>
+          <p:cNvPr id="4" name="Slide Number Placeholder 3"/>
+          <p:cNvSpPr>
+            <a:spLocks noGrp="1"/>
+          </p:cNvSpPr>
+          <p:nvPr>
+            <p:ph type="sldNum" sz="quarter" idx="10"/>
+          </p:nvPr>
+        </p:nvSpPr>
+        <p:spPr/>
+        <p:txBody>
+          <a:bodyPr/>
+          <a:lstStyle/>
+          <a:p>
+            <a:fld id="{F7021451-1387-4CA6-816F-3879F97B5CBC}" type="slidenum">
+              <a:rPr lang="en-US"/>
+              <a:t>26</a:t>
+            </a:fld>
+            <a:endParaRPr lang="en-US"/>
+          </a:p>
+        </p:txBody>
+      </p:sp>
+    </p:spTree>
+    <p:extLst>
+      <p:ext uri="{BB962C8B-B14F-4D97-AF65-F5344CB8AC3E}">
+        <p14:creationId xmlns:p14="http://schemas.microsoft.com/office/powerpoint/2010/main" val="1024086991"/>
+      </p:ext>
+    </p:extLst>
+  </p:cSld>
+  <p:clrMapOvr>
+    <a:masterClrMapping/>
+  </p:clrMapOvr>
+</p:notes>
+</file>
+
+<file path=ppt/notesSlides/notesSlide27.xml><?xml version="1.0" encoding="utf-8"?>
+<p:notes xmlns:a="http://schemas.openxmlformats.org/drawingml/2006/main" xmlns:r="http://schemas.openxmlformats.org/officeDocument/2006/relationships" xmlns:p="http://schemas.openxmlformats.org/presentationml/2006/main">
+  <p:cSld>
+    <p:spTree>
+      <p:nvGrpSpPr>
+        <p:cNvPr id="1" name=""/>
+        <p:cNvGrpSpPr/>
+        <p:nvPr/>
+      </p:nvGrpSpPr>
+      <p:grpSpPr>
+        <a:xfrm>
+          <a:off x="0" y="0"/>
+          <a:ext cx="0" cy="0"/>
+          <a:chOff x="0" y="0"/>
+          <a:chExt cx="0" cy="0"/>
+        </a:xfrm>
+      </p:grpSpPr>
+      <p:sp>
+        <p:nvSpPr>
+          <p:cNvPr id="2" name="Slide Image Placeholder 1"/>
+          <p:cNvSpPr>
+            <a:spLocks noGrp="1" noRot="1" noChangeAspect="1"/>
+          </p:cNvSpPr>
+          <p:nvPr>
+            <p:ph type="sldImg"/>
+          </p:nvPr>
+        </p:nvSpPr>
+        <p:spPr/>
+      </p:sp>
+      <p:sp>
+        <p:nvSpPr>
+          <p:cNvPr id="3" name="Notes Placeholder 2"/>
+          <p:cNvSpPr>
+            <a:spLocks noGrp="1"/>
+          </p:cNvSpPr>
+          <p:nvPr>
+            <p:ph type="body" idx="1"/>
+          </p:nvPr>
+        </p:nvSpPr>
+        <p:spPr/>
+        <p:txBody>
+          <a:bodyPr/>
+          <a:lstStyle/>
+          <a:p>
+            <a:r>
+              <a:rPr lang="en-US" dirty="0"/>
+              <a:t>Final CTA. "Now go try it — one task, this week." Builder tease for the curious: "And if you want to go further — building integrations, connecting Claude to your actual systems, automating entire workflows — that's the Builder level. That's what's next." But don't oversell — most attendees won't go there, and that's fine.</a:t>
+            </a:r>
+            <a:endParaRPr lang="en-US" dirty="0"/>
+          </a:p>
+        </p:txBody>
+      </p:sp>
+      <p:sp>
+        <p:nvSpPr>
+          <p:cNvPr id="4" name="Slide Number Placeholder 3"/>
+          <p:cNvSpPr>
+            <a:spLocks noGrp="1"/>
+          </p:cNvSpPr>
+          <p:nvPr>
+            <p:ph type="sldNum" sz="quarter" idx="10"/>
+          </p:nvPr>
+        </p:nvSpPr>
+        <p:spPr/>
+        <p:txBody>
+          <a:bodyPr/>
+          <a:lstStyle/>
+          <a:p>
+            <a:fld id="{F7021451-1387-4CA6-816F-3879F97B5CBC}" type="slidenum">
+              <a:rPr lang="en-US"/>
+              <a:t>27</a:t>
             </a:fld>
             <a:endParaRPr lang="en-US"/>
           </a:p>
@@ -2110,7 +2288,7 @@
           <a:p>
             <a:r>
               <a:rPr lang="en-US" dirty="0"/>
-              <a:t>Make the pattern visible: every step has "you" as the bottleneck. They've been doing this since Workshop 1 — prompting well, using skills, but still manually searching, copying, pasting, and applying. The four steps should feel painfully familiar.</a:t>
+              <a:t>Make the pattern visible: every step has "you" as the bottleneck. They've been doing this since Workshop 1 — prompting well, using rules and Skills, but still manually searching, copying, pasting, and applying. The four steps should feel painfully familiar.</a:t>
             </a:r>
             <a:endParaRPr lang="en-US" dirty="0"/>
           </a:p>
@@ -2286,7 +2464,7 @@
           <a:p>
             <a:r>
               <a:rPr lang="en-US" dirty="0"/>
-              <a:t>Mirror the copy-paste trap slide exactly — same layout, same four steps — but now the first three say "Agent" instead of "You." The visual parallel makes the shift concrete. "Same colleague from Workshop 1. Now she has hands — eyes, a phone, and a to-do list."</a:t>
+              <a:t>Mirror the copy-paste trap slide exactly — same layout, same four steps — but now the first three say "Claude" instead of "You." The visual parallel makes the shift concrete. "Same colleague from Workshop 1. Now she has hands — eyes, a search engine, and a filing cabinet."</a:t>
             </a:r>
             <a:endParaRPr lang="en-US" dirty="0"/>
           </a:p>
@@ -2374,7 +2552,7 @@
           <a:p>
             <a:r>
               <a:rPr lang="en-US" dirty="0"/>
-              <a:t>Quick warm-up exercise. Have a sample document ready for anyone without their own. The point isn't summary quality — it's that they didn't copy-paste anything. ChatGPT read the file directly. Mention: ChatGPT Org doesn't use conversations for training — company documents are safe. Ask: "How long would that have taken you manually?"</a:t>
+              <a:t>Screen-share this walkthrough. Pre-req: an Owner or Primary Owner must enable Google Workspace connectors at Organization Settings → Capabilities before the session. Walk the room — make sure everyone authenticates successfully. If someone can't connect, they'll use web search only for Exercise 1. This should take 1-2 minutes.</a:t>
             </a:r>
             <a:endParaRPr lang="en-US" dirty="0"/>
           </a:p>
@@ -2462,7 +2640,7 @@
           <a:p>
             <a:r>
               <a:rPr lang="en-US" dirty="0"/>
-              <a:t>Real examples from their world: Monday morning email triage (Email), meeting prep from calendar invites (Calendar), finding that doc someone mentioned in Slack (Chat + Files), researching a competitor (Web). These aren't hypothetical — they're the tasks that eat their mornings.</a:t>
+              <a:t>Two sequential prompts in the same conversation — not one multi-step prompt (reinforces Workshop 1's "One Task at a Time" rule). The magic: they never opened Gmail, never opened Google, and Claude already has context from the email when it does the search. "This" naturally refers to whatever the email was about. If someone couldn't connect Gmail, they skip to the second prompt with their own topic. Ask after: "How long would that have taken you manually? Open Gmail, read the email, open Google, read 10 articles, summarise..."</a:t>
             </a:r>
             <a:endParaRPr lang="en-US" dirty="0"/>
           </a:p>
@@ -2550,7 +2728,7 @@
           <a:p>
             <a:r>
               <a:rPr lang="en-US" dirty="0"/>
-              <a:t>Pre-req: Gmail must be enabled in Workspace Settings → Apps by admin. Verify this works before the session — the UI changes periodically. Walk the room. If anyone can't access agent mode, have them pair with a neighbour. The exercise should take 2-3 minutes.</a:t>
+              <a:t>The first reveal moment. They connected a source (Gmail) and Claude reached two places — their inbox and the web — without a single copy-paste. That's the shift: from being the courier to being the director. Let the comparison sink in.</a:t>
             </a:r>
             <a:endParaRPr lang="en-US" dirty="0"/>
           </a:p>
@@ -2638,7 +2816,7 @@
           <a:p>
             <a:r>
               <a:rPr lang="en-US" dirty="0"/>
-              <a:t>The reveal moment. They gave the agent access to their inbox, and it did the work. No copy-paste. That's the shift: from doing to directing. Ask: "How long does this normally take you on a Monday morning?" Let the comparison sink in.</a:t>
+              <a:t>Screen-share the Cowork setup. "Your files are your most powerful source — nobody else has them. Your company data, your documents, your context. Let's give Claude direct access." Walk the room. Have a sample folder ready (with a policy doc, a data file, a memo) for anyone who doesn't have a suitable folder. Best practice: create or use a dedicated working folder rather than granting access to broad directories.</a:t>
             </a:r>
             <a:endParaRPr lang="en-US" dirty="0"/>
           </a:p>
@@ -3173,8 +3351,8 @@
         </p:nvSpPr>
         <p:spPr>
           <a:xfrm>
-            <a:off x="731520" y="457200"/>
-            <a:ext cx="7680960" cy="731520"/>
+            <a:off x="914400" y="914400"/>
+            <a:ext cx="7315200" cy="3291840"/>
           </a:xfrm>
           <a:prstGeom prst="rect">
             <a:avLst/>
@@ -3186,259 +3364,91 @@
           <a:bodyPr wrap="square" lIns="0" tIns="0" rIns="0" bIns="0" rtlCol="0" anchor="ctr"/>
           <a:lstStyle/>
           <a:p>
-            <a:pPr algn="l" indent="0" marL="0">
-              <a:buNone/>
-            </a:pPr>
-            <a:r>
-              <a:rPr lang="en-US" sz="3600" b="1" dirty="0">
-                <a:solidFill>
-                  <a:srgbClr val="FFFFFF"/>
+            <a:pPr algn="ctr" indent="0" marL="0">
+              <a:buNone/>
+            </a:pPr>
+            <a:r>
+              <a:rPr lang="en-US" sz="2800" b="1" dirty="0">
+                <a:solidFill>
+                  <a:srgbClr val="635BFF"/>
                 </a:solidFill>
                 <a:latin typeface="Georgia" pitchFamily="34" charset="0"/>
                 <a:ea typeface="Georgia" pitchFamily="34" charset="-122"/>
                 <a:cs typeface="Georgia" pitchFamily="34" charset="-120"/>
               </a:rPr>
-              <a:t>You just handed AI the keys</a:t>
-            </a:r>
-            <a:endParaRPr lang="en-US" sz="3600" dirty="0"/>
-          </a:p>
-        </p:txBody>
-      </p:sp>
-      <p:sp>
-        <p:nvSpPr>
-          <p:cNvPr id="4" name="Text 2"/>
-          <p:cNvSpPr/>
-          <p:nvPr/>
-        </p:nvSpPr>
-        <p:spPr>
-          <a:xfrm>
-            <a:off x="914400" y="1463040"/>
-            <a:ext cx="7315200" cy="502920"/>
-          </a:xfrm>
-          <a:prstGeom prst="rect">
-            <a:avLst/>
-          </a:prstGeom>
-          <a:noFill/>
-          <a:ln/>
-        </p:spPr>
-        <p:txBody>
-          <a:bodyPr wrap="square" lIns="0" tIns="0" rIns="0" bIns="0" rtlCol="0" anchor="ctr"/>
-          <a:lstStyle/>
-          <a:p>
-            <a:pPr algn="l" indent="0" marL="0">
-              <a:buNone/>
-            </a:pPr>
-            <a:r>
-              <a:rPr lang="en-US" sz="2200" dirty="0">
-                <a:solidFill>
-                  <a:srgbClr val="EDEDED"/>
+              <a:t>In Cowork, try:</a:t>
+            </a:r>
+            <a:endParaRPr lang="en-US" sz="2800" dirty="0"/>
+          </a:p>
+          <a:p>
+            <a:pPr algn="ctr" indent="0" marL="0">
+              <a:buNone/>
+            </a:pPr>
+            <a:r>
+              <a:rPr lang="en-US" sz="3600" b="1" dirty="0">
+                <a:solidFill>
+                  <a:srgbClr val="635BFF"/>
+                </a:solidFill>
+                <a:latin typeface="Georgia" pitchFamily="34" charset="0"/>
+                <a:ea typeface="Georgia" pitchFamily="34" charset="-122"/>
+                <a:cs typeface="Georgia" pitchFamily="34" charset="-120"/>
+              </a:rPr>
+              <a:t>"Read everything in this folder</a:t>
+            </a:r>
+            <a:endParaRPr lang="en-US" sz="2800" dirty="0"/>
+          </a:p>
+          <a:p>
+            <a:pPr algn="ctr" indent="0" marL="0">
+              <a:buNone/>
+            </a:pPr>
+            <a:r>
+              <a:rPr lang="en-US" sz="3600" b="1" dirty="0">
+                <a:solidFill>
+                  <a:srgbClr val="635BFF"/>
+                </a:solidFill>
+                <a:latin typeface="Georgia" pitchFamily="34" charset="0"/>
+                <a:ea typeface="Georgia" pitchFamily="34" charset="-122"/>
+                <a:cs typeface="Georgia" pitchFamily="34" charset="-120"/>
+              </a:rPr>
+              <a:t>and write me a one-page</a:t>
+            </a:r>
+            <a:endParaRPr lang="en-US" sz="2800" dirty="0"/>
+          </a:p>
+          <a:p>
+            <a:pPr algn="ctr" indent="0" marL="0">
+              <a:buNone/>
+            </a:pPr>
+            <a:r>
+              <a:rPr lang="en-US" sz="3600" b="1" dirty="0">
+                <a:solidFill>
+                  <a:srgbClr val="635BFF"/>
+                </a:solidFill>
+                <a:latin typeface="Georgia" pitchFamily="34" charset="0"/>
+                <a:ea typeface="Georgia" pitchFamily="34" charset="-122"/>
+                <a:cs typeface="Georgia" pitchFamily="34" charset="-120"/>
+              </a:rPr>
+              <a:t>executive summary"</a:t>
+            </a:r>
+            <a:endParaRPr lang="en-US" sz="2800" dirty="0"/>
+          </a:p>
+          <a:p>
+            <a:pPr algn="ctr" indent="0" marL="0">
+              <a:buNone/>
+            </a:pPr>
+            <a:r>
+              <a:rPr lang="en-US" sz="2200" i="1" dirty="0">
+                <a:solidFill>
+                  <a:srgbClr val="8B95A5"/>
                 </a:solidFill>
                 <a:latin typeface="Verdana" pitchFamily="34" charset="0"/>
                 <a:ea typeface="Verdana" pitchFamily="34" charset="-122"/>
                 <a:cs typeface="Verdana" pitchFamily="34" charset="-120"/>
               </a:rPr>
-              <a:t>Never trust numbers you didn't provide</a:t>
-            </a:r>
-            <a:endParaRPr lang="en-US" sz="2200" dirty="0"/>
-          </a:p>
-        </p:txBody>
-      </p:sp>
-      <p:sp>
-        <p:nvSpPr>
-          <p:cNvPr id="5" name="Shape 3"/>
-          <p:cNvSpPr/>
-          <p:nvPr/>
-        </p:nvSpPr>
-        <p:spPr>
-          <a:xfrm>
-            <a:off x="548640" y="1572768"/>
-            <a:ext cx="182880" cy="182880"/>
-          </a:xfrm>
-          <a:prstGeom prst="rect">
-            <a:avLst/>
-          </a:prstGeom>
-          <a:solidFill>
-            <a:srgbClr val="635BFF"/>
-          </a:solidFill>
-          <a:ln/>
-        </p:spPr>
-      </p:sp>
-      <p:sp>
-        <p:nvSpPr>
-          <p:cNvPr id="6" name="Text 4"/>
-          <p:cNvSpPr/>
-          <p:nvPr/>
-        </p:nvSpPr>
-        <p:spPr>
-          <a:xfrm>
-            <a:off x="914400" y="2057400"/>
-            <a:ext cx="7315200" cy="502920"/>
-          </a:xfrm>
-          <a:prstGeom prst="rect">
-            <a:avLst/>
-          </a:prstGeom>
-          <a:noFill/>
-          <a:ln/>
-        </p:spPr>
-        <p:txBody>
-          <a:bodyPr wrap="square" lIns="0" tIns="0" rIns="0" bIns="0" rtlCol="0" anchor="ctr"/>
-          <a:lstStyle/>
-          <a:p>
-            <a:pPr algn="l" indent="0" marL="0">
-              <a:buNone/>
-            </a:pPr>
-            <a:r>
-              <a:rPr lang="en-US" sz="2200" dirty="0">
-                <a:solidFill>
-                  <a:srgbClr val="EDEDED"/>
-                </a:solidFill>
-                <a:latin typeface="Verdana" pitchFamily="34" charset="0"/>
-                <a:ea typeface="Verdana" pitchFamily="34" charset="-122"/>
-                <a:cs typeface="Verdana" pitchFamily="34" charset="-120"/>
-              </a:rPr>
-              <a:t>Verify claims against sources</a:t>
-            </a:r>
-            <a:endParaRPr lang="en-US" sz="2200" dirty="0"/>
-          </a:p>
-        </p:txBody>
-      </p:sp>
-      <p:sp>
-        <p:nvSpPr>
-          <p:cNvPr id="7" name="Shape 5"/>
-          <p:cNvSpPr/>
-          <p:nvPr/>
-        </p:nvSpPr>
-        <p:spPr>
-          <a:xfrm>
-            <a:off x="548640" y="2167128"/>
-            <a:ext cx="182880" cy="182880"/>
-          </a:xfrm>
-          <a:prstGeom prst="rect">
-            <a:avLst/>
-          </a:prstGeom>
-          <a:solidFill>
-            <a:srgbClr val="635BFF"/>
-          </a:solidFill>
-          <a:ln/>
-        </p:spPr>
-      </p:sp>
-      <p:sp>
-        <p:nvSpPr>
-          <p:cNvPr id="8" name="Text 6"/>
-          <p:cNvSpPr/>
-          <p:nvPr/>
-        </p:nvSpPr>
-        <p:spPr>
-          <a:xfrm>
-            <a:off x="914400" y="2651760"/>
-            <a:ext cx="7315200" cy="502920"/>
-          </a:xfrm>
-          <a:prstGeom prst="rect">
-            <a:avLst/>
-          </a:prstGeom>
-          <a:noFill/>
-          <a:ln/>
-        </p:spPr>
-        <p:txBody>
-          <a:bodyPr wrap="square" lIns="0" tIns="0" rIns="0" bIns="0" rtlCol="0" anchor="ctr"/>
-          <a:lstStyle/>
-          <a:p>
-            <a:pPr algn="l" indent="0" marL="0">
-              <a:buNone/>
-            </a:pPr>
-            <a:r>
-              <a:rPr lang="en-US" sz="2200" dirty="0">
-                <a:solidFill>
-                  <a:srgbClr val="EDEDED"/>
-                </a:solidFill>
-                <a:latin typeface="Verdana" pitchFamily="34" charset="0"/>
-                <a:ea typeface="Verdana" pitchFamily="34" charset="-122"/>
-                <a:cs typeface="Verdana" pitchFamily="34" charset="-120"/>
-              </a:rPr>
-              <a:t>Use AI for drafts, not decisions</a:t>
-            </a:r>
-            <a:endParaRPr lang="en-US" sz="2200" dirty="0"/>
-          </a:p>
-        </p:txBody>
-      </p:sp>
-      <p:sp>
-        <p:nvSpPr>
-          <p:cNvPr id="9" name="Shape 7"/>
-          <p:cNvSpPr/>
-          <p:nvPr/>
-        </p:nvSpPr>
-        <p:spPr>
-          <a:xfrm>
-            <a:off x="548640" y="2761488"/>
-            <a:ext cx="182880" cy="182880"/>
-          </a:xfrm>
-          <a:prstGeom prst="rect">
-            <a:avLst/>
-          </a:prstGeom>
-          <a:solidFill>
-            <a:srgbClr val="635BFF"/>
-          </a:solidFill>
-          <a:ln/>
-        </p:spPr>
-      </p:sp>
-      <p:sp>
-        <p:nvSpPr>
-          <p:cNvPr id="10" name="Text 8"/>
-          <p:cNvSpPr/>
-          <p:nvPr/>
-        </p:nvSpPr>
-        <p:spPr>
-          <a:xfrm>
-            <a:off x="914400" y="3246120"/>
-            <a:ext cx="7315200" cy="502920"/>
-          </a:xfrm>
-          <a:prstGeom prst="rect">
-            <a:avLst/>
-          </a:prstGeom>
-          <a:noFill/>
-          <a:ln/>
-        </p:spPr>
-        <p:txBody>
-          <a:bodyPr wrap="square" lIns="0" tIns="0" rIns="0" bIns="0" rtlCol="0" anchor="ctr"/>
-          <a:lstStyle/>
-          <a:p>
-            <a:pPr algn="l" indent="0" marL="0">
-              <a:buNone/>
-            </a:pPr>
-            <a:r>
-              <a:rPr lang="en-US" sz="2200" dirty="0">
-                <a:solidFill>
-                  <a:srgbClr val="EDEDED"/>
-                </a:solidFill>
-                <a:latin typeface="Verdana" pitchFamily="34" charset="0"/>
-                <a:ea typeface="Verdana" pitchFamily="34" charset="-122"/>
-                <a:cs typeface="Verdana" pitchFamily="34" charset="-120"/>
-              </a:rPr>
-              <a:t>Privacy ≠ accuracy</a:t>
-            </a:r>
-            <a:endParaRPr lang="en-US" sz="2200" dirty="0"/>
-          </a:p>
-        </p:txBody>
-      </p:sp>
-      <p:sp>
-        <p:nvSpPr>
-          <p:cNvPr id="11" name="Shape 9"/>
-          <p:cNvSpPr/>
-          <p:nvPr/>
-        </p:nvSpPr>
-        <p:spPr>
-          <a:xfrm>
-            <a:off x="548640" y="3355848"/>
-            <a:ext cx="182880" cy="182880"/>
-          </a:xfrm>
-          <a:prstGeom prst="rect">
-            <a:avLst/>
-          </a:prstGeom>
-          <a:solidFill>
-            <a:srgbClr val="635BFF"/>
-          </a:solidFill>
-          <a:ln/>
-        </p:spPr>
+              <a:t>You didn't open a single file.</a:t>
+            </a:r>
+            <a:endParaRPr lang="en-US" sz="2800" dirty="0"/>
+          </a:p>
+        </p:txBody>
       </p:sp>
     </p:spTree>
   </p:cSld>
@@ -3502,8 +3512,8 @@
         </p:nvSpPr>
         <p:spPr>
           <a:xfrm>
-            <a:off x="914400" y="914400"/>
-            <a:ext cx="7315200" cy="3291840"/>
+            <a:off x="731520" y="365760"/>
+            <a:ext cx="7680960" cy="914400"/>
           </a:xfrm>
           <a:prstGeom prst="rect">
             <a:avLst/>
@@ -3519,58 +3529,122 @@
               <a:buNone/>
             </a:pPr>
             <a:r>
-              <a:rPr lang="en-US" sz="2800" b="1" dirty="0">
-                <a:solidFill>
-                  <a:srgbClr val="635BFF"/>
+              <a:rPr lang="en-US" sz="3600" b="1" dirty="0">
+                <a:solidFill>
+                  <a:srgbClr val="FFFFFF"/>
                 </a:solidFill>
                 <a:latin typeface="Georgia" pitchFamily="34" charset="0"/>
                 <a:ea typeface="Georgia" pitchFamily="34" charset="-122"/>
                 <a:cs typeface="Georgia" pitchFamily="34" charset="-120"/>
               </a:rPr>
-              <a:t>Pick one claim or number</a:t>
-            </a:r>
-            <a:endParaRPr lang="en-US" sz="2800" dirty="0"/>
-          </a:p>
-          <a:p>
-            <a:pPr algn="ctr" indent="0" marL="0">
-              <a:buNone/>
-            </a:pPr>
-            <a:r>
-              <a:rPr lang="en-US" sz="2800" b="1" dirty="0">
-                <a:solidFill>
-                  <a:srgbClr val="635BFF"/>
+              <a:t>Give Claude the source.</a:t>
+            </a:r>
+            <a:endParaRPr lang="en-US" sz="3600" dirty="0"/>
+          </a:p>
+          <a:p>
+            <a:pPr algn="ctr" indent="0" marL="0">
+              <a:buNone/>
+            </a:pPr>
+            <a:r>
+              <a:rPr lang="en-US" sz="3600" b="1" dirty="0">
+                <a:solidFill>
+                  <a:srgbClr val="FFFFFF"/>
                 </a:solidFill>
                 <a:latin typeface="Georgia" pitchFamily="34" charset="0"/>
                 <a:ea typeface="Georgia" pitchFamily="34" charset="-122"/>
                 <a:cs typeface="Georgia" pitchFamily="34" charset="-120"/>
               </a:rPr>
-              <a:t>from the agent's output</a:t>
-            </a:r>
-            <a:endParaRPr lang="en-US" sz="2800" dirty="0"/>
-          </a:p>
-          <a:p>
-            <a:pPr algn="ctr" indent="0" marL="0">
-              <a:buNone/>
-            </a:pPr>
-            <a:r>
-              <a:rPr lang="en-US" sz="3600" b="1" dirty="0">
-                <a:solidFill>
-                  <a:srgbClr val="635BFF"/>
+              <a:t>Stop being the courier.</a:t>
+            </a:r>
+            <a:endParaRPr lang="en-US" sz="3600" dirty="0"/>
+          </a:p>
+        </p:txBody>
+      </p:sp>
+      <p:sp>
+        <p:nvSpPr>
+          <p:cNvPr id="4" name="Text 2"/>
+          <p:cNvSpPr/>
+          <p:nvPr/>
+        </p:nvSpPr>
+        <p:spPr>
+          <a:xfrm>
+            <a:off x="731520" y="1828800"/>
+            <a:ext cx="2377440" cy="640080"/>
+          </a:xfrm>
+          <a:prstGeom prst="rect">
+            <a:avLst/>
+          </a:prstGeom>
+          <a:noFill/>
+          <a:ln/>
+        </p:spPr>
+        <p:txBody>
+          <a:bodyPr wrap="square" lIns="0" tIns="0" rIns="0" bIns="0" rtlCol="0" anchor="b"/>
+          <a:lstStyle/>
+          <a:p>
+            <a:pPr algn="ctr" indent="0" marL="0">
+              <a:buNone/>
+            </a:pPr>
+            <a:r>
+              <a:rPr lang="en-US" sz="2600" b="1" dirty="0">
+                <a:solidFill>
+                  <a:srgbClr val="FFFFFF"/>
                 </a:solidFill>
                 <a:latin typeface="Georgia" pitchFamily="34" charset="0"/>
                 <a:ea typeface="Georgia" pitchFamily="34" charset="-122"/>
                 <a:cs typeface="Georgia" pitchFamily="34" charset="-120"/>
               </a:rPr>
-              <a:t>Verify it manually</a:t>
-            </a:r>
-            <a:endParaRPr lang="en-US" sz="2800" dirty="0"/>
-          </a:p>
-          <a:p>
-            <a:pPr algn="ctr" indent="0" marL="0">
-              <a:buNone/>
-            </a:pPr>
-            <a:r>
-              <a:rPr lang="en-US" sz="2200" i="1" dirty="0">
+              <a:t>Your email</a:t>
+            </a:r>
+            <a:endParaRPr lang="en-US" sz="2600" dirty="0"/>
+          </a:p>
+        </p:txBody>
+      </p:sp>
+      <p:sp>
+        <p:nvSpPr>
+          <p:cNvPr id="5" name="Shape 3"/>
+          <p:cNvSpPr/>
+          <p:nvPr/>
+        </p:nvSpPr>
+        <p:spPr>
+          <a:xfrm>
+            <a:off x="1325880" y="2606040"/>
+            <a:ext cx="1188720" cy="36576"/>
+          </a:xfrm>
+          <a:prstGeom prst="rect">
+            <a:avLst/>
+          </a:prstGeom>
+          <a:solidFill>
+            <a:srgbClr val="635BFF"/>
+          </a:solidFill>
+          <a:ln/>
+        </p:spPr>
+      </p:sp>
+      <p:sp>
+        <p:nvSpPr>
+          <p:cNvPr id="6" name="Text 4"/>
+          <p:cNvSpPr/>
+          <p:nvPr/>
+        </p:nvSpPr>
+        <p:spPr>
+          <a:xfrm>
+            <a:off x="731520" y="2788920"/>
+            <a:ext cx="2377440" cy="457200"/>
+          </a:xfrm>
+          <a:prstGeom prst="rect">
+            <a:avLst/>
+          </a:prstGeom>
+          <a:noFill/>
+          <a:ln/>
+        </p:spPr>
+        <p:txBody>
+          <a:bodyPr wrap="square" lIns="0" tIns="0" rIns="0" bIns="0" rtlCol="0" anchor="t"/>
+          <a:lstStyle/>
+          <a:p>
+            <a:pPr algn="ctr" indent="0" marL="0">
+              <a:buNone/>
+            </a:pPr>
+            <a:r>
+              <a:rPr lang="en-US" sz="1800" i="1" dirty="0">
                 <a:solidFill>
                   <a:srgbClr val="8B95A5"/>
                 </a:solidFill>
@@ -3578,9 +3652,205 @@
                 <a:ea typeface="Verdana" pitchFamily="34" charset="-122"/>
                 <a:cs typeface="Verdana" pitchFamily="34" charset="-120"/>
               </a:rPr>
-              <a:t>Was it accurate? Did anything "feel right" but turn out wrong?</a:t>
-            </a:r>
-            <a:endParaRPr lang="en-US" sz="2800" dirty="0"/>
+              <a:t>Gmail connector</a:t>
+            </a:r>
+            <a:endParaRPr lang="en-US" sz="1800" dirty="0"/>
+          </a:p>
+        </p:txBody>
+      </p:sp>
+      <p:sp>
+        <p:nvSpPr>
+          <p:cNvPr id="7" name="Text 5"/>
+          <p:cNvSpPr/>
+          <p:nvPr/>
+        </p:nvSpPr>
+        <p:spPr>
+          <a:xfrm>
+            <a:off x="3383280" y="1828800"/>
+            <a:ext cx="2377440" cy="640080"/>
+          </a:xfrm>
+          <a:prstGeom prst="rect">
+            <a:avLst/>
+          </a:prstGeom>
+          <a:noFill/>
+          <a:ln/>
+        </p:spPr>
+        <p:txBody>
+          <a:bodyPr wrap="square" lIns="0" tIns="0" rIns="0" bIns="0" rtlCol="0" anchor="b"/>
+          <a:lstStyle/>
+          <a:p>
+            <a:pPr algn="ctr" indent="0" marL="0">
+              <a:buNone/>
+            </a:pPr>
+            <a:r>
+              <a:rPr lang="en-US" sz="2600" b="1" dirty="0">
+                <a:solidFill>
+                  <a:srgbClr val="FFFFFF"/>
+                </a:solidFill>
+                <a:latin typeface="Georgia" pitchFamily="34" charset="0"/>
+                <a:ea typeface="Georgia" pitchFamily="34" charset="-122"/>
+                <a:cs typeface="Georgia" pitchFamily="34" charset="-120"/>
+              </a:rPr>
+              <a:t>The web</a:t>
+            </a:r>
+            <a:endParaRPr lang="en-US" sz="2600" dirty="0"/>
+          </a:p>
+        </p:txBody>
+      </p:sp>
+      <p:sp>
+        <p:nvSpPr>
+          <p:cNvPr id="8" name="Shape 6"/>
+          <p:cNvSpPr/>
+          <p:nvPr/>
+        </p:nvSpPr>
+        <p:spPr>
+          <a:xfrm>
+            <a:off x="3977640" y="2606040"/>
+            <a:ext cx="1188720" cy="36576"/>
+          </a:xfrm>
+          <a:prstGeom prst="rect">
+            <a:avLst/>
+          </a:prstGeom>
+          <a:solidFill>
+            <a:srgbClr val="635BFF"/>
+          </a:solidFill>
+          <a:ln/>
+        </p:spPr>
+      </p:sp>
+      <p:sp>
+        <p:nvSpPr>
+          <p:cNvPr id="9" name="Text 7"/>
+          <p:cNvSpPr/>
+          <p:nvPr/>
+        </p:nvSpPr>
+        <p:spPr>
+          <a:xfrm>
+            <a:off x="3383280" y="2788920"/>
+            <a:ext cx="2377440" cy="457200"/>
+          </a:xfrm>
+          <a:prstGeom prst="rect">
+            <a:avLst/>
+          </a:prstGeom>
+          <a:noFill/>
+          <a:ln/>
+        </p:spPr>
+        <p:txBody>
+          <a:bodyPr wrap="square" lIns="0" tIns="0" rIns="0" bIns="0" rtlCol="0" anchor="t"/>
+          <a:lstStyle/>
+          <a:p>
+            <a:pPr algn="ctr" indent="0" marL="0">
+              <a:buNone/>
+            </a:pPr>
+            <a:r>
+              <a:rPr lang="en-US" sz="1800" i="1" dirty="0">
+                <a:solidFill>
+                  <a:srgbClr val="8B95A5"/>
+                </a:solidFill>
+                <a:latin typeface="Verdana" pitchFamily="34" charset="0"/>
+                <a:ea typeface="Verdana" pitchFamily="34" charset="-122"/>
+                <a:cs typeface="Verdana" pitchFamily="34" charset="-120"/>
+              </a:rPr>
+              <a:t>Built-in search</a:t>
+            </a:r>
+            <a:endParaRPr lang="en-US" sz="1800" dirty="0"/>
+          </a:p>
+        </p:txBody>
+      </p:sp>
+      <p:sp>
+        <p:nvSpPr>
+          <p:cNvPr id="10" name="Text 8"/>
+          <p:cNvSpPr/>
+          <p:nvPr/>
+        </p:nvSpPr>
+        <p:spPr>
+          <a:xfrm>
+            <a:off x="6035040" y="1828800"/>
+            <a:ext cx="2377440" cy="640080"/>
+          </a:xfrm>
+          <a:prstGeom prst="rect">
+            <a:avLst/>
+          </a:prstGeom>
+          <a:noFill/>
+          <a:ln/>
+        </p:spPr>
+        <p:txBody>
+          <a:bodyPr wrap="square" lIns="0" tIns="0" rIns="0" bIns="0" rtlCol="0" anchor="b"/>
+          <a:lstStyle/>
+          <a:p>
+            <a:pPr algn="ctr" indent="0" marL="0">
+              <a:buNone/>
+            </a:pPr>
+            <a:r>
+              <a:rPr lang="en-US" sz="2600" b="1" dirty="0">
+                <a:solidFill>
+                  <a:srgbClr val="FFFFFF"/>
+                </a:solidFill>
+                <a:latin typeface="Georgia" pitchFamily="34" charset="0"/>
+                <a:ea typeface="Georgia" pitchFamily="34" charset="-122"/>
+                <a:cs typeface="Georgia" pitchFamily="34" charset="-120"/>
+              </a:rPr>
+              <a:t>Your files</a:t>
+            </a:r>
+            <a:endParaRPr lang="en-US" sz="2600" dirty="0"/>
+          </a:p>
+        </p:txBody>
+      </p:sp>
+      <p:sp>
+        <p:nvSpPr>
+          <p:cNvPr id="11" name="Shape 9"/>
+          <p:cNvSpPr/>
+          <p:nvPr/>
+        </p:nvSpPr>
+        <p:spPr>
+          <a:xfrm>
+            <a:off x="6629400" y="2606040"/>
+            <a:ext cx="1188720" cy="36576"/>
+          </a:xfrm>
+          <a:prstGeom prst="rect">
+            <a:avLst/>
+          </a:prstGeom>
+          <a:solidFill>
+            <a:srgbClr val="635BFF"/>
+          </a:solidFill>
+          <a:ln/>
+        </p:spPr>
+      </p:sp>
+      <p:sp>
+        <p:nvSpPr>
+          <p:cNvPr id="12" name="Text 10"/>
+          <p:cNvSpPr/>
+          <p:nvPr/>
+        </p:nvSpPr>
+        <p:spPr>
+          <a:xfrm>
+            <a:off x="6035040" y="2788920"/>
+            <a:ext cx="2377440" cy="457200"/>
+          </a:xfrm>
+          <a:prstGeom prst="rect">
+            <a:avLst/>
+          </a:prstGeom>
+          <a:noFill/>
+          <a:ln/>
+        </p:spPr>
+        <p:txBody>
+          <a:bodyPr wrap="square" lIns="0" tIns="0" rIns="0" bIns="0" rtlCol="0" anchor="t"/>
+          <a:lstStyle/>
+          <a:p>
+            <a:pPr algn="ctr" indent="0" marL="0">
+              <a:buNone/>
+            </a:pPr>
+            <a:r>
+              <a:rPr lang="en-US" sz="1800" i="1" dirty="0">
+                <a:solidFill>
+                  <a:srgbClr val="8B95A5"/>
+                </a:solidFill>
+                <a:latin typeface="Verdana" pitchFamily="34" charset="0"/>
+                <a:ea typeface="Verdana" pitchFamily="34" charset="-122"/>
+                <a:cs typeface="Verdana" pitchFamily="34" charset="-120"/>
+              </a:rPr>
+              <a:t>Cowork</a:t>
+            </a:r>
+            <a:endParaRPr lang="en-US" sz="1800" dirty="0"/>
           </a:p>
         </p:txBody>
       </p:sp>
@@ -3646,8 +3916,8 @@
         </p:nvSpPr>
         <p:spPr>
           <a:xfrm>
-            <a:off x="914400" y="914400"/>
-            <a:ext cx="7315200" cy="2194560"/>
+            <a:off x="731520" y="457200"/>
+            <a:ext cx="7680960" cy="731520"/>
           </a:xfrm>
           <a:prstGeom prst="rect">
             <a:avLst/>
@@ -3659,11 +3929,11 @@
           <a:bodyPr wrap="square" lIns="0" tIns="0" rIns="0" bIns="0" rtlCol="0" anchor="ctr"/>
           <a:lstStyle/>
           <a:p>
-            <a:pPr algn="ctr" indent="0" marL="0">
-              <a:buNone/>
-            </a:pPr>
-            <a:r>
-              <a:rPr lang="en-US" sz="4000" b="1" i="1" dirty="0">
+            <a:pPr algn="l" indent="0" marL="0">
+              <a:buNone/>
+            </a:pPr>
+            <a:r>
+              <a:rPr lang="en-US" sz="3600" b="1" dirty="0">
                 <a:solidFill>
                   <a:srgbClr val="FFFFFF"/>
                 </a:solidFill>
@@ -3671,26 +3941,9 @@
                 <a:ea typeface="Georgia" pitchFamily="34" charset="-122"/>
                 <a:cs typeface="Georgia" pitchFamily="34" charset="-120"/>
               </a:rPr>
-              <a:t>"I destroyed months of work</a:t>
-            </a:r>
-            <a:endParaRPr lang="en-US" sz="4000" dirty="0"/>
-          </a:p>
-          <a:p>
-            <a:pPr algn="ctr" indent="0" marL="0">
-              <a:buNone/>
-            </a:pPr>
-            <a:r>
-              <a:rPr lang="en-US" sz="4000" b="1" i="1" dirty="0">
-                <a:solidFill>
-                  <a:srgbClr val="FFFFFF"/>
-                </a:solidFill>
-                <a:latin typeface="Georgia" pitchFamily="34" charset="0"/>
-                <a:ea typeface="Georgia" pitchFamily="34" charset="-122"/>
-                <a:cs typeface="Georgia" pitchFamily="34" charset="-120"/>
-              </a:rPr>
-              <a:t>in seconds"</a:t>
-            </a:r>
-            <a:endParaRPr lang="en-US" sz="4000" dirty="0"/>
+              <a:t>You just handed AI the keys</a:t>
+            </a:r>
+            <a:endParaRPr lang="en-US" sz="3600" dirty="0"/>
           </a:p>
         </p:txBody>
       </p:sp>
@@ -3702,43 +3955,233 @@
         </p:nvSpPr>
         <p:spPr>
           <a:xfrm>
-            <a:off x="1371600" y="3291840"/>
-            <a:ext cx="6400800" cy="457200"/>
-          </a:xfrm>
-          <a:prstGeom prst="rect">
-            <a:avLst/>
-          </a:prstGeom>
-          <a:noFill/>
-          <a:ln/>
-        </p:spPr>
-        <p:txBody>
-          <a:bodyPr wrap="square" lIns="0" tIns="0" rIns="0" bIns="0" rtlCol="0" anchor="t"/>
-          <a:lstStyle/>
-          <a:p>
-            <a:pPr algn="ctr" indent="0" marL="0">
-              <a:buNone/>
-            </a:pPr>
-            <a:r>
-              <a:rPr lang="en-US" sz="1800" u="sng" dirty="0">
-                <a:solidFill>
-                  <a:srgbClr val="8B95A5"/>
+            <a:off x="914400" y="1463040"/>
+            <a:ext cx="7315200" cy="502920"/>
+          </a:xfrm>
+          <a:prstGeom prst="rect">
+            <a:avLst/>
+          </a:prstGeom>
+          <a:noFill/>
+          <a:ln/>
+        </p:spPr>
+        <p:txBody>
+          <a:bodyPr wrap="square" lIns="0" tIns="0" rIns="0" bIns="0" rtlCol="0" anchor="ctr"/>
+          <a:lstStyle/>
+          <a:p>
+            <a:pPr algn="l" indent="0" marL="0">
+              <a:buNone/>
+            </a:pPr>
+            <a:r>
+              <a:rPr lang="en-US" sz="2200" dirty="0">
+                <a:solidFill>
+                  <a:srgbClr val="EDEDED"/>
                 </a:solidFill>
                 <a:latin typeface="Verdana" pitchFamily="34" charset="0"/>
                 <a:ea typeface="Verdana" pitchFamily="34" charset="-122"/>
                 <a:cs typeface="Verdana" pitchFamily="34" charset="-120"/>
-                <a:hlinkClick r:id="rId1" invalidUrl="" action="" tgtFrame="" tooltip="" history="1" highlightClick="0" endSnd="0">
-                  <a:extLst>
-                    <a:ext uri="{A12FA001-AC4F-418D-AE19-62706E023703}">
-                      <ahyp:hlinkClr xmlns:ahyp="http://schemas.microsoft.com/office/drawing/2018/hyperlinkcolor" val="tx"/>
-                    </a:ext>
-                  </a:extLst>
-                </a:hlinkClick>
-              </a:rPr>
-              <a:t>— Replit AI agent incident, July 2025</a:t>
-            </a:r>
-            <a:endParaRPr lang="en-US" sz="1800" dirty="0"/>
-          </a:p>
-        </p:txBody>
+              </a:rPr>
+              <a:t>Never trust numbers you didn't provide</a:t>
+            </a:r>
+            <a:endParaRPr lang="en-US" sz="2200" dirty="0"/>
+          </a:p>
+        </p:txBody>
+      </p:sp>
+      <p:sp>
+        <p:nvSpPr>
+          <p:cNvPr id="5" name="Shape 3"/>
+          <p:cNvSpPr/>
+          <p:nvPr/>
+        </p:nvSpPr>
+        <p:spPr>
+          <a:xfrm>
+            <a:off x="548640" y="1572768"/>
+            <a:ext cx="182880" cy="182880"/>
+          </a:xfrm>
+          <a:prstGeom prst="rect">
+            <a:avLst/>
+          </a:prstGeom>
+          <a:solidFill>
+            <a:srgbClr val="635BFF"/>
+          </a:solidFill>
+          <a:ln/>
+        </p:spPr>
+      </p:sp>
+      <p:sp>
+        <p:nvSpPr>
+          <p:cNvPr id="6" name="Text 4"/>
+          <p:cNvSpPr/>
+          <p:nvPr/>
+        </p:nvSpPr>
+        <p:spPr>
+          <a:xfrm>
+            <a:off x="914400" y="2057400"/>
+            <a:ext cx="7315200" cy="502920"/>
+          </a:xfrm>
+          <a:prstGeom prst="rect">
+            <a:avLst/>
+          </a:prstGeom>
+          <a:noFill/>
+          <a:ln/>
+        </p:spPr>
+        <p:txBody>
+          <a:bodyPr wrap="square" lIns="0" tIns="0" rIns="0" bIns="0" rtlCol="0" anchor="ctr"/>
+          <a:lstStyle/>
+          <a:p>
+            <a:pPr algn="l" indent="0" marL="0">
+              <a:buNone/>
+            </a:pPr>
+            <a:r>
+              <a:rPr lang="en-US" sz="2200" dirty="0">
+                <a:solidFill>
+                  <a:srgbClr val="EDEDED"/>
+                </a:solidFill>
+                <a:latin typeface="Verdana" pitchFamily="34" charset="0"/>
+                <a:ea typeface="Verdana" pitchFamily="34" charset="-122"/>
+                <a:cs typeface="Verdana" pitchFamily="34" charset="-120"/>
+              </a:rPr>
+              <a:t>Verify claims against sources</a:t>
+            </a:r>
+            <a:endParaRPr lang="en-US" sz="2200" dirty="0"/>
+          </a:p>
+        </p:txBody>
+      </p:sp>
+      <p:sp>
+        <p:nvSpPr>
+          <p:cNvPr id="7" name="Shape 5"/>
+          <p:cNvSpPr/>
+          <p:nvPr/>
+        </p:nvSpPr>
+        <p:spPr>
+          <a:xfrm>
+            <a:off x="548640" y="2167128"/>
+            <a:ext cx="182880" cy="182880"/>
+          </a:xfrm>
+          <a:prstGeom prst="rect">
+            <a:avLst/>
+          </a:prstGeom>
+          <a:solidFill>
+            <a:srgbClr val="635BFF"/>
+          </a:solidFill>
+          <a:ln/>
+        </p:spPr>
+      </p:sp>
+      <p:sp>
+        <p:nvSpPr>
+          <p:cNvPr id="8" name="Text 6"/>
+          <p:cNvSpPr/>
+          <p:nvPr/>
+        </p:nvSpPr>
+        <p:spPr>
+          <a:xfrm>
+            <a:off x="914400" y="2651760"/>
+            <a:ext cx="7315200" cy="502920"/>
+          </a:xfrm>
+          <a:prstGeom prst="rect">
+            <a:avLst/>
+          </a:prstGeom>
+          <a:noFill/>
+          <a:ln/>
+        </p:spPr>
+        <p:txBody>
+          <a:bodyPr wrap="square" lIns="0" tIns="0" rIns="0" bIns="0" rtlCol="0" anchor="ctr"/>
+          <a:lstStyle/>
+          <a:p>
+            <a:pPr algn="l" indent="0" marL="0">
+              <a:buNone/>
+            </a:pPr>
+            <a:r>
+              <a:rPr lang="en-US" sz="2200" dirty="0">
+                <a:solidFill>
+                  <a:srgbClr val="EDEDED"/>
+                </a:solidFill>
+                <a:latin typeface="Verdana" pitchFamily="34" charset="0"/>
+                <a:ea typeface="Verdana" pitchFamily="34" charset="-122"/>
+                <a:cs typeface="Verdana" pitchFamily="34" charset="-120"/>
+              </a:rPr>
+              <a:t>Use AI for drafts, not decisions</a:t>
+            </a:r>
+            <a:endParaRPr lang="en-US" sz="2200" dirty="0"/>
+          </a:p>
+        </p:txBody>
+      </p:sp>
+      <p:sp>
+        <p:nvSpPr>
+          <p:cNvPr id="9" name="Shape 7"/>
+          <p:cNvSpPr/>
+          <p:nvPr/>
+        </p:nvSpPr>
+        <p:spPr>
+          <a:xfrm>
+            <a:off x="548640" y="2761488"/>
+            <a:ext cx="182880" cy="182880"/>
+          </a:xfrm>
+          <a:prstGeom prst="rect">
+            <a:avLst/>
+          </a:prstGeom>
+          <a:solidFill>
+            <a:srgbClr val="635BFF"/>
+          </a:solidFill>
+          <a:ln/>
+        </p:spPr>
+      </p:sp>
+      <p:sp>
+        <p:nvSpPr>
+          <p:cNvPr id="10" name="Text 8"/>
+          <p:cNvSpPr/>
+          <p:nvPr/>
+        </p:nvSpPr>
+        <p:spPr>
+          <a:xfrm>
+            <a:off x="914400" y="3246120"/>
+            <a:ext cx="7315200" cy="502920"/>
+          </a:xfrm>
+          <a:prstGeom prst="rect">
+            <a:avLst/>
+          </a:prstGeom>
+          <a:noFill/>
+          <a:ln/>
+        </p:spPr>
+        <p:txBody>
+          <a:bodyPr wrap="square" lIns="0" tIns="0" rIns="0" bIns="0" rtlCol="0" anchor="ctr"/>
+          <a:lstStyle/>
+          <a:p>
+            <a:pPr algn="l" indent="0" marL="0">
+              <a:buNone/>
+            </a:pPr>
+            <a:r>
+              <a:rPr lang="en-US" sz="2200" dirty="0">
+                <a:solidFill>
+                  <a:srgbClr val="EDEDED"/>
+                </a:solidFill>
+                <a:latin typeface="Verdana" pitchFamily="34" charset="0"/>
+                <a:ea typeface="Verdana" pitchFamily="34" charset="-122"/>
+                <a:cs typeface="Verdana" pitchFamily="34" charset="-120"/>
+              </a:rPr>
+              <a:t>Privacy ≠ accuracy</a:t>
+            </a:r>
+            <a:endParaRPr lang="en-US" sz="2200" dirty="0"/>
+          </a:p>
+        </p:txBody>
+      </p:sp>
+      <p:sp>
+        <p:nvSpPr>
+          <p:cNvPr id="11" name="Shape 9"/>
+          <p:cNvSpPr/>
+          <p:nvPr/>
+        </p:nvSpPr>
+        <p:spPr>
+          <a:xfrm>
+            <a:off x="548640" y="3355848"/>
+            <a:ext cx="182880" cy="182880"/>
+          </a:xfrm>
+          <a:prstGeom prst="rect">
+            <a:avLst/>
+          </a:prstGeom>
+          <a:solidFill>
+            <a:srgbClr val="635BFF"/>
+          </a:solidFill>
+          <a:ln/>
+        </p:spPr>
       </p:sp>
     </p:spTree>
   </p:cSld>
@@ -3802,8 +4245,8 @@
         </p:nvSpPr>
         <p:spPr>
           <a:xfrm>
-            <a:off x="914400" y="1097280"/>
-            <a:ext cx="7315200" cy="2560320"/>
+            <a:off x="914400" y="914400"/>
+            <a:ext cx="7315200" cy="3291840"/>
           </a:xfrm>
           <a:prstGeom prst="rect">
             <a:avLst/>
@@ -3819,34 +4262,68 @@
               <a:buNone/>
             </a:pPr>
             <a:r>
-              <a:rPr lang="en-US" sz="4800" b="1" dirty="0">
-                <a:solidFill>
-                  <a:srgbClr val="FFFFFF"/>
+              <a:rPr lang="en-US" sz="2800" b="1" dirty="0">
+                <a:solidFill>
+                  <a:srgbClr val="635BFF"/>
                 </a:solidFill>
                 <a:latin typeface="Georgia" pitchFamily="34" charset="0"/>
                 <a:ea typeface="Georgia" pitchFamily="34" charset="-122"/>
                 <a:cs typeface="Georgia" pitchFamily="34" charset="-120"/>
               </a:rPr>
-              <a:t>AI is a power tool</a:t>
-            </a:r>
-            <a:endParaRPr lang="en-US" sz="4800" dirty="0"/>
-          </a:p>
-          <a:p>
-            <a:pPr algn="ctr" indent="0" marL="0">
-              <a:buNone/>
-            </a:pPr>
-            <a:r>
-              <a:rPr lang="en-US" sz="4800" b="1" dirty="0">
-                <a:solidFill>
-                  <a:srgbClr val="FFFFFF"/>
+              <a:t>Pick one claim or number</a:t>
+            </a:r>
+            <a:endParaRPr lang="en-US" sz="2800" dirty="0"/>
+          </a:p>
+          <a:p>
+            <a:pPr algn="ctr" indent="0" marL="0">
+              <a:buNone/>
+            </a:pPr>
+            <a:r>
+              <a:rPr lang="en-US" sz="2800" b="1" dirty="0">
+                <a:solidFill>
+                  <a:srgbClr val="635BFF"/>
                 </a:solidFill>
                 <a:latin typeface="Georgia" pitchFamily="34" charset="0"/>
                 <a:ea typeface="Georgia" pitchFamily="34" charset="-122"/>
                 <a:cs typeface="Georgia" pitchFamily="34" charset="-120"/>
               </a:rPr>
-              <a:t>not autopilot</a:t>
-            </a:r>
-            <a:endParaRPr lang="en-US" sz="4800" dirty="0"/>
+              <a:t>from Claude's output</a:t>
+            </a:r>
+            <a:endParaRPr lang="en-US" sz="2800" dirty="0"/>
+          </a:p>
+          <a:p>
+            <a:pPr algn="ctr" indent="0" marL="0">
+              <a:buNone/>
+            </a:pPr>
+            <a:r>
+              <a:rPr lang="en-US" sz="3600" b="1" dirty="0">
+                <a:solidFill>
+                  <a:srgbClr val="635BFF"/>
+                </a:solidFill>
+                <a:latin typeface="Georgia" pitchFamily="34" charset="0"/>
+                <a:ea typeface="Georgia" pitchFamily="34" charset="-122"/>
+                <a:cs typeface="Georgia" pitchFamily="34" charset="-120"/>
+              </a:rPr>
+              <a:t>Verify it manually</a:t>
+            </a:r>
+            <a:endParaRPr lang="en-US" sz="2800" dirty="0"/>
+          </a:p>
+          <a:p>
+            <a:pPr algn="ctr" indent="0" marL="0">
+              <a:buNone/>
+            </a:pPr>
+            <a:r>
+              <a:rPr lang="en-US" sz="2200" i="1" dirty="0">
+                <a:solidFill>
+                  <a:srgbClr val="8B95A5"/>
+                </a:solidFill>
+                <a:latin typeface="Verdana" pitchFamily="34" charset="0"/>
+                <a:ea typeface="Verdana" pitchFamily="34" charset="-122"/>
+                <a:cs typeface="Verdana" pitchFamily="34" charset="-120"/>
+              </a:rPr>
+              <a:t>Was it accurate? Did anything "feel right" but turn out wrong?</a:t>
+            </a:r>
+            <a:endParaRPr lang="en-US" sz="2800" dirty="0"/>
           </a:p>
         </p:txBody>
       </p:sp>
@@ -3912,8 +4389,8 @@
         </p:nvSpPr>
         <p:spPr>
           <a:xfrm>
-            <a:off x="914400" y="1097280"/>
-            <a:ext cx="7315200" cy="2560320"/>
+            <a:off x="914400" y="914400"/>
+            <a:ext cx="7315200" cy="2194560"/>
           </a:xfrm>
           <a:prstGeom prst="rect">
             <a:avLst/>
@@ -3929,7 +4406,7 @@
               <a:buNone/>
             </a:pPr>
             <a:r>
-              <a:rPr lang="en-US" sz="4400" b="1" dirty="0">
+              <a:rPr lang="en-US" sz="4000" b="1" i="1" dirty="0">
                 <a:solidFill>
                   <a:srgbClr val="FFFFFF"/>
                 </a:solidFill>
@@ -3937,16 +4414,16 @@
                 <a:ea typeface="Georgia" pitchFamily="34" charset="-122"/>
                 <a:cs typeface="Georgia" pitchFamily="34" charset="-120"/>
               </a:rPr>
-              <a:t>The trick isn't making</a:t>
-            </a:r>
-            <a:endParaRPr lang="en-US" sz="4400" dirty="0"/>
-          </a:p>
-          <a:p>
-            <a:pPr algn="ctr" indent="0" marL="0">
-              <a:buNone/>
-            </a:pPr>
-            <a:r>
-              <a:rPr lang="en-US" sz="4400" b="1" dirty="0">
+              <a:t>"I destroyed months of work</a:t>
+            </a:r>
+            <a:endParaRPr lang="en-US" sz="4000" dirty="0"/>
+          </a:p>
+          <a:p>
+            <a:pPr algn="ctr" indent="0" marL="0">
+              <a:buNone/>
+            </a:pPr>
+            <a:r>
+              <a:rPr lang="en-US" sz="4000" b="1" i="1" dirty="0">
                 <a:solidFill>
                   <a:srgbClr val="FFFFFF"/>
                 </a:solidFill>
@@ -3954,9 +4431,9 @@
                 <a:ea typeface="Georgia" pitchFamily="34" charset="-122"/>
                 <a:cs typeface="Georgia" pitchFamily="34" charset="-120"/>
               </a:rPr>
-              <a:t>one AI smarter</a:t>
-            </a:r>
-            <a:endParaRPr lang="en-US" sz="4400" dirty="0"/>
+              <a:t>in seconds"</a:t>
+            </a:r>
+            <a:endParaRPr lang="en-US" sz="4000" dirty="0"/>
           </a:p>
         </p:txBody>
       </p:sp>
@@ -3968,8 +4445,8 @@
         </p:nvSpPr>
         <p:spPr>
           <a:xfrm>
-            <a:off x="1371600" y="3657600"/>
-            <a:ext cx="6400800" cy="731520"/>
+            <a:off x="1371600" y="3291840"/>
+            <a:ext cx="6400800" cy="457200"/>
           </a:xfrm>
           <a:prstGeom prst="rect">
             <a:avLst/>
@@ -3985,17 +4462,24 @@
               <a:buNone/>
             </a:pPr>
             <a:r>
-              <a:rPr lang="en-US" sz="2800" dirty="0">
-                <a:solidFill>
-                  <a:srgbClr val="635BFF"/>
+              <a:rPr lang="en-US" sz="1800" u="sng" dirty="0">
+                <a:solidFill>
+                  <a:srgbClr val="8B95A5"/>
                 </a:solidFill>
                 <a:latin typeface="Verdana" pitchFamily="34" charset="0"/>
                 <a:ea typeface="Verdana" pitchFamily="34" charset="-122"/>
                 <a:cs typeface="Verdana" pitchFamily="34" charset="-120"/>
-              </a:rPr>
-              <a:t>It's making many work together</a:t>
-            </a:r>
-            <a:endParaRPr lang="en-US" sz="2800" dirty="0"/>
+                <a:hlinkClick r:id="rId1" invalidUrl="" action="" tgtFrame="" tooltip="" history="1" highlightClick="0" endSnd="0">
+                  <a:extLst>
+                    <a:ext uri="{A12FA001-AC4F-418D-AE19-62706E023703}">
+                      <ahyp:hlinkClr xmlns:ahyp="http://schemas.microsoft.com/office/drawing/2018/hyperlinkcolor" val="tx"/>
+                    </a:ext>
+                  </a:extLst>
+                </a:hlinkClick>
+              </a:rPr>
+              <a:t>— Replit AI agent incident, July 2025</a:t>
+            </a:r>
+            <a:endParaRPr lang="en-US" sz="1800" dirty="0"/>
           </a:p>
         </p:txBody>
       </p:sp>
@@ -4061,8 +4545,8 @@
         </p:nvSpPr>
         <p:spPr>
           <a:xfrm>
-            <a:off x="914400" y="914400"/>
-            <a:ext cx="7315200" cy="3291840"/>
+            <a:off x="914400" y="1097280"/>
+            <a:ext cx="7315200" cy="2560320"/>
           </a:xfrm>
           <a:prstGeom prst="rect">
             <a:avLst/>
@@ -4078,68 +4562,34 @@
               <a:buNone/>
             </a:pPr>
             <a:r>
-              <a:rPr lang="en-US" sz="2800" b="1" dirty="0">
-                <a:solidFill>
-                  <a:srgbClr val="635BFF"/>
+              <a:rPr lang="en-US" sz="4800" b="1" dirty="0">
+                <a:solidFill>
+                  <a:srgbClr val="FFFFFF"/>
                 </a:solidFill>
                 <a:latin typeface="Georgia" pitchFamily="34" charset="0"/>
                 <a:ea typeface="Georgia" pitchFamily="34" charset="-122"/>
                 <a:cs typeface="Georgia" pitchFamily="34" charset="-120"/>
               </a:rPr>
-              <a:t>What are the phases of this task?</a:t>
-            </a:r>
-            <a:endParaRPr lang="en-US" sz="2800" dirty="0"/>
-          </a:p>
-          <a:p>
-            <a:pPr algn="ctr" indent="0" marL="0">
-              <a:buNone/>
-            </a:pPr>
-            <a:r>
-              <a:rPr lang="en-US" sz="2200" i="1" dirty="0">
-                <a:solidFill>
-                  <a:srgbClr val="8B95A5"/>
-                </a:solidFill>
-                <a:latin typeface="Verdana" pitchFamily="34" charset="0"/>
-                <a:ea typeface="Verdana" pitchFamily="34" charset="-122"/>
-                <a:cs typeface="Verdana" pitchFamily="34" charset="-120"/>
-              </a:rPr>
-              <a:t>What does each phase produce?</a:t>
-            </a:r>
-            <a:endParaRPr lang="en-US" sz="2800" dirty="0"/>
-          </a:p>
-          <a:p>
-            <a:pPr algn="ctr" indent="0" marL="0">
-              <a:buNone/>
-            </a:pPr>
-            <a:r>
-              <a:rPr lang="en-US" sz="2200" i="1" dirty="0">
-                <a:solidFill>
-                  <a:srgbClr val="8B95A5"/>
-                </a:solidFill>
-                <a:latin typeface="Verdana" pitchFamily="34" charset="0"/>
-                <a:ea typeface="Verdana" pitchFamily="34" charset="-122"/>
-                <a:cs typeface="Verdana" pitchFamily="34" charset="-120"/>
-              </a:rPr>
-              <a:t>What does the next phase need</a:t>
-            </a:r>
-            <a:endParaRPr lang="en-US" sz="2800" dirty="0"/>
-          </a:p>
-          <a:p>
-            <a:pPr algn="ctr" indent="0" marL="0">
-              <a:buNone/>
-            </a:pPr>
-            <a:r>
-              <a:rPr lang="en-US" sz="2200" i="1" dirty="0">
-                <a:solidFill>
-                  <a:srgbClr val="8B95A5"/>
-                </a:solidFill>
-                <a:latin typeface="Verdana" pitchFamily="34" charset="0"/>
-                <a:ea typeface="Verdana" pitchFamily="34" charset="-122"/>
-                <a:cs typeface="Verdana" pitchFamily="34" charset="-120"/>
-              </a:rPr>
-              <a:t>from the previous one?</a:t>
-            </a:r>
-            <a:endParaRPr lang="en-US" sz="2800" dirty="0"/>
+              <a:t>AI is a power tool</a:t>
+            </a:r>
+            <a:endParaRPr lang="en-US" sz="4800" dirty="0"/>
+          </a:p>
+          <a:p>
+            <a:pPr algn="ctr" indent="0" marL="0">
+              <a:buNone/>
+            </a:pPr>
+            <a:r>
+              <a:rPr lang="en-US" sz="4800" b="1" dirty="0">
+                <a:solidFill>
+                  <a:srgbClr val="FFFFFF"/>
+                </a:solidFill>
+                <a:latin typeface="Georgia" pitchFamily="34" charset="0"/>
+                <a:ea typeface="Georgia" pitchFamily="34" charset="-122"/>
+                <a:cs typeface="Georgia" pitchFamily="34" charset="-120"/>
+              </a:rPr>
+              <a:t>not autopilot</a:t>
+            </a:r>
+            <a:endParaRPr lang="en-US" sz="4800" dirty="0"/>
           </a:p>
         </p:txBody>
       </p:sp>
@@ -4199,30 +4649,59 @@
       </p:sp>
       <p:sp>
         <p:nvSpPr>
-          <p:cNvPr id="3" name="Shape 1"/>
-          <p:cNvSpPr/>
-          <p:nvPr/>
-        </p:nvSpPr>
-        <p:spPr>
-          <a:xfrm>
-            <a:off x="457200" y="2011680"/>
-            <a:ext cx="1645920" cy="822960"/>
-          </a:xfrm>
-          <a:prstGeom prst="roundRect">
-            <a:avLst>
-              <a:gd name="adj" fmla="val 11111"/>
-            </a:avLst>
-          </a:prstGeom>
-          <a:solidFill>
-            <a:srgbClr val="0A2540"/>
-          </a:solidFill>
-          <a:ln w="19050">
-            <a:solidFill>
-              <a:srgbClr val="8B95A5"/>
-            </a:solidFill>
-            <a:prstDash val="solid"/>
-          </a:ln>
-        </p:spPr>
+          <p:cNvPr id="3" name="Text 1"/>
+          <p:cNvSpPr/>
+          <p:nvPr/>
+        </p:nvSpPr>
+        <p:spPr>
+          <a:xfrm>
+            <a:off x="914400" y="1097280"/>
+            <a:ext cx="7315200" cy="2560320"/>
+          </a:xfrm>
+          <a:prstGeom prst="rect">
+            <a:avLst/>
+          </a:prstGeom>
+          <a:noFill/>
+          <a:ln/>
+        </p:spPr>
+        <p:txBody>
+          <a:bodyPr wrap="square" lIns="0" tIns="0" rIns="0" bIns="0" rtlCol="0" anchor="ctr"/>
+          <a:lstStyle/>
+          <a:p>
+            <a:pPr algn="ctr" indent="0" marL="0">
+              <a:buNone/>
+            </a:pPr>
+            <a:r>
+              <a:rPr lang="en-US" sz="4400" b="1" dirty="0">
+                <a:solidFill>
+                  <a:srgbClr val="FFFFFF"/>
+                </a:solidFill>
+                <a:latin typeface="Georgia" pitchFamily="34" charset="0"/>
+                <a:ea typeface="Georgia" pitchFamily="34" charset="-122"/>
+                <a:cs typeface="Georgia" pitchFamily="34" charset="-120"/>
+              </a:rPr>
+              <a:t>The trick isn't making</a:t>
+            </a:r>
+            <a:endParaRPr lang="en-US" sz="4400" dirty="0"/>
+          </a:p>
+          <a:p>
+            <a:pPr algn="ctr" indent="0" marL="0">
+              <a:buNone/>
+            </a:pPr>
+            <a:r>
+              <a:rPr lang="en-US" sz="4400" b="1" dirty="0">
+                <a:solidFill>
+                  <a:srgbClr val="FFFFFF"/>
+                </a:solidFill>
+                <a:latin typeface="Georgia" pitchFamily="34" charset="0"/>
+                <a:ea typeface="Georgia" pitchFamily="34" charset="-122"/>
+                <a:cs typeface="Georgia" pitchFamily="34" charset="-120"/>
+              </a:rPr>
+              <a:t>one AI smarter</a:t>
+            </a:r>
+            <a:endParaRPr lang="en-US" sz="4400" dirty="0"/>
+          </a:p>
+        </p:txBody>
       </p:sp>
       <p:sp>
         <p:nvSpPr>
@@ -4232,383 +4711,34 @@
         </p:nvSpPr>
         <p:spPr>
           <a:xfrm>
-            <a:off x="457200" y="2011680"/>
-            <a:ext cx="1645920" cy="822960"/>
-          </a:xfrm>
-          <a:prstGeom prst="rect">
-            <a:avLst/>
-          </a:prstGeom>
-          <a:noFill/>
-          <a:ln/>
-        </p:spPr>
-        <p:txBody>
-          <a:bodyPr wrap="square" lIns="0" tIns="0" rIns="0" bIns="0" rtlCol="0" anchor="ctr"/>
-          <a:lstStyle/>
-          <a:p>
-            <a:pPr algn="ctr" indent="0" marL="0">
-              <a:buNone/>
-            </a:pPr>
-            <a:r>
-              <a:rPr lang="en-US" sz="1800" b="1" dirty="0">
-                <a:solidFill>
-                  <a:srgbClr val="EDEDED"/>
+            <a:off x="1371600" y="3657600"/>
+            <a:ext cx="6400800" cy="731520"/>
+          </a:xfrm>
+          <a:prstGeom prst="rect">
+            <a:avLst/>
+          </a:prstGeom>
+          <a:noFill/>
+          <a:ln/>
+        </p:spPr>
+        <p:txBody>
+          <a:bodyPr wrap="square" lIns="0" tIns="0" rIns="0" bIns="0" rtlCol="0" anchor="t"/>
+          <a:lstStyle/>
+          <a:p>
+            <a:pPr algn="ctr" indent="0" marL="0">
+              <a:buNone/>
+            </a:pPr>
+            <a:r>
+              <a:rPr lang="en-US" sz="2800" dirty="0">
+                <a:solidFill>
+                  <a:srgbClr val="635BFF"/>
                 </a:solidFill>
                 <a:latin typeface="Verdana" pitchFamily="34" charset="0"/>
                 <a:ea typeface="Verdana" pitchFamily="34" charset="-122"/>
                 <a:cs typeface="Verdana" pitchFamily="34" charset="-120"/>
               </a:rPr>
-              <a:t>Research</a:t>
-            </a:r>
-            <a:endParaRPr lang="en-US" sz="1800" dirty="0"/>
-          </a:p>
-        </p:txBody>
-      </p:sp>
-      <p:sp>
-        <p:nvSpPr>
-          <p:cNvPr id="5" name="Text 3"/>
-          <p:cNvSpPr/>
-          <p:nvPr/>
-        </p:nvSpPr>
-        <p:spPr>
-          <a:xfrm>
-            <a:off x="2103120" y="2011680"/>
-            <a:ext cx="548640" cy="822960"/>
-          </a:xfrm>
-          <a:prstGeom prst="rect">
-            <a:avLst/>
-          </a:prstGeom>
-          <a:noFill/>
-          <a:ln/>
-        </p:spPr>
-        <p:txBody>
-          <a:bodyPr wrap="square" lIns="0" tIns="0" rIns="0" bIns="0" rtlCol="0" anchor="ctr"/>
-          <a:lstStyle/>
-          <a:p>
-            <a:pPr algn="ctr" indent="0" marL="0">
-              <a:buNone/>
-            </a:pPr>
-            <a:r>
-              <a:rPr lang="en-US" sz="2800" b="1" dirty="0">
-                <a:solidFill>
-                  <a:srgbClr val="635BFF"/>
-                </a:solidFill>
-                <a:latin typeface="Verdana" pitchFamily="34" charset="0"/>
-                <a:ea typeface="Verdana" pitchFamily="34" charset="-122"/>
-                <a:cs typeface="Verdana" pitchFamily="34" charset="-120"/>
-              </a:rPr>
-              <a:t>→</a:t>
+              <a:t>It's making many work together</a:t>
             </a:r>
             <a:endParaRPr lang="en-US" sz="2800" dirty="0"/>
-          </a:p>
-        </p:txBody>
-      </p:sp>
-      <p:sp>
-        <p:nvSpPr>
-          <p:cNvPr id="6" name="Shape 4"/>
-          <p:cNvSpPr/>
-          <p:nvPr/>
-        </p:nvSpPr>
-        <p:spPr>
-          <a:xfrm>
-            <a:off x="2651760" y="2011680"/>
-            <a:ext cx="1645920" cy="822960"/>
-          </a:xfrm>
-          <a:prstGeom prst="roundRect">
-            <a:avLst>
-              <a:gd name="adj" fmla="val 11111"/>
-            </a:avLst>
-          </a:prstGeom>
-          <a:solidFill>
-            <a:srgbClr val="0A2540"/>
-          </a:solidFill>
-          <a:ln w="19050">
-            <a:solidFill>
-              <a:srgbClr val="8B95A5"/>
-            </a:solidFill>
-            <a:prstDash val="solid"/>
-          </a:ln>
-        </p:spPr>
-      </p:sp>
-      <p:sp>
-        <p:nvSpPr>
-          <p:cNvPr id="7" name="Text 5"/>
-          <p:cNvSpPr/>
-          <p:nvPr/>
-        </p:nvSpPr>
-        <p:spPr>
-          <a:xfrm>
-            <a:off x="2651760" y="2011680"/>
-            <a:ext cx="1645920" cy="822960"/>
-          </a:xfrm>
-          <a:prstGeom prst="rect">
-            <a:avLst/>
-          </a:prstGeom>
-          <a:noFill/>
-          <a:ln/>
-        </p:spPr>
-        <p:txBody>
-          <a:bodyPr wrap="square" lIns="0" tIns="0" rIns="0" bIns="0" rtlCol="0" anchor="ctr"/>
-          <a:lstStyle/>
-          <a:p>
-            <a:pPr algn="ctr" indent="0" marL="0">
-              <a:buNone/>
-            </a:pPr>
-            <a:r>
-              <a:rPr lang="en-US" sz="1800" b="1" dirty="0">
-                <a:solidFill>
-                  <a:srgbClr val="EDEDED"/>
-                </a:solidFill>
-                <a:latin typeface="Verdana" pitchFamily="34" charset="0"/>
-                <a:ea typeface="Verdana" pitchFamily="34" charset="-122"/>
-                <a:cs typeface="Verdana" pitchFamily="34" charset="-120"/>
-              </a:rPr>
-              <a:t>Draft</a:t>
-            </a:r>
-            <a:endParaRPr lang="en-US" sz="1800" dirty="0"/>
-          </a:p>
-        </p:txBody>
-      </p:sp>
-      <p:sp>
-        <p:nvSpPr>
-          <p:cNvPr id="8" name="Text 6"/>
-          <p:cNvSpPr/>
-          <p:nvPr/>
-        </p:nvSpPr>
-        <p:spPr>
-          <a:xfrm>
-            <a:off x="4297680" y="2011680"/>
-            <a:ext cx="548640" cy="822960"/>
-          </a:xfrm>
-          <a:prstGeom prst="rect">
-            <a:avLst/>
-          </a:prstGeom>
-          <a:noFill/>
-          <a:ln/>
-        </p:spPr>
-        <p:txBody>
-          <a:bodyPr wrap="square" lIns="0" tIns="0" rIns="0" bIns="0" rtlCol="0" anchor="ctr"/>
-          <a:lstStyle/>
-          <a:p>
-            <a:pPr algn="ctr" indent="0" marL="0">
-              <a:buNone/>
-            </a:pPr>
-            <a:r>
-              <a:rPr lang="en-US" sz="2800" b="1" dirty="0">
-                <a:solidFill>
-                  <a:srgbClr val="635BFF"/>
-                </a:solidFill>
-                <a:latin typeface="Verdana" pitchFamily="34" charset="0"/>
-                <a:ea typeface="Verdana" pitchFamily="34" charset="-122"/>
-                <a:cs typeface="Verdana" pitchFamily="34" charset="-120"/>
-              </a:rPr>
-              <a:t>→</a:t>
-            </a:r>
-            <a:endParaRPr lang="en-US" sz="2800" dirty="0"/>
-          </a:p>
-        </p:txBody>
-      </p:sp>
-      <p:sp>
-        <p:nvSpPr>
-          <p:cNvPr id="9" name="Shape 7"/>
-          <p:cNvSpPr/>
-          <p:nvPr/>
-        </p:nvSpPr>
-        <p:spPr>
-          <a:xfrm>
-            <a:off x="4846320" y="2011680"/>
-            <a:ext cx="1645920" cy="822960"/>
-          </a:xfrm>
-          <a:prstGeom prst="roundRect">
-            <a:avLst>
-              <a:gd name="adj" fmla="val 11111"/>
-            </a:avLst>
-          </a:prstGeom>
-          <a:solidFill>
-            <a:srgbClr val="0A2540"/>
-          </a:solidFill>
-          <a:ln w="19050">
-            <a:solidFill>
-              <a:srgbClr val="8B95A5"/>
-            </a:solidFill>
-            <a:prstDash val="solid"/>
-          </a:ln>
-        </p:spPr>
-      </p:sp>
-      <p:sp>
-        <p:nvSpPr>
-          <p:cNvPr id="10" name="Text 8"/>
-          <p:cNvSpPr/>
-          <p:nvPr/>
-        </p:nvSpPr>
-        <p:spPr>
-          <a:xfrm>
-            <a:off x="4846320" y="2011680"/>
-            <a:ext cx="1645920" cy="822960"/>
-          </a:xfrm>
-          <a:prstGeom prst="rect">
-            <a:avLst/>
-          </a:prstGeom>
-          <a:noFill/>
-          <a:ln/>
-        </p:spPr>
-        <p:txBody>
-          <a:bodyPr wrap="square" lIns="0" tIns="0" rIns="0" bIns="0" rtlCol="0" anchor="ctr"/>
-          <a:lstStyle/>
-          <a:p>
-            <a:pPr algn="ctr" indent="0" marL="0">
-              <a:buNone/>
-            </a:pPr>
-            <a:r>
-              <a:rPr lang="en-US" sz="1800" b="1" dirty="0">
-                <a:solidFill>
-                  <a:srgbClr val="EDEDED"/>
-                </a:solidFill>
-                <a:latin typeface="Verdana" pitchFamily="34" charset="0"/>
-                <a:ea typeface="Verdana" pitchFamily="34" charset="-122"/>
-                <a:cs typeface="Verdana" pitchFamily="34" charset="-120"/>
-              </a:rPr>
-              <a:t>Review</a:t>
-            </a:r>
-            <a:endParaRPr lang="en-US" sz="1800" dirty="0"/>
-          </a:p>
-        </p:txBody>
-      </p:sp>
-      <p:sp>
-        <p:nvSpPr>
-          <p:cNvPr id="11" name="Text 9"/>
-          <p:cNvSpPr/>
-          <p:nvPr/>
-        </p:nvSpPr>
-        <p:spPr>
-          <a:xfrm>
-            <a:off x="6492240" y="2011680"/>
-            <a:ext cx="548640" cy="822960"/>
-          </a:xfrm>
-          <a:prstGeom prst="rect">
-            <a:avLst/>
-          </a:prstGeom>
-          <a:noFill/>
-          <a:ln/>
-        </p:spPr>
-        <p:txBody>
-          <a:bodyPr wrap="square" lIns="0" tIns="0" rIns="0" bIns="0" rtlCol="0" anchor="ctr"/>
-          <a:lstStyle/>
-          <a:p>
-            <a:pPr algn="ctr" indent="0" marL="0">
-              <a:buNone/>
-            </a:pPr>
-            <a:r>
-              <a:rPr lang="en-US" sz="2800" b="1" dirty="0">
-                <a:solidFill>
-                  <a:srgbClr val="635BFF"/>
-                </a:solidFill>
-                <a:latin typeface="Verdana" pitchFamily="34" charset="0"/>
-                <a:ea typeface="Verdana" pitchFamily="34" charset="-122"/>
-                <a:cs typeface="Verdana" pitchFamily="34" charset="-120"/>
-              </a:rPr>
-              <a:t>→</a:t>
-            </a:r>
-            <a:endParaRPr lang="en-US" sz="2800" dirty="0"/>
-          </a:p>
-        </p:txBody>
-      </p:sp>
-      <p:sp>
-        <p:nvSpPr>
-          <p:cNvPr id="12" name="Shape 10"/>
-          <p:cNvSpPr/>
-          <p:nvPr/>
-        </p:nvSpPr>
-        <p:spPr>
-          <a:xfrm>
-            <a:off x="7040880" y="2011680"/>
-            <a:ext cx="1645920" cy="822960"/>
-          </a:xfrm>
-          <a:prstGeom prst="roundRect">
-            <a:avLst>
-              <a:gd name="adj" fmla="val 11111"/>
-            </a:avLst>
-          </a:prstGeom>
-          <a:solidFill>
-            <a:srgbClr val="635BFF"/>
-          </a:solidFill>
-          <a:ln/>
-        </p:spPr>
-      </p:sp>
-      <p:sp>
-        <p:nvSpPr>
-          <p:cNvPr id="13" name="Text 11"/>
-          <p:cNvSpPr/>
-          <p:nvPr/>
-        </p:nvSpPr>
-        <p:spPr>
-          <a:xfrm>
-            <a:off x="7040880" y="2011680"/>
-            <a:ext cx="1645920" cy="822960"/>
-          </a:xfrm>
-          <a:prstGeom prst="rect">
-            <a:avLst/>
-          </a:prstGeom>
-          <a:noFill/>
-          <a:ln/>
-        </p:spPr>
-        <p:txBody>
-          <a:bodyPr wrap="square" lIns="0" tIns="0" rIns="0" bIns="0" rtlCol="0" anchor="ctr"/>
-          <a:lstStyle/>
-          <a:p>
-            <a:pPr algn="ctr" indent="0" marL="0">
-              <a:buNone/>
-            </a:pPr>
-            <a:r>
-              <a:rPr lang="en-US" sz="1800" b="1" dirty="0">
-                <a:solidFill>
-                  <a:srgbClr val="FFFFFF"/>
-                </a:solidFill>
-                <a:latin typeface="Verdana" pitchFamily="34" charset="0"/>
-                <a:ea typeface="Verdana" pitchFamily="34" charset="-122"/>
-                <a:cs typeface="Verdana" pitchFamily="34" charset="-120"/>
-              </a:rPr>
-              <a:t>You</a:t>
-            </a:r>
-            <a:endParaRPr lang="en-US" sz="1800" dirty="0"/>
-          </a:p>
-        </p:txBody>
-      </p:sp>
-      <p:sp>
-        <p:nvSpPr>
-          <p:cNvPr id="14" name="Text 12"/>
-          <p:cNvSpPr/>
-          <p:nvPr/>
-        </p:nvSpPr>
-        <p:spPr>
-          <a:xfrm>
-            <a:off x="914400" y="3291840"/>
-            <a:ext cx="7315200" cy="548640"/>
-          </a:xfrm>
-          <a:prstGeom prst="rect">
-            <a:avLst/>
-          </a:prstGeom>
-          <a:noFill/>
-          <a:ln/>
-        </p:spPr>
-        <p:txBody>
-          <a:bodyPr wrap="square" lIns="0" tIns="0" rIns="0" bIns="0" rtlCol="0" anchor="ctr"/>
-          <a:lstStyle/>
-          <a:p>
-            <a:pPr algn="ctr" indent="0" marL="0">
-              <a:buNone/>
-            </a:pPr>
-            <a:r>
-              <a:rPr lang="en-US" sz="2400" i="1" dirty="0">
-                <a:solidFill>
-                  <a:srgbClr val="8B95A5"/>
-                </a:solidFill>
-                <a:latin typeface="Verdana" pitchFamily="34" charset="0"/>
-                <a:ea typeface="Verdana" pitchFamily="34" charset="-122"/>
-                <a:cs typeface="Verdana" pitchFamily="34" charset="-120"/>
-              </a:rPr>
-              <a:t>Each agent does one thing. The chain does everything.</a:t>
-            </a:r>
-            <a:endParaRPr lang="en-US" sz="2400" dirty="0"/>
           </a:p>
         </p:txBody>
       </p:sp>
@@ -4674,8 +4804,8 @@
         </p:nvSpPr>
         <p:spPr>
           <a:xfrm>
-            <a:off x="457200" y="1463040"/>
-            <a:ext cx="8229600" cy="1097280"/>
+            <a:off x="914400" y="914400"/>
+            <a:ext cx="7315200" cy="3291840"/>
           </a:xfrm>
           <a:prstGeom prst="rect">
             <a:avLst/>
@@ -4691,54 +4821,66 @@
               <a:buNone/>
             </a:pPr>
             <a:r>
-              <a:rPr lang="en-US" sz="5400" b="1" dirty="0">
-                <a:solidFill>
-                  <a:srgbClr val="FFFFFF"/>
+              <a:rPr lang="en-US" sz="2800" b="1" dirty="0">
+                <a:solidFill>
+                  <a:srgbClr val="635BFF"/>
                 </a:solidFill>
                 <a:latin typeface="Georgia" pitchFamily="34" charset="0"/>
                 <a:ea typeface="Georgia" pitchFamily="34" charset="-122"/>
                 <a:cs typeface="Georgia" pitchFamily="34" charset="-120"/>
               </a:rPr>
-              <a:t>Demo</a:t>
-            </a:r>
-            <a:endParaRPr lang="en-US" sz="5400" dirty="0"/>
-          </a:p>
-        </p:txBody>
-      </p:sp>
-      <p:sp>
-        <p:nvSpPr>
-          <p:cNvPr id="4" name="Text 2"/>
-          <p:cNvSpPr/>
-          <p:nvPr/>
-        </p:nvSpPr>
-        <p:spPr>
-          <a:xfrm>
-            <a:off x="914400" y="2651760"/>
-            <a:ext cx="7315200" cy="548640"/>
-          </a:xfrm>
-          <a:prstGeom prst="rect">
-            <a:avLst/>
-          </a:prstGeom>
-          <a:noFill/>
-          <a:ln/>
-        </p:spPr>
-        <p:txBody>
-          <a:bodyPr wrap="square" lIns="0" tIns="0" rIns="0" bIns="0" rtlCol="0" anchor="ctr"/>
-          <a:lstStyle/>
-          <a:p>
-            <a:pPr algn="ctr" indent="0" marL="0">
-              <a:buNone/>
-            </a:pPr>
-            <a:r>
-              <a:rPr lang="en-US" sz="2800" i="1" dirty="0">
-                <a:solidFill>
-                  <a:srgbClr val="635BFF"/>
+              <a:t>What are the phases of this task?</a:t>
+            </a:r>
+            <a:endParaRPr lang="en-US" sz="2800" dirty="0"/>
+          </a:p>
+          <a:p>
+            <a:pPr algn="ctr" indent="0" marL="0">
+              <a:buNone/>
+            </a:pPr>
+            <a:r>
+              <a:rPr lang="en-US" sz="2200" i="1" dirty="0">
+                <a:solidFill>
+                  <a:srgbClr val="8B95A5"/>
                 </a:solidFill>
                 <a:latin typeface="Verdana" pitchFamily="34" charset="0"/>
                 <a:ea typeface="Verdana" pitchFamily="34" charset="-122"/>
                 <a:cs typeface="Verdana" pitchFamily="34" charset="-120"/>
               </a:rPr>
-              <a:t>Watch a 3-phase chain run live</a:t>
+              <a:t>What does each phase produce?</a:t>
+            </a:r>
+            <a:endParaRPr lang="en-US" sz="2800" dirty="0"/>
+          </a:p>
+          <a:p>
+            <a:pPr algn="ctr" indent="0" marL="0">
+              <a:buNone/>
+            </a:pPr>
+            <a:r>
+              <a:rPr lang="en-US" sz="2200" i="1" dirty="0">
+                <a:solidFill>
+                  <a:srgbClr val="8B95A5"/>
+                </a:solidFill>
+                <a:latin typeface="Verdana" pitchFamily="34" charset="0"/>
+                <a:ea typeface="Verdana" pitchFamily="34" charset="-122"/>
+                <a:cs typeface="Verdana" pitchFamily="34" charset="-120"/>
+              </a:rPr>
+              <a:t>What does the next phase need</a:t>
+            </a:r>
+            <a:endParaRPr lang="en-US" sz="2800" dirty="0"/>
+          </a:p>
+          <a:p>
+            <a:pPr algn="ctr" indent="0" marL="0">
+              <a:buNone/>
+            </a:pPr>
+            <a:r>
+              <a:rPr lang="en-US" sz="2200" i="1" dirty="0">
+                <a:solidFill>
+                  <a:srgbClr val="8B95A5"/>
+                </a:solidFill>
+                <a:latin typeface="Verdana" pitchFamily="34" charset="0"/>
+                <a:ea typeface="Verdana" pitchFamily="34" charset="-122"/>
+                <a:cs typeface="Verdana" pitchFamily="34" charset="-120"/>
+              </a:rPr>
+              <a:t>from the previous one?</a:t>
             </a:r>
             <a:endParaRPr lang="en-US" sz="2800" dirty="0"/>
           </a:p>
@@ -4800,14 +4942,41 @@
       </p:sp>
       <p:sp>
         <p:nvSpPr>
-          <p:cNvPr id="3" name="Text 1"/>
-          <p:cNvSpPr/>
-          <p:nvPr/>
-        </p:nvSpPr>
-        <p:spPr>
-          <a:xfrm>
-            <a:off x="914400" y="914400"/>
-            <a:ext cx="7315200" cy="3291840"/>
+          <p:cNvPr id="3" name="Shape 1"/>
+          <p:cNvSpPr/>
+          <p:nvPr/>
+        </p:nvSpPr>
+        <p:spPr>
+          <a:xfrm>
+            <a:off x="457200" y="2011680"/>
+            <a:ext cx="1645920" cy="822960"/>
+          </a:xfrm>
+          <a:prstGeom prst="roundRect">
+            <a:avLst>
+              <a:gd name="adj" fmla="val 11111"/>
+            </a:avLst>
+          </a:prstGeom>
+          <a:solidFill>
+            <a:srgbClr val="0A2540"/>
+          </a:solidFill>
+          <a:ln w="19050">
+            <a:solidFill>
+              <a:srgbClr val="8B95A5"/>
+            </a:solidFill>
+            <a:prstDash val="solid"/>
+          </a:ln>
+        </p:spPr>
+      </p:sp>
+      <p:sp>
+        <p:nvSpPr>
+          <p:cNvPr id="4" name="Text 2"/>
+          <p:cNvSpPr/>
+          <p:nvPr/>
+        </p:nvSpPr>
+        <p:spPr>
+          <a:xfrm>
+            <a:off x="457200" y="2011680"/>
+            <a:ext cx="1645920" cy="822960"/>
           </a:xfrm>
           <a:prstGeom prst="rect">
             <a:avLst/>
@@ -4823,102 +4992,372 @@
               <a:buNone/>
             </a:pPr>
             <a:r>
-              <a:rPr lang="en-US" sz="2800" b="1" dirty="0">
-                <a:solidFill>
-                  <a:srgbClr val="635BFF"/>
-                </a:solidFill>
-                <a:latin typeface="Georgia" pitchFamily="34" charset="0"/>
-                <a:ea typeface="Georgia" pitchFamily="34" charset="-122"/>
-                <a:cs typeface="Georgia" pitchFamily="34" charset="-120"/>
-              </a:rPr>
-              <a:t>Phase 1: Open Research Agent</a:t>
-            </a:r>
-            <a:endParaRPr lang="en-US" sz="2800" dirty="0"/>
-          </a:p>
-          <a:p>
-            <a:pPr algn="ctr" indent="0" marL="0">
-              <a:buNone/>
-            </a:pPr>
-            <a:r>
-              <a:rPr lang="en-US" sz="2800" b="1" dirty="0">
-                <a:solidFill>
-                  <a:srgbClr val="635BFF"/>
-                </a:solidFill>
-                <a:latin typeface="Georgia" pitchFamily="34" charset="0"/>
-                <a:ea typeface="Georgia" pitchFamily="34" charset="-122"/>
-                <a:cs typeface="Georgia" pitchFamily="34" charset="-120"/>
-              </a:rPr>
-              <a:t>→ give it your task → save output</a:t>
-            </a:r>
-            <a:endParaRPr lang="en-US" sz="2800" dirty="0"/>
-          </a:p>
-          <a:p>
-            <a:pPr algn="ctr" indent="0" marL="0">
-              <a:buNone/>
-            </a:pPr>
-            <a:r>
-              <a:rPr lang="en-US" sz="2800" b="1" dirty="0">
-                <a:solidFill>
-                  <a:srgbClr val="635BFF"/>
-                </a:solidFill>
-                <a:latin typeface="Georgia" pitchFamily="34" charset="0"/>
-                <a:ea typeface="Georgia" pitchFamily="34" charset="-122"/>
-                <a:cs typeface="Georgia" pitchFamily="34" charset="-120"/>
-              </a:rPr>
-              <a:t>Phase 2: Open Draft Agent</a:t>
-            </a:r>
-            <a:endParaRPr lang="en-US" sz="2800" dirty="0"/>
-          </a:p>
-          <a:p>
-            <a:pPr algn="ctr" indent="0" marL="0">
-              <a:buNone/>
-            </a:pPr>
-            <a:r>
-              <a:rPr lang="en-US" sz="2800" b="1" dirty="0">
-                <a:solidFill>
-                  <a:srgbClr val="635BFF"/>
-                </a:solidFill>
-                <a:latin typeface="Georgia" pitchFamily="34" charset="0"/>
-                <a:ea typeface="Georgia" pitchFamily="34" charset="-122"/>
-                <a:cs typeface="Georgia" pitchFamily="34" charset="-120"/>
-              </a:rPr>
-              <a:t>→ paste Phase 1's output → draft</a:t>
-            </a:r>
-            <a:endParaRPr lang="en-US" sz="2800" dirty="0"/>
-          </a:p>
-          <a:p>
-            <a:pPr algn="ctr" indent="0" marL="0">
-              <a:buNone/>
-            </a:pPr>
-            <a:r>
-              <a:rPr lang="en-US" sz="2200" i="1" dirty="0">
-                <a:solidFill>
-                  <a:srgbClr val="8B95A5"/>
+              <a:rPr lang="en-US" sz="1800" b="1" dirty="0">
+                <a:solidFill>
+                  <a:srgbClr val="EDEDED"/>
                 </a:solidFill>
                 <a:latin typeface="Verdana" pitchFamily="34" charset="0"/>
                 <a:ea typeface="Verdana" pitchFamily="34" charset="-122"/>
                 <a:cs typeface="Verdana" pitchFamily="34" charset="-120"/>
               </a:rPr>
-              <a:t>How does this compare to one</a:t>
-            </a:r>
-            <a:endParaRPr lang="en-US" sz="2800" dirty="0"/>
-          </a:p>
-          <a:p>
-            <a:pPr algn="ctr" indent="0" marL="0">
-              <a:buNone/>
-            </a:pPr>
-            <a:r>
-              <a:rPr lang="en-US" sz="2200" i="1" dirty="0">
-                <a:solidFill>
-                  <a:srgbClr val="8B95A5"/>
+              <a:t>Research</a:t>
+            </a:r>
+            <a:endParaRPr lang="en-US" sz="1800" dirty="0"/>
+          </a:p>
+        </p:txBody>
+      </p:sp>
+      <p:sp>
+        <p:nvSpPr>
+          <p:cNvPr id="5" name="Text 3"/>
+          <p:cNvSpPr/>
+          <p:nvPr/>
+        </p:nvSpPr>
+        <p:spPr>
+          <a:xfrm>
+            <a:off x="2103120" y="2011680"/>
+            <a:ext cx="548640" cy="822960"/>
+          </a:xfrm>
+          <a:prstGeom prst="rect">
+            <a:avLst/>
+          </a:prstGeom>
+          <a:noFill/>
+          <a:ln/>
+        </p:spPr>
+        <p:txBody>
+          <a:bodyPr wrap="square" lIns="0" tIns="0" rIns="0" bIns="0" rtlCol="0" anchor="ctr">
+            <a:normAutofit/>
+          </a:bodyPr>
+          <a:lstStyle/>
+          <a:p>
+            <a:pPr algn="ctr" indent="0" marL="0">
+              <a:buNone/>
+            </a:pPr>
+            <a:r>
+              <a:rPr lang="en-US" sz="2800" b="1" dirty="0">
+                <a:solidFill>
+                  <a:srgbClr val="635BFF"/>
                 </a:solidFill>
                 <a:latin typeface="Verdana" pitchFamily="34" charset="0"/>
                 <a:ea typeface="Verdana" pitchFamily="34" charset="-122"/>
                 <a:cs typeface="Verdana" pitchFamily="34" charset="-120"/>
               </a:rPr>
-              <a:t>conversation doing everything?</a:t>
+              <a:t>→</a:t>
             </a:r>
             <a:endParaRPr lang="en-US" sz="2800" dirty="0"/>
+          </a:p>
+        </p:txBody>
+      </p:sp>
+      <p:sp>
+        <p:nvSpPr>
+          <p:cNvPr id="6" name="Shape 4"/>
+          <p:cNvSpPr/>
+          <p:nvPr/>
+        </p:nvSpPr>
+        <p:spPr>
+          <a:xfrm>
+            <a:off x="2651760" y="2011680"/>
+            <a:ext cx="1645920" cy="822960"/>
+          </a:xfrm>
+          <a:prstGeom prst="roundRect">
+            <a:avLst>
+              <a:gd name="adj" fmla="val 11111"/>
+            </a:avLst>
+          </a:prstGeom>
+          <a:solidFill>
+            <a:srgbClr val="0A2540"/>
+          </a:solidFill>
+          <a:ln w="19050">
+            <a:solidFill>
+              <a:srgbClr val="8B95A5"/>
+            </a:solidFill>
+            <a:prstDash val="solid"/>
+          </a:ln>
+        </p:spPr>
+      </p:sp>
+      <p:sp>
+        <p:nvSpPr>
+          <p:cNvPr id="7" name="Text 5"/>
+          <p:cNvSpPr/>
+          <p:nvPr/>
+        </p:nvSpPr>
+        <p:spPr>
+          <a:xfrm>
+            <a:off x="2651760" y="2011680"/>
+            <a:ext cx="1645920" cy="822960"/>
+          </a:xfrm>
+          <a:prstGeom prst="rect">
+            <a:avLst/>
+          </a:prstGeom>
+          <a:noFill/>
+          <a:ln/>
+        </p:spPr>
+        <p:txBody>
+          <a:bodyPr wrap="square" lIns="0" tIns="0" rIns="0" bIns="0" rtlCol="0" anchor="ctr"/>
+          <a:lstStyle/>
+          <a:p>
+            <a:pPr algn="ctr" indent="0" marL="0">
+              <a:buNone/>
+            </a:pPr>
+            <a:r>
+              <a:rPr lang="en-US" sz="1800" b="1" dirty="0">
+                <a:solidFill>
+                  <a:srgbClr val="EDEDED"/>
+                </a:solidFill>
+                <a:latin typeface="Verdana" pitchFamily="34" charset="0"/>
+                <a:ea typeface="Verdana" pitchFamily="34" charset="-122"/>
+                <a:cs typeface="Verdana" pitchFamily="34" charset="-120"/>
+              </a:rPr>
+              <a:t>Draft</a:t>
+            </a:r>
+            <a:endParaRPr lang="en-US" sz="1800" dirty="0"/>
+          </a:p>
+        </p:txBody>
+      </p:sp>
+      <p:sp>
+        <p:nvSpPr>
+          <p:cNvPr id="8" name="Text 6"/>
+          <p:cNvSpPr/>
+          <p:nvPr/>
+        </p:nvSpPr>
+        <p:spPr>
+          <a:xfrm>
+            <a:off x="4297680" y="2011680"/>
+            <a:ext cx="548640" cy="822960"/>
+          </a:xfrm>
+          <a:prstGeom prst="rect">
+            <a:avLst/>
+          </a:prstGeom>
+          <a:noFill/>
+          <a:ln/>
+        </p:spPr>
+        <p:txBody>
+          <a:bodyPr wrap="square" lIns="0" tIns="0" rIns="0" bIns="0" rtlCol="0" anchor="ctr">
+            <a:normAutofit/>
+          </a:bodyPr>
+          <a:lstStyle/>
+          <a:p>
+            <a:pPr algn="ctr" indent="0" marL="0">
+              <a:buNone/>
+            </a:pPr>
+            <a:r>
+              <a:rPr lang="en-US" sz="2800" b="1" dirty="0">
+                <a:solidFill>
+                  <a:srgbClr val="635BFF"/>
+                </a:solidFill>
+                <a:latin typeface="Verdana" pitchFamily="34" charset="0"/>
+                <a:ea typeface="Verdana" pitchFamily="34" charset="-122"/>
+                <a:cs typeface="Verdana" pitchFamily="34" charset="-120"/>
+              </a:rPr>
+              <a:t>→</a:t>
+            </a:r>
+            <a:endParaRPr lang="en-US" sz="2800" dirty="0"/>
+          </a:p>
+        </p:txBody>
+      </p:sp>
+      <p:sp>
+        <p:nvSpPr>
+          <p:cNvPr id="9" name="Shape 7"/>
+          <p:cNvSpPr/>
+          <p:nvPr/>
+        </p:nvSpPr>
+        <p:spPr>
+          <a:xfrm>
+            <a:off x="4846320" y="2011680"/>
+            <a:ext cx="1645920" cy="822960"/>
+          </a:xfrm>
+          <a:prstGeom prst="roundRect">
+            <a:avLst>
+              <a:gd name="adj" fmla="val 11111"/>
+            </a:avLst>
+          </a:prstGeom>
+          <a:solidFill>
+            <a:srgbClr val="0A2540"/>
+          </a:solidFill>
+          <a:ln w="19050">
+            <a:solidFill>
+              <a:srgbClr val="8B95A5"/>
+            </a:solidFill>
+            <a:prstDash val="solid"/>
+          </a:ln>
+        </p:spPr>
+      </p:sp>
+      <p:sp>
+        <p:nvSpPr>
+          <p:cNvPr id="10" name="Text 8"/>
+          <p:cNvSpPr/>
+          <p:nvPr/>
+        </p:nvSpPr>
+        <p:spPr>
+          <a:xfrm>
+            <a:off x="4846320" y="2011680"/>
+            <a:ext cx="1645920" cy="822960"/>
+          </a:xfrm>
+          <a:prstGeom prst="rect">
+            <a:avLst/>
+          </a:prstGeom>
+          <a:noFill/>
+          <a:ln/>
+        </p:spPr>
+        <p:txBody>
+          <a:bodyPr wrap="square" lIns="0" tIns="0" rIns="0" bIns="0" rtlCol="0" anchor="ctr"/>
+          <a:lstStyle/>
+          <a:p>
+            <a:pPr algn="ctr" indent="0" marL="0">
+              <a:buNone/>
+            </a:pPr>
+            <a:r>
+              <a:rPr lang="en-US" sz="1800" b="1" dirty="0">
+                <a:solidFill>
+                  <a:srgbClr val="EDEDED"/>
+                </a:solidFill>
+                <a:latin typeface="Verdana" pitchFamily="34" charset="0"/>
+                <a:ea typeface="Verdana" pitchFamily="34" charset="-122"/>
+                <a:cs typeface="Verdana" pitchFamily="34" charset="-120"/>
+              </a:rPr>
+              <a:t>Review</a:t>
+            </a:r>
+            <a:endParaRPr lang="en-US" sz="1800" dirty="0"/>
+          </a:p>
+        </p:txBody>
+      </p:sp>
+      <p:sp>
+        <p:nvSpPr>
+          <p:cNvPr id="11" name="Text 9"/>
+          <p:cNvSpPr/>
+          <p:nvPr/>
+        </p:nvSpPr>
+        <p:spPr>
+          <a:xfrm>
+            <a:off x="6492240" y="2011680"/>
+            <a:ext cx="548640" cy="822960"/>
+          </a:xfrm>
+          <a:prstGeom prst="rect">
+            <a:avLst/>
+          </a:prstGeom>
+          <a:noFill/>
+          <a:ln/>
+        </p:spPr>
+        <p:txBody>
+          <a:bodyPr wrap="square" lIns="0" tIns="0" rIns="0" bIns="0" rtlCol="0" anchor="ctr">
+            <a:normAutofit/>
+          </a:bodyPr>
+          <a:lstStyle/>
+          <a:p>
+            <a:pPr algn="ctr" indent="0" marL="0">
+              <a:buNone/>
+            </a:pPr>
+            <a:r>
+              <a:rPr lang="en-US" sz="2800" b="1" dirty="0">
+                <a:solidFill>
+                  <a:srgbClr val="635BFF"/>
+                </a:solidFill>
+                <a:latin typeface="Verdana" pitchFamily="34" charset="0"/>
+                <a:ea typeface="Verdana" pitchFamily="34" charset="-122"/>
+                <a:cs typeface="Verdana" pitchFamily="34" charset="-120"/>
+              </a:rPr>
+              <a:t>→</a:t>
+            </a:r>
+            <a:endParaRPr lang="en-US" sz="2800" dirty="0"/>
+          </a:p>
+        </p:txBody>
+      </p:sp>
+      <p:sp>
+        <p:nvSpPr>
+          <p:cNvPr id="12" name="Shape 10"/>
+          <p:cNvSpPr/>
+          <p:nvPr/>
+        </p:nvSpPr>
+        <p:spPr>
+          <a:xfrm>
+            <a:off x="7040880" y="2011680"/>
+            <a:ext cx="1645920" cy="822960"/>
+          </a:xfrm>
+          <a:prstGeom prst="roundRect">
+            <a:avLst>
+              <a:gd name="adj" fmla="val 11111"/>
+            </a:avLst>
+          </a:prstGeom>
+          <a:solidFill>
+            <a:srgbClr val="635BFF"/>
+          </a:solidFill>
+          <a:ln/>
+        </p:spPr>
+      </p:sp>
+      <p:sp>
+        <p:nvSpPr>
+          <p:cNvPr id="13" name="Text 11"/>
+          <p:cNvSpPr/>
+          <p:nvPr/>
+        </p:nvSpPr>
+        <p:spPr>
+          <a:xfrm>
+            <a:off x="7040880" y="2011680"/>
+            <a:ext cx="1645920" cy="822960"/>
+          </a:xfrm>
+          <a:prstGeom prst="rect">
+            <a:avLst/>
+          </a:prstGeom>
+          <a:noFill/>
+          <a:ln/>
+        </p:spPr>
+        <p:txBody>
+          <a:bodyPr wrap="square" lIns="0" tIns="0" rIns="0" bIns="0" rtlCol="0" anchor="ctr"/>
+          <a:lstStyle/>
+          <a:p>
+            <a:pPr algn="ctr" indent="0" marL="0">
+              <a:buNone/>
+            </a:pPr>
+            <a:r>
+              <a:rPr lang="en-US" sz="1800" b="1" dirty="0">
+                <a:solidFill>
+                  <a:srgbClr val="FFFFFF"/>
+                </a:solidFill>
+                <a:latin typeface="Verdana" pitchFamily="34" charset="0"/>
+                <a:ea typeface="Verdana" pitchFamily="34" charset="-122"/>
+                <a:cs typeface="Verdana" pitchFamily="34" charset="-120"/>
+              </a:rPr>
+              <a:t>You</a:t>
+            </a:r>
+            <a:endParaRPr lang="en-US" sz="1800" dirty="0"/>
+          </a:p>
+        </p:txBody>
+      </p:sp>
+      <p:sp>
+        <p:nvSpPr>
+          <p:cNvPr id="14" name="Text 12"/>
+          <p:cNvSpPr/>
+          <p:nvPr/>
+        </p:nvSpPr>
+        <p:spPr>
+          <a:xfrm>
+            <a:off x="914400" y="3291840"/>
+            <a:ext cx="7315200" cy="548640"/>
+          </a:xfrm>
+          <a:prstGeom prst="rect">
+            <a:avLst/>
+          </a:prstGeom>
+          <a:noFill/>
+          <a:ln/>
+        </p:spPr>
+        <p:txBody>
+          <a:bodyPr wrap="square" lIns="0" tIns="0" rIns="0" bIns="0" rtlCol="0" anchor="ctr"/>
+          <a:lstStyle/>
+          <a:p>
+            <a:pPr algn="ctr" indent="0" marL="0">
+              <a:buNone/>
+            </a:pPr>
+            <a:r>
+              <a:rPr lang="en-US" sz="2400" i="1" dirty="0">
+                <a:solidFill>
+                  <a:srgbClr val="8B95A5"/>
+                </a:solidFill>
+                <a:latin typeface="Verdana" pitchFamily="34" charset="0"/>
+                <a:ea typeface="Verdana" pitchFamily="34" charset="-122"/>
+                <a:cs typeface="Verdana" pitchFamily="34" charset="-120"/>
+              </a:rPr>
+              <a:t>Each Skill does one thing. The chain does everything.</a:t>
+            </a:r>
+            <a:endParaRPr lang="en-US" sz="2400" dirty="0"/>
           </a:p>
         </p:txBody>
       </p:sp>
@@ -4984,34 +5423,34 @@
         </p:nvSpPr>
         <p:spPr>
           <a:xfrm>
-            <a:off x="457200" y="1097280"/>
-            <a:ext cx="3840480" cy="731520"/>
-          </a:xfrm>
-          <a:prstGeom prst="rect">
-            <a:avLst/>
-          </a:prstGeom>
-          <a:noFill/>
-          <a:ln/>
-        </p:spPr>
-        <p:txBody>
-          <a:bodyPr wrap="square" lIns="0" tIns="0" rIns="0" bIns="0" rtlCol="0" anchor="b"/>
-          <a:lstStyle/>
-          <a:p>
-            <a:pPr algn="ctr" indent="0" marL="0">
-              <a:buNone/>
-            </a:pPr>
-            <a:r>
-              <a:rPr lang="en-US" sz="2800" b="1" dirty="0">
-                <a:solidFill>
-                  <a:srgbClr val="8B95A5"/>
+            <a:off x="457200" y="1463040"/>
+            <a:ext cx="8229600" cy="1097280"/>
+          </a:xfrm>
+          <a:prstGeom prst="rect">
+            <a:avLst/>
+          </a:prstGeom>
+          <a:noFill/>
+          <a:ln/>
+        </p:spPr>
+        <p:txBody>
+          <a:bodyPr wrap="square" lIns="0" tIns="0" rIns="0" bIns="0" rtlCol="0" anchor="ctr"/>
+          <a:lstStyle/>
+          <a:p>
+            <a:pPr algn="ctr" indent="0" marL="0">
+              <a:buNone/>
+            </a:pPr>
+            <a:r>
+              <a:rPr lang="en-US" sz="5400" b="1" dirty="0">
+                <a:solidFill>
+                  <a:srgbClr val="FFFFFF"/>
                 </a:solidFill>
                 <a:latin typeface="Georgia" pitchFamily="34" charset="0"/>
                 <a:ea typeface="Georgia" pitchFamily="34" charset="-122"/>
                 <a:cs typeface="Georgia" pitchFamily="34" charset="-120"/>
               </a:rPr>
-              <a:t>Workshop 1</a:t>
-            </a:r>
-            <a:endParaRPr lang="en-US" sz="2800" dirty="0"/>
+              <a:t>Demo</a:t>
+            </a:r>
+            <a:endParaRPr lang="en-US" sz="5400" dirty="0"/>
           </a:p>
         </p:txBody>
       </p:sp>
@@ -5023,174 +5462,34 @@
         </p:nvSpPr>
         <p:spPr>
           <a:xfrm>
-            <a:off x="457200" y="2011680"/>
-            <a:ext cx="3840480" cy="548640"/>
-          </a:xfrm>
-          <a:prstGeom prst="rect">
-            <a:avLst/>
-          </a:prstGeom>
-          <a:noFill/>
-          <a:ln/>
-        </p:spPr>
-        <p:txBody>
-          <a:bodyPr wrap="square" lIns="0" tIns="0" rIns="0" bIns="0" rtlCol="0" anchor="t"/>
-          <a:lstStyle/>
-          <a:p>
-            <a:pPr algn="ctr" indent="0" marL="0">
-              <a:buNone/>
-            </a:pPr>
-            <a:r>
-              <a:rPr lang="en-US" sz="2000" i="1" dirty="0">
-                <a:solidFill>
-                  <a:srgbClr val="8B95A5"/>
+            <a:off x="914400" y="2651760"/>
+            <a:ext cx="7315200" cy="548640"/>
+          </a:xfrm>
+          <a:prstGeom prst="rect">
+            <a:avLst/>
+          </a:prstGeom>
+          <a:noFill/>
+          <a:ln/>
+        </p:spPr>
+        <p:txBody>
+          <a:bodyPr wrap="square" lIns="0" tIns="0" rIns="0" bIns="0" rtlCol="0" anchor="ctr"/>
+          <a:lstStyle/>
+          <a:p>
+            <a:pPr algn="ctr" indent="0" marL="0">
+              <a:buNone/>
+            </a:pPr>
+            <a:r>
+              <a:rPr lang="en-US" sz="2800" i="1" dirty="0">
+                <a:solidFill>
+                  <a:srgbClr val="635BFF"/>
                 </a:solidFill>
                 <a:latin typeface="Verdana" pitchFamily="34" charset="0"/>
                 <a:ea typeface="Verdana" pitchFamily="34" charset="-122"/>
                 <a:cs typeface="Verdana" pitchFamily="34" charset="-120"/>
               </a:rPr>
-              <a:t>Your custom instructions</a:t>
-            </a:r>
-            <a:endParaRPr lang="en-US" sz="2000" dirty="0"/>
-          </a:p>
-        </p:txBody>
-      </p:sp>
-      <p:sp>
-        <p:nvSpPr>
-          <p:cNvPr id="5" name="Shape 3"/>
-          <p:cNvSpPr/>
-          <p:nvPr/>
-        </p:nvSpPr>
-        <p:spPr>
-          <a:xfrm>
-            <a:off x="4572000" y="914400"/>
-            <a:ext cx="0" cy="2377440"/>
-          </a:xfrm>
-          <a:prstGeom prst="line">
-            <a:avLst/>
-          </a:prstGeom>
-          <a:noFill/>
-          <a:ln w="25400">
-            <a:solidFill>
-              <a:srgbClr val="635BFF"/>
-            </a:solidFill>
-            <a:prstDash val="solid"/>
-          </a:ln>
-        </p:spPr>
-      </p:sp>
-      <p:sp>
-        <p:nvSpPr>
-          <p:cNvPr id="6" name="Text 4"/>
-          <p:cNvSpPr/>
-          <p:nvPr/>
-        </p:nvSpPr>
-        <p:spPr>
-          <a:xfrm>
-            <a:off x="4846320" y="1097280"/>
-            <a:ext cx="3840480" cy="731520"/>
-          </a:xfrm>
-          <a:prstGeom prst="rect">
-            <a:avLst/>
-          </a:prstGeom>
-          <a:noFill/>
-          <a:ln/>
-        </p:spPr>
-        <p:txBody>
-          <a:bodyPr wrap="square" lIns="0" tIns="0" rIns="0" bIns="0" rtlCol="0" anchor="b"/>
-          <a:lstStyle/>
-          <a:p>
-            <a:pPr algn="ctr" indent="0" marL="0">
-              <a:buNone/>
-            </a:pPr>
-            <a:r>
-              <a:rPr lang="en-US" sz="2800" b="1" dirty="0">
-                <a:solidFill>
-                  <a:srgbClr val="FFFFFF"/>
-                </a:solidFill>
-                <a:latin typeface="Georgia" pitchFamily="34" charset="0"/>
-                <a:ea typeface="Georgia" pitchFamily="34" charset="-122"/>
-                <a:cs typeface="Georgia" pitchFamily="34" charset="-120"/>
-              </a:rPr>
-              <a:t>Workshop 2</a:t>
+              <a:t>Watch a 3-phase chain run live</a:t>
             </a:r>
             <a:endParaRPr lang="en-US" sz="2800" dirty="0"/>
-          </a:p>
-        </p:txBody>
-      </p:sp>
-      <p:sp>
-        <p:nvSpPr>
-          <p:cNvPr id="7" name="Text 5"/>
-          <p:cNvSpPr/>
-          <p:nvPr/>
-        </p:nvSpPr>
-        <p:spPr>
-          <a:xfrm>
-            <a:off x="4846320" y="2011680"/>
-            <a:ext cx="3840480" cy="548640"/>
-          </a:xfrm>
-          <a:prstGeom prst="rect">
-            <a:avLst/>
-          </a:prstGeom>
-          <a:noFill/>
-          <a:ln/>
-        </p:spPr>
-        <p:txBody>
-          <a:bodyPr wrap="square" lIns="0" tIns="0" rIns="0" bIns="0" rtlCol="0" anchor="t"/>
-          <a:lstStyle/>
-          <a:p>
-            <a:pPr algn="ctr" indent="0" marL="0">
-              <a:buNone/>
-            </a:pPr>
-            <a:r>
-              <a:rPr lang="en-US" sz="2000" i="1" dirty="0">
-                <a:solidFill>
-                  <a:srgbClr val="635BFF"/>
-                </a:solidFill>
-                <a:latin typeface="Verdana" pitchFamily="34" charset="0"/>
-                <a:ea typeface="Verdana" pitchFamily="34" charset="-122"/>
-                <a:cs typeface="Verdana" pitchFamily="34" charset="-120"/>
-              </a:rPr>
-              <a:t>Each agent's system prompt</a:t>
-            </a:r>
-            <a:endParaRPr lang="en-US" sz="2000" dirty="0"/>
-          </a:p>
-        </p:txBody>
-      </p:sp>
-      <p:sp>
-        <p:nvSpPr>
-          <p:cNvPr id="8" name="Text 6"/>
-          <p:cNvSpPr/>
-          <p:nvPr/>
-        </p:nvSpPr>
-        <p:spPr>
-          <a:xfrm>
-            <a:off x="914400" y="3474720"/>
-            <a:ext cx="7315200" cy="548640"/>
-          </a:xfrm>
-          <a:prstGeom prst="rect">
-            <a:avLst/>
-          </a:prstGeom>
-          <a:noFill/>
-          <a:ln/>
-        </p:spPr>
-        <p:txBody>
-          <a:bodyPr wrap="square" lIns="0" tIns="0" rIns="0" bIns="0" rtlCol="0" anchor="ctr"/>
-          <a:lstStyle/>
-          <a:p>
-            <a:pPr algn="ctr" indent="0" marL="0">
-              <a:buNone/>
-            </a:pPr>
-            <a:r>
-              <a:rPr lang="en-US" sz="2000" i="1" dirty="0">
-                <a:solidFill>
-                  <a:srgbClr val="8B95A5"/>
-                </a:solidFill>
-                <a:latin typeface="Verdana" pitchFamily="34" charset="0"/>
-                <a:ea typeface="Verdana" pitchFamily="34" charset="-122"/>
-                <a:cs typeface="Verdana" pitchFamily="34" charset="-120"/>
-              </a:rPr>
-              <a:t>Same concept. Now each agent gets its own focused skill.</a:t>
-            </a:r>
-            <a:endParaRPr lang="en-US" sz="2000" dirty="0"/>
           </a:p>
         </p:txBody>
       </p:sp>
@@ -5295,7 +5594,9 @@
           <a:ln/>
         </p:spPr>
         <p:txBody>
-          <a:bodyPr wrap="square" lIns="0" tIns="0" rIns="0" bIns="0" rtlCol="0" anchor="ctr"/>
+          <a:bodyPr wrap="square" lIns="0" tIns="0" rIns="0" bIns="0" rtlCol="0" anchor="ctr">
+            <a:normAutofit/>
+          </a:bodyPr>
           <a:lstStyle/>
           <a:p>
             <a:pPr algn="ctr" indent="0" marL="0">
@@ -5402,7 +5703,9 @@
           <a:ln/>
         </p:spPr>
         <p:txBody>
-          <a:bodyPr wrap="square" lIns="0" tIns="0" rIns="0" bIns="0" rtlCol="0" anchor="ctr"/>
+          <a:bodyPr wrap="square" lIns="0" tIns="0" rIns="0" bIns="0" rtlCol="0" anchor="ctr">
+            <a:normAutofit/>
+          </a:bodyPr>
           <a:lstStyle/>
           <a:p>
             <a:pPr algn="ctr" indent="0" marL="0">
@@ -5509,7 +5812,9 @@
           <a:ln/>
         </p:spPr>
         <p:txBody>
-          <a:bodyPr wrap="square" lIns="0" tIns="0" rIns="0" bIns="0" rtlCol="0" anchor="ctr"/>
+          <a:bodyPr wrap="square" lIns="0" tIns="0" rIns="0" bIns="0" rtlCol="0" anchor="ctr">
+            <a:normAutofit/>
+          </a:bodyPr>
           <a:lstStyle/>
           <a:p>
             <a:pPr algn="ctr" indent="0" marL="0">
@@ -5614,7 +5919,9 @@
           <a:ln/>
         </p:spPr>
         <p:txBody>
-          <a:bodyPr wrap="square" lIns="0" tIns="0" rIns="0" bIns="0" rtlCol="0" anchor="ctr"/>
+          <a:bodyPr wrap="square" lIns="0" tIns="0" rIns="0" bIns="0" rtlCol="0" anchor="ctr">
+            <a:normAutofit/>
+          </a:bodyPr>
           <a:lstStyle/>
           <a:p>
             <a:pPr algn="ctr" indent="0" marL="0">
@@ -5719,7 +6026,9 @@
           <a:ln/>
         </p:spPr>
         <p:txBody>
-          <a:bodyPr wrap="square" lIns="0" tIns="0" rIns="0" bIns="0" rtlCol="0" anchor="ctr"/>
+          <a:bodyPr wrap="square" lIns="0" tIns="0" rIns="0" bIns="0" rtlCol="0" anchor="ctr">
+            <a:normAutofit/>
+          </a:bodyPr>
           <a:lstStyle/>
           <a:p>
             <a:pPr algn="ctr" indent="0" marL="0">
@@ -5824,7 +6133,9 @@
           <a:ln/>
         </p:spPr>
         <p:txBody>
-          <a:bodyPr wrap="square" lIns="0" tIns="0" rIns="0" bIns="0" rtlCol="0" anchor="ctr"/>
+          <a:bodyPr wrap="square" lIns="0" tIns="0" rIns="0" bIns="0" rtlCol="0" anchor="ctr">
+            <a:normAutofit/>
+          </a:bodyPr>
           <a:lstStyle/>
           <a:p>
             <a:pPr algn="ctr" indent="0" marL="0">
@@ -5931,7 +6242,9 @@
           <a:ln/>
         </p:spPr>
         <p:txBody>
-          <a:bodyPr wrap="square" lIns="0" tIns="0" rIns="0" bIns="0" rtlCol="0" anchor="ctr"/>
+          <a:bodyPr wrap="square" lIns="0" tIns="0" rIns="0" bIns="0" rtlCol="0" anchor="ctr">
+            <a:normAutofit/>
+          </a:bodyPr>
           <a:lstStyle/>
           <a:p>
             <a:pPr algn="ctr" indent="0" marL="0">
@@ -6078,7 +6391,58 @@
                 <a:ea typeface="Georgia" pitchFamily="34" charset="-122"/>
                 <a:cs typeface="Georgia" pitchFamily="34" charset="-120"/>
               </a:rPr>
-              <a:t>Open the Research Agent</a:t>
+              <a:t>Phase 1: New conversation</a:t>
+            </a:r>
+            <a:endParaRPr lang="en-US" sz="2800" dirty="0"/>
+          </a:p>
+          <a:p>
+            <a:pPr algn="ctr" indent="0" marL="0">
+              <a:buNone/>
+            </a:pPr>
+            <a:r>
+              <a:rPr lang="en-US" sz="2800" b="1" dirty="0">
+                <a:solidFill>
+                  <a:srgbClr val="635BFF"/>
+                </a:solidFill>
+                <a:latin typeface="Georgia" pitchFamily="34" charset="0"/>
+                <a:ea typeface="Georgia" pitchFamily="34" charset="-122"/>
+                <a:cs typeface="Georgia" pitchFamily="34" charset="-120"/>
+              </a:rPr>
+              <a:t>→ give it your task → save output</a:t>
+            </a:r>
+            <a:endParaRPr lang="en-US" sz="2800" dirty="0"/>
+          </a:p>
+          <a:p>
+            <a:pPr algn="ctr" indent="0" marL="0">
+              <a:buNone/>
+            </a:pPr>
+            <a:r>
+              <a:rPr lang="en-US" sz="2800" b="1" dirty="0">
+                <a:solidFill>
+                  <a:srgbClr val="635BFF"/>
+                </a:solidFill>
+                <a:latin typeface="Georgia" pitchFamily="34" charset="0"/>
+                <a:ea typeface="Georgia" pitchFamily="34" charset="-122"/>
+                <a:cs typeface="Georgia" pitchFamily="34" charset="-120"/>
+              </a:rPr>
+              <a:t>Phase 2: New conversation</a:t>
+            </a:r>
+            <a:endParaRPr lang="en-US" sz="2800" dirty="0"/>
+          </a:p>
+          <a:p>
+            <a:pPr algn="ctr" indent="0" marL="0">
+              <a:buNone/>
+            </a:pPr>
+            <a:r>
+              <a:rPr lang="en-US" sz="2800" b="1" dirty="0">
+                <a:solidFill>
+                  <a:srgbClr val="635BFF"/>
+                </a:solidFill>
+                <a:latin typeface="Georgia" pitchFamily="34" charset="0"/>
+                <a:ea typeface="Georgia" pitchFamily="34" charset="-122"/>
+                <a:cs typeface="Georgia" pitchFamily="34" charset="-120"/>
+              </a:rPr>
+              <a:t>→ paste Phase 1's output → draft</a:t>
             </a:r>
             <a:endParaRPr lang="en-US" sz="2800" dirty="0"/>
           </a:p>
@@ -6095,7 +6459,7 @@
                 <a:ea typeface="Verdana" pitchFamily="34" charset="-122"/>
                 <a:cs typeface="Verdana" pitchFamily="34" charset="-120"/>
               </a:rPr>
-              <a:t>Click the name → view system prompt</a:t>
+              <a:t>How does this compare to one</a:t>
             </a:r>
             <a:endParaRPr lang="en-US" sz="2800" dirty="0"/>
           </a:p>
@@ -6104,15 +6468,15 @@
               <a:buNone/>
             </a:pPr>
             <a:r>
-              <a:rPr lang="en-US" sz="3600" b="1" dirty="0">
-                <a:solidFill>
-                  <a:srgbClr val="635BFF"/>
-                </a:solidFill>
-                <a:latin typeface="Georgia" pitchFamily="34" charset="0"/>
-                <a:ea typeface="Georgia" pitchFamily="34" charset="-122"/>
-                <a:cs typeface="Georgia" pitchFamily="34" charset="-120"/>
-              </a:rPr>
-              <a:t>What would you add or change?</a:t>
+              <a:rPr lang="en-US" sz="2200" i="1" dirty="0">
+                <a:solidFill>
+                  <a:srgbClr val="8B95A5"/>
+                </a:solidFill>
+                <a:latin typeface="Verdana" pitchFamily="34" charset="0"/>
+                <a:ea typeface="Verdana" pitchFamily="34" charset="-122"/>
+                <a:cs typeface="Verdana" pitchFamily="34" charset="-120"/>
+              </a:rPr>
+              <a:t>conversation doing everything?</a:t>
             </a:r>
             <a:endParaRPr lang="en-US" sz="2800" dirty="0"/>
           </a:p>
@@ -6180,41 +6544,125 @@
         </p:nvSpPr>
         <p:spPr>
           <a:xfrm>
-            <a:off x="914400" y="1097280"/>
-            <a:ext cx="7315200" cy="2560320"/>
-          </a:xfrm>
-          <a:prstGeom prst="rect">
-            <a:avLst/>
-          </a:prstGeom>
-          <a:noFill/>
-          <a:ln/>
-        </p:spPr>
-        <p:txBody>
-          <a:bodyPr wrap="square" lIns="0" tIns="0" rIns="0" bIns="0" rtlCol="0" anchor="ctr"/>
-          <a:lstStyle/>
-          <a:p>
-            <a:pPr algn="ctr" indent="0" marL="0">
-              <a:buNone/>
-            </a:pPr>
-            <a:r>
-              <a:rPr lang="en-US" sz="4400" b="1" dirty="0">
-                <a:solidFill>
-                  <a:srgbClr val="FFFFFF"/>
+            <a:off x="457200" y="1097280"/>
+            <a:ext cx="3840480" cy="731520"/>
+          </a:xfrm>
+          <a:prstGeom prst="rect">
+            <a:avLst/>
+          </a:prstGeom>
+          <a:noFill/>
+          <a:ln/>
+        </p:spPr>
+        <p:txBody>
+          <a:bodyPr wrap="square" lIns="0" tIns="0" rIns="0" bIns="0" rtlCol="0" anchor="b"/>
+          <a:lstStyle/>
+          <a:p>
+            <a:pPr algn="ctr" indent="0" marL="0">
+              <a:buNone/>
+            </a:pPr>
+            <a:r>
+              <a:rPr lang="en-US" sz="2800" b="1" dirty="0">
+                <a:solidFill>
+                  <a:srgbClr val="8B95A5"/>
                 </a:solidFill>
                 <a:latin typeface="Georgia" pitchFamily="34" charset="0"/>
                 <a:ea typeface="Georgia" pitchFamily="34" charset="-122"/>
                 <a:cs typeface="Georgia" pitchFamily="34" charset="-120"/>
               </a:rPr>
-              <a:t>The agent won't remember.</a:t>
-            </a:r>
-            <a:endParaRPr lang="en-US" sz="4400" dirty="0"/>
-          </a:p>
-          <a:p>
-            <a:pPr algn="ctr" indent="0" marL="0">
-              <a:buNone/>
-            </a:pPr>
-            <a:r>
-              <a:rPr lang="en-US" sz="4400" b="1" dirty="0">
+              <a:t>Workshop 1</a:t>
+            </a:r>
+            <a:endParaRPr lang="en-US" sz="2800" dirty="0"/>
+          </a:p>
+        </p:txBody>
+      </p:sp>
+      <p:sp>
+        <p:nvSpPr>
+          <p:cNvPr id="4" name="Text 2"/>
+          <p:cNvSpPr/>
+          <p:nvPr/>
+        </p:nvSpPr>
+        <p:spPr>
+          <a:xfrm>
+            <a:off x="457200" y="2011680"/>
+            <a:ext cx="3840480" cy="548640"/>
+          </a:xfrm>
+          <a:prstGeom prst="rect">
+            <a:avLst/>
+          </a:prstGeom>
+          <a:noFill/>
+          <a:ln/>
+        </p:spPr>
+        <p:txBody>
+          <a:bodyPr wrap="square" lIns="0" tIns="0" rIns="0" bIns="0" rtlCol="0" anchor="t"/>
+          <a:lstStyle/>
+          <a:p>
+            <a:pPr algn="ctr" indent="0" marL="0">
+              <a:buNone/>
+            </a:pPr>
+            <a:r>
+              <a:rPr lang="en-US" sz="2000" i="1" dirty="0">
+                <a:solidFill>
+                  <a:srgbClr val="8B95A5"/>
+                </a:solidFill>
+                <a:latin typeface="Verdana" pitchFamily="34" charset="0"/>
+                <a:ea typeface="Verdana" pitchFamily="34" charset="-122"/>
+                <a:cs typeface="Verdana" pitchFamily="34" charset="-120"/>
+              </a:rPr>
+              <a:t>Your rules + Skills</a:t>
+            </a:r>
+            <a:endParaRPr lang="en-US" sz="2000" dirty="0"/>
+          </a:p>
+        </p:txBody>
+      </p:sp>
+      <p:sp>
+        <p:nvSpPr>
+          <p:cNvPr id="5" name="Shape 3"/>
+          <p:cNvSpPr/>
+          <p:nvPr/>
+        </p:nvSpPr>
+        <p:spPr>
+          <a:xfrm>
+            <a:off x="4572000" y="914400"/>
+            <a:ext cx="0" cy="2377440"/>
+          </a:xfrm>
+          <a:prstGeom prst="line">
+            <a:avLst/>
+          </a:prstGeom>
+          <a:noFill/>
+          <a:ln w="25400">
+            <a:solidFill>
+              <a:srgbClr val="635BFF"/>
+            </a:solidFill>
+            <a:prstDash val="solid"/>
+          </a:ln>
+        </p:spPr>
+      </p:sp>
+      <p:sp>
+        <p:nvSpPr>
+          <p:cNvPr id="6" name="Text 4"/>
+          <p:cNvSpPr/>
+          <p:nvPr/>
+        </p:nvSpPr>
+        <p:spPr>
+          <a:xfrm>
+            <a:off x="4846320" y="1097280"/>
+            <a:ext cx="3840480" cy="731520"/>
+          </a:xfrm>
+          <a:prstGeom prst="rect">
+            <a:avLst/>
+          </a:prstGeom>
+          <a:noFill/>
+          <a:ln/>
+        </p:spPr>
+        <p:txBody>
+          <a:bodyPr wrap="square" lIns="0" tIns="0" rIns="0" bIns="0" rtlCol="0" anchor="b"/>
+          <a:lstStyle/>
+          <a:p>
+            <a:pPr algn="ctr" indent="0" marL="0">
+              <a:buNone/>
+            </a:pPr>
+            <a:r>
+              <a:rPr lang="en-US" sz="2800" b="1" dirty="0">
                 <a:solidFill>
                   <a:srgbClr val="FFFFFF"/>
                 </a:solidFill>
@@ -6222,9 +6670,87 @@
                 <a:ea typeface="Georgia" pitchFamily="34" charset="-122"/>
                 <a:cs typeface="Georgia" pitchFamily="34" charset="-120"/>
               </a:rPr>
-              <a:t>But the skill will.</a:t>
-            </a:r>
-            <a:endParaRPr lang="en-US" sz="4400" dirty="0"/>
+              <a:t>Workshop 2</a:t>
+            </a:r>
+            <a:endParaRPr lang="en-US" sz="2800" dirty="0"/>
+          </a:p>
+        </p:txBody>
+      </p:sp>
+      <p:sp>
+        <p:nvSpPr>
+          <p:cNvPr id="7" name="Text 5"/>
+          <p:cNvSpPr/>
+          <p:nvPr/>
+        </p:nvSpPr>
+        <p:spPr>
+          <a:xfrm>
+            <a:off x="4846320" y="2011680"/>
+            <a:ext cx="3840480" cy="548640"/>
+          </a:xfrm>
+          <a:prstGeom prst="rect">
+            <a:avLst/>
+          </a:prstGeom>
+          <a:noFill/>
+          <a:ln/>
+        </p:spPr>
+        <p:txBody>
+          <a:bodyPr wrap="square" lIns="0" tIns="0" rIns="0" bIns="0" rtlCol="0" anchor="t"/>
+          <a:lstStyle/>
+          <a:p>
+            <a:pPr algn="ctr" indent="0" marL="0">
+              <a:buNone/>
+            </a:pPr>
+            <a:r>
+              <a:rPr lang="en-US" sz="2000" i="1" dirty="0">
+                <a:solidFill>
+                  <a:srgbClr val="635BFF"/>
+                </a:solidFill>
+                <a:latin typeface="Verdana" pitchFamily="34" charset="0"/>
+                <a:ea typeface="Verdana" pitchFamily="34" charset="-122"/>
+                <a:cs typeface="Verdana" pitchFamily="34" charset="-120"/>
+              </a:rPr>
+              <a:t>Each step gets its own Skill</a:t>
+            </a:r>
+            <a:endParaRPr lang="en-US" sz="2000" dirty="0"/>
+          </a:p>
+        </p:txBody>
+      </p:sp>
+      <p:sp>
+        <p:nvSpPr>
+          <p:cNvPr id="8" name="Text 6"/>
+          <p:cNvSpPr/>
+          <p:nvPr/>
+        </p:nvSpPr>
+        <p:spPr>
+          <a:xfrm>
+            <a:off x="914400" y="3474720"/>
+            <a:ext cx="7315200" cy="548640"/>
+          </a:xfrm>
+          <a:prstGeom prst="rect">
+            <a:avLst/>
+          </a:prstGeom>
+          <a:noFill/>
+          <a:ln/>
+        </p:spPr>
+        <p:txBody>
+          <a:bodyPr wrap="square" lIns="0" tIns="0" rIns="0" bIns="0" rtlCol="0" anchor="ctr"/>
+          <a:lstStyle/>
+          <a:p>
+            <a:pPr algn="ctr" indent="0" marL="0">
+              <a:buNone/>
+            </a:pPr>
+            <a:r>
+              <a:rPr lang="en-US" sz="2000" i="1" dirty="0">
+                <a:solidFill>
+                  <a:srgbClr val="8B95A5"/>
+                </a:solidFill>
+                <a:latin typeface="Verdana" pitchFamily="34" charset="0"/>
+                <a:ea typeface="Verdana" pitchFamily="34" charset="-122"/>
+                <a:cs typeface="Verdana" pitchFamily="34" charset="-120"/>
+              </a:rPr>
+              <a:t>Same concept. Now each agent in the chain gets its own playbook.</a:t>
+            </a:r>
+            <a:endParaRPr lang="en-US" sz="2000" dirty="0"/>
           </a:p>
         </p:txBody>
       </p:sp>
@@ -6290,63 +6816,41 @@
         </p:nvSpPr>
         <p:spPr>
           <a:xfrm>
-            <a:off x="457200" y="914400"/>
-            <a:ext cx="8229600" cy="2286000"/>
-          </a:xfrm>
-          <a:prstGeom prst="rect">
-            <a:avLst/>
-          </a:prstGeom>
-          <a:noFill/>
-          <a:ln/>
-        </p:spPr>
-        <p:txBody>
-          <a:bodyPr wrap="square" lIns="0" tIns="0" rIns="0" bIns="0" rtlCol="0" anchor="b"/>
-          <a:lstStyle/>
-          <a:p>
-            <a:pPr algn="ctr" indent="0" marL="0">
-              <a:buNone/>
-            </a:pPr>
-            <a:r>
-              <a:rPr lang="en-US" sz="12000" b="1" dirty="0">
-                <a:solidFill>
-                  <a:srgbClr val="FF6B8A"/>
+            <a:off x="914400" y="914400"/>
+            <a:ext cx="7315200" cy="3291840"/>
+          </a:xfrm>
+          <a:prstGeom prst="rect">
+            <a:avLst/>
+          </a:prstGeom>
+          <a:noFill/>
+          <a:ln/>
+        </p:spPr>
+        <p:txBody>
+          <a:bodyPr wrap="square" lIns="0" tIns="0" rIns="0" bIns="0" rtlCol="0" anchor="ctr"/>
+          <a:lstStyle/>
+          <a:p>
+            <a:pPr algn="ctr" indent="0" marL="0">
+              <a:buNone/>
+            </a:pPr>
+            <a:r>
+              <a:rPr lang="en-US" sz="2800" b="1" dirty="0">
+                <a:solidFill>
+                  <a:srgbClr val="635BFF"/>
                 </a:solidFill>
                 <a:latin typeface="Georgia" pitchFamily="34" charset="0"/>
                 <a:ea typeface="Georgia" pitchFamily="34" charset="-122"/>
                 <a:cs typeface="Georgia" pitchFamily="34" charset="-120"/>
               </a:rPr>
-              <a:t>1.5 hrs</a:t>
-            </a:r>
-            <a:endParaRPr lang="en-US" sz="12000" dirty="0"/>
-          </a:p>
-        </p:txBody>
-      </p:sp>
-      <p:sp>
-        <p:nvSpPr>
-          <p:cNvPr id="4" name="Text 2"/>
-          <p:cNvSpPr/>
-          <p:nvPr/>
-        </p:nvSpPr>
-        <p:spPr>
-          <a:xfrm>
-            <a:off x="1371600" y="3291840"/>
-            <a:ext cx="6400800" cy="731520"/>
-          </a:xfrm>
-          <a:prstGeom prst="rect">
-            <a:avLst/>
-          </a:prstGeom>
-          <a:noFill/>
-          <a:ln/>
-        </p:spPr>
-        <p:txBody>
-          <a:bodyPr wrap="square" lIns="0" tIns="0" rIns="0" bIns="0" rtlCol="0" anchor="t"/>
-          <a:lstStyle/>
-          <a:p>
-            <a:pPr algn="ctr" indent="0" marL="0">
-              <a:buNone/>
-            </a:pPr>
-            <a:r>
-              <a:rPr lang="en-US" sz="2800" dirty="0">
+              <a:t>Go to Customize → Skills</a:t>
+            </a:r>
+            <a:endParaRPr lang="en-US" sz="2800" dirty="0"/>
+          </a:p>
+          <a:p>
+            <a:pPr algn="ctr" indent="0" marL="0">
+              <a:buNone/>
+            </a:pPr>
+            <a:r>
+              <a:rPr lang="en-US" sz="2200" i="1" dirty="0">
                 <a:solidFill>
                   <a:srgbClr val="8B95A5"/>
                 </a:solidFill>
@@ -6354,7 +6858,41 @@
                 <a:ea typeface="Verdana" pitchFamily="34" charset="-122"/>
                 <a:cs typeface="Verdana" pitchFamily="34" charset="-120"/>
               </a:rPr>
-              <a:t>of you being the bottleneck</a:t>
+              <a:t>Click the Research Skill</a:t>
+            </a:r>
+            <a:endParaRPr lang="en-US" sz="2800" dirty="0"/>
+          </a:p>
+          <a:p>
+            <a:pPr algn="ctr" indent="0" marL="0">
+              <a:buNone/>
+            </a:pPr>
+            <a:r>
+              <a:rPr lang="en-US" sz="2200" i="1" dirty="0">
+                <a:solidFill>
+                  <a:srgbClr val="8B95A5"/>
+                </a:solidFill>
+                <a:latin typeface="Verdana" pitchFamily="34" charset="0"/>
+                <a:ea typeface="Verdana" pitchFamily="34" charset="-122"/>
+                <a:cs typeface="Verdana" pitchFamily="34" charset="-120"/>
+              </a:rPr>
+              <a:t>→ view its SKILL.md</a:t>
+            </a:r>
+            <a:endParaRPr lang="en-US" sz="2800" dirty="0"/>
+          </a:p>
+          <a:p>
+            <a:pPr algn="ctr" indent="0" marL="0">
+              <a:buNone/>
+            </a:pPr>
+            <a:r>
+              <a:rPr lang="en-US" sz="3600" b="1" dirty="0">
+                <a:solidFill>
+                  <a:srgbClr val="635BFF"/>
+                </a:solidFill>
+                <a:latin typeface="Georgia" pitchFamily="34" charset="0"/>
+                <a:ea typeface="Georgia" pitchFamily="34" charset="-122"/>
+                <a:cs typeface="Georgia" pitchFamily="34" charset="-120"/>
+              </a:rPr>
+              <a:t>What would you add or change?</a:t>
             </a:r>
             <a:endParaRPr lang="en-US" sz="2800" dirty="0"/>
           </a:p>
@@ -6422,73 +6960,51 @@
         </p:nvSpPr>
         <p:spPr>
           <a:xfrm>
-            <a:off x="457200" y="914400"/>
-            <a:ext cx="8229600" cy="2286000"/>
-          </a:xfrm>
-          <a:prstGeom prst="rect">
-            <a:avLst/>
-          </a:prstGeom>
-          <a:noFill/>
-          <a:ln/>
-        </p:spPr>
-        <p:txBody>
-          <a:bodyPr wrap="square" lIns="0" tIns="0" rIns="0" bIns="0" rtlCol="0" anchor="b"/>
-          <a:lstStyle/>
-          <a:p>
-            <a:pPr algn="ctr" indent="0" marL="0">
-              <a:buNone/>
-            </a:pPr>
-            <a:r>
-              <a:rPr lang="en-US" sz="12000" b="1" dirty="0">
-                <a:solidFill>
-                  <a:srgbClr val="09825D"/>
+            <a:off x="914400" y="1097280"/>
+            <a:ext cx="7315200" cy="2560320"/>
+          </a:xfrm>
+          <a:prstGeom prst="rect">
+            <a:avLst/>
+          </a:prstGeom>
+          <a:noFill/>
+          <a:ln/>
+        </p:spPr>
+        <p:txBody>
+          <a:bodyPr wrap="square" lIns="0" tIns="0" rIns="0" bIns="0" rtlCol="0" anchor="ctr"/>
+          <a:lstStyle/>
+          <a:p>
+            <a:pPr algn="ctr" indent="0" marL="0">
+              <a:buNone/>
+            </a:pPr>
+            <a:r>
+              <a:rPr lang="en-US" sz="4400" b="1" dirty="0">
+                <a:solidFill>
+                  <a:srgbClr val="FFFFFF"/>
                 </a:solidFill>
                 <a:latin typeface="Georgia" pitchFamily="34" charset="0"/>
                 <a:ea typeface="Georgia" pitchFamily="34" charset="-122"/>
                 <a:cs typeface="Georgia" pitchFamily="34" charset="-120"/>
               </a:rPr>
-              <a:t>15 min</a:t>
-            </a:r>
-            <a:endParaRPr lang="en-US" sz="12000" dirty="0"/>
-          </a:p>
-        </p:txBody>
-      </p:sp>
-      <p:sp>
-        <p:nvSpPr>
-          <p:cNvPr id="4" name="Text 2"/>
-          <p:cNvSpPr/>
-          <p:nvPr/>
-        </p:nvSpPr>
-        <p:spPr>
-          <a:xfrm>
-            <a:off x="1371600" y="3291840"/>
-            <a:ext cx="6400800" cy="731520"/>
-          </a:xfrm>
-          <a:prstGeom prst="rect">
-            <a:avLst/>
-          </a:prstGeom>
-          <a:noFill/>
-          <a:ln/>
-        </p:spPr>
-        <p:txBody>
-          <a:bodyPr wrap="square" lIns="0" tIns="0" rIns="0" bIns="0" rtlCol="0" anchor="t"/>
-          <a:lstStyle/>
-          <a:p>
-            <a:pPr algn="ctr" indent="0" marL="0">
-              <a:buNone/>
-            </a:pPr>
-            <a:r>
-              <a:rPr lang="en-US" sz="2800" dirty="0">
-                <a:solidFill>
-                  <a:srgbClr val="8B95A5"/>
-                </a:solidFill>
-                <a:latin typeface="Verdana" pitchFamily="34" charset="0"/>
-                <a:ea typeface="Verdana" pitchFamily="34" charset="-122"/>
-                <a:cs typeface="Verdana" pitchFamily="34" charset="-120"/>
-              </a:rPr>
-              <a:t>of judgment — the part only humans can do</a:t>
-            </a:r>
-            <a:endParaRPr lang="en-US" sz="2800" dirty="0"/>
+              <a:t>Claude won't remember.</a:t>
+            </a:r>
+            <a:endParaRPr lang="en-US" sz="4400" dirty="0"/>
+          </a:p>
+          <a:p>
+            <a:pPr algn="ctr" indent="0" marL="0">
+              <a:buNone/>
+            </a:pPr>
+            <a:r>
+              <a:rPr lang="en-US" sz="4400" b="1" dirty="0">
+                <a:solidFill>
+                  <a:srgbClr val="FFFFFF"/>
+                </a:solidFill>
+                <a:latin typeface="Georgia" pitchFamily="34" charset="0"/>
+                <a:ea typeface="Georgia" pitchFamily="34" charset="-122"/>
+                <a:cs typeface="Georgia" pitchFamily="34" charset="-120"/>
+              </a:rPr>
+              <a:t>But the Skill will.</a:t>
+            </a:r>
+            <a:endParaRPr lang="en-US" sz="4400" dirty="0"/>
           </a:p>
         </p:txBody>
       </p:sp>
@@ -6548,32 +7064,42 @@
       </p:sp>
       <p:sp>
         <p:nvSpPr>
-          <p:cNvPr id="3" name="Shape 1"/>
-          <p:cNvSpPr/>
-          <p:nvPr/>
-        </p:nvSpPr>
-        <p:spPr>
-          <a:xfrm>
-            <a:off x="192024" y="2011680"/>
-            <a:ext cx="1188720" cy="640080"/>
-          </a:xfrm>
-          <a:prstGeom prst="roundRect">
-            <a:avLst>
-              <a:gd name="adj" fmla="val 11429"/>
-            </a:avLst>
-          </a:prstGeom>
-          <a:solidFill>
-            <a:srgbClr val="0A2540">
-              <a:alpha val="50000"/>
-            </a:srgbClr>
-          </a:solidFill>
-          <a:ln w="19050">
-            <a:solidFill>
-              <a:srgbClr val="8B95A5"/>
-            </a:solidFill>
-            <a:prstDash val="solid"/>
-          </a:ln>
-        </p:spPr>
+          <p:cNvPr id="3" name="Text 1"/>
+          <p:cNvSpPr/>
+          <p:nvPr/>
+        </p:nvSpPr>
+        <p:spPr>
+          <a:xfrm>
+            <a:off x="457200" y="914400"/>
+            <a:ext cx="8229600" cy="2286000"/>
+          </a:xfrm>
+          <a:prstGeom prst="rect">
+            <a:avLst/>
+          </a:prstGeom>
+          <a:noFill/>
+          <a:ln/>
+        </p:spPr>
+        <p:txBody>
+          <a:bodyPr wrap="square" lIns="0" tIns="0" rIns="0" bIns="0" rtlCol="0" anchor="b"/>
+          <a:lstStyle/>
+          <a:p>
+            <a:pPr algn="ctr" indent="0" marL="0">
+              <a:buNone/>
+            </a:pPr>
+            <a:r>
+              <a:rPr lang="en-US" sz="12000" b="1" dirty="0">
+                <a:solidFill>
+                  <a:srgbClr val="FF6B8A"/>
+                </a:solidFill>
+                <a:latin typeface="Georgia" pitchFamily="34" charset="0"/>
+                <a:ea typeface="Georgia" pitchFamily="34" charset="-122"/>
+                <a:cs typeface="Georgia" pitchFamily="34" charset="-120"/>
+              </a:rPr>
+              <a:t>1.5 hrs</a:t>
+            </a:r>
+            <a:endParaRPr lang="en-US" sz="12000" dirty="0"/>
+          </a:p>
+        </p:txBody>
       </p:sp>
       <p:sp>
         <p:nvSpPr>
@@ -6583,24 +7109,24 @@
         </p:nvSpPr>
         <p:spPr>
           <a:xfrm>
-            <a:off x="192024" y="2011680"/>
-            <a:ext cx="1188720" cy="640080"/>
-          </a:xfrm>
-          <a:prstGeom prst="rect">
-            <a:avLst/>
-          </a:prstGeom>
-          <a:noFill/>
-          <a:ln/>
-        </p:spPr>
-        <p:txBody>
-          <a:bodyPr wrap="square" lIns="0" tIns="0" rIns="0" bIns="0" rtlCol="0" anchor="ctr"/>
-          <a:lstStyle/>
-          <a:p>
-            <a:pPr algn="ctr" indent="0" marL="0">
-              <a:buNone/>
-            </a:pPr>
-            <a:r>
-              <a:rPr lang="en-US" sz="1100" b="1" dirty="0">
+            <a:off x="1371600" y="3291840"/>
+            <a:ext cx="6400800" cy="731520"/>
+          </a:xfrm>
+          <a:prstGeom prst="rect">
+            <a:avLst/>
+          </a:prstGeom>
+          <a:noFill/>
+          <a:ln/>
+        </p:spPr>
+        <p:txBody>
+          <a:bodyPr wrap="square" lIns="0" tIns="0" rIns="0" bIns="0" rtlCol="0" anchor="t"/>
+          <a:lstStyle/>
+          <a:p>
+            <a:pPr algn="ctr" indent="0" marL="0">
+              <a:buNone/>
+            </a:pPr>
+            <a:r>
+              <a:rPr lang="en-US" sz="2800" dirty="0">
                 <a:solidFill>
                   <a:srgbClr val="8B95A5"/>
                 </a:solidFill>
@@ -6608,697 +7134,9 @@
                 <a:ea typeface="Verdana" pitchFamily="34" charset="-122"/>
                 <a:cs typeface="Verdana" pitchFamily="34" charset="-120"/>
               </a:rPr>
-              <a:t>Skeptic</a:t>
-            </a:r>
-            <a:endParaRPr lang="en-US" sz="1100" dirty="0"/>
-          </a:p>
-        </p:txBody>
-      </p:sp>
-      <p:sp>
-        <p:nvSpPr>
-          <p:cNvPr id="5" name="Text 3"/>
-          <p:cNvSpPr/>
-          <p:nvPr/>
-        </p:nvSpPr>
-        <p:spPr>
-          <a:xfrm>
-            <a:off x="1380744" y="2011680"/>
-            <a:ext cx="73152" cy="640080"/>
-          </a:xfrm>
-          <a:prstGeom prst="rect">
-            <a:avLst/>
-          </a:prstGeom>
-          <a:noFill/>
-          <a:ln/>
-        </p:spPr>
-        <p:txBody>
-          <a:bodyPr wrap="square" lIns="0" tIns="0" rIns="0" bIns="0" rtlCol="0" anchor="ctr"/>
-          <a:lstStyle/>
-          <a:p>
-            <a:pPr algn="ctr" indent="0" marL="0">
-              <a:buNone/>
-            </a:pPr>
-            <a:r>
-              <a:rPr lang="en-US" sz="1100" dirty="0">
-                <a:solidFill>
-                  <a:srgbClr val="8B95A5"/>
-                </a:solidFill>
-                <a:latin typeface="Verdana" pitchFamily="34" charset="0"/>
-                <a:ea typeface="Verdana" pitchFamily="34" charset="-122"/>
-                <a:cs typeface="Verdana" pitchFamily="34" charset="-120"/>
-              </a:rPr>
-              <a:t>→</a:t>
-            </a:r>
-            <a:endParaRPr lang="en-US" sz="1100" dirty="0"/>
-          </a:p>
-        </p:txBody>
-      </p:sp>
-      <p:sp>
-        <p:nvSpPr>
-          <p:cNvPr id="6" name="Shape 4"/>
-          <p:cNvSpPr/>
-          <p:nvPr/>
-        </p:nvSpPr>
-        <p:spPr>
-          <a:xfrm>
-            <a:off x="1453896" y="2011680"/>
-            <a:ext cx="1188720" cy="640080"/>
-          </a:xfrm>
-          <a:prstGeom prst="roundRect">
-            <a:avLst>
-              <a:gd name="adj" fmla="val 11429"/>
-            </a:avLst>
-          </a:prstGeom>
-          <a:solidFill>
-            <a:srgbClr val="635BFF"/>
-          </a:solidFill>
-          <a:ln w="19050">
-            <a:solidFill>
-              <a:srgbClr val="635BFF"/>
-            </a:solidFill>
-            <a:prstDash val="solid"/>
-          </a:ln>
-        </p:spPr>
-      </p:sp>
-      <p:sp>
-        <p:nvSpPr>
-          <p:cNvPr id="7" name="Text 5"/>
-          <p:cNvSpPr/>
-          <p:nvPr/>
-        </p:nvSpPr>
-        <p:spPr>
-          <a:xfrm>
-            <a:off x="1453896" y="2011680"/>
-            <a:ext cx="1188720" cy="640080"/>
-          </a:xfrm>
-          <a:prstGeom prst="rect">
-            <a:avLst/>
-          </a:prstGeom>
-          <a:noFill/>
-          <a:ln/>
-        </p:spPr>
-        <p:txBody>
-          <a:bodyPr wrap="square" lIns="0" tIns="0" rIns="0" bIns="0" rtlCol="0" anchor="ctr"/>
-          <a:lstStyle/>
-          <a:p>
-            <a:pPr algn="ctr" indent="0" marL="0">
-              <a:buNone/>
-            </a:pPr>
-            <a:r>
-              <a:rPr lang="en-US" sz="1100" b="1" dirty="0">
-                <a:solidFill>
-                  <a:srgbClr val="FFFFFF"/>
-                </a:solidFill>
-                <a:latin typeface="Verdana" pitchFamily="34" charset="0"/>
-                <a:ea typeface="Verdana" pitchFamily="34" charset="-122"/>
-                <a:cs typeface="Verdana" pitchFamily="34" charset="-120"/>
-              </a:rPr>
-              <a:t>Explorer</a:t>
-            </a:r>
-            <a:endParaRPr lang="en-US" sz="1100" dirty="0"/>
-          </a:p>
-        </p:txBody>
-      </p:sp>
-      <p:sp>
-        <p:nvSpPr>
-          <p:cNvPr id="8" name="Text 6"/>
-          <p:cNvSpPr/>
-          <p:nvPr/>
-        </p:nvSpPr>
-        <p:spPr>
-          <a:xfrm>
-            <a:off x="2642616" y="2011680"/>
-            <a:ext cx="73152" cy="640080"/>
-          </a:xfrm>
-          <a:prstGeom prst="rect">
-            <a:avLst/>
-          </a:prstGeom>
-          <a:noFill/>
-          <a:ln/>
-        </p:spPr>
-        <p:txBody>
-          <a:bodyPr wrap="square" lIns="0" tIns="0" rIns="0" bIns="0" rtlCol="0" anchor="ctr"/>
-          <a:lstStyle/>
-          <a:p>
-            <a:pPr algn="ctr" indent="0" marL="0">
-              <a:buNone/>
-            </a:pPr>
-            <a:r>
-              <a:rPr lang="en-US" sz="1100" dirty="0">
-                <a:solidFill>
-                  <a:srgbClr val="8B95A5"/>
-                </a:solidFill>
-                <a:latin typeface="Verdana" pitchFamily="34" charset="0"/>
-                <a:ea typeface="Verdana" pitchFamily="34" charset="-122"/>
-                <a:cs typeface="Verdana" pitchFamily="34" charset="-120"/>
-              </a:rPr>
-              <a:t>→</a:t>
-            </a:r>
-            <a:endParaRPr lang="en-US" sz="1100" dirty="0"/>
-          </a:p>
-        </p:txBody>
-      </p:sp>
-      <p:sp>
-        <p:nvSpPr>
-          <p:cNvPr id="9" name="Shape 7"/>
-          <p:cNvSpPr/>
-          <p:nvPr/>
-        </p:nvSpPr>
-        <p:spPr>
-          <a:xfrm>
-            <a:off x="2715768" y="2011680"/>
-            <a:ext cx="1188720" cy="640080"/>
-          </a:xfrm>
-          <a:prstGeom prst="roundRect">
-            <a:avLst>
-              <a:gd name="adj" fmla="val 11429"/>
-            </a:avLst>
-          </a:prstGeom>
-          <a:solidFill>
-            <a:srgbClr val="635BFF"/>
-          </a:solidFill>
-          <a:ln w="19050">
-            <a:solidFill>
-              <a:srgbClr val="635BFF"/>
-            </a:solidFill>
-            <a:prstDash val="solid"/>
-          </a:ln>
-        </p:spPr>
-      </p:sp>
-      <p:sp>
-        <p:nvSpPr>
-          <p:cNvPr id="10" name="Text 8"/>
-          <p:cNvSpPr/>
-          <p:nvPr/>
-        </p:nvSpPr>
-        <p:spPr>
-          <a:xfrm>
-            <a:off x="2715768" y="2011680"/>
-            <a:ext cx="1188720" cy="640080"/>
-          </a:xfrm>
-          <a:prstGeom prst="rect">
-            <a:avLst/>
-          </a:prstGeom>
-          <a:noFill/>
-          <a:ln/>
-        </p:spPr>
-        <p:txBody>
-          <a:bodyPr wrap="square" lIns="0" tIns="0" rIns="0" bIns="0" rtlCol="0" anchor="ctr"/>
-          <a:lstStyle/>
-          <a:p>
-            <a:pPr algn="ctr" indent="0" marL="0">
-              <a:buNone/>
-            </a:pPr>
-            <a:r>
-              <a:rPr lang="en-US" sz="1100" b="1" dirty="0">
-                <a:solidFill>
-                  <a:srgbClr val="FFFFFF"/>
-                </a:solidFill>
-                <a:latin typeface="Verdana" pitchFamily="34" charset="0"/>
-                <a:ea typeface="Verdana" pitchFamily="34" charset="-122"/>
-                <a:cs typeface="Verdana" pitchFamily="34" charset="-120"/>
-              </a:rPr>
-              <a:t>Whisperer</a:t>
-            </a:r>
-            <a:endParaRPr lang="en-US" sz="1100" dirty="0"/>
-          </a:p>
-        </p:txBody>
-      </p:sp>
-      <p:sp>
-        <p:nvSpPr>
-          <p:cNvPr id="11" name="Text 9"/>
-          <p:cNvSpPr/>
-          <p:nvPr/>
-        </p:nvSpPr>
-        <p:spPr>
-          <a:xfrm>
-            <a:off x="3904488" y="2011680"/>
-            <a:ext cx="73152" cy="640080"/>
-          </a:xfrm>
-          <a:prstGeom prst="rect">
-            <a:avLst/>
-          </a:prstGeom>
-          <a:noFill/>
-          <a:ln/>
-        </p:spPr>
-        <p:txBody>
-          <a:bodyPr wrap="square" lIns="0" tIns="0" rIns="0" bIns="0" rtlCol="0" anchor="ctr"/>
-          <a:lstStyle/>
-          <a:p>
-            <a:pPr algn="ctr" indent="0" marL="0">
-              <a:buNone/>
-            </a:pPr>
-            <a:r>
-              <a:rPr lang="en-US" sz="1100" dirty="0">
-                <a:solidFill>
-                  <a:srgbClr val="8B95A5"/>
-                </a:solidFill>
-                <a:latin typeface="Verdana" pitchFamily="34" charset="0"/>
-                <a:ea typeface="Verdana" pitchFamily="34" charset="-122"/>
-                <a:cs typeface="Verdana" pitchFamily="34" charset="-120"/>
-              </a:rPr>
-              <a:t>→</a:t>
-            </a:r>
-            <a:endParaRPr lang="en-US" sz="1100" dirty="0"/>
-          </a:p>
-        </p:txBody>
-      </p:sp>
-      <p:sp>
-        <p:nvSpPr>
-          <p:cNvPr id="12" name="Shape 10"/>
-          <p:cNvSpPr/>
-          <p:nvPr/>
-        </p:nvSpPr>
-        <p:spPr>
-          <a:xfrm>
-            <a:off x="3977640" y="2011680"/>
-            <a:ext cx="1188720" cy="640080"/>
-          </a:xfrm>
-          <a:prstGeom prst="roundRect">
-            <a:avLst>
-              <a:gd name="adj" fmla="val 11429"/>
-            </a:avLst>
-          </a:prstGeom>
-          <a:solidFill>
-            <a:srgbClr val="635BFF"/>
-          </a:solidFill>
-          <a:ln w="19050">
-            <a:solidFill>
-              <a:srgbClr val="635BFF"/>
-            </a:solidFill>
-            <a:prstDash val="solid"/>
-          </a:ln>
-        </p:spPr>
-      </p:sp>
-      <p:sp>
-        <p:nvSpPr>
-          <p:cNvPr id="13" name="Text 11"/>
-          <p:cNvSpPr/>
-          <p:nvPr/>
-        </p:nvSpPr>
-        <p:spPr>
-          <a:xfrm>
-            <a:off x="3977640" y="2011680"/>
-            <a:ext cx="1188720" cy="640080"/>
-          </a:xfrm>
-          <a:prstGeom prst="rect">
-            <a:avLst/>
-          </a:prstGeom>
-          <a:noFill/>
-          <a:ln/>
-        </p:spPr>
-        <p:txBody>
-          <a:bodyPr wrap="square" lIns="0" tIns="0" rIns="0" bIns="0" rtlCol="0" anchor="ctr"/>
-          <a:lstStyle/>
-          <a:p>
-            <a:pPr algn="ctr" indent="0" marL="0">
-              <a:buNone/>
-            </a:pPr>
-            <a:r>
-              <a:rPr lang="en-US" sz="1100" b="1" dirty="0">
-                <a:solidFill>
-                  <a:srgbClr val="FFFFFF"/>
-                </a:solidFill>
-                <a:latin typeface="Verdana" pitchFamily="34" charset="0"/>
-                <a:ea typeface="Verdana" pitchFamily="34" charset="-122"/>
-                <a:cs typeface="Verdana" pitchFamily="34" charset="-120"/>
-              </a:rPr>
-              <a:t>Strategist</a:t>
-            </a:r>
-            <a:endParaRPr lang="en-US" sz="1100" dirty="0"/>
-          </a:p>
-        </p:txBody>
-      </p:sp>
-      <p:sp>
-        <p:nvSpPr>
-          <p:cNvPr id="14" name="Text 12"/>
-          <p:cNvSpPr/>
-          <p:nvPr/>
-        </p:nvSpPr>
-        <p:spPr>
-          <a:xfrm>
-            <a:off x="5166360" y="2011680"/>
-            <a:ext cx="73152" cy="640080"/>
-          </a:xfrm>
-          <a:prstGeom prst="rect">
-            <a:avLst/>
-          </a:prstGeom>
-          <a:noFill/>
-          <a:ln/>
-        </p:spPr>
-        <p:txBody>
-          <a:bodyPr wrap="square" lIns="0" tIns="0" rIns="0" bIns="0" rtlCol="0" anchor="ctr"/>
-          <a:lstStyle/>
-          <a:p>
-            <a:pPr algn="ctr" indent="0" marL="0">
-              <a:buNone/>
-            </a:pPr>
-            <a:r>
-              <a:rPr lang="en-US" sz="1100" dirty="0">
-                <a:solidFill>
-                  <a:srgbClr val="8B95A5"/>
-                </a:solidFill>
-                <a:latin typeface="Verdana" pitchFamily="34" charset="0"/>
-                <a:ea typeface="Verdana" pitchFamily="34" charset="-122"/>
-                <a:cs typeface="Verdana" pitchFamily="34" charset="-120"/>
-              </a:rPr>
-              <a:t>→</a:t>
-            </a:r>
-            <a:endParaRPr lang="en-US" sz="1100" dirty="0"/>
-          </a:p>
-        </p:txBody>
-      </p:sp>
-      <p:sp>
-        <p:nvSpPr>
-          <p:cNvPr id="15" name="Shape 13"/>
-          <p:cNvSpPr/>
-          <p:nvPr/>
-        </p:nvSpPr>
-        <p:spPr>
-          <a:xfrm>
-            <a:off x="5239512" y="2011680"/>
-            <a:ext cx="1188720" cy="640080"/>
-          </a:xfrm>
-          <a:prstGeom prst="roundRect">
-            <a:avLst>
-              <a:gd name="adj" fmla="val 11429"/>
-            </a:avLst>
-          </a:prstGeom>
-          <a:solidFill>
-            <a:srgbClr val="635BFF"/>
-          </a:solidFill>
-          <a:ln w="19050">
-            <a:solidFill>
-              <a:srgbClr val="635BFF"/>
-            </a:solidFill>
-            <a:prstDash val="solid"/>
-          </a:ln>
-        </p:spPr>
-      </p:sp>
-      <p:sp>
-        <p:nvSpPr>
-          <p:cNvPr id="16" name="Text 14"/>
-          <p:cNvSpPr/>
-          <p:nvPr/>
-        </p:nvSpPr>
-        <p:spPr>
-          <a:xfrm>
-            <a:off x="5239512" y="2011680"/>
-            <a:ext cx="1188720" cy="640080"/>
-          </a:xfrm>
-          <a:prstGeom prst="rect">
-            <a:avLst/>
-          </a:prstGeom>
-          <a:noFill/>
-          <a:ln/>
-        </p:spPr>
-        <p:txBody>
-          <a:bodyPr wrap="square" lIns="0" tIns="0" rIns="0" bIns="0" rtlCol="0" anchor="ctr"/>
-          <a:lstStyle/>
-          <a:p>
-            <a:pPr algn="ctr" indent="0" marL="0">
-              <a:buNone/>
-            </a:pPr>
-            <a:r>
-              <a:rPr lang="en-US" sz="1100" b="1" dirty="0">
-                <a:solidFill>
-                  <a:srgbClr val="FFFFFF"/>
-                </a:solidFill>
-                <a:latin typeface="Verdana" pitchFamily="34" charset="0"/>
-                <a:ea typeface="Verdana" pitchFamily="34" charset="-122"/>
-                <a:cs typeface="Verdana" pitchFamily="34" charset="-120"/>
-              </a:rPr>
-              <a:t>Operator</a:t>
-            </a:r>
-            <a:endParaRPr lang="en-US" sz="1100" dirty="0"/>
-          </a:p>
-        </p:txBody>
-      </p:sp>
-      <p:sp>
-        <p:nvSpPr>
-          <p:cNvPr id="17" name="Text 15"/>
-          <p:cNvSpPr/>
-          <p:nvPr/>
-        </p:nvSpPr>
-        <p:spPr>
-          <a:xfrm>
-            <a:off x="6428232" y="2011680"/>
-            <a:ext cx="73152" cy="640080"/>
-          </a:xfrm>
-          <a:prstGeom prst="rect">
-            <a:avLst/>
-          </a:prstGeom>
-          <a:noFill/>
-          <a:ln/>
-        </p:spPr>
-        <p:txBody>
-          <a:bodyPr wrap="square" lIns="0" tIns="0" rIns="0" bIns="0" rtlCol="0" anchor="ctr"/>
-          <a:lstStyle/>
-          <a:p>
-            <a:pPr algn="ctr" indent="0" marL="0">
-              <a:buNone/>
-            </a:pPr>
-            <a:r>
-              <a:rPr lang="en-US" sz="1100" dirty="0">
-                <a:solidFill>
-                  <a:srgbClr val="8B95A5"/>
-                </a:solidFill>
-                <a:latin typeface="Verdana" pitchFamily="34" charset="0"/>
-                <a:ea typeface="Verdana" pitchFamily="34" charset="-122"/>
-                <a:cs typeface="Verdana" pitchFamily="34" charset="-120"/>
-              </a:rPr>
-              <a:t>→</a:t>
-            </a:r>
-            <a:endParaRPr lang="en-US" sz="1100" dirty="0"/>
-          </a:p>
-        </p:txBody>
-      </p:sp>
-      <p:sp>
-        <p:nvSpPr>
-          <p:cNvPr id="18" name="Shape 16"/>
-          <p:cNvSpPr/>
-          <p:nvPr/>
-        </p:nvSpPr>
-        <p:spPr>
-          <a:xfrm>
-            <a:off x="6501384" y="2011680"/>
-            <a:ext cx="1188720" cy="640080"/>
-          </a:xfrm>
-          <a:prstGeom prst="roundRect">
-            <a:avLst>
-              <a:gd name="adj" fmla="val 11429"/>
-            </a:avLst>
-          </a:prstGeom>
-          <a:solidFill>
-            <a:srgbClr val="635BFF"/>
-          </a:solidFill>
-          <a:ln w="19050">
-            <a:solidFill>
-              <a:srgbClr val="635BFF"/>
-            </a:solidFill>
-            <a:prstDash val="solid"/>
-          </a:ln>
-        </p:spPr>
-      </p:sp>
-      <p:sp>
-        <p:nvSpPr>
-          <p:cNvPr id="19" name="Text 17"/>
-          <p:cNvSpPr/>
-          <p:nvPr/>
-        </p:nvSpPr>
-        <p:spPr>
-          <a:xfrm>
-            <a:off x="6501384" y="2011680"/>
-            <a:ext cx="1188720" cy="640080"/>
-          </a:xfrm>
-          <a:prstGeom prst="rect">
-            <a:avLst/>
-          </a:prstGeom>
-          <a:noFill/>
-          <a:ln/>
-        </p:spPr>
-        <p:txBody>
-          <a:bodyPr wrap="square" lIns="0" tIns="0" rIns="0" bIns="0" rtlCol="0" anchor="ctr"/>
-          <a:lstStyle/>
-          <a:p>
-            <a:pPr algn="ctr" indent="0" marL="0">
-              <a:buNone/>
-            </a:pPr>
-            <a:r>
-              <a:rPr lang="en-US" sz="1100" b="1" dirty="0">
-                <a:solidFill>
-                  <a:srgbClr val="FFFFFF"/>
-                </a:solidFill>
-                <a:latin typeface="Verdana" pitchFamily="34" charset="0"/>
-                <a:ea typeface="Verdana" pitchFamily="34" charset="-122"/>
-                <a:cs typeface="Verdana" pitchFamily="34" charset="-120"/>
-              </a:rPr>
-              <a:t>Orchestrator</a:t>
-            </a:r>
-            <a:endParaRPr lang="en-US" sz="1100" dirty="0"/>
-          </a:p>
-        </p:txBody>
-      </p:sp>
-      <p:sp>
-        <p:nvSpPr>
-          <p:cNvPr id="20" name="Text 18"/>
-          <p:cNvSpPr/>
-          <p:nvPr/>
-        </p:nvSpPr>
-        <p:spPr>
-          <a:xfrm>
-            <a:off x="7690104" y="2011680"/>
-            <a:ext cx="73152" cy="640080"/>
-          </a:xfrm>
-          <a:prstGeom prst="rect">
-            <a:avLst/>
-          </a:prstGeom>
-          <a:noFill/>
-          <a:ln/>
-        </p:spPr>
-        <p:txBody>
-          <a:bodyPr wrap="square" lIns="0" tIns="0" rIns="0" bIns="0" rtlCol="0" anchor="ctr"/>
-          <a:lstStyle/>
-          <a:p>
-            <a:pPr algn="ctr" indent="0" marL="0">
-              <a:buNone/>
-            </a:pPr>
-            <a:r>
-              <a:rPr lang="en-US" sz="1100" dirty="0">
-                <a:solidFill>
-                  <a:srgbClr val="8B95A5"/>
-                </a:solidFill>
-                <a:latin typeface="Verdana" pitchFamily="34" charset="0"/>
-                <a:ea typeface="Verdana" pitchFamily="34" charset="-122"/>
-                <a:cs typeface="Verdana" pitchFamily="34" charset="-120"/>
-              </a:rPr>
-              <a:t>→</a:t>
-            </a:r>
-            <a:endParaRPr lang="en-US" sz="1100" dirty="0"/>
-          </a:p>
-        </p:txBody>
-      </p:sp>
-      <p:sp>
-        <p:nvSpPr>
-          <p:cNvPr id="21" name="Shape 19"/>
-          <p:cNvSpPr/>
-          <p:nvPr/>
-        </p:nvSpPr>
-        <p:spPr>
-          <a:xfrm>
-            <a:off x="7763256" y="2011680"/>
-            <a:ext cx="1188720" cy="640080"/>
-          </a:xfrm>
-          <a:prstGeom prst="roundRect">
-            <a:avLst>
-              <a:gd name="adj" fmla="val 11429"/>
-            </a:avLst>
-          </a:prstGeom>
-          <a:solidFill>
-            <a:srgbClr val="0A2540">
-              <a:alpha val="50000"/>
-            </a:srgbClr>
-          </a:solidFill>
-          <a:ln w="19050">
-            <a:solidFill>
-              <a:srgbClr val="8B95A5"/>
-            </a:solidFill>
-            <a:prstDash val="dash"/>
-          </a:ln>
-        </p:spPr>
-      </p:sp>
-      <p:sp>
-        <p:nvSpPr>
-          <p:cNvPr id="22" name="Text 20"/>
-          <p:cNvSpPr/>
-          <p:nvPr/>
-        </p:nvSpPr>
-        <p:spPr>
-          <a:xfrm>
-            <a:off x="7763256" y="2011680"/>
-            <a:ext cx="1188720" cy="640080"/>
-          </a:xfrm>
-          <a:prstGeom prst="rect">
-            <a:avLst/>
-          </a:prstGeom>
-          <a:noFill/>
-          <a:ln/>
-        </p:spPr>
-        <p:txBody>
-          <a:bodyPr wrap="square" lIns="0" tIns="0" rIns="0" bIns="0" rtlCol="0" anchor="ctr"/>
-          <a:lstStyle/>
-          <a:p>
-            <a:pPr algn="ctr" indent="0" marL="0">
-              <a:buNone/>
-            </a:pPr>
-            <a:r>
-              <a:rPr lang="en-US" sz="1100" b="1" dirty="0">
-                <a:solidFill>
-                  <a:srgbClr val="8B95A5"/>
-                </a:solidFill>
-                <a:latin typeface="Verdana" pitchFamily="34" charset="0"/>
-                <a:ea typeface="Verdana" pitchFamily="34" charset="-122"/>
-                <a:cs typeface="Verdana" pitchFamily="34" charset="-120"/>
-              </a:rPr>
-              <a:t>Builder</a:t>
-            </a:r>
-            <a:endParaRPr lang="en-US" sz="1100" dirty="0"/>
-          </a:p>
-        </p:txBody>
-      </p:sp>
-      <p:sp>
-        <p:nvSpPr>
-          <p:cNvPr id="23" name="Text 21"/>
-          <p:cNvSpPr/>
-          <p:nvPr/>
-        </p:nvSpPr>
-        <p:spPr>
-          <a:xfrm>
-            <a:off x="914400" y="3108960"/>
-            <a:ext cx="7315200" cy="914400"/>
-          </a:xfrm>
-          <a:prstGeom prst="rect">
-            <a:avLst/>
-          </a:prstGeom>
-          <a:noFill/>
-          <a:ln/>
-        </p:spPr>
-        <p:txBody>
-          <a:bodyPr wrap="square" lIns="0" tIns="0" rIns="0" bIns="0" rtlCol="0" anchor="ctr"/>
-          <a:lstStyle/>
-          <a:p>
-            <a:pPr algn="ctr" indent="0" marL="0">
-              <a:buNone/>
-            </a:pPr>
-            <a:r>
-              <a:rPr lang="en-US" sz="2400" b="1" dirty="0">
-                <a:solidFill>
-                  <a:srgbClr val="635BFF"/>
-                </a:solidFill>
-                <a:latin typeface="Georgia" pitchFamily="34" charset="0"/>
-                <a:ea typeface="Georgia" pitchFamily="34" charset="-122"/>
-                <a:cs typeface="Georgia" pitchFamily="34" charset="-120"/>
-              </a:rPr>
-              <a:t>You started as an Explorer.</a:t>
-            </a:r>
-            <a:endParaRPr lang="en-US" sz="2400" dirty="0"/>
-          </a:p>
-          <a:p>
-            <a:pPr algn="ctr" indent="0" marL="0">
-              <a:buNone/>
-            </a:pPr>
-            <a:r>
-              <a:rPr lang="en-US" sz="2400" b="1" dirty="0">
-                <a:solidFill>
-                  <a:srgbClr val="635BFF"/>
-                </a:solidFill>
-                <a:latin typeface="Georgia" pitchFamily="34" charset="0"/>
-                <a:ea typeface="Georgia" pitchFamily="34" charset="-122"/>
-                <a:cs typeface="Georgia" pitchFamily="34" charset="-120"/>
-              </a:rPr>
-              <a:t>You’re now an Orchestrator.</a:t>
-            </a:r>
-            <a:endParaRPr lang="en-US" sz="2400" dirty="0"/>
+              <a:t>of you being the bottleneck</a:t>
+            </a:r>
+            <a:endParaRPr lang="en-US" sz="2800" dirty="0"/>
           </a:p>
         </p:txBody>
       </p:sp>
@@ -7364,6 +7202,962 @@
         </p:nvSpPr>
         <p:spPr>
           <a:xfrm>
+            <a:off x="457200" y="914400"/>
+            <a:ext cx="8229600" cy="2286000"/>
+          </a:xfrm>
+          <a:prstGeom prst="rect">
+            <a:avLst/>
+          </a:prstGeom>
+          <a:noFill/>
+          <a:ln/>
+        </p:spPr>
+        <p:txBody>
+          <a:bodyPr wrap="square" lIns="0" tIns="0" rIns="0" bIns="0" rtlCol="0" anchor="b"/>
+          <a:lstStyle/>
+          <a:p>
+            <a:pPr algn="ctr" indent="0" marL="0">
+              <a:buNone/>
+            </a:pPr>
+            <a:r>
+              <a:rPr lang="en-US" sz="12000" b="1" dirty="0">
+                <a:solidFill>
+                  <a:srgbClr val="09825D"/>
+                </a:solidFill>
+                <a:latin typeface="Georgia" pitchFamily="34" charset="0"/>
+                <a:ea typeface="Georgia" pitchFamily="34" charset="-122"/>
+                <a:cs typeface="Georgia" pitchFamily="34" charset="-120"/>
+              </a:rPr>
+              <a:t>15 min</a:t>
+            </a:r>
+            <a:endParaRPr lang="en-US" sz="12000" dirty="0"/>
+          </a:p>
+        </p:txBody>
+      </p:sp>
+      <p:sp>
+        <p:nvSpPr>
+          <p:cNvPr id="4" name="Text 2"/>
+          <p:cNvSpPr/>
+          <p:nvPr/>
+        </p:nvSpPr>
+        <p:spPr>
+          <a:xfrm>
+            <a:off x="1371600" y="3291840"/>
+            <a:ext cx="6400800" cy="731520"/>
+          </a:xfrm>
+          <a:prstGeom prst="rect">
+            <a:avLst/>
+          </a:prstGeom>
+          <a:noFill/>
+          <a:ln/>
+        </p:spPr>
+        <p:txBody>
+          <a:bodyPr wrap="square" lIns="0" tIns="0" rIns="0" bIns="0" rtlCol="0" anchor="t"/>
+          <a:lstStyle/>
+          <a:p>
+            <a:pPr algn="ctr" indent="0" marL="0">
+              <a:buNone/>
+            </a:pPr>
+            <a:r>
+              <a:rPr lang="en-US" sz="2800" dirty="0">
+                <a:solidFill>
+                  <a:srgbClr val="8B95A5"/>
+                </a:solidFill>
+                <a:latin typeface="Verdana" pitchFamily="34" charset="0"/>
+                <a:ea typeface="Verdana" pitchFamily="34" charset="-122"/>
+                <a:cs typeface="Verdana" pitchFamily="34" charset="-120"/>
+              </a:rPr>
+              <a:t>of judgment — the part only humans can do</a:t>
+            </a:r>
+            <a:endParaRPr lang="en-US" sz="2800" dirty="0"/>
+          </a:p>
+        </p:txBody>
+      </p:sp>
+    </p:spTree>
+  </p:cSld>
+  <p:clrMapOvr>
+    <a:masterClrMapping/>
+  </p:clrMapOvr>
+</p:sld>
+</file>
+
+<file path=ppt/slides/slide26.xml><?xml version="1.0" encoding="utf-8"?>
+<p:sld xmlns:a="http://schemas.openxmlformats.org/drawingml/2006/main" xmlns:r="http://schemas.openxmlformats.org/officeDocument/2006/relationships" xmlns:p="http://schemas.openxmlformats.org/presentationml/2006/main">
+  <p:cSld name="Slide 26">
+    <p:bg>
+      <p:bgPr>
+        <a:solidFill>
+          <a:srgbClr val="0A2540"/>
+        </a:solidFill>
+      </p:bgPr>
+    </p:bg>
+    <p:spTree>
+      <p:nvGrpSpPr>
+        <p:cNvPr id="1" name=""/>
+        <p:cNvGrpSpPr/>
+        <p:nvPr/>
+      </p:nvGrpSpPr>
+      <p:grpSpPr>
+        <a:xfrm>
+          <a:off x="0" y="0"/>
+          <a:ext cx="0" cy="0"/>
+          <a:chOff x="0" y="0"/>
+          <a:chExt cx="0" cy="0"/>
+        </a:xfrm>
+      </p:grpSpPr>
+      <p:sp>
+        <p:nvSpPr>
+          <p:cNvPr id="2" name="Shape 0"/>
+          <p:cNvSpPr/>
+          <p:nvPr/>
+        </p:nvSpPr>
+        <p:spPr>
+          <a:xfrm>
+            <a:off x="4572000" y="2286000"/>
+            <a:ext cx="7315200" cy="5486400"/>
+          </a:xfrm>
+          <a:prstGeom prst="ellipse">
+            <a:avLst/>
+          </a:prstGeom>
+          <a:solidFill>
+            <a:srgbClr val="635BFF">
+              <a:alpha val="4000"/>
+            </a:srgbClr>
+          </a:solidFill>
+          <a:ln/>
+        </p:spPr>
+      </p:sp>
+      <p:sp>
+        <p:nvSpPr>
+          <p:cNvPr id="3" name="Shape 1"/>
+          <p:cNvSpPr/>
+          <p:nvPr/>
+        </p:nvSpPr>
+        <p:spPr>
+          <a:xfrm>
+            <a:off x="192024" y="2011680"/>
+            <a:ext cx="1188720" cy="640080"/>
+          </a:xfrm>
+          <a:prstGeom prst="roundRect">
+            <a:avLst>
+              <a:gd name="adj" fmla="val 11429"/>
+            </a:avLst>
+          </a:prstGeom>
+          <a:solidFill>
+            <a:srgbClr val="0A2540">
+              <a:alpha val="50000"/>
+            </a:srgbClr>
+          </a:solidFill>
+          <a:ln w="19050">
+            <a:solidFill>
+              <a:srgbClr val="8B95A5"/>
+            </a:solidFill>
+            <a:prstDash val="solid"/>
+          </a:ln>
+        </p:spPr>
+      </p:sp>
+      <p:sp>
+        <p:nvSpPr>
+          <p:cNvPr id="4" name="Text 2"/>
+          <p:cNvSpPr/>
+          <p:nvPr/>
+        </p:nvSpPr>
+        <p:spPr>
+          <a:xfrm>
+            <a:off x="192024" y="2011680"/>
+            <a:ext cx="1188720" cy="640080"/>
+          </a:xfrm>
+          <a:prstGeom prst="rect">
+            <a:avLst/>
+          </a:prstGeom>
+          <a:noFill/>
+          <a:ln/>
+        </p:spPr>
+        <p:txBody>
+          <a:bodyPr wrap="square" lIns="0" tIns="0" rIns="0" bIns="0" rtlCol="0" anchor="ctr">
+            <a:normAutofit/>
+          </a:bodyPr>
+          <a:lstStyle/>
+          <a:p>
+            <a:pPr algn="ctr" indent="0" marL="0">
+              <a:buNone/>
+            </a:pPr>
+            <a:r>
+              <a:rPr lang="en-US" sz="1100" b="1" dirty="0">
+                <a:solidFill>
+                  <a:srgbClr val="8B95A5"/>
+                </a:solidFill>
+                <a:latin typeface="Verdana" pitchFamily="34" charset="0"/>
+                <a:ea typeface="Verdana" pitchFamily="34" charset="-122"/>
+                <a:cs typeface="Verdana" pitchFamily="34" charset="-120"/>
+              </a:rPr>
+              <a:t>Skeptic</a:t>
+            </a:r>
+            <a:endParaRPr lang="en-US" sz="1100" dirty="0"/>
+          </a:p>
+        </p:txBody>
+      </p:sp>
+      <p:sp>
+        <p:nvSpPr>
+          <p:cNvPr id="5" name="Text 3"/>
+          <p:cNvSpPr/>
+          <p:nvPr/>
+        </p:nvSpPr>
+        <p:spPr>
+          <a:xfrm>
+            <a:off x="1380744" y="2011680"/>
+            <a:ext cx="73152" cy="640080"/>
+          </a:xfrm>
+          <a:prstGeom prst="rect">
+            <a:avLst/>
+          </a:prstGeom>
+          <a:noFill/>
+          <a:ln/>
+        </p:spPr>
+        <p:txBody>
+          <a:bodyPr wrap="square" lIns="0" tIns="0" rIns="0" bIns="0" rtlCol="0" anchor="ctr"/>
+          <a:lstStyle/>
+          <a:p>
+            <a:pPr algn="ctr" indent="0" marL="0">
+              <a:buNone/>
+            </a:pPr>
+            <a:r>
+              <a:rPr lang="en-US" sz="1100" dirty="0">
+                <a:solidFill>
+                  <a:srgbClr val="8B95A5"/>
+                </a:solidFill>
+                <a:latin typeface="Verdana" pitchFamily="34" charset="0"/>
+                <a:ea typeface="Verdana" pitchFamily="34" charset="-122"/>
+                <a:cs typeface="Verdana" pitchFamily="34" charset="-120"/>
+              </a:rPr>
+              <a:t>→</a:t>
+            </a:r>
+            <a:endParaRPr lang="en-US" sz="1100" dirty="0"/>
+          </a:p>
+        </p:txBody>
+      </p:sp>
+      <p:sp>
+        <p:nvSpPr>
+          <p:cNvPr id="6" name="Shape 4"/>
+          <p:cNvSpPr/>
+          <p:nvPr/>
+        </p:nvSpPr>
+        <p:spPr>
+          <a:xfrm>
+            <a:off x="1453896" y="2011680"/>
+            <a:ext cx="1188720" cy="640080"/>
+          </a:xfrm>
+          <a:prstGeom prst="roundRect">
+            <a:avLst>
+              <a:gd name="adj" fmla="val 11429"/>
+            </a:avLst>
+          </a:prstGeom>
+          <a:solidFill>
+            <a:srgbClr val="635BFF"/>
+          </a:solidFill>
+          <a:ln w="19050">
+            <a:solidFill>
+              <a:srgbClr val="635BFF"/>
+            </a:solidFill>
+            <a:prstDash val="solid"/>
+          </a:ln>
+        </p:spPr>
+      </p:sp>
+      <p:sp>
+        <p:nvSpPr>
+          <p:cNvPr id="7" name="Text 5"/>
+          <p:cNvSpPr/>
+          <p:nvPr/>
+        </p:nvSpPr>
+        <p:spPr>
+          <a:xfrm>
+            <a:off x="1453896" y="2011680"/>
+            <a:ext cx="1188720" cy="640080"/>
+          </a:xfrm>
+          <a:prstGeom prst="rect">
+            <a:avLst/>
+          </a:prstGeom>
+          <a:noFill/>
+          <a:ln/>
+        </p:spPr>
+        <p:txBody>
+          <a:bodyPr wrap="square" lIns="0" tIns="0" rIns="0" bIns="0" rtlCol="0" anchor="ctr">
+            <a:normAutofit/>
+          </a:bodyPr>
+          <a:lstStyle/>
+          <a:p>
+            <a:pPr algn="ctr" indent="0" marL="0">
+              <a:buNone/>
+            </a:pPr>
+            <a:r>
+              <a:rPr lang="en-US" sz="1100" b="1" dirty="0">
+                <a:solidFill>
+                  <a:srgbClr val="FFFFFF"/>
+                </a:solidFill>
+                <a:latin typeface="Verdana" pitchFamily="34" charset="0"/>
+                <a:ea typeface="Verdana" pitchFamily="34" charset="-122"/>
+                <a:cs typeface="Verdana" pitchFamily="34" charset="-120"/>
+              </a:rPr>
+              <a:t>Explorer</a:t>
+            </a:r>
+            <a:endParaRPr lang="en-US" sz="1100" dirty="0"/>
+          </a:p>
+        </p:txBody>
+      </p:sp>
+      <p:sp>
+        <p:nvSpPr>
+          <p:cNvPr id="8" name="Text 6"/>
+          <p:cNvSpPr/>
+          <p:nvPr/>
+        </p:nvSpPr>
+        <p:spPr>
+          <a:xfrm>
+            <a:off x="2642616" y="2011680"/>
+            <a:ext cx="73152" cy="640080"/>
+          </a:xfrm>
+          <a:prstGeom prst="rect">
+            <a:avLst/>
+          </a:prstGeom>
+          <a:noFill/>
+          <a:ln/>
+        </p:spPr>
+        <p:txBody>
+          <a:bodyPr wrap="square" lIns="0" tIns="0" rIns="0" bIns="0" rtlCol="0" anchor="ctr"/>
+          <a:lstStyle/>
+          <a:p>
+            <a:pPr algn="ctr" indent="0" marL="0">
+              <a:buNone/>
+            </a:pPr>
+            <a:r>
+              <a:rPr lang="en-US" sz="1100" dirty="0">
+                <a:solidFill>
+                  <a:srgbClr val="8B95A5"/>
+                </a:solidFill>
+                <a:latin typeface="Verdana" pitchFamily="34" charset="0"/>
+                <a:ea typeface="Verdana" pitchFamily="34" charset="-122"/>
+                <a:cs typeface="Verdana" pitchFamily="34" charset="-120"/>
+              </a:rPr>
+              <a:t>→</a:t>
+            </a:r>
+            <a:endParaRPr lang="en-US" sz="1100" dirty="0"/>
+          </a:p>
+        </p:txBody>
+      </p:sp>
+      <p:sp>
+        <p:nvSpPr>
+          <p:cNvPr id="9" name="Shape 7"/>
+          <p:cNvSpPr/>
+          <p:nvPr/>
+        </p:nvSpPr>
+        <p:spPr>
+          <a:xfrm>
+            <a:off x="2715768" y="2011680"/>
+            <a:ext cx="1188720" cy="640080"/>
+          </a:xfrm>
+          <a:prstGeom prst="roundRect">
+            <a:avLst>
+              <a:gd name="adj" fmla="val 11429"/>
+            </a:avLst>
+          </a:prstGeom>
+          <a:solidFill>
+            <a:srgbClr val="635BFF"/>
+          </a:solidFill>
+          <a:ln w="19050">
+            <a:solidFill>
+              <a:srgbClr val="635BFF"/>
+            </a:solidFill>
+            <a:prstDash val="solid"/>
+          </a:ln>
+        </p:spPr>
+      </p:sp>
+      <p:sp>
+        <p:nvSpPr>
+          <p:cNvPr id="10" name="Text 8"/>
+          <p:cNvSpPr/>
+          <p:nvPr/>
+        </p:nvSpPr>
+        <p:spPr>
+          <a:xfrm>
+            <a:off x="2715768" y="2011680"/>
+            <a:ext cx="1188720" cy="640080"/>
+          </a:xfrm>
+          <a:prstGeom prst="rect">
+            <a:avLst/>
+          </a:prstGeom>
+          <a:noFill/>
+          <a:ln/>
+        </p:spPr>
+        <p:txBody>
+          <a:bodyPr wrap="square" lIns="0" tIns="0" rIns="0" bIns="0" rtlCol="0" anchor="ctr">
+            <a:normAutofit/>
+          </a:bodyPr>
+          <a:lstStyle/>
+          <a:p>
+            <a:pPr algn="ctr" indent="0" marL="0">
+              <a:buNone/>
+            </a:pPr>
+            <a:r>
+              <a:rPr lang="en-US" sz="1100" b="1" dirty="0">
+                <a:solidFill>
+                  <a:srgbClr val="FFFFFF"/>
+                </a:solidFill>
+                <a:latin typeface="Verdana" pitchFamily="34" charset="0"/>
+                <a:ea typeface="Verdana" pitchFamily="34" charset="-122"/>
+                <a:cs typeface="Verdana" pitchFamily="34" charset="-120"/>
+              </a:rPr>
+              <a:t>Whisperer</a:t>
+            </a:r>
+            <a:endParaRPr lang="en-US" sz="1100" dirty="0"/>
+          </a:p>
+        </p:txBody>
+      </p:sp>
+      <p:sp>
+        <p:nvSpPr>
+          <p:cNvPr id="11" name="Text 9"/>
+          <p:cNvSpPr/>
+          <p:nvPr/>
+        </p:nvSpPr>
+        <p:spPr>
+          <a:xfrm>
+            <a:off x="3904488" y="2011680"/>
+            <a:ext cx="73152" cy="640080"/>
+          </a:xfrm>
+          <a:prstGeom prst="rect">
+            <a:avLst/>
+          </a:prstGeom>
+          <a:noFill/>
+          <a:ln/>
+        </p:spPr>
+        <p:txBody>
+          <a:bodyPr wrap="square" lIns="0" tIns="0" rIns="0" bIns="0" rtlCol="0" anchor="ctr"/>
+          <a:lstStyle/>
+          <a:p>
+            <a:pPr algn="ctr" indent="0" marL="0">
+              <a:buNone/>
+            </a:pPr>
+            <a:r>
+              <a:rPr lang="en-US" sz="1100" dirty="0">
+                <a:solidFill>
+                  <a:srgbClr val="8B95A5"/>
+                </a:solidFill>
+                <a:latin typeface="Verdana" pitchFamily="34" charset="0"/>
+                <a:ea typeface="Verdana" pitchFamily="34" charset="-122"/>
+                <a:cs typeface="Verdana" pitchFamily="34" charset="-120"/>
+              </a:rPr>
+              <a:t>→</a:t>
+            </a:r>
+            <a:endParaRPr lang="en-US" sz="1100" dirty="0"/>
+          </a:p>
+        </p:txBody>
+      </p:sp>
+      <p:sp>
+        <p:nvSpPr>
+          <p:cNvPr id="12" name="Shape 10"/>
+          <p:cNvSpPr/>
+          <p:nvPr/>
+        </p:nvSpPr>
+        <p:spPr>
+          <a:xfrm>
+            <a:off x="3977640" y="2011680"/>
+            <a:ext cx="1188720" cy="640080"/>
+          </a:xfrm>
+          <a:prstGeom prst="roundRect">
+            <a:avLst>
+              <a:gd name="adj" fmla="val 11429"/>
+            </a:avLst>
+          </a:prstGeom>
+          <a:solidFill>
+            <a:srgbClr val="635BFF"/>
+          </a:solidFill>
+          <a:ln w="19050">
+            <a:solidFill>
+              <a:srgbClr val="635BFF"/>
+            </a:solidFill>
+            <a:prstDash val="solid"/>
+          </a:ln>
+        </p:spPr>
+      </p:sp>
+      <p:sp>
+        <p:nvSpPr>
+          <p:cNvPr id="13" name="Text 11"/>
+          <p:cNvSpPr/>
+          <p:nvPr/>
+        </p:nvSpPr>
+        <p:spPr>
+          <a:xfrm>
+            <a:off x="3977640" y="2011680"/>
+            <a:ext cx="1188720" cy="640080"/>
+          </a:xfrm>
+          <a:prstGeom prst="rect">
+            <a:avLst/>
+          </a:prstGeom>
+          <a:noFill/>
+          <a:ln/>
+        </p:spPr>
+        <p:txBody>
+          <a:bodyPr wrap="square" lIns="0" tIns="0" rIns="0" bIns="0" rtlCol="0" anchor="ctr">
+            <a:normAutofit/>
+          </a:bodyPr>
+          <a:lstStyle/>
+          <a:p>
+            <a:pPr algn="ctr" indent="0" marL="0">
+              <a:buNone/>
+            </a:pPr>
+            <a:r>
+              <a:rPr lang="en-US" sz="1100" b="1" dirty="0">
+                <a:solidFill>
+                  <a:srgbClr val="FFFFFF"/>
+                </a:solidFill>
+                <a:latin typeface="Verdana" pitchFamily="34" charset="0"/>
+                <a:ea typeface="Verdana" pitchFamily="34" charset="-122"/>
+                <a:cs typeface="Verdana" pitchFamily="34" charset="-120"/>
+              </a:rPr>
+              <a:t>Strategist</a:t>
+            </a:r>
+            <a:endParaRPr lang="en-US" sz="1100" dirty="0"/>
+          </a:p>
+        </p:txBody>
+      </p:sp>
+      <p:sp>
+        <p:nvSpPr>
+          <p:cNvPr id="14" name="Text 12"/>
+          <p:cNvSpPr/>
+          <p:nvPr/>
+        </p:nvSpPr>
+        <p:spPr>
+          <a:xfrm>
+            <a:off x="5166360" y="2011680"/>
+            <a:ext cx="73152" cy="640080"/>
+          </a:xfrm>
+          <a:prstGeom prst="rect">
+            <a:avLst/>
+          </a:prstGeom>
+          <a:noFill/>
+          <a:ln/>
+        </p:spPr>
+        <p:txBody>
+          <a:bodyPr wrap="square" lIns="0" tIns="0" rIns="0" bIns="0" rtlCol="0" anchor="ctr"/>
+          <a:lstStyle/>
+          <a:p>
+            <a:pPr algn="ctr" indent="0" marL="0">
+              <a:buNone/>
+            </a:pPr>
+            <a:r>
+              <a:rPr lang="en-US" sz="1100" dirty="0">
+                <a:solidFill>
+                  <a:srgbClr val="8B95A5"/>
+                </a:solidFill>
+                <a:latin typeface="Verdana" pitchFamily="34" charset="0"/>
+                <a:ea typeface="Verdana" pitchFamily="34" charset="-122"/>
+                <a:cs typeface="Verdana" pitchFamily="34" charset="-120"/>
+              </a:rPr>
+              <a:t>→</a:t>
+            </a:r>
+            <a:endParaRPr lang="en-US" sz="1100" dirty="0"/>
+          </a:p>
+        </p:txBody>
+      </p:sp>
+      <p:sp>
+        <p:nvSpPr>
+          <p:cNvPr id="15" name="Shape 13"/>
+          <p:cNvSpPr/>
+          <p:nvPr/>
+        </p:nvSpPr>
+        <p:spPr>
+          <a:xfrm>
+            <a:off x="5239512" y="2011680"/>
+            <a:ext cx="1188720" cy="640080"/>
+          </a:xfrm>
+          <a:prstGeom prst="roundRect">
+            <a:avLst>
+              <a:gd name="adj" fmla="val 11429"/>
+            </a:avLst>
+          </a:prstGeom>
+          <a:solidFill>
+            <a:srgbClr val="635BFF"/>
+          </a:solidFill>
+          <a:ln w="19050">
+            <a:solidFill>
+              <a:srgbClr val="635BFF"/>
+            </a:solidFill>
+            <a:prstDash val="solid"/>
+          </a:ln>
+        </p:spPr>
+      </p:sp>
+      <p:sp>
+        <p:nvSpPr>
+          <p:cNvPr id="16" name="Text 14"/>
+          <p:cNvSpPr/>
+          <p:nvPr/>
+        </p:nvSpPr>
+        <p:spPr>
+          <a:xfrm>
+            <a:off x="5239512" y="2011680"/>
+            <a:ext cx="1188720" cy="640080"/>
+          </a:xfrm>
+          <a:prstGeom prst="rect">
+            <a:avLst/>
+          </a:prstGeom>
+          <a:noFill/>
+          <a:ln/>
+        </p:spPr>
+        <p:txBody>
+          <a:bodyPr wrap="square" lIns="0" tIns="0" rIns="0" bIns="0" rtlCol="0" anchor="ctr">
+            <a:normAutofit/>
+          </a:bodyPr>
+          <a:lstStyle/>
+          <a:p>
+            <a:pPr algn="ctr" indent="0" marL="0">
+              <a:buNone/>
+            </a:pPr>
+            <a:r>
+              <a:rPr lang="en-US" sz="1100" b="1" dirty="0">
+                <a:solidFill>
+                  <a:srgbClr val="FFFFFF"/>
+                </a:solidFill>
+                <a:latin typeface="Verdana" pitchFamily="34" charset="0"/>
+                <a:ea typeface="Verdana" pitchFamily="34" charset="-122"/>
+                <a:cs typeface="Verdana" pitchFamily="34" charset="-120"/>
+              </a:rPr>
+              <a:t>Operator</a:t>
+            </a:r>
+            <a:endParaRPr lang="en-US" sz="1100" dirty="0"/>
+          </a:p>
+        </p:txBody>
+      </p:sp>
+      <p:sp>
+        <p:nvSpPr>
+          <p:cNvPr id="17" name="Text 15"/>
+          <p:cNvSpPr/>
+          <p:nvPr/>
+        </p:nvSpPr>
+        <p:spPr>
+          <a:xfrm>
+            <a:off x="6428232" y="2011680"/>
+            <a:ext cx="73152" cy="640080"/>
+          </a:xfrm>
+          <a:prstGeom prst="rect">
+            <a:avLst/>
+          </a:prstGeom>
+          <a:noFill/>
+          <a:ln/>
+        </p:spPr>
+        <p:txBody>
+          <a:bodyPr wrap="square" lIns="0" tIns="0" rIns="0" bIns="0" rtlCol="0" anchor="ctr"/>
+          <a:lstStyle/>
+          <a:p>
+            <a:pPr algn="ctr" indent="0" marL="0">
+              <a:buNone/>
+            </a:pPr>
+            <a:r>
+              <a:rPr lang="en-US" sz="1100" dirty="0">
+                <a:solidFill>
+                  <a:srgbClr val="8B95A5"/>
+                </a:solidFill>
+                <a:latin typeface="Verdana" pitchFamily="34" charset="0"/>
+                <a:ea typeface="Verdana" pitchFamily="34" charset="-122"/>
+                <a:cs typeface="Verdana" pitchFamily="34" charset="-120"/>
+              </a:rPr>
+              <a:t>→</a:t>
+            </a:r>
+            <a:endParaRPr lang="en-US" sz="1100" dirty="0"/>
+          </a:p>
+        </p:txBody>
+      </p:sp>
+      <p:sp>
+        <p:nvSpPr>
+          <p:cNvPr id="18" name="Shape 16"/>
+          <p:cNvSpPr/>
+          <p:nvPr/>
+        </p:nvSpPr>
+        <p:spPr>
+          <a:xfrm>
+            <a:off x="6501384" y="2011680"/>
+            <a:ext cx="1188720" cy="640080"/>
+          </a:xfrm>
+          <a:prstGeom prst="roundRect">
+            <a:avLst>
+              <a:gd name="adj" fmla="val 11429"/>
+            </a:avLst>
+          </a:prstGeom>
+          <a:solidFill>
+            <a:srgbClr val="635BFF"/>
+          </a:solidFill>
+          <a:ln w="19050">
+            <a:solidFill>
+              <a:srgbClr val="635BFF"/>
+            </a:solidFill>
+            <a:prstDash val="solid"/>
+          </a:ln>
+        </p:spPr>
+      </p:sp>
+      <p:sp>
+        <p:nvSpPr>
+          <p:cNvPr id="19" name="Text 17"/>
+          <p:cNvSpPr/>
+          <p:nvPr/>
+        </p:nvSpPr>
+        <p:spPr>
+          <a:xfrm>
+            <a:off x="6501384" y="2011680"/>
+            <a:ext cx="1188720" cy="640080"/>
+          </a:xfrm>
+          <a:prstGeom prst="rect">
+            <a:avLst/>
+          </a:prstGeom>
+          <a:noFill/>
+          <a:ln/>
+        </p:spPr>
+        <p:txBody>
+          <a:bodyPr wrap="square" lIns="0" tIns="0" rIns="0" bIns="0" rtlCol="0" anchor="ctr">
+            <a:normAutofit/>
+          </a:bodyPr>
+          <a:lstStyle/>
+          <a:p>
+            <a:pPr algn="ctr" indent="0" marL="0">
+              <a:buNone/>
+            </a:pPr>
+            <a:r>
+              <a:rPr lang="en-US" sz="1100" b="1" dirty="0">
+                <a:solidFill>
+                  <a:srgbClr val="FFFFFF"/>
+                </a:solidFill>
+                <a:latin typeface="Verdana" pitchFamily="34" charset="0"/>
+                <a:ea typeface="Verdana" pitchFamily="34" charset="-122"/>
+                <a:cs typeface="Verdana" pitchFamily="34" charset="-120"/>
+              </a:rPr>
+              <a:t>Orchestrator</a:t>
+            </a:r>
+            <a:endParaRPr lang="en-US" sz="1100" dirty="0"/>
+          </a:p>
+        </p:txBody>
+      </p:sp>
+      <p:sp>
+        <p:nvSpPr>
+          <p:cNvPr id="20" name="Text 18"/>
+          <p:cNvSpPr/>
+          <p:nvPr/>
+        </p:nvSpPr>
+        <p:spPr>
+          <a:xfrm>
+            <a:off x="7690104" y="2011680"/>
+            <a:ext cx="73152" cy="640080"/>
+          </a:xfrm>
+          <a:prstGeom prst="rect">
+            <a:avLst/>
+          </a:prstGeom>
+          <a:noFill/>
+          <a:ln/>
+        </p:spPr>
+        <p:txBody>
+          <a:bodyPr wrap="square" lIns="0" tIns="0" rIns="0" bIns="0" rtlCol="0" anchor="ctr"/>
+          <a:lstStyle/>
+          <a:p>
+            <a:pPr algn="ctr" indent="0" marL="0">
+              <a:buNone/>
+            </a:pPr>
+            <a:r>
+              <a:rPr lang="en-US" sz="1100" dirty="0">
+                <a:solidFill>
+                  <a:srgbClr val="8B95A5"/>
+                </a:solidFill>
+                <a:latin typeface="Verdana" pitchFamily="34" charset="0"/>
+                <a:ea typeface="Verdana" pitchFamily="34" charset="-122"/>
+                <a:cs typeface="Verdana" pitchFamily="34" charset="-120"/>
+              </a:rPr>
+              <a:t>→</a:t>
+            </a:r>
+            <a:endParaRPr lang="en-US" sz="1100" dirty="0"/>
+          </a:p>
+        </p:txBody>
+      </p:sp>
+      <p:sp>
+        <p:nvSpPr>
+          <p:cNvPr id="21" name="Shape 19"/>
+          <p:cNvSpPr/>
+          <p:nvPr/>
+        </p:nvSpPr>
+        <p:spPr>
+          <a:xfrm>
+            <a:off x="7763256" y="2011680"/>
+            <a:ext cx="1188720" cy="640080"/>
+          </a:xfrm>
+          <a:prstGeom prst="roundRect">
+            <a:avLst>
+              <a:gd name="adj" fmla="val 11429"/>
+            </a:avLst>
+          </a:prstGeom>
+          <a:solidFill>
+            <a:srgbClr val="0A2540">
+              <a:alpha val="50000"/>
+            </a:srgbClr>
+          </a:solidFill>
+          <a:ln w="19050">
+            <a:solidFill>
+              <a:srgbClr val="8B95A5"/>
+            </a:solidFill>
+            <a:prstDash val="dash"/>
+          </a:ln>
+        </p:spPr>
+      </p:sp>
+      <p:sp>
+        <p:nvSpPr>
+          <p:cNvPr id="22" name="Text 20"/>
+          <p:cNvSpPr/>
+          <p:nvPr/>
+        </p:nvSpPr>
+        <p:spPr>
+          <a:xfrm>
+            <a:off x="7763256" y="2011680"/>
+            <a:ext cx="1188720" cy="640080"/>
+          </a:xfrm>
+          <a:prstGeom prst="rect">
+            <a:avLst/>
+          </a:prstGeom>
+          <a:noFill/>
+          <a:ln/>
+        </p:spPr>
+        <p:txBody>
+          <a:bodyPr wrap="square" lIns="0" tIns="0" rIns="0" bIns="0" rtlCol="0" anchor="ctr">
+            <a:normAutofit/>
+          </a:bodyPr>
+          <a:lstStyle/>
+          <a:p>
+            <a:pPr algn="ctr" indent="0" marL="0">
+              <a:buNone/>
+            </a:pPr>
+            <a:r>
+              <a:rPr lang="en-US" sz="1100" b="1" dirty="0">
+                <a:solidFill>
+                  <a:srgbClr val="8B95A5"/>
+                </a:solidFill>
+                <a:latin typeface="Verdana" pitchFamily="34" charset="0"/>
+                <a:ea typeface="Verdana" pitchFamily="34" charset="-122"/>
+                <a:cs typeface="Verdana" pitchFamily="34" charset="-120"/>
+              </a:rPr>
+              <a:t>Builder</a:t>
+            </a:r>
+            <a:endParaRPr lang="en-US" sz="1100" dirty="0"/>
+          </a:p>
+        </p:txBody>
+      </p:sp>
+      <p:sp>
+        <p:nvSpPr>
+          <p:cNvPr id="23" name="Text 21"/>
+          <p:cNvSpPr/>
+          <p:nvPr/>
+        </p:nvSpPr>
+        <p:spPr>
+          <a:xfrm>
+            <a:off x="914400" y="3108960"/>
+            <a:ext cx="7315200" cy="914400"/>
+          </a:xfrm>
+          <a:prstGeom prst="rect">
+            <a:avLst/>
+          </a:prstGeom>
+          <a:noFill/>
+          <a:ln/>
+        </p:spPr>
+        <p:txBody>
+          <a:bodyPr wrap="square" lIns="0" tIns="0" rIns="0" bIns="0" rtlCol="0" anchor="ctr"/>
+          <a:lstStyle/>
+          <a:p>
+            <a:pPr algn="ctr" indent="0" marL="0">
+              <a:buNone/>
+            </a:pPr>
+            <a:r>
+              <a:rPr lang="en-US" sz="2400" b="1" dirty="0">
+                <a:solidFill>
+                  <a:srgbClr val="635BFF"/>
+                </a:solidFill>
+                <a:latin typeface="Georgia" pitchFamily="34" charset="0"/>
+                <a:ea typeface="Georgia" pitchFamily="34" charset="-122"/>
+                <a:cs typeface="Georgia" pitchFamily="34" charset="-120"/>
+              </a:rPr>
+              <a:t>You started as an Explorer.</a:t>
+            </a:r>
+            <a:endParaRPr lang="en-US" sz="2400" dirty="0"/>
+          </a:p>
+          <a:p>
+            <a:pPr algn="ctr" indent="0" marL="0">
+              <a:buNone/>
+            </a:pPr>
+            <a:r>
+              <a:rPr lang="en-US" sz="2400" b="1" dirty="0">
+                <a:solidFill>
+                  <a:srgbClr val="635BFF"/>
+                </a:solidFill>
+                <a:latin typeface="Georgia" pitchFamily="34" charset="0"/>
+                <a:ea typeface="Georgia" pitchFamily="34" charset="-122"/>
+                <a:cs typeface="Georgia" pitchFamily="34" charset="-120"/>
+              </a:rPr>
+              <a:t>You’re now an Orchestrator.</a:t>
+            </a:r>
+            <a:endParaRPr lang="en-US" sz="2400" dirty="0"/>
+          </a:p>
+        </p:txBody>
+      </p:sp>
+    </p:spTree>
+  </p:cSld>
+  <p:clrMapOvr>
+    <a:masterClrMapping/>
+  </p:clrMapOvr>
+</p:sld>
+</file>
+
+<file path=ppt/slides/slide27.xml><?xml version="1.0" encoding="utf-8"?>
+<p:sld xmlns:a="http://schemas.openxmlformats.org/drawingml/2006/main" xmlns:r="http://schemas.openxmlformats.org/officeDocument/2006/relationships" xmlns:p="http://schemas.openxmlformats.org/presentationml/2006/main">
+  <p:cSld name="Slide 27">
+    <p:bg>
+      <p:bgPr>
+        <a:solidFill>
+          <a:srgbClr val="0A2540"/>
+        </a:solidFill>
+      </p:bgPr>
+    </p:bg>
+    <p:spTree>
+      <p:nvGrpSpPr>
+        <p:cNvPr id="1" name=""/>
+        <p:cNvGrpSpPr/>
+        <p:nvPr/>
+      </p:nvGrpSpPr>
+      <p:grpSpPr>
+        <a:xfrm>
+          <a:off x="0" y="0"/>
+          <a:ext cx="0" cy="0"/>
+          <a:chOff x="0" y="0"/>
+          <a:chExt cx="0" cy="0"/>
+        </a:xfrm>
+      </p:grpSpPr>
+      <p:sp>
+        <p:nvSpPr>
+          <p:cNvPr id="2" name="Shape 0"/>
+          <p:cNvSpPr/>
+          <p:nvPr/>
+        </p:nvSpPr>
+        <p:spPr>
+          <a:xfrm>
+            <a:off x="4572000" y="2286000"/>
+            <a:ext cx="7315200" cy="5486400"/>
+          </a:xfrm>
+          <a:prstGeom prst="ellipse">
+            <a:avLst/>
+          </a:prstGeom>
+          <a:solidFill>
+            <a:srgbClr val="635BFF">
+              <a:alpha val="4000"/>
+            </a:srgbClr>
+          </a:solidFill>
+          <a:ln/>
+        </p:spPr>
+      </p:sp>
+      <p:sp>
+        <p:nvSpPr>
+          <p:cNvPr id="3" name="Text 1"/>
+          <p:cNvSpPr/>
+          <p:nvPr/>
+        </p:nvSpPr>
+        <p:spPr>
+          <a:xfrm>
             <a:off x="914400" y="1097280"/>
             <a:ext cx="7315200" cy="2560320"/>
           </a:xfrm>
@@ -7545,7 +8339,9 @@
           <a:ln/>
         </p:spPr>
         <p:txBody>
-          <a:bodyPr wrap="square" lIns="0" tIns="0" rIns="0" bIns="0" rtlCol="0" anchor="ctr"/>
+          <a:bodyPr wrap="square" lIns="0" tIns="0" rIns="0" bIns="0" rtlCol="0" anchor="ctr">
+            <a:normAutofit/>
+          </a:bodyPr>
           <a:lstStyle/>
           <a:p>
             <a:pPr algn="ctr" indent="0" marL="0">
@@ -7645,7 +8441,9 @@
           <a:ln/>
         </p:spPr>
         <p:txBody>
-          <a:bodyPr wrap="square" lIns="0" tIns="0" rIns="0" bIns="0" rtlCol="0" anchor="ctr"/>
+          <a:bodyPr wrap="square" lIns="0" tIns="0" rIns="0" bIns="0" rtlCol="0" anchor="ctr">
+            <a:normAutofit/>
+          </a:bodyPr>
           <a:lstStyle/>
           <a:p>
             <a:pPr algn="ctr" indent="0" marL="0">
@@ -7745,7 +8543,9 @@
           <a:ln/>
         </p:spPr>
         <p:txBody>
-          <a:bodyPr wrap="square" lIns="0" tIns="0" rIns="0" bIns="0" rtlCol="0" anchor="ctr"/>
+          <a:bodyPr wrap="square" lIns="0" tIns="0" rIns="0" bIns="0" rtlCol="0" anchor="ctr">
+            <a:normAutofit/>
+          </a:bodyPr>
           <a:lstStyle/>
           <a:p>
             <a:pPr algn="ctr" indent="0" marL="0">
@@ -8090,7 +8890,7 @@
                 <a:ea typeface="Verdana" pitchFamily="34" charset="-122"/>
                 <a:cs typeface="Verdana" pitchFamily="34" charset="-120"/>
               </a:rPr>
-              <a:t>Agent retrieves</a:t>
+              <a:t>Claude retrieves</a:t>
             </a:r>
             <a:endParaRPr lang="en-US" sz="1800" dirty="0"/>
           </a:p>
@@ -8114,7 +8914,9 @@
           <a:ln/>
         </p:spPr>
         <p:txBody>
-          <a:bodyPr wrap="square" lIns="0" tIns="0" rIns="0" bIns="0" rtlCol="0" anchor="ctr"/>
+          <a:bodyPr wrap="square" lIns="0" tIns="0" rIns="0" bIns="0" rtlCol="0" anchor="ctr">
+            <a:normAutofit/>
+          </a:bodyPr>
           <a:lstStyle/>
           <a:p>
             <a:pPr algn="ctr" indent="0" marL="0">
@@ -8195,7 +8997,7 @@
                 <a:ea typeface="Verdana" pitchFamily="34" charset="-122"/>
                 <a:cs typeface="Verdana" pitchFamily="34" charset="-120"/>
               </a:rPr>
-              <a:t>Agent identifies</a:t>
+              <a:t>Claude identifies</a:t>
             </a:r>
             <a:endParaRPr lang="en-US" sz="1800" dirty="0"/>
           </a:p>
@@ -8219,7 +9021,9 @@
           <a:ln/>
         </p:spPr>
         <p:txBody>
-          <a:bodyPr wrap="square" lIns="0" tIns="0" rIns="0" bIns="0" rtlCol="0" anchor="ctr"/>
+          <a:bodyPr wrap="square" lIns="0" tIns="0" rIns="0" bIns="0" rtlCol="0" anchor="ctr">
+            <a:normAutofit/>
+          </a:bodyPr>
           <a:lstStyle/>
           <a:p>
             <a:pPr algn="ctr" indent="0" marL="0">
@@ -8300,7 +9104,7 @@
                 <a:ea typeface="Verdana" pitchFamily="34" charset="-122"/>
                 <a:cs typeface="Verdana" pitchFamily="34" charset="-120"/>
               </a:rPr>
-              <a:t>Agent creates</a:t>
+              <a:t>Claude creates</a:t>
             </a:r>
             <a:endParaRPr lang="en-US" sz="1800" dirty="0"/>
           </a:p>
@@ -8324,7 +9128,9 @@
           <a:ln/>
         </p:spPr>
         <p:txBody>
-          <a:bodyPr wrap="square" lIns="0" tIns="0" rIns="0" bIns="0" rtlCol="0" anchor="ctr"/>
+          <a:bodyPr wrap="square" lIns="0" tIns="0" rIns="0" bIns="0" rtlCol="0" anchor="ctr">
+            <a:normAutofit/>
+          </a:bodyPr>
           <a:lstStyle/>
           <a:p>
             <a:pPr algn="ctr" indent="0" marL="0">
@@ -8507,8 +9313,8 @@
         </p:nvSpPr>
         <p:spPr>
           <a:xfrm>
-            <a:off x="914400" y="914400"/>
-            <a:ext cx="7315200" cy="3291840"/>
+            <a:off x="731520" y="457200"/>
+            <a:ext cx="7680960" cy="914400"/>
           </a:xfrm>
           <a:prstGeom prst="rect">
             <a:avLst/>
@@ -8526,39 +9332,122 @@
             <a:r>
               <a:rPr lang="en-US" sz="3600" b="1" dirty="0">
                 <a:solidFill>
-                  <a:srgbClr val="635BFF"/>
+                  <a:srgbClr val="FFFFFF"/>
                 </a:solidFill>
                 <a:latin typeface="Georgia" pitchFamily="34" charset="0"/>
                 <a:ea typeface="Georgia" pitchFamily="34" charset="-122"/>
                 <a:cs typeface="Georgia" pitchFamily="34" charset="-120"/>
               </a:rPr>
-              <a:t>Open ChatGPT. Upload a document.</a:t>
+              <a:t>Connect Gmail to Claude</a:t>
             </a:r>
             <a:endParaRPr lang="en-US" sz="3600" dirty="0"/>
           </a:p>
-          <a:p>
-            <a:pPr algn="ctr" indent="0" marL="0">
-              <a:buNone/>
-            </a:pPr>
-            <a:r>
-              <a:rPr lang="en-US" sz="2200" i="1" dirty="0">
-                <a:solidFill>
-                  <a:srgbClr val="8B95A5"/>
+        </p:txBody>
+      </p:sp>
+      <p:sp>
+        <p:nvSpPr>
+          <p:cNvPr id="4" name="Text 2"/>
+          <p:cNvSpPr/>
+          <p:nvPr/>
+        </p:nvSpPr>
+        <p:spPr>
+          <a:xfrm>
+            <a:off x="1828800" y="1645920"/>
+            <a:ext cx="548640" cy="457200"/>
+          </a:xfrm>
+          <a:prstGeom prst="rect">
+            <a:avLst/>
+          </a:prstGeom>
+          <a:noFill/>
+          <a:ln/>
+        </p:spPr>
+        <p:txBody>
+          <a:bodyPr wrap="square" lIns="0" tIns="0" rIns="0" bIns="0" rtlCol="0" anchor="ctr"/>
+          <a:lstStyle/>
+          <a:p>
+            <a:pPr algn="ctr" indent="0" marL="0">
+              <a:buNone/>
+            </a:pPr>
+            <a:r>
+              <a:rPr lang="en-US" sz="2400" b="1" dirty="0">
+                <a:solidFill>
+                  <a:srgbClr val="635BFF"/>
+                </a:solidFill>
+                <a:latin typeface="Georgia" pitchFamily="34" charset="0"/>
+                <a:ea typeface="Georgia" pitchFamily="34" charset="-122"/>
+                <a:cs typeface="Georgia" pitchFamily="34" charset="-120"/>
+              </a:rPr>
+              <a:t>1</a:t>
+            </a:r>
+            <a:endParaRPr lang="en-US" sz="2400" dirty="0"/>
+          </a:p>
+        </p:txBody>
+      </p:sp>
+      <p:sp>
+        <p:nvSpPr>
+          <p:cNvPr id="5" name="Text 3"/>
+          <p:cNvSpPr/>
+          <p:nvPr/>
+        </p:nvSpPr>
+        <p:spPr>
+          <a:xfrm>
+            <a:off x="2560320" y="1645920"/>
+            <a:ext cx="4572000" cy="457200"/>
+          </a:xfrm>
+          <a:prstGeom prst="rect">
+            <a:avLst/>
+          </a:prstGeom>
+          <a:noFill/>
+          <a:ln/>
+        </p:spPr>
+        <p:txBody>
+          <a:bodyPr wrap="square" lIns="0" tIns="0" rIns="0" bIns="0" rtlCol="0" anchor="ctr"/>
+          <a:lstStyle/>
+          <a:p>
+            <a:pPr algn="l" indent="0" marL="0">
+              <a:buNone/>
+            </a:pPr>
+            <a:r>
+              <a:rPr lang="en-US" sz="2200" dirty="0">
+                <a:solidFill>
+                  <a:srgbClr val="EDEDED"/>
                 </a:solidFill>
                 <a:latin typeface="Verdana" pitchFamily="34" charset="0"/>
                 <a:ea typeface="Verdana" pitchFamily="34" charset="-122"/>
                 <a:cs typeface="Verdana" pitchFamily="34" charset="-120"/>
               </a:rPr>
-              <a:t>Paperclip icon or drag and drop.</a:t>
-            </a:r>
-            <a:endParaRPr lang="en-US" sz="3600" dirty="0"/>
-          </a:p>
-          <a:p>
-            <a:pPr algn="ctr" indent="0" marL="0">
-              <a:buNone/>
-            </a:pPr>
-            <a:r>
-              <a:rPr lang="en-US" sz="2800" b="1" dirty="0">
+              <a:t>Click  +  in the chat input</a:t>
+            </a:r>
+            <a:endParaRPr lang="en-US" sz="2200" dirty="0"/>
+          </a:p>
+        </p:txBody>
+      </p:sp>
+      <p:sp>
+        <p:nvSpPr>
+          <p:cNvPr id="6" name="Text 4"/>
+          <p:cNvSpPr/>
+          <p:nvPr/>
+        </p:nvSpPr>
+        <p:spPr>
+          <a:xfrm>
+            <a:off x="1828800" y="2286000"/>
+            <a:ext cx="548640" cy="457200"/>
+          </a:xfrm>
+          <a:prstGeom prst="rect">
+            <a:avLst/>
+          </a:prstGeom>
+          <a:noFill/>
+          <a:ln/>
+        </p:spPr>
+        <p:txBody>
+          <a:bodyPr wrap="square" lIns="0" tIns="0" rIns="0" bIns="0" rtlCol="0" anchor="ctr"/>
+          <a:lstStyle/>
+          <a:p>
+            <a:pPr algn="ctr" indent="0" marL="0">
+              <a:buNone/>
+            </a:pPr>
+            <a:r>
+              <a:rPr lang="en-US" sz="2400" b="1" dirty="0">
                 <a:solidFill>
                   <a:srgbClr val="635BFF"/>
                 </a:solidFill>
@@ -8566,9 +9455,204 @@
                 <a:ea typeface="Georgia" pitchFamily="34" charset="-122"/>
                 <a:cs typeface="Georgia" pitchFamily="34" charset="-120"/>
               </a:rPr>
-              <a:t>"Read this document and write a one-paragraph summary for a non-technical audience."</a:t>
-            </a:r>
-            <a:endParaRPr lang="en-US" sz="3600" dirty="0"/>
+              <a:t>2</a:t>
+            </a:r>
+            <a:endParaRPr lang="en-US" sz="2400" dirty="0"/>
+          </a:p>
+        </p:txBody>
+      </p:sp>
+      <p:sp>
+        <p:nvSpPr>
+          <p:cNvPr id="7" name="Text 5"/>
+          <p:cNvSpPr/>
+          <p:nvPr/>
+        </p:nvSpPr>
+        <p:spPr>
+          <a:xfrm>
+            <a:off x="2560320" y="2286000"/>
+            <a:ext cx="4572000" cy="457200"/>
+          </a:xfrm>
+          <a:prstGeom prst="rect">
+            <a:avLst/>
+          </a:prstGeom>
+          <a:noFill/>
+          <a:ln/>
+        </p:spPr>
+        <p:txBody>
+          <a:bodyPr wrap="square" lIns="0" tIns="0" rIns="0" bIns="0" rtlCol="0" anchor="ctr"/>
+          <a:lstStyle/>
+          <a:p>
+            <a:pPr algn="l" indent="0" marL="0">
+              <a:buNone/>
+            </a:pPr>
+            <a:r>
+              <a:rPr lang="en-US" sz="2200" dirty="0">
+                <a:solidFill>
+                  <a:srgbClr val="EDEDED"/>
+                </a:solidFill>
+                <a:latin typeface="Verdana" pitchFamily="34" charset="0"/>
+                <a:ea typeface="Verdana" pitchFamily="34" charset="-122"/>
+                <a:cs typeface="Verdana" pitchFamily="34" charset="-120"/>
+              </a:rPr>
+              <a:t>Hover Connectors</a:t>
+            </a:r>
+            <a:endParaRPr lang="en-US" sz="2200" dirty="0"/>
+          </a:p>
+        </p:txBody>
+      </p:sp>
+      <p:sp>
+        <p:nvSpPr>
+          <p:cNvPr id="8" name="Text 6"/>
+          <p:cNvSpPr/>
+          <p:nvPr/>
+        </p:nvSpPr>
+        <p:spPr>
+          <a:xfrm>
+            <a:off x="1828800" y="2926080"/>
+            <a:ext cx="548640" cy="457200"/>
+          </a:xfrm>
+          <a:prstGeom prst="rect">
+            <a:avLst/>
+          </a:prstGeom>
+          <a:noFill/>
+          <a:ln/>
+        </p:spPr>
+        <p:txBody>
+          <a:bodyPr wrap="square" lIns="0" tIns="0" rIns="0" bIns="0" rtlCol="0" anchor="ctr"/>
+          <a:lstStyle/>
+          <a:p>
+            <a:pPr algn="ctr" indent="0" marL="0">
+              <a:buNone/>
+            </a:pPr>
+            <a:r>
+              <a:rPr lang="en-US" sz="2400" b="1" dirty="0">
+                <a:solidFill>
+                  <a:srgbClr val="635BFF"/>
+                </a:solidFill>
+                <a:latin typeface="Georgia" pitchFamily="34" charset="0"/>
+                <a:ea typeface="Georgia" pitchFamily="34" charset="-122"/>
+                <a:cs typeface="Georgia" pitchFamily="34" charset="-120"/>
+              </a:rPr>
+              <a:t>3</a:t>
+            </a:r>
+            <a:endParaRPr lang="en-US" sz="2400" dirty="0"/>
+          </a:p>
+        </p:txBody>
+      </p:sp>
+      <p:sp>
+        <p:nvSpPr>
+          <p:cNvPr id="9" name="Text 7"/>
+          <p:cNvSpPr/>
+          <p:nvPr/>
+        </p:nvSpPr>
+        <p:spPr>
+          <a:xfrm>
+            <a:off x="2560320" y="2926080"/>
+            <a:ext cx="4572000" cy="457200"/>
+          </a:xfrm>
+          <a:prstGeom prst="rect">
+            <a:avLst/>
+          </a:prstGeom>
+          <a:noFill/>
+          <a:ln/>
+        </p:spPr>
+        <p:txBody>
+          <a:bodyPr wrap="square" lIns="0" tIns="0" rIns="0" bIns="0" rtlCol="0" anchor="ctr"/>
+          <a:lstStyle/>
+          <a:p>
+            <a:pPr algn="l" indent="0" marL="0">
+              <a:buNone/>
+            </a:pPr>
+            <a:r>
+              <a:rPr lang="en-US" sz="2200" dirty="0">
+                <a:solidFill>
+                  <a:srgbClr val="EDEDED"/>
+                </a:solidFill>
+                <a:latin typeface="Verdana" pitchFamily="34" charset="0"/>
+                <a:ea typeface="Verdana" pitchFamily="34" charset="-122"/>
+                <a:cs typeface="Verdana" pitchFamily="34" charset="-120"/>
+              </a:rPr>
+              <a:t>Toggle Gmail on</a:t>
+            </a:r>
+            <a:endParaRPr lang="en-US" sz="2200" dirty="0"/>
+          </a:p>
+        </p:txBody>
+      </p:sp>
+      <p:sp>
+        <p:nvSpPr>
+          <p:cNvPr id="10" name="Text 8"/>
+          <p:cNvSpPr/>
+          <p:nvPr/>
+        </p:nvSpPr>
+        <p:spPr>
+          <a:xfrm>
+            <a:off x="1828800" y="3566160"/>
+            <a:ext cx="548640" cy="457200"/>
+          </a:xfrm>
+          <a:prstGeom prst="rect">
+            <a:avLst/>
+          </a:prstGeom>
+          <a:noFill/>
+          <a:ln/>
+        </p:spPr>
+        <p:txBody>
+          <a:bodyPr wrap="square" lIns="0" tIns="0" rIns="0" bIns="0" rtlCol="0" anchor="ctr"/>
+          <a:lstStyle/>
+          <a:p>
+            <a:pPr algn="ctr" indent="0" marL="0">
+              <a:buNone/>
+            </a:pPr>
+            <a:r>
+              <a:rPr lang="en-US" sz="2400" b="1" dirty="0">
+                <a:solidFill>
+                  <a:srgbClr val="635BFF"/>
+                </a:solidFill>
+                <a:latin typeface="Georgia" pitchFamily="34" charset="0"/>
+                <a:ea typeface="Georgia" pitchFamily="34" charset="-122"/>
+                <a:cs typeface="Georgia" pitchFamily="34" charset="-120"/>
+              </a:rPr>
+              <a:t>4</a:t>
+            </a:r>
+            <a:endParaRPr lang="en-US" sz="2400" dirty="0"/>
+          </a:p>
+        </p:txBody>
+      </p:sp>
+      <p:sp>
+        <p:nvSpPr>
+          <p:cNvPr id="11" name="Text 9"/>
+          <p:cNvSpPr/>
+          <p:nvPr/>
+        </p:nvSpPr>
+        <p:spPr>
+          <a:xfrm>
+            <a:off x="2560320" y="3566160"/>
+            <a:ext cx="4572000" cy="457200"/>
+          </a:xfrm>
+          <a:prstGeom prst="rect">
+            <a:avLst/>
+          </a:prstGeom>
+          <a:noFill/>
+          <a:ln/>
+        </p:spPr>
+        <p:txBody>
+          <a:bodyPr wrap="square" lIns="0" tIns="0" rIns="0" bIns="0" rtlCol="0" anchor="ctr"/>
+          <a:lstStyle/>
+          <a:p>
+            <a:pPr algn="l" indent="0" marL="0">
+              <a:buNone/>
+            </a:pPr>
+            <a:r>
+              <a:rPr lang="en-US" sz="2200" dirty="0">
+                <a:solidFill>
+                  <a:srgbClr val="EDEDED"/>
+                </a:solidFill>
+                <a:latin typeface="Verdana" pitchFamily="34" charset="0"/>
+                <a:ea typeface="Verdana" pitchFamily="34" charset="-122"/>
+                <a:cs typeface="Verdana" pitchFamily="34" charset="-120"/>
+              </a:rPr>
+              <a:t>Authenticate with Google</a:t>
+            </a:r>
+            <a:endParaRPr lang="en-US" sz="2200" dirty="0"/>
           </a:p>
         </p:txBody>
       </p:sp>
@@ -8634,8 +9718,8 @@
         </p:nvSpPr>
         <p:spPr>
           <a:xfrm>
-            <a:off x="731520" y="365760"/>
-            <a:ext cx="7680960" cy="1097280"/>
+            <a:off x="914400" y="914400"/>
+            <a:ext cx="7315200" cy="3291840"/>
           </a:xfrm>
           <a:prstGeom prst="rect">
             <a:avLst/>
@@ -8653,13 +9737,13 @@
             <a:r>
               <a:rPr lang="en-US" sz="3600" b="1" dirty="0">
                 <a:solidFill>
-                  <a:srgbClr val="FFFFFF"/>
+                  <a:srgbClr val="635BFF"/>
                 </a:solidFill>
                 <a:latin typeface="Georgia" pitchFamily="34" charset="0"/>
                 <a:ea typeface="Georgia" pitchFamily="34" charset="-122"/>
                 <a:cs typeface="Georgia" pitchFamily="34" charset="-120"/>
               </a:rPr>
-              <a:t>An agent is only as useful</a:t>
+              <a:t>"Summarise my latest unread email"</a:t>
             </a:r>
             <a:endParaRPr lang="en-US" sz="3600" dirty="0"/>
           </a:p>
@@ -8668,395 +9752,34 @@
               <a:buNone/>
             </a:pPr>
             <a:r>
+              <a:rPr lang="en-US" sz="2200" i="1" dirty="0">
+                <a:solidFill>
+                  <a:srgbClr val="8B95A5"/>
+                </a:solidFill>
+                <a:latin typeface="Verdana" pitchFamily="34" charset="0"/>
+                <a:ea typeface="Verdana" pitchFamily="34" charset="-122"/>
+                <a:cs typeface="Verdana" pitchFamily="34" charset="-120"/>
+              </a:rPr>
+              <a:t>then</a:t>
+            </a:r>
+            <a:endParaRPr lang="en-US" sz="3600" dirty="0"/>
+          </a:p>
+          <a:p>
+            <a:pPr algn="ctr" indent="0" marL="0">
+              <a:buNone/>
+            </a:pPr>
+            <a:r>
               <a:rPr lang="en-US" sz="3600" b="1" dirty="0">
                 <a:solidFill>
-                  <a:srgbClr val="FFFFFF"/>
+                  <a:srgbClr val="635BFF"/>
                 </a:solidFill>
                 <a:latin typeface="Georgia" pitchFamily="34" charset="0"/>
                 <a:ea typeface="Georgia" pitchFamily="34" charset="-122"/>
                 <a:cs typeface="Georgia" pitchFamily="34" charset="-120"/>
               </a:rPr>
-              <a:t>as what it can reach</a:t>
+              <a:t>"Search the web for more on this"</a:t>
             </a:r>
             <a:endParaRPr lang="en-US" sz="3600" dirty="0"/>
-          </a:p>
-        </p:txBody>
-      </p:sp>
-      <p:pic>
-        <p:nvPicPr>
-          <p:cNvPr id="4" name="Image 0" descr="/Users/michaelengland/Developer/michaelengland/ai-best-practices/decks/ai-best-practices/icons/envelopeW.png">    </p:cNvPr>
-          <p:cNvPicPr>
-            <a:picLocks noChangeAspect="1"/>
-          </p:cNvPicPr>
-          <p:nvPr/>
-        </p:nvPicPr>
-        <p:blipFill>
-          <a:blip r:embed="rId1"/>
-          <a:stretch>
-            <a:fillRect/>
-          </a:stretch>
-        </p:blipFill>
-        <p:spPr>
-          <a:xfrm>
-            <a:off x="1005840" y="1645920"/>
-            <a:ext cx="731520" cy="731520"/>
-          </a:xfrm>
-          <a:prstGeom prst="rect">
-            <a:avLst/>
-          </a:prstGeom>
-        </p:spPr>
-      </p:pic>
-      <p:sp>
-        <p:nvSpPr>
-          <p:cNvPr id="5" name="Text 2"/>
-          <p:cNvSpPr/>
-          <p:nvPr/>
-        </p:nvSpPr>
-        <p:spPr>
-          <a:xfrm>
-            <a:off x="731520" y="2560320"/>
-            <a:ext cx="1280160" cy="548640"/>
-          </a:xfrm>
-          <a:prstGeom prst="rect">
-            <a:avLst/>
-          </a:prstGeom>
-          <a:noFill/>
-          <a:ln/>
-        </p:spPr>
-        <p:txBody>
-          <a:bodyPr wrap="square" lIns="0" tIns="0" rIns="0" bIns="0" rtlCol="0" anchor="t"/>
-          <a:lstStyle/>
-          <a:p>
-            <a:pPr algn="ctr" indent="0" marL="0">
-              <a:buNone/>
-            </a:pPr>
-            <a:r>
-              <a:rPr lang="en-US" sz="2000" dirty="0">
-                <a:solidFill>
-                  <a:srgbClr val="8B95A5"/>
-                </a:solidFill>
-                <a:latin typeface="Verdana" pitchFamily="34" charset="0"/>
-                <a:ea typeface="Verdana" pitchFamily="34" charset="-122"/>
-                <a:cs typeface="Verdana" pitchFamily="34" charset="-120"/>
-              </a:rPr>
-              <a:t>Email</a:t>
-            </a:r>
-            <a:endParaRPr lang="en-US" sz="2000" dirty="0"/>
-          </a:p>
-        </p:txBody>
-      </p:sp>
-      <p:pic>
-        <p:nvPicPr>
-          <p:cNvPr id="6" name="Image 1" descr="/Users/michaelengland/Developer/michaelengland/ai-best-practices/decks/ai-best-practices/icons/calendarW.png">    </p:cNvPr>
-          <p:cNvPicPr>
-            <a:picLocks noChangeAspect="1"/>
-          </p:cNvPicPr>
-          <p:nvPr/>
-        </p:nvPicPr>
-        <p:blipFill>
-          <a:blip r:embed="rId2"/>
-          <a:stretch>
-            <a:fillRect/>
-          </a:stretch>
-        </p:blipFill>
-        <p:spPr>
-          <a:xfrm>
-            <a:off x="2286000" y="1645920"/>
-            <a:ext cx="731520" cy="731520"/>
-          </a:xfrm>
-          <a:prstGeom prst="rect">
-            <a:avLst/>
-          </a:prstGeom>
-        </p:spPr>
-      </p:pic>
-      <p:sp>
-        <p:nvSpPr>
-          <p:cNvPr id="7" name="Text 3"/>
-          <p:cNvSpPr/>
-          <p:nvPr/>
-        </p:nvSpPr>
-        <p:spPr>
-          <a:xfrm>
-            <a:off x="2011680" y="2560320"/>
-            <a:ext cx="1280160" cy="548640"/>
-          </a:xfrm>
-          <a:prstGeom prst="rect">
-            <a:avLst/>
-          </a:prstGeom>
-          <a:noFill/>
-          <a:ln/>
-        </p:spPr>
-        <p:txBody>
-          <a:bodyPr wrap="square" lIns="0" tIns="0" rIns="0" bIns="0" rtlCol="0" anchor="t"/>
-          <a:lstStyle/>
-          <a:p>
-            <a:pPr algn="ctr" indent="0" marL="0">
-              <a:buNone/>
-            </a:pPr>
-            <a:r>
-              <a:rPr lang="en-US" sz="2000" dirty="0">
-                <a:solidFill>
-                  <a:srgbClr val="8B95A5"/>
-                </a:solidFill>
-                <a:latin typeface="Verdana" pitchFamily="34" charset="0"/>
-                <a:ea typeface="Verdana" pitchFamily="34" charset="-122"/>
-                <a:cs typeface="Verdana" pitchFamily="34" charset="-120"/>
-              </a:rPr>
-              <a:t>Calendar</a:t>
-            </a:r>
-            <a:endParaRPr lang="en-US" sz="2000" dirty="0"/>
-          </a:p>
-        </p:txBody>
-      </p:sp>
-      <p:pic>
-        <p:nvPicPr>
-          <p:cNvPr id="8" name="Image 2" descr="/Users/michaelengland/Developer/michaelengland/ai-best-practices/decks/ai-best-practices/icons/fileW.png">    </p:cNvPr>
-          <p:cNvPicPr>
-            <a:picLocks noChangeAspect="1"/>
-          </p:cNvPicPr>
-          <p:nvPr/>
-        </p:nvPicPr>
-        <p:blipFill>
-          <a:blip r:embed="rId3"/>
-          <a:stretch>
-            <a:fillRect/>
-          </a:stretch>
-        </p:blipFill>
-        <p:spPr>
-          <a:xfrm>
-            <a:off x="3566160" y="1645920"/>
-            <a:ext cx="731520" cy="731520"/>
-          </a:xfrm>
-          <a:prstGeom prst="rect">
-            <a:avLst/>
-          </a:prstGeom>
-        </p:spPr>
-      </p:pic>
-      <p:sp>
-        <p:nvSpPr>
-          <p:cNvPr id="9" name="Text 4"/>
-          <p:cNvSpPr/>
-          <p:nvPr/>
-        </p:nvSpPr>
-        <p:spPr>
-          <a:xfrm>
-            <a:off x="3291840" y="2560320"/>
-            <a:ext cx="1280160" cy="548640"/>
-          </a:xfrm>
-          <a:prstGeom prst="rect">
-            <a:avLst/>
-          </a:prstGeom>
-          <a:noFill/>
-          <a:ln/>
-        </p:spPr>
-        <p:txBody>
-          <a:bodyPr wrap="square" lIns="0" tIns="0" rIns="0" bIns="0" rtlCol="0" anchor="t"/>
-          <a:lstStyle/>
-          <a:p>
-            <a:pPr algn="ctr" indent="0" marL="0">
-              <a:buNone/>
-            </a:pPr>
-            <a:r>
-              <a:rPr lang="en-US" sz="2000" dirty="0">
-                <a:solidFill>
-                  <a:srgbClr val="8B95A5"/>
-                </a:solidFill>
-                <a:latin typeface="Verdana" pitchFamily="34" charset="0"/>
-                <a:ea typeface="Verdana" pitchFamily="34" charset="-122"/>
-                <a:cs typeface="Verdana" pitchFamily="34" charset="-120"/>
-              </a:rPr>
-              <a:t>Files</a:t>
-            </a:r>
-            <a:endParaRPr lang="en-US" sz="2000" dirty="0"/>
-          </a:p>
-        </p:txBody>
-      </p:sp>
-      <p:pic>
-        <p:nvPicPr>
-          <p:cNvPr id="10" name="Image 3" descr="/Users/michaelengland/Developer/michaelengland/ai-best-practices/decks/ai-best-practices/icons/puzzleW.png">    </p:cNvPr>
-          <p:cNvPicPr>
-            <a:picLocks noChangeAspect="1"/>
-          </p:cNvPicPr>
-          <p:nvPr/>
-        </p:nvPicPr>
-        <p:blipFill>
-          <a:blip r:embed="rId4"/>
-          <a:stretch>
-            <a:fillRect/>
-          </a:stretch>
-        </p:blipFill>
-        <p:spPr>
-          <a:xfrm>
-            <a:off x="4846320" y="1645920"/>
-            <a:ext cx="731520" cy="731520"/>
-          </a:xfrm>
-          <a:prstGeom prst="rect">
-            <a:avLst/>
-          </a:prstGeom>
-        </p:spPr>
-      </p:pic>
-      <p:sp>
-        <p:nvSpPr>
-          <p:cNvPr id="11" name="Text 5"/>
-          <p:cNvSpPr/>
-          <p:nvPr/>
-        </p:nvSpPr>
-        <p:spPr>
-          <a:xfrm>
-            <a:off x="4572000" y="2560320"/>
-            <a:ext cx="1280160" cy="548640"/>
-          </a:xfrm>
-          <a:prstGeom prst="rect">
-            <a:avLst/>
-          </a:prstGeom>
-          <a:noFill/>
-          <a:ln/>
-        </p:spPr>
-        <p:txBody>
-          <a:bodyPr wrap="square" lIns="0" tIns="0" rIns="0" bIns="0" rtlCol="0" anchor="t"/>
-          <a:lstStyle/>
-          <a:p>
-            <a:pPr algn="ctr" indent="0" marL="0">
-              <a:buNone/>
-            </a:pPr>
-            <a:r>
-              <a:rPr lang="en-US" sz="2000" dirty="0">
-                <a:solidFill>
-                  <a:srgbClr val="8B95A5"/>
-                </a:solidFill>
-                <a:latin typeface="Verdana" pitchFamily="34" charset="0"/>
-                <a:ea typeface="Verdana" pitchFamily="34" charset="-122"/>
-                <a:cs typeface="Verdana" pitchFamily="34" charset="-120"/>
-              </a:rPr>
-              <a:t>Chat</a:t>
-            </a:r>
-            <a:endParaRPr lang="en-US" sz="2000" dirty="0"/>
-          </a:p>
-        </p:txBody>
-      </p:sp>
-      <p:pic>
-        <p:nvPicPr>
-          <p:cNvPr id="12" name="Image 4" descr="/Users/michaelengland/Developer/michaelengland/ai-best-practices/decks/ai-best-practices/icons/globeW.png">    </p:cNvPr>
-          <p:cNvPicPr>
-            <a:picLocks noChangeAspect="1"/>
-          </p:cNvPicPr>
-          <p:nvPr/>
-        </p:nvPicPr>
-        <p:blipFill>
-          <a:blip r:embed="rId5"/>
-          <a:stretch>
-            <a:fillRect/>
-          </a:stretch>
-        </p:blipFill>
-        <p:spPr>
-          <a:xfrm>
-            <a:off x="6126480" y="1645920"/>
-            <a:ext cx="731520" cy="731520"/>
-          </a:xfrm>
-          <a:prstGeom prst="rect">
-            <a:avLst/>
-          </a:prstGeom>
-        </p:spPr>
-      </p:pic>
-      <p:sp>
-        <p:nvSpPr>
-          <p:cNvPr id="13" name="Text 6"/>
-          <p:cNvSpPr/>
-          <p:nvPr/>
-        </p:nvSpPr>
-        <p:spPr>
-          <a:xfrm>
-            <a:off x="5852160" y="2560320"/>
-            <a:ext cx="1280160" cy="548640"/>
-          </a:xfrm>
-          <a:prstGeom prst="rect">
-            <a:avLst/>
-          </a:prstGeom>
-          <a:noFill/>
-          <a:ln/>
-        </p:spPr>
-        <p:txBody>
-          <a:bodyPr wrap="square" lIns="0" tIns="0" rIns="0" bIns="0" rtlCol="0" anchor="t"/>
-          <a:lstStyle/>
-          <a:p>
-            <a:pPr algn="ctr" indent="0" marL="0">
-              <a:buNone/>
-            </a:pPr>
-            <a:r>
-              <a:rPr lang="en-US" sz="2000" dirty="0">
-                <a:solidFill>
-                  <a:srgbClr val="8B95A5"/>
-                </a:solidFill>
-                <a:latin typeface="Verdana" pitchFamily="34" charset="0"/>
-                <a:ea typeface="Verdana" pitchFamily="34" charset="-122"/>
-                <a:cs typeface="Verdana" pitchFamily="34" charset="-120"/>
-              </a:rPr>
-              <a:t>Web</a:t>
-            </a:r>
-            <a:endParaRPr lang="en-US" sz="2000" dirty="0"/>
-          </a:p>
-        </p:txBody>
-      </p:sp>
-      <p:pic>
-        <p:nvPicPr>
-          <p:cNvPr id="14" name="Image 5" descr="/Users/michaelengland/Developer/michaelengland/ai-best-practices/decks/ai-best-practices/icons/arrowW.png">    </p:cNvPr>
-          <p:cNvPicPr>
-            <a:picLocks noChangeAspect="1"/>
-          </p:cNvPicPr>
-          <p:nvPr/>
-        </p:nvPicPr>
-        <p:blipFill>
-          <a:blip r:embed="rId6"/>
-          <a:stretch>
-            <a:fillRect/>
-          </a:stretch>
-        </p:blipFill>
-        <p:spPr>
-          <a:xfrm>
-            <a:off x="7406640" y="1645920"/>
-            <a:ext cx="731520" cy="731520"/>
-          </a:xfrm>
-          <a:prstGeom prst="rect">
-            <a:avLst/>
-          </a:prstGeom>
-        </p:spPr>
-      </p:pic>
-      <p:sp>
-        <p:nvSpPr>
-          <p:cNvPr id="15" name="Text 7"/>
-          <p:cNvSpPr/>
-          <p:nvPr/>
-        </p:nvSpPr>
-        <p:spPr>
-          <a:xfrm>
-            <a:off x="7132320" y="2560320"/>
-            <a:ext cx="1280160" cy="548640"/>
-          </a:xfrm>
-          <a:prstGeom prst="rect">
-            <a:avLst/>
-          </a:prstGeom>
-          <a:noFill/>
-          <a:ln/>
-        </p:spPr>
-        <p:txBody>
-          <a:bodyPr wrap="square" lIns="0" tIns="0" rIns="0" bIns="0" rtlCol="0" anchor="t"/>
-          <a:lstStyle/>
-          <a:p>
-            <a:pPr algn="ctr" indent="0" marL="0">
-              <a:buNone/>
-            </a:pPr>
-            <a:r>
-              <a:rPr lang="en-US" sz="2000" dirty="0">
-                <a:solidFill>
-                  <a:srgbClr val="8B95A5"/>
-                </a:solidFill>
-                <a:latin typeface="Verdana" pitchFamily="34" charset="0"/>
-                <a:ea typeface="Verdana" pitchFamily="34" charset="-122"/>
-                <a:cs typeface="Verdana" pitchFamily="34" charset="-120"/>
-              </a:rPr>
-              <a:t>Custom</a:t>
-            </a:r>
-            <a:endParaRPr lang="en-US" sz="2000" dirty="0"/>
           </a:p>
         </p:txBody>
       </p:sp>
@@ -9122,8 +9845,8 @@
         </p:nvSpPr>
         <p:spPr>
           <a:xfrm>
-            <a:off x="914400" y="914400"/>
-            <a:ext cx="7315200" cy="3291840"/>
+            <a:off x="914400" y="1097280"/>
+            <a:ext cx="7315200" cy="2560320"/>
           </a:xfrm>
           <a:prstGeom prst="rect">
             <a:avLst/>
@@ -9139,51 +9862,51 @@
               <a:buNone/>
             </a:pPr>
             <a:r>
-              <a:rPr lang="en-US" sz="2800" b="1" dirty="0">
-                <a:solidFill>
-                  <a:srgbClr val="635BFF"/>
+              <a:rPr lang="en-US" sz="4400" b="1" dirty="0">
+                <a:solidFill>
+                  <a:srgbClr val="FFFFFF"/>
                 </a:solidFill>
                 <a:latin typeface="Georgia" pitchFamily="34" charset="0"/>
                 <a:ea typeface="Georgia" pitchFamily="34" charset="-122"/>
                 <a:cs typeface="Georgia" pitchFamily="34" charset="-120"/>
               </a:rPr>
-              <a:t>Switch to agent mode:</a:t>
-            </a:r>
-            <a:endParaRPr lang="en-US" sz="2800" dirty="0"/>
-          </a:p>
-          <a:p>
-            <a:pPr algn="ctr" indent="0" marL="0">
-              <a:buNone/>
-            </a:pPr>
-            <a:r>
-              <a:rPr lang="en-US" sz="2200" i="1" dirty="0">
-                <a:solidFill>
-                  <a:srgbClr val="8B95A5"/>
-                </a:solidFill>
-                <a:latin typeface="Verdana" pitchFamily="34" charset="0"/>
-                <a:ea typeface="Verdana" pitchFamily="34" charset="-122"/>
-                <a:cs typeface="Verdana" pitchFamily="34" charset="-120"/>
-              </a:rPr>
-              <a:t>Tools menu → Agent (or type /agent)</a:t>
-            </a:r>
-            <a:endParaRPr lang="en-US" sz="2800" dirty="0"/>
-          </a:p>
-          <a:p>
-            <a:pPr algn="ctr" indent="0" marL="0">
-              <a:buNone/>
-            </a:pPr>
-            <a:r>
-              <a:rPr lang="en-US" sz="2800" b="1" dirty="0">
-                <a:solidFill>
-                  <a:srgbClr val="635BFF"/>
+              <a:t>You didn't open Gmail.</a:t>
+            </a:r>
+            <a:endParaRPr lang="en-US" sz="4400" dirty="0"/>
+          </a:p>
+          <a:p>
+            <a:pPr algn="ctr" indent="0" marL="0">
+              <a:buNone/>
+            </a:pPr>
+            <a:r>
+              <a:rPr lang="en-US" sz="4400" b="1" dirty="0">
+                <a:solidFill>
+                  <a:srgbClr val="FFFFFF"/>
                 </a:solidFill>
                 <a:latin typeface="Georgia" pitchFamily="34" charset="0"/>
                 <a:ea typeface="Georgia" pitchFamily="34" charset="-122"/>
                 <a:cs typeface="Georgia" pitchFamily="34" charset="-120"/>
               </a:rPr>
-              <a:t>"@Gmail Summarise my last 5 unread emails and flag anything that needs a response today"</a:t>
-            </a:r>
-            <a:endParaRPr lang="en-US" sz="2800" dirty="0"/>
+              <a:t>You didn't open Google.</a:t>
+            </a:r>
+            <a:endParaRPr lang="en-US" sz="4400" dirty="0"/>
+          </a:p>
+          <a:p>
+            <a:pPr algn="ctr" indent="0" marL="0">
+              <a:buNone/>
+            </a:pPr>
+            <a:r>
+              <a:rPr lang="en-US" sz="4400" b="1" dirty="0">
+                <a:solidFill>
+                  <a:srgbClr val="FFFFFF"/>
+                </a:solidFill>
+                <a:latin typeface="Georgia" pitchFamily="34" charset="0"/>
+                <a:ea typeface="Georgia" pitchFamily="34" charset="-122"/>
+                <a:cs typeface="Georgia" pitchFamily="34" charset="-120"/>
+              </a:rPr>
+              <a:t>You just asked.</a:t>
+            </a:r>
+            <a:endParaRPr lang="en-US" sz="4400" dirty="0"/>
           </a:p>
         </p:txBody>
       </p:sp>
@@ -9249,8 +9972,8 @@
         </p:nvSpPr>
         <p:spPr>
           <a:xfrm>
-            <a:off x="914400" y="1097280"/>
-            <a:ext cx="7315200" cy="2560320"/>
+            <a:off x="731520" y="365760"/>
+            <a:ext cx="7680960" cy="731520"/>
           </a:xfrm>
           <a:prstGeom prst="rect">
             <a:avLst/>
@@ -9266,7 +9989,7 @@
               <a:buNone/>
             </a:pPr>
             <a:r>
-              <a:rPr lang="en-US" sz="4400" b="1" dirty="0">
+              <a:rPr lang="en-US" sz="3600" b="1" dirty="0">
                 <a:solidFill>
                   <a:srgbClr val="FFFFFF"/>
                 </a:solidFill>
@@ -9274,10 +9997,32 @@
                 <a:ea typeface="Georgia" pitchFamily="34" charset="-122"/>
                 <a:cs typeface="Georgia" pitchFamily="34" charset="-120"/>
               </a:rPr>
-              <a:t>You didn't search.</a:t>
-            </a:r>
-            <a:endParaRPr lang="en-US" sz="4400" dirty="0"/>
-          </a:p>
+              <a:t>Your most powerful source</a:t>
+            </a:r>
+            <a:endParaRPr lang="en-US" sz="3600" dirty="0"/>
+          </a:p>
+        </p:txBody>
+      </p:sp>
+      <p:sp>
+        <p:nvSpPr>
+          <p:cNvPr id="4" name="Text 2"/>
+          <p:cNvSpPr/>
+          <p:nvPr/>
+        </p:nvSpPr>
+        <p:spPr>
+          <a:xfrm>
+            <a:off x="731520" y="1097280"/>
+            <a:ext cx="7680960" cy="731520"/>
+          </a:xfrm>
+          <a:prstGeom prst="rect">
+            <a:avLst/>
+          </a:prstGeom>
+          <a:noFill/>
+          <a:ln/>
+        </p:spPr>
+        <p:txBody>
+          <a:bodyPr wrap="square" lIns="0" tIns="0" rIns="0" bIns="0" rtlCol="0" anchor="ctr"/>
+          <a:lstStyle/>
           <a:p>
             <a:pPr algn="ctr" indent="0" marL="0">
               <a:buNone/>
@@ -9285,32 +10030,327 @@
             <a:r>
               <a:rPr lang="en-US" sz="4400" b="1" dirty="0">
                 <a:solidFill>
-                  <a:srgbClr val="FFFFFF"/>
+                  <a:srgbClr val="635BFF"/>
                 </a:solidFill>
                 <a:latin typeface="Georgia" pitchFamily="34" charset="0"/>
                 <a:ea typeface="Georgia" pitchFamily="34" charset="-122"/>
                 <a:cs typeface="Georgia" pitchFamily="34" charset="-120"/>
               </a:rPr>
-              <a:t>You didn't paste.</a:t>
+              <a:t>Your files.</a:t>
             </a:r>
             <a:endParaRPr lang="en-US" sz="4400" dirty="0"/>
           </a:p>
-          <a:p>
-            <a:pPr algn="ctr" indent="0" marL="0">
-              <a:buNone/>
-            </a:pPr>
-            <a:r>
-              <a:rPr lang="en-US" sz="4400" b="1" dirty="0">
-                <a:solidFill>
-                  <a:srgbClr val="FFFFFF"/>
+        </p:txBody>
+      </p:sp>
+      <p:sp>
+        <p:nvSpPr>
+          <p:cNvPr id="5" name="Text 3"/>
+          <p:cNvSpPr/>
+          <p:nvPr/>
+        </p:nvSpPr>
+        <p:spPr>
+          <a:xfrm>
+            <a:off x="1828800" y="2194560"/>
+            <a:ext cx="548640" cy="457200"/>
+          </a:xfrm>
+          <a:prstGeom prst="rect">
+            <a:avLst/>
+          </a:prstGeom>
+          <a:noFill/>
+          <a:ln/>
+        </p:spPr>
+        <p:txBody>
+          <a:bodyPr wrap="square" lIns="0" tIns="0" rIns="0" bIns="0" rtlCol="0" anchor="ctr"/>
+          <a:lstStyle/>
+          <a:p>
+            <a:pPr algn="ctr" indent="0" marL="0">
+              <a:buNone/>
+            </a:pPr>
+            <a:r>
+              <a:rPr lang="en-US" sz="2200" b="1" dirty="0">
+                <a:solidFill>
+                  <a:srgbClr val="635BFF"/>
                 </a:solidFill>
                 <a:latin typeface="Georgia" pitchFamily="34" charset="0"/>
                 <a:ea typeface="Georgia" pitchFamily="34" charset="-122"/>
                 <a:cs typeface="Georgia" pitchFamily="34" charset="-120"/>
               </a:rPr>
-              <a:t>You just asked.</a:t>
-            </a:r>
-            <a:endParaRPr lang="en-US" sz="4400" dirty="0"/>
+              <a:t>1</a:t>
+            </a:r>
+            <a:endParaRPr lang="en-US" sz="2200" dirty="0"/>
+          </a:p>
+        </p:txBody>
+      </p:sp>
+      <p:sp>
+        <p:nvSpPr>
+          <p:cNvPr id="6" name="Text 4"/>
+          <p:cNvSpPr/>
+          <p:nvPr/>
+        </p:nvSpPr>
+        <p:spPr>
+          <a:xfrm>
+            <a:off x="2560320" y="2194560"/>
+            <a:ext cx="4572000" cy="457200"/>
+          </a:xfrm>
+          <a:prstGeom prst="rect">
+            <a:avLst/>
+          </a:prstGeom>
+          <a:noFill/>
+          <a:ln/>
+        </p:spPr>
+        <p:txBody>
+          <a:bodyPr wrap="square" lIns="0" tIns="0" rIns="0" bIns="0" rtlCol="0" anchor="ctr"/>
+          <a:lstStyle/>
+          <a:p>
+            <a:pPr algn="l" indent="0" marL="0">
+              <a:buNone/>
+            </a:pPr>
+            <a:r>
+              <a:rPr lang="en-US" sz="2000" dirty="0">
+                <a:solidFill>
+                  <a:srgbClr val="EDEDED"/>
+                </a:solidFill>
+                <a:latin typeface="Verdana" pitchFamily="34" charset="0"/>
+                <a:ea typeface="Verdana" pitchFamily="34" charset="-122"/>
+                <a:cs typeface="Verdana" pitchFamily="34" charset="-120"/>
+              </a:rPr>
+              <a:t>Open the Cowork tab</a:t>
+            </a:r>
+            <a:endParaRPr lang="en-US" sz="2000" dirty="0"/>
+          </a:p>
+        </p:txBody>
+      </p:sp>
+      <p:sp>
+        <p:nvSpPr>
+          <p:cNvPr id="7" name="Text 5"/>
+          <p:cNvSpPr/>
+          <p:nvPr/>
+        </p:nvSpPr>
+        <p:spPr>
+          <a:xfrm>
+            <a:off x="1828800" y="2788920"/>
+            <a:ext cx="548640" cy="457200"/>
+          </a:xfrm>
+          <a:prstGeom prst="rect">
+            <a:avLst/>
+          </a:prstGeom>
+          <a:noFill/>
+          <a:ln/>
+        </p:spPr>
+        <p:txBody>
+          <a:bodyPr wrap="square" lIns="0" tIns="0" rIns="0" bIns="0" rtlCol="0" anchor="ctr"/>
+          <a:lstStyle/>
+          <a:p>
+            <a:pPr algn="ctr" indent="0" marL="0">
+              <a:buNone/>
+            </a:pPr>
+            <a:r>
+              <a:rPr lang="en-US" sz="2200" b="1" dirty="0">
+                <a:solidFill>
+                  <a:srgbClr val="635BFF"/>
+                </a:solidFill>
+                <a:latin typeface="Georgia" pitchFamily="34" charset="0"/>
+                <a:ea typeface="Georgia" pitchFamily="34" charset="-122"/>
+                <a:cs typeface="Georgia" pitchFamily="34" charset="-120"/>
+              </a:rPr>
+              <a:t>2</a:t>
+            </a:r>
+            <a:endParaRPr lang="en-US" sz="2200" dirty="0"/>
+          </a:p>
+        </p:txBody>
+      </p:sp>
+      <p:sp>
+        <p:nvSpPr>
+          <p:cNvPr id="8" name="Text 6"/>
+          <p:cNvSpPr/>
+          <p:nvPr/>
+        </p:nvSpPr>
+        <p:spPr>
+          <a:xfrm>
+            <a:off x="2560320" y="2788920"/>
+            <a:ext cx="4572000" cy="457200"/>
+          </a:xfrm>
+          <a:prstGeom prst="rect">
+            <a:avLst/>
+          </a:prstGeom>
+          <a:noFill/>
+          <a:ln/>
+        </p:spPr>
+        <p:txBody>
+          <a:bodyPr wrap="square" lIns="0" tIns="0" rIns="0" bIns="0" rtlCol="0" anchor="ctr"/>
+          <a:lstStyle/>
+          <a:p>
+            <a:pPr algn="l" indent="0" marL="0">
+              <a:buNone/>
+            </a:pPr>
+            <a:r>
+              <a:rPr lang="en-US" sz="2000" dirty="0">
+                <a:solidFill>
+                  <a:srgbClr val="EDEDED"/>
+                </a:solidFill>
+                <a:latin typeface="Verdana" pitchFamily="34" charset="0"/>
+                <a:ea typeface="Verdana" pitchFamily="34" charset="-122"/>
+                <a:cs typeface="Verdana" pitchFamily="34" charset="-120"/>
+              </a:rPr>
+              <a:t>Check "Work in a Folder"</a:t>
+            </a:r>
+            <a:endParaRPr lang="en-US" sz="2000" dirty="0"/>
+          </a:p>
+        </p:txBody>
+      </p:sp>
+      <p:sp>
+        <p:nvSpPr>
+          <p:cNvPr id="9" name="Text 7"/>
+          <p:cNvSpPr/>
+          <p:nvPr/>
+        </p:nvSpPr>
+        <p:spPr>
+          <a:xfrm>
+            <a:off x="1828800" y="3383280"/>
+            <a:ext cx="548640" cy="457200"/>
+          </a:xfrm>
+          <a:prstGeom prst="rect">
+            <a:avLst/>
+          </a:prstGeom>
+          <a:noFill/>
+          <a:ln/>
+        </p:spPr>
+        <p:txBody>
+          <a:bodyPr wrap="square" lIns="0" tIns="0" rIns="0" bIns="0" rtlCol="0" anchor="ctr"/>
+          <a:lstStyle/>
+          <a:p>
+            <a:pPr algn="ctr" indent="0" marL="0">
+              <a:buNone/>
+            </a:pPr>
+            <a:r>
+              <a:rPr lang="en-US" sz="2200" b="1" dirty="0">
+                <a:solidFill>
+                  <a:srgbClr val="635BFF"/>
+                </a:solidFill>
+                <a:latin typeface="Georgia" pitchFamily="34" charset="0"/>
+                <a:ea typeface="Georgia" pitchFamily="34" charset="-122"/>
+                <a:cs typeface="Georgia" pitchFamily="34" charset="-120"/>
+              </a:rPr>
+              <a:t>3</a:t>
+            </a:r>
+            <a:endParaRPr lang="en-US" sz="2200" dirty="0"/>
+          </a:p>
+        </p:txBody>
+      </p:sp>
+      <p:sp>
+        <p:nvSpPr>
+          <p:cNvPr id="10" name="Text 8"/>
+          <p:cNvSpPr/>
+          <p:nvPr/>
+        </p:nvSpPr>
+        <p:spPr>
+          <a:xfrm>
+            <a:off x="2560320" y="3383280"/>
+            <a:ext cx="4572000" cy="457200"/>
+          </a:xfrm>
+          <a:prstGeom prst="rect">
+            <a:avLst/>
+          </a:prstGeom>
+          <a:noFill/>
+          <a:ln/>
+        </p:spPr>
+        <p:txBody>
+          <a:bodyPr wrap="square" lIns="0" tIns="0" rIns="0" bIns="0" rtlCol="0" anchor="ctr"/>
+          <a:lstStyle/>
+          <a:p>
+            <a:pPr algn="l" indent="0" marL="0">
+              <a:buNone/>
+            </a:pPr>
+            <a:r>
+              <a:rPr lang="en-US" sz="2000" dirty="0">
+                <a:solidFill>
+                  <a:srgbClr val="EDEDED"/>
+                </a:solidFill>
+                <a:latin typeface="Verdana" pitchFamily="34" charset="0"/>
+                <a:ea typeface="Verdana" pitchFamily="34" charset="-122"/>
+                <a:cs typeface="Verdana" pitchFamily="34" charset="-120"/>
+              </a:rPr>
+              <a:t>Select a folder on your Mac</a:t>
+            </a:r>
+            <a:endParaRPr lang="en-US" sz="2000" dirty="0"/>
+          </a:p>
+        </p:txBody>
+      </p:sp>
+      <p:sp>
+        <p:nvSpPr>
+          <p:cNvPr id="11" name="Text 9"/>
+          <p:cNvSpPr/>
+          <p:nvPr/>
+        </p:nvSpPr>
+        <p:spPr>
+          <a:xfrm>
+            <a:off x="1828800" y="3977640"/>
+            <a:ext cx="548640" cy="457200"/>
+          </a:xfrm>
+          <a:prstGeom prst="rect">
+            <a:avLst/>
+          </a:prstGeom>
+          <a:noFill/>
+          <a:ln/>
+        </p:spPr>
+        <p:txBody>
+          <a:bodyPr wrap="square" lIns="0" tIns="0" rIns="0" bIns="0" rtlCol="0" anchor="ctr"/>
+          <a:lstStyle/>
+          <a:p>
+            <a:pPr algn="ctr" indent="0" marL="0">
+              <a:buNone/>
+            </a:pPr>
+            <a:r>
+              <a:rPr lang="en-US" sz="2200" b="1" dirty="0">
+                <a:solidFill>
+                  <a:srgbClr val="635BFF"/>
+                </a:solidFill>
+                <a:latin typeface="Georgia" pitchFamily="34" charset="0"/>
+                <a:ea typeface="Georgia" pitchFamily="34" charset="-122"/>
+                <a:cs typeface="Georgia" pitchFamily="34" charset="-120"/>
+              </a:rPr>
+              <a:t>4</a:t>
+            </a:r>
+            <a:endParaRPr lang="en-US" sz="2200" dirty="0"/>
+          </a:p>
+        </p:txBody>
+      </p:sp>
+      <p:sp>
+        <p:nvSpPr>
+          <p:cNvPr id="12" name="Text 10"/>
+          <p:cNvSpPr/>
+          <p:nvPr/>
+        </p:nvSpPr>
+        <p:spPr>
+          <a:xfrm>
+            <a:off x="2560320" y="3977640"/>
+            <a:ext cx="4572000" cy="457200"/>
+          </a:xfrm>
+          <a:prstGeom prst="rect">
+            <a:avLst/>
+          </a:prstGeom>
+          <a:noFill/>
+          <a:ln/>
+        </p:spPr>
+        <p:txBody>
+          <a:bodyPr wrap="square" lIns="0" tIns="0" rIns="0" bIns="0" rtlCol="0" anchor="ctr"/>
+          <a:lstStyle/>
+          <a:p>
+            <a:pPr algn="l" indent="0" marL="0">
+              <a:buNone/>
+            </a:pPr>
+            <a:r>
+              <a:rPr lang="en-US" sz="2000" dirty="0">
+                <a:solidFill>
+                  <a:srgbClr val="EDEDED"/>
+                </a:solidFill>
+                <a:latin typeface="Verdana" pitchFamily="34" charset="0"/>
+                <a:ea typeface="Verdana" pitchFamily="34" charset="-122"/>
+                <a:cs typeface="Verdana" pitchFamily="34" charset="-120"/>
+              </a:rPr>
+              <a:t>Grant access</a:t>
+            </a:r>
+            <a:endParaRPr lang="en-US" sz="2000" dirty="0"/>
           </a:p>
         </p:txBody>
       </p:sp>

--- a/decks/workshop-2-orchestrator/workshop-2-orchestrator.pptx
+++ b/decks/workshop-2-orchestrator/workshop-2-orchestrator.pptx
@@ -1672,7 +1672,7 @@
           <a:p>
             <a:r>
               <a:rPr lang="en-US" dirty="0"/>
-              <a:t>The Workshop 1 callback. In the last session they set up personal preferences (rules) and enabled Skills. Each org Skill in the chain is the same idea taken further — specific instructions for a specific role with a specific job. They've been building persistent context since last session; now each agent gets its own.</a:t>
+              <a:t>The Workshop 1 callback. In the last session they set up rules (on the page) and pulled Skills from the drawer. Each org Skill in the chain is the same idea taken further — each agent gets its own drawer, its own expertise. They've been building persistent context since last session; now each step in the chain gets its own playbook.</a:t>
             </a:r>
             <a:endParaRPr lang="en-US" dirty="0"/>
           </a:p>
@@ -1848,7 +1848,7 @@
           <a:p>
             <a:r>
               <a:rPr lang="en-US" dirty="0"/>
-              <a:t>Emotional climax. Give this a full beat. "And as an org Skill, when you improve it, everyone benefits." This is the payoff of the entire skills arc that started in Workshop 1. For Pro plan audiences: "Every future use benefits."</a:t>
+              <a:t>Emotional climax. Give this a full beat. "And as an org Skill, when you improve it, everyone benefits." This is the payoff of the entire skills arc that started in Workshop 1. The drawer gets better every time you edit a SKILL.md — and it's everyone's drawer. For Pro plan audiences: "Every future use benefits."</a:t>
             </a:r>
             <a:endParaRPr lang="en-US" dirty="0"/>
           </a:p>

--- a/decks/workshop-2-orchestrator/workshop-2-orchestrator.pptx
+++ b/decks/workshop-2-orchestrator/workshop-2-orchestrator.pptx
@@ -32,9 +32,10 @@
     <p:sldId id="280" r:id="rId26"/>
     <p:sldId id="281" r:id="rId27"/>
     <p:sldId id="282" r:id="rId28"/>
+    <p:sldId id="283" r:id="rId29"/>
   </p:sldIdLst>
   <p:notesMasterIdLst>
-    <p:notesMasterId r:id="rId29"/>
+    <p:notesMasterId r:id="rId30"/>
   </p:notesMasterIdLst>
   <p:sldSz cx="9144000" cy="5143500"/>
   <p:notesSz cx="5143500" cy="9144000"/>
@@ -616,7 +617,7 @@
           <a:p>
             <a:r>
               <a:rPr lang="en-US" dirty="0"/>
-              <a:t>This is the bigger wow. Claude reads multiple files from their Mac — not uploaded, not copy-pasted, just... there. Cowork runs in a sandboxed VM so their files are safe. Have a sample folder with 2-3 documents ready for anyone without their own. Ask: "How long would it take you to read three documents and write a summary?" If time is tight, this can be a facilitator demo — but the individual experience is much stronger.</a:t>
+              <a:t>Screen-share the Cowork setup. "Your files are your most powerful source — nobody else has them. Your company data, your documents, your context. Let's give Claude direct access." Walk the room. Have a sample folder ready (with a policy doc, a data file, a memo) for anyone who doesn't have a suitable folder. Best practice: create or use a dedicated working folder rather than granting access to broad directories.</a:t>
             </a:r>
             <a:endParaRPr lang="en-US" dirty="0"/>
           </a:p>
@@ -704,7 +705,7 @@
           <a:p>
             <a:r>
               <a:rPr lang="en-US" dirty="0"/>
-              <a:t>This slide names what they just experienced. Three sources, zero copy-paste. The principle: give Claude the source, stop being the courier. And there's more — Google Drive, Slack, Calendar, and other integrations are all connectable. These three are just the start.</a:t>
+              <a:t>This is the bigger wow. Claude reads multiple files from their Mac — not uploaded, not copy-pasted, just... there. Cowork runs in a sandboxed VM so their files are safe. Have a sample folder with 2-3 documents ready for anyone without their own. Ask: "How long would it take you to read three documents and write a summary?" If time is tight, this can be a facilitator demo — but the individual experience is much stronger.</a:t>
             </a:r>
             <a:endParaRPr lang="en-US" dirty="0"/>
           </a:p>
@@ -792,7 +793,7 @@
           <a:p>
             <a:r>
               <a:rPr lang="en-US" dirty="0"/>
-              <a:t>Transition to trust. This is the most important mindset shift in the entire series. Four simple rules. The last one catches people: Claude Team/Enterprise's privacy guarantee means your data isn't used for training, but that says nothing about whether the output is accurate. Don't conflate safety with correctness.</a:t>
+              <a:t>This slide names what they just experienced. Three sources, zero copy-paste. The principle: give Claude the source, stop being the courier. And there's more — Google Drive, Slack, Calendar, and other integrations are all connectable. These three are just the start.</a:t>
             </a:r>
             <a:endParaRPr lang="en-US" dirty="0"/>
           </a:p>
@@ -880,7 +881,7 @@
           <a:p>
             <a:r>
               <a:rPr lang="en-US" dirty="0"/>
-              <a:t>Can be individual or group discussion if time is tight — but don't skip it. The "feels right" moment is the key insight: AI output often reads with high confidence regardless of accuracy. The most dangerous outputs are the ones that feel right but aren't. 3-4 minutes.</a:t>
+              <a:t>Transition to trust. This is the most important mindset shift in the entire series. Four simple rules. The last one catches people: Claude Team/Enterprise's privacy guarantee means your data isn't used for training, but that says nothing about whether the output is accurate. Don't conflate safety with correctness.</a:t>
             </a:r>
             <a:endParaRPr lang="en-US" dirty="0"/>
           </a:p>
@@ -968,7 +969,7 @@
           <a:p>
             <a:r>
               <a:rPr lang="en-US" dirty="0"/>
-              <a:t>An AI coding agent autonomously deleted a user's entire codebase while trying to fix a bug. The user had trusted the agent to work autonomously. Months of work, gone in seconds. This is the gut punch that makes the trust rules feel necessary, not theoretical. Source: https://www.theregister.co.uk/2025/07/15/replit_ai_agent_deletes_codebase/</a:t>
+              <a:t>Can be individual or group discussion if time is tight — but don't skip it. The "feels right" moment is the key insight: AI output often reads with high confidence regardless of accuracy. The most dangerous outputs are the ones that feel right but aren't. 3-4 minutes.</a:t>
             </a:r>
             <a:endParaRPr lang="en-US" dirty="0"/>
           </a:p>
@@ -1056,7 +1057,7 @@
           <a:p>
             <a:r>
               <a:rPr lang="en-US" dirty="0"/>
-              <a:t>End the trust section firmly. "You review. You judge. You approve. Claude does the grunt work." This earns them the right to hand agents more complex work in Act 3 — they've proven they can verify.</a:t>
+              <a:t>An AI coding agent autonomously deleted a user's entire codebase while trying to fix a bug. The user had trusted the agent to work autonomously. Months of work, gone in seconds. This is the gut punch that makes the trust rules feel necessary, not theoretical. Source: https://www.theregister.co.uk/2025/07/15/replit_ai_agent_deletes_codebase/</a:t>
             </a:r>
             <a:endParaRPr lang="en-US" dirty="0"/>
           </a:p>
@@ -1144,7 +1145,7 @@
           <a:p>
             <a:r>
               <a:rPr lang="en-US" dirty="0"/>
-              <a:t>Quick pivot beat. The kitchen brigade metaphor: "One chef doing a 10-course dinner alone? Burnout. Mistakes. Forgotten appetiser. A kitchen brigade — each chef at a station — serves everything perfectly." Plant the word "specialised." Then move on.</a:t>
+              <a:t>End the trust section firmly. "You review. You judge. You approve. Claude does the grunt work." This earns them the right to hand agents more complex work in Act 3 — they've proven they can verify.</a:t>
             </a:r>
             <a:endParaRPr lang="en-US" dirty="0"/>
           </a:p>
@@ -1232,7 +1233,7 @@
           <a:p>
             <a:r>
               <a:rPr lang="en-US" dirty="0"/>
-              <a:t>Group exercise. Facilitator presents a complex task (the tea presentation or another multi-step scenario). Discussion with whiteboard or shared doc. Target: 3-4 phases. e.g., Research → Draft → Review → Approval. Don't let it go beyond 4 — more than that overcomplicates the demo. 5-6 minutes.</a:t>
+              <a:t>Quick pivot beat. The kitchen brigade metaphor: "One chef doing a 10-course dinner alone? Burnout. Mistakes. Forgotten appetiser. A kitchen brigade — each chef at a station — serves everything perfectly." Plant the word "specialised." Then move on.</a:t>
             </a:r>
             <a:endParaRPr lang="en-US" dirty="0"/>
           </a:p>
@@ -1320,7 +1321,7 @@
           <a:p>
             <a:r>
               <a:rPr lang="en-US" dirty="0"/>
-              <a:t>This visual should mirror the copy-paste trap (Slide 3) and agent way (Slide 5) — same layout, same four-step pattern. But now each step is a specialised Skill. Only human at the final step. "Write this down: break big tasks into focused steps. Pass results forward. Filter context between each."</a:t>
+              <a:t>Group exercise. Facilitator presents a complex task (the tea presentation or another multi-step scenario). Discussion with whiteboard or shared doc. Target: 3-4 phases. e.g., Research → Draft → Review → Approval. Don't let it go beyond 4 — more than that overcomplicates the demo. 5-6 minutes.</a:t>
             </a:r>
             <a:endParaRPr lang="en-US" dirty="0"/>
           </a:p>
@@ -1408,7 +1409,7 @@
           <a:p>
             <a:r>
               <a:rPr lang="en-US" dirty="0"/>
-              <a:t>Facilitator switches to Claude for the live demo. Run the chain using pre-built org Skills: (1) New conversation → give it the research task → the Research Skill kicks in → show the structured brief output. (2) New conversation → paste the brief → the Draft Skill kicks in → show the polished proposal. (3) New conversation → paste the draft + original brief → the Review Skill kicks in → show the critique. Narrate every step. Point out what the Draft Skill doesn't know: it never saw the raw research, only the structured brief. That's filtered context — each new conversation provides isolation. Compare final output to what a single Claude conversation would have produced. Take your time — this demo earns the exercise that follows. ~7 minutes.</a:t>
+              <a:t>This visual should mirror the copy-paste trap (Slide 3) and agent way (Slide 5) — same layout, same four-step pattern. But now each step is a specialised Skill. Only human at the final step. "Write this down: break big tasks into focused steps. Pass results forward. Filter context between each."</a:t>
             </a:r>
             <a:endParaRPr lang="en-US" dirty="0"/>
           </a:p>
@@ -1584,7 +1585,7 @@
           <a:p>
             <a:r>
               <a:rPr lang="en-US" dirty="0"/>
-              <a:t>10 minutes. Attendees choose their running task from Workshop 1 or the tea presentation. The org Skills auto-activate based on the task. Fallback if time runs short: Phase 1 becomes a facilitator demo, attendees do Phase 2 only. The discussion matters more than both phases completing. Ask: "Where did the chain produce better results? Where did the handoff lose something?"</a:t>
+              <a:t>Facilitator switches to Claude for the live demo. Run the chain using pre-built org Skills: (1) New conversation → give it the research task → the Research Skill kicks in → show the structured brief output. (2) New conversation → paste the brief → the Draft Skill kicks in → show the polished proposal. (3) New conversation → paste the draft + original brief → the Review Skill kicks in → show the critique. Narrate every step. Point out what the Draft Skill doesn't know: it never saw the raw research, only the structured brief. That's filtered context — each new conversation provides isolation. Compare final output to what a single Claude conversation would have produced. Take your time — this demo earns the exercise that follows. ~7 minutes.</a:t>
             </a:r>
             <a:endParaRPr lang="en-US" dirty="0"/>
           </a:p>
@@ -1672,7 +1673,7 @@
           <a:p>
             <a:r>
               <a:rPr lang="en-US" dirty="0"/>
-              <a:t>The Workshop 1 callback. In the last session they set up rules (on the page) and pulled Skills from the drawer. Each org Skill in the chain is the same idea taken further — each agent gets its own drawer, its own expertise. They've been building persistent context since last session; now each step in the chain gets its own playbook.</a:t>
+              <a:t>10 minutes. Attendees choose their running task from Workshop 1 or the tea presentation. The org Skills auto-activate based on the task. Fallback if time runs short: Phase 1 becomes a facilitator demo, attendees do Phase 2 only. The discussion matters more than both phases completing. Ask: "Where did the chain produce better results? Where did the handoff lose something?"</a:t>
             </a:r>
             <a:endParaRPr lang="en-US" dirty="0"/>
           </a:p>
@@ -1760,7 +1761,7 @@
           <a:p>
             <a:r>
               <a:rPr lang="en-US" dirty="0"/>
-              <a:t>Show where to find the Skill instructions (Customize → Skills → click the Skill). Take 2-3 suggestions from the group. Discuss what difference each change would make. The SKILL.md is tangible — they can see it, read it, edit it. "When you edit that SKILL.md, every future use gets better. Your feedback becomes the skill."</a:t>
+              <a:t>The Workshop 1 callback. In the last session they set up rules (on the page) and pulled Skills from the drawer. Each org Skill in the chain is the same idea taken further — each agent gets its own drawer, its own expertise. They've been building persistent context since last session; now each step in the chain gets its own playbook.</a:t>
             </a:r>
             <a:endParaRPr lang="en-US" dirty="0"/>
           </a:p>
@@ -1848,7 +1849,7 @@
           <a:p>
             <a:r>
               <a:rPr lang="en-US" dirty="0"/>
-              <a:t>Emotional climax. Give this a full beat. "And as an org Skill, when you improve it, everyone benefits." This is the payoff of the entire skills arc that started in Workshop 1. The drawer gets better every time you edit a SKILL.md — and it's everyone's drawer. For Pro plan audiences: "Every future use benefits."</a:t>
+              <a:t>Show where to find the Skill instructions (Customize → Skills → click the Skill). Take 2-3 suggestions from the group. Discuss what difference each change would make. The SKILL.md is tangible — they can see it, read it, edit it. "When you edit that SKILL.md, every future use gets better. Your feedback becomes the skill."</a:t>
             </a:r>
             <a:endParaRPr lang="en-US" dirty="0"/>
           </a:p>
@@ -1936,7 +1937,7 @@
           <a:p>
             <a:r>
               <a:rPr lang="en-US" dirty="0"/>
-              <a:t>The rational payoff begins. Manual workflow: search, copy-paste, draft, re-prompt, reformat, review, apply. All the steps they recognised in Slide 3. "1.5 hours of grunt work where you're the bottleneck at every step."</a:t>
+              <a:t>Emotional climax. Give this a full beat. "And as an org Skill, when you improve it, everyone benefits." This is the payoff of the entire skills arc that started in Workshop 1. The drawer gets better every time you edit a SKILL.md — and it's everyone's drawer. For Pro plan audiences: "Every future use benefits."</a:t>
             </a:r>
             <a:endParaRPr lang="en-US" dirty="0"/>
           </a:p>
@@ -2024,7 +2025,7 @@
           <a:p>
             <a:r>
               <a:rPr lang="en-US" dirty="0"/>
-              <a:t>Chained workflow: Skills handle 1 hour 15 minutes of work. You spend 15 minutes on judgment — reviewing, deciding, approving. "Same tea presentation. The chain gets smarter every time. Your feedback becomes Skills."</a:t>
+              <a:t>The rational payoff begins. Manual workflow: search, copy-paste, draft, re-prompt, reformat, review, apply. All the steps they recognised in Slide 3. "1.5 hours of grunt work where you're the bottleneck at every step."</a:t>
             </a:r>
             <a:endParaRPr lang="en-US" dirty="0"/>
           </a:p>
@@ -2112,7 +2113,7 @@
           <a:p>
             <a:r>
               <a:rPr lang="en-US" dirty="0"/>
-              <a:t>Graduation moment. "You learned to whisper. You became a strategist. You let Claude operate. You orchestrated the brigade." This is the emotional payoff. Make it feel earned — they completed a 2-session AI Academy. Builder is still dimmed — that's the horizon for those who want to go further.</a:t>
+              <a:t>Chained workflow: Skills handle 1 hour 15 minutes of work. You spend 15 minutes on judgment — reviewing, deciding, approving. "Same tea presentation. The chain gets smarter every time. Your feedback becomes Skills."</a:t>
             </a:r>
             <a:endParaRPr lang="en-US" dirty="0"/>
           </a:p>
@@ -2200,7 +2201,7 @@
           <a:p>
             <a:r>
               <a:rPr lang="en-US" dirty="0"/>
-              <a:t>Final CTA. "Now go try it — one task, this week." Builder tease for the curious: "And if you want to go further — building integrations, connecting Claude to your actual systems, automating entire workflows — that's the Builder level. That's what's next." But don't oversell — most attendees won't go there, and that's fine.</a:t>
+              <a:t>Graduation moment. "You learned to whisper. You became a strategist. You let Claude operate. You orchestrated the brigade." This is the emotional payoff. Make it feel earned — they completed a 2-session AI Academy. Builder is still dimmed — that's the horizon for those who want to go further.</a:t>
             </a:r>
             <a:endParaRPr lang="en-US" dirty="0"/>
           </a:p>
@@ -2224,6 +2225,94 @@
             <a:fld id="{F7021451-1387-4CA6-816F-3879F97B5CBC}" type="slidenum">
               <a:rPr lang="en-US"/>
               <a:t>27</a:t>
+            </a:fld>
+            <a:endParaRPr lang="en-US"/>
+          </a:p>
+        </p:txBody>
+      </p:sp>
+    </p:spTree>
+    <p:extLst>
+      <p:ext uri="{BB962C8B-B14F-4D97-AF65-F5344CB8AC3E}">
+        <p14:creationId xmlns:p14="http://schemas.microsoft.com/office/powerpoint/2010/main" val="1024086991"/>
+      </p:ext>
+    </p:extLst>
+  </p:cSld>
+  <p:clrMapOvr>
+    <a:masterClrMapping/>
+  </p:clrMapOvr>
+</p:notes>
+</file>
+
+<file path=ppt/notesSlides/notesSlide28.xml><?xml version="1.0" encoding="utf-8"?>
+<p:notes xmlns:a="http://schemas.openxmlformats.org/drawingml/2006/main" xmlns:r="http://schemas.openxmlformats.org/officeDocument/2006/relationships" xmlns:p="http://schemas.openxmlformats.org/presentationml/2006/main">
+  <p:cSld>
+    <p:spTree>
+      <p:nvGrpSpPr>
+        <p:cNvPr id="1" name=""/>
+        <p:cNvGrpSpPr/>
+        <p:nvPr/>
+      </p:nvGrpSpPr>
+      <p:grpSpPr>
+        <a:xfrm>
+          <a:off x="0" y="0"/>
+          <a:ext cx="0" cy="0"/>
+          <a:chOff x="0" y="0"/>
+          <a:chExt cx="0" cy="0"/>
+        </a:xfrm>
+      </p:grpSpPr>
+      <p:sp>
+        <p:nvSpPr>
+          <p:cNvPr id="2" name="Slide Image Placeholder 1"/>
+          <p:cNvSpPr>
+            <a:spLocks noGrp="1" noRot="1" noChangeAspect="1"/>
+          </p:cNvSpPr>
+          <p:nvPr>
+            <p:ph type="sldImg"/>
+          </p:nvPr>
+        </p:nvSpPr>
+        <p:spPr/>
+      </p:sp>
+      <p:sp>
+        <p:nvSpPr>
+          <p:cNvPr id="3" name="Notes Placeholder 2"/>
+          <p:cNvSpPr>
+            <a:spLocks noGrp="1"/>
+          </p:cNvSpPr>
+          <p:nvPr>
+            <p:ph type="body" idx="1"/>
+          </p:nvPr>
+        </p:nvSpPr>
+        <p:spPr/>
+        <p:txBody>
+          <a:bodyPr/>
+          <a:lstStyle/>
+          <a:p>
+            <a:r>
+              <a:rPr lang="en-US" dirty="0"/>
+              <a:t>Final CTA. "Now go try it — one task, this week." Builder tease for the curious: "And if you want to go further — building integrations, connecting Claude to your actual systems, automating entire workflows — that's the Builder level. That's what's next." But don't oversell — most attendees won't go there, and that's fine.</a:t>
+            </a:r>
+            <a:endParaRPr lang="en-US" dirty="0"/>
+          </a:p>
+        </p:txBody>
+      </p:sp>
+      <p:sp>
+        <p:nvSpPr>
+          <p:cNvPr id="4" name="Slide Number Placeholder 3"/>
+          <p:cNvSpPr>
+            <a:spLocks noGrp="1"/>
+          </p:cNvSpPr>
+          <p:nvPr>
+            <p:ph type="sldNum" sz="quarter" idx="10"/>
+          </p:nvPr>
+        </p:nvSpPr>
+        <p:spPr/>
+        <p:txBody>
+          <a:bodyPr/>
+          <a:lstStyle/>
+          <a:p>
+            <a:fld id="{F7021451-1387-4CA6-816F-3879F97B5CBC}" type="slidenum">
+              <a:rPr lang="en-US"/>
+              <a:t>28</a:t>
             </a:fld>
             <a:endParaRPr lang="en-US"/>
           </a:p>
@@ -2552,7 +2641,7 @@
           <a:p>
             <a:r>
               <a:rPr lang="en-US" dirty="0"/>
-              <a:t>Screen-share this walkthrough. Pre-req: an Owner or Primary Owner must enable Google Workspace connectors at Organization Settings → Capabilities before the session. Walk the room — make sure everyone authenticates successfully. If someone can't connect, they'll use web search only for Exercise 1. This should take 1-2 minutes.</a:t>
+              <a:t>"Same colleague from Workshop 1. Now she has hands." The six connection types: Web — search and fact-check in real time. Email — read context, draft responses. Docs — policies, templates, past work. Data — query real databases. Calendar — scheduling context. Custom — via MCP, any tool you can imagine. "Let's connect one right now."</a:t>
             </a:r>
             <a:endParaRPr lang="en-US" dirty="0"/>
           </a:p>
@@ -2640,7 +2729,7 @@
           <a:p>
             <a:r>
               <a:rPr lang="en-US" dirty="0"/>
-              <a:t>Two sequential prompts in the same conversation — not one multi-step prompt (reinforces Workshop 1's "One Task at a Time" rule). The magic: they never opened Gmail, never opened Google, and Claude already has context from the email when it does the search. "This" naturally refers to whatever the email was about. If someone couldn't connect Gmail, they skip to the second prompt with their own topic. Ask after: "How long would that have taken you manually? Open Gmail, read the email, open Google, read 10 articles, summarise..."</a:t>
+              <a:t>Screen-share this walkthrough. Pre-req: an Owner or Primary Owner must enable Google Workspace connectors at Organization Settings → Capabilities before the session. Walk the room — make sure everyone authenticates successfully. If someone can't connect, they'll use web search only for Exercise 1. This should take 1-2 minutes.</a:t>
             </a:r>
             <a:endParaRPr lang="en-US" dirty="0"/>
           </a:p>
@@ -2728,7 +2817,7 @@
           <a:p>
             <a:r>
               <a:rPr lang="en-US" dirty="0"/>
-              <a:t>The first reveal moment. They connected a source (Gmail) and Claude reached two places — their inbox and the web — without a single copy-paste. That's the shift: from being the courier to being the director. Let the comparison sink in.</a:t>
+              <a:t>Two sequential prompts in the same conversation — not one multi-step prompt (reinforces Workshop 1's "One Task at a Time" rule). The magic: they never opened Gmail, never opened Google, and Claude already has context from the email when it does the search. "This" naturally refers to whatever the email was about. If someone couldn't connect Gmail, they skip to the second prompt with their own topic. Ask after: "How long would that have taken you manually? Open Gmail, read the email, open Google, read 10 articles, summarise..."</a:t>
             </a:r>
             <a:endParaRPr lang="en-US" dirty="0"/>
           </a:p>
@@ -2816,7 +2905,7 @@
           <a:p>
             <a:r>
               <a:rPr lang="en-US" dirty="0"/>
-              <a:t>Screen-share the Cowork setup. "Your files are your most powerful source — nobody else has them. Your company data, your documents, your context. Let's give Claude direct access." Walk the room. Have a sample folder ready (with a policy doc, a data file, a memo) for anyone who doesn't have a suitable folder. Best practice: create or use a dedicated working folder rather than granting access to broad directories.</a:t>
+              <a:t>The first reveal moment. They connected a source (Gmail) and Claude reached two places — their inbox and the web — without a single copy-paste. That's the shift: from being the courier to being the director. Let the comparison sink in.</a:t>
             </a:r>
             <a:endParaRPr lang="en-US" dirty="0"/>
           </a:p>
@@ -3351,8 +3440,8 @@
         </p:nvSpPr>
         <p:spPr>
           <a:xfrm>
-            <a:off x="914400" y="914400"/>
-            <a:ext cx="7315200" cy="3291840"/>
+            <a:off x="731520" y="365760"/>
+            <a:ext cx="7680960" cy="731520"/>
           </a:xfrm>
           <a:prstGeom prst="rect">
             <a:avLst/>
@@ -3368,24 +3457,46 @@
               <a:buNone/>
             </a:pPr>
             <a:r>
-              <a:rPr lang="en-US" sz="2800" b="1" dirty="0">
-                <a:solidFill>
-                  <a:srgbClr val="635BFF"/>
+              <a:rPr lang="en-US" sz="3600" b="1" dirty="0">
+                <a:solidFill>
+                  <a:srgbClr val="FFFFFF"/>
                 </a:solidFill>
                 <a:latin typeface="Georgia" pitchFamily="34" charset="0"/>
                 <a:ea typeface="Georgia" pitchFamily="34" charset="-122"/>
                 <a:cs typeface="Georgia" pitchFamily="34" charset="-120"/>
               </a:rPr>
-              <a:t>In Cowork, try:</a:t>
-            </a:r>
-            <a:endParaRPr lang="en-US" sz="2800" dirty="0"/>
-          </a:p>
-          <a:p>
-            <a:pPr algn="ctr" indent="0" marL="0">
-              <a:buNone/>
-            </a:pPr>
-            <a:r>
-              <a:rPr lang="en-US" sz="3600" b="1" dirty="0">
+              <a:t>Your most powerful source</a:t>
+            </a:r>
+            <a:endParaRPr lang="en-US" sz="3600" dirty="0"/>
+          </a:p>
+        </p:txBody>
+      </p:sp>
+      <p:sp>
+        <p:nvSpPr>
+          <p:cNvPr id="4" name="Text 2"/>
+          <p:cNvSpPr/>
+          <p:nvPr/>
+        </p:nvSpPr>
+        <p:spPr>
+          <a:xfrm>
+            <a:off x="731520" y="1097280"/>
+            <a:ext cx="7680960" cy="731520"/>
+          </a:xfrm>
+          <a:prstGeom prst="rect">
+            <a:avLst/>
+          </a:prstGeom>
+          <a:noFill/>
+          <a:ln/>
+        </p:spPr>
+        <p:txBody>
+          <a:bodyPr wrap="square" lIns="0" tIns="0" rIns="0" bIns="0" rtlCol="0" anchor="ctr"/>
+          <a:lstStyle/>
+          <a:p>
+            <a:pPr algn="ctr" indent="0" marL="0">
+              <a:buNone/>
+            </a:pPr>
+            <a:r>
+              <a:rPr lang="en-US" sz="4400" b="1" dirty="0">
                 <a:solidFill>
                   <a:srgbClr val="635BFF"/>
                 </a:solidFill>
@@ -3393,16 +3504,38 @@
                 <a:ea typeface="Georgia" pitchFamily="34" charset="-122"/>
                 <a:cs typeface="Georgia" pitchFamily="34" charset="-120"/>
               </a:rPr>
-              <a:t>"Read everything in this folder</a:t>
-            </a:r>
-            <a:endParaRPr lang="en-US" sz="2800" dirty="0"/>
-          </a:p>
-          <a:p>
-            <a:pPr algn="ctr" indent="0" marL="0">
-              <a:buNone/>
-            </a:pPr>
-            <a:r>
-              <a:rPr lang="en-US" sz="3600" b="1" dirty="0">
+              <a:t>Your files.</a:t>
+            </a:r>
+            <a:endParaRPr lang="en-US" sz="4400" dirty="0"/>
+          </a:p>
+        </p:txBody>
+      </p:sp>
+      <p:sp>
+        <p:nvSpPr>
+          <p:cNvPr id="5" name="Text 3"/>
+          <p:cNvSpPr/>
+          <p:nvPr/>
+        </p:nvSpPr>
+        <p:spPr>
+          <a:xfrm>
+            <a:off x="1828800" y="2194560"/>
+            <a:ext cx="548640" cy="457200"/>
+          </a:xfrm>
+          <a:prstGeom prst="rect">
+            <a:avLst/>
+          </a:prstGeom>
+          <a:noFill/>
+          <a:ln/>
+        </p:spPr>
+        <p:txBody>
+          <a:bodyPr wrap="square" lIns="0" tIns="0" rIns="0" bIns="0" rtlCol="0" anchor="ctr"/>
+          <a:lstStyle/>
+          <a:p>
+            <a:pPr algn="ctr" indent="0" marL="0">
+              <a:buNone/>
+            </a:pPr>
+            <a:r>
+              <a:rPr lang="en-US" sz="2200" b="1" dirty="0">
                 <a:solidFill>
                   <a:srgbClr val="635BFF"/>
                 </a:solidFill>
@@ -3410,16 +3543,77 @@
                 <a:ea typeface="Georgia" pitchFamily="34" charset="-122"/>
                 <a:cs typeface="Georgia" pitchFamily="34" charset="-120"/>
               </a:rPr>
-              <a:t>and write me a one-page</a:t>
-            </a:r>
-            <a:endParaRPr lang="en-US" sz="2800" dirty="0"/>
-          </a:p>
-          <a:p>
-            <a:pPr algn="ctr" indent="0" marL="0">
-              <a:buNone/>
-            </a:pPr>
-            <a:r>
-              <a:rPr lang="en-US" sz="3600" b="1" dirty="0">
+              <a:t>1</a:t>
+            </a:r>
+            <a:endParaRPr lang="en-US" sz="2200" dirty="0"/>
+          </a:p>
+        </p:txBody>
+      </p:sp>
+      <p:sp>
+        <p:nvSpPr>
+          <p:cNvPr id="6" name="Text 4"/>
+          <p:cNvSpPr/>
+          <p:nvPr/>
+        </p:nvSpPr>
+        <p:spPr>
+          <a:xfrm>
+            <a:off x="2560320" y="2194560"/>
+            <a:ext cx="4572000" cy="457200"/>
+          </a:xfrm>
+          <a:prstGeom prst="rect">
+            <a:avLst/>
+          </a:prstGeom>
+          <a:noFill/>
+          <a:ln/>
+        </p:spPr>
+        <p:txBody>
+          <a:bodyPr wrap="square" lIns="0" tIns="0" rIns="0" bIns="0" rtlCol="0" anchor="ctr"/>
+          <a:lstStyle/>
+          <a:p>
+            <a:pPr algn="l" indent="0" marL="0">
+              <a:buNone/>
+            </a:pPr>
+            <a:r>
+              <a:rPr lang="en-US" sz="2000" dirty="0">
+                <a:solidFill>
+                  <a:srgbClr val="EDEDED"/>
+                </a:solidFill>
+                <a:latin typeface="Verdana" pitchFamily="34" charset="0"/>
+                <a:ea typeface="Verdana" pitchFamily="34" charset="-122"/>
+                <a:cs typeface="Verdana" pitchFamily="34" charset="-120"/>
+              </a:rPr>
+              <a:t>Open the Cowork tab</a:t>
+            </a:r>
+            <a:endParaRPr lang="en-US" sz="2000" dirty="0"/>
+          </a:p>
+        </p:txBody>
+      </p:sp>
+      <p:sp>
+        <p:nvSpPr>
+          <p:cNvPr id="7" name="Text 5"/>
+          <p:cNvSpPr/>
+          <p:nvPr/>
+        </p:nvSpPr>
+        <p:spPr>
+          <a:xfrm>
+            <a:off x="1828800" y="2788920"/>
+            <a:ext cx="548640" cy="457200"/>
+          </a:xfrm>
+          <a:prstGeom prst="rect">
+            <a:avLst/>
+          </a:prstGeom>
+          <a:noFill/>
+          <a:ln/>
+        </p:spPr>
+        <p:txBody>
+          <a:bodyPr wrap="square" lIns="0" tIns="0" rIns="0" bIns="0" rtlCol="0" anchor="ctr"/>
+          <a:lstStyle/>
+          <a:p>
+            <a:pPr algn="ctr" indent="0" marL="0">
+              <a:buNone/>
+            </a:pPr>
+            <a:r>
+              <a:rPr lang="en-US" sz="2200" b="1" dirty="0">
                 <a:solidFill>
                   <a:srgbClr val="635BFF"/>
                 </a:solidFill>
@@ -3427,26 +3621,204 @@
                 <a:ea typeface="Georgia" pitchFamily="34" charset="-122"/>
                 <a:cs typeface="Georgia" pitchFamily="34" charset="-120"/>
               </a:rPr>
-              <a:t>executive summary"</a:t>
-            </a:r>
-            <a:endParaRPr lang="en-US" sz="2800" dirty="0"/>
-          </a:p>
-          <a:p>
-            <a:pPr algn="ctr" indent="0" marL="0">
-              <a:buNone/>
-            </a:pPr>
-            <a:r>
-              <a:rPr lang="en-US" sz="2200" i="1" dirty="0">
-                <a:solidFill>
-                  <a:srgbClr val="8B95A5"/>
+              <a:t>2</a:t>
+            </a:r>
+            <a:endParaRPr lang="en-US" sz="2200" dirty="0"/>
+          </a:p>
+        </p:txBody>
+      </p:sp>
+      <p:sp>
+        <p:nvSpPr>
+          <p:cNvPr id="8" name="Text 6"/>
+          <p:cNvSpPr/>
+          <p:nvPr/>
+        </p:nvSpPr>
+        <p:spPr>
+          <a:xfrm>
+            <a:off x="2560320" y="2788920"/>
+            <a:ext cx="4572000" cy="457200"/>
+          </a:xfrm>
+          <a:prstGeom prst="rect">
+            <a:avLst/>
+          </a:prstGeom>
+          <a:noFill/>
+          <a:ln/>
+        </p:spPr>
+        <p:txBody>
+          <a:bodyPr wrap="square" lIns="0" tIns="0" rIns="0" bIns="0" rtlCol="0" anchor="ctr"/>
+          <a:lstStyle/>
+          <a:p>
+            <a:pPr algn="l" indent="0" marL="0">
+              <a:buNone/>
+            </a:pPr>
+            <a:r>
+              <a:rPr lang="en-US" sz="2000" dirty="0">
+                <a:solidFill>
+                  <a:srgbClr val="EDEDED"/>
                 </a:solidFill>
                 <a:latin typeface="Verdana" pitchFamily="34" charset="0"/>
                 <a:ea typeface="Verdana" pitchFamily="34" charset="-122"/>
                 <a:cs typeface="Verdana" pitchFamily="34" charset="-120"/>
               </a:rPr>
-              <a:t>You didn't open a single file.</a:t>
-            </a:r>
-            <a:endParaRPr lang="en-US" sz="2800" dirty="0"/>
+              <a:t>Check "Work in a Folder"</a:t>
+            </a:r>
+            <a:endParaRPr lang="en-US" sz="2000" dirty="0"/>
+          </a:p>
+        </p:txBody>
+      </p:sp>
+      <p:sp>
+        <p:nvSpPr>
+          <p:cNvPr id="9" name="Text 7"/>
+          <p:cNvSpPr/>
+          <p:nvPr/>
+        </p:nvSpPr>
+        <p:spPr>
+          <a:xfrm>
+            <a:off x="1828800" y="3383280"/>
+            <a:ext cx="548640" cy="457200"/>
+          </a:xfrm>
+          <a:prstGeom prst="rect">
+            <a:avLst/>
+          </a:prstGeom>
+          <a:noFill/>
+          <a:ln/>
+        </p:spPr>
+        <p:txBody>
+          <a:bodyPr wrap="square" lIns="0" tIns="0" rIns="0" bIns="0" rtlCol="0" anchor="ctr"/>
+          <a:lstStyle/>
+          <a:p>
+            <a:pPr algn="ctr" indent="0" marL="0">
+              <a:buNone/>
+            </a:pPr>
+            <a:r>
+              <a:rPr lang="en-US" sz="2200" b="1" dirty="0">
+                <a:solidFill>
+                  <a:srgbClr val="635BFF"/>
+                </a:solidFill>
+                <a:latin typeface="Georgia" pitchFamily="34" charset="0"/>
+                <a:ea typeface="Georgia" pitchFamily="34" charset="-122"/>
+                <a:cs typeface="Georgia" pitchFamily="34" charset="-120"/>
+              </a:rPr>
+              <a:t>3</a:t>
+            </a:r>
+            <a:endParaRPr lang="en-US" sz="2200" dirty="0"/>
+          </a:p>
+        </p:txBody>
+      </p:sp>
+      <p:sp>
+        <p:nvSpPr>
+          <p:cNvPr id="10" name="Text 8"/>
+          <p:cNvSpPr/>
+          <p:nvPr/>
+        </p:nvSpPr>
+        <p:spPr>
+          <a:xfrm>
+            <a:off x="2560320" y="3383280"/>
+            <a:ext cx="4572000" cy="457200"/>
+          </a:xfrm>
+          <a:prstGeom prst="rect">
+            <a:avLst/>
+          </a:prstGeom>
+          <a:noFill/>
+          <a:ln/>
+        </p:spPr>
+        <p:txBody>
+          <a:bodyPr wrap="square" lIns="0" tIns="0" rIns="0" bIns="0" rtlCol="0" anchor="ctr"/>
+          <a:lstStyle/>
+          <a:p>
+            <a:pPr algn="l" indent="0" marL="0">
+              <a:buNone/>
+            </a:pPr>
+            <a:r>
+              <a:rPr lang="en-US" sz="2000" dirty="0">
+                <a:solidFill>
+                  <a:srgbClr val="EDEDED"/>
+                </a:solidFill>
+                <a:latin typeface="Verdana" pitchFamily="34" charset="0"/>
+                <a:ea typeface="Verdana" pitchFamily="34" charset="-122"/>
+                <a:cs typeface="Verdana" pitchFamily="34" charset="-120"/>
+              </a:rPr>
+              <a:t>Select a folder on your Mac</a:t>
+            </a:r>
+            <a:endParaRPr lang="en-US" sz="2000" dirty="0"/>
+          </a:p>
+        </p:txBody>
+      </p:sp>
+      <p:sp>
+        <p:nvSpPr>
+          <p:cNvPr id="11" name="Text 9"/>
+          <p:cNvSpPr/>
+          <p:nvPr/>
+        </p:nvSpPr>
+        <p:spPr>
+          <a:xfrm>
+            <a:off x="1828800" y="3977640"/>
+            <a:ext cx="548640" cy="457200"/>
+          </a:xfrm>
+          <a:prstGeom prst="rect">
+            <a:avLst/>
+          </a:prstGeom>
+          <a:noFill/>
+          <a:ln/>
+        </p:spPr>
+        <p:txBody>
+          <a:bodyPr wrap="square" lIns="0" tIns="0" rIns="0" bIns="0" rtlCol="0" anchor="ctr"/>
+          <a:lstStyle/>
+          <a:p>
+            <a:pPr algn="ctr" indent="0" marL="0">
+              <a:buNone/>
+            </a:pPr>
+            <a:r>
+              <a:rPr lang="en-US" sz="2200" b="1" dirty="0">
+                <a:solidFill>
+                  <a:srgbClr val="635BFF"/>
+                </a:solidFill>
+                <a:latin typeface="Georgia" pitchFamily="34" charset="0"/>
+                <a:ea typeface="Georgia" pitchFamily="34" charset="-122"/>
+                <a:cs typeface="Georgia" pitchFamily="34" charset="-120"/>
+              </a:rPr>
+              <a:t>4</a:t>
+            </a:r>
+            <a:endParaRPr lang="en-US" sz="2200" dirty="0"/>
+          </a:p>
+        </p:txBody>
+      </p:sp>
+      <p:sp>
+        <p:nvSpPr>
+          <p:cNvPr id="12" name="Text 10"/>
+          <p:cNvSpPr/>
+          <p:nvPr/>
+        </p:nvSpPr>
+        <p:spPr>
+          <a:xfrm>
+            <a:off x="2560320" y="3977640"/>
+            <a:ext cx="4572000" cy="457200"/>
+          </a:xfrm>
+          <a:prstGeom prst="rect">
+            <a:avLst/>
+          </a:prstGeom>
+          <a:noFill/>
+          <a:ln/>
+        </p:spPr>
+        <p:txBody>
+          <a:bodyPr wrap="square" lIns="0" tIns="0" rIns="0" bIns="0" rtlCol="0" anchor="ctr"/>
+          <a:lstStyle/>
+          <a:p>
+            <a:pPr algn="l" indent="0" marL="0">
+              <a:buNone/>
+            </a:pPr>
+            <a:r>
+              <a:rPr lang="en-US" sz="2000" dirty="0">
+                <a:solidFill>
+                  <a:srgbClr val="EDEDED"/>
+                </a:solidFill>
+                <a:latin typeface="Verdana" pitchFamily="34" charset="0"/>
+                <a:ea typeface="Verdana" pitchFamily="34" charset="-122"/>
+                <a:cs typeface="Verdana" pitchFamily="34" charset="-120"/>
+              </a:rPr>
+              <a:t>Grant access</a:t>
+            </a:r>
+            <a:endParaRPr lang="en-US" sz="2000" dirty="0"/>
           </a:p>
         </p:txBody>
       </p:sp>
@@ -3512,8 +3884,8 @@
         </p:nvSpPr>
         <p:spPr>
           <a:xfrm>
-            <a:off x="731520" y="365760"/>
-            <a:ext cx="7680960" cy="914400"/>
+            <a:off x="914400" y="914400"/>
+            <a:ext cx="7315200" cy="3291840"/>
           </a:xfrm>
           <a:prstGeom prst="rect">
             <a:avLst/>
@@ -3529,17 +3901,17 @@
               <a:buNone/>
             </a:pPr>
             <a:r>
-              <a:rPr lang="en-US" sz="3600" b="1" dirty="0">
-                <a:solidFill>
-                  <a:srgbClr val="FFFFFF"/>
+              <a:rPr lang="en-US" sz="2800" b="1" dirty="0">
+                <a:solidFill>
+                  <a:srgbClr val="635BFF"/>
                 </a:solidFill>
                 <a:latin typeface="Georgia" pitchFamily="34" charset="0"/>
                 <a:ea typeface="Georgia" pitchFamily="34" charset="-122"/>
                 <a:cs typeface="Georgia" pitchFamily="34" charset="-120"/>
               </a:rPr>
-              <a:t>Give Claude the source.</a:t>
-            </a:r>
-            <a:endParaRPr lang="en-US" sz="3600" dirty="0"/>
+              <a:t>In Cowork, try:</a:t>
+            </a:r>
+            <a:endParaRPr lang="en-US" sz="2800" dirty="0"/>
           </a:p>
           <a:p>
             <a:pPr algn="ctr" indent="0" marL="0">
@@ -3548,103 +3920,56 @@
             <a:r>
               <a:rPr lang="en-US" sz="3600" b="1" dirty="0">
                 <a:solidFill>
-                  <a:srgbClr val="FFFFFF"/>
+                  <a:srgbClr val="635BFF"/>
                 </a:solidFill>
                 <a:latin typeface="Georgia" pitchFamily="34" charset="0"/>
                 <a:ea typeface="Georgia" pitchFamily="34" charset="-122"/>
                 <a:cs typeface="Georgia" pitchFamily="34" charset="-120"/>
               </a:rPr>
-              <a:t>Stop being the courier.</a:t>
-            </a:r>
-            <a:endParaRPr lang="en-US" sz="3600" dirty="0"/>
-          </a:p>
-        </p:txBody>
-      </p:sp>
-      <p:sp>
-        <p:nvSpPr>
-          <p:cNvPr id="4" name="Text 2"/>
-          <p:cNvSpPr/>
-          <p:nvPr/>
-        </p:nvSpPr>
-        <p:spPr>
-          <a:xfrm>
-            <a:off x="731520" y="1828800"/>
-            <a:ext cx="2377440" cy="640080"/>
-          </a:xfrm>
-          <a:prstGeom prst="rect">
-            <a:avLst/>
-          </a:prstGeom>
-          <a:noFill/>
-          <a:ln/>
-        </p:spPr>
-        <p:txBody>
-          <a:bodyPr wrap="square" lIns="0" tIns="0" rIns="0" bIns="0" rtlCol="0" anchor="b"/>
-          <a:lstStyle/>
-          <a:p>
-            <a:pPr algn="ctr" indent="0" marL="0">
-              <a:buNone/>
-            </a:pPr>
-            <a:r>
-              <a:rPr lang="en-US" sz="2600" b="1" dirty="0">
-                <a:solidFill>
-                  <a:srgbClr val="FFFFFF"/>
+              <a:t>"Read everything in this folder</a:t>
+            </a:r>
+            <a:endParaRPr lang="en-US" sz="2800" dirty="0"/>
+          </a:p>
+          <a:p>
+            <a:pPr algn="ctr" indent="0" marL="0">
+              <a:buNone/>
+            </a:pPr>
+            <a:r>
+              <a:rPr lang="en-US" sz="3600" b="1" dirty="0">
+                <a:solidFill>
+                  <a:srgbClr val="635BFF"/>
                 </a:solidFill>
                 <a:latin typeface="Georgia" pitchFamily="34" charset="0"/>
                 <a:ea typeface="Georgia" pitchFamily="34" charset="-122"/>
                 <a:cs typeface="Georgia" pitchFamily="34" charset="-120"/>
               </a:rPr>
-              <a:t>Your email</a:t>
-            </a:r>
-            <a:endParaRPr lang="en-US" sz="2600" dirty="0"/>
-          </a:p>
-        </p:txBody>
-      </p:sp>
-      <p:sp>
-        <p:nvSpPr>
-          <p:cNvPr id="5" name="Shape 3"/>
-          <p:cNvSpPr/>
-          <p:nvPr/>
-        </p:nvSpPr>
-        <p:spPr>
-          <a:xfrm>
-            <a:off x="1325880" y="2606040"/>
-            <a:ext cx="1188720" cy="36576"/>
-          </a:xfrm>
-          <a:prstGeom prst="rect">
-            <a:avLst/>
-          </a:prstGeom>
-          <a:solidFill>
-            <a:srgbClr val="635BFF"/>
-          </a:solidFill>
-          <a:ln/>
-        </p:spPr>
-      </p:sp>
-      <p:sp>
-        <p:nvSpPr>
-          <p:cNvPr id="6" name="Text 4"/>
-          <p:cNvSpPr/>
-          <p:nvPr/>
-        </p:nvSpPr>
-        <p:spPr>
-          <a:xfrm>
-            <a:off x="731520" y="2788920"/>
-            <a:ext cx="2377440" cy="457200"/>
-          </a:xfrm>
-          <a:prstGeom prst="rect">
-            <a:avLst/>
-          </a:prstGeom>
-          <a:noFill/>
-          <a:ln/>
-        </p:spPr>
-        <p:txBody>
-          <a:bodyPr wrap="square" lIns="0" tIns="0" rIns="0" bIns="0" rtlCol="0" anchor="t"/>
-          <a:lstStyle/>
-          <a:p>
-            <a:pPr algn="ctr" indent="0" marL="0">
-              <a:buNone/>
-            </a:pPr>
-            <a:r>
-              <a:rPr lang="en-US" sz="1800" i="1" dirty="0">
+              <a:t>and write me a one-page</a:t>
+            </a:r>
+            <a:endParaRPr lang="en-US" sz="2800" dirty="0"/>
+          </a:p>
+          <a:p>
+            <a:pPr algn="ctr" indent="0" marL="0">
+              <a:buNone/>
+            </a:pPr>
+            <a:r>
+              <a:rPr lang="en-US" sz="3600" b="1" dirty="0">
+                <a:solidFill>
+                  <a:srgbClr val="635BFF"/>
+                </a:solidFill>
+                <a:latin typeface="Georgia" pitchFamily="34" charset="0"/>
+                <a:ea typeface="Georgia" pitchFamily="34" charset="-122"/>
+                <a:cs typeface="Georgia" pitchFamily="34" charset="-120"/>
+              </a:rPr>
+              <a:t>executive summary"</a:t>
+            </a:r>
+            <a:endParaRPr lang="en-US" sz="2800" dirty="0"/>
+          </a:p>
+          <a:p>
+            <a:pPr algn="ctr" indent="0" marL="0">
+              <a:buNone/>
+            </a:pPr>
+            <a:r>
+              <a:rPr lang="en-US" sz="2200" i="1" dirty="0">
                 <a:solidFill>
                   <a:srgbClr val="8B95A5"/>
                 </a:solidFill>
@@ -3652,205 +3977,9 @@
                 <a:ea typeface="Verdana" pitchFamily="34" charset="-122"/>
                 <a:cs typeface="Verdana" pitchFamily="34" charset="-120"/>
               </a:rPr>
-              <a:t>Gmail connector</a:t>
-            </a:r>
-            <a:endParaRPr lang="en-US" sz="1800" dirty="0"/>
-          </a:p>
-        </p:txBody>
-      </p:sp>
-      <p:sp>
-        <p:nvSpPr>
-          <p:cNvPr id="7" name="Text 5"/>
-          <p:cNvSpPr/>
-          <p:nvPr/>
-        </p:nvSpPr>
-        <p:spPr>
-          <a:xfrm>
-            <a:off x="3383280" y="1828800"/>
-            <a:ext cx="2377440" cy="640080"/>
-          </a:xfrm>
-          <a:prstGeom prst="rect">
-            <a:avLst/>
-          </a:prstGeom>
-          <a:noFill/>
-          <a:ln/>
-        </p:spPr>
-        <p:txBody>
-          <a:bodyPr wrap="square" lIns="0" tIns="0" rIns="0" bIns="0" rtlCol="0" anchor="b"/>
-          <a:lstStyle/>
-          <a:p>
-            <a:pPr algn="ctr" indent="0" marL="0">
-              <a:buNone/>
-            </a:pPr>
-            <a:r>
-              <a:rPr lang="en-US" sz="2600" b="1" dirty="0">
-                <a:solidFill>
-                  <a:srgbClr val="FFFFFF"/>
-                </a:solidFill>
-                <a:latin typeface="Georgia" pitchFamily="34" charset="0"/>
-                <a:ea typeface="Georgia" pitchFamily="34" charset="-122"/>
-                <a:cs typeface="Georgia" pitchFamily="34" charset="-120"/>
-              </a:rPr>
-              <a:t>The web</a:t>
-            </a:r>
-            <a:endParaRPr lang="en-US" sz="2600" dirty="0"/>
-          </a:p>
-        </p:txBody>
-      </p:sp>
-      <p:sp>
-        <p:nvSpPr>
-          <p:cNvPr id="8" name="Shape 6"/>
-          <p:cNvSpPr/>
-          <p:nvPr/>
-        </p:nvSpPr>
-        <p:spPr>
-          <a:xfrm>
-            <a:off x="3977640" y="2606040"/>
-            <a:ext cx="1188720" cy="36576"/>
-          </a:xfrm>
-          <a:prstGeom prst="rect">
-            <a:avLst/>
-          </a:prstGeom>
-          <a:solidFill>
-            <a:srgbClr val="635BFF"/>
-          </a:solidFill>
-          <a:ln/>
-        </p:spPr>
-      </p:sp>
-      <p:sp>
-        <p:nvSpPr>
-          <p:cNvPr id="9" name="Text 7"/>
-          <p:cNvSpPr/>
-          <p:nvPr/>
-        </p:nvSpPr>
-        <p:spPr>
-          <a:xfrm>
-            <a:off x="3383280" y="2788920"/>
-            <a:ext cx="2377440" cy="457200"/>
-          </a:xfrm>
-          <a:prstGeom prst="rect">
-            <a:avLst/>
-          </a:prstGeom>
-          <a:noFill/>
-          <a:ln/>
-        </p:spPr>
-        <p:txBody>
-          <a:bodyPr wrap="square" lIns="0" tIns="0" rIns="0" bIns="0" rtlCol="0" anchor="t"/>
-          <a:lstStyle/>
-          <a:p>
-            <a:pPr algn="ctr" indent="0" marL="0">
-              <a:buNone/>
-            </a:pPr>
-            <a:r>
-              <a:rPr lang="en-US" sz="1800" i="1" dirty="0">
-                <a:solidFill>
-                  <a:srgbClr val="8B95A5"/>
-                </a:solidFill>
-                <a:latin typeface="Verdana" pitchFamily="34" charset="0"/>
-                <a:ea typeface="Verdana" pitchFamily="34" charset="-122"/>
-                <a:cs typeface="Verdana" pitchFamily="34" charset="-120"/>
-              </a:rPr>
-              <a:t>Built-in search</a:t>
-            </a:r>
-            <a:endParaRPr lang="en-US" sz="1800" dirty="0"/>
-          </a:p>
-        </p:txBody>
-      </p:sp>
-      <p:sp>
-        <p:nvSpPr>
-          <p:cNvPr id="10" name="Text 8"/>
-          <p:cNvSpPr/>
-          <p:nvPr/>
-        </p:nvSpPr>
-        <p:spPr>
-          <a:xfrm>
-            <a:off x="6035040" y="1828800"/>
-            <a:ext cx="2377440" cy="640080"/>
-          </a:xfrm>
-          <a:prstGeom prst="rect">
-            <a:avLst/>
-          </a:prstGeom>
-          <a:noFill/>
-          <a:ln/>
-        </p:spPr>
-        <p:txBody>
-          <a:bodyPr wrap="square" lIns="0" tIns="0" rIns="0" bIns="0" rtlCol="0" anchor="b"/>
-          <a:lstStyle/>
-          <a:p>
-            <a:pPr algn="ctr" indent="0" marL="0">
-              <a:buNone/>
-            </a:pPr>
-            <a:r>
-              <a:rPr lang="en-US" sz="2600" b="1" dirty="0">
-                <a:solidFill>
-                  <a:srgbClr val="FFFFFF"/>
-                </a:solidFill>
-                <a:latin typeface="Georgia" pitchFamily="34" charset="0"/>
-                <a:ea typeface="Georgia" pitchFamily="34" charset="-122"/>
-                <a:cs typeface="Georgia" pitchFamily="34" charset="-120"/>
-              </a:rPr>
-              <a:t>Your files</a:t>
-            </a:r>
-            <a:endParaRPr lang="en-US" sz="2600" dirty="0"/>
-          </a:p>
-        </p:txBody>
-      </p:sp>
-      <p:sp>
-        <p:nvSpPr>
-          <p:cNvPr id="11" name="Shape 9"/>
-          <p:cNvSpPr/>
-          <p:nvPr/>
-        </p:nvSpPr>
-        <p:spPr>
-          <a:xfrm>
-            <a:off x="6629400" y="2606040"/>
-            <a:ext cx="1188720" cy="36576"/>
-          </a:xfrm>
-          <a:prstGeom prst="rect">
-            <a:avLst/>
-          </a:prstGeom>
-          <a:solidFill>
-            <a:srgbClr val="635BFF"/>
-          </a:solidFill>
-          <a:ln/>
-        </p:spPr>
-      </p:sp>
-      <p:sp>
-        <p:nvSpPr>
-          <p:cNvPr id="12" name="Text 10"/>
-          <p:cNvSpPr/>
-          <p:nvPr/>
-        </p:nvSpPr>
-        <p:spPr>
-          <a:xfrm>
-            <a:off x="6035040" y="2788920"/>
-            <a:ext cx="2377440" cy="457200"/>
-          </a:xfrm>
-          <a:prstGeom prst="rect">
-            <a:avLst/>
-          </a:prstGeom>
-          <a:noFill/>
-          <a:ln/>
-        </p:spPr>
-        <p:txBody>
-          <a:bodyPr wrap="square" lIns="0" tIns="0" rIns="0" bIns="0" rtlCol="0" anchor="t"/>
-          <a:lstStyle/>
-          <a:p>
-            <a:pPr algn="ctr" indent="0" marL="0">
-              <a:buNone/>
-            </a:pPr>
-            <a:r>
-              <a:rPr lang="en-US" sz="1800" i="1" dirty="0">
-                <a:solidFill>
-                  <a:srgbClr val="8B95A5"/>
-                </a:solidFill>
-                <a:latin typeface="Verdana" pitchFamily="34" charset="0"/>
-                <a:ea typeface="Verdana" pitchFamily="34" charset="-122"/>
-                <a:cs typeface="Verdana" pitchFamily="34" charset="-120"/>
-              </a:rPr>
-              <a:t>Cowork</a:t>
-            </a:r>
-            <a:endParaRPr lang="en-US" sz="1800" dirty="0"/>
+              <a:t>You didn't open a single file.</a:t>
+            </a:r>
+            <a:endParaRPr lang="en-US" sz="2800" dirty="0"/>
           </a:p>
         </p:txBody>
       </p:sp>
@@ -3916,8 +4045,8 @@
         </p:nvSpPr>
         <p:spPr>
           <a:xfrm>
-            <a:off x="731520" y="457200"/>
-            <a:ext cx="7680960" cy="731520"/>
+            <a:off x="731520" y="365760"/>
+            <a:ext cx="7680960" cy="914400"/>
           </a:xfrm>
           <a:prstGeom prst="rect">
             <a:avLst/>
@@ -3929,7 +4058,7 @@
           <a:bodyPr wrap="square" lIns="0" tIns="0" rIns="0" bIns="0" rtlCol="0" anchor="ctr"/>
           <a:lstStyle/>
           <a:p>
-            <a:pPr algn="l" indent="0" marL="0">
+            <a:pPr algn="ctr" indent="0" marL="0">
               <a:buNone/>
             </a:pPr>
             <a:r>
@@ -3941,10 +4070,27 @@
                 <a:ea typeface="Georgia" pitchFamily="34" charset="-122"/>
                 <a:cs typeface="Georgia" pitchFamily="34" charset="-120"/>
               </a:rPr>
-              <a:t>You just handed AI the keys</a:t>
+              <a:t>Give Claude the source.</a:t>
             </a:r>
             <a:endParaRPr lang="en-US" sz="3600" dirty="0"/>
           </a:p>
+          <a:p>
+            <a:pPr algn="ctr" indent="0" marL="0">
+              <a:buNone/>
+            </a:pPr>
+            <a:r>
+              <a:rPr lang="en-US" sz="3600" b="1" dirty="0">
+                <a:solidFill>
+                  <a:srgbClr val="FFFFFF"/>
+                </a:solidFill>
+                <a:latin typeface="Georgia" pitchFamily="34" charset="0"/>
+                <a:ea typeface="Georgia" pitchFamily="34" charset="-122"/>
+                <a:cs typeface="Georgia" pitchFamily="34" charset="-120"/>
+              </a:rPr>
+              <a:t>Stop being the courier.</a:t>
+            </a:r>
+            <a:endParaRPr lang="en-US" sz="3600" dirty="0"/>
+          </a:p>
         </p:txBody>
       </p:sp>
       <p:sp>
@@ -3955,47 +4101,145 @@
         </p:nvSpPr>
         <p:spPr>
           <a:xfrm>
-            <a:off x="914400" y="1463040"/>
-            <a:ext cx="7315200" cy="502920"/>
-          </a:xfrm>
-          <a:prstGeom prst="rect">
-            <a:avLst/>
-          </a:prstGeom>
-          <a:noFill/>
-          <a:ln/>
-        </p:spPr>
-        <p:txBody>
-          <a:bodyPr wrap="square" lIns="0" tIns="0" rIns="0" bIns="0" rtlCol="0" anchor="ctr"/>
-          <a:lstStyle/>
-          <a:p>
-            <a:pPr algn="l" indent="0" marL="0">
-              <a:buNone/>
-            </a:pPr>
-            <a:r>
-              <a:rPr lang="en-US" sz="2200" dirty="0">
-                <a:solidFill>
-                  <a:srgbClr val="EDEDED"/>
+            <a:off x="731520" y="1828800"/>
+            <a:ext cx="2377440" cy="640080"/>
+          </a:xfrm>
+          <a:prstGeom prst="rect">
+            <a:avLst/>
+          </a:prstGeom>
+          <a:noFill/>
+          <a:ln/>
+        </p:spPr>
+        <p:txBody>
+          <a:bodyPr wrap="square" lIns="0" tIns="0" rIns="0" bIns="0" rtlCol="0" anchor="b"/>
+          <a:lstStyle/>
+          <a:p>
+            <a:pPr algn="ctr" indent="0" marL="0">
+              <a:buNone/>
+            </a:pPr>
+            <a:r>
+              <a:rPr lang="en-US" sz="2600" b="1" dirty="0">
+                <a:solidFill>
+                  <a:srgbClr val="FFFFFF"/>
+                </a:solidFill>
+                <a:latin typeface="Georgia" pitchFamily="34" charset="0"/>
+                <a:ea typeface="Georgia" pitchFamily="34" charset="-122"/>
+                <a:cs typeface="Georgia" pitchFamily="34" charset="-120"/>
+              </a:rPr>
+              <a:t>Your email</a:t>
+            </a:r>
+            <a:endParaRPr lang="en-US" sz="2600" dirty="0"/>
+          </a:p>
+        </p:txBody>
+      </p:sp>
+      <p:sp>
+        <p:nvSpPr>
+          <p:cNvPr id="5" name="Shape 3"/>
+          <p:cNvSpPr/>
+          <p:nvPr/>
+        </p:nvSpPr>
+        <p:spPr>
+          <a:xfrm>
+            <a:off x="1325880" y="2606040"/>
+            <a:ext cx="1188720" cy="36576"/>
+          </a:xfrm>
+          <a:prstGeom prst="rect">
+            <a:avLst/>
+          </a:prstGeom>
+          <a:solidFill>
+            <a:srgbClr val="635BFF"/>
+          </a:solidFill>
+          <a:ln/>
+        </p:spPr>
+      </p:sp>
+      <p:sp>
+        <p:nvSpPr>
+          <p:cNvPr id="6" name="Text 4"/>
+          <p:cNvSpPr/>
+          <p:nvPr/>
+        </p:nvSpPr>
+        <p:spPr>
+          <a:xfrm>
+            <a:off x="731520" y="2788920"/>
+            <a:ext cx="2377440" cy="457200"/>
+          </a:xfrm>
+          <a:prstGeom prst="rect">
+            <a:avLst/>
+          </a:prstGeom>
+          <a:noFill/>
+          <a:ln/>
+        </p:spPr>
+        <p:txBody>
+          <a:bodyPr wrap="square" lIns="0" tIns="0" rIns="0" bIns="0" rtlCol="0" anchor="t"/>
+          <a:lstStyle/>
+          <a:p>
+            <a:pPr algn="ctr" indent="0" marL="0">
+              <a:buNone/>
+            </a:pPr>
+            <a:r>
+              <a:rPr lang="en-US" sz="1800" i="1" dirty="0">
+                <a:solidFill>
+                  <a:srgbClr val="8B95A5"/>
                 </a:solidFill>
                 <a:latin typeface="Verdana" pitchFamily="34" charset="0"/>
                 <a:ea typeface="Verdana" pitchFamily="34" charset="-122"/>
                 <a:cs typeface="Verdana" pitchFamily="34" charset="-120"/>
               </a:rPr>
-              <a:t>Never trust numbers you didn't provide</a:t>
-            </a:r>
-            <a:endParaRPr lang="en-US" sz="2200" dirty="0"/>
-          </a:p>
-        </p:txBody>
-      </p:sp>
-      <p:sp>
-        <p:nvSpPr>
-          <p:cNvPr id="5" name="Shape 3"/>
-          <p:cNvSpPr/>
-          <p:nvPr/>
-        </p:nvSpPr>
-        <p:spPr>
-          <a:xfrm>
-            <a:off x="548640" y="1572768"/>
-            <a:ext cx="182880" cy="182880"/>
+              <a:t>Gmail connector</a:t>
+            </a:r>
+            <a:endParaRPr lang="en-US" sz="1800" dirty="0"/>
+          </a:p>
+        </p:txBody>
+      </p:sp>
+      <p:sp>
+        <p:nvSpPr>
+          <p:cNvPr id="7" name="Text 5"/>
+          <p:cNvSpPr/>
+          <p:nvPr/>
+        </p:nvSpPr>
+        <p:spPr>
+          <a:xfrm>
+            <a:off x="3383280" y="1828800"/>
+            <a:ext cx="2377440" cy="640080"/>
+          </a:xfrm>
+          <a:prstGeom prst="rect">
+            <a:avLst/>
+          </a:prstGeom>
+          <a:noFill/>
+          <a:ln/>
+        </p:spPr>
+        <p:txBody>
+          <a:bodyPr wrap="square" lIns="0" tIns="0" rIns="0" bIns="0" rtlCol="0" anchor="b"/>
+          <a:lstStyle/>
+          <a:p>
+            <a:pPr algn="ctr" indent="0" marL="0">
+              <a:buNone/>
+            </a:pPr>
+            <a:r>
+              <a:rPr lang="en-US" sz="2600" b="1" dirty="0">
+                <a:solidFill>
+                  <a:srgbClr val="FFFFFF"/>
+                </a:solidFill>
+                <a:latin typeface="Georgia" pitchFamily="34" charset="0"/>
+                <a:ea typeface="Georgia" pitchFamily="34" charset="-122"/>
+                <a:cs typeface="Georgia" pitchFamily="34" charset="-120"/>
+              </a:rPr>
+              <a:t>The web</a:t>
+            </a:r>
+            <a:endParaRPr lang="en-US" sz="2600" dirty="0"/>
+          </a:p>
+        </p:txBody>
+      </p:sp>
+      <p:sp>
+        <p:nvSpPr>
+          <p:cNvPr id="8" name="Shape 6"/>
+          <p:cNvSpPr/>
+          <p:nvPr/>
+        </p:nvSpPr>
+        <p:spPr>
+          <a:xfrm>
+            <a:off x="3977640" y="2606040"/>
+            <a:ext cx="1188720" cy="36576"/>
           </a:xfrm>
           <a:prstGeom prst="rect">
             <a:avLst/>
@@ -4008,53 +4252,92 @@
       </p:sp>
       <p:sp>
         <p:nvSpPr>
-          <p:cNvPr id="6" name="Text 4"/>
-          <p:cNvSpPr/>
-          <p:nvPr/>
-        </p:nvSpPr>
-        <p:spPr>
-          <a:xfrm>
-            <a:off x="914400" y="2057400"/>
-            <a:ext cx="7315200" cy="502920"/>
-          </a:xfrm>
-          <a:prstGeom prst="rect">
-            <a:avLst/>
-          </a:prstGeom>
-          <a:noFill/>
-          <a:ln/>
-        </p:spPr>
-        <p:txBody>
-          <a:bodyPr wrap="square" lIns="0" tIns="0" rIns="0" bIns="0" rtlCol="0" anchor="ctr"/>
-          <a:lstStyle/>
-          <a:p>
-            <a:pPr algn="l" indent="0" marL="0">
-              <a:buNone/>
-            </a:pPr>
-            <a:r>
-              <a:rPr lang="en-US" sz="2200" dirty="0">
-                <a:solidFill>
-                  <a:srgbClr val="EDEDED"/>
+          <p:cNvPr id="9" name="Text 7"/>
+          <p:cNvSpPr/>
+          <p:nvPr/>
+        </p:nvSpPr>
+        <p:spPr>
+          <a:xfrm>
+            <a:off x="3383280" y="2788920"/>
+            <a:ext cx="2377440" cy="457200"/>
+          </a:xfrm>
+          <a:prstGeom prst="rect">
+            <a:avLst/>
+          </a:prstGeom>
+          <a:noFill/>
+          <a:ln/>
+        </p:spPr>
+        <p:txBody>
+          <a:bodyPr wrap="square" lIns="0" tIns="0" rIns="0" bIns="0" rtlCol="0" anchor="t"/>
+          <a:lstStyle/>
+          <a:p>
+            <a:pPr algn="ctr" indent="0" marL="0">
+              <a:buNone/>
+            </a:pPr>
+            <a:r>
+              <a:rPr lang="en-US" sz="1800" i="1" dirty="0">
+                <a:solidFill>
+                  <a:srgbClr val="8B95A5"/>
                 </a:solidFill>
                 <a:latin typeface="Verdana" pitchFamily="34" charset="0"/>
                 <a:ea typeface="Verdana" pitchFamily="34" charset="-122"/>
                 <a:cs typeface="Verdana" pitchFamily="34" charset="-120"/>
               </a:rPr>
-              <a:t>Verify claims against sources</a:t>
-            </a:r>
-            <a:endParaRPr lang="en-US" sz="2200" dirty="0"/>
-          </a:p>
-        </p:txBody>
-      </p:sp>
-      <p:sp>
-        <p:nvSpPr>
-          <p:cNvPr id="7" name="Shape 5"/>
-          <p:cNvSpPr/>
-          <p:nvPr/>
-        </p:nvSpPr>
-        <p:spPr>
-          <a:xfrm>
-            <a:off x="548640" y="2167128"/>
-            <a:ext cx="182880" cy="182880"/>
+              <a:t>Built-in search</a:t>
+            </a:r>
+            <a:endParaRPr lang="en-US" sz="1800" dirty="0"/>
+          </a:p>
+        </p:txBody>
+      </p:sp>
+      <p:sp>
+        <p:nvSpPr>
+          <p:cNvPr id="10" name="Text 8"/>
+          <p:cNvSpPr/>
+          <p:nvPr/>
+        </p:nvSpPr>
+        <p:spPr>
+          <a:xfrm>
+            <a:off x="6035040" y="1828800"/>
+            <a:ext cx="2377440" cy="640080"/>
+          </a:xfrm>
+          <a:prstGeom prst="rect">
+            <a:avLst/>
+          </a:prstGeom>
+          <a:noFill/>
+          <a:ln/>
+        </p:spPr>
+        <p:txBody>
+          <a:bodyPr wrap="square" lIns="0" tIns="0" rIns="0" bIns="0" rtlCol="0" anchor="b"/>
+          <a:lstStyle/>
+          <a:p>
+            <a:pPr algn="ctr" indent="0" marL="0">
+              <a:buNone/>
+            </a:pPr>
+            <a:r>
+              <a:rPr lang="en-US" sz="2600" b="1" dirty="0">
+                <a:solidFill>
+                  <a:srgbClr val="FFFFFF"/>
+                </a:solidFill>
+                <a:latin typeface="Georgia" pitchFamily="34" charset="0"/>
+                <a:ea typeface="Georgia" pitchFamily="34" charset="-122"/>
+                <a:cs typeface="Georgia" pitchFamily="34" charset="-120"/>
+              </a:rPr>
+              <a:t>Your files</a:t>
+            </a:r>
+            <a:endParaRPr lang="en-US" sz="2600" dirty="0"/>
+          </a:p>
+        </p:txBody>
+      </p:sp>
+      <p:sp>
+        <p:nvSpPr>
+          <p:cNvPr id="11" name="Shape 9"/>
+          <p:cNvSpPr/>
+          <p:nvPr/>
+        </p:nvSpPr>
+        <p:spPr>
+          <a:xfrm>
+            <a:off x="6629400" y="2606040"/>
+            <a:ext cx="1188720" cy="36576"/>
           </a:xfrm>
           <a:prstGeom prst="rect">
             <a:avLst/>
@@ -4067,121 +4350,42 @@
       </p:sp>
       <p:sp>
         <p:nvSpPr>
-          <p:cNvPr id="8" name="Text 6"/>
-          <p:cNvSpPr/>
-          <p:nvPr/>
-        </p:nvSpPr>
-        <p:spPr>
-          <a:xfrm>
-            <a:off x="914400" y="2651760"/>
-            <a:ext cx="7315200" cy="502920"/>
-          </a:xfrm>
-          <a:prstGeom prst="rect">
-            <a:avLst/>
-          </a:prstGeom>
-          <a:noFill/>
-          <a:ln/>
-        </p:spPr>
-        <p:txBody>
-          <a:bodyPr wrap="square" lIns="0" tIns="0" rIns="0" bIns="0" rtlCol="0" anchor="ctr"/>
-          <a:lstStyle/>
-          <a:p>
-            <a:pPr algn="l" indent="0" marL="0">
-              <a:buNone/>
-            </a:pPr>
-            <a:r>
-              <a:rPr lang="en-US" sz="2200" dirty="0">
-                <a:solidFill>
-                  <a:srgbClr val="EDEDED"/>
+          <p:cNvPr id="12" name="Text 10"/>
+          <p:cNvSpPr/>
+          <p:nvPr/>
+        </p:nvSpPr>
+        <p:spPr>
+          <a:xfrm>
+            <a:off x="6035040" y="2788920"/>
+            <a:ext cx="2377440" cy="457200"/>
+          </a:xfrm>
+          <a:prstGeom prst="rect">
+            <a:avLst/>
+          </a:prstGeom>
+          <a:noFill/>
+          <a:ln/>
+        </p:spPr>
+        <p:txBody>
+          <a:bodyPr wrap="square" lIns="0" tIns="0" rIns="0" bIns="0" rtlCol="0" anchor="t"/>
+          <a:lstStyle/>
+          <a:p>
+            <a:pPr algn="ctr" indent="0" marL="0">
+              <a:buNone/>
+            </a:pPr>
+            <a:r>
+              <a:rPr lang="en-US" sz="1800" i="1" dirty="0">
+                <a:solidFill>
+                  <a:srgbClr val="8B95A5"/>
                 </a:solidFill>
                 <a:latin typeface="Verdana" pitchFamily="34" charset="0"/>
                 <a:ea typeface="Verdana" pitchFamily="34" charset="-122"/>
                 <a:cs typeface="Verdana" pitchFamily="34" charset="-120"/>
               </a:rPr>
-              <a:t>Use AI for drafts, not decisions</a:t>
-            </a:r>
-            <a:endParaRPr lang="en-US" sz="2200" dirty="0"/>
-          </a:p>
-        </p:txBody>
-      </p:sp>
-      <p:sp>
-        <p:nvSpPr>
-          <p:cNvPr id="9" name="Shape 7"/>
-          <p:cNvSpPr/>
-          <p:nvPr/>
-        </p:nvSpPr>
-        <p:spPr>
-          <a:xfrm>
-            <a:off x="548640" y="2761488"/>
-            <a:ext cx="182880" cy="182880"/>
-          </a:xfrm>
-          <a:prstGeom prst="rect">
-            <a:avLst/>
-          </a:prstGeom>
-          <a:solidFill>
-            <a:srgbClr val="635BFF"/>
-          </a:solidFill>
-          <a:ln/>
-        </p:spPr>
-      </p:sp>
-      <p:sp>
-        <p:nvSpPr>
-          <p:cNvPr id="10" name="Text 8"/>
-          <p:cNvSpPr/>
-          <p:nvPr/>
-        </p:nvSpPr>
-        <p:spPr>
-          <a:xfrm>
-            <a:off x="914400" y="3246120"/>
-            <a:ext cx="7315200" cy="502920"/>
-          </a:xfrm>
-          <a:prstGeom prst="rect">
-            <a:avLst/>
-          </a:prstGeom>
-          <a:noFill/>
-          <a:ln/>
-        </p:spPr>
-        <p:txBody>
-          <a:bodyPr wrap="square" lIns="0" tIns="0" rIns="0" bIns="0" rtlCol="0" anchor="ctr"/>
-          <a:lstStyle/>
-          <a:p>
-            <a:pPr algn="l" indent="0" marL="0">
-              <a:buNone/>
-            </a:pPr>
-            <a:r>
-              <a:rPr lang="en-US" sz="2200" dirty="0">
-                <a:solidFill>
-                  <a:srgbClr val="EDEDED"/>
-                </a:solidFill>
-                <a:latin typeface="Verdana" pitchFamily="34" charset="0"/>
-                <a:ea typeface="Verdana" pitchFamily="34" charset="-122"/>
-                <a:cs typeface="Verdana" pitchFamily="34" charset="-120"/>
-              </a:rPr>
-              <a:t>Privacy ≠ accuracy</a:t>
-            </a:r>
-            <a:endParaRPr lang="en-US" sz="2200" dirty="0"/>
-          </a:p>
-        </p:txBody>
-      </p:sp>
-      <p:sp>
-        <p:nvSpPr>
-          <p:cNvPr id="11" name="Shape 9"/>
-          <p:cNvSpPr/>
-          <p:nvPr/>
-        </p:nvSpPr>
-        <p:spPr>
-          <a:xfrm>
-            <a:off x="548640" y="3355848"/>
-            <a:ext cx="182880" cy="182880"/>
-          </a:xfrm>
-          <a:prstGeom prst="rect">
-            <a:avLst/>
-          </a:prstGeom>
-          <a:solidFill>
-            <a:srgbClr val="635BFF"/>
-          </a:solidFill>
-          <a:ln/>
-        </p:spPr>
+              <a:t>Cowork</a:t>
+            </a:r>
+            <a:endParaRPr lang="en-US" sz="1800" dirty="0"/>
+          </a:p>
+        </p:txBody>
       </p:sp>
     </p:spTree>
   </p:cSld>
@@ -4245,8 +4449,8 @@
         </p:nvSpPr>
         <p:spPr>
           <a:xfrm>
-            <a:off x="914400" y="914400"/>
-            <a:ext cx="7315200" cy="3291840"/>
+            <a:off x="731520" y="457200"/>
+            <a:ext cx="7680960" cy="731520"/>
           </a:xfrm>
           <a:prstGeom prst="rect">
             <a:avLst/>
@@ -4258,74 +4462,259 @@
           <a:bodyPr wrap="square" lIns="0" tIns="0" rIns="0" bIns="0" rtlCol="0" anchor="ctr"/>
           <a:lstStyle/>
           <a:p>
-            <a:pPr algn="ctr" indent="0" marL="0">
-              <a:buNone/>
-            </a:pPr>
-            <a:r>
-              <a:rPr lang="en-US" sz="2800" b="1" dirty="0">
-                <a:solidFill>
-                  <a:srgbClr val="635BFF"/>
+            <a:pPr algn="l" indent="0" marL="0">
+              <a:buNone/>
+            </a:pPr>
+            <a:r>
+              <a:rPr lang="en-US" sz="3600" b="1" dirty="0">
+                <a:solidFill>
+                  <a:srgbClr val="FFFFFF"/>
                 </a:solidFill>
                 <a:latin typeface="Georgia" pitchFamily="34" charset="0"/>
                 <a:ea typeface="Georgia" pitchFamily="34" charset="-122"/>
                 <a:cs typeface="Georgia" pitchFamily="34" charset="-120"/>
               </a:rPr>
-              <a:t>Pick one claim or number</a:t>
-            </a:r>
-            <a:endParaRPr lang="en-US" sz="2800" dirty="0"/>
-          </a:p>
-          <a:p>
-            <a:pPr algn="ctr" indent="0" marL="0">
-              <a:buNone/>
-            </a:pPr>
-            <a:r>
-              <a:rPr lang="en-US" sz="2800" b="1" dirty="0">
-                <a:solidFill>
-                  <a:srgbClr val="635BFF"/>
-                </a:solidFill>
-                <a:latin typeface="Georgia" pitchFamily="34" charset="0"/>
-                <a:ea typeface="Georgia" pitchFamily="34" charset="-122"/>
-                <a:cs typeface="Georgia" pitchFamily="34" charset="-120"/>
-              </a:rPr>
-              <a:t>from Claude's output</a:t>
-            </a:r>
-            <a:endParaRPr lang="en-US" sz="2800" dirty="0"/>
-          </a:p>
-          <a:p>
-            <a:pPr algn="ctr" indent="0" marL="0">
-              <a:buNone/>
-            </a:pPr>
-            <a:r>
-              <a:rPr lang="en-US" sz="3600" b="1" dirty="0">
-                <a:solidFill>
-                  <a:srgbClr val="635BFF"/>
-                </a:solidFill>
-                <a:latin typeface="Georgia" pitchFamily="34" charset="0"/>
-                <a:ea typeface="Georgia" pitchFamily="34" charset="-122"/>
-                <a:cs typeface="Georgia" pitchFamily="34" charset="-120"/>
-              </a:rPr>
-              <a:t>Verify it manually</a:t>
-            </a:r>
-            <a:endParaRPr lang="en-US" sz="2800" dirty="0"/>
-          </a:p>
-          <a:p>
-            <a:pPr algn="ctr" indent="0" marL="0">
-              <a:buNone/>
-            </a:pPr>
-            <a:r>
-              <a:rPr lang="en-US" sz="2200" i="1" dirty="0">
-                <a:solidFill>
-                  <a:srgbClr val="8B95A5"/>
+              <a:t>You just handed AI the keys</a:t>
+            </a:r>
+            <a:endParaRPr lang="en-US" sz="3600" dirty="0"/>
+          </a:p>
+        </p:txBody>
+      </p:sp>
+      <p:sp>
+        <p:nvSpPr>
+          <p:cNvPr id="4" name="Text 2"/>
+          <p:cNvSpPr/>
+          <p:nvPr/>
+        </p:nvSpPr>
+        <p:spPr>
+          <a:xfrm>
+            <a:off x="914400" y="1463040"/>
+            <a:ext cx="7315200" cy="502920"/>
+          </a:xfrm>
+          <a:prstGeom prst="rect">
+            <a:avLst/>
+          </a:prstGeom>
+          <a:noFill/>
+          <a:ln/>
+        </p:spPr>
+        <p:txBody>
+          <a:bodyPr wrap="square" lIns="0" tIns="0" rIns="0" bIns="0" rtlCol="0" anchor="ctr"/>
+          <a:lstStyle/>
+          <a:p>
+            <a:pPr algn="l" indent="0" marL="0">
+              <a:buNone/>
+            </a:pPr>
+            <a:r>
+              <a:rPr lang="en-US" sz="2200" dirty="0">
+                <a:solidFill>
+                  <a:srgbClr val="EDEDED"/>
                 </a:solidFill>
                 <a:latin typeface="Verdana" pitchFamily="34" charset="0"/>
                 <a:ea typeface="Verdana" pitchFamily="34" charset="-122"/>
                 <a:cs typeface="Verdana" pitchFamily="34" charset="-120"/>
               </a:rPr>
-              <a:t>Was it accurate? Did anything "feel right" but turn out wrong?</a:t>
-            </a:r>
-            <a:endParaRPr lang="en-US" sz="2800" dirty="0"/>
-          </a:p>
-        </p:txBody>
+              <a:t>Never trust numbers you didn't provide</a:t>
+            </a:r>
+            <a:endParaRPr lang="en-US" sz="2200" dirty="0"/>
+          </a:p>
+        </p:txBody>
+      </p:sp>
+      <p:sp>
+        <p:nvSpPr>
+          <p:cNvPr id="5" name="Shape 3"/>
+          <p:cNvSpPr/>
+          <p:nvPr/>
+        </p:nvSpPr>
+        <p:spPr>
+          <a:xfrm>
+            <a:off x="548640" y="1572768"/>
+            <a:ext cx="182880" cy="182880"/>
+          </a:xfrm>
+          <a:prstGeom prst="rect">
+            <a:avLst/>
+          </a:prstGeom>
+          <a:solidFill>
+            <a:srgbClr val="635BFF"/>
+          </a:solidFill>
+          <a:ln/>
+        </p:spPr>
+      </p:sp>
+      <p:sp>
+        <p:nvSpPr>
+          <p:cNvPr id="6" name="Text 4"/>
+          <p:cNvSpPr/>
+          <p:nvPr/>
+        </p:nvSpPr>
+        <p:spPr>
+          <a:xfrm>
+            <a:off x="914400" y="2057400"/>
+            <a:ext cx="7315200" cy="502920"/>
+          </a:xfrm>
+          <a:prstGeom prst="rect">
+            <a:avLst/>
+          </a:prstGeom>
+          <a:noFill/>
+          <a:ln/>
+        </p:spPr>
+        <p:txBody>
+          <a:bodyPr wrap="square" lIns="0" tIns="0" rIns="0" bIns="0" rtlCol="0" anchor="ctr"/>
+          <a:lstStyle/>
+          <a:p>
+            <a:pPr algn="l" indent="0" marL="0">
+              <a:buNone/>
+            </a:pPr>
+            <a:r>
+              <a:rPr lang="en-US" sz="2200" dirty="0">
+                <a:solidFill>
+                  <a:srgbClr val="EDEDED"/>
+                </a:solidFill>
+                <a:latin typeface="Verdana" pitchFamily="34" charset="0"/>
+                <a:ea typeface="Verdana" pitchFamily="34" charset="-122"/>
+                <a:cs typeface="Verdana" pitchFamily="34" charset="-120"/>
+              </a:rPr>
+              <a:t>Verify claims against sources</a:t>
+            </a:r>
+            <a:endParaRPr lang="en-US" sz="2200" dirty="0"/>
+          </a:p>
+        </p:txBody>
+      </p:sp>
+      <p:sp>
+        <p:nvSpPr>
+          <p:cNvPr id="7" name="Shape 5"/>
+          <p:cNvSpPr/>
+          <p:nvPr/>
+        </p:nvSpPr>
+        <p:spPr>
+          <a:xfrm>
+            <a:off x="548640" y="2167128"/>
+            <a:ext cx="182880" cy="182880"/>
+          </a:xfrm>
+          <a:prstGeom prst="rect">
+            <a:avLst/>
+          </a:prstGeom>
+          <a:solidFill>
+            <a:srgbClr val="635BFF"/>
+          </a:solidFill>
+          <a:ln/>
+        </p:spPr>
+      </p:sp>
+      <p:sp>
+        <p:nvSpPr>
+          <p:cNvPr id="8" name="Text 6"/>
+          <p:cNvSpPr/>
+          <p:nvPr/>
+        </p:nvSpPr>
+        <p:spPr>
+          <a:xfrm>
+            <a:off x="914400" y="2651760"/>
+            <a:ext cx="7315200" cy="502920"/>
+          </a:xfrm>
+          <a:prstGeom prst="rect">
+            <a:avLst/>
+          </a:prstGeom>
+          <a:noFill/>
+          <a:ln/>
+        </p:spPr>
+        <p:txBody>
+          <a:bodyPr wrap="square" lIns="0" tIns="0" rIns="0" bIns="0" rtlCol="0" anchor="ctr"/>
+          <a:lstStyle/>
+          <a:p>
+            <a:pPr algn="l" indent="0" marL="0">
+              <a:buNone/>
+            </a:pPr>
+            <a:r>
+              <a:rPr lang="en-US" sz="2200" dirty="0">
+                <a:solidFill>
+                  <a:srgbClr val="EDEDED"/>
+                </a:solidFill>
+                <a:latin typeface="Verdana" pitchFamily="34" charset="0"/>
+                <a:ea typeface="Verdana" pitchFamily="34" charset="-122"/>
+                <a:cs typeface="Verdana" pitchFamily="34" charset="-120"/>
+              </a:rPr>
+              <a:t>Use AI for drafts, not decisions</a:t>
+            </a:r>
+            <a:endParaRPr lang="en-US" sz="2200" dirty="0"/>
+          </a:p>
+        </p:txBody>
+      </p:sp>
+      <p:sp>
+        <p:nvSpPr>
+          <p:cNvPr id="9" name="Shape 7"/>
+          <p:cNvSpPr/>
+          <p:nvPr/>
+        </p:nvSpPr>
+        <p:spPr>
+          <a:xfrm>
+            <a:off x="548640" y="2761488"/>
+            <a:ext cx="182880" cy="182880"/>
+          </a:xfrm>
+          <a:prstGeom prst="rect">
+            <a:avLst/>
+          </a:prstGeom>
+          <a:solidFill>
+            <a:srgbClr val="635BFF"/>
+          </a:solidFill>
+          <a:ln/>
+        </p:spPr>
+      </p:sp>
+      <p:sp>
+        <p:nvSpPr>
+          <p:cNvPr id="10" name="Text 8"/>
+          <p:cNvSpPr/>
+          <p:nvPr/>
+        </p:nvSpPr>
+        <p:spPr>
+          <a:xfrm>
+            <a:off x="914400" y="3246120"/>
+            <a:ext cx="7315200" cy="502920"/>
+          </a:xfrm>
+          <a:prstGeom prst="rect">
+            <a:avLst/>
+          </a:prstGeom>
+          <a:noFill/>
+          <a:ln/>
+        </p:spPr>
+        <p:txBody>
+          <a:bodyPr wrap="square" lIns="0" tIns="0" rIns="0" bIns="0" rtlCol="0" anchor="ctr"/>
+          <a:lstStyle/>
+          <a:p>
+            <a:pPr algn="l" indent="0" marL="0">
+              <a:buNone/>
+            </a:pPr>
+            <a:r>
+              <a:rPr lang="en-US" sz="2200" dirty="0">
+                <a:solidFill>
+                  <a:srgbClr val="EDEDED"/>
+                </a:solidFill>
+                <a:latin typeface="Verdana" pitchFamily="34" charset="0"/>
+                <a:ea typeface="Verdana" pitchFamily="34" charset="-122"/>
+                <a:cs typeface="Verdana" pitchFamily="34" charset="-120"/>
+              </a:rPr>
+              <a:t>Privacy ≠ accuracy</a:t>
+            </a:r>
+            <a:endParaRPr lang="en-US" sz="2200" dirty="0"/>
+          </a:p>
+        </p:txBody>
+      </p:sp>
+      <p:sp>
+        <p:nvSpPr>
+          <p:cNvPr id="11" name="Shape 9"/>
+          <p:cNvSpPr/>
+          <p:nvPr/>
+        </p:nvSpPr>
+        <p:spPr>
+          <a:xfrm>
+            <a:off x="548640" y="3355848"/>
+            <a:ext cx="182880" cy="182880"/>
+          </a:xfrm>
+          <a:prstGeom prst="rect">
+            <a:avLst/>
+          </a:prstGeom>
+          <a:solidFill>
+            <a:srgbClr val="635BFF"/>
+          </a:solidFill>
+          <a:ln/>
+        </p:spPr>
       </p:sp>
     </p:spTree>
   </p:cSld>
@@ -4390,7 +4779,7 @@
         <p:spPr>
           <a:xfrm>
             <a:off x="914400" y="914400"/>
-            <a:ext cx="7315200" cy="2194560"/>
+            <a:ext cx="7315200" cy="3291840"/>
           </a:xfrm>
           <a:prstGeom prst="rect">
             <a:avLst/>
@@ -4406,80 +4795,68 @@
               <a:buNone/>
             </a:pPr>
             <a:r>
-              <a:rPr lang="en-US" sz="4000" b="1" i="1" dirty="0">
-                <a:solidFill>
-                  <a:srgbClr val="FFFFFF"/>
+              <a:rPr lang="en-US" sz="2800" b="1" dirty="0">
+                <a:solidFill>
+                  <a:srgbClr val="635BFF"/>
                 </a:solidFill>
                 <a:latin typeface="Georgia" pitchFamily="34" charset="0"/>
                 <a:ea typeface="Georgia" pitchFamily="34" charset="-122"/>
                 <a:cs typeface="Georgia" pitchFamily="34" charset="-120"/>
               </a:rPr>
-              <a:t>"I destroyed months of work</a:t>
-            </a:r>
-            <a:endParaRPr lang="en-US" sz="4000" dirty="0"/>
-          </a:p>
-          <a:p>
-            <a:pPr algn="ctr" indent="0" marL="0">
-              <a:buNone/>
-            </a:pPr>
-            <a:r>
-              <a:rPr lang="en-US" sz="4000" b="1" i="1" dirty="0">
-                <a:solidFill>
-                  <a:srgbClr val="FFFFFF"/>
+              <a:t>Pick one claim or number</a:t>
+            </a:r>
+            <a:endParaRPr lang="en-US" sz="2800" dirty="0"/>
+          </a:p>
+          <a:p>
+            <a:pPr algn="ctr" indent="0" marL="0">
+              <a:buNone/>
+            </a:pPr>
+            <a:r>
+              <a:rPr lang="en-US" sz="2800" b="1" dirty="0">
+                <a:solidFill>
+                  <a:srgbClr val="635BFF"/>
                 </a:solidFill>
                 <a:latin typeface="Georgia" pitchFamily="34" charset="0"/>
                 <a:ea typeface="Georgia" pitchFamily="34" charset="-122"/>
                 <a:cs typeface="Georgia" pitchFamily="34" charset="-120"/>
               </a:rPr>
-              <a:t>in seconds"</a:t>
-            </a:r>
-            <a:endParaRPr lang="en-US" sz="4000" dirty="0"/>
-          </a:p>
-        </p:txBody>
-      </p:sp>
-      <p:sp>
-        <p:nvSpPr>
-          <p:cNvPr id="4" name="Text 2"/>
-          <p:cNvSpPr/>
-          <p:nvPr/>
-        </p:nvSpPr>
-        <p:spPr>
-          <a:xfrm>
-            <a:off x="1371600" y="3291840"/>
-            <a:ext cx="6400800" cy="457200"/>
-          </a:xfrm>
-          <a:prstGeom prst="rect">
-            <a:avLst/>
-          </a:prstGeom>
-          <a:noFill/>
-          <a:ln/>
-        </p:spPr>
-        <p:txBody>
-          <a:bodyPr wrap="square" lIns="0" tIns="0" rIns="0" bIns="0" rtlCol="0" anchor="t"/>
-          <a:lstStyle/>
-          <a:p>
-            <a:pPr algn="ctr" indent="0" marL="0">
-              <a:buNone/>
-            </a:pPr>
-            <a:r>
-              <a:rPr lang="en-US" sz="1800" u="sng" dirty="0">
+              <a:t>from Claude's output</a:t>
+            </a:r>
+            <a:endParaRPr lang="en-US" sz="2800" dirty="0"/>
+          </a:p>
+          <a:p>
+            <a:pPr algn="ctr" indent="0" marL="0">
+              <a:buNone/>
+            </a:pPr>
+            <a:r>
+              <a:rPr lang="en-US" sz="3600" b="1" dirty="0">
+                <a:solidFill>
+                  <a:srgbClr val="635BFF"/>
+                </a:solidFill>
+                <a:latin typeface="Georgia" pitchFamily="34" charset="0"/>
+                <a:ea typeface="Georgia" pitchFamily="34" charset="-122"/>
+                <a:cs typeface="Georgia" pitchFamily="34" charset="-120"/>
+              </a:rPr>
+              <a:t>Verify it manually</a:t>
+            </a:r>
+            <a:endParaRPr lang="en-US" sz="2800" dirty="0"/>
+          </a:p>
+          <a:p>
+            <a:pPr algn="ctr" indent="0" marL="0">
+              <a:buNone/>
+            </a:pPr>
+            <a:r>
+              <a:rPr lang="en-US" sz="2200" i="1" dirty="0">
                 <a:solidFill>
                   <a:srgbClr val="8B95A5"/>
                 </a:solidFill>
                 <a:latin typeface="Verdana" pitchFamily="34" charset="0"/>
                 <a:ea typeface="Verdana" pitchFamily="34" charset="-122"/>
                 <a:cs typeface="Verdana" pitchFamily="34" charset="-120"/>
-                <a:hlinkClick r:id="rId1" invalidUrl="" action="" tgtFrame="" tooltip="" history="1" highlightClick="0" endSnd="0">
-                  <a:extLst>
-                    <a:ext uri="{A12FA001-AC4F-418D-AE19-62706E023703}">
-                      <ahyp:hlinkClr xmlns:ahyp="http://schemas.microsoft.com/office/drawing/2018/hyperlinkcolor" val="tx"/>
-                    </a:ext>
-                  </a:extLst>
-                </a:hlinkClick>
-              </a:rPr>
-              <a:t>— Replit AI agent incident, July 2025</a:t>
-            </a:r>
-            <a:endParaRPr lang="en-US" sz="1800" dirty="0"/>
+              </a:rPr>
+              <a:t>Was it accurate? Did anything "feel right" but turn out wrong?</a:t>
+            </a:r>
+            <a:endParaRPr lang="en-US" sz="2800" dirty="0"/>
           </a:p>
         </p:txBody>
       </p:sp>
@@ -4545,8 +4922,8 @@
         </p:nvSpPr>
         <p:spPr>
           <a:xfrm>
-            <a:off x="914400" y="1097280"/>
-            <a:ext cx="7315200" cy="2560320"/>
+            <a:off x="914400" y="914400"/>
+            <a:ext cx="7315200" cy="2194560"/>
           </a:xfrm>
           <a:prstGeom prst="rect">
             <a:avLst/>
@@ -4562,7 +4939,7 @@
               <a:buNone/>
             </a:pPr>
             <a:r>
-              <a:rPr lang="en-US" sz="4800" b="1" dirty="0">
+              <a:rPr lang="en-US" sz="4000" b="1" i="1" dirty="0">
                 <a:solidFill>
                   <a:srgbClr val="FFFFFF"/>
                 </a:solidFill>
@@ -4570,16 +4947,16 @@
                 <a:ea typeface="Georgia" pitchFamily="34" charset="-122"/>
                 <a:cs typeface="Georgia" pitchFamily="34" charset="-120"/>
               </a:rPr>
-              <a:t>AI is a power tool</a:t>
-            </a:r>
-            <a:endParaRPr lang="en-US" sz="4800" dirty="0"/>
-          </a:p>
-          <a:p>
-            <a:pPr algn="ctr" indent="0" marL="0">
-              <a:buNone/>
-            </a:pPr>
-            <a:r>
-              <a:rPr lang="en-US" sz="4800" b="1" dirty="0">
+              <a:t>"I destroyed months of work</a:t>
+            </a:r>
+            <a:endParaRPr lang="en-US" sz="4000" dirty="0"/>
+          </a:p>
+          <a:p>
+            <a:pPr algn="ctr" indent="0" marL="0">
+              <a:buNone/>
+            </a:pPr>
+            <a:r>
+              <a:rPr lang="en-US" sz="4000" b="1" i="1" dirty="0">
                 <a:solidFill>
                   <a:srgbClr val="FFFFFF"/>
                 </a:solidFill>
@@ -4587,9 +4964,55 @@
                 <a:ea typeface="Georgia" pitchFamily="34" charset="-122"/>
                 <a:cs typeface="Georgia" pitchFamily="34" charset="-120"/>
               </a:rPr>
-              <a:t>not autopilot</a:t>
-            </a:r>
-            <a:endParaRPr lang="en-US" sz="4800" dirty="0"/>
+              <a:t>in seconds"</a:t>
+            </a:r>
+            <a:endParaRPr lang="en-US" sz="4000" dirty="0"/>
+          </a:p>
+        </p:txBody>
+      </p:sp>
+      <p:sp>
+        <p:nvSpPr>
+          <p:cNvPr id="4" name="Text 2"/>
+          <p:cNvSpPr/>
+          <p:nvPr/>
+        </p:nvSpPr>
+        <p:spPr>
+          <a:xfrm>
+            <a:off x="1371600" y="3291840"/>
+            <a:ext cx="6400800" cy="457200"/>
+          </a:xfrm>
+          <a:prstGeom prst="rect">
+            <a:avLst/>
+          </a:prstGeom>
+          <a:noFill/>
+          <a:ln/>
+        </p:spPr>
+        <p:txBody>
+          <a:bodyPr wrap="square" lIns="0" tIns="0" rIns="0" bIns="0" rtlCol="0" anchor="t"/>
+          <a:lstStyle/>
+          <a:p>
+            <a:pPr algn="ctr" indent="0" marL="0">
+              <a:buNone/>
+            </a:pPr>
+            <a:r>
+              <a:rPr lang="en-US" sz="1800" u="sng" dirty="0">
+                <a:solidFill>
+                  <a:srgbClr val="8B95A5"/>
+                </a:solidFill>
+                <a:latin typeface="Verdana" pitchFamily="34" charset="0"/>
+                <a:ea typeface="Verdana" pitchFamily="34" charset="-122"/>
+                <a:cs typeface="Verdana" pitchFamily="34" charset="-120"/>
+                <a:hlinkClick r:id="rId1" invalidUrl="" action="" tgtFrame="" tooltip="" history="1" highlightClick="0" endSnd="0">
+                  <a:extLst>
+                    <a:ext uri="{A12FA001-AC4F-418D-AE19-62706E023703}">
+                      <ahyp:hlinkClr xmlns:ahyp="http://schemas.microsoft.com/office/drawing/2018/hyperlinkcolor" val="tx"/>
+                    </a:ext>
+                  </a:extLst>
+                </a:hlinkClick>
+              </a:rPr>
+              <a:t>— Replit AI agent incident, July 2025</a:t>
+            </a:r>
+            <a:endParaRPr lang="en-US" sz="1800" dirty="0"/>
           </a:p>
         </p:txBody>
       </p:sp>
@@ -4672,7 +5095,7 @@
               <a:buNone/>
             </a:pPr>
             <a:r>
-              <a:rPr lang="en-US" sz="4400" b="1" dirty="0">
+              <a:rPr lang="en-US" sz="4800" b="1" dirty="0">
                 <a:solidFill>
                   <a:srgbClr val="FFFFFF"/>
                 </a:solidFill>
@@ -4680,16 +5103,16 @@
                 <a:ea typeface="Georgia" pitchFamily="34" charset="-122"/>
                 <a:cs typeface="Georgia" pitchFamily="34" charset="-120"/>
               </a:rPr>
-              <a:t>The trick isn't making</a:t>
-            </a:r>
-            <a:endParaRPr lang="en-US" sz="4400" dirty="0"/>
-          </a:p>
-          <a:p>
-            <a:pPr algn="ctr" indent="0" marL="0">
-              <a:buNone/>
-            </a:pPr>
-            <a:r>
-              <a:rPr lang="en-US" sz="4400" b="1" dirty="0">
+              <a:t>AI is a power tool</a:t>
+            </a:r>
+            <a:endParaRPr lang="en-US" sz="4800" dirty="0"/>
+          </a:p>
+          <a:p>
+            <a:pPr algn="ctr" indent="0" marL="0">
+              <a:buNone/>
+            </a:pPr>
+            <a:r>
+              <a:rPr lang="en-US" sz="4800" b="1" dirty="0">
                 <a:solidFill>
                   <a:srgbClr val="FFFFFF"/>
                 </a:solidFill>
@@ -4697,48 +5120,9 @@
                 <a:ea typeface="Georgia" pitchFamily="34" charset="-122"/>
                 <a:cs typeface="Georgia" pitchFamily="34" charset="-120"/>
               </a:rPr>
-              <a:t>one AI smarter</a:t>
-            </a:r>
-            <a:endParaRPr lang="en-US" sz="4400" dirty="0"/>
-          </a:p>
-        </p:txBody>
-      </p:sp>
-      <p:sp>
-        <p:nvSpPr>
-          <p:cNvPr id="4" name="Text 2"/>
-          <p:cNvSpPr/>
-          <p:nvPr/>
-        </p:nvSpPr>
-        <p:spPr>
-          <a:xfrm>
-            <a:off x="1371600" y="3657600"/>
-            <a:ext cx="6400800" cy="731520"/>
-          </a:xfrm>
-          <a:prstGeom prst="rect">
-            <a:avLst/>
-          </a:prstGeom>
-          <a:noFill/>
-          <a:ln/>
-        </p:spPr>
-        <p:txBody>
-          <a:bodyPr wrap="square" lIns="0" tIns="0" rIns="0" bIns="0" rtlCol="0" anchor="t"/>
-          <a:lstStyle/>
-          <a:p>
-            <a:pPr algn="ctr" indent="0" marL="0">
-              <a:buNone/>
-            </a:pPr>
-            <a:r>
-              <a:rPr lang="en-US" sz="2800" dirty="0">
-                <a:solidFill>
-                  <a:srgbClr val="635BFF"/>
-                </a:solidFill>
-                <a:latin typeface="Verdana" pitchFamily="34" charset="0"/>
-                <a:ea typeface="Verdana" pitchFamily="34" charset="-122"/>
-                <a:cs typeface="Verdana" pitchFamily="34" charset="-120"/>
-              </a:rPr>
-              <a:t>It's making many work together</a:t>
-            </a:r>
-            <a:endParaRPr lang="en-US" sz="2800" dirty="0"/>
+              <a:t>not autopilot</a:t>
+            </a:r>
+            <a:endParaRPr lang="en-US" sz="4800" dirty="0"/>
           </a:p>
         </p:txBody>
       </p:sp>
@@ -4804,8 +5188,8 @@
         </p:nvSpPr>
         <p:spPr>
           <a:xfrm>
-            <a:off x="914400" y="914400"/>
-            <a:ext cx="7315200" cy="3291840"/>
+            <a:off x="914400" y="1097280"/>
+            <a:ext cx="7315200" cy="2560320"/>
           </a:xfrm>
           <a:prstGeom prst="rect">
             <a:avLst/>
@@ -4821,66 +5205,71 @@
               <a:buNone/>
             </a:pPr>
             <a:r>
-              <a:rPr lang="en-US" sz="2800" b="1" dirty="0">
-                <a:solidFill>
-                  <a:srgbClr val="635BFF"/>
+              <a:rPr lang="en-US" sz="4400" b="1" dirty="0">
+                <a:solidFill>
+                  <a:srgbClr val="FFFFFF"/>
                 </a:solidFill>
                 <a:latin typeface="Georgia" pitchFamily="34" charset="0"/>
                 <a:ea typeface="Georgia" pitchFamily="34" charset="-122"/>
                 <a:cs typeface="Georgia" pitchFamily="34" charset="-120"/>
               </a:rPr>
-              <a:t>What are the phases of this task?</a:t>
-            </a:r>
-            <a:endParaRPr lang="en-US" sz="2800" dirty="0"/>
-          </a:p>
-          <a:p>
-            <a:pPr algn="ctr" indent="0" marL="0">
-              <a:buNone/>
-            </a:pPr>
-            <a:r>
-              <a:rPr lang="en-US" sz="2200" i="1" dirty="0">
-                <a:solidFill>
-                  <a:srgbClr val="8B95A5"/>
+              <a:t>The trick isn't making</a:t>
+            </a:r>
+            <a:endParaRPr lang="en-US" sz="4400" dirty="0"/>
+          </a:p>
+          <a:p>
+            <a:pPr algn="ctr" indent="0" marL="0">
+              <a:buNone/>
+            </a:pPr>
+            <a:r>
+              <a:rPr lang="en-US" sz="4400" b="1" dirty="0">
+                <a:solidFill>
+                  <a:srgbClr val="FFFFFF"/>
+                </a:solidFill>
+                <a:latin typeface="Georgia" pitchFamily="34" charset="0"/>
+                <a:ea typeface="Georgia" pitchFamily="34" charset="-122"/>
+                <a:cs typeface="Georgia" pitchFamily="34" charset="-120"/>
+              </a:rPr>
+              <a:t>one AI smarter</a:t>
+            </a:r>
+            <a:endParaRPr lang="en-US" sz="4400" dirty="0"/>
+          </a:p>
+        </p:txBody>
+      </p:sp>
+      <p:sp>
+        <p:nvSpPr>
+          <p:cNvPr id="4" name="Text 2"/>
+          <p:cNvSpPr/>
+          <p:nvPr/>
+        </p:nvSpPr>
+        <p:spPr>
+          <a:xfrm>
+            <a:off x="1371600" y="3657600"/>
+            <a:ext cx="6400800" cy="731520"/>
+          </a:xfrm>
+          <a:prstGeom prst="rect">
+            <a:avLst/>
+          </a:prstGeom>
+          <a:noFill/>
+          <a:ln/>
+        </p:spPr>
+        <p:txBody>
+          <a:bodyPr wrap="square" lIns="0" tIns="0" rIns="0" bIns="0" rtlCol="0" anchor="t"/>
+          <a:lstStyle/>
+          <a:p>
+            <a:pPr algn="ctr" indent="0" marL="0">
+              <a:buNone/>
+            </a:pPr>
+            <a:r>
+              <a:rPr lang="en-US" sz="2800" dirty="0">
+                <a:solidFill>
+                  <a:srgbClr val="635BFF"/>
                 </a:solidFill>
                 <a:latin typeface="Verdana" pitchFamily="34" charset="0"/>
                 <a:ea typeface="Verdana" pitchFamily="34" charset="-122"/>
                 <a:cs typeface="Verdana" pitchFamily="34" charset="-120"/>
               </a:rPr>
-              <a:t>What does each phase produce?</a:t>
-            </a:r>
-            <a:endParaRPr lang="en-US" sz="2800" dirty="0"/>
-          </a:p>
-          <a:p>
-            <a:pPr algn="ctr" indent="0" marL="0">
-              <a:buNone/>
-            </a:pPr>
-            <a:r>
-              <a:rPr lang="en-US" sz="2200" i="1" dirty="0">
-                <a:solidFill>
-                  <a:srgbClr val="8B95A5"/>
-                </a:solidFill>
-                <a:latin typeface="Verdana" pitchFamily="34" charset="0"/>
-                <a:ea typeface="Verdana" pitchFamily="34" charset="-122"/>
-                <a:cs typeface="Verdana" pitchFamily="34" charset="-120"/>
-              </a:rPr>
-              <a:t>What does the next phase need</a:t>
-            </a:r>
-            <a:endParaRPr lang="en-US" sz="2800" dirty="0"/>
-          </a:p>
-          <a:p>
-            <a:pPr algn="ctr" indent="0" marL="0">
-              <a:buNone/>
-            </a:pPr>
-            <a:r>
-              <a:rPr lang="en-US" sz="2200" i="1" dirty="0">
-                <a:solidFill>
-                  <a:srgbClr val="8B95A5"/>
-                </a:solidFill>
-                <a:latin typeface="Verdana" pitchFamily="34" charset="0"/>
-                <a:ea typeface="Verdana" pitchFamily="34" charset="-122"/>
-                <a:cs typeface="Verdana" pitchFamily="34" charset="-120"/>
-              </a:rPr>
-              <a:t>from the previous one?</a:t>
+              <a:t>It's making many work together</a:t>
             </a:r>
             <a:endParaRPr lang="en-US" sz="2800" dirty="0"/>
           </a:p>
@@ -4942,41 +5331,14 @@
       </p:sp>
       <p:sp>
         <p:nvSpPr>
-          <p:cNvPr id="3" name="Shape 1"/>
-          <p:cNvSpPr/>
-          <p:nvPr/>
-        </p:nvSpPr>
-        <p:spPr>
-          <a:xfrm>
-            <a:off x="457200" y="2011680"/>
-            <a:ext cx="1645920" cy="822960"/>
-          </a:xfrm>
-          <a:prstGeom prst="roundRect">
-            <a:avLst>
-              <a:gd name="adj" fmla="val 11111"/>
-            </a:avLst>
-          </a:prstGeom>
-          <a:solidFill>
-            <a:srgbClr val="0A2540"/>
-          </a:solidFill>
-          <a:ln w="19050">
-            <a:solidFill>
-              <a:srgbClr val="8B95A5"/>
-            </a:solidFill>
-            <a:prstDash val="solid"/>
-          </a:ln>
-        </p:spPr>
-      </p:sp>
-      <p:sp>
-        <p:nvSpPr>
-          <p:cNvPr id="4" name="Text 2"/>
-          <p:cNvSpPr/>
-          <p:nvPr/>
-        </p:nvSpPr>
-        <p:spPr>
-          <a:xfrm>
-            <a:off x="457200" y="2011680"/>
-            <a:ext cx="1645920" cy="822960"/>
+          <p:cNvPr id="3" name="Text 1"/>
+          <p:cNvSpPr/>
+          <p:nvPr/>
+        </p:nvSpPr>
+        <p:spPr>
+          <a:xfrm>
+            <a:off x="914400" y="914400"/>
+            <a:ext cx="7315200" cy="3291840"/>
           </a:xfrm>
           <a:prstGeom prst="rect">
             <a:avLst/>
@@ -4992,372 +5354,68 @@
               <a:buNone/>
             </a:pPr>
             <a:r>
-              <a:rPr lang="en-US" sz="1800" b="1" dirty="0">
-                <a:solidFill>
-                  <a:srgbClr val="EDEDED"/>
+              <a:rPr lang="en-US" sz="2800" b="1" dirty="0">
+                <a:solidFill>
+                  <a:srgbClr val="635BFF"/>
+                </a:solidFill>
+                <a:latin typeface="Georgia" pitchFamily="34" charset="0"/>
+                <a:ea typeface="Georgia" pitchFamily="34" charset="-122"/>
+                <a:cs typeface="Georgia" pitchFamily="34" charset="-120"/>
+              </a:rPr>
+              <a:t>What are the phases of this task?</a:t>
+            </a:r>
+            <a:endParaRPr lang="en-US" sz="2800" dirty="0"/>
+          </a:p>
+          <a:p>
+            <a:pPr algn="ctr" indent="0" marL="0">
+              <a:buNone/>
+            </a:pPr>
+            <a:r>
+              <a:rPr lang="en-US" sz="2200" i="1" dirty="0">
+                <a:solidFill>
+                  <a:srgbClr val="8B95A5"/>
                 </a:solidFill>
                 <a:latin typeface="Verdana" pitchFamily="34" charset="0"/>
                 <a:ea typeface="Verdana" pitchFamily="34" charset="-122"/>
                 <a:cs typeface="Verdana" pitchFamily="34" charset="-120"/>
               </a:rPr>
-              <a:t>Research</a:t>
-            </a:r>
-            <a:endParaRPr lang="en-US" sz="1800" dirty="0"/>
-          </a:p>
-        </p:txBody>
-      </p:sp>
-      <p:sp>
-        <p:nvSpPr>
-          <p:cNvPr id="5" name="Text 3"/>
-          <p:cNvSpPr/>
-          <p:nvPr/>
-        </p:nvSpPr>
-        <p:spPr>
-          <a:xfrm>
-            <a:off x="2103120" y="2011680"/>
-            <a:ext cx="548640" cy="822960"/>
-          </a:xfrm>
-          <a:prstGeom prst="rect">
-            <a:avLst/>
-          </a:prstGeom>
-          <a:noFill/>
-          <a:ln/>
-        </p:spPr>
-        <p:txBody>
-          <a:bodyPr wrap="square" lIns="0" tIns="0" rIns="0" bIns="0" rtlCol="0" anchor="ctr">
-            <a:normAutofit/>
-          </a:bodyPr>
-          <a:lstStyle/>
-          <a:p>
-            <a:pPr algn="ctr" indent="0" marL="0">
-              <a:buNone/>
-            </a:pPr>
-            <a:r>
-              <a:rPr lang="en-US" sz="2800" b="1" dirty="0">
-                <a:solidFill>
-                  <a:srgbClr val="635BFF"/>
+              <a:t>What does each phase produce?</a:t>
+            </a:r>
+            <a:endParaRPr lang="en-US" sz="2800" dirty="0"/>
+          </a:p>
+          <a:p>
+            <a:pPr algn="ctr" indent="0" marL="0">
+              <a:buNone/>
+            </a:pPr>
+            <a:r>
+              <a:rPr lang="en-US" sz="2200" i="1" dirty="0">
+                <a:solidFill>
+                  <a:srgbClr val="8B95A5"/>
                 </a:solidFill>
                 <a:latin typeface="Verdana" pitchFamily="34" charset="0"/>
                 <a:ea typeface="Verdana" pitchFamily="34" charset="-122"/>
                 <a:cs typeface="Verdana" pitchFamily="34" charset="-120"/>
               </a:rPr>
-              <a:t>→</a:t>
+              <a:t>What does the next phase need</a:t>
             </a:r>
             <a:endParaRPr lang="en-US" sz="2800" dirty="0"/>
           </a:p>
-        </p:txBody>
-      </p:sp>
-      <p:sp>
-        <p:nvSpPr>
-          <p:cNvPr id="6" name="Shape 4"/>
-          <p:cNvSpPr/>
-          <p:nvPr/>
-        </p:nvSpPr>
-        <p:spPr>
-          <a:xfrm>
-            <a:off x="2651760" y="2011680"/>
-            <a:ext cx="1645920" cy="822960"/>
-          </a:xfrm>
-          <a:prstGeom prst="roundRect">
-            <a:avLst>
-              <a:gd name="adj" fmla="val 11111"/>
-            </a:avLst>
-          </a:prstGeom>
-          <a:solidFill>
-            <a:srgbClr val="0A2540"/>
-          </a:solidFill>
-          <a:ln w="19050">
-            <a:solidFill>
-              <a:srgbClr val="8B95A5"/>
-            </a:solidFill>
-            <a:prstDash val="solid"/>
-          </a:ln>
-        </p:spPr>
-      </p:sp>
-      <p:sp>
-        <p:nvSpPr>
-          <p:cNvPr id="7" name="Text 5"/>
-          <p:cNvSpPr/>
-          <p:nvPr/>
-        </p:nvSpPr>
-        <p:spPr>
-          <a:xfrm>
-            <a:off x="2651760" y="2011680"/>
-            <a:ext cx="1645920" cy="822960"/>
-          </a:xfrm>
-          <a:prstGeom prst="rect">
-            <a:avLst/>
-          </a:prstGeom>
-          <a:noFill/>
-          <a:ln/>
-        </p:spPr>
-        <p:txBody>
-          <a:bodyPr wrap="square" lIns="0" tIns="0" rIns="0" bIns="0" rtlCol="0" anchor="ctr"/>
-          <a:lstStyle/>
-          <a:p>
-            <a:pPr algn="ctr" indent="0" marL="0">
-              <a:buNone/>
-            </a:pPr>
-            <a:r>
-              <a:rPr lang="en-US" sz="1800" b="1" dirty="0">
-                <a:solidFill>
-                  <a:srgbClr val="EDEDED"/>
+          <a:p>
+            <a:pPr algn="ctr" indent="0" marL="0">
+              <a:buNone/>
+            </a:pPr>
+            <a:r>
+              <a:rPr lang="en-US" sz="2200" i="1" dirty="0">
+                <a:solidFill>
+                  <a:srgbClr val="8B95A5"/>
                 </a:solidFill>
                 <a:latin typeface="Verdana" pitchFamily="34" charset="0"/>
                 <a:ea typeface="Verdana" pitchFamily="34" charset="-122"/>
                 <a:cs typeface="Verdana" pitchFamily="34" charset="-120"/>
               </a:rPr>
-              <a:t>Draft</a:t>
-            </a:r>
-            <a:endParaRPr lang="en-US" sz="1800" dirty="0"/>
-          </a:p>
-        </p:txBody>
-      </p:sp>
-      <p:sp>
-        <p:nvSpPr>
-          <p:cNvPr id="8" name="Text 6"/>
-          <p:cNvSpPr/>
-          <p:nvPr/>
-        </p:nvSpPr>
-        <p:spPr>
-          <a:xfrm>
-            <a:off x="4297680" y="2011680"/>
-            <a:ext cx="548640" cy="822960"/>
-          </a:xfrm>
-          <a:prstGeom prst="rect">
-            <a:avLst/>
-          </a:prstGeom>
-          <a:noFill/>
-          <a:ln/>
-        </p:spPr>
-        <p:txBody>
-          <a:bodyPr wrap="square" lIns="0" tIns="0" rIns="0" bIns="0" rtlCol="0" anchor="ctr">
-            <a:normAutofit/>
-          </a:bodyPr>
-          <a:lstStyle/>
-          <a:p>
-            <a:pPr algn="ctr" indent="0" marL="0">
-              <a:buNone/>
-            </a:pPr>
-            <a:r>
-              <a:rPr lang="en-US" sz="2800" b="1" dirty="0">
-                <a:solidFill>
-                  <a:srgbClr val="635BFF"/>
-                </a:solidFill>
-                <a:latin typeface="Verdana" pitchFamily="34" charset="0"/>
-                <a:ea typeface="Verdana" pitchFamily="34" charset="-122"/>
-                <a:cs typeface="Verdana" pitchFamily="34" charset="-120"/>
-              </a:rPr>
-              <a:t>→</a:t>
+              <a:t>from the previous one?</a:t>
             </a:r>
             <a:endParaRPr lang="en-US" sz="2800" dirty="0"/>
-          </a:p>
-        </p:txBody>
-      </p:sp>
-      <p:sp>
-        <p:nvSpPr>
-          <p:cNvPr id="9" name="Shape 7"/>
-          <p:cNvSpPr/>
-          <p:nvPr/>
-        </p:nvSpPr>
-        <p:spPr>
-          <a:xfrm>
-            <a:off x="4846320" y="2011680"/>
-            <a:ext cx="1645920" cy="822960"/>
-          </a:xfrm>
-          <a:prstGeom prst="roundRect">
-            <a:avLst>
-              <a:gd name="adj" fmla="val 11111"/>
-            </a:avLst>
-          </a:prstGeom>
-          <a:solidFill>
-            <a:srgbClr val="0A2540"/>
-          </a:solidFill>
-          <a:ln w="19050">
-            <a:solidFill>
-              <a:srgbClr val="8B95A5"/>
-            </a:solidFill>
-            <a:prstDash val="solid"/>
-          </a:ln>
-        </p:spPr>
-      </p:sp>
-      <p:sp>
-        <p:nvSpPr>
-          <p:cNvPr id="10" name="Text 8"/>
-          <p:cNvSpPr/>
-          <p:nvPr/>
-        </p:nvSpPr>
-        <p:spPr>
-          <a:xfrm>
-            <a:off x="4846320" y="2011680"/>
-            <a:ext cx="1645920" cy="822960"/>
-          </a:xfrm>
-          <a:prstGeom prst="rect">
-            <a:avLst/>
-          </a:prstGeom>
-          <a:noFill/>
-          <a:ln/>
-        </p:spPr>
-        <p:txBody>
-          <a:bodyPr wrap="square" lIns="0" tIns="0" rIns="0" bIns="0" rtlCol="0" anchor="ctr"/>
-          <a:lstStyle/>
-          <a:p>
-            <a:pPr algn="ctr" indent="0" marL="0">
-              <a:buNone/>
-            </a:pPr>
-            <a:r>
-              <a:rPr lang="en-US" sz="1800" b="1" dirty="0">
-                <a:solidFill>
-                  <a:srgbClr val="EDEDED"/>
-                </a:solidFill>
-                <a:latin typeface="Verdana" pitchFamily="34" charset="0"/>
-                <a:ea typeface="Verdana" pitchFamily="34" charset="-122"/>
-                <a:cs typeface="Verdana" pitchFamily="34" charset="-120"/>
-              </a:rPr>
-              <a:t>Review</a:t>
-            </a:r>
-            <a:endParaRPr lang="en-US" sz="1800" dirty="0"/>
-          </a:p>
-        </p:txBody>
-      </p:sp>
-      <p:sp>
-        <p:nvSpPr>
-          <p:cNvPr id="11" name="Text 9"/>
-          <p:cNvSpPr/>
-          <p:nvPr/>
-        </p:nvSpPr>
-        <p:spPr>
-          <a:xfrm>
-            <a:off x="6492240" y="2011680"/>
-            <a:ext cx="548640" cy="822960"/>
-          </a:xfrm>
-          <a:prstGeom prst="rect">
-            <a:avLst/>
-          </a:prstGeom>
-          <a:noFill/>
-          <a:ln/>
-        </p:spPr>
-        <p:txBody>
-          <a:bodyPr wrap="square" lIns="0" tIns="0" rIns="0" bIns="0" rtlCol="0" anchor="ctr">
-            <a:normAutofit/>
-          </a:bodyPr>
-          <a:lstStyle/>
-          <a:p>
-            <a:pPr algn="ctr" indent="0" marL="0">
-              <a:buNone/>
-            </a:pPr>
-            <a:r>
-              <a:rPr lang="en-US" sz="2800" b="1" dirty="0">
-                <a:solidFill>
-                  <a:srgbClr val="635BFF"/>
-                </a:solidFill>
-                <a:latin typeface="Verdana" pitchFamily="34" charset="0"/>
-                <a:ea typeface="Verdana" pitchFamily="34" charset="-122"/>
-                <a:cs typeface="Verdana" pitchFamily="34" charset="-120"/>
-              </a:rPr>
-              <a:t>→</a:t>
-            </a:r>
-            <a:endParaRPr lang="en-US" sz="2800" dirty="0"/>
-          </a:p>
-        </p:txBody>
-      </p:sp>
-      <p:sp>
-        <p:nvSpPr>
-          <p:cNvPr id="12" name="Shape 10"/>
-          <p:cNvSpPr/>
-          <p:nvPr/>
-        </p:nvSpPr>
-        <p:spPr>
-          <a:xfrm>
-            <a:off x="7040880" y="2011680"/>
-            <a:ext cx="1645920" cy="822960"/>
-          </a:xfrm>
-          <a:prstGeom prst="roundRect">
-            <a:avLst>
-              <a:gd name="adj" fmla="val 11111"/>
-            </a:avLst>
-          </a:prstGeom>
-          <a:solidFill>
-            <a:srgbClr val="635BFF"/>
-          </a:solidFill>
-          <a:ln/>
-        </p:spPr>
-      </p:sp>
-      <p:sp>
-        <p:nvSpPr>
-          <p:cNvPr id="13" name="Text 11"/>
-          <p:cNvSpPr/>
-          <p:nvPr/>
-        </p:nvSpPr>
-        <p:spPr>
-          <a:xfrm>
-            <a:off x="7040880" y="2011680"/>
-            <a:ext cx="1645920" cy="822960"/>
-          </a:xfrm>
-          <a:prstGeom prst="rect">
-            <a:avLst/>
-          </a:prstGeom>
-          <a:noFill/>
-          <a:ln/>
-        </p:spPr>
-        <p:txBody>
-          <a:bodyPr wrap="square" lIns="0" tIns="0" rIns="0" bIns="0" rtlCol="0" anchor="ctr"/>
-          <a:lstStyle/>
-          <a:p>
-            <a:pPr algn="ctr" indent="0" marL="0">
-              <a:buNone/>
-            </a:pPr>
-            <a:r>
-              <a:rPr lang="en-US" sz="1800" b="1" dirty="0">
-                <a:solidFill>
-                  <a:srgbClr val="FFFFFF"/>
-                </a:solidFill>
-                <a:latin typeface="Verdana" pitchFamily="34" charset="0"/>
-                <a:ea typeface="Verdana" pitchFamily="34" charset="-122"/>
-                <a:cs typeface="Verdana" pitchFamily="34" charset="-120"/>
-              </a:rPr>
-              <a:t>You</a:t>
-            </a:r>
-            <a:endParaRPr lang="en-US" sz="1800" dirty="0"/>
-          </a:p>
-        </p:txBody>
-      </p:sp>
-      <p:sp>
-        <p:nvSpPr>
-          <p:cNvPr id="14" name="Text 12"/>
-          <p:cNvSpPr/>
-          <p:nvPr/>
-        </p:nvSpPr>
-        <p:spPr>
-          <a:xfrm>
-            <a:off x="914400" y="3291840"/>
-            <a:ext cx="7315200" cy="548640"/>
-          </a:xfrm>
-          <a:prstGeom prst="rect">
-            <a:avLst/>
-          </a:prstGeom>
-          <a:noFill/>
-          <a:ln/>
-        </p:spPr>
-        <p:txBody>
-          <a:bodyPr wrap="square" lIns="0" tIns="0" rIns="0" bIns="0" rtlCol="0" anchor="ctr"/>
-          <a:lstStyle/>
-          <a:p>
-            <a:pPr algn="ctr" indent="0" marL="0">
-              <a:buNone/>
-            </a:pPr>
-            <a:r>
-              <a:rPr lang="en-US" sz="2400" i="1" dirty="0">
-                <a:solidFill>
-                  <a:srgbClr val="8B95A5"/>
-                </a:solidFill>
-                <a:latin typeface="Verdana" pitchFamily="34" charset="0"/>
-                <a:ea typeface="Verdana" pitchFamily="34" charset="-122"/>
-                <a:cs typeface="Verdana" pitchFamily="34" charset="-120"/>
-              </a:rPr>
-              <a:t>Each Skill does one thing. The chain does everything.</a:t>
-            </a:r>
-            <a:endParaRPr lang="en-US" sz="2400" dirty="0"/>
           </a:p>
         </p:txBody>
       </p:sp>
@@ -5417,14 +5475,41 @@
       </p:sp>
       <p:sp>
         <p:nvSpPr>
-          <p:cNvPr id="3" name="Text 1"/>
-          <p:cNvSpPr/>
-          <p:nvPr/>
-        </p:nvSpPr>
-        <p:spPr>
-          <a:xfrm>
-            <a:off x="457200" y="1463040"/>
-            <a:ext cx="8229600" cy="1097280"/>
+          <p:cNvPr id="3" name="Shape 1"/>
+          <p:cNvSpPr/>
+          <p:nvPr/>
+        </p:nvSpPr>
+        <p:spPr>
+          <a:xfrm>
+            <a:off x="457200" y="2011680"/>
+            <a:ext cx="1645920" cy="822960"/>
+          </a:xfrm>
+          <a:prstGeom prst="roundRect">
+            <a:avLst>
+              <a:gd name="adj" fmla="val 11111"/>
+            </a:avLst>
+          </a:prstGeom>
+          <a:solidFill>
+            <a:srgbClr val="0A2540"/>
+          </a:solidFill>
+          <a:ln w="19050">
+            <a:solidFill>
+              <a:srgbClr val="8B95A5"/>
+            </a:solidFill>
+            <a:prstDash val="solid"/>
+          </a:ln>
+        </p:spPr>
+      </p:sp>
+      <p:sp>
+        <p:nvSpPr>
+          <p:cNvPr id="4" name="Text 2"/>
+          <p:cNvSpPr/>
+          <p:nvPr/>
+        </p:nvSpPr>
+        <p:spPr>
+          <a:xfrm>
+            <a:off x="457200" y="2011680"/>
+            <a:ext cx="1645920" cy="822960"/>
           </a:xfrm>
           <a:prstGeom prst="rect">
             <a:avLst/>
@@ -5440,56 +5525,372 @@
               <a:buNone/>
             </a:pPr>
             <a:r>
-              <a:rPr lang="en-US" sz="5400" b="1" dirty="0">
-                <a:solidFill>
-                  <a:srgbClr val="FFFFFF"/>
-                </a:solidFill>
-                <a:latin typeface="Georgia" pitchFamily="34" charset="0"/>
-                <a:ea typeface="Georgia" pitchFamily="34" charset="-122"/>
-                <a:cs typeface="Georgia" pitchFamily="34" charset="-120"/>
-              </a:rPr>
-              <a:t>Demo</a:t>
-            </a:r>
-            <a:endParaRPr lang="en-US" sz="5400" dirty="0"/>
-          </a:p>
-        </p:txBody>
-      </p:sp>
-      <p:sp>
-        <p:nvSpPr>
-          <p:cNvPr id="4" name="Text 2"/>
-          <p:cNvSpPr/>
-          <p:nvPr/>
-        </p:nvSpPr>
-        <p:spPr>
-          <a:xfrm>
-            <a:off x="914400" y="2651760"/>
-            <a:ext cx="7315200" cy="548640"/>
-          </a:xfrm>
-          <a:prstGeom prst="rect">
-            <a:avLst/>
-          </a:prstGeom>
-          <a:noFill/>
-          <a:ln/>
-        </p:spPr>
-        <p:txBody>
-          <a:bodyPr wrap="square" lIns="0" tIns="0" rIns="0" bIns="0" rtlCol="0" anchor="ctr"/>
-          <a:lstStyle/>
-          <a:p>
-            <a:pPr algn="ctr" indent="0" marL="0">
-              <a:buNone/>
-            </a:pPr>
-            <a:r>
-              <a:rPr lang="en-US" sz="2800" i="1" dirty="0">
-                <a:solidFill>
-                  <a:srgbClr val="635BFF"/>
+              <a:rPr lang="en-US" sz="1800" b="1" dirty="0">
+                <a:solidFill>
+                  <a:srgbClr val="EDEDED"/>
                 </a:solidFill>
                 <a:latin typeface="Verdana" pitchFamily="34" charset="0"/>
                 <a:ea typeface="Verdana" pitchFamily="34" charset="-122"/>
                 <a:cs typeface="Verdana" pitchFamily="34" charset="-120"/>
               </a:rPr>
-              <a:t>Watch a 3-phase chain run live</a:t>
+              <a:t>Research</a:t>
+            </a:r>
+            <a:endParaRPr lang="en-US" sz="1800" dirty="0"/>
+          </a:p>
+        </p:txBody>
+      </p:sp>
+      <p:sp>
+        <p:nvSpPr>
+          <p:cNvPr id="5" name="Text 3"/>
+          <p:cNvSpPr/>
+          <p:nvPr/>
+        </p:nvSpPr>
+        <p:spPr>
+          <a:xfrm>
+            <a:off x="2103120" y="2011680"/>
+            <a:ext cx="548640" cy="822960"/>
+          </a:xfrm>
+          <a:prstGeom prst="rect">
+            <a:avLst/>
+          </a:prstGeom>
+          <a:noFill/>
+          <a:ln/>
+        </p:spPr>
+        <p:txBody>
+          <a:bodyPr wrap="square" lIns="0" tIns="0" rIns="0" bIns="0" rtlCol="0" anchor="ctr">
+            <a:normAutofit/>
+          </a:bodyPr>
+          <a:lstStyle/>
+          <a:p>
+            <a:pPr algn="ctr" indent="0" marL="0">
+              <a:buNone/>
+            </a:pPr>
+            <a:r>
+              <a:rPr lang="en-US" sz="2800" b="1" dirty="0">
+                <a:solidFill>
+                  <a:srgbClr val="635BFF"/>
+                </a:solidFill>
+                <a:latin typeface="Verdana" pitchFamily="34" charset="0"/>
+                <a:ea typeface="Verdana" pitchFamily="34" charset="-122"/>
+                <a:cs typeface="Verdana" pitchFamily="34" charset="-120"/>
+              </a:rPr>
+              <a:t>→</a:t>
             </a:r>
             <a:endParaRPr lang="en-US" sz="2800" dirty="0"/>
+          </a:p>
+        </p:txBody>
+      </p:sp>
+      <p:sp>
+        <p:nvSpPr>
+          <p:cNvPr id="6" name="Shape 4"/>
+          <p:cNvSpPr/>
+          <p:nvPr/>
+        </p:nvSpPr>
+        <p:spPr>
+          <a:xfrm>
+            <a:off x="2651760" y="2011680"/>
+            <a:ext cx="1645920" cy="822960"/>
+          </a:xfrm>
+          <a:prstGeom prst="roundRect">
+            <a:avLst>
+              <a:gd name="adj" fmla="val 11111"/>
+            </a:avLst>
+          </a:prstGeom>
+          <a:solidFill>
+            <a:srgbClr val="0A2540"/>
+          </a:solidFill>
+          <a:ln w="19050">
+            <a:solidFill>
+              <a:srgbClr val="8B95A5"/>
+            </a:solidFill>
+            <a:prstDash val="solid"/>
+          </a:ln>
+        </p:spPr>
+      </p:sp>
+      <p:sp>
+        <p:nvSpPr>
+          <p:cNvPr id="7" name="Text 5"/>
+          <p:cNvSpPr/>
+          <p:nvPr/>
+        </p:nvSpPr>
+        <p:spPr>
+          <a:xfrm>
+            <a:off x="2651760" y="2011680"/>
+            <a:ext cx="1645920" cy="822960"/>
+          </a:xfrm>
+          <a:prstGeom prst="rect">
+            <a:avLst/>
+          </a:prstGeom>
+          <a:noFill/>
+          <a:ln/>
+        </p:spPr>
+        <p:txBody>
+          <a:bodyPr wrap="square" lIns="0" tIns="0" rIns="0" bIns="0" rtlCol="0" anchor="ctr"/>
+          <a:lstStyle/>
+          <a:p>
+            <a:pPr algn="ctr" indent="0" marL="0">
+              <a:buNone/>
+            </a:pPr>
+            <a:r>
+              <a:rPr lang="en-US" sz="1800" b="1" dirty="0">
+                <a:solidFill>
+                  <a:srgbClr val="EDEDED"/>
+                </a:solidFill>
+                <a:latin typeface="Verdana" pitchFamily="34" charset="0"/>
+                <a:ea typeface="Verdana" pitchFamily="34" charset="-122"/>
+                <a:cs typeface="Verdana" pitchFamily="34" charset="-120"/>
+              </a:rPr>
+              <a:t>Draft</a:t>
+            </a:r>
+            <a:endParaRPr lang="en-US" sz="1800" dirty="0"/>
+          </a:p>
+        </p:txBody>
+      </p:sp>
+      <p:sp>
+        <p:nvSpPr>
+          <p:cNvPr id="8" name="Text 6"/>
+          <p:cNvSpPr/>
+          <p:nvPr/>
+        </p:nvSpPr>
+        <p:spPr>
+          <a:xfrm>
+            <a:off x="4297680" y="2011680"/>
+            <a:ext cx="548640" cy="822960"/>
+          </a:xfrm>
+          <a:prstGeom prst="rect">
+            <a:avLst/>
+          </a:prstGeom>
+          <a:noFill/>
+          <a:ln/>
+        </p:spPr>
+        <p:txBody>
+          <a:bodyPr wrap="square" lIns="0" tIns="0" rIns="0" bIns="0" rtlCol="0" anchor="ctr">
+            <a:normAutofit/>
+          </a:bodyPr>
+          <a:lstStyle/>
+          <a:p>
+            <a:pPr algn="ctr" indent="0" marL="0">
+              <a:buNone/>
+            </a:pPr>
+            <a:r>
+              <a:rPr lang="en-US" sz="2800" b="1" dirty="0">
+                <a:solidFill>
+                  <a:srgbClr val="635BFF"/>
+                </a:solidFill>
+                <a:latin typeface="Verdana" pitchFamily="34" charset="0"/>
+                <a:ea typeface="Verdana" pitchFamily="34" charset="-122"/>
+                <a:cs typeface="Verdana" pitchFamily="34" charset="-120"/>
+              </a:rPr>
+              <a:t>→</a:t>
+            </a:r>
+            <a:endParaRPr lang="en-US" sz="2800" dirty="0"/>
+          </a:p>
+        </p:txBody>
+      </p:sp>
+      <p:sp>
+        <p:nvSpPr>
+          <p:cNvPr id="9" name="Shape 7"/>
+          <p:cNvSpPr/>
+          <p:nvPr/>
+        </p:nvSpPr>
+        <p:spPr>
+          <a:xfrm>
+            <a:off x="4846320" y="2011680"/>
+            <a:ext cx="1645920" cy="822960"/>
+          </a:xfrm>
+          <a:prstGeom prst="roundRect">
+            <a:avLst>
+              <a:gd name="adj" fmla="val 11111"/>
+            </a:avLst>
+          </a:prstGeom>
+          <a:solidFill>
+            <a:srgbClr val="0A2540"/>
+          </a:solidFill>
+          <a:ln w="19050">
+            <a:solidFill>
+              <a:srgbClr val="8B95A5"/>
+            </a:solidFill>
+            <a:prstDash val="solid"/>
+          </a:ln>
+        </p:spPr>
+      </p:sp>
+      <p:sp>
+        <p:nvSpPr>
+          <p:cNvPr id="10" name="Text 8"/>
+          <p:cNvSpPr/>
+          <p:nvPr/>
+        </p:nvSpPr>
+        <p:spPr>
+          <a:xfrm>
+            <a:off x="4846320" y="2011680"/>
+            <a:ext cx="1645920" cy="822960"/>
+          </a:xfrm>
+          <a:prstGeom prst="rect">
+            <a:avLst/>
+          </a:prstGeom>
+          <a:noFill/>
+          <a:ln/>
+        </p:spPr>
+        <p:txBody>
+          <a:bodyPr wrap="square" lIns="0" tIns="0" rIns="0" bIns="0" rtlCol="0" anchor="ctr"/>
+          <a:lstStyle/>
+          <a:p>
+            <a:pPr algn="ctr" indent="0" marL="0">
+              <a:buNone/>
+            </a:pPr>
+            <a:r>
+              <a:rPr lang="en-US" sz="1800" b="1" dirty="0">
+                <a:solidFill>
+                  <a:srgbClr val="EDEDED"/>
+                </a:solidFill>
+                <a:latin typeface="Verdana" pitchFamily="34" charset="0"/>
+                <a:ea typeface="Verdana" pitchFamily="34" charset="-122"/>
+                <a:cs typeface="Verdana" pitchFamily="34" charset="-120"/>
+              </a:rPr>
+              <a:t>Review</a:t>
+            </a:r>
+            <a:endParaRPr lang="en-US" sz="1800" dirty="0"/>
+          </a:p>
+        </p:txBody>
+      </p:sp>
+      <p:sp>
+        <p:nvSpPr>
+          <p:cNvPr id="11" name="Text 9"/>
+          <p:cNvSpPr/>
+          <p:nvPr/>
+        </p:nvSpPr>
+        <p:spPr>
+          <a:xfrm>
+            <a:off x="6492240" y="2011680"/>
+            <a:ext cx="548640" cy="822960"/>
+          </a:xfrm>
+          <a:prstGeom prst="rect">
+            <a:avLst/>
+          </a:prstGeom>
+          <a:noFill/>
+          <a:ln/>
+        </p:spPr>
+        <p:txBody>
+          <a:bodyPr wrap="square" lIns="0" tIns="0" rIns="0" bIns="0" rtlCol="0" anchor="ctr">
+            <a:normAutofit/>
+          </a:bodyPr>
+          <a:lstStyle/>
+          <a:p>
+            <a:pPr algn="ctr" indent="0" marL="0">
+              <a:buNone/>
+            </a:pPr>
+            <a:r>
+              <a:rPr lang="en-US" sz="2800" b="1" dirty="0">
+                <a:solidFill>
+                  <a:srgbClr val="635BFF"/>
+                </a:solidFill>
+                <a:latin typeface="Verdana" pitchFamily="34" charset="0"/>
+                <a:ea typeface="Verdana" pitchFamily="34" charset="-122"/>
+                <a:cs typeface="Verdana" pitchFamily="34" charset="-120"/>
+              </a:rPr>
+              <a:t>→</a:t>
+            </a:r>
+            <a:endParaRPr lang="en-US" sz="2800" dirty="0"/>
+          </a:p>
+        </p:txBody>
+      </p:sp>
+      <p:sp>
+        <p:nvSpPr>
+          <p:cNvPr id="12" name="Shape 10"/>
+          <p:cNvSpPr/>
+          <p:nvPr/>
+        </p:nvSpPr>
+        <p:spPr>
+          <a:xfrm>
+            <a:off x="7040880" y="2011680"/>
+            <a:ext cx="1645920" cy="822960"/>
+          </a:xfrm>
+          <a:prstGeom prst="roundRect">
+            <a:avLst>
+              <a:gd name="adj" fmla="val 11111"/>
+            </a:avLst>
+          </a:prstGeom>
+          <a:solidFill>
+            <a:srgbClr val="635BFF"/>
+          </a:solidFill>
+          <a:ln/>
+        </p:spPr>
+      </p:sp>
+      <p:sp>
+        <p:nvSpPr>
+          <p:cNvPr id="13" name="Text 11"/>
+          <p:cNvSpPr/>
+          <p:nvPr/>
+        </p:nvSpPr>
+        <p:spPr>
+          <a:xfrm>
+            <a:off x="7040880" y="2011680"/>
+            <a:ext cx="1645920" cy="822960"/>
+          </a:xfrm>
+          <a:prstGeom prst="rect">
+            <a:avLst/>
+          </a:prstGeom>
+          <a:noFill/>
+          <a:ln/>
+        </p:spPr>
+        <p:txBody>
+          <a:bodyPr wrap="square" lIns="0" tIns="0" rIns="0" bIns="0" rtlCol="0" anchor="ctr"/>
+          <a:lstStyle/>
+          <a:p>
+            <a:pPr algn="ctr" indent="0" marL="0">
+              <a:buNone/>
+            </a:pPr>
+            <a:r>
+              <a:rPr lang="en-US" sz="1800" b="1" dirty="0">
+                <a:solidFill>
+                  <a:srgbClr val="FFFFFF"/>
+                </a:solidFill>
+                <a:latin typeface="Verdana" pitchFamily="34" charset="0"/>
+                <a:ea typeface="Verdana" pitchFamily="34" charset="-122"/>
+                <a:cs typeface="Verdana" pitchFamily="34" charset="-120"/>
+              </a:rPr>
+              <a:t>You</a:t>
+            </a:r>
+            <a:endParaRPr lang="en-US" sz="1800" dirty="0"/>
+          </a:p>
+        </p:txBody>
+      </p:sp>
+      <p:sp>
+        <p:nvSpPr>
+          <p:cNvPr id="14" name="Text 12"/>
+          <p:cNvSpPr/>
+          <p:nvPr/>
+        </p:nvSpPr>
+        <p:spPr>
+          <a:xfrm>
+            <a:off x="914400" y="3291840"/>
+            <a:ext cx="7315200" cy="548640"/>
+          </a:xfrm>
+          <a:prstGeom prst="rect">
+            <a:avLst/>
+          </a:prstGeom>
+          <a:noFill/>
+          <a:ln/>
+        </p:spPr>
+        <p:txBody>
+          <a:bodyPr wrap="square" lIns="0" tIns="0" rIns="0" bIns="0" rtlCol="0" anchor="ctr"/>
+          <a:lstStyle/>
+          <a:p>
+            <a:pPr algn="ctr" indent="0" marL="0">
+              <a:buNone/>
+            </a:pPr>
+            <a:r>
+              <a:rPr lang="en-US" sz="2400" i="1" dirty="0">
+                <a:solidFill>
+                  <a:srgbClr val="8B95A5"/>
+                </a:solidFill>
+                <a:latin typeface="Verdana" pitchFamily="34" charset="0"/>
+                <a:ea typeface="Verdana" pitchFamily="34" charset="-122"/>
+                <a:cs typeface="Verdana" pitchFamily="34" charset="-120"/>
+              </a:rPr>
+              <a:t>Each Skill does one thing. The chain does everything.</a:t>
+            </a:r>
+            <a:endParaRPr lang="en-US" sz="2400" dirty="0"/>
           </a:p>
         </p:txBody>
       </p:sp>
@@ -6366,8 +6767,8 @@
         </p:nvSpPr>
         <p:spPr>
           <a:xfrm>
-            <a:off x="914400" y="914400"/>
-            <a:ext cx="7315200" cy="3291840"/>
+            <a:off x="457200" y="1463040"/>
+            <a:ext cx="8229600" cy="1097280"/>
           </a:xfrm>
           <a:prstGeom prst="rect">
             <a:avLst/>
@@ -6383,100 +6784,54 @@
               <a:buNone/>
             </a:pPr>
             <a:r>
-              <a:rPr lang="en-US" sz="2800" b="1" dirty="0">
-                <a:solidFill>
-                  <a:srgbClr val="635BFF"/>
+              <a:rPr lang="en-US" sz="5400" b="1" dirty="0">
+                <a:solidFill>
+                  <a:srgbClr val="FFFFFF"/>
                 </a:solidFill>
                 <a:latin typeface="Georgia" pitchFamily="34" charset="0"/>
                 <a:ea typeface="Georgia" pitchFamily="34" charset="-122"/>
                 <a:cs typeface="Georgia" pitchFamily="34" charset="-120"/>
               </a:rPr>
-              <a:t>Phase 1: New conversation</a:t>
-            </a:r>
-            <a:endParaRPr lang="en-US" sz="2800" dirty="0"/>
-          </a:p>
-          <a:p>
-            <a:pPr algn="ctr" indent="0" marL="0">
-              <a:buNone/>
-            </a:pPr>
-            <a:r>
-              <a:rPr lang="en-US" sz="2800" b="1" dirty="0">
+              <a:t>Demo</a:t>
+            </a:r>
+            <a:endParaRPr lang="en-US" sz="5400" dirty="0"/>
+          </a:p>
+        </p:txBody>
+      </p:sp>
+      <p:sp>
+        <p:nvSpPr>
+          <p:cNvPr id="4" name="Text 2"/>
+          <p:cNvSpPr/>
+          <p:nvPr/>
+        </p:nvSpPr>
+        <p:spPr>
+          <a:xfrm>
+            <a:off x="914400" y="2651760"/>
+            <a:ext cx="7315200" cy="548640"/>
+          </a:xfrm>
+          <a:prstGeom prst="rect">
+            <a:avLst/>
+          </a:prstGeom>
+          <a:noFill/>
+          <a:ln/>
+        </p:spPr>
+        <p:txBody>
+          <a:bodyPr wrap="square" lIns="0" tIns="0" rIns="0" bIns="0" rtlCol="0" anchor="ctr"/>
+          <a:lstStyle/>
+          <a:p>
+            <a:pPr algn="ctr" indent="0" marL="0">
+              <a:buNone/>
+            </a:pPr>
+            <a:r>
+              <a:rPr lang="en-US" sz="2800" i="1" dirty="0">
                 <a:solidFill>
                   <a:srgbClr val="635BFF"/>
-                </a:solidFill>
-                <a:latin typeface="Georgia" pitchFamily="34" charset="0"/>
-                <a:ea typeface="Georgia" pitchFamily="34" charset="-122"/>
-                <a:cs typeface="Georgia" pitchFamily="34" charset="-120"/>
-              </a:rPr>
-              <a:t>→ give it your task → save output</a:t>
-            </a:r>
-            <a:endParaRPr lang="en-US" sz="2800" dirty="0"/>
-          </a:p>
-          <a:p>
-            <a:pPr algn="ctr" indent="0" marL="0">
-              <a:buNone/>
-            </a:pPr>
-            <a:r>
-              <a:rPr lang="en-US" sz="2800" b="1" dirty="0">
-                <a:solidFill>
-                  <a:srgbClr val="635BFF"/>
-                </a:solidFill>
-                <a:latin typeface="Georgia" pitchFamily="34" charset="0"/>
-                <a:ea typeface="Georgia" pitchFamily="34" charset="-122"/>
-                <a:cs typeface="Georgia" pitchFamily="34" charset="-120"/>
-              </a:rPr>
-              <a:t>Phase 2: New conversation</a:t>
-            </a:r>
-            <a:endParaRPr lang="en-US" sz="2800" dirty="0"/>
-          </a:p>
-          <a:p>
-            <a:pPr algn="ctr" indent="0" marL="0">
-              <a:buNone/>
-            </a:pPr>
-            <a:r>
-              <a:rPr lang="en-US" sz="2800" b="1" dirty="0">
-                <a:solidFill>
-                  <a:srgbClr val="635BFF"/>
-                </a:solidFill>
-                <a:latin typeface="Georgia" pitchFamily="34" charset="0"/>
-                <a:ea typeface="Georgia" pitchFamily="34" charset="-122"/>
-                <a:cs typeface="Georgia" pitchFamily="34" charset="-120"/>
-              </a:rPr>
-              <a:t>→ paste Phase 1's output → draft</a:t>
-            </a:r>
-            <a:endParaRPr lang="en-US" sz="2800" dirty="0"/>
-          </a:p>
-          <a:p>
-            <a:pPr algn="ctr" indent="0" marL="0">
-              <a:buNone/>
-            </a:pPr>
-            <a:r>
-              <a:rPr lang="en-US" sz="2200" i="1" dirty="0">
-                <a:solidFill>
-                  <a:srgbClr val="8B95A5"/>
                 </a:solidFill>
                 <a:latin typeface="Verdana" pitchFamily="34" charset="0"/>
                 <a:ea typeface="Verdana" pitchFamily="34" charset="-122"/>
                 <a:cs typeface="Verdana" pitchFamily="34" charset="-120"/>
               </a:rPr>
-              <a:t>How does this compare to one</a:t>
-            </a:r>
-            <a:endParaRPr lang="en-US" sz="2800" dirty="0"/>
-          </a:p>
-          <a:p>
-            <a:pPr algn="ctr" indent="0" marL="0">
-              <a:buNone/>
-            </a:pPr>
-            <a:r>
-              <a:rPr lang="en-US" sz="2200" i="1" dirty="0">
-                <a:solidFill>
-                  <a:srgbClr val="8B95A5"/>
-                </a:solidFill>
-                <a:latin typeface="Verdana" pitchFamily="34" charset="0"/>
-                <a:ea typeface="Verdana" pitchFamily="34" charset="-122"/>
-                <a:cs typeface="Verdana" pitchFamily="34" charset="-120"/>
-              </a:rPr>
-              <a:t>conversation doing everything?</a:t>
+              <a:t>Watch a 3-phase chain run live</a:t>
             </a:r>
             <a:endParaRPr lang="en-US" sz="2800" dirty="0"/>
           </a:p>
@@ -6544,17 +6899,17 @@
         </p:nvSpPr>
         <p:spPr>
           <a:xfrm>
-            <a:off x="457200" y="1097280"/>
-            <a:ext cx="3840480" cy="731520"/>
-          </a:xfrm>
-          <a:prstGeom prst="rect">
-            <a:avLst/>
-          </a:prstGeom>
-          <a:noFill/>
-          <a:ln/>
-        </p:spPr>
-        <p:txBody>
-          <a:bodyPr wrap="square" lIns="0" tIns="0" rIns="0" bIns="0" rtlCol="0" anchor="b"/>
+            <a:off x="914400" y="914400"/>
+            <a:ext cx="7315200" cy="3291840"/>
+          </a:xfrm>
+          <a:prstGeom prst="rect">
+            <a:avLst/>
+          </a:prstGeom>
+          <a:noFill/>
+          <a:ln/>
+        </p:spPr>
+        <p:txBody>
+          <a:bodyPr wrap="square" lIns="0" tIns="0" rIns="0" bIns="0" rtlCol="0" anchor="ctr"/>
           <a:lstStyle/>
           <a:p>
             <a:pPr algn="ctr" indent="0" marL="0">
@@ -6563,44 +6918,73 @@
             <a:r>
               <a:rPr lang="en-US" sz="2800" b="1" dirty="0">
                 <a:solidFill>
-                  <a:srgbClr val="8B95A5"/>
+                  <a:srgbClr val="635BFF"/>
                 </a:solidFill>
                 <a:latin typeface="Georgia" pitchFamily="34" charset="0"/>
                 <a:ea typeface="Georgia" pitchFamily="34" charset="-122"/>
                 <a:cs typeface="Georgia" pitchFamily="34" charset="-120"/>
               </a:rPr>
-              <a:t>Workshop 1</a:t>
+              <a:t>Phase 1: New conversation</a:t>
             </a:r>
             <a:endParaRPr lang="en-US" sz="2800" dirty="0"/>
           </a:p>
-        </p:txBody>
-      </p:sp>
-      <p:sp>
-        <p:nvSpPr>
-          <p:cNvPr id="4" name="Text 2"/>
-          <p:cNvSpPr/>
-          <p:nvPr/>
-        </p:nvSpPr>
-        <p:spPr>
-          <a:xfrm>
-            <a:off x="457200" y="2011680"/>
-            <a:ext cx="3840480" cy="548640"/>
-          </a:xfrm>
-          <a:prstGeom prst="rect">
-            <a:avLst/>
-          </a:prstGeom>
-          <a:noFill/>
-          <a:ln/>
-        </p:spPr>
-        <p:txBody>
-          <a:bodyPr wrap="square" lIns="0" tIns="0" rIns="0" bIns="0" rtlCol="0" anchor="t"/>
-          <a:lstStyle/>
-          <a:p>
-            <a:pPr algn="ctr" indent="0" marL="0">
-              <a:buNone/>
-            </a:pPr>
-            <a:r>
-              <a:rPr lang="en-US" sz="2000" i="1" dirty="0">
+          <a:p>
+            <a:pPr algn="ctr" indent="0" marL="0">
+              <a:buNone/>
+            </a:pPr>
+            <a:r>
+              <a:rPr lang="en-US" sz="2800" b="1" dirty="0">
+                <a:solidFill>
+                  <a:srgbClr val="635BFF"/>
+                </a:solidFill>
+                <a:latin typeface="Georgia" pitchFamily="34" charset="0"/>
+                <a:ea typeface="Georgia" pitchFamily="34" charset="-122"/>
+                <a:cs typeface="Georgia" pitchFamily="34" charset="-120"/>
+              </a:rPr>
+              <a:t>→ give it your task → save output</a:t>
+            </a:r>
+            <a:endParaRPr lang="en-US" sz="2800" dirty="0"/>
+          </a:p>
+          <a:p>
+            <a:pPr algn="ctr" indent="0" marL="0">
+              <a:buNone/>
+            </a:pPr>
+            <a:r>
+              <a:rPr lang="en-US" sz="2800" b="1" dirty="0">
+                <a:solidFill>
+                  <a:srgbClr val="635BFF"/>
+                </a:solidFill>
+                <a:latin typeface="Georgia" pitchFamily="34" charset="0"/>
+                <a:ea typeface="Georgia" pitchFamily="34" charset="-122"/>
+                <a:cs typeface="Georgia" pitchFamily="34" charset="-120"/>
+              </a:rPr>
+              <a:t>Phase 2: New conversation</a:t>
+            </a:r>
+            <a:endParaRPr lang="en-US" sz="2800" dirty="0"/>
+          </a:p>
+          <a:p>
+            <a:pPr algn="ctr" indent="0" marL="0">
+              <a:buNone/>
+            </a:pPr>
+            <a:r>
+              <a:rPr lang="en-US" sz="2800" b="1" dirty="0">
+                <a:solidFill>
+                  <a:srgbClr val="635BFF"/>
+                </a:solidFill>
+                <a:latin typeface="Georgia" pitchFamily="34" charset="0"/>
+                <a:ea typeface="Georgia" pitchFamily="34" charset="-122"/>
+                <a:cs typeface="Georgia" pitchFamily="34" charset="-120"/>
+              </a:rPr>
+              <a:t>→ paste Phase 1's output → draft</a:t>
+            </a:r>
+            <a:endParaRPr lang="en-US" sz="2800" dirty="0"/>
+          </a:p>
+          <a:p>
+            <a:pPr algn="ctr" indent="0" marL="0">
+              <a:buNone/>
+            </a:pPr>
+            <a:r>
+              <a:rPr lang="en-US" sz="2200" i="1" dirty="0">
                 <a:solidFill>
                   <a:srgbClr val="8B95A5"/>
                 </a:solidFill>
@@ -6608,149 +6992,26 @@
                 <a:ea typeface="Verdana" pitchFamily="34" charset="-122"/>
                 <a:cs typeface="Verdana" pitchFamily="34" charset="-120"/>
               </a:rPr>
-              <a:t>Your rules + Skills</a:t>
-            </a:r>
-            <a:endParaRPr lang="en-US" sz="2000" dirty="0"/>
-          </a:p>
-        </p:txBody>
-      </p:sp>
-      <p:sp>
-        <p:nvSpPr>
-          <p:cNvPr id="5" name="Shape 3"/>
-          <p:cNvSpPr/>
-          <p:nvPr/>
-        </p:nvSpPr>
-        <p:spPr>
-          <a:xfrm>
-            <a:off x="4572000" y="914400"/>
-            <a:ext cx="0" cy="2377440"/>
-          </a:xfrm>
-          <a:prstGeom prst="line">
-            <a:avLst/>
-          </a:prstGeom>
-          <a:noFill/>
-          <a:ln w="25400">
-            <a:solidFill>
-              <a:srgbClr val="635BFF"/>
-            </a:solidFill>
-            <a:prstDash val="solid"/>
-          </a:ln>
-        </p:spPr>
-      </p:sp>
-      <p:sp>
-        <p:nvSpPr>
-          <p:cNvPr id="6" name="Text 4"/>
-          <p:cNvSpPr/>
-          <p:nvPr/>
-        </p:nvSpPr>
-        <p:spPr>
-          <a:xfrm>
-            <a:off x="4846320" y="1097280"/>
-            <a:ext cx="3840480" cy="731520"/>
-          </a:xfrm>
-          <a:prstGeom prst="rect">
-            <a:avLst/>
-          </a:prstGeom>
-          <a:noFill/>
-          <a:ln/>
-        </p:spPr>
-        <p:txBody>
-          <a:bodyPr wrap="square" lIns="0" tIns="0" rIns="0" bIns="0" rtlCol="0" anchor="b"/>
-          <a:lstStyle/>
-          <a:p>
-            <a:pPr algn="ctr" indent="0" marL="0">
-              <a:buNone/>
-            </a:pPr>
-            <a:r>
-              <a:rPr lang="en-US" sz="2800" b="1" dirty="0">
-                <a:solidFill>
-                  <a:srgbClr val="FFFFFF"/>
-                </a:solidFill>
-                <a:latin typeface="Georgia" pitchFamily="34" charset="0"/>
-                <a:ea typeface="Georgia" pitchFamily="34" charset="-122"/>
-                <a:cs typeface="Georgia" pitchFamily="34" charset="-120"/>
-              </a:rPr>
-              <a:t>Workshop 2</a:t>
+              <a:t>How does this compare to one</a:t>
             </a:r>
             <a:endParaRPr lang="en-US" sz="2800" dirty="0"/>
           </a:p>
-        </p:txBody>
-      </p:sp>
-      <p:sp>
-        <p:nvSpPr>
-          <p:cNvPr id="7" name="Text 5"/>
-          <p:cNvSpPr/>
-          <p:nvPr/>
-        </p:nvSpPr>
-        <p:spPr>
-          <a:xfrm>
-            <a:off x="4846320" y="2011680"/>
-            <a:ext cx="3840480" cy="548640"/>
-          </a:xfrm>
-          <a:prstGeom prst="rect">
-            <a:avLst/>
-          </a:prstGeom>
-          <a:noFill/>
-          <a:ln/>
-        </p:spPr>
-        <p:txBody>
-          <a:bodyPr wrap="square" lIns="0" tIns="0" rIns="0" bIns="0" rtlCol="0" anchor="t"/>
-          <a:lstStyle/>
-          <a:p>
-            <a:pPr algn="ctr" indent="0" marL="0">
-              <a:buNone/>
-            </a:pPr>
-            <a:r>
-              <a:rPr lang="en-US" sz="2000" i="1" dirty="0">
-                <a:solidFill>
-                  <a:srgbClr val="635BFF"/>
+          <a:p>
+            <a:pPr algn="ctr" indent="0" marL="0">
+              <a:buNone/>
+            </a:pPr>
+            <a:r>
+              <a:rPr lang="en-US" sz="2200" i="1" dirty="0">
+                <a:solidFill>
+                  <a:srgbClr val="8B95A5"/>
                 </a:solidFill>
                 <a:latin typeface="Verdana" pitchFamily="34" charset="0"/>
                 <a:ea typeface="Verdana" pitchFamily="34" charset="-122"/>
                 <a:cs typeface="Verdana" pitchFamily="34" charset="-120"/>
               </a:rPr>
-              <a:t>Each step gets its own Skill</a:t>
-            </a:r>
-            <a:endParaRPr lang="en-US" sz="2000" dirty="0"/>
-          </a:p>
-        </p:txBody>
-      </p:sp>
-      <p:sp>
-        <p:nvSpPr>
-          <p:cNvPr id="8" name="Text 6"/>
-          <p:cNvSpPr/>
-          <p:nvPr/>
-        </p:nvSpPr>
-        <p:spPr>
-          <a:xfrm>
-            <a:off x="914400" y="3474720"/>
-            <a:ext cx="7315200" cy="548640"/>
-          </a:xfrm>
-          <a:prstGeom prst="rect">
-            <a:avLst/>
-          </a:prstGeom>
-          <a:noFill/>
-          <a:ln/>
-        </p:spPr>
-        <p:txBody>
-          <a:bodyPr wrap="square" lIns="0" tIns="0" rIns="0" bIns="0" rtlCol="0" anchor="ctr"/>
-          <a:lstStyle/>
-          <a:p>
-            <a:pPr algn="ctr" indent="0" marL="0">
-              <a:buNone/>
-            </a:pPr>
-            <a:r>
-              <a:rPr lang="en-US" sz="2000" i="1" dirty="0">
-                <a:solidFill>
-                  <a:srgbClr val="8B95A5"/>
-                </a:solidFill>
-                <a:latin typeface="Verdana" pitchFamily="34" charset="0"/>
-                <a:ea typeface="Verdana" pitchFamily="34" charset="-122"/>
-                <a:cs typeface="Verdana" pitchFamily="34" charset="-120"/>
-              </a:rPr>
-              <a:t>Same concept. Now each agent in the chain gets its own playbook.</a:t>
-            </a:r>
-            <a:endParaRPr lang="en-US" sz="2000" dirty="0"/>
+              <a:t>conversation doing everything?</a:t>
+            </a:r>
+            <a:endParaRPr lang="en-US" sz="2800" dirty="0"/>
           </a:p>
         </p:txBody>
       </p:sp>
@@ -6816,17 +7077,17 @@
         </p:nvSpPr>
         <p:spPr>
           <a:xfrm>
-            <a:off x="914400" y="914400"/>
-            <a:ext cx="7315200" cy="3291840"/>
-          </a:xfrm>
-          <a:prstGeom prst="rect">
-            <a:avLst/>
-          </a:prstGeom>
-          <a:noFill/>
-          <a:ln/>
-        </p:spPr>
-        <p:txBody>
-          <a:bodyPr wrap="square" lIns="0" tIns="0" rIns="0" bIns="0" rtlCol="0" anchor="ctr"/>
+            <a:off x="457200" y="1097280"/>
+            <a:ext cx="3840480" cy="731520"/>
+          </a:xfrm>
+          <a:prstGeom prst="rect">
+            <a:avLst/>
+          </a:prstGeom>
+          <a:noFill/>
+          <a:ln/>
+        </p:spPr>
+        <p:txBody>
+          <a:bodyPr wrap="square" lIns="0" tIns="0" rIns="0" bIns="0" rtlCol="0" anchor="b"/>
           <a:lstStyle/>
           <a:p>
             <a:pPr algn="ctr" indent="0" marL="0">
@@ -6835,22 +7096,44 @@
             <a:r>
               <a:rPr lang="en-US" sz="2800" b="1" dirty="0">
                 <a:solidFill>
-                  <a:srgbClr val="635BFF"/>
+                  <a:srgbClr val="8B95A5"/>
                 </a:solidFill>
                 <a:latin typeface="Georgia" pitchFamily="34" charset="0"/>
                 <a:ea typeface="Georgia" pitchFamily="34" charset="-122"/>
                 <a:cs typeface="Georgia" pitchFamily="34" charset="-120"/>
               </a:rPr>
-              <a:t>Go to Customize → Skills</a:t>
+              <a:t>Workshop 1</a:t>
             </a:r>
             <a:endParaRPr lang="en-US" sz="2800" dirty="0"/>
           </a:p>
-          <a:p>
-            <a:pPr algn="ctr" indent="0" marL="0">
-              <a:buNone/>
-            </a:pPr>
-            <a:r>
-              <a:rPr lang="en-US" sz="2200" i="1" dirty="0">
+        </p:txBody>
+      </p:sp>
+      <p:sp>
+        <p:nvSpPr>
+          <p:cNvPr id="4" name="Text 2"/>
+          <p:cNvSpPr/>
+          <p:nvPr/>
+        </p:nvSpPr>
+        <p:spPr>
+          <a:xfrm>
+            <a:off x="457200" y="2011680"/>
+            <a:ext cx="3840480" cy="548640"/>
+          </a:xfrm>
+          <a:prstGeom prst="rect">
+            <a:avLst/>
+          </a:prstGeom>
+          <a:noFill/>
+          <a:ln/>
+        </p:spPr>
+        <p:txBody>
+          <a:bodyPr wrap="square" lIns="0" tIns="0" rIns="0" bIns="0" rtlCol="0" anchor="t"/>
+          <a:lstStyle/>
+          <a:p>
+            <a:pPr algn="ctr" indent="0" marL="0">
+              <a:buNone/>
+            </a:pPr>
+            <a:r>
+              <a:rPr lang="en-US" sz="2000" i="1" dirty="0">
                 <a:solidFill>
                   <a:srgbClr val="8B95A5"/>
                 </a:solidFill>
@@ -6858,43 +7141,149 @@
                 <a:ea typeface="Verdana" pitchFamily="34" charset="-122"/>
                 <a:cs typeface="Verdana" pitchFamily="34" charset="-120"/>
               </a:rPr>
-              <a:t>Click the Research Skill</a:t>
+              <a:t>Your rules + Skills</a:t>
+            </a:r>
+            <a:endParaRPr lang="en-US" sz="2000" dirty="0"/>
+          </a:p>
+        </p:txBody>
+      </p:sp>
+      <p:sp>
+        <p:nvSpPr>
+          <p:cNvPr id="5" name="Shape 3"/>
+          <p:cNvSpPr/>
+          <p:nvPr/>
+        </p:nvSpPr>
+        <p:spPr>
+          <a:xfrm>
+            <a:off x="4572000" y="914400"/>
+            <a:ext cx="0" cy="2377440"/>
+          </a:xfrm>
+          <a:prstGeom prst="line">
+            <a:avLst/>
+          </a:prstGeom>
+          <a:noFill/>
+          <a:ln w="25400">
+            <a:solidFill>
+              <a:srgbClr val="635BFF"/>
+            </a:solidFill>
+            <a:prstDash val="solid"/>
+          </a:ln>
+        </p:spPr>
+      </p:sp>
+      <p:sp>
+        <p:nvSpPr>
+          <p:cNvPr id="6" name="Text 4"/>
+          <p:cNvSpPr/>
+          <p:nvPr/>
+        </p:nvSpPr>
+        <p:spPr>
+          <a:xfrm>
+            <a:off x="4846320" y="1097280"/>
+            <a:ext cx="3840480" cy="731520"/>
+          </a:xfrm>
+          <a:prstGeom prst="rect">
+            <a:avLst/>
+          </a:prstGeom>
+          <a:noFill/>
+          <a:ln/>
+        </p:spPr>
+        <p:txBody>
+          <a:bodyPr wrap="square" lIns="0" tIns="0" rIns="0" bIns="0" rtlCol="0" anchor="b"/>
+          <a:lstStyle/>
+          <a:p>
+            <a:pPr algn="ctr" indent="0" marL="0">
+              <a:buNone/>
+            </a:pPr>
+            <a:r>
+              <a:rPr lang="en-US" sz="2800" b="1" dirty="0">
+                <a:solidFill>
+                  <a:srgbClr val="FFFFFF"/>
+                </a:solidFill>
+                <a:latin typeface="Georgia" pitchFamily="34" charset="0"/>
+                <a:ea typeface="Georgia" pitchFamily="34" charset="-122"/>
+                <a:cs typeface="Georgia" pitchFamily="34" charset="-120"/>
+              </a:rPr>
+              <a:t>Workshop 2</a:t>
             </a:r>
             <a:endParaRPr lang="en-US" sz="2800" dirty="0"/>
           </a:p>
-          <a:p>
-            <a:pPr algn="ctr" indent="0" marL="0">
-              <a:buNone/>
-            </a:pPr>
-            <a:r>
-              <a:rPr lang="en-US" sz="2200" i="1" dirty="0">
-                <a:solidFill>
-                  <a:srgbClr val="8B95A5"/>
+        </p:txBody>
+      </p:sp>
+      <p:sp>
+        <p:nvSpPr>
+          <p:cNvPr id="7" name="Text 5"/>
+          <p:cNvSpPr/>
+          <p:nvPr/>
+        </p:nvSpPr>
+        <p:spPr>
+          <a:xfrm>
+            <a:off x="4846320" y="2011680"/>
+            <a:ext cx="3840480" cy="548640"/>
+          </a:xfrm>
+          <a:prstGeom prst="rect">
+            <a:avLst/>
+          </a:prstGeom>
+          <a:noFill/>
+          <a:ln/>
+        </p:spPr>
+        <p:txBody>
+          <a:bodyPr wrap="square" lIns="0" tIns="0" rIns="0" bIns="0" rtlCol="0" anchor="t"/>
+          <a:lstStyle/>
+          <a:p>
+            <a:pPr algn="ctr" indent="0" marL="0">
+              <a:buNone/>
+            </a:pPr>
+            <a:r>
+              <a:rPr lang="en-US" sz="2000" i="1" dirty="0">
+                <a:solidFill>
+                  <a:srgbClr val="635BFF"/>
                 </a:solidFill>
                 <a:latin typeface="Verdana" pitchFamily="34" charset="0"/>
                 <a:ea typeface="Verdana" pitchFamily="34" charset="-122"/>
                 <a:cs typeface="Verdana" pitchFamily="34" charset="-120"/>
               </a:rPr>
-              <a:t>→ view its SKILL.md</a:t>
-            </a:r>
-            <a:endParaRPr lang="en-US" sz="2800" dirty="0"/>
-          </a:p>
-          <a:p>
-            <a:pPr algn="ctr" indent="0" marL="0">
-              <a:buNone/>
-            </a:pPr>
-            <a:r>
-              <a:rPr lang="en-US" sz="3600" b="1" dirty="0">
-                <a:solidFill>
-                  <a:srgbClr val="635BFF"/>
-                </a:solidFill>
-                <a:latin typeface="Georgia" pitchFamily="34" charset="0"/>
-                <a:ea typeface="Georgia" pitchFamily="34" charset="-122"/>
-                <a:cs typeface="Georgia" pitchFamily="34" charset="-120"/>
-              </a:rPr>
-              <a:t>What would you add or change?</a:t>
-            </a:r>
-            <a:endParaRPr lang="en-US" sz="2800" dirty="0"/>
+              <a:t>Each step gets its own Skill</a:t>
+            </a:r>
+            <a:endParaRPr lang="en-US" sz="2000" dirty="0"/>
+          </a:p>
+        </p:txBody>
+      </p:sp>
+      <p:sp>
+        <p:nvSpPr>
+          <p:cNvPr id="8" name="Text 6"/>
+          <p:cNvSpPr/>
+          <p:nvPr/>
+        </p:nvSpPr>
+        <p:spPr>
+          <a:xfrm>
+            <a:off x="914400" y="3474720"/>
+            <a:ext cx="7315200" cy="548640"/>
+          </a:xfrm>
+          <a:prstGeom prst="rect">
+            <a:avLst/>
+          </a:prstGeom>
+          <a:noFill/>
+          <a:ln/>
+        </p:spPr>
+        <p:txBody>
+          <a:bodyPr wrap="square" lIns="0" tIns="0" rIns="0" bIns="0" rtlCol="0" anchor="ctr"/>
+          <a:lstStyle/>
+          <a:p>
+            <a:pPr algn="ctr" indent="0" marL="0">
+              <a:buNone/>
+            </a:pPr>
+            <a:r>
+              <a:rPr lang="en-US" sz="2000" i="1" dirty="0">
+                <a:solidFill>
+                  <a:srgbClr val="8B95A5"/>
+                </a:solidFill>
+                <a:latin typeface="Verdana" pitchFamily="34" charset="0"/>
+                <a:ea typeface="Verdana" pitchFamily="34" charset="-122"/>
+                <a:cs typeface="Verdana" pitchFamily="34" charset="-120"/>
+              </a:rPr>
+              <a:t>Same concept. Now each agent in the chain gets its own playbook.</a:t>
+            </a:r>
+            <a:endParaRPr lang="en-US" sz="2000" dirty="0"/>
           </a:p>
         </p:txBody>
       </p:sp>
@@ -6960,8 +7349,8 @@
         </p:nvSpPr>
         <p:spPr>
           <a:xfrm>
-            <a:off x="914400" y="1097280"/>
-            <a:ext cx="7315200" cy="2560320"/>
+            <a:off x="914400" y="914400"/>
+            <a:ext cx="7315200" cy="3291840"/>
           </a:xfrm>
           <a:prstGeom prst="rect">
             <a:avLst/>
@@ -6977,34 +7366,68 @@
               <a:buNone/>
             </a:pPr>
             <a:r>
-              <a:rPr lang="en-US" sz="4400" b="1" dirty="0">
-                <a:solidFill>
-                  <a:srgbClr val="FFFFFF"/>
+              <a:rPr lang="en-US" sz="2800" b="1" dirty="0">
+                <a:solidFill>
+                  <a:srgbClr val="635BFF"/>
                 </a:solidFill>
                 <a:latin typeface="Georgia" pitchFamily="34" charset="0"/>
                 <a:ea typeface="Georgia" pitchFamily="34" charset="-122"/>
                 <a:cs typeface="Georgia" pitchFamily="34" charset="-120"/>
               </a:rPr>
-              <a:t>Claude won't remember.</a:t>
-            </a:r>
-            <a:endParaRPr lang="en-US" sz="4400" dirty="0"/>
-          </a:p>
-          <a:p>
-            <a:pPr algn="ctr" indent="0" marL="0">
-              <a:buNone/>
-            </a:pPr>
-            <a:r>
-              <a:rPr lang="en-US" sz="4400" b="1" dirty="0">
-                <a:solidFill>
-                  <a:srgbClr val="FFFFFF"/>
+              <a:t>Go to Customize → Skills</a:t>
+            </a:r>
+            <a:endParaRPr lang="en-US" sz="2800" dirty="0"/>
+          </a:p>
+          <a:p>
+            <a:pPr algn="ctr" indent="0" marL="0">
+              <a:buNone/>
+            </a:pPr>
+            <a:r>
+              <a:rPr lang="en-US" sz="2200" i="1" dirty="0">
+                <a:solidFill>
+                  <a:srgbClr val="8B95A5"/>
+                </a:solidFill>
+                <a:latin typeface="Verdana" pitchFamily="34" charset="0"/>
+                <a:ea typeface="Verdana" pitchFamily="34" charset="-122"/>
+                <a:cs typeface="Verdana" pitchFamily="34" charset="-120"/>
+              </a:rPr>
+              <a:t>Click the Research Skill</a:t>
+            </a:r>
+            <a:endParaRPr lang="en-US" sz="2800" dirty="0"/>
+          </a:p>
+          <a:p>
+            <a:pPr algn="ctr" indent="0" marL="0">
+              <a:buNone/>
+            </a:pPr>
+            <a:r>
+              <a:rPr lang="en-US" sz="2200" i="1" dirty="0">
+                <a:solidFill>
+                  <a:srgbClr val="8B95A5"/>
+                </a:solidFill>
+                <a:latin typeface="Verdana" pitchFamily="34" charset="0"/>
+                <a:ea typeface="Verdana" pitchFamily="34" charset="-122"/>
+                <a:cs typeface="Verdana" pitchFamily="34" charset="-120"/>
+              </a:rPr>
+              <a:t>→ view its SKILL.md</a:t>
+            </a:r>
+            <a:endParaRPr lang="en-US" sz="2800" dirty="0"/>
+          </a:p>
+          <a:p>
+            <a:pPr algn="ctr" indent="0" marL="0">
+              <a:buNone/>
+            </a:pPr>
+            <a:r>
+              <a:rPr lang="en-US" sz="3600" b="1" dirty="0">
+                <a:solidFill>
+                  <a:srgbClr val="635BFF"/>
                 </a:solidFill>
                 <a:latin typeface="Georgia" pitchFamily="34" charset="0"/>
                 <a:ea typeface="Georgia" pitchFamily="34" charset="-122"/>
                 <a:cs typeface="Georgia" pitchFamily="34" charset="-120"/>
               </a:rPr>
-              <a:t>But the Skill will.</a:t>
-            </a:r>
-            <a:endParaRPr lang="en-US" sz="4400" dirty="0"/>
+              <a:t>What would you add or change?</a:t>
+            </a:r>
+            <a:endParaRPr lang="en-US" sz="2800" dirty="0"/>
           </a:p>
         </p:txBody>
       </p:sp>
@@ -7070,73 +7493,51 @@
         </p:nvSpPr>
         <p:spPr>
           <a:xfrm>
-            <a:off x="457200" y="914400"/>
-            <a:ext cx="8229600" cy="2286000"/>
-          </a:xfrm>
-          <a:prstGeom prst="rect">
-            <a:avLst/>
-          </a:prstGeom>
-          <a:noFill/>
-          <a:ln/>
-        </p:spPr>
-        <p:txBody>
-          <a:bodyPr wrap="square" lIns="0" tIns="0" rIns="0" bIns="0" rtlCol="0" anchor="b"/>
-          <a:lstStyle/>
-          <a:p>
-            <a:pPr algn="ctr" indent="0" marL="0">
-              <a:buNone/>
-            </a:pPr>
-            <a:r>
-              <a:rPr lang="en-US" sz="12000" b="1" dirty="0">
-                <a:solidFill>
-                  <a:srgbClr val="FF6B8A"/>
+            <a:off x="914400" y="1097280"/>
+            <a:ext cx="7315200" cy="2560320"/>
+          </a:xfrm>
+          <a:prstGeom prst="rect">
+            <a:avLst/>
+          </a:prstGeom>
+          <a:noFill/>
+          <a:ln/>
+        </p:spPr>
+        <p:txBody>
+          <a:bodyPr wrap="square" lIns="0" tIns="0" rIns="0" bIns="0" rtlCol="0" anchor="ctr"/>
+          <a:lstStyle/>
+          <a:p>
+            <a:pPr algn="ctr" indent="0" marL="0">
+              <a:buNone/>
+            </a:pPr>
+            <a:r>
+              <a:rPr lang="en-US" sz="4400" b="1" dirty="0">
+                <a:solidFill>
+                  <a:srgbClr val="FFFFFF"/>
                 </a:solidFill>
                 <a:latin typeface="Georgia" pitchFamily="34" charset="0"/>
                 <a:ea typeface="Georgia" pitchFamily="34" charset="-122"/>
                 <a:cs typeface="Georgia" pitchFamily="34" charset="-120"/>
               </a:rPr>
-              <a:t>1.5 hrs</a:t>
-            </a:r>
-            <a:endParaRPr lang="en-US" sz="12000" dirty="0"/>
-          </a:p>
-        </p:txBody>
-      </p:sp>
-      <p:sp>
-        <p:nvSpPr>
-          <p:cNvPr id="4" name="Text 2"/>
-          <p:cNvSpPr/>
-          <p:nvPr/>
-        </p:nvSpPr>
-        <p:spPr>
-          <a:xfrm>
-            <a:off x="1371600" y="3291840"/>
-            <a:ext cx="6400800" cy="731520"/>
-          </a:xfrm>
-          <a:prstGeom prst="rect">
-            <a:avLst/>
-          </a:prstGeom>
-          <a:noFill/>
-          <a:ln/>
-        </p:spPr>
-        <p:txBody>
-          <a:bodyPr wrap="square" lIns="0" tIns="0" rIns="0" bIns="0" rtlCol="0" anchor="t"/>
-          <a:lstStyle/>
-          <a:p>
-            <a:pPr algn="ctr" indent="0" marL="0">
-              <a:buNone/>
-            </a:pPr>
-            <a:r>
-              <a:rPr lang="en-US" sz="2800" dirty="0">
-                <a:solidFill>
-                  <a:srgbClr val="8B95A5"/>
-                </a:solidFill>
-                <a:latin typeface="Verdana" pitchFamily="34" charset="0"/>
-                <a:ea typeface="Verdana" pitchFamily="34" charset="-122"/>
-                <a:cs typeface="Verdana" pitchFamily="34" charset="-120"/>
-              </a:rPr>
-              <a:t>of you being the bottleneck</a:t>
-            </a:r>
-            <a:endParaRPr lang="en-US" sz="2800" dirty="0"/>
+              <a:t>Claude won't remember.</a:t>
+            </a:r>
+            <a:endParaRPr lang="en-US" sz="4400" dirty="0"/>
+          </a:p>
+          <a:p>
+            <a:pPr algn="ctr" indent="0" marL="0">
+              <a:buNone/>
+            </a:pPr>
+            <a:r>
+              <a:rPr lang="en-US" sz="4400" b="1" dirty="0">
+                <a:solidFill>
+                  <a:srgbClr val="FFFFFF"/>
+                </a:solidFill>
+                <a:latin typeface="Georgia" pitchFamily="34" charset="0"/>
+                <a:ea typeface="Georgia" pitchFamily="34" charset="-122"/>
+                <a:cs typeface="Georgia" pitchFamily="34" charset="-120"/>
+              </a:rPr>
+              <a:t>But the Skill will.</a:t>
+            </a:r>
+            <a:endParaRPr lang="en-US" sz="4400" dirty="0"/>
           </a:p>
         </p:txBody>
       </p:sp>
@@ -7221,13 +7622,13 @@
             <a:r>
               <a:rPr lang="en-US" sz="12000" b="1" dirty="0">
                 <a:solidFill>
-                  <a:srgbClr val="09825D"/>
+                  <a:srgbClr val="FF6B8A"/>
                 </a:solidFill>
                 <a:latin typeface="Georgia" pitchFamily="34" charset="0"/>
                 <a:ea typeface="Georgia" pitchFamily="34" charset="-122"/>
                 <a:cs typeface="Georgia" pitchFamily="34" charset="-120"/>
               </a:rPr>
-              <a:t>15 min</a:t>
+              <a:t>1.5 hrs</a:t>
             </a:r>
             <a:endParaRPr lang="en-US" sz="12000" dirty="0"/>
           </a:p>
@@ -7266,7 +7667,7 @@
                 <a:ea typeface="Verdana" pitchFamily="34" charset="-122"/>
                 <a:cs typeface="Verdana" pitchFamily="34" charset="-120"/>
               </a:rPr>
-              <a:t>of judgment — the part only humans can do</a:t>
+              <a:t>of you being the bottleneck</a:t>
             </a:r>
             <a:endParaRPr lang="en-US" sz="2800" dirty="0"/>
           </a:p>
@@ -7328,32 +7729,42 @@
       </p:sp>
       <p:sp>
         <p:nvSpPr>
-          <p:cNvPr id="3" name="Shape 1"/>
-          <p:cNvSpPr/>
-          <p:nvPr/>
-        </p:nvSpPr>
-        <p:spPr>
-          <a:xfrm>
-            <a:off x="192024" y="2011680"/>
-            <a:ext cx="1188720" cy="640080"/>
-          </a:xfrm>
-          <a:prstGeom prst="roundRect">
-            <a:avLst>
-              <a:gd name="adj" fmla="val 11429"/>
-            </a:avLst>
-          </a:prstGeom>
-          <a:solidFill>
-            <a:srgbClr val="0A2540">
-              <a:alpha val="50000"/>
-            </a:srgbClr>
-          </a:solidFill>
-          <a:ln w="19050">
-            <a:solidFill>
-              <a:srgbClr val="8B95A5"/>
-            </a:solidFill>
-            <a:prstDash val="solid"/>
-          </a:ln>
-        </p:spPr>
+          <p:cNvPr id="3" name="Text 1"/>
+          <p:cNvSpPr/>
+          <p:nvPr/>
+        </p:nvSpPr>
+        <p:spPr>
+          <a:xfrm>
+            <a:off x="457200" y="914400"/>
+            <a:ext cx="8229600" cy="2286000"/>
+          </a:xfrm>
+          <a:prstGeom prst="rect">
+            <a:avLst/>
+          </a:prstGeom>
+          <a:noFill/>
+          <a:ln/>
+        </p:spPr>
+        <p:txBody>
+          <a:bodyPr wrap="square" lIns="0" tIns="0" rIns="0" bIns="0" rtlCol="0" anchor="b"/>
+          <a:lstStyle/>
+          <a:p>
+            <a:pPr algn="ctr" indent="0" marL="0">
+              <a:buNone/>
+            </a:pPr>
+            <a:r>
+              <a:rPr lang="en-US" sz="12000" b="1" dirty="0">
+                <a:solidFill>
+                  <a:srgbClr val="09825D"/>
+                </a:solidFill>
+                <a:latin typeface="Georgia" pitchFamily="34" charset="0"/>
+                <a:ea typeface="Georgia" pitchFamily="34" charset="-122"/>
+                <a:cs typeface="Georgia" pitchFamily="34" charset="-120"/>
+              </a:rPr>
+              <a:t>15 min</a:t>
+            </a:r>
+            <a:endParaRPr lang="en-US" sz="12000" dirty="0"/>
+          </a:p>
+        </p:txBody>
       </p:sp>
       <p:sp>
         <p:nvSpPr>
@@ -7363,26 +7774,24 @@
         </p:nvSpPr>
         <p:spPr>
           <a:xfrm>
-            <a:off x="192024" y="2011680"/>
-            <a:ext cx="1188720" cy="640080"/>
-          </a:xfrm>
-          <a:prstGeom prst="rect">
-            <a:avLst/>
-          </a:prstGeom>
-          <a:noFill/>
-          <a:ln/>
-        </p:spPr>
-        <p:txBody>
-          <a:bodyPr wrap="square" lIns="0" tIns="0" rIns="0" bIns="0" rtlCol="0" anchor="ctr">
-            <a:normAutofit/>
-          </a:bodyPr>
-          <a:lstStyle/>
-          <a:p>
-            <a:pPr algn="ctr" indent="0" marL="0">
-              <a:buNone/>
-            </a:pPr>
-            <a:r>
-              <a:rPr lang="en-US" sz="1100" b="1" dirty="0">
+            <a:off x="1371600" y="3291840"/>
+            <a:ext cx="6400800" cy="731520"/>
+          </a:xfrm>
+          <a:prstGeom prst="rect">
+            <a:avLst/>
+          </a:prstGeom>
+          <a:noFill/>
+          <a:ln/>
+        </p:spPr>
+        <p:txBody>
+          <a:bodyPr wrap="square" lIns="0" tIns="0" rIns="0" bIns="0" rtlCol="0" anchor="t"/>
+          <a:lstStyle/>
+          <a:p>
+            <a:pPr algn="ctr" indent="0" marL="0">
+              <a:buNone/>
+            </a:pPr>
+            <a:r>
+              <a:rPr lang="en-US" sz="2800" dirty="0">
                 <a:solidFill>
                   <a:srgbClr val="8B95A5"/>
                 </a:solidFill>
@@ -7390,709 +7799,9 @@
                 <a:ea typeface="Verdana" pitchFamily="34" charset="-122"/>
                 <a:cs typeface="Verdana" pitchFamily="34" charset="-120"/>
               </a:rPr>
-              <a:t>Skeptic</a:t>
-            </a:r>
-            <a:endParaRPr lang="en-US" sz="1100" dirty="0"/>
-          </a:p>
-        </p:txBody>
-      </p:sp>
-      <p:sp>
-        <p:nvSpPr>
-          <p:cNvPr id="5" name="Text 3"/>
-          <p:cNvSpPr/>
-          <p:nvPr/>
-        </p:nvSpPr>
-        <p:spPr>
-          <a:xfrm>
-            <a:off x="1380744" y="2011680"/>
-            <a:ext cx="73152" cy="640080"/>
-          </a:xfrm>
-          <a:prstGeom prst="rect">
-            <a:avLst/>
-          </a:prstGeom>
-          <a:noFill/>
-          <a:ln/>
-        </p:spPr>
-        <p:txBody>
-          <a:bodyPr wrap="square" lIns="0" tIns="0" rIns="0" bIns="0" rtlCol="0" anchor="ctr"/>
-          <a:lstStyle/>
-          <a:p>
-            <a:pPr algn="ctr" indent="0" marL="0">
-              <a:buNone/>
-            </a:pPr>
-            <a:r>
-              <a:rPr lang="en-US" sz="1100" dirty="0">
-                <a:solidFill>
-                  <a:srgbClr val="8B95A5"/>
-                </a:solidFill>
-                <a:latin typeface="Verdana" pitchFamily="34" charset="0"/>
-                <a:ea typeface="Verdana" pitchFamily="34" charset="-122"/>
-                <a:cs typeface="Verdana" pitchFamily="34" charset="-120"/>
-              </a:rPr>
-              <a:t>→</a:t>
-            </a:r>
-            <a:endParaRPr lang="en-US" sz="1100" dirty="0"/>
-          </a:p>
-        </p:txBody>
-      </p:sp>
-      <p:sp>
-        <p:nvSpPr>
-          <p:cNvPr id="6" name="Shape 4"/>
-          <p:cNvSpPr/>
-          <p:nvPr/>
-        </p:nvSpPr>
-        <p:spPr>
-          <a:xfrm>
-            <a:off x="1453896" y="2011680"/>
-            <a:ext cx="1188720" cy="640080"/>
-          </a:xfrm>
-          <a:prstGeom prst="roundRect">
-            <a:avLst>
-              <a:gd name="adj" fmla="val 11429"/>
-            </a:avLst>
-          </a:prstGeom>
-          <a:solidFill>
-            <a:srgbClr val="635BFF"/>
-          </a:solidFill>
-          <a:ln w="19050">
-            <a:solidFill>
-              <a:srgbClr val="635BFF"/>
-            </a:solidFill>
-            <a:prstDash val="solid"/>
-          </a:ln>
-        </p:spPr>
-      </p:sp>
-      <p:sp>
-        <p:nvSpPr>
-          <p:cNvPr id="7" name="Text 5"/>
-          <p:cNvSpPr/>
-          <p:nvPr/>
-        </p:nvSpPr>
-        <p:spPr>
-          <a:xfrm>
-            <a:off x="1453896" y="2011680"/>
-            <a:ext cx="1188720" cy="640080"/>
-          </a:xfrm>
-          <a:prstGeom prst="rect">
-            <a:avLst/>
-          </a:prstGeom>
-          <a:noFill/>
-          <a:ln/>
-        </p:spPr>
-        <p:txBody>
-          <a:bodyPr wrap="square" lIns="0" tIns="0" rIns="0" bIns="0" rtlCol="0" anchor="ctr">
-            <a:normAutofit/>
-          </a:bodyPr>
-          <a:lstStyle/>
-          <a:p>
-            <a:pPr algn="ctr" indent="0" marL="0">
-              <a:buNone/>
-            </a:pPr>
-            <a:r>
-              <a:rPr lang="en-US" sz="1100" b="1" dirty="0">
-                <a:solidFill>
-                  <a:srgbClr val="FFFFFF"/>
-                </a:solidFill>
-                <a:latin typeface="Verdana" pitchFamily="34" charset="0"/>
-                <a:ea typeface="Verdana" pitchFamily="34" charset="-122"/>
-                <a:cs typeface="Verdana" pitchFamily="34" charset="-120"/>
-              </a:rPr>
-              <a:t>Explorer</a:t>
-            </a:r>
-            <a:endParaRPr lang="en-US" sz="1100" dirty="0"/>
-          </a:p>
-        </p:txBody>
-      </p:sp>
-      <p:sp>
-        <p:nvSpPr>
-          <p:cNvPr id="8" name="Text 6"/>
-          <p:cNvSpPr/>
-          <p:nvPr/>
-        </p:nvSpPr>
-        <p:spPr>
-          <a:xfrm>
-            <a:off x="2642616" y="2011680"/>
-            <a:ext cx="73152" cy="640080"/>
-          </a:xfrm>
-          <a:prstGeom prst="rect">
-            <a:avLst/>
-          </a:prstGeom>
-          <a:noFill/>
-          <a:ln/>
-        </p:spPr>
-        <p:txBody>
-          <a:bodyPr wrap="square" lIns="0" tIns="0" rIns="0" bIns="0" rtlCol="0" anchor="ctr"/>
-          <a:lstStyle/>
-          <a:p>
-            <a:pPr algn="ctr" indent="0" marL="0">
-              <a:buNone/>
-            </a:pPr>
-            <a:r>
-              <a:rPr lang="en-US" sz="1100" dirty="0">
-                <a:solidFill>
-                  <a:srgbClr val="8B95A5"/>
-                </a:solidFill>
-                <a:latin typeface="Verdana" pitchFamily="34" charset="0"/>
-                <a:ea typeface="Verdana" pitchFamily="34" charset="-122"/>
-                <a:cs typeface="Verdana" pitchFamily="34" charset="-120"/>
-              </a:rPr>
-              <a:t>→</a:t>
-            </a:r>
-            <a:endParaRPr lang="en-US" sz="1100" dirty="0"/>
-          </a:p>
-        </p:txBody>
-      </p:sp>
-      <p:sp>
-        <p:nvSpPr>
-          <p:cNvPr id="9" name="Shape 7"/>
-          <p:cNvSpPr/>
-          <p:nvPr/>
-        </p:nvSpPr>
-        <p:spPr>
-          <a:xfrm>
-            <a:off x="2715768" y="2011680"/>
-            <a:ext cx="1188720" cy="640080"/>
-          </a:xfrm>
-          <a:prstGeom prst="roundRect">
-            <a:avLst>
-              <a:gd name="adj" fmla="val 11429"/>
-            </a:avLst>
-          </a:prstGeom>
-          <a:solidFill>
-            <a:srgbClr val="635BFF"/>
-          </a:solidFill>
-          <a:ln w="19050">
-            <a:solidFill>
-              <a:srgbClr val="635BFF"/>
-            </a:solidFill>
-            <a:prstDash val="solid"/>
-          </a:ln>
-        </p:spPr>
-      </p:sp>
-      <p:sp>
-        <p:nvSpPr>
-          <p:cNvPr id="10" name="Text 8"/>
-          <p:cNvSpPr/>
-          <p:nvPr/>
-        </p:nvSpPr>
-        <p:spPr>
-          <a:xfrm>
-            <a:off x="2715768" y="2011680"/>
-            <a:ext cx="1188720" cy="640080"/>
-          </a:xfrm>
-          <a:prstGeom prst="rect">
-            <a:avLst/>
-          </a:prstGeom>
-          <a:noFill/>
-          <a:ln/>
-        </p:spPr>
-        <p:txBody>
-          <a:bodyPr wrap="square" lIns="0" tIns="0" rIns="0" bIns="0" rtlCol="0" anchor="ctr">
-            <a:normAutofit/>
-          </a:bodyPr>
-          <a:lstStyle/>
-          <a:p>
-            <a:pPr algn="ctr" indent="0" marL="0">
-              <a:buNone/>
-            </a:pPr>
-            <a:r>
-              <a:rPr lang="en-US" sz="1100" b="1" dirty="0">
-                <a:solidFill>
-                  <a:srgbClr val="FFFFFF"/>
-                </a:solidFill>
-                <a:latin typeface="Verdana" pitchFamily="34" charset="0"/>
-                <a:ea typeface="Verdana" pitchFamily="34" charset="-122"/>
-                <a:cs typeface="Verdana" pitchFamily="34" charset="-120"/>
-              </a:rPr>
-              <a:t>Whisperer</a:t>
-            </a:r>
-            <a:endParaRPr lang="en-US" sz="1100" dirty="0"/>
-          </a:p>
-        </p:txBody>
-      </p:sp>
-      <p:sp>
-        <p:nvSpPr>
-          <p:cNvPr id="11" name="Text 9"/>
-          <p:cNvSpPr/>
-          <p:nvPr/>
-        </p:nvSpPr>
-        <p:spPr>
-          <a:xfrm>
-            <a:off x="3904488" y="2011680"/>
-            <a:ext cx="73152" cy="640080"/>
-          </a:xfrm>
-          <a:prstGeom prst="rect">
-            <a:avLst/>
-          </a:prstGeom>
-          <a:noFill/>
-          <a:ln/>
-        </p:spPr>
-        <p:txBody>
-          <a:bodyPr wrap="square" lIns="0" tIns="0" rIns="0" bIns="0" rtlCol="0" anchor="ctr"/>
-          <a:lstStyle/>
-          <a:p>
-            <a:pPr algn="ctr" indent="0" marL="0">
-              <a:buNone/>
-            </a:pPr>
-            <a:r>
-              <a:rPr lang="en-US" sz="1100" dirty="0">
-                <a:solidFill>
-                  <a:srgbClr val="8B95A5"/>
-                </a:solidFill>
-                <a:latin typeface="Verdana" pitchFamily="34" charset="0"/>
-                <a:ea typeface="Verdana" pitchFamily="34" charset="-122"/>
-                <a:cs typeface="Verdana" pitchFamily="34" charset="-120"/>
-              </a:rPr>
-              <a:t>→</a:t>
-            </a:r>
-            <a:endParaRPr lang="en-US" sz="1100" dirty="0"/>
-          </a:p>
-        </p:txBody>
-      </p:sp>
-      <p:sp>
-        <p:nvSpPr>
-          <p:cNvPr id="12" name="Shape 10"/>
-          <p:cNvSpPr/>
-          <p:nvPr/>
-        </p:nvSpPr>
-        <p:spPr>
-          <a:xfrm>
-            <a:off x="3977640" y="2011680"/>
-            <a:ext cx="1188720" cy="640080"/>
-          </a:xfrm>
-          <a:prstGeom prst="roundRect">
-            <a:avLst>
-              <a:gd name="adj" fmla="val 11429"/>
-            </a:avLst>
-          </a:prstGeom>
-          <a:solidFill>
-            <a:srgbClr val="635BFF"/>
-          </a:solidFill>
-          <a:ln w="19050">
-            <a:solidFill>
-              <a:srgbClr val="635BFF"/>
-            </a:solidFill>
-            <a:prstDash val="solid"/>
-          </a:ln>
-        </p:spPr>
-      </p:sp>
-      <p:sp>
-        <p:nvSpPr>
-          <p:cNvPr id="13" name="Text 11"/>
-          <p:cNvSpPr/>
-          <p:nvPr/>
-        </p:nvSpPr>
-        <p:spPr>
-          <a:xfrm>
-            <a:off x="3977640" y="2011680"/>
-            <a:ext cx="1188720" cy="640080"/>
-          </a:xfrm>
-          <a:prstGeom prst="rect">
-            <a:avLst/>
-          </a:prstGeom>
-          <a:noFill/>
-          <a:ln/>
-        </p:spPr>
-        <p:txBody>
-          <a:bodyPr wrap="square" lIns="0" tIns="0" rIns="0" bIns="0" rtlCol="0" anchor="ctr">
-            <a:normAutofit/>
-          </a:bodyPr>
-          <a:lstStyle/>
-          <a:p>
-            <a:pPr algn="ctr" indent="0" marL="0">
-              <a:buNone/>
-            </a:pPr>
-            <a:r>
-              <a:rPr lang="en-US" sz="1100" b="1" dirty="0">
-                <a:solidFill>
-                  <a:srgbClr val="FFFFFF"/>
-                </a:solidFill>
-                <a:latin typeface="Verdana" pitchFamily="34" charset="0"/>
-                <a:ea typeface="Verdana" pitchFamily="34" charset="-122"/>
-                <a:cs typeface="Verdana" pitchFamily="34" charset="-120"/>
-              </a:rPr>
-              <a:t>Strategist</a:t>
-            </a:r>
-            <a:endParaRPr lang="en-US" sz="1100" dirty="0"/>
-          </a:p>
-        </p:txBody>
-      </p:sp>
-      <p:sp>
-        <p:nvSpPr>
-          <p:cNvPr id="14" name="Text 12"/>
-          <p:cNvSpPr/>
-          <p:nvPr/>
-        </p:nvSpPr>
-        <p:spPr>
-          <a:xfrm>
-            <a:off x="5166360" y="2011680"/>
-            <a:ext cx="73152" cy="640080"/>
-          </a:xfrm>
-          <a:prstGeom prst="rect">
-            <a:avLst/>
-          </a:prstGeom>
-          <a:noFill/>
-          <a:ln/>
-        </p:spPr>
-        <p:txBody>
-          <a:bodyPr wrap="square" lIns="0" tIns="0" rIns="0" bIns="0" rtlCol="0" anchor="ctr"/>
-          <a:lstStyle/>
-          <a:p>
-            <a:pPr algn="ctr" indent="0" marL="0">
-              <a:buNone/>
-            </a:pPr>
-            <a:r>
-              <a:rPr lang="en-US" sz="1100" dirty="0">
-                <a:solidFill>
-                  <a:srgbClr val="8B95A5"/>
-                </a:solidFill>
-                <a:latin typeface="Verdana" pitchFamily="34" charset="0"/>
-                <a:ea typeface="Verdana" pitchFamily="34" charset="-122"/>
-                <a:cs typeface="Verdana" pitchFamily="34" charset="-120"/>
-              </a:rPr>
-              <a:t>→</a:t>
-            </a:r>
-            <a:endParaRPr lang="en-US" sz="1100" dirty="0"/>
-          </a:p>
-        </p:txBody>
-      </p:sp>
-      <p:sp>
-        <p:nvSpPr>
-          <p:cNvPr id="15" name="Shape 13"/>
-          <p:cNvSpPr/>
-          <p:nvPr/>
-        </p:nvSpPr>
-        <p:spPr>
-          <a:xfrm>
-            <a:off x="5239512" y="2011680"/>
-            <a:ext cx="1188720" cy="640080"/>
-          </a:xfrm>
-          <a:prstGeom prst="roundRect">
-            <a:avLst>
-              <a:gd name="adj" fmla="val 11429"/>
-            </a:avLst>
-          </a:prstGeom>
-          <a:solidFill>
-            <a:srgbClr val="635BFF"/>
-          </a:solidFill>
-          <a:ln w="19050">
-            <a:solidFill>
-              <a:srgbClr val="635BFF"/>
-            </a:solidFill>
-            <a:prstDash val="solid"/>
-          </a:ln>
-        </p:spPr>
-      </p:sp>
-      <p:sp>
-        <p:nvSpPr>
-          <p:cNvPr id="16" name="Text 14"/>
-          <p:cNvSpPr/>
-          <p:nvPr/>
-        </p:nvSpPr>
-        <p:spPr>
-          <a:xfrm>
-            <a:off x="5239512" y="2011680"/>
-            <a:ext cx="1188720" cy="640080"/>
-          </a:xfrm>
-          <a:prstGeom prst="rect">
-            <a:avLst/>
-          </a:prstGeom>
-          <a:noFill/>
-          <a:ln/>
-        </p:spPr>
-        <p:txBody>
-          <a:bodyPr wrap="square" lIns="0" tIns="0" rIns="0" bIns="0" rtlCol="0" anchor="ctr">
-            <a:normAutofit/>
-          </a:bodyPr>
-          <a:lstStyle/>
-          <a:p>
-            <a:pPr algn="ctr" indent="0" marL="0">
-              <a:buNone/>
-            </a:pPr>
-            <a:r>
-              <a:rPr lang="en-US" sz="1100" b="1" dirty="0">
-                <a:solidFill>
-                  <a:srgbClr val="FFFFFF"/>
-                </a:solidFill>
-                <a:latin typeface="Verdana" pitchFamily="34" charset="0"/>
-                <a:ea typeface="Verdana" pitchFamily="34" charset="-122"/>
-                <a:cs typeface="Verdana" pitchFamily="34" charset="-120"/>
-              </a:rPr>
-              <a:t>Operator</a:t>
-            </a:r>
-            <a:endParaRPr lang="en-US" sz="1100" dirty="0"/>
-          </a:p>
-        </p:txBody>
-      </p:sp>
-      <p:sp>
-        <p:nvSpPr>
-          <p:cNvPr id="17" name="Text 15"/>
-          <p:cNvSpPr/>
-          <p:nvPr/>
-        </p:nvSpPr>
-        <p:spPr>
-          <a:xfrm>
-            <a:off x="6428232" y="2011680"/>
-            <a:ext cx="73152" cy="640080"/>
-          </a:xfrm>
-          <a:prstGeom prst="rect">
-            <a:avLst/>
-          </a:prstGeom>
-          <a:noFill/>
-          <a:ln/>
-        </p:spPr>
-        <p:txBody>
-          <a:bodyPr wrap="square" lIns="0" tIns="0" rIns="0" bIns="0" rtlCol="0" anchor="ctr"/>
-          <a:lstStyle/>
-          <a:p>
-            <a:pPr algn="ctr" indent="0" marL="0">
-              <a:buNone/>
-            </a:pPr>
-            <a:r>
-              <a:rPr lang="en-US" sz="1100" dirty="0">
-                <a:solidFill>
-                  <a:srgbClr val="8B95A5"/>
-                </a:solidFill>
-                <a:latin typeface="Verdana" pitchFamily="34" charset="0"/>
-                <a:ea typeface="Verdana" pitchFamily="34" charset="-122"/>
-                <a:cs typeface="Verdana" pitchFamily="34" charset="-120"/>
-              </a:rPr>
-              <a:t>→</a:t>
-            </a:r>
-            <a:endParaRPr lang="en-US" sz="1100" dirty="0"/>
-          </a:p>
-        </p:txBody>
-      </p:sp>
-      <p:sp>
-        <p:nvSpPr>
-          <p:cNvPr id="18" name="Shape 16"/>
-          <p:cNvSpPr/>
-          <p:nvPr/>
-        </p:nvSpPr>
-        <p:spPr>
-          <a:xfrm>
-            <a:off x="6501384" y="2011680"/>
-            <a:ext cx="1188720" cy="640080"/>
-          </a:xfrm>
-          <a:prstGeom prst="roundRect">
-            <a:avLst>
-              <a:gd name="adj" fmla="val 11429"/>
-            </a:avLst>
-          </a:prstGeom>
-          <a:solidFill>
-            <a:srgbClr val="635BFF"/>
-          </a:solidFill>
-          <a:ln w="19050">
-            <a:solidFill>
-              <a:srgbClr val="635BFF"/>
-            </a:solidFill>
-            <a:prstDash val="solid"/>
-          </a:ln>
-        </p:spPr>
-      </p:sp>
-      <p:sp>
-        <p:nvSpPr>
-          <p:cNvPr id="19" name="Text 17"/>
-          <p:cNvSpPr/>
-          <p:nvPr/>
-        </p:nvSpPr>
-        <p:spPr>
-          <a:xfrm>
-            <a:off x="6501384" y="2011680"/>
-            <a:ext cx="1188720" cy="640080"/>
-          </a:xfrm>
-          <a:prstGeom prst="rect">
-            <a:avLst/>
-          </a:prstGeom>
-          <a:noFill/>
-          <a:ln/>
-        </p:spPr>
-        <p:txBody>
-          <a:bodyPr wrap="square" lIns="0" tIns="0" rIns="0" bIns="0" rtlCol="0" anchor="ctr">
-            <a:normAutofit/>
-          </a:bodyPr>
-          <a:lstStyle/>
-          <a:p>
-            <a:pPr algn="ctr" indent="0" marL="0">
-              <a:buNone/>
-            </a:pPr>
-            <a:r>
-              <a:rPr lang="en-US" sz="1100" b="1" dirty="0">
-                <a:solidFill>
-                  <a:srgbClr val="FFFFFF"/>
-                </a:solidFill>
-                <a:latin typeface="Verdana" pitchFamily="34" charset="0"/>
-                <a:ea typeface="Verdana" pitchFamily="34" charset="-122"/>
-                <a:cs typeface="Verdana" pitchFamily="34" charset="-120"/>
-              </a:rPr>
-              <a:t>Orchestrator</a:t>
-            </a:r>
-            <a:endParaRPr lang="en-US" sz="1100" dirty="0"/>
-          </a:p>
-        </p:txBody>
-      </p:sp>
-      <p:sp>
-        <p:nvSpPr>
-          <p:cNvPr id="20" name="Text 18"/>
-          <p:cNvSpPr/>
-          <p:nvPr/>
-        </p:nvSpPr>
-        <p:spPr>
-          <a:xfrm>
-            <a:off x="7690104" y="2011680"/>
-            <a:ext cx="73152" cy="640080"/>
-          </a:xfrm>
-          <a:prstGeom prst="rect">
-            <a:avLst/>
-          </a:prstGeom>
-          <a:noFill/>
-          <a:ln/>
-        </p:spPr>
-        <p:txBody>
-          <a:bodyPr wrap="square" lIns="0" tIns="0" rIns="0" bIns="0" rtlCol="0" anchor="ctr"/>
-          <a:lstStyle/>
-          <a:p>
-            <a:pPr algn="ctr" indent="0" marL="0">
-              <a:buNone/>
-            </a:pPr>
-            <a:r>
-              <a:rPr lang="en-US" sz="1100" dirty="0">
-                <a:solidFill>
-                  <a:srgbClr val="8B95A5"/>
-                </a:solidFill>
-                <a:latin typeface="Verdana" pitchFamily="34" charset="0"/>
-                <a:ea typeface="Verdana" pitchFamily="34" charset="-122"/>
-                <a:cs typeface="Verdana" pitchFamily="34" charset="-120"/>
-              </a:rPr>
-              <a:t>→</a:t>
-            </a:r>
-            <a:endParaRPr lang="en-US" sz="1100" dirty="0"/>
-          </a:p>
-        </p:txBody>
-      </p:sp>
-      <p:sp>
-        <p:nvSpPr>
-          <p:cNvPr id="21" name="Shape 19"/>
-          <p:cNvSpPr/>
-          <p:nvPr/>
-        </p:nvSpPr>
-        <p:spPr>
-          <a:xfrm>
-            <a:off x="7763256" y="2011680"/>
-            <a:ext cx="1188720" cy="640080"/>
-          </a:xfrm>
-          <a:prstGeom prst="roundRect">
-            <a:avLst>
-              <a:gd name="adj" fmla="val 11429"/>
-            </a:avLst>
-          </a:prstGeom>
-          <a:solidFill>
-            <a:srgbClr val="0A2540">
-              <a:alpha val="50000"/>
-            </a:srgbClr>
-          </a:solidFill>
-          <a:ln w="19050">
-            <a:solidFill>
-              <a:srgbClr val="8B95A5"/>
-            </a:solidFill>
-            <a:prstDash val="dash"/>
-          </a:ln>
-        </p:spPr>
-      </p:sp>
-      <p:sp>
-        <p:nvSpPr>
-          <p:cNvPr id="22" name="Text 20"/>
-          <p:cNvSpPr/>
-          <p:nvPr/>
-        </p:nvSpPr>
-        <p:spPr>
-          <a:xfrm>
-            <a:off x="7763256" y="2011680"/>
-            <a:ext cx="1188720" cy="640080"/>
-          </a:xfrm>
-          <a:prstGeom prst="rect">
-            <a:avLst/>
-          </a:prstGeom>
-          <a:noFill/>
-          <a:ln/>
-        </p:spPr>
-        <p:txBody>
-          <a:bodyPr wrap="square" lIns="0" tIns="0" rIns="0" bIns="0" rtlCol="0" anchor="ctr">
-            <a:normAutofit/>
-          </a:bodyPr>
-          <a:lstStyle/>
-          <a:p>
-            <a:pPr algn="ctr" indent="0" marL="0">
-              <a:buNone/>
-            </a:pPr>
-            <a:r>
-              <a:rPr lang="en-US" sz="1100" b="1" dirty="0">
-                <a:solidFill>
-                  <a:srgbClr val="8B95A5"/>
-                </a:solidFill>
-                <a:latin typeface="Verdana" pitchFamily="34" charset="0"/>
-                <a:ea typeface="Verdana" pitchFamily="34" charset="-122"/>
-                <a:cs typeface="Verdana" pitchFamily="34" charset="-120"/>
-              </a:rPr>
-              <a:t>Builder</a:t>
-            </a:r>
-            <a:endParaRPr lang="en-US" sz="1100" dirty="0"/>
-          </a:p>
-        </p:txBody>
-      </p:sp>
-      <p:sp>
-        <p:nvSpPr>
-          <p:cNvPr id="23" name="Text 21"/>
-          <p:cNvSpPr/>
-          <p:nvPr/>
-        </p:nvSpPr>
-        <p:spPr>
-          <a:xfrm>
-            <a:off x="914400" y="3108960"/>
-            <a:ext cx="7315200" cy="914400"/>
-          </a:xfrm>
-          <a:prstGeom prst="rect">
-            <a:avLst/>
-          </a:prstGeom>
-          <a:noFill/>
-          <a:ln/>
-        </p:spPr>
-        <p:txBody>
-          <a:bodyPr wrap="square" lIns="0" tIns="0" rIns="0" bIns="0" rtlCol="0" anchor="ctr"/>
-          <a:lstStyle/>
-          <a:p>
-            <a:pPr algn="ctr" indent="0" marL="0">
-              <a:buNone/>
-            </a:pPr>
-            <a:r>
-              <a:rPr lang="en-US" sz="2400" b="1" dirty="0">
-                <a:solidFill>
-                  <a:srgbClr val="635BFF"/>
-                </a:solidFill>
-                <a:latin typeface="Georgia" pitchFamily="34" charset="0"/>
-                <a:ea typeface="Georgia" pitchFamily="34" charset="-122"/>
-                <a:cs typeface="Georgia" pitchFamily="34" charset="-120"/>
-              </a:rPr>
-              <a:t>You started as an Explorer.</a:t>
-            </a:r>
-            <a:endParaRPr lang="en-US" sz="2400" dirty="0"/>
-          </a:p>
-          <a:p>
-            <a:pPr algn="ctr" indent="0" marL="0">
-              <a:buNone/>
-            </a:pPr>
-            <a:r>
-              <a:rPr lang="en-US" sz="2400" b="1" dirty="0">
-                <a:solidFill>
-                  <a:srgbClr val="635BFF"/>
-                </a:solidFill>
-                <a:latin typeface="Georgia" pitchFamily="34" charset="0"/>
-                <a:ea typeface="Georgia" pitchFamily="34" charset="-122"/>
-                <a:cs typeface="Georgia" pitchFamily="34" charset="-120"/>
-              </a:rPr>
-              <a:t>You’re now an Orchestrator.</a:t>
-            </a:r>
-            <a:endParaRPr lang="en-US" sz="2400" dirty="0"/>
+              <a:t>of judgment — the part only humans can do</a:t>
+            </a:r>
+            <a:endParaRPr lang="en-US" sz="2800" dirty="0"/>
           </a:p>
         </p:txBody>
       </p:sp>
@@ -8152,6 +7861,830 @@
       </p:sp>
       <p:sp>
         <p:nvSpPr>
+          <p:cNvPr id="3" name="Shape 1"/>
+          <p:cNvSpPr/>
+          <p:nvPr/>
+        </p:nvSpPr>
+        <p:spPr>
+          <a:xfrm>
+            <a:off x="192024" y="2011680"/>
+            <a:ext cx="1188720" cy="640080"/>
+          </a:xfrm>
+          <a:prstGeom prst="roundRect">
+            <a:avLst>
+              <a:gd name="adj" fmla="val 11429"/>
+            </a:avLst>
+          </a:prstGeom>
+          <a:solidFill>
+            <a:srgbClr val="0A2540">
+              <a:alpha val="50000"/>
+            </a:srgbClr>
+          </a:solidFill>
+          <a:ln w="19050">
+            <a:solidFill>
+              <a:srgbClr val="8B95A5"/>
+            </a:solidFill>
+            <a:prstDash val="solid"/>
+          </a:ln>
+        </p:spPr>
+      </p:sp>
+      <p:sp>
+        <p:nvSpPr>
+          <p:cNvPr id="4" name="Text 2"/>
+          <p:cNvSpPr/>
+          <p:nvPr/>
+        </p:nvSpPr>
+        <p:spPr>
+          <a:xfrm>
+            <a:off x="192024" y="2011680"/>
+            <a:ext cx="1188720" cy="640080"/>
+          </a:xfrm>
+          <a:prstGeom prst="rect">
+            <a:avLst/>
+          </a:prstGeom>
+          <a:noFill/>
+          <a:ln/>
+        </p:spPr>
+        <p:txBody>
+          <a:bodyPr wrap="square" lIns="0" tIns="0" rIns="0" bIns="0" rtlCol="0" anchor="ctr">
+            <a:normAutofit/>
+          </a:bodyPr>
+          <a:lstStyle/>
+          <a:p>
+            <a:pPr algn="ctr" indent="0" marL="0">
+              <a:buNone/>
+            </a:pPr>
+            <a:r>
+              <a:rPr lang="en-US" sz="1100" b="1" dirty="0">
+                <a:solidFill>
+                  <a:srgbClr val="8B95A5"/>
+                </a:solidFill>
+                <a:latin typeface="Verdana" pitchFamily="34" charset="0"/>
+                <a:ea typeface="Verdana" pitchFamily="34" charset="-122"/>
+                <a:cs typeface="Verdana" pitchFamily="34" charset="-120"/>
+              </a:rPr>
+              <a:t>Skeptic</a:t>
+            </a:r>
+            <a:endParaRPr lang="en-US" sz="1100" dirty="0"/>
+          </a:p>
+        </p:txBody>
+      </p:sp>
+      <p:sp>
+        <p:nvSpPr>
+          <p:cNvPr id="5" name="Text 3"/>
+          <p:cNvSpPr/>
+          <p:nvPr/>
+        </p:nvSpPr>
+        <p:spPr>
+          <a:xfrm>
+            <a:off x="1380744" y="2011680"/>
+            <a:ext cx="73152" cy="640080"/>
+          </a:xfrm>
+          <a:prstGeom prst="rect">
+            <a:avLst/>
+          </a:prstGeom>
+          <a:noFill/>
+          <a:ln/>
+        </p:spPr>
+        <p:txBody>
+          <a:bodyPr wrap="square" lIns="0" tIns="0" rIns="0" bIns="0" rtlCol="0" anchor="ctr"/>
+          <a:lstStyle/>
+          <a:p>
+            <a:pPr algn="ctr" indent="0" marL="0">
+              <a:buNone/>
+            </a:pPr>
+            <a:r>
+              <a:rPr lang="en-US" sz="1100" dirty="0">
+                <a:solidFill>
+                  <a:srgbClr val="8B95A5"/>
+                </a:solidFill>
+                <a:latin typeface="Verdana" pitchFamily="34" charset="0"/>
+                <a:ea typeface="Verdana" pitchFamily="34" charset="-122"/>
+                <a:cs typeface="Verdana" pitchFamily="34" charset="-120"/>
+              </a:rPr>
+              <a:t>→</a:t>
+            </a:r>
+            <a:endParaRPr lang="en-US" sz="1100" dirty="0"/>
+          </a:p>
+        </p:txBody>
+      </p:sp>
+      <p:sp>
+        <p:nvSpPr>
+          <p:cNvPr id="6" name="Shape 4"/>
+          <p:cNvSpPr/>
+          <p:nvPr/>
+        </p:nvSpPr>
+        <p:spPr>
+          <a:xfrm>
+            <a:off x="1453896" y="2011680"/>
+            <a:ext cx="1188720" cy="640080"/>
+          </a:xfrm>
+          <a:prstGeom prst="roundRect">
+            <a:avLst>
+              <a:gd name="adj" fmla="val 11429"/>
+            </a:avLst>
+          </a:prstGeom>
+          <a:solidFill>
+            <a:srgbClr val="635BFF"/>
+          </a:solidFill>
+          <a:ln w="19050">
+            <a:solidFill>
+              <a:srgbClr val="635BFF"/>
+            </a:solidFill>
+            <a:prstDash val="solid"/>
+          </a:ln>
+        </p:spPr>
+      </p:sp>
+      <p:sp>
+        <p:nvSpPr>
+          <p:cNvPr id="7" name="Text 5"/>
+          <p:cNvSpPr/>
+          <p:nvPr/>
+        </p:nvSpPr>
+        <p:spPr>
+          <a:xfrm>
+            <a:off x="1453896" y="2011680"/>
+            <a:ext cx="1188720" cy="640080"/>
+          </a:xfrm>
+          <a:prstGeom prst="rect">
+            <a:avLst/>
+          </a:prstGeom>
+          <a:noFill/>
+          <a:ln/>
+        </p:spPr>
+        <p:txBody>
+          <a:bodyPr wrap="square" lIns="0" tIns="0" rIns="0" bIns="0" rtlCol="0" anchor="ctr">
+            <a:normAutofit/>
+          </a:bodyPr>
+          <a:lstStyle/>
+          <a:p>
+            <a:pPr algn="ctr" indent="0" marL="0">
+              <a:buNone/>
+            </a:pPr>
+            <a:r>
+              <a:rPr lang="en-US" sz="1100" b="1" dirty="0">
+                <a:solidFill>
+                  <a:srgbClr val="FFFFFF"/>
+                </a:solidFill>
+                <a:latin typeface="Verdana" pitchFamily="34" charset="0"/>
+                <a:ea typeface="Verdana" pitchFamily="34" charset="-122"/>
+                <a:cs typeface="Verdana" pitchFamily="34" charset="-120"/>
+              </a:rPr>
+              <a:t>Explorer</a:t>
+            </a:r>
+            <a:endParaRPr lang="en-US" sz="1100" dirty="0"/>
+          </a:p>
+        </p:txBody>
+      </p:sp>
+      <p:sp>
+        <p:nvSpPr>
+          <p:cNvPr id="8" name="Text 6"/>
+          <p:cNvSpPr/>
+          <p:nvPr/>
+        </p:nvSpPr>
+        <p:spPr>
+          <a:xfrm>
+            <a:off x="2642616" y="2011680"/>
+            <a:ext cx="73152" cy="640080"/>
+          </a:xfrm>
+          <a:prstGeom prst="rect">
+            <a:avLst/>
+          </a:prstGeom>
+          <a:noFill/>
+          <a:ln/>
+        </p:spPr>
+        <p:txBody>
+          <a:bodyPr wrap="square" lIns="0" tIns="0" rIns="0" bIns="0" rtlCol="0" anchor="ctr"/>
+          <a:lstStyle/>
+          <a:p>
+            <a:pPr algn="ctr" indent="0" marL="0">
+              <a:buNone/>
+            </a:pPr>
+            <a:r>
+              <a:rPr lang="en-US" sz="1100" dirty="0">
+                <a:solidFill>
+                  <a:srgbClr val="8B95A5"/>
+                </a:solidFill>
+                <a:latin typeface="Verdana" pitchFamily="34" charset="0"/>
+                <a:ea typeface="Verdana" pitchFamily="34" charset="-122"/>
+                <a:cs typeface="Verdana" pitchFamily="34" charset="-120"/>
+              </a:rPr>
+              <a:t>→</a:t>
+            </a:r>
+            <a:endParaRPr lang="en-US" sz="1100" dirty="0"/>
+          </a:p>
+        </p:txBody>
+      </p:sp>
+      <p:sp>
+        <p:nvSpPr>
+          <p:cNvPr id="9" name="Shape 7"/>
+          <p:cNvSpPr/>
+          <p:nvPr/>
+        </p:nvSpPr>
+        <p:spPr>
+          <a:xfrm>
+            <a:off x="2715768" y="2011680"/>
+            <a:ext cx="1188720" cy="640080"/>
+          </a:xfrm>
+          <a:prstGeom prst="roundRect">
+            <a:avLst>
+              <a:gd name="adj" fmla="val 11429"/>
+            </a:avLst>
+          </a:prstGeom>
+          <a:solidFill>
+            <a:srgbClr val="635BFF"/>
+          </a:solidFill>
+          <a:ln w="19050">
+            <a:solidFill>
+              <a:srgbClr val="635BFF"/>
+            </a:solidFill>
+            <a:prstDash val="solid"/>
+          </a:ln>
+        </p:spPr>
+      </p:sp>
+      <p:sp>
+        <p:nvSpPr>
+          <p:cNvPr id="10" name="Text 8"/>
+          <p:cNvSpPr/>
+          <p:nvPr/>
+        </p:nvSpPr>
+        <p:spPr>
+          <a:xfrm>
+            <a:off x="2715768" y="2011680"/>
+            <a:ext cx="1188720" cy="640080"/>
+          </a:xfrm>
+          <a:prstGeom prst="rect">
+            <a:avLst/>
+          </a:prstGeom>
+          <a:noFill/>
+          <a:ln/>
+        </p:spPr>
+        <p:txBody>
+          <a:bodyPr wrap="square" lIns="0" tIns="0" rIns="0" bIns="0" rtlCol="0" anchor="ctr">
+            <a:normAutofit/>
+          </a:bodyPr>
+          <a:lstStyle/>
+          <a:p>
+            <a:pPr algn="ctr" indent="0" marL="0">
+              <a:buNone/>
+            </a:pPr>
+            <a:r>
+              <a:rPr lang="en-US" sz="1100" b="1" dirty="0">
+                <a:solidFill>
+                  <a:srgbClr val="FFFFFF"/>
+                </a:solidFill>
+                <a:latin typeface="Verdana" pitchFamily="34" charset="0"/>
+                <a:ea typeface="Verdana" pitchFamily="34" charset="-122"/>
+                <a:cs typeface="Verdana" pitchFamily="34" charset="-120"/>
+              </a:rPr>
+              <a:t>Whisperer</a:t>
+            </a:r>
+            <a:endParaRPr lang="en-US" sz="1100" dirty="0"/>
+          </a:p>
+        </p:txBody>
+      </p:sp>
+      <p:sp>
+        <p:nvSpPr>
+          <p:cNvPr id="11" name="Text 9"/>
+          <p:cNvSpPr/>
+          <p:nvPr/>
+        </p:nvSpPr>
+        <p:spPr>
+          <a:xfrm>
+            <a:off x="3904488" y="2011680"/>
+            <a:ext cx="73152" cy="640080"/>
+          </a:xfrm>
+          <a:prstGeom prst="rect">
+            <a:avLst/>
+          </a:prstGeom>
+          <a:noFill/>
+          <a:ln/>
+        </p:spPr>
+        <p:txBody>
+          <a:bodyPr wrap="square" lIns="0" tIns="0" rIns="0" bIns="0" rtlCol="0" anchor="ctr"/>
+          <a:lstStyle/>
+          <a:p>
+            <a:pPr algn="ctr" indent="0" marL="0">
+              <a:buNone/>
+            </a:pPr>
+            <a:r>
+              <a:rPr lang="en-US" sz="1100" dirty="0">
+                <a:solidFill>
+                  <a:srgbClr val="8B95A5"/>
+                </a:solidFill>
+                <a:latin typeface="Verdana" pitchFamily="34" charset="0"/>
+                <a:ea typeface="Verdana" pitchFamily="34" charset="-122"/>
+                <a:cs typeface="Verdana" pitchFamily="34" charset="-120"/>
+              </a:rPr>
+              <a:t>→</a:t>
+            </a:r>
+            <a:endParaRPr lang="en-US" sz="1100" dirty="0"/>
+          </a:p>
+        </p:txBody>
+      </p:sp>
+      <p:sp>
+        <p:nvSpPr>
+          <p:cNvPr id="12" name="Shape 10"/>
+          <p:cNvSpPr/>
+          <p:nvPr/>
+        </p:nvSpPr>
+        <p:spPr>
+          <a:xfrm>
+            <a:off x="3977640" y="2011680"/>
+            <a:ext cx="1188720" cy="640080"/>
+          </a:xfrm>
+          <a:prstGeom prst="roundRect">
+            <a:avLst>
+              <a:gd name="adj" fmla="val 11429"/>
+            </a:avLst>
+          </a:prstGeom>
+          <a:solidFill>
+            <a:srgbClr val="635BFF"/>
+          </a:solidFill>
+          <a:ln w="19050">
+            <a:solidFill>
+              <a:srgbClr val="635BFF"/>
+            </a:solidFill>
+            <a:prstDash val="solid"/>
+          </a:ln>
+        </p:spPr>
+      </p:sp>
+      <p:sp>
+        <p:nvSpPr>
+          <p:cNvPr id="13" name="Text 11"/>
+          <p:cNvSpPr/>
+          <p:nvPr/>
+        </p:nvSpPr>
+        <p:spPr>
+          <a:xfrm>
+            <a:off x="3977640" y="2011680"/>
+            <a:ext cx="1188720" cy="640080"/>
+          </a:xfrm>
+          <a:prstGeom prst="rect">
+            <a:avLst/>
+          </a:prstGeom>
+          <a:noFill/>
+          <a:ln/>
+        </p:spPr>
+        <p:txBody>
+          <a:bodyPr wrap="square" lIns="0" tIns="0" rIns="0" bIns="0" rtlCol="0" anchor="ctr">
+            <a:normAutofit/>
+          </a:bodyPr>
+          <a:lstStyle/>
+          <a:p>
+            <a:pPr algn="ctr" indent="0" marL="0">
+              <a:buNone/>
+            </a:pPr>
+            <a:r>
+              <a:rPr lang="en-US" sz="1100" b="1" dirty="0">
+                <a:solidFill>
+                  <a:srgbClr val="FFFFFF"/>
+                </a:solidFill>
+                <a:latin typeface="Verdana" pitchFamily="34" charset="0"/>
+                <a:ea typeface="Verdana" pitchFamily="34" charset="-122"/>
+                <a:cs typeface="Verdana" pitchFamily="34" charset="-120"/>
+              </a:rPr>
+              <a:t>Strategist</a:t>
+            </a:r>
+            <a:endParaRPr lang="en-US" sz="1100" dirty="0"/>
+          </a:p>
+        </p:txBody>
+      </p:sp>
+      <p:sp>
+        <p:nvSpPr>
+          <p:cNvPr id="14" name="Text 12"/>
+          <p:cNvSpPr/>
+          <p:nvPr/>
+        </p:nvSpPr>
+        <p:spPr>
+          <a:xfrm>
+            <a:off x="5166360" y="2011680"/>
+            <a:ext cx="73152" cy="640080"/>
+          </a:xfrm>
+          <a:prstGeom prst="rect">
+            <a:avLst/>
+          </a:prstGeom>
+          <a:noFill/>
+          <a:ln/>
+        </p:spPr>
+        <p:txBody>
+          <a:bodyPr wrap="square" lIns="0" tIns="0" rIns="0" bIns="0" rtlCol="0" anchor="ctr"/>
+          <a:lstStyle/>
+          <a:p>
+            <a:pPr algn="ctr" indent="0" marL="0">
+              <a:buNone/>
+            </a:pPr>
+            <a:r>
+              <a:rPr lang="en-US" sz="1100" dirty="0">
+                <a:solidFill>
+                  <a:srgbClr val="8B95A5"/>
+                </a:solidFill>
+                <a:latin typeface="Verdana" pitchFamily="34" charset="0"/>
+                <a:ea typeface="Verdana" pitchFamily="34" charset="-122"/>
+                <a:cs typeface="Verdana" pitchFamily="34" charset="-120"/>
+              </a:rPr>
+              <a:t>→</a:t>
+            </a:r>
+            <a:endParaRPr lang="en-US" sz="1100" dirty="0"/>
+          </a:p>
+        </p:txBody>
+      </p:sp>
+      <p:sp>
+        <p:nvSpPr>
+          <p:cNvPr id="15" name="Shape 13"/>
+          <p:cNvSpPr/>
+          <p:nvPr/>
+        </p:nvSpPr>
+        <p:spPr>
+          <a:xfrm>
+            <a:off x="5239512" y="2011680"/>
+            <a:ext cx="1188720" cy="640080"/>
+          </a:xfrm>
+          <a:prstGeom prst="roundRect">
+            <a:avLst>
+              <a:gd name="adj" fmla="val 11429"/>
+            </a:avLst>
+          </a:prstGeom>
+          <a:solidFill>
+            <a:srgbClr val="635BFF"/>
+          </a:solidFill>
+          <a:ln w="19050">
+            <a:solidFill>
+              <a:srgbClr val="635BFF"/>
+            </a:solidFill>
+            <a:prstDash val="solid"/>
+          </a:ln>
+        </p:spPr>
+      </p:sp>
+      <p:sp>
+        <p:nvSpPr>
+          <p:cNvPr id="16" name="Text 14"/>
+          <p:cNvSpPr/>
+          <p:nvPr/>
+        </p:nvSpPr>
+        <p:spPr>
+          <a:xfrm>
+            <a:off x="5239512" y="2011680"/>
+            <a:ext cx="1188720" cy="640080"/>
+          </a:xfrm>
+          <a:prstGeom prst="rect">
+            <a:avLst/>
+          </a:prstGeom>
+          <a:noFill/>
+          <a:ln/>
+        </p:spPr>
+        <p:txBody>
+          <a:bodyPr wrap="square" lIns="0" tIns="0" rIns="0" bIns="0" rtlCol="0" anchor="ctr">
+            <a:normAutofit/>
+          </a:bodyPr>
+          <a:lstStyle/>
+          <a:p>
+            <a:pPr algn="ctr" indent="0" marL="0">
+              <a:buNone/>
+            </a:pPr>
+            <a:r>
+              <a:rPr lang="en-US" sz="1100" b="1" dirty="0">
+                <a:solidFill>
+                  <a:srgbClr val="FFFFFF"/>
+                </a:solidFill>
+                <a:latin typeface="Verdana" pitchFamily="34" charset="0"/>
+                <a:ea typeface="Verdana" pitchFamily="34" charset="-122"/>
+                <a:cs typeface="Verdana" pitchFamily="34" charset="-120"/>
+              </a:rPr>
+              <a:t>Operator</a:t>
+            </a:r>
+            <a:endParaRPr lang="en-US" sz="1100" dirty="0"/>
+          </a:p>
+        </p:txBody>
+      </p:sp>
+      <p:sp>
+        <p:nvSpPr>
+          <p:cNvPr id="17" name="Text 15"/>
+          <p:cNvSpPr/>
+          <p:nvPr/>
+        </p:nvSpPr>
+        <p:spPr>
+          <a:xfrm>
+            <a:off x="6428232" y="2011680"/>
+            <a:ext cx="73152" cy="640080"/>
+          </a:xfrm>
+          <a:prstGeom prst="rect">
+            <a:avLst/>
+          </a:prstGeom>
+          <a:noFill/>
+          <a:ln/>
+        </p:spPr>
+        <p:txBody>
+          <a:bodyPr wrap="square" lIns="0" tIns="0" rIns="0" bIns="0" rtlCol="0" anchor="ctr"/>
+          <a:lstStyle/>
+          <a:p>
+            <a:pPr algn="ctr" indent="0" marL="0">
+              <a:buNone/>
+            </a:pPr>
+            <a:r>
+              <a:rPr lang="en-US" sz="1100" dirty="0">
+                <a:solidFill>
+                  <a:srgbClr val="8B95A5"/>
+                </a:solidFill>
+                <a:latin typeface="Verdana" pitchFamily="34" charset="0"/>
+                <a:ea typeface="Verdana" pitchFamily="34" charset="-122"/>
+                <a:cs typeface="Verdana" pitchFamily="34" charset="-120"/>
+              </a:rPr>
+              <a:t>→</a:t>
+            </a:r>
+            <a:endParaRPr lang="en-US" sz="1100" dirty="0"/>
+          </a:p>
+        </p:txBody>
+      </p:sp>
+      <p:sp>
+        <p:nvSpPr>
+          <p:cNvPr id="18" name="Shape 16"/>
+          <p:cNvSpPr/>
+          <p:nvPr/>
+        </p:nvSpPr>
+        <p:spPr>
+          <a:xfrm>
+            <a:off x="6501384" y="2011680"/>
+            <a:ext cx="1188720" cy="640080"/>
+          </a:xfrm>
+          <a:prstGeom prst="roundRect">
+            <a:avLst>
+              <a:gd name="adj" fmla="val 11429"/>
+            </a:avLst>
+          </a:prstGeom>
+          <a:solidFill>
+            <a:srgbClr val="635BFF"/>
+          </a:solidFill>
+          <a:ln w="19050">
+            <a:solidFill>
+              <a:srgbClr val="635BFF"/>
+            </a:solidFill>
+            <a:prstDash val="solid"/>
+          </a:ln>
+        </p:spPr>
+      </p:sp>
+      <p:sp>
+        <p:nvSpPr>
+          <p:cNvPr id="19" name="Text 17"/>
+          <p:cNvSpPr/>
+          <p:nvPr/>
+        </p:nvSpPr>
+        <p:spPr>
+          <a:xfrm>
+            <a:off x="6501384" y="2011680"/>
+            <a:ext cx="1188720" cy="640080"/>
+          </a:xfrm>
+          <a:prstGeom prst="rect">
+            <a:avLst/>
+          </a:prstGeom>
+          <a:noFill/>
+          <a:ln/>
+        </p:spPr>
+        <p:txBody>
+          <a:bodyPr wrap="square" lIns="0" tIns="0" rIns="0" bIns="0" rtlCol="0" anchor="ctr">
+            <a:normAutofit/>
+          </a:bodyPr>
+          <a:lstStyle/>
+          <a:p>
+            <a:pPr algn="ctr" indent="0" marL="0">
+              <a:buNone/>
+            </a:pPr>
+            <a:r>
+              <a:rPr lang="en-US" sz="1100" b="1" dirty="0">
+                <a:solidFill>
+                  <a:srgbClr val="FFFFFF"/>
+                </a:solidFill>
+                <a:latin typeface="Verdana" pitchFamily="34" charset="0"/>
+                <a:ea typeface="Verdana" pitchFamily="34" charset="-122"/>
+                <a:cs typeface="Verdana" pitchFamily="34" charset="-120"/>
+              </a:rPr>
+              <a:t>Orchestrator</a:t>
+            </a:r>
+            <a:endParaRPr lang="en-US" sz="1100" dirty="0"/>
+          </a:p>
+        </p:txBody>
+      </p:sp>
+      <p:sp>
+        <p:nvSpPr>
+          <p:cNvPr id="20" name="Text 18"/>
+          <p:cNvSpPr/>
+          <p:nvPr/>
+        </p:nvSpPr>
+        <p:spPr>
+          <a:xfrm>
+            <a:off x="7690104" y="2011680"/>
+            <a:ext cx="73152" cy="640080"/>
+          </a:xfrm>
+          <a:prstGeom prst="rect">
+            <a:avLst/>
+          </a:prstGeom>
+          <a:noFill/>
+          <a:ln/>
+        </p:spPr>
+        <p:txBody>
+          <a:bodyPr wrap="square" lIns="0" tIns="0" rIns="0" bIns="0" rtlCol="0" anchor="ctr"/>
+          <a:lstStyle/>
+          <a:p>
+            <a:pPr algn="ctr" indent="0" marL="0">
+              <a:buNone/>
+            </a:pPr>
+            <a:r>
+              <a:rPr lang="en-US" sz="1100" dirty="0">
+                <a:solidFill>
+                  <a:srgbClr val="8B95A5"/>
+                </a:solidFill>
+                <a:latin typeface="Verdana" pitchFamily="34" charset="0"/>
+                <a:ea typeface="Verdana" pitchFamily="34" charset="-122"/>
+                <a:cs typeface="Verdana" pitchFamily="34" charset="-120"/>
+              </a:rPr>
+              <a:t>→</a:t>
+            </a:r>
+            <a:endParaRPr lang="en-US" sz="1100" dirty="0"/>
+          </a:p>
+        </p:txBody>
+      </p:sp>
+      <p:sp>
+        <p:nvSpPr>
+          <p:cNvPr id="21" name="Shape 19"/>
+          <p:cNvSpPr/>
+          <p:nvPr/>
+        </p:nvSpPr>
+        <p:spPr>
+          <a:xfrm>
+            <a:off x="7763256" y="2011680"/>
+            <a:ext cx="1188720" cy="640080"/>
+          </a:xfrm>
+          <a:prstGeom prst="roundRect">
+            <a:avLst>
+              <a:gd name="adj" fmla="val 11429"/>
+            </a:avLst>
+          </a:prstGeom>
+          <a:solidFill>
+            <a:srgbClr val="0A2540">
+              <a:alpha val="50000"/>
+            </a:srgbClr>
+          </a:solidFill>
+          <a:ln w="19050">
+            <a:solidFill>
+              <a:srgbClr val="8B95A5"/>
+            </a:solidFill>
+            <a:prstDash val="dash"/>
+          </a:ln>
+        </p:spPr>
+      </p:sp>
+      <p:sp>
+        <p:nvSpPr>
+          <p:cNvPr id="22" name="Text 20"/>
+          <p:cNvSpPr/>
+          <p:nvPr/>
+        </p:nvSpPr>
+        <p:spPr>
+          <a:xfrm>
+            <a:off x="7763256" y="2011680"/>
+            <a:ext cx="1188720" cy="640080"/>
+          </a:xfrm>
+          <a:prstGeom prst="rect">
+            <a:avLst/>
+          </a:prstGeom>
+          <a:noFill/>
+          <a:ln/>
+        </p:spPr>
+        <p:txBody>
+          <a:bodyPr wrap="square" lIns="0" tIns="0" rIns="0" bIns="0" rtlCol="0" anchor="ctr">
+            <a:normAutofit/>
+          </a:bodyPr>
+          <a:lstStyle/>
+          <a:p>
+            <a:pPr algn="ctr" indent="0" marL="0">
+              <a:buNone/>
+            </a:pPr>
+            <a:r>
+              <a:rPr lang="en-US" sz="1100" b="1" dirty="0">
+                <a:solidFill>
+                  <a:srgbClr val="8B95A5"/>
+                </a:solidFill>
+                <a:latin typeface="Verdana" pitchFamily="34" charset="0"/>
+                <a:ea typeface="Verdana" pitchFamily="34" charset="-122"/>
+                <a:cs typeface="Verdana" pitchFamily="34" charset="-120"/>
+              </a:rPr>
+              <a:t>Builder</a:t>
+            </a:r>
+            <a:endParaRPr lang="en-US" sz="1100" dirty="0"/>
+          </a:p>
+        </p:txBody>
+      </p:sp>
+      <p:sp>
+        <p:nvSpPr>
+          <p:cNvPr id="23" name="Text 21"/>
+          <p:cNvSpPr/>
+          <p:nvPr/>
+        </p:nvSpPr>
+        <p:spPr>
+          <a:xfrm>
+            <a:off x="914400" y="3108960"/>
+            <a:ext cx="7315200" cy="914400"/>
+          </a:xfrm>
+          <a:prstGeom prst="rect">
+            <a:avLst/>
+          </a:prstGeom>
+          <a:noFill/>
+          <a:ln/>
+        </p:spPr>
+        <p:txBody>
+          <a:bodyPr wrap="square" lIns="0" tIns="0" rIns="0" bIns="0" rtlCol="0" anchor="ctr"/>
+          <a:lstStyle/>
+          <a:p>
+            <a:pPr algn="ctr" indent="0" marL="0">
+              <a:buNone/>
+            </a:pPr>
+            <a:r>
+              <a:rPr lang="en-US" sz="2400" b="1" dirty="0">
+                <a:solidFill>
+                  <a:srgbClr val="635BFF"/>
+                </a:solidFill>
+                <a:latin typeface="Georgia" pitchFamily="34" charset="0"/>
+                <a:ea typeface="Georgia" pitchFamily="34" charset="-122"/>
+                <a:cs typeface="Georgia" pitchFamily="34" charset="-120"/>
+              </a:rPr>
+              <a:t>You started as an Explorer.</a:t>
+            </a:r>
+            <a:endParaRPr lang="en-US" sz="2400" dirty="0"/>
+          </a:p>
+          <a:p>
+            <a:pPr algn="ctr" indent="0" marL="0">
+              <a:buNone/>
+            </a:pPr>
+            <a:r>
+              <a:rPr lang="en-US" sz="2400" b="1" dirty="0">
+                <a:solidFill>
+                  <a:srgbClr val="635BFF"/>
+                </a:solidFill>
+                <a:latin typeface="Georgia" pitchFamily="34" charset="0"/>
+                <a:ea typeface="Georgia" pitchFamily="34" charset="-122"/>
+                <a:cs typeface="Georgia" pitchFamily="34" charset="-120"/>
+              </a:rPr>
+              <a:t>You’re now an Orchestrator.</a:t>
+            </a:r>
+            <a:endParaRPr lang="en-US" sz="2400" dirty="0"/>
+          </a:p>
+        </p:txBody>
+      </p:sp>
+    </p:spTree>
+  </p:cSld>
+  <p:clrMapOvr>
+    <a:masterClrMapping/>
+  </p:clrMapOvr>
+</p:sld>
+</file>
+
+<file path=ppt/slides/slide28.xml><?xml version="1.0" encoding="utf-8"?>
+<p:sld xmlns:a="http://schemas.openxmlformats.org/drawingml/2006/main" xmlns:r="http://schemas.openxmlformats.org/officeDocument/2006/relationships" xmlns:p="http://schemas.openxmlformats.org/presentationml/2006/main">
+  <p:cSld name="Slide 28">
+    <p:bg>
+      <p:bgPr>
+        <a:solidFill>
+          <a:srgbClr val="0A2540"/>
+        </a:solidFill>
+      </p:bgPr>
+    </p:bg>
+    <p:spTree>
+      <p:nvGrpSpPr>
+        <p:cNvPr id="1" name=""/>
+        <p:cNvGrpSpPr/>
+        <p:nvPr/>
+      </p:nvGrpSpPr>
+      <p:grpSpPr>
+        <a:xfrm>
+          <a:off x="0" y="0"/>
+          <a:ext cx="0" cy="0"/>
+          <a:chOff x="0" y="0"/>
+          <a:chExt cx="0" cy="0"/>
+        </a:xfrm>
+      </p:grpSpPr>
+      <p:sp>
+        <p:nvSpPr>
+          <p:cNvPr id="2" name="Shape 0"/>
+          <p:cNvSpPr/>
+          <p:nvPr/>
+        </p:nvSpPr>
+        <p:spPr>
+          <a:xfrm>
+            <a:off x="4572000" y="2286000"/>
+            <a:ext cx="7315200" cy="5486400"/>
+          </a:xfrm>
+          <a:prstGeom prst="ellipse">
+            <a:avLst/>
+          </a:prstGeom>
+          <a:solidFill>
+            <a:srgbClr val="635BFF">
+              <a:alpha val="4000"/>
+            </a:srgbClr>
+          </a:solidFill>
+          <a:ln/>
+        </p:spPr>
+      </p:sp>
+      <p:sp>
+        <p:nvSpPr>
           <p:cNvPr id="3" name="Text 1"/>
           <p:cNvSpPr/>
           <p:nvPr/>
@@ -9305,354 +9838,381 @@
           <a:ln/>
         </p:spPr>
       </p:sp>
-      <p:sp>
-        <p:nvSpPr>
-          <p:cNvPr id="3" name="Text 1"/>
-          <p:cNvSpPr/>
-          <p:nvPr/>
-        </p:nvSpPr>
-        <p:spPr>
-          <a:xfrm>
-            <a:off x="731520" y="457200"/>
-            <a:ext cx="7680960" cy="914400"/>
-          </a:xfrm>
-          <a:prstGeom prst="rect">
-            <a:avLst/>
-          </a:prstGeom>
-          <a:noFill/>
-          <a:ln/>
-        </p:spPr>
-        <p:txBody>
-          <a:bodyPr wrap="square" lIns="0" tIns="0" rIns="0" bIns="0" rtlCol="0" anchor="ctr"/>
-          <a:lstStyle/>
-          <a:p>
-            <a:pPr algn="ctr" indent="0" marL="0">
-              <a:buNone/>
-            </a:pPr>
-            <a:r>
-              <a:rPr lang="en-US" sz="3600" b="1" dirty="0">
-                <a:solidFill>
-                  <a:srgbClr val="FFFFFF"/>
-                </a:solidFill>
-                <a:latin typeface="Georgia" pitchFamily="34" charset="0"/>
-                <a:ea typeface="Georgia" pitchFamily="34" charset="-122"/>
-                <a:cs typeface="Georgia" pitchFamily="34" charset="-120"/>
-              </a:rPr>
-              <a:t>Connect Gmail to Claude</a:t>
-            </a:r>
-            <a:endParaRPr lang="en-US" sz="3600" dirty="0"/>
-          </a:p>
-        </p:txBody>
-      </p:sp>
-      <p:sp>
-        <p:nvSpPr>
-          <p:cNvPr id="4" name="Text 2"/>
-          <p:cNvSpPr/>
-          <p:nvPr/>
-        </p:nvSpPr>
-        <p:spPr>
-          <a:xfrm>
-            <a:off x="1828800" y="1645920"/>
-            <a:ext cx="548640" cy="457200"/>
-          </a:xfrm>
-          <a:prstGeom prst="rect">
-            <a:avLst/>
-          </a:prstGeom>
-          <a:noFill/>
-          <a:ln/>
-        </p:spPr>
-        <p:txBody>
-          <a:bodyPr wrap="square" lIns="0" tIns="0" rIns="0" bIns="0" rtlCol="0" anchor="ctr"/>
-          <a:lstStyle/>
-          <a:p>
-            <a:pPr algn="ctr" indent="0" marL="0">
-              <a:buNone/>
-            </a:pPr>
-            <a:r>
-              <a:rPr lang="en-US" sz="2400" b="1" dirty="0">
-                <a:solidFill>
-                  <a:srgbClr val="635BFF"/>
-                </a:solidFill>
-                <a:latin typeface="Georgia" pitchFamily="34" charset="0"/>
-                <a:ea typeface="Georgia" pitchFamily="34" charset="-122"/>
-                <a:cs typeface="Georgia" pitchFamily="34" charset="-120"/>
-              </a:rPr>
-              <a:t>1</a:t>
-            </a:r>
-            <a:endParaRPr lang="en-US" sz="2400" dirty="0"/>
-          </a:p>
-        </p:txBody>
-      </p:sp>
-      <p:sp>
-        <p:nvSpPr>
-          <p:cNvPr id="5" name="Text 3"/>
-          <p:cNvSpPr/>
-          <p:nvPr/>
-        </p:nvSpPr>
-        <p:spPr>
-          <a:xfrm>
-            <a:off x="2560320" y="1645920"/>
-            <a:ext cx="4572000" cy="457200"/>
-          </a:xfrm>
-          <a:prstGeom prst="rect">
-            <a:avLst/>
-          </a:prstGeom>
-          <a:noFill/>
-          <a:ln/>
-        </p:spPr>
-        <p:txBody>
-          <a:bodyPr wrap="square" lIns="0" tIns="0" rIns="0" bIns="0" rtlCol="0" anchor="ctr"/>
-          <a:lstStyle/>
-          <a:p>
-            <a:pPr algn="l" indent="0" marL="0">
-              <a:buNone/>
-            </a:pPr>
-            <a:r>
-              <a:rPr lang="en-US" sz="2200" dirty="0">
-                <a:solidFill>
-                  <a:srgbClr val="EDEDED"/>
+      <p:pic>
+        <p:nvPicPr>
+          <p:cNvPr id="3" name="Image 0" descr="/Users/michaelengland/Developer/michaelengland/ai-best-practices/decks/ai-best-practices/icons/globeW.png">    </p:cNvPr>
+          <p:cNvPicPr>
+            <a:picLocks noChangeAspect="1"/>
+          </p:cNvPicPr>
+          <p:nvPr/>
+        </p:nvPicPr>
+        <p:blipFill>
+          <a:blip r:embed="rId1"/>
+          <a:stretch>
+            <a:fillRect/>
+          </a:stretch>
+        </p:blipFill>
+        <p:spPr>
+          <a:xfrm>
+            <a:off x="1005840" y="1645920"/>
+            <a:ext cx="731520" cy="731520"/>
+          </a:xfrm>
+          <a:prstGeom prst="rect">
+            <a:avLst/>
+          </a:prstGeom>
+        </p:spPr>
+      </p:pic>
+      <p:sp>
+        <p:nvSpPr>
+          <p:cNvPr id="4" name="Text 1"/>
+          <p:cNvSpPr/>
+          <p:nvPr/>
+        </p:nvSpPr>
+        <p:spPr>
+          <a:xfrm>
+            <a:off x="731520" y="2560320"/>
+            <a:ext cx="1280160" cy="548640"/>
+          </a:xfrm>
+          <a:prstGeom prst="rect">
+            <a:avLst/>
+          </a:prstGeom>
+          <a:noFill/>
+          <a:ln/>
+        </p:spPr>
+        <p:txBody>
+          <a:bodyPr wrap="square" lIns="0" tIns="0" rIns="0" bIns="0" rtlCol="0" anchor="t"/>
+          <a:lstStyle/>
+          <a:p>
+            <a:pPr algn="ctr" indent="0" marL="0">
+              <a:buNone/>
+            </a:pPr>
+            <a:r>
+              <a:rPr lang="en-US" sz="2000" dirty="0">
+                <a:solidFill>
+                  <a:srgbClr val="8B95A5"/>
                 </a:solidFill>
                 <a:latin typeface="Verdana" pitchFamily="34" charset="0"/>
                 <a:ea typeface="Verdana" pitchFamily="34" charset="-122"/>
                 <a:cs typeface="Verdana" pitchFamily="34" charset="-120"/>
               </a:rPr>
-              <a:t>Click  +  in the chat input</a:t>
-            </a:r>
-            <a:endParaRPr lang="en-US" sz="2200" dirty="0"/>
-          </a:p>
-        </p:txBody>
-      </p:sp>
-      <p:sp>
-        <p:nvSpPr>
-          <p:cNvPr id="6" name="Text 4"/>
-          <p:cNvSpPr/>
-          <p:nvPr/>
-        </p:nvSpPr>
-        <p:spPr>
-          <a:xfrm>
-            <a:off x="1828800" y="2286000"/>
-            <a:ext cx="548640" cy="457200"/>
-          </a:xfrm>
-          <a:prstGeom prst="rect">
-            <a:avLst/>
-          </a:prstGeom>
-          <a:noFill/>
-          <a:ln/>
-        </p:spPr>
-        <p:txBody>
-          <a:bodyPr wrap="square" lIns="0" tIns="0" rIns="0" bIns="0" rtlCol="0" anchor="ctr"/>
-          <a:lstStyle/>
-          <a:p>
-            <a:pPr algn="ctr" indent="0" marL="0">
-              <a:buNone/>
-            </a:pPr>
-            <a:r>
-              <a:rPr lang="en-US" sz="2400" b="1" dirty="0">
-                <a:solidFill>
-                  <a:srgbClr val="635BFF"/>
-                </a:solidFill>
-                <a:latin typeface="Georgia" pitchFamily="34" charset="0"/>
-                <a:ea typeface="Georgia" pitchFamily="34" charset="-122"/>
-                <a:cs typeface="Georgia" pitchFamily="34" charset="-120"/>
-              </a:rPr>
-              <a:t>2</a:t>
-            </a:r>
-            <a:endParaRPr lang="en-US" sz="2400" dirty="0"/>
-          </a:p>
-        </p:txBody>
-      </p:sp>
-      <p:sp>
-        <p:nvSpPr>
-          <p:cNvPr id="7" name="Text 5"/>
-          <p:cNvSpPr/>
-          <p:nvPr/>
-        </p:nvSpPr>
-        <p:spPr>
-          <a:xfrm>
-            <a:off x="2560320" y="2286000"/>
-            <a:ext cx="4572000" cy="457200"/>
-          </a:xfrm>
-          <a:prstGeom prst="rect">
-            <a:avLst/>
-          </a:prstGeom>
-          <a:noFill/>
-          <a:ln/>
-        </p:spPr>
-        <p:txBody>
-          <a:bodyPr wrap="square" lIns="0" tIns="0" rIns="0" bIns="0" rtlCol="0" anchor="ctr"/>
-          <a:lstStyle/>
-          <a:p>
-            <a:pPr algn="l" indent="0" marL="0">
-              <a:buNone/>
-            </a:pPr>
-            <a:r>
-              <a:rPr lang="en-US" sz="2200" dirty="0">
-                <a:solidFill>
-                  <a:srgbClr val="EDEDED"/>
+              <a:t>Web</a:t>
+            </a:r>
+            <a:endParaRPr lang="en-US" sz="2000" dirty="0"/>
+          </a:p>
+        </p:txBody>
+      </p:sp>
+      <p:pic>
+        <p:nvPicPr>
+          <p:cNvPr id="5" name="Image 1" descr="/Users/michaelengland/Developer/michaelengland/ai-best-practices/decks/ai-best-practices/icons/envelopeW.png">    </p:cNvPr>
+          <p:cNvPicPr>
+            <a:picLocks noChangeAspect="1"/>
+          </p:cNvPicPr>
+          <p:nvPr/>
+        </p:nvPicPr>
+        <p:blipFill>
+          <a:blip r:embed="rId2"/>
+          <a:stretch>
+            <a:fillRect/>
+          </a:stretch>
+        </p:blipFill>
+        <p:spPr>
+          <a:xfrm>
+            <a:off x="2286000" y="1645920"/>
+            <a:ext cx="731520" cy="731520"/>
+          </a:xfrm>
+          <a:prstGeom prst="rect">
+            <a:avLst/>
+          </a:prstGeom>
+        </p:spPr>
+      </p:pic>
+      <p:sp>
+        <p:nvSpPr>
+          <p:cNvPr id="6" name="Text 2"/>
+          <p:cNvSpPr/>
+          <p:nvPr/>
+        </p:nvSpPr>
+        <p:spPr>
+          <a:xfrm>
+            <a:off x="2011680" y="2560320"/>
+            <a:ext cx="1280160" cy="548640"/>
+          </a:xfrm>
+          <a:prstGeom prst="rect">
+            <a:avLst/>
+          </a:prstGeom>
+          <a:noFill/>
+          <a:ln/>
+        </p:spPr>
+        <p:txBody>
+          <a:bodyPr wrap="square" lIns="0" tIns="0" rIns="0" bIns="0" rtlCol="0" anchor="t"/>
+          <a:lstStyle/>
+          <a:p>
+            <a:pPr algn="ctr" indent="0" marL="0">
+              <a:buNone/>
+            </a:pPr>
+            <a:r>
+              <a:rPr lang="en-US" sz="2000" dirty="0">
+                <a:solidFill>
+                  <a:srgbClr val="8B95A5"/>
                 </a:solidFill>
                 <a:latin typeface="Verdana" pitchFamily="34" charset="0"/>
                 <a:ea typeface="Verdana" pitchFamily="34" charset="-122"/>
                 <a:cs typeface="Verdana" pitchFamily="34" charset="-120"/>
               </a:rPr>
-              <a:t>Hover Connectors</a:t>
-            </a:r>
-            <a:endParaRPr lang="en-US" sz="2200" dirty="0"/>
-          </a:p>
-        </p:txBody>
-      </p:sp>
-      <p:sp>
-        <p:nvSpPr>
-          <p:cNvPr id="8" name="Text 6"/>
-          <p:cNvSpPr/>
-          <p:nvPr/>
-        </p:nvSpPr>
-        <p:spPr>
-          <a:xfrm>
-            <a:off x="1828800" y="2926080"/>
-            <a:ext cx="548640" cy="457200"/>
-          </a:xfrm>
-          <a:prstGeom prst="rect">
-            <a:avLst/>
-          </a:prstGeom>
-          <a:noFill/>
-          <a:ln/>
-        </p:spPr>
-        <p:txBody>
-          <a:bodyPr wrap="square" lIns="0" tIns="0" rIns="0" bIns="0" rtlCol="0" anchor="ctr"/>
-          <a:lstStyle/>
-          <a:p>
-            <a:pPr algn="ctr" indent="0" marL="0">
-              <a:buNone/>
-            </a:pPr>
-            <a:r>
-              <a:rPr lang="en-US" sz="2400" b="1" dirty="0">
-                <a:solidFill>
-                  <a:srgbClr val="635BFF"/>
-                </a:solidFill>
-                <a:latin typeface="Georgia" pitchFamily="34" charset="0"/>
-                <a:ea typeface="Georgia" pitchFamily="34" charset="-122"/>
-                <a:cs typeface="Georgia" pitchFamily="34" charset="-120"/>
-              </a:rPr>
-              <a:t>3</a:t>
-            </a:r>
-            <a:endParaRPr lang="en-US" sz="2400" dirty="0"/>
-          </a:p>
-        </p:txBody>
-      </p:sp>
-      <p:sp>
-        <p:nvSpPr>
-          <p:cNvPr id="9" name="Text 7"/>
-          <p:cNvSpPr/>
-          <p:nvPr/>
-        </p:nvSpPr>
-        <p:spPr>
-          <a:xfrm>
-            <a:off x="2560320" y="2926080"/>
-            <a:ext cx="4572000" cy="457200"/>
-          </a:xfrm>
-          <a:prstGeom prst="rect">
-            <a:avLst/>
-          </a:prstGeom>
-          <a:noFill/>
-          <a:ln/>
-        </p:spPr>
-        <p:txBody>
-          <a:bodyPr wrap="square" lIns="0" tIns="0" rIns="0" bIns="0" rtlCol="0" anchor="ctr"/>
-          <a:lstStyle/>
-          <a:p>
-            <a:pPr algn="l" indent="0" marL="0">
-              <a:buNone/>
-            </a:pPr>
-            <a:r>
-              <a:rPr lang="en-US" sz="2200" dirty="0">
-                <a:solidFill>
-                  <a:srgbClr val="EDEDED"/>
+              <a:t>Email</a:t>
+            </a:r>
+            <a:endParaRPr lang="en-US" sz="2000" dirty="0"/>
+          </a:p>
+        </p:txBody>
+      </p:sp>
+      <p:pic>
+        <p:nvPicPr>
+          <p:cNvPr id="7" name="Image 2" descr="/Users/michaelengland/Developer/michaelengland/ai-best-practices/decks/ai-best-practices/icons/puzzleW.png">    </p:cNvPr>
+          <p:cNvPicPr>
+            <a:picLocks noChangeAspect="1"/>
+          </p:cNvPicPr>
+          <p:nvPr/>
+        </p:nvPicPr>
+        <p:blipFill>
+          <a:blip r:embed="rId3"/>
+          <a:stretch>
+            <a:fillRect/>
+          </a:stretch>
+        </p:blipFill>
+        <p:spPr>
+          <a:xfrm>
+            <a:off x="3566160" y="1645920"/>
+            <a:ext cx="731520" cy="731520"/>
+          </a:xfrm>
+          <a:prstGeom prst="rect">
+            <a:avLst/>
+          </a:prstGeom>
+        </p:spPr>
+      </p:pic>
+      <p:sp>
+        <p:nvSpPr>
+          <p:cNvPr id="8" name="Text 3"/>
+          <p:cNvSpPr/>
+          <p:nvPr/>
+        </p:nvSpPr>
+        <p:spPr>
+          <a:xfrm>
+            <a:off x="3291840" y="2560320"/>
+            <a:ext cx="1280160" cy="548640"/>
+          </a:xfrm>
+          <a:prstGeom prst="rect">
+            <a:avLst/>
+          </a:prstGeom>
+          <a:noFill/>
+          <a:ln/>
+        </p:spPr>
+        <p:txBody>
+          <a:bodyPr wrap="square" lIns="0" tIns="0" rIns="0" bIns="0" rtlCol="0" anchor="t"/>
+          <a:lstStyle/>
+          <a:p>
+            <a:pPr algn="ctr" indent="0" marL="0">
+              <a:buNone/>
+            </a:pPr>
+            <a:r>
+              <a:rPr lang="en-US" sz="2000" dirty="0">
+                <a:solidFill>
+                  <a:srgbClr val="8B95A5"/>
                 </a:solidFill>
                 <a:latin typeface="Verdana" pitchFamily="34" charset="0"/>
                 <a:ea typeface="Verdana" pitchFamily="34" charset="-122"/>
                 <a:cs typeface="Verdana" pitchFamily="34" charset="-120"/>
               </a:rPr>
-              <a:t>Toggle Gmail on</a:t>
-            </a:r>
-            <a:endParaRPr lang="en-US" sz="2200" dirty="0"/>
-          </a:p>
-        </p:txBody>
-      </p:sp>
-      <p:sp>
-        <p:nvSpPr>
-          <p:cNvPr id="10" name="Text 8"/>
-          <p:cNvSpPr/>
-          <p:nvPr/>
-        </p:nvSpPr>
-        <p:spPr>
-          <a:xfrm>
-            <a:off x="1828800" y="3566160"/>
-            <a:ext cx="548640" cy="457200"/>
-          </a:xfrm>
-          <a:prstGeom prst="rect">
-            <a:avLst/>
-          </a:prstGeom>
-          <a:noFill/>
-          <a:ln/>
-        </p:spPr>
-        <p:txBody>
-          <a:bodyPr wrap="square" lIns="0" tIns="0" rIns="0" bIns="0" rtlCol="0" anchor="ctr"/>
-          <a:lstStyle/>
-          <a:p>
-            <a:pPr algn="ctr" indent="0" marL="0">
-              <a:buNone/>
-            </a:pPr>
-            <a:r>
-              <a:rPr lang="en-US" sz="2400" b="1" dirty="0">
-                <a:solidFill>
-                  <a:srgbClr val="635BFF"/>
-                </a:solidFill>
-                <a:latin typeface="Georgia" pitchFamily="34" charset="0"/>
-                <a:ea typeface="Georgia" pitchFamily="34" charset="-122"/>
-                <a:cs typeface="Georgia" pitchFamily="34" charset="-120"/>
-              </a:rPr>
-              <a:t>4</a:t>
-            </a:r>
-            <a:endParaRPr lang="en-US" sz="2400" dirty="0"/>
-          </a:p>
-        </p:txBody>
-      </p:sp>
-      <p:sp>
-        <p:nvSpPr>
-          <p:cNvPr id="11" name="Text 9"/>
-          <p:cNvSpPr/>
-          <p:nvPr/>
-        </p:nvSpPr>
-        <p:spPr>
-          <a:xfrm>
-            <a:off x="2560320" y="3566160"/>
-            <a:ext cx="4572000" cy="457200"/>
-          </a:xfrm>
-          <a:prstGeom prst="rect">
-            <a:avLst/>
-          </a:prstGeom>
-          <a:noFill/>
-          <a:ln/>
-        </p:spPr>
-        <p:txBody>
-          <a:bodyPr wrap="square" lIns="0" tIns="0" rIns="0" bIns="0" rtlCol="0" anchor="ctr"/>
-          <a:lstStyle/>
-          <a:p>
-            <a:pPr algn="l" indent="0" marL="0">
-              <a:buNone/>
-            </a:pPr>
-            <a:r>
-              <a:rPr lang="en-US" sz="2200" dirty="0">
-                <a:solidFill>
-                  <a:srgbClr val="EDEDED"/>
+              <a:t>Docs</a:t>
+            </a:r>
+            <a:endParaRPr lang="en-US" sz="2000" dirty="0"/>
+          </a:p>
+        </p:txBody>
+      </p:sp>
+      <p:pic>
+        <p:nvPicPr>
+          <p:cNvPr id="9" name="Image 3" descr="/Users/michaelengland/Developer/michaelengland/ai-best-practices/decks/ai-best-practices/icons/databaseW.png">    </p:cNvPr>
+          <p:cNvPicPr>
+            <a:picLocks noChangeAspect="1"/>
+          </p:cNvPicPr>
+          <p:nvPr/>
+        </p:nvPicPr>
+        <p:blipFill>
+          <a:blip r:embed="rId4"/>
+          <a:stretch>
+            <a:fillRect/>
+          </a:stretch>
+        </p:blipFill>
+        <p:spPr>
+          <a:xfrm>
+            <a:off x="4846320" y="1645920"/>
+            <a:ext cx="731520" cy="731520"/>
+          </a:xfrm>
+          <a:prstGeom prst="rect">
+            <a:avLst/>
+          </a:prstGeom>
+        </p:spPr>
+      </p:pic>
+      <p:sp>
+        <p:nvSpPr>
+          <p:cNvPr id="10" name="Text 4"/>
+          <p:cNvSpPr/>
+          <p:nvPr/>
+        </p:nvSpPr>
+        <p:spPr>
+          <a:xfrm>
+            <a:off x="4572000" y="2560320"/>
+            <a:ext cx="1280160" cy="548640"/>
+          </a:xfrm>
+          <a:prstGeom prst="rect">
+            <a:avLst/>
+          </a:prstGeom>
+          <a:noFill/>
+          <a:ln/>
+        </p:spPr>
+        <p:txBody>
+          <a:bodyPr wrap="square" lIns="0" tIns="0" rIns="0" bIns="0" rtlCol="0" anchor="t"/>
+          <a:lstStyle/>
+          <a:p>
+            <a:pPr algn="ctr" indent="0" marL="0">
+              <a:buNone/>
+            </a:pPr>
+            <a:r>
+              <a:rPr lang="en-US" sz="2000" dirty="0">
+                <a:solidFill>
+                  <a:srgbClr val="8B95A5"/>
                 </a:solidFill>
                 <a:latin typeface="Verdana" pitchFamily="34" charset="0"/>
                 <a:ea typeface="Verdana" pitchFamily="34" charset="-122"/>
                 <a:cs typeface="Verdana" pitchFamily="34" charset="-120"/>
               </a:rPr>
-              <a:t>Authenticate with Google</a:t>
-            </a:r>
-            <a:endParaRPr lang="en-US" sz="2200" dirty="0"/>
+              <a:t>Data</a:t>
+            </a:r>
+            <a:endParaRPr lang="en-US" sz="2000" dirty="0"/>
+          </a:p>
+        </p:txBody>
+      </p:sp>
+      <p:pic>
+        <p:nvPicPr>
+          <p:cNvPr id="11" name="Image 4" descr="/Users/michaelengland/Developer/michaelengland/ai-best-practices/decks/ai-best-practices/icons/calendarW.png">    </p:cNvPr>
+          <p:cNvPicPr>
+            <a:picLocks noChangeAspect="1"/>
+          </p:cNvPicPr>
+          <p:nvPr/>
+        </p:nvPicPr>
+        <p:blipFill>
+          <a:blip r:embed="rId5"/>
+          <a:stretch>
+            <a:fillRect/>
+          </a:stretch>
+        </p:blipFill>
+        <p:spPr>
+          <a:xfrm>
+            <a:off x="6126480" y="1645920"/>
+            <a:ext cx="731520" cy="731520"/>
+          </a:xfrm>
+          <a:prstGeom prst="rect">
+            <a:avLst/>
+          </a:prstGeom>
+        </p:spPr>
+      </p:pic>
+      <p:sp>
+        <p:nvSpPr>
+          <p:cNvPr id="12" name="Text 5"/>
+          <p:cNvSpPr/>
+          <p:nvPr/>
+        </p:nvSpPr>
+        <p:spPr>
+          <a:xfrm>
+            <a:off x="5852160" y="2560320"/>
+            <a:ext cx="1280160" cy="548640"/>
+          </a:xfrm>
+          <a:prstGeom prst="rect">
+            <a:avLst/>
+          </a:prstGeom>
+          <a:noFill/>
+          <a:ln/>
+        </p:spPr>
+        <p:txBody>
+          <a:bodyPr wrap="square" lIns="0" tIns="0" rIns="0" bIns="0" rtlCol="0" anchor="t"/>
+          <a:lstStyle/>
+          <a:p>
+            <a:pPr algn="ctr" indent="0" marL="0">
+              <a:buNone/>
+            </a:pPr>
+            <a:r>
+              <a:rPr lang="en-US" sz="2000" dirty="0">
+                <a:solidFill>
+                  <a:srgbClr val="8B95A5"/>
+                </a:solidFill>
+                <a:latin typeface="Verdana" pitchFamily="34" charset="0"/>
+                <a:ea typeface="Verdana" pitchFamily="34" charset="-122"/>
+                <a:cs typeface="Verdana" pitchFamily="34" charset="-120"/>
+              </a:rPr>
+              <a:t>Calendar</a:t>
+            </a:r>
+            <a:endParaRPr lang="en-US" sz="2000" dirty="0"/>
+          </a:p>
+        </p:txBody>
+      </p:sp>
+      <p:pic>
+        <p:nvPicPr>
+          <p:cNvPr id="13" name="Image 5" descr="/Users/michaelengland/Developer/michaelengland/ai-best-practices/decks/ai-best-practices/icons/arrowW.png">    </p:cNvPr>
+          <p:cNvPicPr>
+            <a:picLocks noChangeAspect="1"/>
+          </p:cNvPicPr>
+          <p:nvPr/>
+        </p:nvPicPr>
+        <p:blipFill>
+          <a:blip r:embed="rId6"/>
+          <a:stretch>
+            <a:fillRect/>
+          </a:stretch>
+        </p:blipFill>
+        <p:spPr>
+          <a:xfrm>
+            <a:off x="7406640" y="1645920"/>
+            <a:ext cx="731520" cy="731520"/>
+          </a:xfrm>
+          <a:prstGeom prst="rect">
+            <a:avLst/>
+          </a:prstGeom>
+        </p:spPr>
+      </p:pic>
+      <p:sp>
+        <p:nvSpPr>
+          <p:cNvPr id="14" name="Text 6"/>
+          <p:cNvSpPr/>
+          <p:nvPr/>
+        </p:nvSpPr>
+        <p:spPr>
+          <a:xfrm>
+            <a:off x="7132320" y="2560320"/>
+            <a:ext cx="1280160" cy="548640"/>
+          </a:xfrm>
+          <a:prstGeom prst="rect">
+            <a:avLst/>
+          </a:prstGeom>
+          <a:noFill/>
+          <a:ln/>
+        </p:spPr>
+        <p:txBody>
+          <a:bodyPr wrap="square" lIns="0" tIns="0" rIns="0" bIns="0" rtlCol="0" anchor="t"/>
+          <a:lstStyle/>
+          <a:p>
+            <a:pPr algn="ctr" indent="0" marL="0">
+              <a:buNone/>
+            </a:pPr>
+            <a:r>
+              <a:rPr lang="en-US" sz="2000" dirty="0">
+                <a:solidFill>
+                  <a:srgbClr val="8B95A5"/>
+                </a:solidFill>
+                <a:latin typeface="Verdana" pitchFamily="34" charset="0"/>
+                <a:ea typeface="Verdana" pitchFamily="34" charset="-122"/>
+                <a:cs typeface="Verdana" pitchFamily="34" charset="-120"/>
+              </a:rPr>
+              <a:t>Custom</a:t>
+            </a:r>
+            <a:endParaRPr lang="en-US" sz="2000" dirty="0"/>
           </a:p>
         </p:txBody>
       </p:sp>
@@ -9718,8 +10278,8 @@
         </p:nvSpPr>
         <p:spPr>
           <a:xfrm>
-            <a:off x="914400" y="914400"/>
-            <a:ext cx="7315200" cy="3291840"/>
+            <a:off x="731520" y="457200"/>
+            <a:ext cx="7680960" cy="914400"/>
           </a:xfrm>
           <a:prstGeom prst="rect">
             <a:avLst/>
@@ -9737,39 +10297,122 @@
             <a:r>
               <a:rPr lang="en-US" sz="3600" b="1" dirty="0">
                 <a:solidFill>
-                  <a:srgbClr val="635BFF"/>
+                  <a:srgbClr val="FFFFFF"/>
                 </a:solidFill>
                 <a:latin typeface="Georgia" pitchFamily="34" charset="0"/>
                 <a:ea typeface="Georgia" pitchFamily="34" charset="-122"/>
                 <a:cs typeface="Georgia" pitchFamily="34" charset="-120"/>
               </a:rPr>
-              <a:t>"Summarise my latest unread email"</a:t>
+              <a:t>Connect Gmail to Claude</a:t>
             </a:r>
             <a:endParaRPr lang="en-US" sz="3600" dirty="0"/>
           </a:p>
-          <a:p>
-            <a:pPr algn="ctr" indent="0" marL="0">
-              <a:buNone/>
-            </a:pPr>
-            <a:r>
-              <a:rPr lang="en-US" sz="2200" i="1" dirty="0">
-                <a:solidFill>
-                  <a:srgbClr val="8B95A5"/>
+        </p:txBody>
+      </p:sp>
+      <p:sp>
+        <p:nvSpPr>
+          <p:cNvPr id="4" name="Text 2"/>
+          <p:cNvSpPr/>
+          <p:nvPr/>
+        </p:nvSpPr>
+        <p:spPr>
+          <a:xfrm>
+            <a:off x="1828800" y="1645920"/>
+            <a:ext cx="548640" cy="457200"/>
+          </a:xfrm>
+          <a:prstGeom prst="rect">
+            <a:avLst/>
+          </a:prstGeom>
+          <a:noFill/>
+          <a:ln/>
+        </p:spPr>
+        <p:txBody>
+          <a:bodyPr wrap="square" lIns="0" tIns="0" rIns="0" bIns="0" rtlCol="0" anchor="ctr"/>
+          <a:lstStyle/>
+          <a:p>
+            <a:pPr algn="ctr" indent="0" marL="0">
+              <a:buNone/>
+            </a:pPr>
+            <a:r>
+              <a:rPr lang="en-US" sz="2400" b="1" dirty="0">
+                <a:solidFill>
+                  <a:srgbClr val="635BFF"/>
+                </a:solidFill>
+                <a:latin typeface="Georgia" pitchFamily="34" charset="0"/>
+                <a:ea typeface="Georgia" pitchFamily="34" charset="-122"/>
+                <a:cs typeface="Georgia" pitchFamily="34" charset="-120"/>
+              </a:rPr>
+              <a:t>1</a:t>
+            </a:r>
+            <a:endParaRPr lang="en-US" sz="2400" dirty="0"/>
+          </a:p>
+        </p:txBody>
+      </p:sp>
+      <p:sp>
+        <p:nvSpPr>
+          <p:cNvPr id="5" name="Text 3"/>
+          <p:cNvSpPr/>
+          <p:nvPr/>
+        </p:nvSpPr>
+        <p:spPr>
+          <a:xfrm>
+            <a:off x="2560320" y="1645920"/>
+            <a:ext cx="4572000" cy="457200"/>
+          </a:xfrm>
+          <a:prstGeom prst="rect">
+            <a:avLst/>
+          </a:prstGeom>
+          <a:noFill/>
+          <a:ln/>
+        </p:spPr>
+        <p:txBody>
+          <a:bodyPr wrap="square" lIns="0" tIns="0" rIns="0" bIns="0" rtlCol="0" anchor="ctr"/>
+          <a:lstStyle/>
+          <a:p>
+            <a:pPr algn="l" indent="0" marL="0">
+              <a:buNone/>
+            </a:pPr>
+            <a:r>
+              <a:rPr lang="en-US" sz="2200" dirty="0">
+                <a:solidFill>
+                  <a:srgbClr val="EDEDED"/>
                 </a:solidFill>
                 <a:latin typeface="Verdana" pitchFamily="34" charset="0"/>
                 <a:ea typeface="Verdana" pitchFamily="34" charset="-122"/>
                 <a:cs typeface="Verdana" pitchFamily="34" charset="-120"/>
               </a:rPr>
-              <a:t>then</a:t>
-            </a:r>
-            <a:endParaRPr lang="en-US" sz="3600" dirty="0"/>
-          </a:p>
-          <a:p>
-            <a:pPr algn="ctr" indent="0" marL="0">
-              <a:buNone/>
-            </a:pPr>
-            <a:r>
-              <a:rPr lang="en-US" sz="3600" b="1" dirty="0">
+              <a:t>Click  +  in the chat input</a:t>
+            </a:r>
+            <a:endParaRPr lang="en-US" sz="2200" dirty="0"/>
+          </a:p>
+        </p:txBody>
+      </p:sp>
+      <p:sp>
+        <p:nvSpPr>
+          <p:cNvPr id="6" name="Text 4"/>
+          <p:cNvSpPr/>
+          <p:nvPr/>
+        </p:nvSpPr>
+        <p:spPr>
+          <a:xfrm>
+            <a:off x="1828800" y="2286000"/>
+            <a:ext cx="548640" cy="457200"/>
+          </a:xfrm>
+          <a:prstGeom prst="rect">
+            <a:avLst/>
+          </a:prstGeom>
+          <a:noFill/>
+          <a:ln/>
+        </p:spPr>
+        <p:txBody>
+          <a:bodyPr wrap="square" lIns="0" tIns="0" rIns="0" bIns="0" rtlCol="0" anchor="ctr"/>
+          <a:lstStyle/>
+          <a:p>
+            <a:pPr algn="ctr" indent="0" marL="0">
+              <a:buNone/>
+            </a:pPr>
+            <a:r>
+              <a:rPr lang="en-US" sz="2400" b="1" dirty="0">
                 <a:solidFill>
                   <a:srgbClr val="635BFF"/>
                 </a:solidFill>
@@ -9777,9 +10420,204 @@
                 <a:ea typeface="Georgia" pitchFamily="34" charset="-122"/>
                 <a:cs typeface="Georgia" pitchFamily="34" charset="-120"/>
               </a:rPr>
-              <a:t>"Search the web for more on this"</a:t>
-            </a:r>
-            <a:endParaRPr lang="en-US" sz="3600" dirty="0"/>
+              <a:t>2</a:t>
+            </a:r>
+            <a:endParaRPr lang="en-US" sz="2400" dirty="0"/>
+          </a:p>
+        </p:txBody>
+      </p:sp>
+      <p:sp>
+        <p:nvSpPr>
+          <p:cNvPr id="7" name="Text 5"/>
+          <p:cNvSpPr/>
+          <p:nvPr/>
+        </p:nvSpPr>
+        <p:spPr>
+          <a:xfrm>
+            <a:off x="2560320" y="2286000"/>
+            <a:ext cx="4572000" cy="457200"/>
+          </a:xfrm>
+          <a:prstGeom prst="rect">
+            <a:avLst/>
+          </a:prstGeom>
+          <a:noFill/>
+          <a:ln/>
+        </p:spPr>
+        <p:txBody>
+          <a:bodyPr wrap="square" lIns="0" tIns="0" rIns="0" bIns="0" rtlCol="0" anchor="ctr"/>
+          <a:lstStyle/>
+          <a:p>
+            <a:pPr algn="l" indent="0" marL="0">
+              <a:buNone/>
+            </a:pPr>
+            <a:r>
+              <a:rPr lang="en-US" sz="2200" dirty="0">
+                <a:solidFill>
+                  <a:srgbClr val="EDEDED"/>
+                </a:solidFill>
+                <a:latin typeface="Verdana" pitchFamily="34" charset="0"/>
+                <a:ea typeface="Verdana" pitchFamily="34" charset="-122"/>
+                <a:cs typeface="Verdana" pitchFamily="34" charset="-120"/>
+              </a:rPr>
+              <a:t>Hover Connectors</a:t>
+            </a:r>
+            <a:endParaRPr lang="en-US" sz="2200" dirty="0"/>
+          </a:p>
+        </p:txBody>
+      </p:sp>
+      <p:sp>
+        <p:nvSpPr>
+          <p:cNvPr id="8" name="Text 6"/>
+          <p:cNvSpPr/>
+          <p:nvPr/>
+        </p:nvSpPr>
+        <p:spPr>
+          <a:xfrm>
+            <a:off x="1828800" y="2926080"/>
+            <a:ext cx="548640" cy="457200"/>
+          </a:xfrm>
+          <a:prstGeom prst="rect">
+            <a:avLst/>
+          </a:prstGeom>
+          <a:noFill/>
+          <a:ln/>
+        </p:spPr>
+        <p:txBody>
+          <a:bodyPr wrap="square" lIns="0" tIns="0" rIns="0" bIns="0" rtlCol="0" anchor="ctr"/>
+          <a:lstStyle/>
+          <a:p>
+            <a:pPr algn="ctr" indent="0" marL="0">
+              <a:buNone/>
+            </a:pPr>
+            <a:r>
+              <a:rPr lang="en-US" sz="2400" b="1" dirty="0">
+                <a:solidFill>
+                  <a:srgbClr val="635BFF"/>
+                </a:solidFill>
+                <a:latin typeface="Georgia" pitchFamily="34" charset="0"/>
+                <a:ea typeface="Georgia" pitchFamily="34" charset="-122"/>
+                <a:cs typeface="Georgia" pitchFamily="34" charset="-120"/>
+              </a:rPr>
+              <a:t>3</a:t>
+            </a:r>
+            <a:endParaRPr lang="en-US" sz="2400" dirty="0"/>
+          </a:p>
+        </p:txBody>
+      </p:sp>
+      <p:sp>
+        <p:nvSpPr>
+          <p:cNvPr id="9" name="Text 7"/>
+          <p:cNvSpPr/>
+          <p:nvPr/>
+        </p:nvSpPr>
+        <p:spPr>
+          <a:xfrm>
+            <a:off x="2560320" y="2926080"/>
+            <a:ext cx="4572000" cy="457200"/>
+          </a:xfrm>
+          <a:prstGeom prst="rect">
+            <a:avLst/>
+          </a:prstGeom>
+          <a:noFill/>
+          <a:ln/>
+        </p:spPr>
+        <p:txBody>
+          <a:bodyPr wrap="square" lIns="0" tIns="0" rIns="0" bIns="0" rtlCol="0" anchor="ctr"/>
+          <a:lstStyle/>
+          <a:p>
+            <a:pPr algn="l" indent="0" marL="0">
+              <a:buNone/>
+            </a:pPr>
+            <a:r>
+              <a:rPr lang="en-US" sz="2200" dirty="0">
+                <a:solidFill>
+                  <a:srgbClr val="EDEDED"/>
+                </a:solidFill>
+                <a:latin typeface="Verdana" pitchFamily="34" charset="0"/>
+                <a:ea typeface="Verdana" pitchFamily="34" charset="-122"/>
+                <a:cs typeface="Verdana" pitchFamily="34" charset="-120"/>
+              </a:rPr>
+              <a:t>Toggle Gmail on</a:t>
+            </a:r>
+            <a:endParaRPr lang="en-US" sz="2200" dirty="0"/>
+          </a:p>
+        </p:txBody>
+      </p:sp>
+      <p:sp>
+        <p:nvSpPr>
+          <p:cNvPr id="10" name="Text 8"/>
+          <p:cNvSpPr/>
+          <p:nvPr/>
+        </p:nvSpPr>
+        <p:spPr>
+          <a:xfrm>
+            <a:off x="1828800" y="3566160"/>
+            <a:ext cx="548640" cy="457200"/>
+          </a:xfrm>
+          <a:prstGeom prst="rect">
+            <a:avLst/>
+          </a:prstGeom>
+          <a:noFill/>
+          <a:ln/>
+        </p:spPr>
+        <p:txBody>
+          <a:bodyPr wrap="square" lIns="0" tIns="0" rIns="0" bIns="0" rtlCol="0" anchor="ctr"/>
+          <a:lstStyle/>
+          <a:p>
+            <a:pPr algn="ctr" indent="0" marL="0">
+              <a:buNone/>
+            </a:pPr>
+            <a:r>
+              <a:rPr lang="en-US" sz="2400" b="1" dirty="0">
+                <a:solidFill>
+                  <a:srgbClr val="635BFF"/>
+                </a:solidFill>
+                <a:latin typeface="Georgia" pitchFamily="34" charset="0"/>
+                <a:ea typeface="Georgia" pitchFamily="34" charset="-122"/>
+                <a:cs typeface="Georgia" pitchFamily="34" charset="-120"/>
+              </a:rPr>
+              <a:t>4</a:t>
+            </a:r>
+            <a:endParaRPr lang="en-US" sz="2400" dirty="0"/>
+          </a:p>
+        </p:txBody>
+      </p:sp>
+      <p:sp>
+        <p:nvSpPr>
+          <p:cNvPr id="11" name="Text 9"/>
+          <p:cNvSpPr/>
+          <p:nvPr/>
+        </p:nvSpPr>
+        <p:spPr>
+          <a:xfrm>
+            <a:off x="2560320" y="3566160"/>
+            <a:ext cx="4572000" cy="457200"/>
+          </a:xfrm>
+          <a:prstGeom prst="rect">
+            <a:avLst/>
+          </a:prstGeom>
+          <a:noFill/>
+          <a:ln/>
+        </p:spPr>
+        <p:txBody>
+          <a:bodyPr wrap="square" lIns="0" tIns="0" rIns="0" bIns="0" rtlCol="0" anchor="ctr"/>
+          <a:lstStyle/>
+          <a:p>
+            <a:pPr algn="l" indent="0" marL="0">
+              <a:buNone/>
+            </a:pPr>
+            <a:r>
+              <a:rPr lang="en-US" sz="2200" dirty="0">
+                <a:solidFill>
+                  <a:srgbClr val="EDEDED"/>
+                </a:solidFill>
+                <a:latin typeface="Verdana" pitchFamily="34" charset="0"/>
+                <a:ea typeface="Verdana" pitchFamily="34" charset="-122"/>
+                <a:cs typeface="Verdana" pitchFamily="34" charset="-120"/>
+              </a:rPr>
+              <a:t>Authenticate with Google</a:t>
+            </a:r>
+            <a:endParaRPr lang="en-US" sz="2200" dirty="0"/>
           </a:p>
         </p:txBody>
       </p:sp>
@@ -9845,8 +10683,8 @@
         </p:nvSpPr>
         <p:spPr>
           <a:xfrm>
-            <a:off x="914400" y="1097280"/>
-            <a:ext cx="7315200" cy="2560320"/>
+            <a:off x="914400" y="914400"/>
+            <a:ext cx="7315200" cy="3291840"/>
           </a:xfrm>
           <a:prstGeom prst="rect">
             <a:avLst/>
@@ -9862,51 +10700,51 @@
               <a:buNone/>
             </a:pPr>
             <a:r>
-              <a:rPr lang="en-US" sz="4400" b="1" dirty="0">
-                <a:solidFill>
-                  <a:srgbClr val="FFFFFF"/>
+              <a:rPr lang="en-US" sz="3600" b="1" dirty="0">
+                <a:solidFill>
+                  <a:srgbClr val="635BFF"/>
                 </a:solidFill>
                 <a:latin typeface="Georgia" pitchFamily="34" charset="0"/>
                 <a:ea typeface="Georgia" pitchFamily="34" charset="-122"/>
                 <a:cs typeface="Georgia" pitchFamily="34" charset="-120"/>
               </a:rPr>
-              <a:t>You didn't open Gmail.</a:t>
-            </a:r>
-            <a:endParaRPr lang="en-US" sz="4400" dirty="0"/>
-          </a:p>
-          <a:p>
-            <a:pPr algn="ctr" indent="0" marL="0">
-              <a:buNone/>
-            </a:pPr>
-            <a:r>
-              <a:rPr lang="en-US" sz="4400" b="1" dirty="0">
-                <a:solidFill>
-                  <a:srgbClr val="FFFFFF"/>
+              <a:t>"Summarise my latest unread email"</a:t>
+            </a:r>
+            <a:endParaRPr lang="en-US" sz="3600" dirty="0"/>
+          </a:p>
+          <a:p>
+            <a:pPr algn="ctr" indent="0" marL="0">
+              <a:buNone/>
+            </a:pPr>
+            <a:r>
+              <a:rPr lang="en-US" sz="2200" i="1" dirty="0">
+                <a:solidFill>
+                  <a:srgbClr val="8B95A5"/>
+                </a:solidFill>
+                <a:latin typeface="Verdana" pitchFamily="34" charset="0"/>
+                <a:ea typeface="Verdana" pitchFamily="34" charset="-122"/>
+                <a:cs typeface="Verdana" pitchFamily="34" charset="-120"/>
+              </a:rPr>
+              <a:t>then</a:t>
+            </a:r>
+            <a:endParaRPr lang="en-US" sz="3600" dirty="0"/>
+          </a:p>
+          <a:p>
+            <a:pPr algn="ctr" indent="0" marL="0">
+              <a:buNone/>
+            </a:pPr>
+            <a:r>
+              <a:rPr lang="en-US" sz="3600" b="1" dirty="0">
+                <a:solidFill>
+                  <a:srgbClr val="635BFF"/>
                 </a:solidFill>
                 <a:latin typeface="Georgia" pitchFamily="34" charset="0"/>
                 <a:ea typeface="Georgia" pitchFamily="34" charset="-122"/>
                 <a:cs typeface="Georgia" pitchFamily="34" charset="-120"/>
               </a:rPr>
-              <a:t>You didn't open Google.</a:t>
-            </a:r>
-            <a:endParaRPr lang="en-US" sz="4400" dirty="0"/>
-          </a:p>
-          <a:p>
-            <a:pPr algn="ctr" indent="0" marL="0">
-              <a:buNone/>
-            </a:pPr>
-            <a:r>
-              <a:rPr lang="en-US" sz="4400" b="1" dirty="0">
-                <a:solidFill>
-                  <a:srgbClr val="FFFFFF"/>
-                </a:solidFill>
-                <a:latin typeface="Georgia" pitchFamily="34" charset="0"/>
-                <a:ea typeface="Georgia" pitchFamily="34" charset="-122"/>
-                <a:cs typeface="Georgia" pitchFamily="34" charset="-120"/>
-              </a:rPr>
-              <a:t>You just asked.</a:t>
-            </a:r>
-            <a:endParaRPr lang="en-US" sz="4400" dirty="0"/>
+              <a:t>"Search the web for more on this"</a:t>
+            </a:r>
+            <a:endParaRPr lang="en-US" sz="3600" dirty="0"/>
           </a:p>
         </p:txBody>
       </p:sp>
@@ -9972,8 +10810,8 @@
         </p:nvSpPr>
         <p:spPr>
           <a:xfrm>
-            <a:off x="731520" y="365760"/>
-            <a:ext cx="7680960" cy="731520"/>
+            <a:off x="914400" y="1097280"/>
+            <a:ext cx="7315200" cy="2560320"/>
           </a:xfrm>
           <a:prstGeom prst="rect">
             <a:avLst/>
@@ -9989,7 +10827,7 @@
               <a:buNone/>
             </a:pPr>
             <a:r>
-              <a:rPr lang="en-US" sz="3600" b="1" dirty="0">
+              <a:rPr lang="en-US" sz="4400" b="1" dirty="0">
                 <a:solidFill>
                   <a:srgbClr val="FFFFFF"/>
                 </a:solidFill>
@@ -9997,32 +10835,10 @@
                 <a:ea typeface="Georgia" pitchFamily="34" charset="-122"/>
                 <a:cs typeface="Georgia" pitchFamily="34" charset="-120"/>
               </a:rPr>
-              <a:t>Your most powerful source</a:t>
-            </a:r>
-            <a:endParaRPr lang="en-US" sz="3600" dirty="0"/>
-          </a:p>
-        </p:txBody>
-      </p:sp>
-      <p:sp>
-        <p:nvSpPr>
-          <p:cNvPr id="4" name="Text 2"/>
-          <p:cNvSpPr/>
-          <p:nvPr/>
-        </p:nvSpPr>
-        <p:spPr>
-          <a:xfrm>
-            <a:off x="731520" y="1097280"/>
-            <a:ext cx="7680960" cy="731520"/>
-          </a:xfrm>
-          <a:prstGeom prst="rect">
-            <a:avLst/>
-          </a:prstGeom>
-          <a:noFill/>
-          <a:ln/>
-        </p:spPr>
-        <p:txBody>
-          <a:bodyPr wrap="square" lIns="0" tIns="0" rIns="0" bIns="0" rtlCol="0" anchor="ctr"/>
-          <a:lstStyle/>
+              <a:t>You didn't open Gmail.</a:t>
+            </a:r>
+            <a:endParaRPr lang="en-US" sz="4400" dirty="0"/>
+          </a:p>
           <a:p>
             <a:pPr algn="ctr" indent="0" marL="0">
               <a:buNone/>
@@ -10030,327 +10846,32 @@
             <a:r>
               <a:rPr lang="en-US" sz="4400" b="1" dirty="0">
                 <a:solidFill>
-                  <a:srgbClr val="635BFF"/>
+                  <a:srgbClr val="FFFFFF"/>
                 </a:solidFill>
                 <a:latin typeface="Georgia" pitchFamily="34" charset="0"/>
                 <a:ea typeface="Georgia" pitchFamily="34" charset="-122"/>
                 <a:cs typeface="Georgia" pitchFamily="34" charset="-120"/>
               </a:rPr>
-              <a:t>Your files.</a:t>
+              <a:t>You didn't open Google.</a:t>
             </a:r>
             <a:endParaRPr lang="en-US" sz="4400" dirty="0"/>
           </a:p>
-        </p:txBody>
-      </p:sp>
-      <p:sp>
-        <p:nvSpPr>
-          <p:cNvPr id="5" name="Text 3"/>
-          <p:cNvSpPr/>
-          <p:nvPr/>
-        </p:nvSpPr>
-        <p:spPr>
-          <a:xfrm>
-            <a:off x="1828800" y="2194560"/>
-            <a:ext cx="548640" cy="457200"/>
-          </a:xfrm>
-          <a:prstGeom prst="rect">
-            <a:avLst/>
-          </a:prstGeom>
-          <a:noFill/>
-          <a:ln/>
-        </p:spPr>
-        <p:txBody>
-          <a:bodyPr wrap="square" lIns="0" tIns="0" rIns="0" bIns="0" rtlCol="0" anchor="ctr"/>
-          <a:lstStyle/>
-          <a:p>
-            <a:pPr algn="ctr" indent="0" marL="0">
-              <a:buNone/>
-            </a:pPr>
-            <a:r>
-              <a:rPr lang="en-US" sz="2200" b="1" dirty="0">
-                <a:solidFill>
-                  <a:srgbClr val="635BFF"/>
+          <a:p>
+            <a:pPr algn="ctr" indent="0" marL="0">
+              <a:buNone/>
+            </a:pPr>
+            <a:r>
+              <a:rPr lang="en-US" sz="4400" b="1" dirty="0">
+                <a:solidFill>
+                  <a:srgbClr val="FFFFFF"/>
                 </a:solidFill>
                 <a:latin typeface="Georgia" pitchFamily="34" charset="0"/>
                 <a:ea typeface="Georgia" pitchFamily="34" charset="-122"/>
                 <a:cs typeface="Georgia" pitchFamily="34" charset="-120"/>
               </a:rPr>
-              <a:t>1</a:t>
-            </a:r>
-            <a:endParaRPr lang="en-US" sz="2200" dirty="0"/>
-          </a:p>
-        </p:txBody>
-      </p:sp>
-      <p:sp>
-        <p:nvSpPr>
-          <p:cNvPr id="6" name="Text 4"/>
-          <p:cNvSpPr/>
-          <p:nvPr/>
-        </p:nvSpPr>
-        <p:spPr>
-          <a:xfrm>
-            <a:off x="2560320" y="2194560"/>
-            <a:ext cx="4572000" cy="457200"/>
-          </a:xfrm>
-          <a:prstGeom prst="rect">
-            <a:avLst/>
-          </a:prstGeom>
-          <a:noFill/>
-          <a:ln/>
-        </p:spPr>
-        <p:txBody>
-          <a:bodyPr wrap="square" lIns="0" tIns="0" rIns="0" bIns="0" rtlCol="0" anchor="ctr"/>
-          <a:lstStyle/>
-          <a:p>
-            <a:pPr algn="l" indent="0" marL="0">
-              <a:buNone/>
-            </a:pPr>
-            <a:r>
-              <a:rPr lang="en-US" sz="2000" dirty="0">
-                <a:solidFill>
-                  <a:srgbClr val="EDEDED"/>
-                </a:solidFill>
-                <a:latin typeface="Verdana" pitchFamily="34" charset="0"/>
-                <a:ea typeface="Verdana" pitchFamily="34" charset="-122"/>
-                <a:cs typeface="Verdana" pitchFamily="34" charset="-120"/>
-              </a:rPr>
-              <a:t>Open the Cowork tab</a:t>
-            </a:r>
-            <a:endParaRPr lang="en-US" sz="2000" dirty="0"/>
-          </a:p>
-        </p:txBody>
-      </p:sp>
-      <p:sp>
-        <p:nvSpPr>
-          <p:cNvPr id="7" name="Text 5"/>
-          <p:cNvSpPr/>
-          <p:nvPr/>
-        </p:nvSpPr>
-        <p:spPr>
-          <a:xfrm>
-            <a:off x="1828800" y="2788920"/>
-            <a:ext cx="548640" cy="457200"/>
-          </a:xfrm>
-          <a:prstGeom prst="rect">
-            <a:avLst/>
-          </a:prstGeom>
-          <a:noFill/>
-          <a:ln/>
-        </p:spPr>
-        <p:txBody>
-          <a:bodyPr wrap="square" lIns="0" tIns="0" rIns="0" bIns="0" rtlCol="0" anchor="ctr"/>
-          <a:lstStyle/>
-          <a:p>
-            <a:pPr algn="ctr" indent="0" marL="0">
-              <a:buNone/>
-            </a:pPr>
-            <a:r>
-              <a:rPr lang="en-US" sz="2200" b="1" dirty="0">
-                <a:solidFill>
-                  <a:srgbClr val="635BFF"/>
-                </a:solidFill>
-                <a:latin typeface="Georgia" pitchFamily="34" charset="0"/>
-                <a:ea typeface="Georgia" pitchFamily="34" charset="-122"/>
-                <a:cs typeface="Georgia" pitchFamily="34" charset="-120"/>
-              </a:rPr>
-              <a:t>2</a:t>
-            </a:r>
-            <a:endParaRPr lang="en-US" sz="2200" dirty="0"/>
-          </a:p>
-        </p:txBody>
-      </p:sp>
-      <p:sp>
-        <p:nvSpPr>
-          <p:cNvPr id="8" name="Text 6"/>
-          <p:cNvSpPr/>
-          <p:nvPr/>
-        </p:nvSpPr>
-        <p:spPr>
-          <a:xfrm>
-            <a:off x="2560320" y="2788920"/>
-            <a:ext cx="4572000" cy="457200"/>
-          </a:xfrm>
-          <a:prstGeom prst="rect">
-            <a:avLst/>
-          </a:prstGeom>
-          <a:noFill/>
-          <a:ln/>
-        </p:spPr>
-        <p:txBody>
-          <a:bodyPr wrap="square" lIns="0" tIns="0" rIns="0" bIns="0" rtlCol="0" anchor="ctr"/>
-          <a:lstStyle/>
-          <a:p>
-            <a:pPr algn="l" indent="0" marL="0">
-              <a:buNone/>
-            </a:pPr>
-            <a:r>
-              <a:rPr lang="en-US" sz="2000" dirty="0">
-                <a:solidFill>
-                  <a:srgbClr val="EDEDED"/>
-                </a:solidFill>
-                <a:latin typeface="Verdana" pitchFamily="34" charset="0"/>
-                <a:ea typeface="Verdana" pitchFamily="34" charset="-122"/>
-                <a:cs typeface="Verdana" pitchFamily="34" charset="-120"/>
-              </a:rPr>
-              <a:t>Check "Work in a Folder"</a:t>
-            </a:r>
-            <a:endParaRPr lang="en-US" sz="2000" dirty="0"/>
-          </a:p>
-        </p:txBody>
-      </p:sp>
-      <p:sp>
-        <p:nvSpPr>
-          <p:cNvPr id="9" name="Text 7"/>
-          <p:cNvSpPr/>
-          <p:nvPr/>
-        </p:nvSpPr>
-        <p:spPr>
-          <a:xfrm>
-            <a:off x="1828800" y="3383280"/>
-            <a:ext cx="548640" cy="457200"/>
-          </a:xfrm>
-          <a:prstGeom prst="rect">
-            <a:avLst/>
-          </a:prstGeom>
-          <a:noFill/>
-          <a:ln/>
-        </p:spPr>
-        <p:txBody>
-          <a:bodyPr wrap="square" lIns="0" tIns="0" rIns="0" bIns="0" rtlCol="0" anchor="ctr"/>
-          <a:lstStyle/>
-          <a:p>
-            <a:pPr algn="ctr" indent="0" marL="0">
-              <a:buNone/>
-            </a:pPr>
-            <a:r>
-              <a:rPr lang="en-US" sz="2200" b="1" dirty="0">
-                <a:solidFill>
-                  <a:srgbClr val="635BFF"/>
-                </a:solidFill>
-                <a:latin typeface="Georgia" pitchFamily="34" charset="0"/>
-                <a:ea typeface="Georgia" pitchFamily="34" charset="-122"/>
-                <a:cs typeface="Georgia" pitchFamily="34" charset="-120"/>
-              </a:rPr>
-              <a:t>3</a:t>
-            </a:r>
-            <a:endParaRPr lang="en-US" sz="2200" dirty="0"/>
-          </a:p>
-        </p:txBody>
-      </p:sp>
-      <p:sp>
-        <p:nvSpPr>
-          <p:cNvPr id="10" name="Text 8"/>
-          <p:cNvSpPr/>
-          <p:nvPr/>
-        </p:nvSpPr>
-        <p:spPr>
-          <a:xfrm>
-            <a:off x="2560320" y="3383280"/>
-            <a:ext cx="4572000" cy="457200"/>
-          </a:xfrm>
-          <a:prstGeom prst="rect">
-            <a:avLst/>
-          </a:prstGeom>
-          <a:noFill/>
-          <a:ln/>
-        </p:spPr>
-        <p:txBody>
-          <a:bodyPr wrap="square" lIns="0" tIns="0" rIns="0" bIns="0" rtlCol="0" anchor="ctr"/>
-          <a:lstStyle/>
-          <a:p>
-            <a:pPr algn="l" indent="0" marL="0">
-              <a:buNone/>
-            </a:pPr>
-            <a:r>
-              <a:rPr lang="en-US" sz="2000" dirty="0">
-                <a:solidFill>
-                  <a:srgbClr val="EDEDED"/>
-                </a:solidFill>
-                <a:latin typeface="Verdana" pitchFamily="34" charset="0"/>
-                <a:ea typeface="Verdana" pitchFamily="34" charset="-122"/>
-                <a:cs typeface="Verdana" pitchFamily="34" charset="-120"/>
-              </a:rPr>
-              <a:t>Select a folder on your Mac</a:t>
-            </a:r>
-            <a:endParaRPr lang="en-US" sz="2000" dirty="0"/>
-          </a:p>
-        </p:txBody>
-      </p:sp>
-      <p:sp>
-        <p:nvSpPr>
-          <p:cNvPr id="11" name="Text 9"/>
-          <p:cNvSpPr/>
-          <p:nvPr/>
-        </p:nvSpPr>
-        <p:spPr>
-          <a:xfrm>
-            <a:off x="1828800" y="3977640"/>
-            <a:ext cx="548640" cy="457200"/>
-          </a:xfrm>
-          <a:prstGeom prst="rect">
-            <a:avLst/>
-          </a:prstGeom>
-          <a:noFill/>
-          <a:ln/>
-        </p:spPr>
-        <p:txBody>
-          <a:bodyPr wrap="square" lIns="0" tIns="0" rIns="0" bIns="0" rtlCol="0" anchor="ctr"/>
-          <a:lstStyle/>
-          <a:p>
-            <a:pPr algn="ctr" indent="0" marL="0">
-              <a:buNone/>
-            </a:pPr>
-            <a:r>
-              <a:rPr lang="en-US" sz="2200" b="1" dirty="0">
-                <a:solidFill>
-                  <a:srgbClr val="635BFF"/>
-                </a:solidFill>
-                <a:latin typeface="Georgia" pitchFamily="34" charset="0"/>
-                <a:ea typeface="Georgia" pitchFamily="34" charset="-122"/>
-                <a:cs typeface="Georgia" pitchFamily="34" charset="-120"/>
-              </a:rPr>
-              <a:t>4</a:t>
-            </a:r>
-            <a:endParaRPr lang="en-US" sz="2200" dirty="0"/>
-          </a:p>
-        </p:txBody>
-      </p:sp>
-      <p:sp>
-        <p:nvSpPr>
-          <p:cNvPr id="12" name="Text 10"/>
-          <p:cNvSpPr/>
-          <p:nvPr/>
-        </p:nvSpPr>
-        <p:spPr>
-          <a:xfrm>
-            <a:off x="2560320" y="3977640"/>
-            <a:ext cx="4572000" cy="457200"/>
-          </a:xfrm>
-          <a:prstGeom prst="rect">
-            <a:avLst/>
-          </a:prstGeom>
-          <a:noFill/>
-          <a:ln/>
-        </p:spPr>
-        <p:txBody>
-          <a:bodyPr wrap="square" lIns="0" tIns="0" rIns="0" bIns="0" rtlCol="0" anchor="ctr"/>
-          <a:lstStyle/>
-          <a:p>
-            <a:pPr algn="l" indent="0" marL="0">
-              <a:buNone/>
-            </a:pPr>
-            <a:r>
-              <a:rPr lang="en-US" sz="2000" dirty="0">
-                <a:solidFill>
-                  <a:srgbClr val="EDEDED"/>
-                </a:solidFill>
-                <a:latin typeface="Verdana" pitchFamily="34" charset="0"/>
-                <a:ea typeface="Verdana" pitchFamily="34" charset="-122"/>
-                <a:cs typeface="Verdana" pitchFamily="34" charset="-120"/>
-              </a:rPr>
-              <a:t>Grant access</a:t>
-            </a:r>
-            <a:endParaRPr lang="en-US" sz="2000" dirty="0"/>
+              <a:t>You just asked.</a:t>
+            </a:r>
+            <a:endParaRPr lang="en-US" sz="4400" dirty="0"/>
           </a:p>
         </p:txBody>
       </p:sp>

--- a/decks/workshop-2-orchestrator/workshop-2-orchestrator.pptx
+++ b/decks/workshop-2-orchestrator/workshop-2-orchestrator.pptx
@@ -33,9 +33,10 @@
     <p:sldId id="281" r:id="rId27"/>
     <p:sldId id="282" r:id="rId28"/>
     <p:sldId id="283" r:id="rId29"/>
+    <p:sldId id="284" r:id="rId30"/>
   </p:sldIdLst>
   <p:notesMasterIdLst>
-    <p:notesMasterId r:id="rId30"/>
+    <p:notesMasterId r:id="rId31"/>
   </p:notesMasterIdLst>
   <p:sldSz cx="9144000" cy="5143500"/>
   <p:notesSz cx="5143500" cy="9144000"/>
@@ -1233,7 +1234,7 @@
           <a:p>
             <a:r>
               <a:rPr lang="en-US" dirty="0"/>
-              <a:t>Quick pivot beat. The kitchen brigade metaphor: "One chef doing a 10-course dinner alone? Burnout. Mistakes. Forgotten appetiser. A kitchen brigade — each chef at a station — serves everything perfectly." Plant the word "specialised." Then move on.</a:t>
+              <a:t>Quick flash — 5 seconds. "You've handed Claude the keys — email, web, your files. And you've proven you can verify. That makes you an Operator. One more level to go." Don't linger. Move on.</a:t>
             </a:r>
             <a:endParaRPr lang="en-US" dirty="0"/>
           </a:p>
@@ -1321,7 +1322,7 @@
           <a:p>
             <a:r>
               <a:rPr lang="en-US" dirty="0"/>
-              <a:t>Group exercise. Facilitator presents a complex task (the tea presentation or another multi-step scenario). Discussion with whiteboard or shared doc. Target: 3-4 phases. e.g., Research → Draft → Review → Approval. Don't let it go beyond 4 — more than that overcomplicates the demo. 5-6 minutes.</a:t>
+              <a:t>Quick pivot beat. The kitchen brigade metaphor: "One chef doing a 10-course dinner alone? Burnout. Mistakes. Forgotten appetiser. A kitchen brigade — each chef at a station — serves everything perfectly." Plant the word "specialised." Then move on.</a:t>
             </a:r>
             <a:endParaRPr lang="en-US" dirty="0"/>
           </a:p>
@@ -1409,7 +1410,7 @@
           <a:p>
             <a:r>
               <a:rPr lang="en-US" dirty="0"/>
-              <a:t>This visual should mirror the copy-paste trap (Slide 3) and agent way (Slide 5) — same layout, same four-step pattern. But now each step is a specialised Skill. Only human at the final step. "Write this down: break big tasks into focused steps. Pass results forward. Filter context between each."</a:t>
+              <a:t>Group exercise. Facilitator presents a complex task (the tea presentation or another multi-step scenario). Discussion with whiteboard or shared doc. Target: 3-4 phases. e.g., Research → Draft → Review → Approval. Don't let it go beyond 4 — more than that overcomplicates the demo. 5-6 minutes.</a:t>
             </a:r>
             <a:endParaRPr lang="en-US" dirty="0"/>
           </a:p>
@@ -1585,7 +1586,7 @@
           <a:p>
             <a:r>
               <a:rPr lang="en-US" dirty="0"/>
-              <a:t>Facilitator switches to Claude for the live demo. Run the chain using pre-built org Skills: (1) New conversation → give it the research task → the Research Skill kicks in → show the structured brief output. (2) New conversation → paste the brief → the Draft Skill kicks in → show the polished proposal. (3) New conversation → paste the draft + original brief → the Review Skill kicks in → show the critique. Narrate every step. Point out what the Draft Skill doesn't know: it never saw the raw research, only the structured brief. That's filtered context — each new conversation provides isolation. Compare final output to what a single Claude conversation would have produced. Take your time — this demo earns the exercise that follows. ~7 minutes.</a:t>
+              <a:t>This visual should mirror the copy-paste trap (Slide 3) and agent way (Slide 5) — same layout, same four-step pattern. But now each step is a specialised Skill. Only human at the final step. "Write this down: break big tasks into focused steps. Pass results forward. Filter context between each."</a:t>
             </a:r>
             <a:endParaRPr lang="en-US" dirty="0"/>
           </a:p>
@@ -1673,7 +1674,7 @@
           <a:p>
             <a:r>
               <a:rPr lang="en-US" dirty="0"/>
-              <a:t>10 minutes. Attendees choose their running task from Workshop 1 or the tea presentation. The org Skills auto-activate based on the task. Fallback if time runs short: Phase 1 becomes a facilitator demo, attendees do Phase 2 only. The discussion matters more than both phases completing. Ask: "Where did the chain produce better results? Where did the handoff lose something?"</a:t>
+              <a:t>Facilitator switches to Claude for the live demo. Run the chain using pre-built org Skills: (1) New conversation → give it the research task → the Research Skill kicks in → show the structured brief output. (2) New conversation → paste the brief → the Draft Skill kicks in → show the polished proposal. (3) New conversation → paste the draft + original brief → the Review Skill kicks in → show the critique. Narrate every step. Point out what the Draft Skill doesn't know: it never saw the raw research, only the structured brief. That's filtered context — each new conversation provides isolation. Compare final output to what a single Claude conversation would have produced. Take your time — this demo earns the exercise that follows. ~7 minutes.</a:t>
             </a:r>
             <a:endParaRPr lang="en-US" dirty="0"/>
           </a:p>
@@ -1761,7 +1762,7 @@
           <a:p>
             <a:r>
               <a:rPr lang="en-US" dirty="0"/>
-              <a:t>The Workshop 1 callback. In the last session they set up rules (on the page) and pulled Skills from the drawer. Each org Skill in the chain is the same idea taken further — each agent gets its own drawer, its own expertise. They've been building persistent context since last session; now each step in the chain gets its own playbook.</a:t>
+              <a:t>10 minutes. Attendees choose their running task from Workshop 1 or the tea presentation. The org Skills auto-activate based on the task. Fallback if time runs short: Phase 1 becomes a facilitator demo, attendees do Phase 2 only. The discussion matters more than both phases completing. Ask: "Where did the chain produce better results? Where did the handoff lose something?"</a:t>
             </a:r>
             <a:endParaRPr lang="en-US" dirty="0"/>
           </a:p>
@@ -1849,7 +1850,7 @@
           <a:p>
             <a:r>
               <a:rPr lang="en-US" dirty="0"/>
-              <a:t>Show where to find the Skill instructions (Customize → Skills → click the Skill). Take 2-3 suggestions from the group. Discuss what difference each change would make. The SKILL.md is tangible — they can see it, read it, edit it. "When you edit that SKILL.md, every future use gets better. Your feedback becomes the skill."</a:t>
+              <a:t>The Workshop 1 callback. In the last session they set up rules (on the page) and pulled Skills from the drawer. Each org Skill in the chain is the same idea taken further — each agent gets its own drawer, its own expertise. They've been building persistent context since last session; now each step in the chain gets its own playbook.</a:t>
             </a:r>
             <a:endParaRPr lang="en-US" dirty="0"/>
           </a:p>
@@ -1937,7 +1938,7 @@
           <a:p>
             <a:r>
               <a:rPr lang="en-US" dirty="0"/>
-              <a:t>Emotional climax. Give this a full beat. "And as an org Skill, when you improve it, everyone benefits." This is the payoff of the entire skills arc that started in Workshop 1. The drawer gets better every time you edit a SKILL.md — and it's everyone's drawer. For Pro plan audiences: "Every future use benefits."</a:t>
+              <a:t>Show where to find the Skill instructions (Customize → Skills → click the Skill). Take 2-3 suggestions from the group. Discuss what difference each change would make. The SKILL.md is tangible — they can see it, read it, edit it. "When you edit that SKILL.md, every future use gets better. Your feedback becomes the skill."</a:t>
             </a:r>
             <a:endParaRPr lang="en-US" dirty="0"/>
           </a:p>
@@ -2025,7 +2026,7 @@
           <a:p>
             <a:r>
               <a:rPr lang="en-US" dirty="0"/>
-              <a:t>The rational payoff begins. Manual workflow: search, copy-paste, draft, re-prompt, reformat, review, apply. All the steps they recognised in Slide 3. "1.5 hours of grunt work where you're the bottleneck at every step."</a:t>
+              <a:t>Emotional climax. Give this a full beat. "And as an org Skill, when you improve it, everyone benefits." This is the payoff of the entire skills arc that started in Workshop 1. The drawer gets better every time you edit a SKILL.md — and it's everyone's drawer. For Pro plan audiences: "Every future use benefits."</a:t>
             </a:r>
             <a:endParaRPr lang="en-US" dirty="0"/>
           </a:p>
@@ -2113,7 +2114,7 @@
           <a:p>
             <a:r>
               <a:rPr lang="en-US" dirty="0"/>
-              <a:t>Chained workflow: Skills handle 1 hour 15 minutes of work. You spend 15 minutes on judgment — reviewing, deciding, approving. "Same tea presentation. The chain gets smarter every time. Your feedback becomes Skills."</a:t>
+              <a:t>The rational payoff begins. Manual workflow: search, copy-paste, draft, re-prompt, reformat, review, apply. All the steps they recognised in Slide 3. "1.5 hours of grunt work where you're the bottleneck at every step."</a:t>
             </a:r>
             <a:endParaRPr lang="en-US" dirty="0"/>
           </a:p>
@@ -2201,7 +2202,7 @@
           <a:p>
             <a:r>
               <a:rPr lang="en-US" dirty="0"/>
-              <a:t>Graduation moment. "You learned to whisper. You became a strategist. You let Claude operate. You orchestrated the brigade." This is the emotional payoff. Make it feel earned — they completed a 2-session AI Academy. Builder is still dimmed — that's the horizon for those who want to go further.</a:t>
+              <a:t>Chained workflow: Skills handle 1 hour 15 minutes of work. You spend 15 minutes on judgment — reviewing, deciding, approving. "Same tea presentation. The chain gets smarter every time. Your feedback becomes Skills."</a:t>
             </a:r>
             <a:endParaRPr lang="en-US" dirty="0"/>
           </a:p>
@@ -2289,7 +2290,7 @@
           <a:p>
             <a:r>
               <a:rPr lang="en-US" dirty="0"/>
-              <a:t>Final CTA. "Now go try it — one task, this week." Builder tease for the curious: "And if you want to go further — building integrations, connecting Claude to your actual systems, automating entire workflows — that's the Builder level. That's what's next." But don't oversell — most attendees won't go there, and that's fine.</a:t>
+              <a:t>Graduation moment. "You learned to whisper. You became a strategist. You let Claude operate. You orchestrated the brigade." This is the emotional payoff. Make it feel earned — they completed a 2-session AI Academy. Builder is still dimmed — that's the horizon for those who want to go further.</a:t>
             </a:r>
             <a:endParaRPr lang="en-US" dirty="0"/>
           </a:p>
@@ -2313,6 +2314,94 @@
             <a:fld id="{F7021451-1387-4CA6-816F-3879F97B5CBC}" type="slidenum">
               <a:rPr lang="en-US"/>
               <a:t>28</a:t>
+            </a:fld>
+            <a:endParaRPr lang="en-US"/>
+          </a:p>
+        </p:txBody>
+      </p:sp>
+    </p:spTree>
+    <p:extLst>
+      <p:ext uri="{BB962C8B-B14F-4D97-AF65-F5344CB8AC3E}">
+        <p14:creationId xmlns:p14="http://schemas.microsoft.com/office/powerpoint/2010/main" val="1024086991"/>
+      </p:ext>
+    </p:extLst>
+  </p:cSld>
+  <p:clrMapOvr>
+    <a:masterClrMapping/>
+  </p:clrMapOvr>
+</p:notes>
+</file>
+
+<file path=ppt/notesSlides/notesSlide29.xml><?xml version="1.0" encoding="utf-8"?>
+<p:notes xmlns:a="http://schemas.openxmlformats.org/drawingml/2006/main" xmlns:r="http://schemas.openxmlformats.org/officeDocument/2006/relationships" xmlns:p="http://schemas.openxmlformats.org/presentationml/2006/main">
+  <p:cSld>
+    <p:spTree>
+      <p:nvGrpSpPr>
+        <p:cNvPr id="1" name=""/>
+        <p:cNvGrpSpPr/>
+        <p:nvPr/>
+      </p:nvGrpSpPr>
+      <p:grpSpPr>
+        <a:xfrm>
+          <a:off x="0" y="0"/>
+          <a:ext cx="0" cy="0"/>
+          <a:chOff x="0" y="0"/>
+          <a:chExt cx="0" cy="0"/>
+        </a:xfrm>
+      </p:grpSpPr>
+      <p:sp>
+        <p:nvSpPr>
+          <p:cNvPr id="2" name="Slide Image Placeholder 1"/>
+          <p:cNvSpPr>
+            <a:spLocks noGrp="1" noRot="1" noChangeAspect="1"/>
+          </p:cNvSpPr>
+          <p:nvPr>
+            <p:ph type="sldImg"/>
+          </p:nvPr>
+        </p:nvSpPr>
+        <p:spPr/>
+      </p:sp>
+      <p:sp>
+        <p:nvSpPr>
+          <p:cNvPr id="3" name="Notes Placeholder 2"/>
+          <p:cNvSpPr>
+            <a:spLocks noGrp="1"/>
+          </p:cNvSpPr>
+          <p:nvPr>
+            <p:ph type="body" idx="1"/>
+          </p:nvPr>
+        </p:nvSpPr>
+        <p:spPr/>
+        <p:txBody>
+          <a:bodyPr/>
+          <a:lstStyle/>
+          <a:p>
+            <a:r>
+              <a:rPr lang="en-US" dirty="0"/>
+              <a:t>Final CTA. "Now go try it — one task, this week." Builder tease for the curious: "And if you want to go further — building integrations, connecting Claude to your actual systems, automating entire workflows — that's the Builder level. That's what's next." But don't oversell — most attendees won't go there, and that's fine.</a:t>
+            </a:r>
+            <a:endParaRPr lang="en-US" dirty="0"/>
+          </a:p>
+        </p:txBody>
+      </p:sp>
+      <p:sp>
+        <p:nvSpPr>
+          <p:cNvPr id="4" name="Slide Number Placeholder 3"/>
+          <p:cNvSpPr>
+            <a:spLocks noGrp="1"/>
+          </p:cNvSpPr>
+          <p:nvPr>
+            <p:ph type="sldNum" sz="quarter" idx="10"/>
+          </p:nvPr>
+        </p:nvSpPr>
+        <p:spPr/>
+        <p:txBody>
+          <a:bodyPr/>
+          <a:lstStyle/>
+          <a:p>
+            <a:fld id="{F7021451-1387-4CA6-816F-3879F97B5CBC}" type="slidenum">
+              <a:rPr lang="en-US"/>
+              <a:t>29</a:t>
             </a:fld>
             <a:endParaRPr lang="en-US"/>
           </a:p>
@@ -5182,59 +5271,32 @@
       </p:sp>
       <p:sp>
         <p:nvSpPr>
-          <p:cNvPr id="3" name="Text 1"/>
-          <p:cNvSpPr/>
-          <p:nvPr/>
-        </p:nvSpPr>
-        <p:spPr>
-          <a:xfrm>
-            <a:off x="914400" y="1097280"/>
-            <a:ext cx="7315200" cy="2560320"/>
-          </a:xfrm>
-          <a:prstGeom prst="rect">
-            <a:avLst/>
-          </a:prstGeom>
-          <a:noFill/>
-          <a:ln/>
-        </p:spPr>
-        <p:txBody>
-          <a:bodyPr wrap="square" lIns="0" tIns="0" rIns="0" bIns="0" rtlCol="0" anchor="ctr"/>
-          <a:lstStyle/>
-          <a:p>
-            <a:pPr algn="ctr" indent="0" marL="0">
-              <a:buNone/>
-            </a:pPr>
-            <a:r>
-              <a:rPr lang="en-US" sz="4400" b="1" dirty="0">
-                <a:solidFill>
-                  <a:srgbClr val="FFFFFF"/>
-                </a:solidFill>
-                <a:latin typeface="Georgia" pitchFamily="34" charset="0"/>
-                <a:ea typeface="Georgia" pitchFamily="34" charset="-122"/>
-                <a:cs typeface="Georgia" pitchFamily="34" charset="-120"/>
-              </a:rPr>
-              <a:t>The trick isn't making</a:t>
-            </a:r>
-            <a:endParaRPr lang="en-US" sz="4400" dirty="0"/>
-          </a:p>
-          <a:p>
-            <a:pPr algn="ctr" indent="0" marL="0">
-              <a:buNone/>
-            </a:pPr>
-            <a:r>
-              <a:rPr lang="en-US" sz="4400" b="1" dirty="0">
-                <a:solidFill>
-                  <a:srgbClr val="FFFFFF"/>
-                </a:solidFill>
-                <a:latin typeface="Georgia" pitchFamily="34" charset="0"/>
-                <a:ea typeface="Georgia" pitchFamily="34" charset="-122"/>
-                <a:cs typeface="Georgia" pitchFamily="34" charset="-120"/>
-              </a:rPr>
-              <a:t>one AI smarter</a:t>
-            </a:r>
-            <a:endParaRPr lang="en-US" sz="4400" dirty="0"/>
-          </a:p>
-        </p:txBody>
+          <p:cNvPr id="3" name="Shape 1"/>
+          <p:cNvSpPr/>
+          <p:nvPr/>
+        </p:nvSpPr>
+        <p:spPr>
+          <a:xfrm>
+            <a:off x="192024" y="2011680"/>
+            <a:ext cx="1188720" cy="640080"/>
+          </a:xfrm>
+          <a:prstGeom prst="roundRect">
+            <a:avLst>
+              <a:gd name="adj" fmla="val 11429"/>
+            </a:avLst>
+          </a:prstGeom>
+          <a:solidFill>
+            <a:srgbClr val="0A2540">
+              <a:alpha val="50000"/>
+            </a:srgbClr>
+          </a:solidFill>
+          <a:ln w="19050">
+            <a:solidFill>
+              <a:srgbClr val="8B95A5"/>
+            </a:solidFill>
+            <a:prstDash val="solid"/>
+          </a:ln>
+        </p:spPr>
       </p:sp>
       <p:sp>
         <p:nvSpPr>
@@ -5244,34 +5306,686 @@
         </p:nvSpPr>
         <p:spPr>
           <a:xfrm>
-            <a:off x="1371600" y="3657600"/>
-            <a:ext cx="6400800" cy="731520"/>
-          </a:xfrm>
-          <a:prstGeom prst="rect">
-            <a:avLst/>
-          </a:prstGeom>
-          <a:noFill/>
-          <a:ln/>
-        </p:spPr>
-        <p:txBody>
-          <a:bodyPr wrap="square" lIns="0" tIns="0" rIns="0" bIns="0" rtlCol="0" anchor="t"/>
-          <a:lstStyle/>
-          <a:p>
-            <a:pPr algn="ctr" indent="0" marL="0">
-              <a:buNone/>
-            </a:pPr>
-            <a:r>
-              <a:rPr lang="en-US" sz="2800" dirty="0">
-                <a:solidFill>
-                  <a:srgbClr val="635BFF"/>
+            <a:off x="192024" y="2011680"/>
+            <a:ext cx="1188720" cy="640080"/>
+          </a:xfrm>
+          <a:prstGeom prst="rect">
+            <a:avLst/>
+          </a:prstGeom>
+          <a:noFill/>
+          <a:ln/>
+        </p:spPr>
+        <p:txBody>
+          <a:bodyPr wrap="square" lIns="0" tIns="0" rIns="0" bIns="0" rtlCol="0" anchor="ctr">
+            <a:normAutofit/>
+          </a:bodyPr>
+          <a:lstStyle/>
+          <a:p>
+            <a:pPr algn="ctr" indent="0" marL="0">
+              <a:buNone/>
+            </a:pPr>
+            <a:r>
+              <a:rPr lang="en-US" sz="1100" b="1" dirty="0">
+                <a:solidFill>
+                  <a:srgbClr val="8B95A5"/>
                 </a:solidFill>
                 <a:latin typeface="Verdana" pitchFamily="34" charset="0"/>
                 <a:ea typeface="Verdana" pitchFamily="34" charset="-122"/>
                 <a:cs typeface="Verdana" pitchFamily="34" charset="-120"/>
               </a:rPr>
-              <a:t>It's making many work together</a:t>
-            </a:r>
-            <a:endParaRPr lang="en-US" sz="2800" dirty="0"/>
+              <a:t>Skeptic</a:t>
+            </a:r>
+            <a:endParaRPr lang="en-US" sz="1100" dirty="0"/>
+          </a:p>
+        </p:txBody>
+      </p:sp>
+      <p:sp>
+        <p:nvSpPr>
+          <p:cNvPr id="5" name="Text 3"/>
+          <p:cNvSpPr/>
+          <p:nvPr/>
+        </p:nvSpPr>
+        <p:spPr>
+          <a:xfrm>
+            <a:off x="1380744" y="2011680"/>
+            <a:ext cx="73152" cy="640080"/>
+          </a:xfrm>
+          <a:prstGeom prst="rect">
+            <a:avLst/>
+          </a:prstGeom>
+          <a:noFill/>
+          <a:ln/>
+        </p:spPr>
+        <p:txBody>
+          <a:bodyPr wrap="square" lIns="0" tIns="0" rIns="0" bIns="0" rtlCol="0" anchor="ctr"/>
+          <a:lstStyle/>
+          <a:p>
+            <a:pPr algn="ctr" indent="0" marL="0">
+              <a:buNone/>
+            </a:pPr>
+            <a:r>
+              <a:rPr lang="en-US" sz="1100" dirty="0">
+                <a:solidFill>
+                  <a:srgbClr val="8B95A5"/>
+                </a:solidFill>
+                <a:latin typeface="Verdana" pitchFamily="34" charset="0"/>
+                <a:ea typeface="Verdana" pitchFamily="34" charset="-122"/>
+                <a:cs typeface="Verdana" pitchFamily="34" charset="-120"/>
+              </a:rPr>
+              <a:t>→</a:t>
+            </a:r>
+            <a:endParaRPr lang="en-US" sz="1100" dirty="0"/>
+          </a:p>
+        </p:txBody>
+      </p:sp>
+      <p:sp>
+        <p:nvSpPr>
+          <p:cNvPr id="6" name="Shape 4"/>
+          <p:cNvSpPr/>
+          <p:nvPr/>
+        </p:nvSpPr>
+        <p:spPr>
+          <a:xfrm>
+            <a:off x="1453896" y="2011680"/>
+            <a:ext cx="1188720" cy="640080"/>
+          </a:xfrm>
+          <a:prstGeom prst="roundRect">
+            <a:avLst>
+              <a:gd name="adj" fmla="val 11429"/>
+            </a:avLst>
+          </a:prstGeom>
+          <a:solidFill>
+            <a:srgbClr val="0A2540">
+              <a:alpha val="50000"/>
+            </a:srgbClr>
+          </a:solidFill>
+          <a:ln w="19050">
+            <a:solidFill>
+              <a:srgbClr val="8B95A5"/>
+            </a:solidFill>
+            <a:prstDash val="solid"/>
+          </a:ln>
+        </p:spPr>
+      </p:sp>
+      <p:sp>
+        <p:nvSpPr>
+          <p:cNvPr id="7" name="Text 5"/>
+          <p:cNvSpPr/>
+          <p:nvPr/>
+        </p:nvSpPr>
+        <p:spPr>
+          <a:xfrm>
+            <a:off x="1453896" y="2011680"/>
+            <a:ext cx="1188720" cy="640080"/>
+          </a:xfrm>
+          <a:prstGeom prst="rect">
+            <a:avLst/>
+          </a:prstGeom>
+          <a:noFill/>
+          <a:ln/>
+        </p:spPr>
+        <p:txBody>
+          <a:bodyPr wrap="square" lIns="0" tIns="0" rIns="0" bIns="0" rtlCol="0" anchor="ctr">
+            <a:normAutofit/>
+          </a:bodyPr>
+          <a:lstStyle/>
+          <a:p>
+            <a:pPr algn="ctr" indent="0" marL="0">
+              <a:buNone/>
+            </a:pPr>
+            <a:r>
+              <a:rPr lang="en-US" sz="1100" b="1" dirty="0">
+                <a:solidFill>
+                  <a:srgbClr val="8B95A5"/>
+                </a:solidFill>
+                <a:latin typeface="Verdana" pitchFamily="34" charset="0"/>
+                <a:ea typeface="Verdana" pitchFamily="34" charset="-122"/>
+                <a:cs typeface="Verdana" pitchFamily="34" charset="-120"/>
+              </a:rPr>
+              <a:t>Explorer</a:t>
+            </a:r>
+            <a:endParaRPr lang="en-US" sz="1100" dirty="0"/>
+          </a:p>
+        </p:txBody>
+      </p:sp>
+      <p:sp>
+        <p:nvSpPr>
+          <p:cNvPr id="8" name="Text 6"/>
+          <p:cNvSpPr/>
+          <p:nvPr/>
+        </p:nvSpPr>
+        <p:spPr>
+          <a:xfrm>
+            <a:off x="2642616" y="2011680"/>
+            <a:ext cx="73152" cy="640080"/>
+          </a:xfrm>
+          <a:prstGeom prst="rect">
+            <a:avLst/>
+          </a:prstGeom>
+          <a:noFill/>
+          <a:ln/>
+        </p:spPr>
+        <p:txBody>
+          <a:bodyPr wrap="square" lIns="0" tIns="0" rIns="0" bIns="0" rtlCol="0" anchor="ctr"/>
+          <a:lstStyle/>
+          <a:p>
+            <a:pPr algn="ctr" indent="0" marL="0">
+              <a:buNone/>
+            </a:pPr>
+            <a:r>
+              <a:rPr lang="en-US" sz="1100" dirty="0">
+                <a:solidFill>
+                  <a:srgbClr val="8B95A5"/>
+                </a:solidFill>
+                <a:latin typeface="Verdana" pitchFamily="34" charset="0"/>
+                <a:ea typeface="Verdana" pitchFamily="34" charset="-122"/>
+                <a:cs typeface="Verdana" pitchFamily="34" charset="-120"/>
+              </a:rPr>
+              <a:t>→</a:t>
+            </a:r>
+            <a:endParaRPr lang="en-US" sz="1100" dirty="0"/>
+          </a:p>
+        </p:txBody>
+      </p:sp>
+      <p:sp>
+        <p:nvSpPr>
+          <p:cNvPr id="9" name="Shape 7"/>
+          <p:cNvSpPr/>
+          <p:nvPr/>
+        </p:nvSpPr>
+        <p:spPr>
+          <a:xfrm>
+            <a:off x="2715768" y="2011680"/>
+            <a:ext cx="1188720" cy="640080"/>
+          </a:xfrm>
+          <a:prstGeom prst="roundRect">
+            <a:avLst>
+              <a:gd name="adj" fmla="val 11429"/>
+            </a:avLst>
+          </a:prstGeom>
+          <a:solidFill>
+            <a:srgbClr val="0A2540">
+              <a:alpha val="50000"/>
+            </a:srgbClr>
+          </a:solidFill>
+          <a:ln w="19050">
+            <a:solidFill>
+              <a:srgbClr val="8B95A5"/>
+            </a:solidFill>
+            <a:prstDash val="solid"/>
+          </a:ln>
+        </p:spPr>
+      </p:sp>
+      <p:sp>
+        <p:nvSpPr>
+          <p:cNvPr id="10" name="Text 8"/>
+          <p:cNvSpPr/>
+          <p:nvPr/>
+        </p:nvSpPr>
+        <p:spPr>
+          <a:xfrm>
+            <a:off x="2715768" y="2011680"/>
+            <a:ext cx="1188720" cy="640080"/>
+          </a:xfrm>
+          <a:prstGeom prst="rect">
+            <a:avLst/>
+          </a:prstGeom>
+          <a:noFill/>
+          <a:ln/>
+        </p:spPr>
+        <p:txBody>
+          <a:bodyPr wrap="square" lIns="0" tIns="0" rIns="0" bIns="0" rtlCol="0" anchor="ctr">
+            <a:normAutofit/>
+          </a:bodyPr>
+          <a:lstStyle/>
+          <a:p>
+            <a:pPr algn="ctr" indent="0" marL="0">
+              <a:buNone/>
+            </a:pPr>
+            <a:r>
+              <a:rPr lang="en-US" sz="1100" b="1" dirty="0">
+                <a:solidFill>
+                  <a:srgbClr val="8B95A5"/>
+                </a:solidFill>
+                <a:latin typeface="Verdana" pitchFamily="34" charset="0"/>
+                <a:ea typeface="Verdana" pitchFamily="34" charset="-122"/>
+                <a:cs typeface="Verdana" pitchFamily="34" charset="-120"/>
+              </a:rPr>
+              <a:t>Whisperer</a:t>
+            </a:r>
+            <a:endParaRPr lang="en-US" sz="1100" dirty="0"/>
+          </a:p>
+        </p:txBody>
+      </p:sp>
+      <p:sp>
+        <p:nvSpPr>
+          <p:cNvPr id="11" name="Text 9"/>
+          <p:cNvSpPr/>
+          <p:nvPr/>
+        </p:nvSpPr>
+        <p:spPr>
+          <a:xfrm>
+            <a:off x="3904488" y="2011680"/>
+            <a:ext cx="73152" cy="640080"/>
+          </a:xfrm>
+          <a:prstGeom prst="rect">
+            <a:avLst/>
+          </a:prstGeom>
+          <a:noFill/>
+          <a:ln/>
+        </p:spPr>
+        <p:txBody>
+          <a:bodyPr wrap="square" lIns="0" tIns="0" rIns="0" bIns="0" rtlCol="0" anchor="ctr"/>
+          <a:lstStyle/>
+          <a:p>
+            <a:pPr algn="ctr" indent="0" marL="0">
+              <a:buNone/>
+            </a:pPr>
+            <a:r>
+              <a:rPr lang="en-US" sz="1100" dirty="0">
+                <a:solidFill>
+                  <a:srgbClr val="8B95A5"/>
+                </a:solidFill>
+                <a:latin typeface="Verdana" pitchFamily="34" charset="0"/>
+                <a:ea typeface="Verdana" pitchFamily="34" charset="-122"/>
+                <a:cs typeface="Verdana" pitchFamily="34" charset="-120"/>
+              </a:rPr>
+              <a:t>→</a:t>
+            </a:r>
+            <a:endParaRPr lang="en-US" sz="1100" dirty="0"/>
+          </a:p>
+        </p:txBody>
+      </p:sp>
+      <p:sp>
+        <p:nvSpPr>
+          <p:cNvPr id="12" name="Shape 10"/>
+          <p:cNvSpPr/>
+          <p:nvPr/>
+        </p:nvSpPr>
+        <p:spPr>
+          <a:xfrm>
+            <a:off x="3977640" y="2011680"/>
+            <a:ext cx="1188720" cy="640080"/>
+          </a:xfrm>
+          <a:prstGeom prst="roundRect">
+            <a:avLst>
+              <a:gd name="adj" fmla="val 11429"/>
+            </a:avLst>
+          </a:prstGeom>
+          <a:solidFill>
+            <a:srgbClr val="635BFF"/>
+          </a:solidFill>
+          <a:ln w="19050">
+            <a:solidFill>
+              <a:srgbClr val="635BFF"/>
+            </a:solidFill>
+            <a:prstDash val="solid"/>
+          </a:ln>
+        </p:spPr>
+      </p:sp>
+      <p:sp>
+        <p:nvSpPr>
+          <p:cNvPr id="13" name="Text 11"/>
+          <p:cNvSpPr/>
+          <p:nvPr/>
+        </p:nvSpPr>
+        <p:spPr>
+          <a:xfrm>
+            <a:off x="3977640" y="2011680"/>
+            <a:ext cx="1188720" cy="640080"/>
+          </a:xfrm>
+          <a:prstGeom prst="rect">
+            <a:avLst/>
+          </a:prstGeom>
+          <a:noFill/>
+          <a:ln/>
+        </p:spPr>
+        <p:txBody>
+          <a:bodyPr wrap="square" lIns="0" tIns="0" rIns="0" bIns="0" rtlCol="0" anchor="ctr">
+            <a:normAutofit/>
+          </a:bodyPr>
+          <a:lstStyle/>
+          <a:p>
+            <a:pPr algn="ctr" indent="0" marL="0">
+              <a:buNone/>
+            </a:pPr>
+            <a:r>
+              <a:rPr lang="en-US" sz="1100" b="1" dirty="0">
+                <a:solidFill>
+                  <a:srgbClr val="FFFFFF"/>
+                </a:solidFill>
+                <a:latin typeface="Verdana" pitchFamily="34" charset="0"/>
+                <a:ea typeface="Verdana" pitchFamily="34" charset="-122"/>
+                <a:cs typeface="Verdana" pitchFamily="34" charset="-120"/>
+              </a:rPr>
+              <a:t>Strategist</a:t>
+            </a:r>
+            <a:endParaRPr lang="en-US" sz="1100" dirty="0"/>
+          </a:p>
+        </p:txBody>
+      </p:sp>
+      <p:sp>
+        <p:nvSpPr>
+          <p:cNvPr id="14" name="Text 12"/>
+          <p:cNvSpPr/>
+          <p:nvPr/>
+        </p:nvSpPr>
+        <p:spPr>
+          <a:xfrm>
+            <a:off x="5166360" y="2011680"/>
+            <a:ext cx="73152" cy="640080"/>
+          </a:xfrm>
+          <a:prstGeom prst="rect">
+            <a:avLst/>
+          </a:prstGeom>
+          <a:noFill/>
+          <a:ln/>
+        </p:spPr>
+        <p:txBody>
+          <a:bodyPr wrap="square" lIns="0" tIns="0" rIns="0" bIns="0" rtlCol="0" anchor="ctr"/>
+          <a:lstStyle/>
+          <a:p>
+            <a:pPr algn="ctr" indent="0" marL="0">
+              <a:buNone/>
+            </a:pPr>
+            <a:r>
+              <a:rPr lang="en-US" sz="1100" dirty="0">
+                <a:solidFill>
+                  <a:srgbClr val="8B95A5"/>
+                </a:solidFill>
+                <a:latin typeface="Verdana" pitchFamily="34" charset="0"/>
+                <a:ea typeface="Verdana" pitchFamily="34" charset="-122"/>
+                <a:cs typeface="Verdana" pitchFamily="34" charset="-120"/>
+              </a:rPr>
+              <a:t>→</a:t>
+            </a:r>
+            <a:endParaRPr lang="en-US" sz="1100" dirty="0"/>
+          </a:p>
+        </p:txBody>
+      </p:sp>
+      <p:sp>
+        <p:nvSpPr>
+          <p:cNvPr id="15" name="Shape 13"/>
+          <p:cNvSpPr/>
+          <p:nvPr/>
+        </p:nvSpPr>
+        <p:spPr>
+          <a:xfrm>
+            <a:off x="5239512" y="2011680"/>
+            <a:ext cx="1188720" cy="640080"/>
+          </a:xfrm>
+          <a:prstGeom prst="roundRect">
+            <a:avLst>
+              <a:gd name="adj" fmla="val 11429"/>
+            </a:avLst>
+          </a:prstGeom>
+          <a:solidFill>
+            <a:srgbClr val="635BFF"/>
+          </a:solidFill>
+          <a:ln w="19050">
+            <a:solidFill>
+              <a:srgbClr val="635BFF"/>
+            </a:solidFill>
+            <a:prstDash val="solid"/>
+          </a:ln>
+        </p:spPr>
+      </p:sp>
+      <p:sp>
+        <p:nvSpPr>
+          <p:cNvPr id="16" name="Text 14"/>
+          <p:cNvSpPr/>
+          <p:nvPr/>
+        </p:nvSpPr>
+        <p:spPr>
+          <a:xfrm>
+            <a:off x="5239512" y="2011680"/>
+            <a:ext cx="1188720" cy="640080"/>
+          </a:xfrm>
+          <a:prstGeom prst="rect">
+            <a:avLst/>
+          </a:prstGeom>
+          <a:noFill/>
+          <a:ln/>
+        </p:spPr>
+        <p:txBody>
+          <a:bodyPr wrap="square" lIns="0" tIns="0" rIns="0" bIns="0" rtlCol="0" anchor="ctr">
+            <a:normAutofit/>
+          </a:bodyPr>
+          <a:lstStyle/>
+          <a:p>
+            <a:pPr algn="ctr" indent="0" marL="0">
+              <a:buNone/>
+            </a:pPr>
+            <a:r>
+              <a:rPr lang="en-US" sz="1100" b="1" dirty="0">
+                <a:solidFill>
+                  <a:srgbClr val="FFFFFF"/>
+                </a:solidFill>
+                <a:latin typeface="Verdana" pitchFamily="34" charset="0"/>
+                <a:ea typeface="Verdana" pitchFamily="34" charset="-122"/>
+                <a:cs typeface="Verdana" pitchFamily="34" charset="-120"/>
+              </a:rPr>
+              <a:t>Operator</a:t>
+            </a:r>
+            <a:endParaRPr lang="en-US" sz="1100" dirty="0"/>
+          </a:p>
+        </p:txBody>
+      </p:sp>
+      <p:sp>
+        <p:nvSpPr>
+          <p:cNvPr id="17" name="Text 15"/>
+          <p:cNvSpPr/>
+          <p:nvPr/>
+        </p:nvSpPr>
+        <p:spPr>
+          <a:xfrm>
+            <a:off x="6428232" y="2011680"/>
+            <a:ext cx="73152" cy="640080"/>
+          </a:xfrm>
+          <a:prstGeom prst="rect">
+            <a:avLst/>
+          </a:prstGeom>
+          <a:noFill/>
+          <a:ln/>
+        </p:spPr>
+        <p:txBody>
+          <a:bodyPr wrap="square" lIns="0" tIns="0" rIns="0" bIns="0" rtlCol="0" anchor="ctr"/>
+          <a:lstStyle/>
+          <a:p>
+            <a:pPr algn="ctr" indent="0" marL="0">
+              <a:buNone/>
+            </a:pPr>
+            <a:r>
+              <a:rPr lang="en-US" sz="1100" dirty="0">
+                <a:solidFill>
+                  <a:srgbClr val="8B95A5"/>
+                </a:solidFill>
+                <a:latin typeface="Verdana" pitchFamily="34" charset="0"/>
+                <a:ea typeface="Verdana" pitchFamily="34" charset="-122"/>
+                <a:cs typeface="Verdana" pitchFamily="34" charset="-120"/>
+              </a:rPr>
+              <a:t>→</a:t>
+            </a:r>
+            <a:endParaRPr lang="en-US" sz="1100" dirty="0"/>
+          </a:p>
+        </p:txBody>
+      </p:sp>
+      <p:sp>
+        <p:nvSpPr>
+          <p:cNvPr id="18" name="Shape 16"/>
+          <p:cNvSpPr/>
+          <p:nvPr/>
+        </p:nvSpPr>
+        <p:spPr>
+          <a:xfrm>
+            <a:off x="6501384" y="2011680"/>
+            <a:ext cx="1188720" cy="640080"/>
+          </a:xfrm>
+          <a:prstGeom prst="roundRect">
+            <a:avLst>
+              <a:gd name="adj" fmla="val 11429"/>
+            </a:avLst>
+          </a:prstGeom>
+          <a:solidFill>
+            <a:srgbClr val="0A2540">
+              <a:alpha val="50000"/>
+            </a:srgbClr>
+          </a:solidFill>
+          <a:ln w="19050">
+            <a:solidFill>
+              <a:srgbClr val="8B95A5"/>
+            </a:solidFill>
+            <a:prstDash val="solid"/>
+          </a:ln>
+        </p:spPr>
+      </p:sp>
+      <p:sp>
+        <p:nvSpPr>
+          <p:cNvPr id="19" name="Text 17"/>
+          <p:cNvSpPr/>
+          <p:nvPr/>
+        </p:nvSpPr>
+        <p:spPr>
+          <a:xfrm>
+            <a:off x="6501384" y="2011680"/>
+            <a:ext cx="1188720" cy="640080"/>
+          </a:xfrm>
+          <a:prstGeom prst="rect">
+            <a:avLst/>
+          </a:prstGeom>
+          <a:noFill/>
+          <a:ln/>
+        </p:spPr>
+        <p:txBody>
+          <a:bodyPr wrap="square" lIns="0" tIns="0" rIns="0" bIns="0" rtlCol="0" anchor="ctr">
+            <a:normAutofit/>
+          </a:bodyPr>
+          <a:lstStyle/>
+          <a:p>
+            <a:pPr algn="ctr" indent="0" marL="0">
+              <a:buNone/>
+            </a:pPr>
+            <a:r>
+              <a:rPr lang="en-US" sz="1100" b="1" dirty="0">
+                <a:solidFill>
+                  <a:srgbClr val="8B95A5"/>
+                </a:solidFill>
+                <a:latin typeface="Verdana" pitchFamily="34" charset="0"/>
+                <a:ea typeface="Verdana" pitchFamily="34" charset="-122"/>
+                <a:cs typeface="Verdana" pitchFamily="34" charset="-120"/>
+              </a:rPr>
+              <a:t>Orchestrator</a:t>
+            </a:r>
+            <a:endParaRPr lang="en-US" sz="1100" dirty="0"/>
+          </a:p>
+        </p:txBody>
+      </p:sp>
+      <p:sp>
+        <p:nvSpPr>
+          <p:cNvPr id="20" name="Text 18"/>
+          <p:cNvSpPr/>
+          <p:nvPr/>
+        </p:nvSpPr>
+        <p:spPr>
+          <a:xfrm>
+            <a:off x="7690104" y="2011680"/>
+            <a:ext cx="73152" cy="640080"/>
+          </a:xfrm>
+          <a:prstGeom prst="rect">
+            <a:avLst/>
+          </a:prstGeom>
+          <a:noFill/>
+          <a:ln/>
+        </p:spPr>
+        <p:txBody>
+          <a:bodyPr wrap="square" lIns="0" tIns="0" rIns="0" bIns="0" rtlCol="0" anchor="ctr"/>
+          <a:lstStyle/>
+          <a:p>
+            <a:pPr algn="ctr" indent="0" marL="0">
+              <a:buNone/>
+            </a:pPr>
+            <a:r>
+              <a:rPr lang="en-US" sz="1100" dirty="0">
+                <a:solidFill>
+                  <a:srgbClr val="8B95A5"/>
+                </a:solidFill>
+                <a:latin typeface="Verdana" pitchFamily="34" charset="0"/>
+                <a:ea typeface="Verdana" pitchFamily="34" charset="-122"/>
+                <a:cs typeface="Verdana" pitchFamily="34" charset="-120"/>
+              </a:rPr>
+              <a:t>→</a:t>
+            </a:r>
+            <a:endParaRPr lang="en-US" sz="1100" dirty="0"/>
+          </a:p>
+        </p:txBody>
+      </p:sp>
+      <p:sp>
+        <p:nvSpPr>
+          <p:cNvPr id="21" name="Shape 19"/>
+          <p:cNvSpPr/>
+          <p:nvPr/>
+        </p:nvSpPr>
+        <p:spPr>
+          <a:xfrm>
+            <a:off x="7763256" y="2011680"/>
+            <a:ext cx="1188720" cy="640080"/>
+          </a:xfrm>
+          <a:prstGeom prst="roundRect">
+            <a:avLst>
+              <a:gd name="adj" fmla="val 11429"/>
+            </a:avLst>
+          </a:prstGeom>
+          <a:solidFill>
+            <a:srgbClr val="0A2540">
+              <a:alpha val="50000"/>
+            </a:srgbClr>
+          </a:solidFill>
+          <a:ln w="19050">
+            <a:solidFill>
+              <a:srgbClr val="8B95A5"/>
+            </a:solidFill>
+            <a:prstDash val="dash"/>
+          </a:ln>
+        </p:spPr>
+      </p:sp>
+      <p:sp>
+        <p:nvSpPr>
+          <p:cNvPr id="22" name="Text 20"/>
+          <p:cNvSpPr/>
+          <p:nvPr/>
+        </p:nvSpPr>
+        <p:spPr>
+          <a:xfrm>
+            <a:off x="7763256" y="2011680"/>
+            <a:ext cx="1188720" cy="640080"/>
+          </a:xfrm>
+          <a:prstGeom prst="rect">
+            <a:avLst/>
+          </a:prstGeom>
+          <a:noFill/>
+          <a:ln/>
+        </p:spPr>
+        <p:txBody>
+          <a:bodyPr wrap="square" lIns="0" tIns="0" rIns="0" bIns="0" rtlCol="0" anchor="ctr">
+            <a:normAutofit/>
+          </a:bodyPr>
+          <a:lstStyle/>
+          <a:p>
+            <a:pPr algn="ctr" indent="0" marL="0">
+              <a:buNone/>
+            </a:pPr>
+            <a:r>
+              <a:rPr lang="en-US" sz="1100" b="1" dirty="0">
+                <a:solidFill>
+                  <a:srgbClr val="8B95A5"/>
+                </a:solidFill>
+                <a:latin typeface="Verdana" pitchFamily="34" charset="0"/>
+                <a:ea typeface="Verdana" pitchFamily="34" charset="-122"/>
+                <a:cs typeface="Verdana" pitchFamily="34" charset="-120"/>
+              </a:rPr>
+              <a:t>Builder</a:t>
+            </a:r>
+            <a:endParaRPr lang="en-US" sz="1100" dirty="0"/>
           </a:p>
         </p:txBody>
       </p:sp>
@@ -5337,8 +6051,8 @@
         </p:nvSpPr>
         <p:spPr>
           <a:xfrm>
-            <a:off x="914400" y="914400"/>
-            <a:ext cx="7315200" cy="3291840"/>
+            <a:off x="914400" y="1097280"/>
+            <a:ext cx="7315200" cy="2560320"/>
           </a:xfrm>
           <a:prstGeom prst="rect">
             <a:avLst/>
@@ -5354,66 +6068,71 @@
               <a:buNone/>
             </a:pPr>
             <a:r>
-              <a:rPr lang="en-US" sz="2800" b="1" dirty="0">
-                <a:solidFill>
-                  <a:srgbClr val="635BFF"/>
+              <a:rPr lang="en-US" sz="4400" b="1" dirty="0">
+                <a:solidFill>
+                  <a:srgbClr val="FFFFFF"/>
                 </a:solidFill>
                 <a:latin typeface="Georgia" pitchFamily="34" charset="0"/>
                 <a:ea typeface="Georgia" pitchFamily="34" charset="-122"/>
                 <a:cs typeface="Georgia" pitchFamily="34" charset="-120"/>
               </a:rPr>
-              <a:t>What are the phases of this task?</a:t>
-            </a:r>
-            <a:endParaRPr lang="en-US" sz="2800" dirty="0"/>
-          </a:p>
-          <a:p>
-            <a:pPr algn="ctr" indent="0" marL="0">
-              <a:buNone/>
-            </a:pPr>
-            <a:r>
-              <a:rPr lang="en-US" sz="2200" i="1" dirty="0">
-                <a:solidFill>
-                  <a:srgbClr val="8B95A5"/>
+              <a:t>The trick isn't making</a:t>
+            </a:r>
+            <a:endParaRPr lang="en-US" sz="4400" dirty="0"/>
+          </a:p>
+          <a:p>
+            <a:pPr algn="ctr" indent="0" marL="0">
+              <a:buNone/>
+            </a:pPr>
+            <a:r>
+              <a:rPr lang="en-US" sz="4400" b="1" dirty="0">
+                <a:solidFill>
+                  <a:srgbClr val="FFFFFF"/>
+                </a:solidFill>
+                <a:latin typeface="Georgia" pitchFamily="34" charset="0"/>
+                <a:ea typeface="Georgia" pitchFamily="34" charset="-122"/>
+                <a:cs typeface="Georgia" pitchFamily="34" charset="-120"/>
+              </a:rPr>
+              <a:t>one AI smarter</a:t>
+            </a:r>
+            <a:endParaRPr lang="en-US" sz="4400" dirty="0"/>
+          </a:p>
+        </p:txBody>
+      </p:sp>
+      <p:sp>
+        <p:nvSpPr>
+          <p:cNvPr id="4" name="Text 2"/>
+          <p:cNvSpPr/>
+          <p:nvPr/>
+        </p:nvSpPr>
+        <p:spPr>
+          <a:xfrm>
+            <a:off x="1371600" y="3657600"/>
+            <a:ext cx="6400800" cy="731520"/>
+          </a:xfrm>
+          <a:prstGeom prst="rect">
+            <a:avLst/>
+          </a:prstGeom>
+          <a:noFill/>
+          <a:ln/>
+        </p:spPr>
+        <p:txBody>
+          <a:bodyPr wrap="square" lIns="0" tIns="0" rIns="0" bIns="0" rtlCol="0" anchor="t"/>
+          <a:lstStyle/>
+          <a:p>
+            <a:pPr algn="ctr" indent="0" marL="0">
+              <a:buNone/>
+            </a:pPr>
+            <a:r>
+              <a:rPr lang="en-US" sz="2800" dirty="0">
+                <a:solidFill>
+                  <a:srgbClr val="635BFF"/>
                 </a:solidFill>
                 <a:latin typeface="Verdana" pitchFamily="34" charset="0"/>
                 <a:ea typeface="Verdana" pitchFamily="34" charset="-122"/>
                 <a:cs typeface="Verdana" pitchFamily="34" charset="-120"/>
               </a:rPr>
-              <a:t>What does each phase produce?</a:t>
-            </a:r>
-            <a:endParaRPr lang="en-US" sz="2800" dirty="0"/>
-          </a:p>
-          <a:p>
-            <a:pPr algn="ctr" indent="0" marL="0">
-              <a:buNone/>
-            </a:pPr>
-            <a:r>
-              <a:rPr lang="en-US" sz="2200" i="1" dirty="0">
-                <a:solidFill>
-                  <a:srgbClr val="8B95A5"/>
-                </a:solidFill>
-                <a:latin typeface="Verdana" pitchFamily="34" charset="0"/>
-                <a:ea typeface="Verdana" pitchFamily="34" charset="-122"/>
-                <a:cs typeface="Verdana" pitchFamily="34" charset="-120"/>
-              </a:rPr>
-              <a:t>What does the next phase need</a:t>
-            </a:r>
-            <a:endParaRPr lang="en-US" sz="2800" dirty="0"/>
-          </a:p>
-          <a:p>
-            <a:pPr algn="ctr" indent="0" marL="0">
-              <a:buNone/>
-            </a:pPr>
-            <a:r>
-              <a:rPr lang="en-US" sz="2200" i="1" dirty="0">
-                <a:solidFill>
-                  <a:srgbClr val="8B95A5"/>
-                </a:solidFill>
-                <a:latin typeface="Verdana" pitchFamily="34" charset="0"/>
-                <a:ea typeface="Verdana" pitchFamily="34" charset="-122"/>
-                <a:cs typeface="Verdana" pitchFamily="34" charset="-120"/>
-              </a:rPr>
-              <a:t>from the previous one?</a:t>
+              <a:t>It's making many work together</a:t>
             </a:r>
             <a:endParaRPr lang="en-US" sz="2800" dirty="0"/>
           </a:p>
@@ -5475,41 +6194,14 @@
       </p:sp>
       <p:sp>
         <p:nvSpPr>
-          <p:cNvPr id="3" name="Shape 1"/>
-          <p:cNvSpPr/>
-          <p:nvPr/>
-        </p:nvSpPr>
-        <p:spPr>
-          <a:xfrm>
-            <a:off x="457200" y="2011680"/>
-            <a:ext cx="1645920" cy="822960"/>
-          </a:xfrm>
-          <a:prstGeom prst="roundRect">
-            <a:avLst>
-              <a:gd name="adj" fmla="val 11111"/>
-            </a:avLst>
-          </a:prstGeom>
-          <a:solidFill>
-            <a:srgbClr val="0A2540"/>
-          </a:solidFill>
-          <a:ln w="19050">
-            <a:solidFill>
-              <a:srgbClr val="8B95A5"/>
-            </a:solidFill>
-            <a:prstDash val="solid"/>
-          </a:ln>
-        </p:spPr>
-      </p:sp>
-      <p:sp>
-        <p:nvSpPr>
-          <p:cNvPr id="4" name="Text 2"/>
-          <p:cNvSpPr/>
-          <p:nvPr/>
-        </p:nvSpPr>
-        <p:spPr>
-          <a:xfrm>
-            <a:off x="457200" y="2011680"/>
-            <a:ext cx="1645920" cy="822960"/>
+          <p:cNvPr id="3" name="Text 1"/>
+          <p:cNvSpPr/>
+          <p:nvPr/>
+        </p:nvSpPr>
+        <p:spPr>
+          <a:xfrm>
+            <a:off x="914400" y="914400"/>
+            <a:ext cx="7315200" cy="3291840"/>
           </a:xfrm>
           <a:prstGeom prst="rect">
             <a:avLst/>
@@ -5525,372 +6217,68 @@
               <a:buNone/>
             </a:pPr>
             <a:r>
-              <a:rPr lang="en-US" sz="1800" b="1" dirty="0">
-                <a:solidFill>
-                  <a:srgbClr val="EDEDED"/>
+              <a:rPr lang="en-US" sz="2800" b="1" dirty="0">
+                <a:solidFill>
+                  <a:srgbClr val="635BFF"/>
+                </a:solidFill>
+                <a:latin typeface="Georgia" pitchFamily="34" charset="0"/>
+                <a:ea typeface="Georgia" pitchFamily="34" charset="-122"/>
+                <a:cs typeface="Georgia" pitchFamily="34" charset="-120"/>
+              </a:rPr>
+              <a:t>What are the phases of this task?</a:t>
+            </a:r>
+            <a:endParaRPr lang="en-US" sz="2800" dirty="0"/>
+          </a:p>
+          <a:p>
+            <a:pPr algn="ctr" indent="0" marL="0">
+              <a:buNone/>
+            </a:pPr>
+            <a:r>
+              <a:rPr lang="en-US" sz="2200" i="1" dirty="0">
+                <a:solidFill>
+                  <a:srgbClr val="8B95A5"/>
                 </a:solidFill>
                 <a:latin typeface="Verdana" pitchFamily="34" charset="0"/>
                 <a:ea typeface="Verdana" pitchFamily="34" charset="-122"/>
                 <a:cs typeface="Verdana" pitchFamily="34" charset="-120"/>
               </a:rPr>
-              <a:t>Research</a:t>
-            </a:r>
-            <a:endParaRPr lang="en-US" sz="1800" dirty="0"/>
-          </a:p>
-        </p:txBody>
-      </p:sp>
-      <p:sp>
-        <p:nvSpPr>
-          <p:cNvPr id="5" name="Text 3"/>
-          <p:cNvSpPr/>
-          <p:nvPr/>
-        </p:nvSpPr>
-        <p:spPr>
-          <a:xfrm>
-            <a:off x="2103120" y="2011680"/>
-            <a:ext cx="548640" cy="822960"/>
-          </a:xfrm>
-          <a:prstGeom prst="rect">
-            <a:avLst/>
-          </a:prstGeom>
-          <a:noFill/>
-          <a:ln/>
-        </p:spPr>
-        <p:txBody>
-          <a:bodyPr wrap="square" lIns="0" tIns="0" rIns="0" bIns="0" rtlCol="0" anchor="ctr">
-            <a:normAutofit/>
-          </a:bodyPr>
-          <a:lstStyle/>
-          <a:p>
-            <a:pPr algn="ctr" indent="0" marL="0">
-              <a:buNone/>
-            </a:pPr>
-            <a:r>
-              <a:rPr lang="en-US" sz="2800" b="1" dirty="0">
-                <a:solidFill>
-                  <a:srgbClr val="635BFF"/>
+              <a:t>What does each phase produce?</a:t>
+            </a:r>
+            <a:endParaRPr lang="en-US" sz="2800" dirty="0"/>
+          </a:p>
+          <a:p>
+            <a:pPr algn="ctr" indent="0" marL="0">
+              <a:buNone/>
+            </a:pPr>
+            <a:r>
+              <a:rPr lang="en-US" sz="2200" i="1" dirty="0">
+                <a:solidFill>
+                  <a:srgbClr val="8B95A5"/>
                 </a:solidFill>
                 <a:latin typeface="Verdana" pitchFamily="34" charset="0"/>
                 <a:ea typeface="Verdana" pitchFamily="34" charset="-122"/>
                 <a:cs typeface="Verdana" pitchFamily="34" charset="-120"/>
               </a:rPr>
-              <a:t>→</a:t>
+              <a:t>What does the next phase need</a:t>
             </a:r>
             <a:endParaRPr lang="en-US" sz="2800" dirty="0"/>
           </a:p>
-        </p:txBody>
-      </p:sp>
-      <p:sp>
-        <p:nvSpPr>
-          <p:cNvPr id="6" name="Shape 4"/>
-          <p:cNvSpPr/>
-          <p:nvPr/>
-        </p:nvSpPr>
-        <p:spPr>
-          <a:xfrm>
-            <a:off x="2651760" y="2011680"/>
-            <a:ext cx="1645920" cy="822960"/>
-          </a:xfrm>
-          <a:prstGeom prst="roundRect">
-            <a:avLst>
-              <a:gd name="adj" fmla="val 11111"/>
-            </a:avLst>
-          </a:prstGeom>
-          <a:solidFill>
-            <a:srgbClr val="0A2540"/>
-          </a:solidFill>
-          <a:ln w="19050">
-            <a:solidFill>
-              <a:srgbClr val="8B95A5"/>
-            </a:solidFill>
-            <a:prstDash val="solid"/>
-          </a:ln>
-        </p:spPr>
-      </p:sp>
-      <p:sp>
-        <p:nvSpPr>
-          <p:cNvPr id="7" name="Text 5"/>
-          <p:cNvSpPr/>
-          <p:nvPr/>
-        </p:nvSpPr>
-        <p:spPr>
-          <a:xfrm>
-            <a:off x="2651760" y="2011680"/>
-            <a:ext cx="1645920" cy="822960"/>
-          </a:xfrm>
-          <a:prstGeom prst="rect">
-            <a:avLst/>
-          </a:prstGeom>
-          <a:noFill/>
-          <a:ln/>
-        </p:spPr>
-        <p:txBody>
-          <a:bodyPr wrap="square" lIns="0" tIns="0" rIns="0" bIns="0" rtlCol="0" anchor="ctr"/>
-          <a:lstStyle/>
-          <a:p>
-            <a:pPr algn="ctr" indent="0" marL="0">
-              <a:buNone/>
-            </a:pPr>
-            <a:r>
-              <a:rPr lang="en-US" sz="1800" b="1" dirty="0">
-                <a:solidFill>
-                  <a:srgbClr val="EDEDED"/>
+          <a:p>
+            <a:pPr algn="ctr" indent="0" marL="0">
+              <a:buNone/>
+            </a:pPr>
+            <a:r>
+              <a:rPr lang="en-US" sz="2200" i="1" dirty="0">
+                <a:solidFill>
+                  <a:srgbClr val="8B95A5"/>
                 </a:solidFill>
                 <a:latin typeface="Verdana" pitchFamily="34" charset="0"/>
                 <a:ea typeface="Verdana" pitchFamily="34" charset="-122"/>
                 <a:cs typeface="Verdana" pitchFamily="34" charset="-120"/>
               </a:rPr>
-              <a:t>Draft</a:t>
-            </a:r>
-            <a:endParaRPr lang="en-US" sz="1800" dirty="0"/>
-          </a:p>
-        </p:txBody>
-      </p:sp>
-      <p:sp>
-        <p:nvSpPr>
-          <p:cNvPr id="8" name="Text 6"/>
-          <p:cNvSpPr/>
-          <p:nvPr/>
-        </p:nvSpPr>
-        <p:spPr>
-          <a:xfrm>
-            <a:off x="4297680" y="2011680"/>
-            <a:ext cx="548640" cy="822960"/>
-          </a:xfrm>
-          <a:prstGeom prst="rect">
-            <a:avLst/>
-          </a:prstGeom>
-          <a:noFill/>
-          <a:ln/>
-        </p:spPr>
-        <p:txBody>
-          <a:bodyPr wrap="square" lIns="0" tIns="0" rIns="0" bIns="0" rtlCol="0" anchor="ctr">
-            <a:normAutofit/>
-          </a:bodyPr>
-          <a:lstStyle/>
-          <a:p>
-            <a:pPr algn="ctr" indent="0" marL="0">
-              <a:buNone/>
-            </a:pPr>
-            <a:r>
-              <a:rPr lang="en-US" sz="2800" b="1" dirty="0">
-                <a:solidFill>
-                  <a:srgbClr val="635BFF"/>
-                </a:solidFill>
-                <a:latin typeface="Verdana" pitchFamily="34" charset="0"/>
-                <a:ea typeface="Verdana" pitchFamily="34" charset="-122"/>
-                <a:cs typeface="Verdana" pitchFamily="34" charset="-120"/>
-              </a:rPr>
-              <a:t>→</a:t>
+              <a:t>from the previous one?</a:t>
             </a:r>
             <a:endParaRPr lang="en-US" sz="2800" dirty="0"/>
-          </a:p>
-        </p:txBody>
-      </p:sp>
-      <p:sp>
-        <p:nvSpPr>
-          <p:cNvPr id="9" name="Shape 7"/>
-          <p:cNvSpPr/>
-          <p:nvPr/>
-        </p:nvSpPr>
-        <p:spPr>
-          <a:xfrm>
-            <a:off x="4846320" y="2011680"/>
-            <a:ext cx="1645920" cy="822960"/>
-          </a:xfrm>
-          <a:prstGeom prst="roundRect">
-            <a:avLst>
-              <a:gd name="adj" fmla="val 11111"/>
-            </a:avLst>
-          </a:prstGeom>
-          <a:solidFill>
-            <a:srgbClr val="0A2540"/>
-          </a:solidFill>
-          <a:ln w="19050">
-            <a:solidFill>
-              <a:srgbClr val="8B95A5"/>
-            </a:solidFill>
-            <a:prstDash val="solid"/>
-          </a:ln>
-        </p:spPr>
-      </p:sp>
-      <p:sp>
-        <p:nvSpPr>
-          <p:cNvPr id="10" name="Text 8"/>
-          <p:cNvSpPr/>
-          <p:nvPr/>
-        </p:nvSpPr>
-        <p:spPr>
-          <a:xfrm>
-            <a:off x="4846320" y="2011680"/>
-            <a:ext cx="1645920" cy="822960"/>
-          </a:xfrm>
-          <a:prstGeom prst="rect">
-            <a:avLst/>
-          </a:prstGeom>
-          <a:noFill/>
-          <a:ln/>
-        </p:spPr>
-        <p:txBody>
-          <a:bodyPr wrap="square" lIns="0" tIns="0" rIns="0" bIns="0" rtlCol="0" anchor="ctr"/>
-          <a:lstStyle/>
-          <a:p>
-            <a:pPr algn="ctr" indent="0" marL="0">
-              <a:buNone/>
-            </a:pPr>
-            <a:r>
-              <a:rPr lang="en-US" sz="1800" b="1" dirty="0">
-                <a:solidFill>
-                  <a:srgbClr val="EDEDED"/>
-                </a:solidFill>
-                <a:latin typeface="Verdana" pitchFamily="34" charset="0"/>
-                <a:ea typeface="Verdana" pitchFamily="34" charset="-122"/>
-                <a:cs typeface="Verdana" pitchFamily="34" charset="-120"/>
-              </a:rPr>
-              <a:t>Review</a:t>
-            </a:r>
-            <a:endParaRPr lang="en-US" sz="1800" dirty="0"/>
-          </a:p>
-        </p:txBody>
-      </p:sp>
-      <p:sp>
-        <p:nvSpPr>
-          <p:cNvPr id="11" name="Text 9"/>
-          <p:cNvSpPr/>
-          <p:nvPr/>
-        </p:nvSpPr>
-        <p:spPr>
-          <a:xfrm>
-            <a:off x="6492240" y="2011680"/>
-            <a:ext cx="548640" cy="822960"/>
-          </a:xfrm>
-          <a:prstGeom prst="rect">
-            <a:avLst/>
-          </a:prstGeom>
-          <a:noFill/>
-          <a:ln/>
-        </p:spPr>
-        <p:txBody>
-          <a:bodyPr wrap="square" lIns="0" tIns="0" rIns="0" bIns="0" rtlCol="0" anchor="ctr">
-            <a:normAutofit/>
-          </a:bodyPr>
-          <a:lstStyle/>
-          <a:p>
-            <a:pPr algn="ctr" indent="0" marL="0">
-              <a:buNone/>
-            </a:pPr>
-            <a:r>
-              <a:rPr lang="en-US" sz="2800" b="1" dirty="0">
-                <a:solidFill>
-                  <a:srgbClr val="635BFF"/>
-                </a:solidFill>
-                <a:latin typeface="Verdana" pitchFamily="34" charset="0"/>
-                <a:ea typeface="Verdana" pitchFamily="34" charset="-122"/>
-                <a:cs typeface="Verdana" pitchFamily="34" charset="-120"/>
-              </a:rPr>
-              <a:t>→</a:t>
-            </a:r>
-            <a:endParaRPr lang="en-US" sz="2800" dirty="0"/>
-          </a:p>
-        </p:txBody>
-      </p:sp>
-      <p:sp>
-        <p:nvSpPr>
-          <p:cNvPr id="12" name="Shape 10"/>
-          <p:cNvSpPr/>
-          <p:nvPr/>
-        </p:nvSpPr>
-        <p:spPr>
-          <a:xfrm>
-            <a:off x="7040880" y="2011680"/>
-            <a:ext cx="1645920" cy="822960"/>
-          </a:xfrm>
-          <a:prstGeom prst="roundRect">
-            <a:avLst>
-              <a:gd name="adj" fmla="val 11111"/>
-            </a:avLst>
-          </a:prstGeom>
-          <a:solidFill>
-            <a:srgbClr val="635BFF"/>
-          </a:solidFill>
-          <a:ln/>
-        </p:spPr>
-      </p:sp>
-      <p:sp>
-        <p:nvSpPr>
-          <p:cNvPr id="13" name="Text 11"/>
-          <p:cNvSpPr/>
-          <p:nvPr/>
-        </p:nvSpPr>
-        <p:spPr>
-          <a:xfrm>
-            <a:off x="7040880" y="2011680"/>
-            <a:ext cx="1645920" cy="822960"/>
-          </a:xfrm>
-          <a:prstGeom prst="rect">
-            <a:avLst/>
-          </a:prstGeom>
-          <a:noFill/>
-          <a:ln/>
-        </p:spPr>
-        <p:txBody>
-          <a:bodyPr wrap="square" lIns="0" tIns="0" rIns="0" bIns="0" rtlCol="0" anchor="ctr"/>
-          <a:lstStyle/>
-          <a:p>
-            <a:pPr algn="ctr" indent="0" marL="0">
-              <a:buNone/>
-            </a:pPr>
-            <a:r>
-              <a:rPr lang="en-US" sz="1800" b="1" dirty="0">
-                <a:solidFill>
-                  <a:srgbClr val="FFFFFF"/>
-                </a:solidFill>
-                <a:latin typeface="Verdana" pitchFamily="34" charset="0"/>
-                <a:ea typeface="Verdana" pitchFamily="34" charset="-122"/>
-                <a:cs typeface="Verdana" pitchFamily="34" charset="-120"/>
-              </a:rPr>
-              <a:t>You</a:t>
-            </a:r>
-            <a:endParaRPr lang="en-US" sz="1800" dirty="0"/>
-          </a:p>
-        </p:txBody>
-      </p:sp>
-      <p:sp>
-        <p:nvSpPr>
-          <p:cNvPr id="14" name="Text 12"/>
-          <p:cNvSpPr/>
-          <p:nvPr/>
-        </p:nvSpPr>
-        <p:spPr>
-          <a:xfrm>
-            <a:off x="914400" y="3291840"/>
-            <a:ext cx="7315200" cy="548640"/>
-          </a:xfrm>
-          <a:prstGeom prst="rect">
-            <a:avLst/>
-          </a:prstGeom>
-          <a:noFill/>
-          <a:ln/>
-        </p:spPr>
-        <p:txBody>
-          <a:bodyPr wrap="square" lIns="0" tIns="0" rIns="0" bIns="0" rtlCol="0" anchor="ctr"/>
-          <a:lstStyle/>
-          <a:p>
-            <a:pPr algn="ctr" indent="0" marL="0">
-              <a:buNone/>
-            </a:pPr>
-            <a:r>
-              <a:rPr lang="en-US" sz="2400" i="1" dirty="0">
-                <a:solidFill>
-                  <a:srgbClr val="8B95A5"/>
-                </a:solidFill>
-                <a:latin typeface="Verdana" pitchFamily="34" charset="0"/>
-                <a:ea typeface="Verdana" pitchFamily="34" charset="-122"/>
-                <a:cs typeface="Verdana" pitchFamily="34" charset="-120"/>
-              </a:rPr>
-              <a:t>Each Skill does one thing. The chain does everything.</a:t>
-            </a:r>
-            <a:endParaRPr lang="en-US" sz="2400" dirty="0"/>
           </a:p>
         </p:txBody>
       </p:sp>
@@ -6761,14 +7149,41 @@
       </p:sp>
       <p:sp>
         <p:nvSpPr>
-          <p:cNvPr id="3" name="Text 1"/>
-          <p:cNvSpPr/>
-          <p:nvPr/>
-        </p:nvSpPr>
-        <p:spPr>
-          <a:xfrm>
-            <a:off x="457200" y="1463040"/>
-            <a:ext cx="8229600" cy="1097280"/>
+          <p:cNvPr id="3" name="Shape 1"/>
+          <p:cNvSpPr/>
+          <p:nvPr/>
+        </p:nvSpPr>
+        <p:spPr>
+          <a:xfrm>
+            <a:off x="457200" y="2011680"/>
+            <a:ext cx="1645920" cy="822960"/>
+          </a:xfrm>
+          <a:prstGeom prst="roundRect">
+            <a:avLst>
+              <a:gd name="adj" fmla="val 11111"/>
+            </a:avLst>
+          </a:prstGeom>
+          <a:solidFill>
+            <a:srgbClr val="0A2540"/>
+          </a:solidFill>
+          <a:ln w="19050">
+            <a:solidFill>
+              <a:srgbClr val="8B95A5"/>
+            </a:solidFill>
+            <a:prstDash val="solid"/>
+          </a:ln>
+        </p:spPr>
+      </p:sp>
+      <p:sp>
+        <p:nvSpPr>
+          <p:cNvPr id="4" name="Text 2"/>
+          <p:cNvSpPr/>
+          <p:nvPr/>
+        </p:nvSpPr>
+        <p:spPr>
+          <a:xfrm>
+            <a:off x="457200" y="2011680"/>
+            <a:ext cx="1645920" cy="822960"/>
           </a:xfrm>
           <a:prstGeom prst="rect">
             <a:avLst/>
@@ -6784,56 +7199,372 @@
               <a:buNone/>
             </a:pPr>
             <a:r>
-              <a:rPr lang="en-US" sz="5400" b="1" dirty="0">
-                <a:solidFill>
-                  <a:srgbClr val="FFFFFF"/>
-                </a:solidFill>
-                <a:latin typeface="Georgia" pitchFamily="34" charset="0"/>
-                <a:ea typeface="Georgia" pitchFamily="34" charset="-122"/>
-                <a:cs typeface="Georgia" pitchFamily="34" charset="-120"/>
-              </a:rPr>
-              <a:t>Demo</a:t>
-            </a:r>
-            <a:endParaRPr lang="en-US" sz="5400" dirty="0"/>
-          </a:p>
-        </p:txBody>
-      </p:sp>
-      <p:sp>
-        <p:nvSpPr>
-          <p:cNvPr id="4" name="Text 2"/>
-          <p:cNvSpPr/>
-          <p:nvPr/>
-        </p:nvSpPr>
-        <p:spPr>
-          <a:xfrm>
-            <a:off x="914400" y="2651760"/>
-            <a:ext cx="7315200" cy="548640"/>
-          </a:xfrm>
-          <a:prstGeom prst="rect">
-            <a:avLst/>
-          </a:prstGeom>
-          <a:noFill/>
-          <a:ln/>
-        </p:spPr>
-        <p:txBody>
-          <a:bodyPr wrap="square" lIns="0" tIns="0" rIns="0" bIns="0" rtlCol="0" anchor="ctr"/>
-          <a:lstStyle/>
-          <a:p>
-            <a:pPr algn="ctr" indent="0" marL="0">
-              <a:buNone/>
-            </a:pPr>
-            <a:r>
-              <a:rPr lang="en-US" sz="2800" i="1" dirty="0">
-                <a:solidFill>
-                  <a:srgbClr val="635BFF"/>
+              <a:rPr lang="en-US" sz="1800" b="1" dirty="0">
+                <a:solidFill>
+                  <a:srgbClr val="EDEDED"/>
                 </a:solidFill>
                 <a:latin typeface="Verdana" pitchFamily="34" charset="0"/>
                 <a:ea typeface="Verdana" pitchFamily="34" charset="-122"/>
                 <a:cs typeface="Verdana" pitchFamily="34" charset="-120"/>
               </a:rPr>
-              <a:t>Watch a 3-phase chain run live</a:t>
+              <a:t>Research</a:t>
+            </a:r>
+            <a:endParaRPr lang="en-US" sz="1800" dirty="0"/>
+          </a:p>
+        </p:txBody>
+      </p:sp>
+      <p:sp>
+        <p:nvSpPr>
+          <p:cNvPr id="5" name="Text 3"/>
+          <p:cNvSpPr/>
+          <p:nvPr/>
+        </p:nvSpPr>
+        <p:spPr>
+          <a:xfrm>
+            <a:off x="2103120" y="2011680"/>
+            <a:ext cx="548640" cy="822960"/>
+          </a:xfrm>
+          <a:prstGeom prst="rect">
+            <a:avLst/>
+          </a:prstGeom>
+          <a:noFill/>
+          <a:ln/>
+        </p:spPr>
+        <p:txBody>
+          <a:bodyPr wrap="square" lIns="0" tIns="0" rIns="0" bIns="0" rtlCol="0" anchor="ctr">
+            <a:normAutofit/>
+          </a:bodyPr>
+          <a:lstStyle/>
+          <a:p>
+            <a:pPr algn="ctr" indent="0" marL="0">
+              <a:buNone/>
+            </a:pPr>
+            <a:r>
+              <a:rPr lang="en-US" sz="2800" b="1" dirty="0">
+                <a:solidFill>
+                  <a:srgbClr val="635BFF"/>
+                </a:solidFill>
+                <a:latin typeface="Verdana" pitchFamily="34" charset="0"/>
+                <a:ea typeface="Verdana" pitchFamily="34" charset="-122"/>
+                <a:cs typeface="Verdana" pitchFamily="34" charset="-120"/>
+              </a:rPr>
+              <a:t>→</a:t>
             </a:r>
             <a:endParaRPr lang="en-US" sz="2800" dirty="0"/>
+          </a:p>
+        </p:txBody>
+      </p:sp>
+      <p:sp>
+        <p:nvSpPr>
+          <p:cNvPr id="6" name="Shape 4"/>
+          <p:cNvSpPr/>
+          <p:nvPr/>
+        </p:nvSpPr>
+        <p:spPr>
+          <a:xfrm>
+            <a:off x="2651760" y="2011680"/>
+            <a:ext cx="1645920" cy="822960"/>
+          </a:xfrm>
+          <a:prstGeom prst="roundRect">
+            <a:avLst>
+              <a:gd name="adj" fmla="val 11111"/>
+            </a:avLst>
+          </a:prstGeom>
+          <a:solidFill>
+            <a:srgbClr val="0A2540"/>
+          </a:solidFill>
+          <a:ln w="19050">
+            <a:solidFill>
+              <a:srgbClr val="8B95A5"/>
+            </a:solidFill>
+            <a:prstDash val="solid"/>
+          </a:ln>
+        </p:spPr>
+      </p:sp>
+      <p:sp>
+        <p:nvSpPr>
+          <p:cNvPr id="7" name="Text 5"/>
+          <p:cNvSpPr/>
+          <p:nvPr/>
+        </p:nvSpPr>
+        <p:spPr>
+          <a:xfrm>
+            <a:off x="2651760" y="2011680"/>
+            <a:ext cx="1645920" cy="822960"/>
+          </a:xfrm>
+          <a:prstGeom prst="rect">
+            <a:avLst/>
+          </a:prstGeom>
+          <a:noFill/>
+          <a:ln/>
+        </p:spPr>
+        <p:txBody>
+          <a:bodyPr wrap="square" lIns="0" tIns="0" rIns="0" bIns="0" rtlCol="0" anchor="ctr"/>
+          <a:lstStyle/>
+          <a:p>
+            <a:pPr algn="ctr" indent="0" marL="0">
+              <a:buNone/>
+            </a:pPr>
+            <a:r>
+              <a:rPr lang="en-US" sz="1800" b="1" dirty="0">
+                <a:solidFill>
+                  <a:srgbClr val="EDEDED"/>
+                </a:solidFill>
+                <a:latin typeface="Verdana" pitchFamily="34" charset="0"/>
+                <a:ea typeface="Verdana" pitchFamily="34" charset="-122"/>
+                <a:cs typeface="Verdana" pitchFamily="34" charset="-120"/>
+              </a:rPr>
+              <a:t>Draft</a:t>
+            </a:r>
+            <a:endParaRPr lang="en-US" sz="1800" dirty="0"/>
+          </a:p>
+        </p:txBody>
+      </p:sp>
+      <p:sp>
+        <p:nvSpPr>
+          <p:cNvPr id="8" name="Text 6"/>
+          <p:cNvSpPr/>
+          <p:nvPr/>
+        </p:nvSpPr>
+        <p:spPr>
+          <a:xfrm>
+            <a:off x="4297680" y="2011680"/>
+            <a:ext cx="548640" cy="822960"/>
+          </a:xfrm>
+          <a:prstGeom prst="rect">
+            <a:avLst/>
+          </a:prstGeom>
+          <a:noFill/>
+          <a:ln/>
+        </p:spPr>
+        <p:txBody>
+          <a:bodyPr wrap="square" lIns="0" tIns="0" rIns="0" bIns="0" rtlCol="0" anchor="ctr">
+            <a:normAutofit/>
+          </a:bodyPr>
+          <a:lstStyle/>
+          <a:p>
+            <a:pPr algn="ctr" indent="0" marL="0">
+              <a:buNone/>
+            </a:pPr>
+            <a:r>
+              <a:rPr lang="en-US" sz="2800" b="1" dirty="0">
+                <a:solidFill>
+                  <a:srgbClr val="635BFF"/>
+                </a:solidFill>
+                <a:latin typeface="Verdana" pitchFamily="34" charset="0"/>
+                <a:ea typeface="Verdana" pitchFamily="34" charset="-122"/>
+                <a:cs typeface="Verdana" pitchFamily="34" charset="-120"/>
+              </a:rPr>
+              <a:t>→</a:t>
+            </a:r>
+            <a:endParaRPr lang="en-US" sz="2800" dirty="0"/>
+          </a:p>
+        </p:txBody>
+      </p:sp>
+      <p:sp>
+        <p:nvSpPr>
+          <p:cNvPr id="9" name="Shape 7"/>
+          <p:cNvSpPr/>
+          <p:nvPr/>
+        </p:nvSpPr>
+        <p:spPr>
+          <a:xfrm>
+            <a:off x="4846320" y="2011680"/>
+            <a:ext cx="1645920" cy="822960"/>
+          </a:xfrm>
+          <a:prstGeom prst="roundRect">
+            <a:avLst>
+              <a:gd name="adj" fmla="val 11111"/>
+            </a:avLst>
+          </a:prstGeom>
+          <a:solidFill>
+            <a:srgbClr val="0A2540"/>
+          </a:solidFill>
+          <a:ln w="19050">
+            <a:solidFill>
+              <a:srgbClr val="8B95A5"/>
+            </a:solidFill>
+            <a:prstDash val="solid"/>
+          </a:ln>
+        </p:spPr>
+      </p:sp>
+      <p:sp>
+        <p:nvSpPr>
+          <p:cNvPr id="10" name="Text 8"/>
+          <p:cNvSpPr/>
+          <p:nvPr/>
+        </p:nvSpPr>
+        <p:spPr>
+          <a:xfrm>
+            <a:off x="4846320" y="2011680"/>
+            <a:ext cx="1645920" cy="822960"/>
+          </a:xfrm>
+          <a:prstGeom prst="rect">
+            <a:avLst/>
+          </a:prstGeom>
+          <a:noFill/>
+          <a:ln/>
+        </p:spPr>
+        <p:txBody>
+          <a:bodyPr wrap="square" lIns="0" tIns="0" rIns="0" bIns="0" rtlCol="0" anchor="ctr"/>
+          <a:lstStyle/>
+          <a:p>
+            <a:pPr algn="ctr" indent="0" marL="0">
+              <a:buNone/>
+            </a:pPr>
+            <a:r>
+              <a:rPr lang="en-US" sz="1800" b="1" dirty="0">
+                <a:solidFill>
+                  <a:srgbClr val="EDEDED"/>
+                </a:solidFill>
+                <a:latin typeface="Verdana" pitchFamily="34" charset="0"/>
+                <a:ea typeface="Verdana" pitchFamily="34" charset="-122"/>
+                <a:cs typeface="Verdana" pitchFamily="34" charset="-120"/>
+              </a:rPr>
+              <a:t>Review</a:t>
+            </a:r>
+            <a:endParaRPr lang="en-US" sz="1800" dirty="0"/>
+          </a:p>
+        </p:txBody>
+      </p:sp>
+      <p:sp>
+        <p:nvSpPr>
+          <p:cNvPr id="11" name="Text 9"/>
+          <p:cNvSpPr/>
+          <p:nvPr/>
+        </p:nvSpPr>
+        <p:spPr>
+          <a:xfrm>
+            <a:off x="6492240" y="2011680"/>
+            <a:ext cx="548640" cy="822960"/>
+          </a:xfrm>
+          <a:prstGeom prst="rect">
+            <a:avLst/>
+          </a:prstGeom>
+          <a:noFill/>
+          <a:ln/>
+        </p:spPr>
+        <p:txBody>
+          <a:bodyPr wrap="square" lIns="0" tIns="0" rIns="0" bIns="0" rtlCol="0" anchor="ctr">
+            <a:normAutofit/>
+          </a:bodyPr>
+          <a:lstStyle/>
+          <a:p>
+            <a:pPr algn="ctr" indent="0" marL="0">
+              <a:buNone/>
+            </a:pPr>
+            <a:r>
+              <a:rPr lang="en-US" sz="2800" b="1" dirty="0">
+                <a:solidFill>
+                  <a:srgbClr val="635BFF"/>
+                </a:solidFill>
+                <a:latin typeface="Verdana" pitchFamily="34" charset="0"/>
+                <a:ea typeface="Verdana" pitchFamily="34" charset="-122"/>
+                <a:cs typeface="Verdana" pitchFamily="34" charset="-120"/>
+              </a:rPr>
+              <a:t>→</a:t>
+            </a:r>
+            <a:endParaRPr lang="en-US" sz="2800" dirty="0"/>
+          </a:p>
+        </p:txBody>
+      </p:sp>
+      <p:sp>
+        <p:nvSpPr>
+          <p:cNvPr id="12" name="Shape 10"/>
+          <p:cNvSpPr/>
+          <p:nvPr/>
+        </p:nvSpPr>
+        <p:spPr>
+          <a:xfrm>
+            <a:off x="7040880" y="2011680"/>
+            <a:ext cx="1645920" cy="822960"/>
+          </a:xfrm>
+          <a:prstGeom prst="roundRect">
+            <a:avLst>
+              <a:gd name="adj" fmla="val 11111"/>
+            </a:avLst>
+          </a:prstGeom>
+          <a:solidFill>
+            <a:srgbClr val="635BFF"/>
+          </a:solidFill>
+          <a:ln/>
+        </p:spPr>
+      </p:sp>
+      <p:sp>
+        <p:nvSpPr>
+          <p:cNvPr id="13" name="Text 11"/>
+          <p:cNvSpPr/>
+          <p:nvPr/>
+        </p:nvSpPr>
+        <p:spPr>
+          <a:xfrm>
+            <a:off x="7040880" y="2011680"/>
+            <a:ext cx="1645920" cy="822960"/>
+          </a:xfrm>
+          <a:prstGeom prst="rect">
+            <a:avLst/>
+          </a:prstGeom>
+          <a:noFill/>
+          <a:ln/>
+        </p:spPr>
+        <p:txBody>
+          <a:bodyPr wrap="square" lIns="0" tIns="0" rIns="0" bIns="0" rtlCol="0" anchor="ctr"/>
+          <a:lstStyle/>
+          <a:p>
+            <a:pPr algn="ctr" indent="0" marL="0">
+              <a:buNone/>
+            </a:pPr>
+            <a:r>
+              <a:rPr lang="en-US" sz="1800" b="1" dirty="0">
+                <a:solidFill>
+                  <a:srgbClr val="FFFFFF"/>
+                </a:solidFill>
+                <a:latin typeface="Verdana" pitchFamily="34" charset="0"/>
+                <a:ea typeface="Verdana" pitchFamily="34" charset="-122"/>
+                <a:cs typeface="Verdana" pitchFamily="34" charset="-120"/>
+              </a:rPr>
+              <a:t>You</a:t>
+            </a:r>
+            <a:endParaRPr lang="en-US" sz="1800" dirty="0"/>
+          </a:p>
+        </p:txBody>
+      </p:sp>
+      <p:sp>
+        <p:nvSpPr>
+          <p:cNvPr id="14" name="Text 12"/>
+          <p:cNvSpPr/>
+          <p:nvPr/>
+        </p:nvSpPr>
+        <p:spPr>
+          <a:xfrm>
+            <a:off x="914400" y="3291840"/>
+            <a:ext cx="7315200" cy="548640"/>
+          </a:xfrm>
+          <a:prstGeom prst="rect">
+            <a:avLst/>
+          </a:prstGeom>
+          <a:noFill/>
+          <a:ln/>
+        </p:spPr>
+        <p:txBody>
+          <a:bodyPr wrap="square" lIns="0" tIns="0" rIns="0" bIns="0" rtlCol="0" anchor="ctr"/>
+          <a:lstStyle/>
+          <a:p>
+            <a:pPr algn="ctr" indent="0" marL="0">
+              <a:buNone/>
+            </a:pPr>
+            <a:r>
+              <a:rPr lang="en-US" sz="2400" i="1" dirty="0">
+                <a:solidFill>
+                  <a:srgbClr val="8B95A5"/>
+                </a:solidFill>
+                <a:latin typeface="Verdana" pitchFamily="34" charset="0"/>
+                <a:ea typeface="Verdana" pitchFamily="34" charset="-122"/>
+                <a:cs typeface="Verdana" pitchFamily="34" charset="-120"/>
+              </a:rPr>
+              <a:t>Each Skill does one thing. The chain does everything.</a:t>
+            </a:r>
+            <a:endParaRPr lang="en-US" sz="2400" dirty="0"/>
           </a:p>
         </p:txBody>
       </p:sp>
@@ -6899,8 +7630,8 @@
         </p:nvSpPr>
         <p:spPr>
           <a:xfrm>
-            <a:off x="914400" y="914400"/>
-            <a:ext cx="7315200" cy="3291840"/>
+            <a:off x="457200" y="1463040"/>
+            <a:ext cx="8229600" cy="1097280"/>
           </a:xfrm>
           <a:prstGeom prst="rect">
             <a:avLst/>
@@ -6916,100 +7647,54 @@
               <a:buNone/>
             </a:pPr>
             <a:r>
-              <a:rPr lang="en-US" sz="2800" b="1" dirty="0">
-                <a:solidFill>
-                  <a:srgbClr val="635BFF"/>
+              <a:rPr lang="en-US" sz="5400" b="1" dirty="0">
+                <a:solidFill>
+                  <a:srgbClr val="FFFFFF"/>
                 </a:solidFill>
                 <a:latin typeface="Georgia" pitchFamily="34" charset="0"/>
                 <a:ea typeface="Georgia" pitchFamily="34" charset="-122"/>
                 <a:cs typeface="Georgia" pitchFamily="34" charset="-120"/>
               </a:rPr>
-              <a:t>Phase 1: New conversation</a:t>
-            </a:r>
-            <a:endParaRPr lang="en-US" sz="2800" dirty="0"/>
-          </a:p>
-          <a:p>
-            <a:pPr algn="ctr" indent="0" marL="0">
-              <a:buNone/>
-            </a:pPr>
-            <a:r>
-              <a:rPr lang="en-US" sz="2800" b="1" dirty="0">
+              <a:t>Demo</a:t>
+            </a:r>
+            <a:endParaRPr lang="en-US" sz="5400" dirty="0"/>
+          </a:p>
+        </p:txBody>
+      </p:sp>
+      <p:sp>
+        <p:nvSpPr>
+          <p:cNvPr id="4" name="Text 2"/>
+          <p:cNvSpPr/>
+          <p:nvPr/>
+        </p:nvSpPr>
+        <p:spPr>
+          <a:xfrm>
+            <a:off x="914400" y="2651760"/>
+            <a:ext cx="7315200" cy="548640"/>
+          </a:xfrm>
+          <a:prstGeom prst="rect">
+            <a:avLst/>
+          </a:prstGeom>
+          <a:noFill/>
+          <a:ln/>
+        </p:spPr>
+        <p:txBody>
+          <a:bodyPr wrap="square" lIns="0" tIns="0" rIns="0" bIns="0" rtlCol="0" anchor="ctr"/>
+          <a:lstStyle/>
+          <a:p>
+            <a:pPr algn="ctr" indent="0" marL="0">
+              <a:buNone/>
+            </a:pPr>
+            <a:r>
+              <a:rPr lang="en-US" sz="2800" i="1" dirty="0">
                 <a:solidFill>
                   <a:srgbClr val="635BFF"/>
-                </a:solidFill>
-                <a:latin typeface="Georgia" pitchFamily="34" charset="0"/>
-                <a:ea typeface="Georgia" pitchFamily="34" charset="-122"/>
-                <a:cs typeface="Georgia" pitchFamily="34" charset="-120"/>
-              </a:rPr>
-              <a:t>→ give it your task → save output</a:t>
-            </a:r>
-            <a:endParaRPr lang="en-US" sz="2800" dirty="0"/>
-          </a:p>
-          <a:p>
-            <a:pPr algn="ctr" indent="0" marL="0">
-              <a:buNone/>
-            </a:pPr>
-            <a:r>
-              <a:rPr lang="en-US" sz="2800" b="1" dirty="0">
-                <a:solidFill>
-                  <a:srgbClr val="635BFF"/>
-                </a:solidFill>
-                <a:latin typeface="Georgia" pitchFamily="34" charset="0"/>
-                <a:ea typeface="Georgia" pitchFamily="34" charset="-122"/>
-                <a:cs typeface="Georgia" pitchFamily="34" charset="-120"/>
-              </a:rPr>
-              <a:t>Phase 2: New conversation</a:t>
-            </a:r>
-            <a:endParaRPr lang="en-US" sz="2800" dirty="0"/>
-          </a:p>
-          <a:p>
-            <a:pPr algn="ctr" indent="0" marL="0">
-              <a:buNone/>
-            </a:pPr>
-            <a:r>
-              <a:rPr lang="en-US" sz="2800" b="1" dirty="0">
-                <a:solidFill>
-                  <a:srgbClr val="635BFF"/>
-                </a:solidFill>
-                <a:latin typeface="Georgia" pitchFamily="34" charset="0"/>
-                <a:ea typeface="Georgia" pitchFamily="34" charset="-122"/>
-                <a:cs typeface="Georgia" pitchFamily="34" charset="-120"/>
-              </a:rPr>
-              <a:t>→ paste Phase 1's output → draft</a:t>
-            </a:r>
-            <a:endParaRPr lang="en-US" sz="2800" dirty="0"/>
-          </a:p>
-          <a:p>
-            <a:pPr algn="ctr" indent="0" marL="0">
-              <a:buNone/>
-            </a:pPr>
-            <a:r>
-              <a:rPr lang="en-US" sz="2200" i="1" dirty="0">
-                <a:solidFill>
-                  <a:srgbClr val="8B95A5"/>
                 </a:solidFill>
                 <a:latin typeface="Verdana" pitchFamily="34" charset="0"/>
                 <a:ea typeface="Verdana" pitchFamily="34" charset="-122"/>
                 <a:cs typeface="Verdana" pitchFamily="34" charset="-120"/>
               </a:rPr>
-              <a:t>How does this compare to one</a:t>
-            </a:r>
-            <a:endParaRPr lang="en-US" sz="2800" dirty="0"/>
-          </a:p>
-          <a:p>
-            <a:pPr algn="ctr" indent="0" marL="0">
-              <a:buNone/>
-            </a:pPr>
-            <a:r>
-              <a:rPr lang="en-US" sz="2200" i="1" dirty="0">
-                <a:solidFill>
-                  <a:srgbClr val="8B95A5"/>
-                </a:solidFill>
-                <a:latin typeface="Verdana" pitchFamily="34" charset="0"/>
-                <a:ea typeface="Verdana" pitchFamily="34" charset="-122"/>
-                <a:cs typeface="Verdana" pitchFamily="34" charset="-120"/>
-              </a:rPr>
-              <a:t>conversation doing everything?</a:t>
+              <a:t>Watch a 3-phase chain run live</a:t>
             </a:r>
             <a:endParaRPr lang="en-US" sz="2800" dirty="0"/>
           </a:p>
@@ -7077,17 +7762,17 @@
         </p:nvSpPr>
         <p:spPr>
           <a:xfrm>
-            <a:off x="457200" y="1097280"/>
-            <a:ext cx="3840480" cy="731520"/>
-          </a:xfrm>
-          <a:prstGeom prst="rect">
-            <a:avLst/>
-          </a:prstGeom>
-          <a:noFill/>
-          <a:ln/>
-        </p:spPr>
-        <p:txBody>
-          <a:bodyPr wrap="square" lIns="0" tIns="0" rIns="0" bIns="0" rtlCol="0" anchor="b"/>
+            <a:off x="914400" y="914400"/>
+            <a:ext cx="7315200" cy="3291840"/>
+          </a:xfrm>
+          <a:prstGeom prst="rect">
+            <a:avLst/>
+          </a:prstGeom>
+          <a:noFill/>
+          <a:ln/>
+        </p:spPr>
+        <p:txBody>
+          <a:bodyPr wrap="square" lIns="0" tIns="0" rIns="0" bIns="0" rtlCol="0" anchor="ctr"/>
           <a:lstStyle/>
           <a:p>
             <a:pPr algn="ctr" indent="0" marL="0">
@@ -7096,44 +7781,73 @@
             <a:r>
               <a:rPr lang="en-US" sz="2800" b="1" dirty="0">
                 <a:solidFill>
-                  <a:srgbClr val="8B95A5"/>
+                  <a:srgbClr val="635BFF"/>
                 </a:solidFill>
                 <a:latin typeface="Georgia" pitchFamily="34" charset="0"/>
                 <a:ea typeface="Georgia" pitchFamily="34" charset="-122"/>
                 <a:cs typeface="Georgia" pitchFamily="34" charset="-120"/>
               </a:rPr>
-              <a:t>Workshop 1</a:t>
+              <a:t>Phase 1: New conversation</a:t>
             </a:r>
             <a:endParaRPr lang="en-US" sz="2800" dirty="0"/>
           </a:p>
-        </p:txBody>
-      </p:sp>
-      <p:sp>
-        <p:nvSpPr>
-          <p:cNvPr id="4" name="Text 2"/>
-          <p:cNvSpPr/>
-          <p:nvPr/>
-        </p:nvSpPr>
-        <p:spPr>
-          <a:xfrm>
-            <a:off x="457200" y="2011680"/>
-            <a:ext cx="3840480" cy="548640"/>
-          </a:xfrm>
-          <a:prstGeom prst="rect">
-            <a:avLst/>
-          </a:prstGeom>
-          <a:noFill/>
-          <a:ln/>
-        </p:spPr>
-        <p:txBody>
-          <a:bodyPr wrap="square" lIns="0" tIns="0" rIns="0" bIns="0" rtlCol="0" anchor="t"/>
-          <a:lstStyle/>
-          <a:p>
-            <a:pPr algn="ctr" indent="0" marL="0">
-              <a:buNone/>
-            </a:pPr>
-            <a:r>
-              <a:rPr lang="en-US" sz="2000" i="1" dirty="0">
+          <a:p>
+            <a:pPr algn="ctr" indent="0" marL="0">
+              <a:buNone/>
+            </a:pPr>
+            <a:r>
+              <a:rPr lang="en-US" sz="2800" b="1" dirty="0">
+                <a:solidFill>
+                  <a:srgbClr val="635BFF"/>
+                </a:solidFill>
+                <a:latin typeface="Georgia" pitchFamily="34" charset="0"/>
+                <a:ea typeface="Georgia" pitchFamily="34" charset="-122"/>
+                <a:cs typeface="Georgia" pitchFamily="34" charset="-120"/>
+              </a:rPr>
+              <a:t>→ give it your task → save output</a:t>
+            </a:r>
+            <a:endParaRPr lang="en-US" sz="2800" dirty="0"/>
+          </a:p>
+          <a:p>
+            <a:pPr algn="ctr" indent="0" marL="0">
+              <a:buNone/>
+            </a:pPr>
+            <a:r>
+              <a:rPr lang="en-US" sz="2800" b="1" dirty="0">
+                <a:solidFill>
+                  <a:srgbClr val="635BFF"/>
+                </a:solidFill>
+                <a:latin typeface="Georgia" pitchFamily="34" charset="0"/>
+                <a:ea typeface="Georgia" pitchFamily="34" charset="-122"/>
+                <a:cs typeface="Georgia" pitchFamily="34" charset="-120"/>
+              </a:rPr>
+              <a:t>Phase 2: New conversation</a:t>
+            </a:r>
+            <a:endParaRPr lang="en-US" sz="2800" dirty="0"/>
+          </a:p>
+          <a:p>
+            <a:pPr algn="ctr" indent="0" marL="0">
+              <a:buNone/>
+            </a:pPr>
+            <a:r>
+              <a:rPr lang="en-US" sz="2800" b="1" dirty="0">
+                <a:solidFill>
+                  <a:srgbClr val="635BFF"/>
+                </a:solidFill>
+                <a:latin typeface="Georgia" pitchFamily="34" charset="0"/>
+                <a:ea typeface="Georgia" pitchFamily="34" charset="-122"/>
+                <a:cs typeface="Georgia" pitchFamily="34" charset="-120"/>
+              </a:rPr>
+              <a:t>→ paste Phase 1's output → draft</a:t>
+            </a:r>
+            <a:endParaRPr lang="en-US" sz="2800" dirty="0"/>
+          </a:p>
+          <a:p>
+            <a:pPr algn="ctr" indent="0" marL="0">
+              <a:buNone/>
+            </a:pPr>
+            <a:r>
+              <a:rPr lang="en-US" sz="2200" i="1" dirty="0">
                 <a:solidFill>
                   <a:srgbClr val="8B95A5"/>
                 </a:solidFill>
@@ -7141,149 +7855,26 @@
                 <a:ea typeface="Verdana" pitchFamily="34" charset="-122"/>
                 <a:cs typeface="Verdana" pitchFamily="34" charset="-120"/>
               </a:rPr>
-              <a:t>Your rules + Skills</a:t>
-            </a:r>
-            <a:endParaRPr lang="en-US" sz="2000" dirty="0"/>
-          </a:p>
-        </p:txBody>
-      </p:sp>
-      <p:sp>
-        <p:nvSpPr>
-          <p:cNvPr id="5" name="Shape 3"/>
-          <p:cNvSpPr/>
-          <p:nvPr/>
-        </p:nvSpPr>
-        <p:spPr>
-          <a:xfrm>
-            <a:off x="4572000" y="914400"/>
-            <a:ext cx="0" cy="2377440"/>
-          </a:xfrm>
-          <a:prstGeom prst="line">
-            <a:avLst/>
-          </a:prstGeom>
-          <a:noFill/>
-          <a:ln w="25400">
-            <a:solidFill>
-              <a:srgbClr val="635BFF"/>
-            </a:solidFill>
-            <a:prstDash val="solid"/>
-          </a:ln>
-        </p:spPr>
-      </p:sp>
-      <p:sp>
-        <p:nvSpPr>
-          <p:cNvPr id="6" name="Text 4"/>
-          <p:cNvSpPr/>
-          <p:nvPr/>
-        </p:nvSpPr>
-        <p:spPr>
-          <a:xfrm>
-            <a:off x="4846320" y="1097280"/>
-            <a:ext cx="3840480" cy="731520"/>
-          </a:xfrm>
-          <a:prstGeom prst="rect">
-            <a:avLst/>
-          </a:prstGeom>
-          <a:noFill/>
-          <a:ln/>
-        </p:spPr>
-        <p:txBody>
-          <a:bodyPr wrap="square" lIns="0" tIns="0" rIns="0" bIns="0" rtlCol="0" anchor="b"/>
-          <a:lstStyle/>
-          <a:p>
-            <a:pPr algn="ctr" indent="0" marL="0">
-              <a:buNone/>
-            </a:pPr>
-            <a:r>
-              <a:rPr lang="en-US" sz="2800" b="1" dirty="0">
-                <a:solidFill>
-                  <a:srgbClr val="FFFFFF"/>
-                </a:solidFill>
-                <a:latin typeface="Georgia" pitchFamily="34" charset="0"/>
-                <a:ea typeface="Georgia" pitchFamily="34" charset="-122"/>
-                <a:cs typeface="Georgia" pitchFamily="34" charset="-120"/>
-              </a:rPr>
-              <a:t>Workshop 2</a:t>
+              <a:t>How does this compare to one</a:t>
             </a:r>
             <a:endParaRPr lang="en-US" sz="2800" dirty="0"/>
           </a:p>
-        </p:txBody>
-      </p:sp>
-      <p:sp>
-        <p:nvSpPr>
-          <p:cNvPr id="7" name="Text 5"/>
-          <p:cNvSpPr/>
-          <p:nvPr/>
-        </p:nvSpPr>
-        <p:spPr>
-          <a:xfrm>
-            <a:off x="4846320" y="2011680"/>
-            <a:ext cx="3840480" cy="548640"/>
-          </a:xfrm>
-          <a:prstGeom prst="rect">
-            <a:avLst/>
-          </a:prstGeom>
-          <a:noFill/>
-          <a:ln/>
-        </p:spPr>
-        <p:txBody>
-          <a:bodyPr wrap="square" lIns="0" tIns="0" rIns="0" bIns="0" rtlCol="0" anchor="t"/>
-          <a:lstStyle/>
-          <a:p>
-            <a:pPr algn="ctr" indent="0" marL="0">
-              <a:buNone/>
-            </a:pPr>
-            <a:r>
-              <a:rPr lang="en-US" sz="2000" i="1" dirty="0">
-                <a:solidFill>
-                  <a:srgbClr val="635BFF"/>
+          <a:p>
+            <a:pPr algn="ctr" indent="0" marL="0">
+              <a:buNone/>
+            </a:pPr>
+            <a:r>
+              <a:rPr lang="en-US" sz="2200" i="1" dirty="0">
+                <a:solidFill>
+                  <a:srgbClr val="8B95A5"/>
                 </a:solidFill>
                 <a:latin typeface="Verdana" pitchFamily="34" charset="0"/>
                 <a:ea typeface="Verdana" pitchFamily="34" charset="-122"/>
                 <a:cs typeface="Verdana" pitchFamily="34" charset="-120"/>
               </a:rPr>
-              <a:t>Each step gets its own Skill</a:t>
-            </a:r>
-            <a:endParaRPr lang="en-US" sz="2000" dirty="0"/>
-          </a:p>
-        </p:txBody>
-      </p:sp>
-      <p:sp>
-        <p:nvSpPr>
-          <p:cNvPr id="8" name="Text 6"/>
-          <p:cNvSpPr/>
-          <p:nvPr/>
-        </p:nvSpPr>
-        <p:spPr>
-          <a:xfrm>
-            <a:off x="914400" y="3474720"/>
-            <a:ext cx="7315200" cy="548640"/>
-          </a:xfrm>
-          <a:prstGeom prst="rect">
-            <a:avLst/>
-          </a:prstGeom>
-          <a:noFill/>
-          <a:ln/>
-        </p:spPr>
-        <p:txBody>
-          <a:bodyPr wrap="square" lIns="0" tIns="0" rIns="0" bIns="0" rtlCol="0" anchor="ctr"/>
-          <a:lstStyle/>
-          <a:p>
-            <a:pPr algn="ctr" indent="0" marL="0">
-              <a:buNone/>
-            </a:pPr>
-            <a:r>
-              <a:rPr lang="en-US" sz="2000" i="1" dirty="0">
-                <a:solidFill>
-                  <a:srgbClr val="8B95A5"/>
-                </a:solidFill>
-                <a:latin typeface="Verdana" pitchFamily="34" charset="0"/>
-                <a:ea typeface="Verdana" pitchFamily="34" charset="-122"/>
-                <a:cs typeface="Verdana" pitchFamily="34" charset="-120"/>
-              </a:rPr>
-              <a:t>Same concept. Now each agent in the chain gets its own playbook.</a:t>
-            </a:r>
-            <a:endParaRPr lang="en-US" sz="2000" dirty="0"/>
+              <a:t>conversation doing everything?</a:t>
+            </a:r>
+            <a:endParaRPr lang="en-US" sz="2800" dirty="0"/>
           </a:p>
         </p:txBody>
       </p:sp>
@@ -7349,17 +7940,17 @@
         </p:nvSpPr>
         <p:spPr>
           <a:xfrm>
-            <a:off x="914400" y="914400"/>
-            <a:ext cx="7315200" cy="3291840"/>
-          </a:xfrm>
-          <a:prstGeom prst="rect">
-            <a:avLst/>
-          </a:prstGeom>
-          <a:noFill/>
-          <a:ln/>
-        </p:spPr>
-        <p:txBody>
-          <a:bodyPr wrap="square" lIns="0" tIns="0" rIns="0" bIns="0" rtlCol="0" anchor="ctr"/>
+            <a:off x="457200" y="1097280"/>
+            <a:ext cx="3840480" cy="731520"/>
+          </a:xfrm>
+          <a:prstGeom prst="rect">
+            <a:avLst/>
+          </a:prstGeom>
+          <a:noFill/>
+          <a:ln/>
+        </p:spPr>
+        <p:txBody>
+          <a:bodyPr wrap="square" lIns="0" tIns="0" rIns="0" bIns="0" rtlCol="0" anchor="b"/>
           <a:lstStyle/>
           <a:p>
             <a:pPr algn="ctr" indent="0" marL="0">
@@ -7368,22 +7959,44 @@
             <a:r>
               <a:rPr lang="en-US" sz="2800" b="1" dirty="0">
                 <a:solidFill>
-                  <a:srgbClr val="635BFF"/>
+                  <a:srgbClr val="8B95A5"/>
                 </a:solidFill>
                 <a:latin typeface="Georgia" pitchFamily="34" charset="0"/>
                 <a:ea typeface="Georgia" pitchFamily="34" charset="-122"/>
                 <a:cs typeface="Georgia" pitchFamily="34" charset="-120"/>
               </a:rPr>
-              <a:t>Go to Customize → Skills</a:t>
+              <a:t>Workshop 1</a:t>
             </a:r>
             <a:endParaRPr lang="en-US" sz="2800" dirty="0"/>
           </a:p>
-          <a:p>
-            <a:pPr algn="ctr" indent="0" marL="0">
-              <a:buNone/>
-            </a:pPr>
-            <a:r>
-              <a:rPr lang="en-US" sz="2200" i="1" dirty="0">
+        </p:txBody>
+      </p:sp>
+      <p:sp>
+        <p:nvSpPr>
+          <p:cNvPr id="4" name="Text 2"/>
+          <p:cNvSpPr/>
+          <p:nvPr/>
+        </p:nvSpPr>
+        <p:spPr>
+          <a:xfrm>
+            <a:off x="457200" y="2011680"/>
+            <a:ext cx="3840480" cy="548640"/>
+          </a:xfrm>
+          <a:prstGeom prst="rect">
+            <a:avLst/>
+          </a:prstGeom>
+          <a:noFill/>
+          <a:ln/>
+        </p:spPr>
+        <p:txBody>
+          <a:bodyPr wrap="square" lIns="0" tIns="0" rIns="0" bIns="0" rtlCol="0" anchor="t"/>
+          <a:lstStyle/>
+          <a:p>
+            <a:pPr algn="ctr" indent="0" marL="0">
+              <a:buNone/>
+            </a:pPr>
+            <a:r>
+              <a:rPr lang="en-US" sz="2000" i="1" dirty="0">
                 <a:solidFill>
                   <a:srgbClr val="8B95A5"/>
                 </a:solidFill>
@@ -7391,43 +8004,149 @@
                 <a:ea typeface="Verdana" pitchFamily="34" charset="-122"/>
                 <a:cs typeface="Verdana" pitchFamily="34" charset="-120"/>
               </a:rPr>
-              <a:t>Click the Research Skill</a:t>
+              <a:t>Your rules + Skills</a:t>
+            </a:r>
+            <a:endParaRPr lang="en-US" sz="2000" dirty="0"/>
+          </a:p>
+        </p:txBody>
+      </p:sp>
+      <p:sp>
+        <p:nvSpPr>
+          <p:cNvPr id="5" name="Shape 3"/>
+          <p:cNvSpPr/>
+          <p:nvPr/>
+        </p:nvSpPr>
+        <p:spPr>
+          <a:xfrm>
+            <a:off x="4572000" y="914400"/>
+            <a:ext cx="0" cy="2377440"/>
+          </a:xfrm>
+          <a:prstGeom prst="line">
+            <a:avLst/>
+          </a:prstGeom>
+          <a:noFill/>
+          <a:ln w="25400">
+            <a:solidFill>
+              <a:srgbClr val="635BFF"/>
+            </a:solidFill>
+            <a:prstDash val="solid"/>
+          </a:ln>
+        </p:spPr>
+      </p:sp>
+      <p:sp>
+        <p:nvSpPr>
+          <p:cNvPr id="6" name="Text 4"/>
+          <p:cNvSpPr/>
+          <p:nvPr/>
+        </p:nvSpPr>
+        <p:spPr>
+          <a:xfrm>
+            <a:off x="4846320" y="1097280"/>
+            <a:ext cx="3840480" cy="731520"/>
+          </a:xfrm>
+          <a:prstGeom prst="rect">
+            <a:avLst/>
+          </a:prstGeom>
+          <a:noFill/>
+          <a:ln/>
+        </p:spPr>
+        <p:txBody>
+          <a:bodyPr wrap="square" lIns="0" tIns="0" rIns="0" bIns="0" rtlCol="0" anchor="b"/>
+          <a:lstStyle/>
+          <a:p>
+            <a:pPr algn="ctr" indent="0" marL="0">
+              <a:buNone/>
+            </a:pPr>
+            <a:r>
+              <a:rPr lang="en-US" sz="2800" b="1" dirty="0">
+                <a:solidFill>
+                  <a:srgbClr val="FFFFFF"/>
+                </a:solidFill>
+                <a:latin typeface="Georgia" pitchFamily="34" charset="0"/>
+                <a:ea typeface="Georgia" pitchFamily="34" charset="-122"/>
+                <a:cs typeface="Georgia" pitchFamily="34" charset="-120"/>
+              </a:rPr>
+              <a:t>Workshop 2</a:t>
             </a:r>
             <a:endParaRPr lang="en-US" sz="2800" dirty="0"/>
           </a:p>
-          <a:p>
-            <a:pPr algn="ctr" indent="0" marL="0">
-              <a:buNone/>
-            </a:pPr>
-            <a:r>
-              <a:rPr lang="en-US" sz="2200" i="1" dirty="0">
-                <a:solidFill>
-                  <a:srgbClr val="8B95A5"/>
+        </p:txBody>
+      </p:sp>
+      <p:sp>
+        <p:nvSpPr>
+          <p:cNvPr id="7" name="Text 5"/>
+          <p:cNvSpPr/>
+          <p:nvPr/>
+        </p:nvSpPr>
+        <p:spPr>
+          <a:xfrm>
+            <a:off x="4846320" y="2011680"/>
+            <a:ext cx="3840480" cy="548640"/>
+          </a:xfrm>
+          <a:prstGeom prst="rect">
+            <a:avLst/>
+          </a:prstGeom>
+          <a:noFill/>
+          <a:ln/>
+        </p:spPr>
+        <p:txBody>
+          <a:bodyPr wrap="square" lIns="0" tIns="0" rIns="0" bIns="0" rtlCol="0" anchor="t"/>
+          <a:lstStyle/>
+          <a:p>
+            <a:pPr algn="ctr" indent="0" marL="0">
+              <a:buNone/>
+            </a:pPr>
+            <a:r>
+              <a:rPr lang="en-US" sz="2000" i="1" dirty="0">
+                <a:solidFill>
+                  <a:srgbClr val="635BFF"/>
                 </a:solidFill>
                 <a:latin typeface="Verdana" pitchFamily="34" charset="0"/>
                 <a:ea typeface="Verdana" pitchFamily="34" charset="-122"/>
                 <a:cs typeface="Verdana" pitchFamily="34" charset="-120"/>
               </a:rPr>
-              <a:t>→ view its SKILL.md</a:t>
-            </a:r>
-            <a:endParaRPr lang="en-US" sz="2800" dirty="0"/>
-          </a:p>
-          <a:p>
-            <a:pPr algn="ctr" indent="0" marL="0">
-              <a:buNone/>
-            </a:pPr>
-            <a:r>
-              <a:rPr lang="en-US" sz="3600" b="1" dirty="0">
-                <a:solidFill>
-                  <a:srgbClr val="635BFF"/>
-                </a:solidFill>
-                <a:latin typeface="Georgia" pitchFamily="34" charset="0"/>
-                <a:ea typeface="Georgia" pitchFamily="34" charset="-122"/>
-                <a:cs typeface="Georgia" pitchFamily="34" charset="-120"/>
-              </a:rPr>
-              <a:t>What would you add or change?</a:t>
-            </a:r>
-            <a:endParaRPr lang="en-US" sz="2800" dirty="0"/>
+              <a:t>Each step gets its own Skill</a:t>
+            </a:r>
+            <a:endParaRPr lang="en-US" sz="2000" dirty="0"/>
+          </a:p>
+        </p:txBody>
+      </p:sp>
+      <p:sp>
+        <p:nvSpPr>
+          <p:cNvPr id="8" name="Text 6"/>
+          <p:cNvSpPr/>
+          <p:nvPr/>
+        </p:nvSpPr>
+        <p:spPr>
+          <a:xfrm>
+            <a:off x="914400" y="3474720"/>
+            <a:ext cx="7315200" cy="548640"/>
+          </a:xfrm>
+          <a:prstGeom prst="rect">
+            <a:avLst/>
+          </a:prstGeom>
+          <a:noFill/>
+          <a:ln/>
+        </p:spPr>
+        <p:txBody>
+          <a:bodyPr wrap="square" lIns="0" tIns="0" rIns="0" bIns="0" rtlCol="0" anchor="ctr"/>
+          <a:lstStyle/>
+          <a:p>
+            <a:pPr algn="ctr" indent="0" marL="0">
+              <a:buNone/>
+            </a:pPr>
+            <a:r>
+              <a:rPr lang="en-US" sz="2000" i="1" dirty="0">
+                <a:solidFill>
+                  <a:srgbClr val="8B95A5"/>
+                </a:solidFill>
+                <a:latin typeface="Verdana" pitchFamily="34" charset="0"/>
+                <a:ea typeface="Verdana" pitchFamily="34" charset="-122"/>
+                <a:cs typeface="Verdana" pitchFamily="34" charset="-120"/>
+              </a:rPr>
+              <a:t>Same concept. Now each agent in the chain gets its own playbook.</a:t>
+            </a:r>
+            <a:endParaRPr lang="en-US" sz="2000" dirty="0"/>
           </a:p>
         </p:txBody>
       </p:sp>
@@ -7493,8 +8212,8 @@
         </p:nvSpPr>
         <p:spPr>
           <a:xfrm>
-            <a:off x="914400" y="1097280"/>
-            <a:ext cx="7315200" cy="2560320"/>
+            <a:off x="914400" y="914400"/>
+            <a:ext cx="7315200" cy="3291840"/>
           </a:xfrm>
           <a:prstGeom prst="rect">
             <a:avLst/>
@@ -7510,34 +8229,68 @@
               <a:buNone/>
             </a:pPr>
             <a:r>
-              <a:rPr lang="en-US" sz="4400" b="1" dirty="0">
-                <a:solidFill>
-                  <a:srgbClr val="FFFFFF"/>
+              <a:rPr lang="en-US" sz="2800" b="1" dirty="0">
+                <a:solidFill>
+                  <a:srgbClr val="635BFF"/>
                 </a:solidFill>
                 <a:latin typeface="Georgia" pitchFamily="34" charset="0"/>
                 <a:ea typeface="Georgia" pitchFamily="34" charset="-122"/>
                 <a:cs typeface="Georgia" pitchFamily="34" charset="-120"/>
               </a:rPr>
-              <a:t>Claude won't remember.</a:t>
-            </a:r>
-            <a:endParaRPr lang="en-US" sz="4400" dirty="0"/>
-          </a:p>
-          <a:p>
-            <a:pPr algn="ctr" indent="0" marL="0">
-              <a:buNone/>
-            </a:pPr>
-            <a:r>
-              <a:rPr lang="en-US" sz="4400" b="1" dirty="0">
-                <a:solidFill>
-                  <a:srgbClr val="FFFFFF"/>
+              <a:t>Go to Customize → Skills</a:t>
+            </a:r>
+            <a:endParaRPr lang="en-US" sz="2800" dirty="0"/>
+          </a:p>
+          <a:p>
+            <a:pPr algn="ctr" indent="0" marL="0">
+              <a:buNone/>
+            </a:pPr>
+            <a:r>
+              <a:rPr lang="en-US" sz="2200" i="1" dirty="0">
+                <a:solidFill>
+                  <a:srgbClr val="8B95A5"/>
+                </a:solidFill>
+                <a:latin typeface="Verdana" pitchFamily="34" charset="0"/>
+                <a:ea typeface="Verdana" pitchFamily="34" charset="-122"/>
+                <a:cs typeface="Verdana" pitchFamily="34" charset="-120"/>
+              </a:rPr>
+              <a:t>Click the Research Skill</a:t>
+            </a:r>
+            <a:endParaRPr lang="en-US" sz="2800" dirty="0"/>
+          </a:p>
+          <a:p>
+            <a:pPr algn="ctr" indent="0" marL="0">
+              <a:buNone/>
+            </a:pPr>
+            <a:r>
+              <a:rPr lang="en-US" sz="2200" i="1" dirty="0">
+                <a:solidFill>
+                  <a:srgbClr val="8B95A5"/>
+                </a:solidFill>
+                <a:latin typeface="Verdana" pitchFamily="34" charset="0"/>
+                <a:ea typeface="Verdana" pitchFamily="34" charset="-122"/>
+                <a:cs typeface="Verdana" pitchFamily="34" charset="-120"/>
+              </a:rPr>
+              <a:t>→ view its SKILL.md</a:t>
+            </a:r>
+            <a:endParaRPr lang="en-US" sz="2800" dirty="0"/>
+          </a:p>
+          <a:p>
+            <a:pPr algn="ctr" indent="0" marL="0">
+              <a:buNone/>
+            </a:pPr>
+            <a:r>
+              <a:rPr lang="en-US" sz="3600" b="1" dirty="0">
+                <a:solidFill>
+                  <a:srgbClr val="635BFF"/>
                 </a:solidFill>
                 <a:latin typeface="Georgia" pitchFamily="34" charset="0"/>
                 <a:ea typeface="Georgia" pitchFamily="34" charset="-122"/>
                 <a:cs typeface="Georgia" pitchFamily="34" charset="-120"/>
               </a:rPr>
-              <a:t>But the Skill will.</a:t>
-            </a:r>
-            <a:endParaRPr lang="en-US" sz="4400" dirty="0"/>
+              <a:t>What would you add or change?</a:t>
+            </a:r>
+            <a:endParaRPr lang="en-US" sz="2800" dirty="0"/>
           </a:p>
         </p:txBody>
       </p:sp>
@@ -7603,73 +8356,51 @@
         </p:nvSpPr>
         <p:spPr>
           <a:xfrm>
-            <a:off x="457200" y="914400"/>
-            <a:ext cx="8229600" cy="2286000"/>
-          </a:xfrm>
-          <a:prstGeom prst="rect">
-            <a:avLst/>
-          </a:prstGeom>
-          <a:noFill/>
-          <a:ln/>
-        </p:spPr>
-        <p:txBody>
-          <a:bodyPr wrap="square" lIns="0" tIns="0" rIns="0" bIns="0" rtlCol="0" anchor="b"/>
-          <a:lstStyle/>
-          <a:p>
-            <a:pPr algn="ctr" indent="0" marL="0">
-              <a:buNone/>
-            </a:pPr>
-            <a:r>
-              <a:rPr lang="en-US" sz="12000" b="1" dirty="0">
-                <a:solidFill>
-                  <a:srgbClr val="FF6B8A"/>
+            <a:off x="914400" y="1097280"/>
+            <a:ext cx="7315200" cy="2560320"/>
+          </a:xfrm>
+          <a:prstGeom prst="rect">
+            <a:avLst/>
+          </a:prstGeom>
+          <a:noFill/>
+          <a:ln/>
+        </p:spPr>
+        <p:txBody>
+          <a:bodyPr wrap="square" lIns="0" tIns="0" rIns="0" bIns="0" rtlCol="0" anchor="ctr"/>
+          <a:lstStyle/>
+          <a:p>
+            <a:pPr algn="ctr" indent="0" marL="0">
+              <a:buNone/>
+            </a:pPr>
+            <a:r>
+              <a:rPr lang="en-US" sz="4400" b="1" dirty="0">
+                <a:solidFill>
+                  <a:srgbClr val="FFFFFF"/>
                 </a:solidFill>
                 <a:latin typeface="Georgia" pitchFamily="34" charset="0"/>
                 <a:ea typeface="Georgia" pitchFamily="34" charset="-122"/>
                 <a:cs typeface="Georgia" pitchFamily="34" charset="-120"/>
               </a:rPr>
-              <a:t>1.5 hrs</a:t>
-            </a:r>
-            <a:endParaRPr lang="en-US" sz="12000" dirty="0"/>
-          </a:p>
-        </p:txBody>
-      </p:sp>
-      <p:sp>
-        <p:nvSpPr>
-          <p:cNvPr id="4" name="Text 2"/>
-          <p:cNvSpPr/>
-          <p:nvPr/>
-        </p:nvSpPr>
-        <p:spPr>
-          <a:xfrm>
-            <a:off x="1371600" y="3291840"/>
-            <a:ext cx="6400800" cy="731520"/>
-          </a:xfrm>
-          <a:prstGeom prst="rect">
-            <a:avLst/>
-          </a:prstGeom>
-          <a:noFill/>
-          <a:ln/>
-        </p:spPr>
-        <p:txBody>
-          <a:bodyPr wrap="square" lIns="0" tIns="0" rIns="0" bIns="0" rtlCol="0" anchor="t"/>
-          <a:lstStyle/>
-          <a:p>
-            <a:pPr algn="ctr" indent="0" marL="0">
-              <a:buNone/>
-            </a:pPr>
-            <a:r>
-              <a:rPr lang="en-US" sz="2800" dirty="0">
-                <a:solidFill>
-                  <a:srgbClr val="8B95A5"/>
-                </a:solidFill>
-                <a:latin typeface="Verdana" pitchFamily="34" charset="0"/>
-                <a:ea typeface="Verdana" pitchFamily="34" charset="-122"/>
-                <a:cs typeface="Verdana" pitchFamily="34" charset="-120"/>
-              </a:rPr>
-              <a:t>of you being the bottleneck</a:t>
-            </a:r>
-            <a:endParaRPr lang="en-US" sz="2800" dirty="0"/>
+              <a:t>Claude won't remember.</a:t>
+            </a:r>
+            <a:endParaRPr lang="en-US" sz="4400" dirty="0"/>
+          </a:p>
+          <a:p>
+            <a:pPr algn="ctr" indent="0" marL="0">
+              <a:buNone/>
+            </a:pPr>
+            <a:r>
+              <a:rPr lang="en-US" sz="4400" b="1" dirty="0">
+                <a:solidFill>
+                  <a:srgbClr val="FFFFFF"/>
+                </a:solidFill>
+                <a:latin typeface="Georgia" pitchFamily="34" charset="0"/>
+                <a:ea typeface="Georgia" pitchFamily="34" charset="-122"/>
+                <a:cs typeface="Georgia" pitchFamily="34" charset="-120"/>
+              </a:rPr>
+              <a:t>But the Skill will.</a:t>
+            </a:r>
+            <a:endParaRPr lang="en-US" sz="4400" dirty="0"/>
           </a:p>
         </p:txBody>
       </p:sp>
@@ -7754,13 +8485,13 @@
             <a:r>
               <a:rPr lang="en-US" sz="12000" b="1" dirty="0">
                 <a:solidFill>
-                  <a:srgbClr val="09825D"/>
+                  <a:srgbClr val="FF6B8A"/>
                 </a:solidFill>
                 <a:latin typeface="Georgia" pitchFamily="34" charset="0"/>
                 <a:ea typeface="Georgia" pitchFamily="34" charset="-122"/>
                 <a:cs typeface="Georgia" pitchFamily="34" charset="-120"/>
               </a:rPr>
-              <a:t>15 min</a:t>
+              <a:t>1.5 hrs</a:t>
             </a:r>
             <a:endParaRPr lang="en-US" sz="12000" dirty="0"/>
           </a:p>
@@ -7799,7 +8530,7 @@
                 <a:ea typeface="Verdana" pitchFamily="34" charset="-122"/>
                 <a:cs typeface="Verdana" pitchFamily="34" charset="-120"/>
               </a:rPr>
-              <a:t>of judgment — the part only humans can do</a:t>
+              <a:t>of you being the bottleneck</a:t>
             </a:r>
             <a:endParaRPr lang="en-US" sz="2800" dirty="0"/>
           </a:p>
@@ -7861,6 +8592,138 @@
       </p:sp>
       <p:sp>
         <p:nvSpPr>
+          <p:cNvPr id="3" name="Text 1"/>
+          <p:cNvSpPr/>
+          <p:nvPr/>
+        </p:nvSpPr>
+        <p:spPr>
+          <a:xfrm>
+            <a:off x="457200" y="914400"/>
+            <a:ext cx="8229600" cy="2286000"/>
+          </a:xfrm>
+          <a:prstGeom prst="rect">
+            <a:avLst/>
+          </a:prstGeom>
+          <a:noFill/>
+          <a:ln/>
+        </p:spPr>
+        <p:txBody>
+          <a:bodyPr wrap="square" lIns="0" tIns="0" rIns="0" bIns="0" rtlCol="0" anchor="b"/>
+          <a:lstStyle/>
+          <a:p>
+            <a:pPr algn="ctr" indent="0" marL="0">
+              <a:buNone/>
+            </a:pPr>
+            <a:r>
+              <a:rPr lang="en-US" sz="12000" b="1" dirty="0">
+                <a:solidFill>
+                  <a:srgbClr val="09825D"/>
+                </a:solidFill>
+                <a:latin typeface="Georgia" pitchFamily="34" charset="0"/>
+                <a:ea typeface="Georgia" pitchFamily="34" charset="-122"/>
+                <a:cs typeface="Georgia" pitchFamily="34" charset="-120"/>
+              </a:rPr>
+              <a:t>15 min</a:t>
+            </a:r>
+            <a:endParaRPr lang="en-US" sz="12000" dirty="0"/>
+          </a:p>
+        </p:txBody>
+      </p:sp>
+      <p:sp>
+        <p:nvSpPr>
+          <p:cNvPr id="4" name="Text 2"/>
+          <p:cNvSpPr/>
+          <p:nvPr/>
+        </p:nvSpPr>
+        <p:spPr>
+          <a:xfrm>
+            <a:off x="1371600" y="3291840"/>
+            <a:ext cx="6400800" cy="731520"/>
+          </a:xfrm>
+          <a:prstGeom prst="rect">
+            <a:avLst/>
+          </a:prstGeom>
+          <a:noFill/>
+          <a:ln/>
+        </p:spPr>
+        <p:txBody>
+          <a:bodyPr wrap="square" lIns="0" tIns="0" rIns="0" bIns="0" rtlCol="0" anchor="t"/>
+          <a:lstStyle/>
+          <a:p>
+            <a:pPr algn="ctr" indent="0" marL="0">
+              <a:buNone/>
+            </a:pPr>
+            <a:r>
+              <a:rPr lang="en-US" sz="2800" dirty="0">
+                <a:solidFill>
+                  <a:srgbClr val="8B95A5"/>
+                </a:solidFill>
+                <a:latin typeface="Verdana" pitchFamily="34" charset="0"/>
+                <a:ea typeface="Verdana" pitchFamily="34" charset="-122"/>
+                <a:cs typeface="Verdana" pitchFamily="34" charset="-120"/>
+              </a:rPr>
+              <a:t>of judgment — the part only humans can do</a:t>
+            </a:r>
+            <a:endParaRPr lang="en-US" sz="2800" dirty="0"/>
+          </a:p>
+        </p:txBody>
+      </p:sp>
+    </p:spTree>
+  </p:cSld>
+  <p:clrMapOvr>
+    <a:masterClrMapping/>
+  </p:clrMapOvr>
+</p:sld>
+</file>
+
+<file path=ppt/slides/slide28.xml><?xml version="1.0" encoding="utf-8"?>
+<p:sld xmlns:a="http://schemas.openxmlformats.org/drawingml/2006/main" xmlns:r="http://schemas.openxmlformats.org/officeDocument/2006/relationships" xmlns:p="http://schemas.openxmlformats.org/presentationml/2006/main">
+  <p:cSld name="Slide 28">
+    <p:bg>
+      <p:bgPr>
+        <a:solidFill>
+          <a:srgbClr val="0A2540"/>
+        </a:solidFill>
+      </p:bgPr>
+    </p:bg>
+    <p:spTree>
+      <p:nvGrpSpPr>
+        <p:cNvPr id="1" name=""/>
+        <p:cNvGrpSpPr/>
+        <p:nvPr/>
+      </p:nvGrpSpPr>
+      <p:grpSpPr>
+        <a:xfrm>
+          <a:off x="0" y="0"/>
+          <a:ext cx="0" cy="0"/>
+          <a:chOff x="0" y="0"/>
+          <a:chExt cx="0" cy="0"/>
+        </a:xfrm>
+      </p:grpSpPr>
+      <p:sp>
+        <p:nvSpPr>
+          <p:cNvPr id="2" name="Shape 0"/>
+          <p:cNvSpPr/>
+          <p:nvPr/>
+        </p:nvSpPr>
+        <p:spPr>
+          <a:xfrm>
+            <a:off x="4572000" y="2286000"/>
+            <a:ext cx="7315200" cy="5486400"/>
+          </a:xfrm>
+          <a:prstGeom prst="ellipse">
+            <a:avLst/>
+          </a:prstGeom>
+          <a:solidFill>
+            <a:srgbClr val="635BFF">
+              <a:alpha val="4000"/>
+            </a:srgbClr>
+          </a:solidFill>
+          <a:ln/>
+        </p:spPr>
+      </p:sp>
+      <p:sp>
+        <p:nvSpPr>
           <p:cNvPr id="3" name="Shape 1"/>
           <p:cNvSpPr/>
           <p:nvPr/>
@@ -8582,7 +9445,7 @@
         <p:spPr>
           <a:xfrm>
             <a:off x="914400" y="3108960"/>
-            <a:ext cx="7315200" cy="914400"/>
+            <a:ext cx="7315200" cy="548640"/>
           </a:xfrm>
           <a:prstGeom prst="rect">
             <a:avLst/>
@@ -8637,9 +9500,9 @@
 </p:sld>
 </file>
 
-<file path=ppt/slides/slide28.xml><?xml version="1.0" encoding="utf-8"?>
+<file path=ppt/slides/slide29.xml><?xml version="1.0" encoding="utf-8"?>
 <p:sld xmlns:a="http://schemas.openxmlformats.org/drawingml/2006/main" xmlns:r="http://schemas.openxmlformats.org/officeDocument/2006/relationships" xmlns:p="http://schemas.openxmlformats.org/presentationml/2006/main">
-  <p:cSld name="Slide 28">
+  <p:cSld name="Slide 29">
     <p:bg>
       <p:bgPr>
         <a:solidFill>

--- a/decks/workshop-2-orchestrator/workshop-2-orchestrator.pptx
+++ b/decks/workshop-2-orchestrator/workshop-2-orchestrator.pptx
@@ -33,10 +33,9 @@
     <p:sldId id="281" r:id="rId27"/>
     <p:sldId id="282" r:id="rId28"/>
     <p:sldId id="283" r:id="rId29"/>
-    <p:sldId id="284" r:id="rId30"/>
   </p:sldIdLst>
   <p:notesMasterIdLst>
-    <p:notesMasterId r:id="rId31"/>
+    <p:notesMasterId r:id="rId30"/>
   </p:notesMasterIdLst>
   <p:sldSz cx="9144000" cy="5143500"/>
   <p:notesSz cx="5143500" cy="9144000"/>
@@ -1674,7 +1673,7 @@
           <a:p>
             <a:r>
               <a:rPr lang="en-US" dirty="0"/>
-              <a:t>Facilitator switches to Claude for the live demo. Run the chain using pre-built org Skills: (1) New conversation → give it the research task → the Research Skill kicks in → show the structured brief output. (2) New conversation → paste the brief → the Draft Skill kicks in → show the polished proposal. (3) New conversation → paste the draft + original brief → the Review Skill kicks in → show the critique. Narrate every step. Point out what the Draft Skill doesn't know: it never saw the raw research, only the structured brief. That's filtered context — each new conversation provides isolation. Compare final output to what a single Claude conversation would have produced. Take your time — this demo earns the exercise that follows. ~7 minutes.</a:t>
+              <a:t>10 minutes. This is the main exercise. One prompt starts the chain. The Research Skill runs, saves to [topic]/brief.md, then asks the user to review. User approves → Draft Skill reads brief.md, saves draft.md, asks user to review. User approves → Review Skill reads both files, saves review.md. Human in the loop at every handoff. The Skills handle the files — attendees just say "Research [topic]" and then approve each step. Walk the room. Fallback: facilitator screen-shares one chain running live while attendees follow along.</a:t>
             </a:r>
             <a:endParaRPr lang="en-US" dirty="0"/>
           </a:p>
@@ -1762,7 +1761,7 @@
           <a:p>
             <a:r>
               <a:rPr lang="en-US" dirty="0"/>
-              <a:t>10 minutes. Attendees choose their running task from Workshop 1 or the tea presentation. The org Skills auto-activate based on the task. Fallback if time runs short: Phase 1 becomes a facilitator demo, attendees do Phase 2 only. The discussion matters more than both phases completing. Ask: "Where did the chain produce better results? Where did the handoff lose something?"</a:t>
+              <a:t>Have them open the folder on their Mac. Three files, three phases, each produced by a different Skill. Point out what draft.md doesn't contain: it was written from brief.md, not from the raw sources. The Draft Skill never saw the original research — only the structured brief. That's the power of decomposition. Compare: "How does this compare to asking Claude to do everything in one prompt?" The chain output is more structured, more thorough, better reviewed. Ask: "Where did the chain produce better results? What would you change about the handoff?"</a:t>
             </a:r>
             <a:endParaRPr lang="en-US" dirty="0"/>
           </a:p>
@@ -1850,7 +1849,7 @@
           <a:p>
             <a:r>
               <a:rPr lang="en-US" dirty="0"/>
-              <a:t>The Workshop 1 callback. In the last session they set up rules (on the page) and pulled Skills from the drawer. Each org Skill in the chain is the same idea taken further — each agent gets its own drawer, its own expertise. They've been building persistent context since last session; now each step in the chain gets its own playbook.</a:t>
+              <a:t>Show where to find the Skill instructions (Customize → Skills → click the Skill). Take 2-3 suggestions from the group. Discuss what difference each change would make. The SKILL.md is tangible — they can see it, read it, edit it. "When you edit that SKILL.md, every future use gets better. Your feedback becomes the skill." Workshop 1 callback: rules go on the page, Skills live in the drawer. Each step in the chain has its own drawer.</a:t>
             </a:r>
             <a:endParaRPr lang="en-US" dirty="0"/>
           </a:p>
@@ -1938,7 +1937,7 @@
           <a:p>
             <a:r>
               <a:rPr lang="en-US" dirty="0"/>
-              <a:t>Show where to find the Skill instructions (Customize → Skills → click the Skill). Take 2-3 suggestions from the group. Discuss what difference each change would make. The SKILL.md is tangible — they can see it, read it, edit it. "When you edit that SKILL.md, every future use gets better. Your feedback becomes the skill."</a:t>
+              <a:t>Emotional climax. Give this a full beat. "And as an org Skill, when you improve it, everyone benefits." This is the payoff of the entire skills arc that started in Workshop 1. The drawer gets better every time you edit a SKILL.md — and it's everyone's drawer. For Pro plan audiences: "Every future use benefits."</a:t>
             </a:r>
             <a:endParaRPr lang="en-US" dirty="0"/>
           </a:p>
@@ -2026,7 +2025,7 @@
           <a:p>
             <a:r>
               <a:rPr lang="en-US" dirty="0"/>
-              <a:t>Emotional climax. Give this a full beat. "And as an org Skill, when you improve it, everyone benefits." This is the payoff of the entire skills arc that started in Workshop 1. The drawer gets better every time you edit a SKILL.md — and it's everyone's drawer. For Pro plan audiences: "Every future use benefits."</a:t>
+              <a:t>The rational payoff begins. Manual workflow: search, copy-paste, draft, re-prompt, reformat, review, apply. All the steps they recognised in Slide 3. "1.5 hours of grunt work where you're the bottleneck at every step."</a:t>
             </a:r>
             <a:endParaRPr lang="en-US" dirty="0"/>
           </a:p>
@@ -2114,7 +2113,7 @@
           <a:p>
             <a:r>
               <a:rPr lang="en-US" dirty="0"/>
-              <a:t>The rational payoff begins. Manual workflow: search, copy-paste, draft, re-prompt, reformat, review, apply. All the steps they recognised in Slide 3. "1.5 hours of grunt work where you're the bottleneck at every step."</a:t>
+              <a:t>Chained workflow: Skills handle 1 hour 15 minutes of work. You spend 15 minutes on judgment — reviewing, deciding, approving. "Same tea presentation. The chain gets smarter every time. Your feedback becomes Skills."</a:t>
             </a:r>
             <a:endParaRPr lang="en-US" dirty="0"/>
           </a:p>
@@ -2202,7 +2201,7 @@
           <a:p>
             <a:r>
               <a:rPr lang="en-US" dirty="0"/>
-              <a:t>Chained workflow: Skills handle 1 hour 15 minutes of work. You spend 15 minutes on judgment — reviewing, deciding, approving. "Same tea presentation. The chain gets smarter every time. Your feedback becomes Skills."</a:t>
+              <a:t>Graduation moment. "You learned to whisper. You became a strategist. You let Claude operate. You orchestrated the brigade." This is the emotional payoff. Make it feel earned — they completed a 2-session AI Academy. Builder is still dimmed — that's the horizon for those who want to go further.</a:t>
             </a:r>
             <a:endParaRPr lang="en-US" dirty="0"/>
           </a:p>
@@ -2290,7 +2289,7 @@
           <a:p>
             <a:r>
               <a:rPr lang="en-US" dirty="0"/>
-              <a:t>Graduation moment. "You learned to whisper. You became a strategist. You let Claude operate. You orchestrated the brigade." This is the emotional payoff. Make it feel earned — they completed a 2-session AI Academy. Builder is still dimmed — that's the horizon for those who want to go further.</a:t>
+              <a:t>Final CTA. "Now go try it — one task, this week." Builder tease for the curious: "And if you want to go further — building integrations, connecting Claude to your actual systems, automating entire workflows — that's the Builder level. That's what's next." But don't oversell — most attendees won't go there, and that's fine.</a:t>
             </a:r>
             <a:endParaRPr lang="en-US" dirty="0"/>
           </a:p>
@@ -2314,94 +2313,6 @@
             <a:fld id="{F7021451-1387-4CA6-816F-3879F97B5CBC}" type="slidenum">
               <a:rPr lang="en-US"/>
               <a:t>28</a:t>
-            </a:fld>
-            <a:endParaRPr lang="en-US"/>
-          </a:p>
-        </p:txBody>
-      </p:sp>
-    </p:spTree>
-    <p:extLst>
-      <p:ext uri="{BB962C8B-B14F-4D97-AF65-F5344CB8AC3E}">
-        <p14:creationId xmlns:p14="http://schemas.microsoft.com/office/powerpoint/2010/main" val="1024086991"/>
-      </p:ext>
-    </p:extLst>
-  </p:cSld>
-  <p:clrMapOvr>
-    <a:masterClrMapping/>
-  </p:clrMapOvr>
-</p:notes>
-</file>
-
-<file path=ppt/notesSlides/notesSlide29.xml><?xml version="1.0" encoding="utf-8"?>
-<p:notes xmlns:a="http://schemas.openxmlformats.org/drawingml/2006/main" xmlns:r="http://schemas.openxmlformats.org/officeDocument/2006/relationships" xmlns:p="http://schemas.openxmlformats.org/presentationml/2006/main">
-  <p:cSld>
-    <p:spTree>
-      <p:nvGrpSpPr>
-        <p:cNvPr id="1" name=""/>
-        <p:cNvGrpSpPr/>
-        <p:nvPr/>
-      </p:nvGrpSpPr>
-      <p:grpSpPr>
-        <a:xfrm>
-          <a:off x="0" y="0"/>
-          <a:ext cx="0" cy="0"/>
-          <a:chOff x="0" y="0"/>
-          <a:chExt cx="0" cy="0"/>
-        </a:xfrm>
-      </p:grpSpPr>
-      <p:sp>
-        <p:nvSpPr>
-          <p:cNvPr id="2" name="Slide Image Placeholder 1"/>
-          <p:cNvSpPr>
-            <a:spLocks noGrp="1" noRot="1" noChangeAspect="1"/>
-          </p:cNvSpPr>
-          <p:nvPr>
-            <p:ph type="sldImg"/>
-          </p:nvPr>
-        </p:nvSpPr>
-        <p:spPr/>
-      </p:sp>
-      <p:sp>
-        <p:nvSpPr>
-          <p:cNvPr id="3" name="Notes Placeholder 2"/>
-          <p:cNvSpPr>
-            <a:spLocks noGrp="1"/>
-          </p:cNvSpPr>
-          <p:nvPr>
-            <p:ph type="body" idx="1"/>
-          </p:nvPr>
-        </p:nvSpPr>
-        <p:spPr/>
-        <p:txBody>
-          <a:bodyPr/>
-          <a:lstStyle/>
-          <a:p>
-            <a:r>
-              <a:rPr lang="en-US" dirty="0"/>
-              <a:t>Final CTA. "Now go try it — one task, this week." Builder tease for the curious: "And if you want to go further — building integrations, connecting Claude to your actual systems, automating entire workflows — that's the Builder level. That's what's next." But don't oversell — most attendees won't go there, and that's fine.</a:t>
-            </a:r>
-            <a:endParaRPr lang="en-US" dirty="0"/>
-          </a:p>
-        </p:txBody>
-      </p:sp>
-      <p:sp>
-        <p:nvSpPr>
-          <p:cNvPr id="4" name="Slide Number Placeholder 3"/>
-          <p:cNvSpPr>
-            <a:spLocks noGrp="1"/>
-          </p:cNvSpPr>
-          <p:nvPr>
-            <p:ph type="sldNum" sz="quarter" idx="10"/>
-          </p:nvPr>
-        </p:nvSpPr>
-        <p:spPr/>
-        <p:txBody>
-          <a:bodyPr/>
-          <a:lstStyle/>
-          <a:p>
-            <a:fld id="{F7021451-1387-4CA6-816F-3879F97B5CBC}" type="slidenum">
-              <a:rPr lang="en-US"/>
-              <a:t>29</a:t>
             </a:fld>
             <a:endParaRPr lang="en-US"/>
           </a:p>
@@ -7630,8 +7541,8 @@
         </p:nvSpPr>
         <p:spPr>
           <a:xfrm>
-            <a:off x="457200" y="1463040"/>
-            <a:ext cx="8229600" cy="1097280"/>
+            <a:off x="914400" y="914400"/>
+            <a:ext cx="7315200" cy="3291840"/>
           </a:xfrm>
           <a:prstGeom prst="rect">
             <a:avLst/>
@@ -7647,54 +7558,49 @@
               <a:buNone/>
             </a:pPr>
             <a:r>
-              <a:rPr lang="en-US" sz="5400" b="1" dirty="0">
-                <a:solidFill>
-                  <a:srgbClr val="FFFFFF"/>
+              <a:rPr lang="en-US" sz="2800" b="1" dirty="0">
+                <a:solidFill>
+                  <a:srgbClr val="635BFF"/>
                 </a:solidFill>
                 <a:latin typeface="Georgia" pitchFamily="34" charset="0"/>
                 <a:ea typeface="Georgia" pitchFamily="34" charset="-122"/>
                 <a:cs typeface="Georgia" pitchFamily="34" charset="-120"/>
               </a:rPr>
-              <a:t>Demo</a:t>
-            </a:r>
-            <a:endParaRPr lang="en-US" sz="5400" dirty="0"/>
-          </a:p>
-        </p:txBody>
-      </p:sp>
-      <p:sp>
-        <p:nvSpPr>
-          <p:cNvPr id="4" name="Text 2"/>
-          <p:cNvSpPr/>
-          <p:nvPr/>
-        </p:nvSpPr>
-        <p:spPr>
-          <a:xfrm>
-            <a:off x="914400" y="2651760"/>
-            <a:ext cx="7315200" cy="548640"/>
-          </a:xfrm>
-          <a:prstGeom prst="rect">
-            <a:avLst/>
-          </a:prstGeom>
-          <a:noFill/>
-          <a:ln/>
-        </p:spPr>
-        <p:txBody>
-          <a:bodyPr wrap="square" lIns="0" tIns="0" rIns="0" bIns="0" rtlCol="0" anchor="ctr"/>
-          <a:lstStyle/>
-          <a:p>
-            <a:pPr algn="ctr" indent="0" marL="0">
-              <a:buNone/>
-            </a:pPr>
-            <a:r>
-              <a:rPr lang="en-US" sz="2800" i="1" dirty="0">
+              <a:t>In Cowork:</a:t>
+            </a:r>
+            <a:endParaRPr lang="en-US" sz="2800" dirty="0"/>
+          </a:p>
+          <a:p>
+            <a:pPr algn="ctr" indent="0" marL="0">
+              <a:buNone/>
+            </a:pPr>
+            <a:r>
+              <a:rPr lang="en-US" sz="3600" b="1" dirty="0">
                 <a:solidFill>
                   <a:srgbClr val="635BFF"/>
+                </a:solidFill>
+                <a:latin typeface="Georgia" pitchFamily="34" charset="0"/>
+                <a:ea typeface="Georgia" pitchFamily="34" charset="-122"/>
+                <a:cs typeface="Georgia" pitchFamily="34" charset="-120"/>
+              </a:rPr>
+              <a:t>"Research [topic]"</a:t>
+            </a:r>
+            <a:endParaRPr lang="en-US" sz="2800" dirty="0"/>
+          </a:p>
+          <a:p>
+            <a:pPr algn="ctr" indent="0" marL="0">
+              <a:buNone/>
+            </a:pPr>
+            <a:r>
+              <a:rPr lang="en-US" sz="2200" i="1" dirty="0">
+                <a:solidFill>
+                  <a:srgbClr val="8B95A5"/>
                 </a:solidFill>
                 <a:latin typeface="Verdana" pitchFamily="34" charset="0"/>
                 <a:ea typeface="Verdana" pitchFamily="34" charset="-122"/>
                 <a:cs typeface="Verdana" pitchFamily="34" charset="-120"/>
               </a:rPr>
-              <a:t>Watch a 3-phase chain run live</a:t>
+              <a:t>Review the brief. Then follow the chain.</a:t>
             </a:r>
             <a:endParaRPr lang="en-US" sz="2800" dirty="0"/>
           </a:p>
@@ -7762,92 +7668,24 @@
         </p:nvSpPr>
         <p:spPr>
           <a:xfrm>
-            <a:off x="914400" y="914400"/>
-            <a:ext cx="7315200" cy="3291840"/>
-          </a:xfrm>
-          <a:prstGeom prst="rect">
-            <a:avLst/>
-          </a:prstGeom>
-          <a:noFill/>
-          <a:ln/>
-        </p:spPr>
-        <p:txBody>
-          <a:bodyPr wrap="square" lIns="0" tIns="0" rIns="0" bIns="0" rtlCol="0" anchor="ctr"/>
-          <a:lstStyle/>
-          <a:p>
-            <a:pPr algn="ctr" indent="0" marL="0">
-              <a:buNone/>
-            </a:pPr>
-            <a:r>
-              <a:rPr lang="en-US" sz="2800" b="1" dirty="0">
-                <a:solidFill>
-                  <a:srgbClr val="635BFF"/>
-                </a:solidFill>
-                <a:latin typeface="Georgia" pitchFamily="34" charset="0"/>
-                <a:ea typeface="Georgia" pitchFamily="34" charset="-122"/>
-                <a:cs typeface="Georgia" pitchFamily="34" charset="-120"/>
-              </a:rPr>
-              <a:t>Phase 1: New conversation</a:t>
-            </a:r>
-            <a:endParaRPr lang="en-US" sz="2800" dirty="0"/>
-          </a:p>
-          <a:p>
-            <a:pPr algn="ctr" indent="0" marL="0">
-              <a:buNone/>
-            </a:pPr>
-            <a:r>
-              <a:rPr lang="en-US" sz="2800" b="1" dirty="0">
-                <a:solidFill>
-                  <a:srgbClr val="635BFF"/>
-                </a:solidFill>
-                <a:latin typeface="Georgia" pitchFamily="34" charset="0"/>
-                <a:ea typeface="Georgia" pitchFamily="34" charset="-122"/>
-                <a:cs typeface="Georgia" pitchFamily="34" charset="-120"/>
-              </a:rPr>
-              <a:t>→ give it your task → save output</a:t>
-            </a:r>
-            <a:endParaRPr lang="en-US" sz="2800" dirty="0"/>
-          </a:p>
-          <a:p>
-            <a:pPr algn="ctr" indent="0" marL="0">
-              <a:buNone/>
-            </a:pPr>
-            <a:r>
-              <a:rPr lang="en-US" sz="2800" b="1" dirty="0">
-                <a:solidFill>
-                  <a:srgbClr val="635BFF"/>
-                </a:solidFill>
-                <a:latin typeface="Georgia" pitchFamily="34" charset="0"/>
-                <a:ea typeface="Georgia" pitchFamily="34" charset="-122"/>
-                <a:cs typeface="Georgia" pitchFamily="34" charset="-120"/>
-              </a:rPr>
-              <a:t>Phase 2: New conversation</a:t>
-            </a:r>
-            <a:endParaRPr lang="en-US" sz="2800" dirty="0"/>
-          </a:p>
-          <a:p>
-            <a:pPr algn="ctr" indent="0" marL="0">
-              <a:buNone/>
-            </a:pPr>
-            <a:r>
-              <a:rPr lang="en-US" sz="2800" b="1" dirty="0">
-                <a:solidFill>
-                  <a:srgbClr val="635BFF"/>
-                </a:solidFill>
-                <a:latin typeface="Georgia" pitchFamily="34" charset="0"/>
-                <a:ea typeface="Georgia" pitchFamily="34" charset="-122"/>
-                <a:cs typeface="Georgia" pitchFamily="34" charset="-120"/>
-              </a:rPr>
-              <a:t>→ paste Phase 1's output → draft</a:t>
-            </a:r>
-            <a:endParaRPr lang="en-US" sz="2800" dirty="0"/>
-          </a:p>
-          <a:p>
-            <a:pPr algn="ctr" indent="0" marL="0">
-              <a:buNone/>
-            </a:pPr>
-            <a:r>
-              <a:rPr lang="en-US" sz="2200" i="1" dirty="0">
+            <a:off x="1371600" y="731520"/>
+            <a:ext cx="6400800" cy="731520"/>
+          </a:xfrm>
+          <a:prstGeom prst="rect">
+            <a:avLst/>
+          </a:prstGeom>
+          <a:noFill/>
+          <a:ln/>
+        </p:spPr>
+        <p:txBody>
+          <a:bodyPr wrap="square" lIns="0" tIns="0" rIns="0" bIns="0" rtlCol="0" anchor="b"/>
+          <a:lstStyle/>
+          <a:p>
+            <a:pPr indent="0" marL="0">
+              <a:buNone/>
+            </a:pPr>
+            <a:r>
+              <a:rPr lang="en-US" sz="2800" dirty="0">
                 <a:solidFill>
                   <a:srgbClr val="8B95A5"/>
                 </a:solidFill>
@@ -7855,26 +7693,342 @@
                 <a:ea typeface="Verdana" pitchFamily="34" charset="-122"/>
                 <a:cs typeface="Verdana" pitchFamily="34" charset="-120"/>
               </a:rPr>
-              <a:t>How does this compare to one</a:t>
+              <a:t>[topic]/</a:t>
             </a:r>
             <a:endParaRPr lang="en-US" sz="2800" dirty="0"/>
           </a:p>
-          <a:p>
-            <a:pPr algn="ctr" indent="0" marL="0">
-              <a:buNone/>
-            </a:pPr>
-            <a:r>
-              <a:rPr lang="en-US" sz="2200" i="1" dirty="0">
-                <a:solidFill>
-                  <a:srgbClr val="8B95A5"/>
+        </p:txBody>
+      </p:sp>
+      <p:sp>
+        <p:nvSpPr>
+          <p:cNvPr id="4" name="Text 2"/>
+          <p:cNvSpPr/>
+          <p:nvPr/>
+        </p:nvSpPr>
+        <p:spPr>
+          <a:xfrm>
+            <a:off x="1828800" y="1645920"/>
+            <a:ext cx="3200400" cy="640080"/>
+          </a:xfrm>
+          <a:prstGeom prst="rect">
+            <a:avLst/>
+          </a:prstGeom>
+          <a:noFill/>
+          <a:ln/>
+        </p:spPr>
+        <p:txBody>
+          <a:bodyPr wrap="square" lIns="0" tIns="0" rIns="0" bIns="0" rtlCol="0" anchor="ctr"/>
+          <a:lstStyle/>
+          <a:p>
+            <a:pPr indent="0" marL="0">
+              <a:buNone/>
+            </a:pPr>
+            <a:r>
+              <a:rPr lang="en-US" sz="2600" b="1" dirty="0">
+                <a:solidFill>
+                  <a:srgbClr val="FFFFFF"/>
                 </a:solidFill>
                 <a:latin typeface="Verdana" pitchFamily="34" charset="0"/>
                 <a:ea typeface="Verdana" pitchFamily="34" charset="-122"/>
                 <a:cs typeface="Verdana" pitchFamily="34" charset="-120"/>
               </a:rPr>
-              <a:t>conversation doing everything?</a:t>
-            </a:r>
-            <a:endParaRPr lang="en-US" sz="2800" dirty="0"/>
+              <a:t>brief.md</a:t>
+            </a:r>
+            <a:endParaRPr lang="en-US" sz="2600" dirty="0"/>
+          </a:p>
+        </p:txBody>
+      </p:sp>
+      <p:sp>
+        <p:nvSpPr>
+          <p:cNvPr id="5" name="Text 3"/>
+          <p:cNvSpPr/>
+          <p:nvPr/>
+        </p:nvSpPr>
+        <p:spPr>
+          <a:xfrm>
+            <a:off x="5303520" y="1645920"/>
+            <a:ext cx="2286000" cy="640080"/>
+          </a:xfrm>
+          <a:prstGeom prst="rect">
+            <a:avLst/>
+          </a:prstGeom>
+          <a:noFill/>
+          <a:ln/>
+        </p:spPr>
+        <p:txBody>
+          <a:bodyPr wrap="square" lIns="0" tIns="0" rIns="0" bIns="0" rtlCol="0" anchor="ctr"/>
+          <a:lstStyle/>
+          <a:p>
+            <a:pPr indent="0" marL="0">
+              <a:buNone/>
+            </a:pPr>
+            <a:r>
+              <a:rPr lang="en-US" sz="1800" i="1" dirty="0">
+                <a:solidFill>
+                  <a:srgbClr val="635BFF"/>
+                </a:solidFill>
+                <a:latin typeface="Verdana" pitchFamily="34" charset="0"/>
+                <a:ea typeface="Verdana" pitchFamily="34" charset="-122"/>
+                <a:cs typeface="Verdana" pitchFamily="34" charset="-120"/>
+              </a:rPr>
+              <a:t>Research Skill</a:t>
+            </a:r>
+            <a:endParaRPr lang="en-US" sz="1800" dirty="0"/>
+          </a:p>
+        </p:txBody>
+      </p:sp>
+      <p:sp>
+        <p:nvSpPr>
+          <p:cNvPr id="6" name="Shape 4"/>
+          <p:cNvSpPr/>
+          <p:nvPr/>
+        </p:nvSpPr>
+        <p:spPr>
+          <a:xfrm>
+            <a:off x="1371600" y="1828800"/>
+            <a:ext cx="274320" cy="274320"/>
+          </a:xfrm>
+          <a:prstGeom prst="ellipse">
+            <a:avLst/>
+          </a:prstGeom>
+          <a:solidFill>
+            <a:srgbClr val="635BFF"/>
+          </a:solidFill>
+          <a:ln/>
+        </p:spPr>
+      </p:sp>
+      <p:sp>
+        <p:nvSpPr>
+          <p:cNvPr id="7" name="Text 5"/>
+          <p:cNvSpPr/>
+          <p:nvPr/>
+        </p:nvSpPr>
+        <p:spPr>
+          <a:xfrm>
+            <a:off x="1828800" y="2468880"/>
+            <a:ext cx="3200400" cy="640080"/>
+          </a:xfrm>
+          <a:prstGeom prst="rect">
+            <a:avLst/>
+          </a:prstGeom>
+          <a:noFill/>
+          <a:ln/>
+        </p:spPr>
+        <p:txBody>
+          <a:bodyPr wrap="square" lIns="0" tIns="0" rIns="0" bIns="0" rtlCol="0" anchor="ctr"/>
+          <a:lstStyle/>
+          <a:p>
+            <a:pPr indent="0" marL="0">
+              <a:buNone/>
+            </a:pPr>
+            <a:r>
+              <a:rPr lang="en-US" sz="2600" b="1" dirty="0">
+                <a:solidFill>
+                  <a:srgbClr val="FFFFFF"/>
+                </a:solidFill>
+                <a:latin typeface="Verdana" pitchFamily="34" charset="0"/>
+                <a:ea typeface="Verdana" pitchFamily="34" charset="-122"/>
+                <a:cs typeface="Verdana" pitchFamily="34" charset="-120"/>
+              </a:rPr>
+              <a:t>draft.md</a:t>
+            </a:r>
+            <a:endParaRPr lang="en-US" sz="2600" dirty="0"/>
+          </a:p>
+        </p:txBody>
+      </p:sp>
+      <p:sp>
+        <p:nvSpPr>
+          <p:cNvPr id="8" name="Text 6"/>
+          <p:cNvSpPr/>
+          <p:nvPr/>
+        </p:nvSpPr>
+        <p:spPr>
+          <a:xfrm>
+            <a:off x="5303520" y="2468880"/>
+            <a:ext cx="2286000" cy="640080"/>
+          </a:xfrm>
+          <a:prstGeom prst="rect">
+            <a:avLst/>
+          </a:prstGeom>
+          <a:noFill/>
+          <a:ln/>
+        </p:spPr>
+        <p:txBody>
+          <a:bodyPr wrap="square" lIns="0" tIns="0" rIns="0" bIns="0" rtlCol="0" anchor="ctr"/>
+          <a:lstStyle/>
+          <a:p>
+            <a:pPr indent="0" marL="0">
+              <a:buNone/>
+            </a:pPr>
+            <a:r>
+              <a:rPr lang="en-US" sz="1800" i="1" dirty="0">
+                <a:solidFill>
+                  <a:srgbClr val="635BFF"/>
+                </a:solidFill>
+                <a:latin typeface="Verdana" pitchFamily="34" charset="0"/>
+                <a:ea typeface="Verdana" pitchFamily="34" charset="-122"/>
+                <a:cs typeface="Verdana" pitchFamily="34" charset="-120"/>
+              </a:rPr>
+              <a:t>Draft Skill</a:t>
+            </a:r>
+            <a:endParaRPr lang="en-US" sz="1800" dirty="0"/>
+          </a:p>
+        </p:txBody>
+      </p:sp>
+      <p:sp>
+        <p:nvSpPr>
+          <p:cNvPr id="9" name="Shape 7"/>
+          <p:cNvSpPr/>
+          <p:nvPr/>
+        </p:nvSpPr>
+        <p:spPr>
+          <a:xfrm>
+            <a:off x="1371600" y="2651760"/>
+            <a:ext cx="274320" cy="274320"/>
+          </a:xfrm>
+          <a:prstGeom prst="ellipse">
+            <a:avLst/>
+          </a:prstGeom>
+          <a:solidFill>
+            <a:srgbClr val="635BFF"/>
+          </a:solidFill>
+          <a:ln/>
+        </p:spPr>
+      </p:sp>
+      <p:sp>
+        <p:nvSpPr>
+          <p:cNvPr id="10" name="Text 8"/>
+          <p:cNvSpPr/>
+          <p:nvPr/>
+        </p:nvSpPr>
+        <p:spPr>
+          <a:xfrm>
+            <a:off x="1828800" y="3291840"/>
+            <a:ext cx="3200400" cy="640080"/>
+          </a:xfrm>
+          <a:prstGeom prst="rect">
+            <a:avLst/>
+          </a:prstGeom>
+          <a:noFill/>
+          <a:ln/>
+        </p:spPr>
+        <p:txBody>
+          <a:bodyPr wrap="square" lIns="0" tIns="0" rIns="0" bIns="0" rtlCol="0" anchor="ctr"/>
+          <a:lstStyle/>
+          <a:p>
+            <a:pPr indent="0" marL="0">
+              <a:buNone/>
+            </a:pPr>
+            <a:r>
+              <a:rPr lang="en-US" sz="2600" b="1" dirty="0">
+                <a:solidFill>
+                  <a:srgbClr val="FFFFFF"/>
+                </a:solidFill>
+                <a:latin typeface="Verdana" pitchFamily="34" charset="0"/>
+                <a:ea typeface="Verdana" pitchFamily="34" charset="-122"/>
+                <a:cs typeface="Verdana" pitchFamily="34" charset="-120"/>
+              </a:rPr>
+              <a:t>review.md</a:t>
+            </a:r>
+            <a:endParaRPr lang="en-US" sz="2600" dirty="0"/>
+          </a:p>
+        </p:txBody>
+      </p:sp>
+      <p:sp>
+        <p:nvSpPr>
+          <p:cNvPr id="11" name="Text 9"/>
+          <p:cNvSpPr/>
+          <p:nvPr/>
+        </p:nvSpPr>
+        <p:spPr>
+          <a:xfrm>
+            <a:off x="5303520" y="3291840"/>
+            <a:ext cx="2286000" cy="640080"/>
+          </a:xfrm>
+          <a:prstGeom prst="rect">
+            <a:avLst/>
+          </a:prstGeom>
+          <a:noFill/>
+          <a:ln/>
+        </p:spPr>
+        <p:txBody>
+          <a:bodyPr wrap="square" lIns="0" tIns="0" rIns="0" bIns="0" rtlCol="0" anchor="ctr"/>
+          <a:lstStyle/>
+          <a:p>
+            <a:pPr indent="0" marL="0">
+              <a:buNone/>
+            </a:pPr>
+            <a:r>
+              <a:rPr lang="en-US" sz="1800" i="1" dirty="0">
+                <a:solidFill>
+                  <a:srgbClr val="635BFF"/>
+                </a:solidFill>
+                <a:latin typeface="Verdana" pitchFamily="34" charset="0"/>
+                <a:ea typeface="Verdana" pitchFamily="34" charset="-122"/>
+                <a:cs typeface="Verdana" pitchFamily="34" charset="-120"/>
+              </a:rPr>
+              <a:t>Review Skill</a:t>
+            </a:r>
+            <a:endParaRPr lang="en-US" sz="1800" dirty="0"/>
+          </a:p>
+        </p:txBody>
+      </p:sp>
+      <p:sp>
+        <p:nvSpPr>
+          <p:cNvPr id="12" name="Shape 10"/>
+          <p:cNvSpPr/>
+          <p:nvPr/>
+        </p:nvSpPr>
+        <p:spPr>
+          <a:xfrm>
+            <a:off x="1371600" y="3474720"/>
+            <a:ext cx="274320" cy="274320"/>
+          </a:xfrm>
+          <a:prstGeom prst="ellipse">
+            <a:avLst/>
+          </a:prstGeom>
+          <a:solidFill>
+            <a:srgbClr val="635BFF"/>
+          </a:solidFill>
+          <a:ln/>
+        </p:spPr>
+      </p:sp>
+      <p:sp>
+        <p:nvSpPr>
+          <p:cNvPr id="13" name="Text 11"/>
+          <p:cNvSpPr/>
+          <p:nvPr/>
+        </p:nvSpPr>
+        <p:spPr>
+          <a:xfrm>
+            <a:off x="1371600" y="4114800"/>
+            <a:ext cx="6400800" cy="548640"/>
+          </a:xfrm>
+          <a:prstGeom prst="rect">
+            <a:avLst/>
+          </a:prstGeom>
+          <a:noFill/>
+          <a:ln/>
+        </p:spPr>
+        <p:txBody>
+          <a:bodyPr wrap="square" lIns="0" tIns="0" rIns="0" bIns="0" rtlCol="0" anchor="t"/>
+          <a:lstStyle/>
+          <a:p>
+            <a:pPr indent="0" marL="0">
+              <a:buNone/>
+            </a:pPr>
+            <a:r>
+              <a:rPr lang="en-US" sz="1800" i="1" dirty="0">
+                <a:solidFill>
+                  <a:srgbClr val="8B95A5"/>
+                </a:solidFill>
+                <a:latin typeface="Verdana" pitchFamily="34" charset="0"/>
+                <a:ea typeface="Verdana" pitchFamily="34" charset="-122"/>
+                <a:cs typeface="Verdana" pitchFamily="34" charset="-120"/>
+              </a:rPr>
+              <a:t>draft.md never saw the raw sources. That's filtered context.</a:t>
+            </a:r>
+            <a:endParaRPr lang="en-US" sz="1800" dirty="0"/>
           </a:p>
         </p:txBody>
       </p:sp>
@@ -7940,17 +8094,17 @@
         </p:nvSpPr>
         <p:spPr>
           <a:xfrm>
-            <a:off x="457200" y="1097280"/>
-            <a:ext cx="3840480" cy="731520"/>
-          </a:xfrm>
-          <a:prstGeom prst="rect">
-            <a:avLst/>
-          </a:prstGeom>
-          <a:noFill/>
-          <a:ln/>
-        </p:spPr>
-        <p:txBody>
-          <a:bodyPr wrap="square" lIns="0" tIns="0" rIns="0" bIns="0" rtlCol="0" anchor="b"/>
+            <a:off x="914400" y="914400"/>
+            <a:ext cx="7315200" cy="3291840"/>
+          </a:xfrm>
+          <a:prstGeom prst="rect">
+            <a:avLst/>
+          </a:prstGeom>
+          <a:noFill/>
+          <a:ln/>
+        </p:spPr>
+        <p:txBody>
+          <a:bodyPr wrap="square" lIns="0" tIns="0" rIns="0" bIns="0" rtlCol="0" anchor="ctr"/>
           <a:lstStyle/>
           <a:p>
             <a:pPr algn="ctr" indent="0" marL="0">
@@ -7959,44 +8113,22 @@
             <a:r>
               <a:rPr lang="en-US" sz="2800" b="1" dirty="0">
                 <a:solidFill>
-                  <a:srgbClr val="8B95A5"/>
+                  <a:srgbClr val="635BFF"/>
                 </a:solidFill>
                 <a:latin typeface="Georgia" pitchFamily="34" charset="0"/>
                 <a:ea typeface="Georgia" pitchFamily="34" charset="-122"/>
                 <a:cs typeface="Georgia" pitchFamily="34" charset="-120"/>
               </a:rPr>
-              <a:t>Workshop 1</a:t>
+              <a:t>Go to Customize → Skills</a:t>
             </a:r>
             <a:endParaRPr lang="en-US" sz="2800" dirty="0"/>
           </a:p>
-        </p:txBody>
-      </p:sp>
-      <p:sp>
-        <p:nvSpPr>
-          <p:cNvPr id="4" name="Text 2"/>
-          <p:cNvSpPr/>
-          <p:nvPr/>
-        </p:nvSpPr>
-        <p:spPr>
-          <a:xfrm>
-            <a:off x="457200" y="2011680"/>
-            <a:ext cx="3840480" cy="548640"/>
-          </a:xfrm>
-          <a:prstGeom prst="rect">
-            <a:avLst/>
-          </a:prstGeom>
-          <a:noFill/>
-          <a:ln/>
-        </p:spPr>
-        <p:txBody>
-          <a:bodyPr wrap="square" lIns="0" tIns="0" rIns="0" bIns="0" rtlCol="0" anchor="t"/>
-          <a:lstStyle/>
-          <a:p>
-            <a:pPr algn="ctr" indent="0" marL="0">
-              <a:buNone/>
-            </a:pPr>
-            <a:r>
-              <a:rPr lang="en-US" sz="2000" i="1" dirty="0">
+          <a:p>
+            <a:pPr algn="ctr" indent="0" marL="0">
+              <a:buNone/>
+            </a:pPr>
+            <a:r>
+              <a:rPr lang="en-US" sz="2200" i="1" dirty="0">
                 <a:solidFill>
                   <a:srgbClr val="8B95A5"/>
                 </a:solidFill>
@@ -8004,149 +8136,43 @@
                 <a:ea typeface="Verdana" pitchFamily="34" charset="-122"/>
                 <a:cs typeface="Verdana" pitchFamily="34" charset="-120"/>
               </a:rPr>
-              <a:t>Your rules + Skills</a:t>
-            </a:r>
-            <a:endParaRPr lang="en-US" sz="2000" dirty="0"/>
-          </a:p>
-        </p:txBody>
-      </p:sp>
-      <p:sp>
-        <p:nvSpPr>
-          <p:cNvPr id="5" name="Shape 3"/>
-          <p:cNvSpPr/>
-          <p:nvPr/>
-        </p:nvSpPr>
-        <p:spPr>
-          <a:xfrm>
-            <a:off x="4572000" y="914400"/>
-            <a:ext cx="0" cy="2377440"/>
-          </a:xfrm>
-          <a:prstGeom prst="line">
-            <a:avLst/>
-          </a:prstGeom>
-          <a:noFill/>
-          <a:ln w="25400">
-            <a:solidFill>
-              <a:srgbClr val="635BFF"/>
-            </a:solidFill>
-            <a:prstDash val="solid"/>
-          </a:ln>
-        </p:spPr>
-      </p:sp>
-      <p:sp>
-        <p:nvSpPr>
-          <p:cNvPr id="6" name="Text 4"/>
-          <p:cNvSpPr/>
-          <p:nvPr/>
-        </p:nvSpPr>
-        <p:spPr>
-          <a:xfrm>
-            <a:off x="4846320" y="1097280"/>
-            <a:ext cx="3840480" cy="731520"/>
-          </a:xfrm>
-          <a:prstGeom prst="rect">
-            <a:avLst/>
-          </a:prstGeom>
-          <a:noFill/>
-          <a:ln/>
-        </p:spPr>
-        <p:txBody>
-          <a:bodyPr wrap="square" lIns="0" tIns="0" rIns="0" bIns="0" rtlCol="0" anchor="b"/>
-          <a:lstStyle/>
-          <a:p>
-            <a:pPr algn="ctr" indent="0" marL="0">
-              <a:buNone/>
-            </a:pPr>
-            <a:r>
-              <a:rPr lang="en-US" sz="2800" b="1" dirty="0">
-                <a:solidFill>
-                  <a:srgbClr val="FFFFFF"/>
+              <a:t>Click the Research Skill</a:t>
+            </a:r>
+            <a:endParaRPr lang="en-US" sz="2800" dirty="0"/>
+          </a:p>
+          <a:p>
+            <a:pPr algn="ctr" indent="0" marL="0">
+              <a:buNone/>
+            </a:pPr>
+            <a:r>
+              <a:rPr lang="en-US" sz="2200" i="1" dirty="0">
+                <a:solidFill>
+                  <a:srgbClr val="8B95A5"/>
+                </a:solidFill>
+                <a:latin typeface="Verdana" pitchFamily="34" charset="0"/>
+                <a:ea typeface="Verdana" pitchFamily="34" charset="-122"/>
+                <a:cs typeface="Verdana" pitchFamily="34" charset="-120"/>
+              </a:rPr>
+              <a:t>→ view its SKILL.md</a:t>
+            </a:r>
+            <a:endParaRPr lang="en-US" sz="2800" dirty="0"/>
+          </a:p>
+          <a:p>
+            <a:pPr algn="ctr" indent="0" marL="0">
+              <a:buNone/>
+            </a:pPr>
+            <a:r>
+              <a:rPr lang="en-US" sz="3600" b="1" dirty="0">
+                <a:solidFill>
+                  <a:srgbClr val="635BFF"/>
                 </a:solidFill>
                 <a:latin typeface="Georgia" pitchFamily="34" charset="0"/>
                 <a:ea typeface="Georgia" pitchFamily="34" charset="-122"/>
                 <a:cs typeface="Georgia" pitchFamily="34" charset="-120"/>
               </a:rPr>
-              <a:t>Workshop 2</a:t>
+              <a:t>What would you add or change?</a:t>
             </a:r>
             <a:endParaRPr lang="en-US" sz="2800" dirty="0"/>
-          </a:p>
-        </p:txBody>
-      </p:sp>
-      <p:sp>
-        <p:nvSpPr>
-          <p:cNvPr id="7" name="Text 5"/>
-          <p:cNvSpPr/>
-          <p:nvPr/>
-        </p:nvSpPr>
-        <p:spPr>
-          <a:xfrm>
-            <a:off x="4846320" y="2011680"/>
-            <a:ext cx="3840480" cy="548640"/>
-          </a:xfrm>
-          <a:prstGeom prst="rect">
-            <a:avLst/>
-          </a:prstGeom>
-          <a:noFill/>
-          <a:ln/>
-        </p:spPr>
-        <p:txBody>
-          <a:bodyPr wrap="square" lIns="0" tIns="0" rIns="0" bIns="0" rtlCol="0" anchor="t"/>
-          <a:lstStyle/>
-          <a:p>
-            <a:pPr algn="ctr" indent="0" marL="0">
-              <a:buNone/>
-            </a:pPr>
-            <a:r>
-              <a:rPr lang="en-US" sz="2000" i="1" dirty="0">
-                <a:solidFill>
-                  <a:srgbClr val="635BFF"/>
-                </a:solidFill>
-                <a:latin typeface="Verdana" pitchFamily="34" charset="0"/>
-                <a:ea typeface="Verdana" pitchFamily="34" charset="-122"/>
-                <a:cs typeface="Verdana" pitchFamily="34" charset="-120"/>
-              </a:rPr>
-              <a:t>Each step gets its own Skill</a:t>
-            </a:r>
-            <a:endParaRPr lang="en-US" sz="2000" dirty="0"/>
-          </a:p>
-        </p:txBody>
-      </p:sp>
-      <p:sp>
-        <p:nvSpPr>
-          <p:cNvPr id="8" name="Text 6"/>
-          <p:cNvSpPr/>
-          <p:nvPr/>
-        </p:nvSpPr>
-        <p:spPr>
-          <a:xfrm>
-            <a:off x="914400" y="3474720"/>
-            <a:ext cx="7315200" cy="548640"/>
-          </a:xfrm>
-          <a:prstGeom prst="rect">
-            <a:avLst/>
-          </a:prstGeom>
-          <a:noFill/>
-          <a:ln/>
-        </p:spPr>
-        <p:txBody>
-          <a:bodyPr wrap="square" lIns="0" tIns="0" rIns="0" bIns="0" rtlCol="0" anchor="ctr"/>
-          <a:lstStyle/>
-          <a:p>
-            <a:pPr algn="ctr" indent="0" marL="0">
-              <a:buNone/>
-            </a:pPr>
-            <a:r>
-              <a:rPr lang="en-US" sz="2000" i="1" dirty="0">
-                <a:solidFill>
-                  <a:srgbClr val="8B95A5"/>
-                </a:solidFill>
-                <a:latin typeface="Verdana" pitchFamily="34" charset="0"/>
-                <a:ea typeface="Verdana" pitchFamily="34" charset="-122"/>
-                <a:cs typeface="Verdana" pitchFamily="34" charset="-120"/>
-              </a:rPr>
-              <a:t>Same concept. Now each agent in the chain gets its own playbook.</a:t>
-            </a:r>
-            <a:endParaRPr lang="en-US" sz="2000" dirty="0"/>
           </a:p>
         </p:txBody>
       </p:sp>
@@ -8212,8 +8238,8 @@
         </p:nvSpPr>
         <p:spPr>
           <a:xfrm>
-            <a:off x="914400" y="914400"/>
-            <a:ext cx="7315200" cy="3291840"/>
+            <a:off x="914400" y="1097280"/>
+            <a:ext cx="7315200" cy="2560320"/>
           </a:xfrm>
           <a:prstGeom prst="rect">
             <a:avLst/>
@@ -8229,68 +8255,34 @@
               <a:buNone/>
             </a:pPr>
             <a:r>
-              <a:rPr lang="en-US" sz="2800" b="1" dirty="0">
-                <a:solidFill>
-                  <a:srgbClr val="635BFF"/>
+              <a:rPr lang="en-US" sz="4400" b="1" dirty="0">
+                <a:solidFill>
+                  <a:srgbClr val="FFFFFF"/>
                 </a:solidFill>
                 <a:latin typeface="Georgia" pitchFamily="34" charset="0"/>
                 <a:ea typeface="Georgia" pitchFamily="34" charset="-122"/>
                 <a:cs typeface="Georgia" pitchFamily="34" charset="-120"/>
               </a:rPr>
-              <a:t>Go to Customize → Skills</a:t>
-            </a:r>
-            <a:endParaRPr lang="en-US" sz="2800" dirty="0"/>
-          </a:p>
-          <a:p>
-            <a:pPr algn="ctr" indent="0" marL="0">
-              <a:buNone/>
-            </a:pPr>
-            <a:r>
-              <a:rPr lang="en-US" sz="2200" i="1" dirty="0">
-                <a:solidFill>
-                  <a:srgbClr val="8B95A5"/>
-                </a:solidFill>
-                <a:latin typeface="Verdana" pitchFamily="34" charset="0"/>
-                <a:ea typeface="Verdana" pitchFamily="34" charset="-122"/>
-                <a:cs typeface="Verdana" pitchFamily="34" charset="-120"/>
-              </a:rPr>
-              <a:t>Click the Research Skill</a:t>
-            </a:r>
-            <a:endParaRPr lang="en-US" sz="2800" dirty="0"/>
-          </a:p>
-          <a:p>
-            <a:pPr algn="ctr" indent="0" marL="0">
-              <a:buNone/>
-            </a:pPr>
-            <a:r>
-              <a:rPr lang="en-US" sz="2200" i="1" dirty="0">
-                <a:solidFill>
-                  <a:srgbClr val="8B95A5"/>
-                </a:solidFill>
-                <a:latin typeface="Verdana" pitchFamily="34" charset="0"/>
-                <a:ea typeface="Verdana" pitchFamily="34" charset="-122"/>
-                <a:cs typeface="Verdana" pitchFamily="34" charset="-120"/>
-              </a:rPr>
-              <a:t>→ view its SKILL.md</a:t>
-            </a:r>
-            <a:endParaRPr lang="en-US" sz="2800" dirty="0"/>
-          </a:p>
-          <a:p>
-            <a:pPr algn="ctr" indent="0" marL="0">
-              <a:buNone/>
-            </a:pPr>
-            <a:r>
-              <a:rPr lang="en-US" sz="3600" b="1" dirty="0">
-                <a:solidFill>
-                  <a:srgbClr val="635BFF"/>
+              <a:t>Claude won't remember.</a:t>
+            </a:r>
+            <a:endParaRPr lang="en-US" sz="4400" dirty="0"/>
+          </a:p>
+          <a:p>
+            <a:pPr algn="ctr" indent="0" marL="0">
+              <a:buNone/>
+            </a:pPr>
+            <a:r>
+              <a:rPr lang="en-US" sz="4400" b="1" dirty="0">
+                <a:solidFill>
+                  <a:srgbClr val="FFFFFF"/>
                 </a:solidFill>
                 <a:latin typeface="Georgia" pitchFamily="34" charset="0"/>
                 <a:ea typeface="Georgia" pitchFamily="34" charset="-122"/>
                 <a:cs typeface="Georgia" pitchFamily="34" charset="-120"/>
               </a:rPr>
-              <a:t>What would you add or change?</a:t>
-            </a:r>
-            <a:endParaRPr lang="en-US" sz="2800" dirty="0"/>
+              <a:t>But the Skill will.</a:t>
+            </a:r>
+            <a:endParaRPr lang="en-US" sz="4400" dirty="0"/>
           </a:p>
         </p:txBody>
       </p:sp>
@@ -8356,51 +8348,73 @@
         </p:nvSpPr>
         <p:spPr>
           <a:xfrm>
-            <a:off x="914400" y="1097280"/>
-            <a:ext cx="7315200" cy="2560320"/>
-          </a:xfrm>
-          <a:prstGeom prst="rect">
-            <a:avLst/>
-          </a:prstGeom>
-          <a:noFill/>
-          <a:ln/>
-        </p:spPr>
-        <p:txBody>
-          <a:bodyPr wrap="square" lIns="0" tIns="0" rIns="0" bIns="0" rtlCol="0" anchor="ctr"/>
-          <a:lstStyle/>
-          <a:p>
-            <a:pPr algn="ctr" indent="0" marL="0">
-              <a:buNone/>
-            </a:pPr>
-            <a:r>
-              <a:rPr lang="en-US" sz="4400" b="1" dirty="0">
-                <a:solidFill>
-                  <a:srgbClr val="FFFFFF"/>
+            <a:off x="457200" y="914400"/>
+            <a:ext cx="8229600" cy="2286000"/>
+          </a:xfrm>
+          <a:prstGeom prst="rect">
+            <a:avLst/>
+          </a:prstGeom>
+          <a:noFill/>
+          <a:ln/>
+        </p:spPr>
+        <p:txBody>
+          <a:bodyPr wrap="square" lIns="0" tIns="0" rIns="0" bIns="0" rtlCol="0" anchor="b"/>
+          <a:lstStyle/>
+          <a:p>
+            <a:pPr algn="ctr" indent="0" marL="0">
+              <a:buNone/>
+            </a:pPr>
+            <a:r>
+              <a:rPr lang="en-US" sz="12000" b="1" dirty="0">
+                <a:solidFill>
+                  <a:srgbClr val="FF6B8A"/>
                 </a:solidFill>
                 <a:latin typeface="Georgia" pitchFamily="34" charset="0"/>
                 <a:ea typeface="Georgia" pitchFamily="34" charset="-122"/>
                 <a:cs typeface="Georgia" pitchFamily="34" charset="-120"/>
               </a:rPr>
-              <a:t>Claude won't remember.</a:t>
-            </a:r>
-            <a:endParaRPr lang="en-US" sz="4400" dirty="0"/>
-          </a:p>
-          <a:p>
-            <a:pPr algn="ctr" indent="0" marL="0">
-              <a:buNone/>
-            </a:pPr>
-            <a:r>
-              <a:rPr lang="en-US" sz="4400" b="1" dirty="0">
-                <a:solidFill>
-                  <a:srgbClr val="FFFFFF"/>
-                </a:solidFill>
-                <a:latin typeface="Georgia" pitchFamily="34" charset="0"/>
-                <a:ea typeface="Georgia" pitchFamily="34" charset="-122"/>
-                <a:cs typeface="Georgia" pitchFamily="34" charset="-120"/>
-              </a:rPr>
-              <a:t>But the Skill will.</a:t>
-            </a:r>
-            <a:endParaRPr lang="en-US" sz="4400" dirty="0"/>
+              <a:t>1.5 hrs</a:t>
+            </a:r>
+            <a:endParaRPr lang="en-US" sz="12000" dirty="0"/>
+          </a:p>
+        </p:txBody>
+      </p:sp>
+      <p:sp>
+        <p:nvSpPr>
+          <p:cNvPr id="4" name="Text 2"/>
+          <p:cNvSpPr/>
+          <p:nvPr/>
+        </p:nvSpPr>
+        <p:spPr>
+          <a:xfrm>
+            <a:off x="1371600" y="3291840"/>
+            <a:ext cx="6400800" cy="731520"/>
+          </a:xfrm>
+          <a:prstGeom prst="rect">
+            <a:avLst/>
+          </a:prstGeom>
+          <a:noFill/>
+          <a:ln/>
+        </p:spPr>
+        <p:txBody>
+          <a:bodyPr wrap="square" lIns="0" tIns="0" rIns="0" bIns="0" rtlCol="0" anchor="t"/>
+          <a:lstStyle/>
+          <a:p>
+            <a:pPr algn="ctr" indent="0" marL="0">
+              <a:buNone/>
+            </a:pPr>
+            <a:r>
+              <a:rPr lang="en-US" sz="2800" dirty="0">
+                <a:solidFill>
+                  <a:srgbClr val="8B95A5"/>
+                </a:solidFill>
+                <a:latin typeface="Verdana" pitchFamily="34" charset="0"/>
+                <a:ea typeface="Verdana" pitchFamily="34" charset="-122"/>
+                <a:cs typeface="Verdana" pitchFamily="34" charset="-120"/>
+              </a:rPr>
+              <a:t>of you being the bottleneck</a:t>
+            </a:r>
+            <a:endParaRPr lang="en-US" sz="2800" dirty="0"/>
           </a:p>
         </p:txBody>
       </p:sp>
@@ -8485,13 +8499,13 @@
             <a:r>
               <a:rPr lang="en-US" sz="12000" b="1" dirty="0">
                 <a:solidFill>
-                  <a:srgbClr val="FF6B8A"/>
+                  <a:srgbClr val="09825D"/>
                 </a:solidFill>
                 <a:latin typeface="Georgia" pitchFamily="34" charset="0"/>
                 <a:ea typeface="Georgia" pitchFamily="34" charset="-122"/>
                 <a:cs typeface="Georgia" pitchFamily="34" charset="-120"/>
               </a:rPr>
-              <a:t>1.5 hrs</a:t>
+              <a:t>15 min</a:t>
             </a:r>
             <a:endParaRPr lang="en-US" sz="12000" dirty="0"/>
           </a:p>
@@ -8530,7 +8544,7 @@
                 <a:ea typeface="Verdana" pitchFamily="34" charset="-122"/>
                 <a:cs typeface="Verdana" pitchFamily="34" charset="-120"/>
               </a:rPr>
-              <a:t>of you being the bottleneck</a:t>
+              <a:t>of judgment — the part only humans can do</a:t>
             </a:r>
             <a:endParaRPr lang="en-US" sz="2800" dirty="0"/>
           </a:p>
@@ -8592,79 +8606,771 @@
       </p:sp>
       <p:sp>
         <p:nvSpPr>
-          <p:cNvPr id="3" name="Text 1"/>
-          <p:cNvSpPr/>
-          <p:nvPr/>
-        </p:nvSpPr>
-        <p:spPr>
-          <a:xfrm>
-            <a:off x="457200" y="914400"/>
-            <a:ext cx="8229600" cy="2286000"/>
-          </a:xfrm>
-          <a:prstGeom prst="rect">
-            <a:avLst/>
-          </a:prstGeom>
-          <a:noFill/>
-          <a:ln/>
-        </p:spPr>
-        <p:txBody>
-          <a:bodyPr wrap="square" lIns="0" tIns="0" rIns="0" bIns="0" rtlCol="0" anchor="b"/>
-          <a:lstStyle/>
-          <a:p>
-            <a:pPr algn="ctr" indent="0" marL="0">
-              <a:buNone/>
-            </a:pPr>
-            <a:r>
-              <a:rPr lang="en-US" sz="12000" b="1" dirty="0">
-                <a:solidFill>
-                  <a:srgbClr val="09825D"/>
+          <p:cNvPr id="3" name="Shape 1"/>
+          <p:cNvSpPr/>
+          <p:nvPr/>
+        </p:nvSpPr>
+        <p:spPr>
+          <a:xfrm>
+            <a:off x="192024" y="2011680"/>
+            <a:ext cx="1188720" cy="640080"/>
+          </a:xfrm>
+          <a:prstGeom prst="roundRect">
+            <a:avLst>
+              <a:gd name="adj" fmla="val 11429"/>
+            </a:avLst>
+          </a:prstGeom>
+          <a:solidFill>
+            <a:srgbClr val="0A2540">
+              <a:alpha val="50000"/>
+            </a:srgbClr>
+          </a:solidFill>
+          <a:ln w="19050">
+            <a:solidFill>
+              <a:srgbClr val="8B95A5"/>
+            </a:solidFill>
+            <a:prstDash val="solid"/>
+          </a:ln>
+        </p:spPr>
+      </p:sp>
+      <p:sp>
+        <p:nvSpPr>
+          <p:cNvPr id="4" name="Text 2"/>
+          <p:cNvSpPr/>
+          <p:nvPr/>
+        </p:nvSpPr>
+        <p:spPr>
+          <a:xfrm>
+            <a:off x="192024" y="2011680"/>
+            <a:ext cx="1188720" cy="640080"/>
+          </a:xfrm>
+          <a:prstGeom prst="rect">
+            <a:avLst/>
+          </a:prstGeom>
+          <a:noFill/>
+          <a:ln/>
+        </p:spPr>
+        <p:txBody>
+          <a:bodyPr wrap="square" lIns="0" tIns="0" rIns="0" bIns="0" rtlCol="0" anchor="ctr">
+            <a:normAutofit/>
+          </a:bodyPr>
+          <a:lstStyle/>
+          <a:p>
+            <a:pPr algn="ctr" indent="0" marL="0">
+              <a:buNone/>
+            </a:pPr>
+            <a:r>
+              <a:rPr lang="en-US" sz="1100" b="1" dirty="0">
+                <a:solidFill>
+                  <a:srgbClr val="8B95A5"/>
+                </a:solidFill>
+                <a:latin typeface="Verdana" pitchFamily="34" charset="0"/>
+                <a:ea typeface="Verdana" pitchFamily="34" charset="-122"/>
+                <a:cs typeface="Verdana" pitchFamily="34" charset="-120"/>
+              </a:rPr>
+              <a:t>Skeptic</a:t>
+            </a:r>
+            <a:endParaRPr lang="en-US" sz="1100" dirty="0"/>
+          </a:p>
+        </p:txBody>
+      </p:sp>
+      <p:sp>
+        <p:nvSpPr>
+          <p:cNvPr id="5" name="Text 3"/>
+          <p:cNvSpPr/>
+          <p:nvPr/>
+        </p:nvSpPr>
+        <p:spPr>
+          <a:xfrm>
+            <a:off x="1380744" y="2011680"/>
+            <a:ext cx="73152" cy="640080"/>
+          </a:xfrm>
+          <a:prstGeom prst="rect">
+            <a:avLst/>
+          </a:prstGeom>
+          <a:noFill/>
+          <a:ln/>
+        </p:spPr>
+        <p:txBody>
+          <a:bodyPr wrap="square" lIns="0" tIns="0" rIns="0" bIns="0" rtlCol="0" anchor="ctr"/>
+          <a:lstStyle/>
+          <a:p>
+            <a:pPr algn="ctr" indent="0" marL="0">
+              <a:buNone/>
+            </a:pPr>
+            <a:r>
+              <a:rPr lang="en-US" sz="1100" dirty="0">
+                <a:solidFill>
+                  <a:srgbClr val="8B95A5"/>
+                </a:solidFill>
+                <a:latin typeface="Verdana" pitchFamily="34" charset="0"/>
+                <a:ea typeface="Verdana" pitchFamily="34" charset="-122"/>
+                <a:cs typeface="Verdana" pitchFamily="34" charset="-120"/>
+              </a:rPr>
+              <a:t>→</a:t>
+            </a:r>
+            <a:endParaRPr lang="en-US" sz="1100" dirty="0"/>
+          </a:p>
+        </p:txBody>
+      </p:sp>
+      <p:sp>
+        <p:nvSpPr>
+          <p:cNvPr id="6" name="Shape 4"/>
+          <p:cNvSpPr/>
+          <p:nvPr/>
+        </p:nvSpPr>
+        <p:spPr>
+          <a:xfrm>
+            <a:off x="1453896" y="2011680"/>
+            <a:ext cx="1188720" cy="640080"/>
+          </a:xfrm>
+          <a:prstGeom prst="roundRect">
+            <a:avLst>
+              <a:gd name="adj" fmla="val 11429"/>
+            </a:avLst>
+          </a:prstGeom>
+          <a:solidFill>
+            <a:srgbClr val="635BFF"/>
+          </a:solidFill>
+          <a:ln w="19050">
+            <a:solidFill>
+              <a:srgbClr val="635BFF"/>
+            </a:solidFill>
+            <a:prstDash val="solid"/>
+          </a:ln>
+        </p:spPr>
+      </p:sp>
+      <p:sp>
+        <p:nvSpPr>
+          <p:cNvPr id="7" name="Text 5"/>
+          <p:cNvSpPr/>
+          <p:nvPr/>
+        </p:nvSpPr>
+        <p:spPr>
+          <a:xfrm>
+            <a:off x="1453896" y="2011680"/>
+            <a:ext cx="1188720" cy="640080"/>
+          </a:xfrm>
+          <a:prstGeom prst="rect">
+            <a:avLst/>
+          </a:prstGeom>
+          <a:noFill/>
+          <a:ln/>
+        </p:spPr>
+        <p:txBody>
+          <a:bodyPr wrap="square" lIns="0" tIns="0" rIns="0" bIns="0" rtlCol="0" anchor="ctr">
+            <a:normAutofit/>
+          </a:bodyPr>
+          <a:lstStyle/>
+          <a:p>
+            <a:pPr algn="ctr" indent="0" marL="0">
+              <a:buNone/>
+            </a:pPr>
+            <a:r>
+              <a:rPr lang="en-US" sz="1100" b="1" dirty="0">
+                <a:solidFill>
+                  <a:srgbClr val="FFFFFF"/>
+                </a:solidFill>
+                <a:latin typeface="Verdana" pitchFamily="34" charset="0"/>
+                <a:ea typeface="Verdana" pitchFamily="34" charset="-122"/>
+                <a:cs typeface="Verdana" pitchFamily="34" charset="-120"/>
+              </a:rPr>
+              <a:t>Explorer</a:t>
+            </a:r>
+            <a:endParaRPr lang="en-US" sz="1100" dirty="0"/>
+          </a:p>
+        </p:txBody>
+      </p:sp>
+      <p:sp>
+        <p:nvSpPr>
+          <p:cNvPr id="8" name="Text 6"/>
+          <p:cNvSpPr/>
+          <p:nvPr/>
+        </p:nvSpPr>
+        <p:spPr>
+          <a:xfrm>
+            <a:off x="2642616" y="2011680"/>
+            <a:ext cx="73152" cy="640080"/>
+          </a:xfrm>
+          <a:prstGeom prst="rect">
+            <a:avLst/>
+          </a:prstGeom>
+          <a:noFill/>
+          <a:ln/>
+        </p:spPr>
+        <p:txBody>
+          <a:bodyPr wrap="square" lIns="0" tIns="0" rIns="0" bIns="0" rtlCol="0" anchor="ctr"/>
+          <a:lstStyle/>
+          <a:p>
+            <a:pPr algn="ctr" indent="0" marL="0">
+              <a:buNone/>
+            </a:pPr>
+            <a:r>
+              <a:rPr lang="en-US" sz="1100" dirty="0">
+                <a:solidFill>
+                  <a:srgbClr val="8B95A5"/>
+                </a:solidFill>
+                <a:latin typeface="Verdana" pitchFamily="34" charset="0"/>
+                <a:ea typeface="Verdana" pitchFamily="34" charset="-122"/>
+                <a:cs typeface="Verdana" pitchFamily="34" charset="-120"/>
+              </a:rPr>
+              <a:t>→</a:t>
+            </a:r>
+            <a:endParaRPr lang="en-US" sz="1100" dirty="0"/>
+          </a:p>
+        </p:txBody>
+      </p:sp>
+      <p:sp>
+        <p:nvSpPr>
+          <p:cNvPr id="9" name="Shape 7"/>
+          <p:cNvSpPr/>
+          <p:nvPr/>
+        </p:nvSpPr>
+        <p:spPr>
+          <a:xfrm>
+            <a:off x="2715768" y="2011680"/>
+            <a:ext cx="1188720" cy="640080"/>
+          </a:xfrm>
+          <a:prstGeom prst="roundRect">
+            <a:avLst>
+              <a:gd name="adj" fmla="val 11429"/>
+            </a:avLst>
+          </a:prstGeom>
+          <a:solidFill>
+            <a:srgbClr val="635BFF"/>
+          </a:solidFill>
+          <a:ln w="19050">
+            <a:solidFill>
+              <a:srgbClr val="635BFF"/>
+            </a:solidFill>
+            <a:prstDash val="solid"/>
+          </a:ln>
+        </p:spPr>
+      </p:sp>
+      <p:sp>
+        <p:nvSpPr>
+          <p:cNvPr id="10" name="Text 8"/>
+          <p:cNvSpPr/>
+          <p:nvPr/>
+        </p:nvSpPr>
+        <p:spPr>
+          <a:xfrm>
+            <a:off x="2715768" y="2011680"/>
+            <a:ext cx="1188720" cy="640080"/>
+          </a:xfrm>
+          <a:prstGeom prst="rect">
+            <a:avLst/>
+          </a:prstGeom>
+          <a:noFill/>
+          <a:ln/>
+        </p:spPr>
+        <p:txBody>
+          <a:bodyPr wrap="square" lIns="0" tIns="0" rIns="0" bIns="0" rtlCol="0" anchor="ctr">
+            <a:normAutofit/>
+          </a:bodyPr>
+          <a:lstStyle/>
+          <a:p>
+            <a:pPr algn="ctr" indent="0" marL="0">
+              <a:buNone/>
+            </a:pPr>
+            <a:r>
+              <a:rPr lang="en-US" sz="1100" b="1" dirty="0">
+                <a:solidFill>
+                  <a:srgbClr val="FFFFFF"/>
+                </a:solidFill>
+                <a:latin typeface="Verdana" pitchFamily="34" charset="0"/>
+                <a:ea typeface="Verdana" pitchFamily="34" charset="-122"/>
+                <a:cs typeface="Verdana" pitchFamily="34" charset="-120"/>
+              </a:rPr>
+              <a:t>Whisperer</a:t>
+            </a:r>
+            <a:endParaRPr lang="en-US" sz="1100" dirty="0"/>
+          </a:p>
+        </p:txBody>
+      </p:sp>
+      <p:sp>
+        <p:nvSpPr>
+          <p:cNvPr id="11" name="Text 9"/>
+          <p:cNvSpPr/>
+          <p:nvPr/>
+        </p:nvSpPr>
+        <p:spPr>
+          <a:xfrm>
+            <a:off x="3904488" y="2011680"/>
+            <a:ext cx="73152" cy="640080"/>
+          </a:xfrm>
+          <a:prstGeom prst="rect">
+            <a:avLst/>
+          </a:prstGeom>
+          <a:noFill/>
+          <a:ln/>
+        </p:spPr>
+        <p:txBody>
+          <a:bodyPr wrap="square" lIns="0" tIns="0" rIns="0" bIns="0" rtlCol="0" anchor="ctr"/>
+          <a:lstStyle/>
+          <a:p>
+            <a:pPr algn="ctr" indent="0" marL="0">
+              <a:buNone/>
+            </a:pPr>
+            <a:r>
+              <a:rPr lang="en-US" sz="1100" dirty="0">
+                <a:solidFill>
+                  <a:srgbClr val="8B95A5"/>
+                </a:solidFill>
+                <a:latin typeface="Verdana" pitchFamily="34" charset="0"/>
+                <a:ea typeface="Verdana" pitchFamily="34" charset="-122"/>
+                <a:cs typeface="Verdana" pitchFamily="34" charset="-120"/>
+              </a:rPr>
+              <a:t>→</a:t>
+            </a:r>
+            <a:endParaRPr lang="en-US" sz="1100" dirty="0"/>
+          </a:p>
+        </p:txBody>
+      </p:sp>
+      <p:sp>
+        <p:nvSpPr>
+          <p:cNvPr id="12" name="Shape 10"/>
+          <p:cNvSpPr/>
+          <p:nvPr/>
+        </p:nvSpPr>
+        <p:spPr>
+          <a:xfrm>
+            <a:off x="3977640" y="2011680"/>
+            <a:ext cx="1188720" cy="640080"/>
+          </a:xfrm>
+          <a:prstGeom prst="roundRect">
+            <a:avLst>
+              <a:gd name="adj" fmla="val 11429"/>
+            </a:avLst>
+          </a:prstGeom>
+          <a:solidFill>
+            <a:srgbClr val="635BFF"/>
+          </a:solidFill>
+          <a:ln w="19050">
+            <a:solidFill>
+              <a:srgbClr val="635BFF"/>
+            </a:solidFill>
+            <a:prstDash val="solid"/>
+          </a:ln>
+        </p:spPr>
+      </p:sp>
+      <p:sp>
+        <p:nvSpPr>
+          <p:cNvPr id="13" name="Text 11"/>
+          <p:cNvSpPr/>
+          <p:nvPr/>
+        </p:nvSpPr>
+        <p:spPr>
+          <a:xfrm>
+            <a:off x="3977640" y="2011680"/>
+            <a:ext cx="1188720" cy="640080"/>
+          </a:xfrm>
+          <a:prstGeom prst="rect">
+            <a:avLst/>
+          </a:prstGeom>
+          <a:noFill/>
+          <a:ln/>
+        </p:spPr>
+        <p:txBody>
+          <a:bodyPr wrap="square" lIns="0" tIns="0" rIns="0" bIns="0" rtlCol="0" anchor="ctr">
+            <a:normAutofit/>
+          </a:bodyPr>
+          <a:lstStyle/>
+          <a:p>
+            <a:pPr algn="ctr" indent="0" marL="0">
+              <a:buNone/>
+            </a:pPr>
+            <a:r>
+              <a:rPr lang="en-US" sz="1100" b="1" dirty="0">
+                <a:solidFill>
+                  <a:srgbClr val="FFFFFF"/>
+                </a:solidFill>
+                <a:latin typeface="Verdana" pitchFamily="34" charset="0"/>
+                <a:ea typeface="Verdana" pitchFamily="34" charset="-122"/>
+                <a:cs typeface="Verdana" pitchFamily="34" charset="-120"/>
+              </a:rPr>
+              <a:t>Strategist</a:t>
+            </a:r>
+            <a:endParaRPr lang="en-US" sz="1100" dirty="0"/>
+          </a:p>
+        </p:txBody>
+      </p:sp>
+      <p:sp>
+        <p:nvSpPr>
+          <p:cNvPr id="14" name="Text 12"/>
+          <p:cNvSpPr/>
+          <p:nvPr/>
+        </p:nvSpPr>
+        <p:spPr>
+          <a:xfrm>
+            <a:off x="5166360" y="2011680"/>
+            <a:ext cx="73152" cy="640080"/>
+          </a:xfrm>
+          <a:prstGeom prst="rect">
+            <a:avLst/>
+          </a:prstGeom>
+          <a:noFill/>
+          <a:ln/>
+        </p:spPr>
+        <p:txBody>
+          <a:bodyPr wrap="square" lIns="0" tIns="0" rIns="0" bIns="0" rtlCol="0" anchor="ctr"/>
+          <a:lstStyle/>
+          <a:p>
+            <a:pPr algn="ctr" indent="0" marL="0">
+              <a:buNone/>
+            </a:pPr>
+            <a:r>
+              <a:rPr lang="en-US" sz="1100" dirty="0">
+                <a:solidFill>
+                  <a:srgbClr val="8B95A5"/>
+                </a:solidFill>
+                <a:latin typeface="Verdana" pitchFamily="34" charset="0"/>
+                <a:ea typeface="Verdana" pitchFamily="34" charset="-122"/>
+                <a:cs typeface="Verdana" pitchFamily="34" charset="-120"/>
+              </a:rPr>
+              <a:t>→</a:t>
+            </a:r>
+            <a:endParaRPr lang="en-US" sz="1100" dirty="0"/>
+          </a:p>
+        </p:txBody>
+      </p:sp>
+      <p:sp>
+        <p:nvSpPr>
+          <p:cNvPr id="15" name="Shape 13"/>
+          <p:cNvSpPr/>
+          <p:nvPr/>
+        </p:nvSpPr>
+        <p:spPr>
+          <a:xfrm>
+            <a:off x="5239512" y="2011680"/>
+            <a:ext cx="1188720" cy="640080"/>
+          </a:xfrm>
+          <a:prstGeom prst="roundRect">
+            <a:avLst>
+              <a:gd name="adj" fmla="val 11429"/>
+            </a:avLst>
+          </a:prstGeom>
+          <a:solidFill>
+            <a:srgbClr val="635BFF"/>
+          </a:solidFill>
+          <a:ln w="19050">
+            <a:solidFill>
+              <a:srgbClr val="635BFF"/>
+            </a:solidFill>
+            <a:prstDash val="solid"/>
+          </a:ln>
+        </p:spPr>
+      </p:sp>
+      <p:sp>
+        <p:nvSpPr>
+          <p:cNvPr id="16" name="Text 14"/>
+          <p:cNvSpPr/>
+          <p:nvPr/>
+        </p:nvSpPr>
+        <p:spPr>
+          <a:xfrm>
+            <a:off x="5239512" y="2011680"/>
+            <a:ext cx="1188720" cy="640080"/>
+          </a:xfrm>
+          <a:prstGeom prst="rect">
+            <a:avLst/>
+          </a:prstGeom>
+          <a:noFill/>
+          <a:ln/>
+        </p:spPr>
+        <p:txBody>
+          <a:bodyPr wrap="square" lIns="0" tIns="0" rIns="0" bIns="0" rtlCol="0" anchor="ctr">
+            <a:normAutofit/>
+          </a:bodyPr>
+          <a:lstStyle/>
+          <a:p>
+            <a:pPr algn="ctr" indent="0" marL="0">
+              <a:buNone/>
+            </a:pPr>
+            <a:r>
+              <a:rPr lang="en-US" sz="1100" b="1" dirty="0">
+                <a:solidFill>
+                  <a:srgbClr val="FFFFFF"/>
+                </a:solidFill>
+                <a:latin typeface="Verdana" pitchFamily="34" charset="0"/>
+                <a:ea typeface="Verdana" pitchFamily="34" charset="-122"/>
+                <a:cs typeface="Verdana" pitchFamily="34" charset="-120"/>
+              </a:rPr>
+              <a:t>Operator</a:t>
+            </a:r>
+            <a:endParaRPr lang="en-US" sz="1100" dirty="0"/>
+          </a:p>
+        </p:txBody>
+      </p:sp>
+      <p:sp>
+        <p:nvSpPr>
+          <p:cNvPr id="17" name="Text 15"/>
+          <p:cNvSpPr/>
+          <p:nvPr/>
+        </p:nvSpPr>
+        <p:spPr>
+          <a:xfrm>
+            <a:off x="6428232" y="2011680"/>
+            <a:ext cx="73152" cy="640080"/>
+          </a:xfrm>
+          <a:prstGeom prst="rect">
+            <a:avLst/>
+          </a:prstGeom>
+          <a:noFill/>
+          <a:ln/>
+        </p:spPr>
+        <p:txBody>
+          <a:bodyPr wrap="square" lIns="0" tIns="0" rIns="0" bIns="0" rtlCol="0" anchor="ctr"/>
+          <a:lstStyle/>
+          <a:p>
+            <a:pPr algn="ctr" indent="0" marL="0">
+              <a:buNone/>
+            </a:pPr>
+            <a:r>
+              <a:rPr lang="en-US" sz="1100" dirty="0">
+                <a:solidFill>
+                  <a:srgbClr val="8B95A5"/>
+                </a:solidFill>
+                <a:latin typeface="Verdana" pitchFamily="34" charset="0"/>
+                <a:ea typeface="Verdana" pitchFamily="34" charset="-122"/>
+                <a:cs typeface="Verdana" pitchFamily="34" charset="-120"/>
+              </a:rPr>
+              <a:t>→</a:t>
+            </a:r>
+            <a:endParaRPr lang="en-US" sz="1100" dirty="0"/>
+          </a:p>
+        </p:txBody>
+      </p:sp>
+      <p:sp>
+        <p:nvSpPr>
+          <p:cNvPr id="18" name="Shape 16"/>
+          <p:cNvSpPr/>
+          <p:nvPr/>
+        </p:nvSpPr>
+        <p:spPr>
+          <a:xfrm>
+            <a:off x="6501384" y="2011680"/>
+            <a:ext cx="1188720" cy="640080"/>
+          </a:xfrm>
+          <a:prstGeom prst="roundRect">
+            <a:avLst>
+              <a:gd name="adj" fmla="val 11429"/>
+            </a:avLst>
+          </a:prstGeom>
+          <a:solidFill>
+            <a:srgbClr val="635BFF"/>
+          </a:solidFill>
+          <a:ln w="19050">
+            <a:solidFill>
+              <a:srgbClr val="635BFF"/>
+            </a:solidFill>
+            <a:prstDash val="solid"/>
+          </a:ln>
+        </p:spPr>
+      </p:sp>
+      <p:sp>
+        <p:nvSpPr>
+          <p:cNvPr id="19" name="Text 17"/>
+          <p:cNvSpPr/>
+          <p:nvPr/>
+        </p:nvSpPr>
+        <p:spPr>
+          <a:xfrm>
+            <a:off x="6501384" y="2011680"/>
+            <a:ext cx="1188720" cy="640080"/>
+          </a:xfrm>
+          <a:prstGeom prst="rect">
+            <a:avLst/>
+          </a:prstGeom>
+          <a:noFill/>
+          <a:ln/>
+        </p:spPr>
+        <p:txBody>
+          <a:bodyPr wrap="square" lIns="0" tIns="0" rIns="0" bIns="0" rtlCol="0" anchor="ctr">
+            <a:normAutofit/>
+          </a:bodyPr>
+          <a:lstStyle/>
+          <a:p>
+            <a:pPr algn="ctr" indent="0" marL="0">
+              <a:buNone/>
+            </a:pPr>
+            <a:r>
+              <a:rPr lang="en-US" sz="1100" b="1" dirty="0">
+                <a:solidFill>
+                  <a:srgbClr val="FFFFFF"/>
+                </a:solidFill>
+                <a:latin typeface="Verdana" pitchFamily="34" charset="0"/>
+                <a:ea typeface="Verdana" pitchFamily="34" charset="-122"/>
+                <a:cs typeface="Verdana" pitchFamily="34" charset="-120"/>
+              </a:rPr>
+              <a:t>Orchestrator</a:t>
+            </a:r>
+            <a:endParaRPr lang="en-US" sz="1100" dirty="0"/>
+          </a:p>
+        </p:txBody>
+      </p:sp>
+      <p:sp>
+        <p:nvSpPr>
+          <p:cNvPr id="20" name="Text 18"/>
+          <p:cNvSpPr/>
+          <p:nvPr/>
+        </p:nvSpPr>
+        <p:spPr>
+          <a:xfrm>
+            <a:off x="7690104" y="2011680"/>
+            <a:ext cx="73152" cy="640080"/>
+          </a:xfrm>
+          <a:prstGeom prst="rect">
+            <a:avLst/>
+          </a:prstGeom>
+          <a:noFill/>
+          <a:ln/>
+        </p:spPr>
+        <p:txBody>
+          <a:bodyPr wrap="square" lIns="0" tIns="0" rIns="0" bIns="0" rtlCol="0" anchor="ctr"/>
+          <a:lstStyle/>
+          <a:p>
+            <a:pPr algn="ctr" indent="0" marL="0">
+              <a:buNone/>
+            </a:pPr>
+            <a:r>
+              <a:rPr lang="en-US" sz="1100" dirty="0">
+                <a:solidFill>
+                  <a:srgbClr val="8B95A5"/>
+                </a:solidFill>
+                <a:latin typeface="Verdana" pitchFamily="34" charset="0"/>
+                <a:ea typeface="Verdana" pitchFamily="34" charset="-122"/>
+                <a:cs typeface="Verdana" pitchFamily="34" charset="-120"/>
+              </a:rPr>
+              <a:t>→</a:t>
+            </a:r>
+            <a:endParaRPr lang="en-US" sz="1100" dirty="0"/>
+          </a:p>
+        </p:txBody>
+      </p:sp>
+      <p:sp>
+        <p:nvSpPr>
+          <p:cNvPr id="21" name="Shape 19"/>
+          <p:cNvSpPr/>
+          <p:nvPr/>
+        </p:nvSpPr>
+        <p:spPr>
+          <a:xfrm>
+            <a:off x="7763256" y="2011680"/>
+            <a:ext cx="1188720" cy="640080"/>
+          </a:xfrm>
+          <a:prstGeom prst="roundRect">
+            <a:avLst>
+              <a:gd name="adj" fmla="val 11429"/>
+            </a:avLst>
+          </a:prstGeom>
+          <a:solidFill>
+            <a:srgbClr val="0A2540">
+              <a:alpha val="50000"/>
+            </a:srgbClr>
+          </a:solidFill>
+          <a:ln w="19050">
+            <a:solidFill>
+              <a:srgbClr val="8B95A5"/>
+            </a:solidFill>
+            <a:prstDash val="dash"/>
+          </a:ln>
+        </p:spPr>
+      </p:sp>
+      <p:sp>
+        <p:nvSpPr>
+          <p:cNvPr id="22" name="Text 20"/>
+          <p:cNvSpPr/>
+          <p:nvPr/>
+        </p:nvSpPr>
+        <p:spPr>
+          <a:xfrm>
+            <a:off x="7763256" y="2011680"/>
+            <a:ext cx="1188720" cy="640080"/>
+          </a:xfrm>
+          <a:prstGeom prst="rect">
+            <a:avLst/>
+          </a:prstGeom>
+          <a:noFill/>
+          <a:ln/>
+        </p:spPr>
+        <p:txBody>
+          <a:bodyPr wrap="square" lIns="0" tIns="0" rIns="0" bIns="0" rtlCol="0" anchor="ctr">
+            <a:normAutofit/>
+          </a:bodyPr>
+          <a:lstStyle/>
+          <a:p>
+            <a:pPr algn="ctr" indent="0" marL="0">
+              <a:buNone/>
+            </a:pPr>
+            <a:r>
+              <a:rPr lang="en-US" sz="1100" b="1" dirty="0">
+                <a:solidFill>
+                  <a:srgbClr val="8B95A5"/>
+                </a:solidFill>
+                <a:latin typeface="Verdana" pitchFamily="34" charset="0"/>
+                <a:ea typeface="Verdana" pitchFamily="34" charset="-122"/>
+                <a:cs typeface="Verdana" pitchFamily="34" charset="-120"/>
+              </a:rPr>
+              <a:t>Builder</a:t>
+            </a:r>
+            <a:endParaRPr lang="en-US" sz="1100" dirty="0"/>
+          </a:p>
+        </p:txBody>
+      </p:sp>
+      <p:sp>
+        <p:nvSpPr>
+          <p:cNvPr id="23" name="Text 21"/>
+          <p:cNvSpPr/>
+          <p:nvPr/>
+        </p:nvSpPr>
+        <p:spPr>
+          <a:xfrm>
+            <a:off x="914400" y="3108960"/>
+            <a:ext cx="7315200" cy="548640"/>
+          </a:xfrm>
+          <a:prstGeom prst="rect">
+            <a:avLst/>
+          </a:prstGeom>
+          <a:noFill/>
+          <a:ln/>
+        </p:spPr>
+        <p:txBody>
+          <a:bodyPr wrap="square" lIns="0" tIns="0" rIns="0" bIns="0" rtlCol="0" anchor="ctr"/>
+          <a:lstStyle/>
+          <a:p>
+            <a:pPr algn="ctr" indent="0" marL="0">
+              <a:buNone/>
+            </a:pPr>
+            <a:r>
+              <a:rPr lang="en-US" sz="2400" b="1" dirty="0">
+                <a:solidFill>
+                  <a:srgbClr val="635BFF"/>
                 </a:solidFill>
                 <a:latin typeface="Georgia" pitchFamily="34" charset="0"/>
                 <a:ea typeface="Georgia" pitchFamily="34" charset="-122"/>
                 <a:cs typeface="Georgia" pitchFamily="34" charset="-120"/>
               </a:rPr>
-              <a:t>15 min</a:t>
-            </a:r>
-            <a:endParaRPr lang="en-US" sz="12000" dirty="0"/>
-          </a:p>
-        </p:txBody>
-      </p:sp>
-      <p:sp>
-        <p:nvSpPr>
-          <p:cNvPr id="4" name="Text 2"/>
-          <p:cNvSpPr/>
-          <p:nvPr/>
-        </p:nvSpPr>
-        <p:spPr>
-          <a:xfrm>
-            <a:off x="1371600" y="3291840"/>
-            <a:ext cx="6400800" cy="731520"/>
-          </a:xfrm>
-          <a:prstGeom prst="rect">
-            <a:avLst/>
-          </a:prstGeom>
-          <a:noFill/>
-          <a:ln/>
-        </p:spPr>
-        <p:txBody>
-          <a:bodyPr wrap="square" lIns="0" tIns="0" rIns="0" bIns="0" rtlCol="0" anchor="t"/>
-          <a:lstStyle/>
-          <a:p>
-            <a:pPr algn="ctr" indent="0" marL="0">
-              <a:buNone/>
-            </a:pPr>
-            <a:r>
-              <a:rPr lang="en-US" sz="2800" dirty="0">
-                <a:solidFill>
-                  <a:srgbClr val="8B95A5"/>
-                </a:solidFill>
-                <a:latin typeface="Verdana" pitchFamily="34" charset="0"/>
-                <a:ea typeface="Verdana" pitchFamily="34" charset="-122"/>
-                <a:cs typeface="Verdana" pitchFamily="34" charset="-120"/>
-              </a:rPr>
-              <a:t>of judgment — the part only humans can do</a:t>
-            </a:r>
-            <a:endParaRPr lang="en-US" sz="2800" dirty="0"/>
+              <a:t>You started as an Explorer.</a:t>
+            </a:r>
+            <a:endParaRPr lang="en-US" sz="2400" dirty="0"/>
+          </a:p>
+          <a:p>
+            <a:pPr algn="ctr" indent="0" marL="0">
+              <a:buNone/>
+            </a:pPr>
+            <a:r>
+              <a:rPr lang="en-US" sz="2400" b="1" dirty="0">
+                <a:solidFill>
+                  <a:srgbClr val="635BFF"/>
+                </a:solidFill>
+                <a:latin typeface="Georgia" pitchFamily="34" charset="0"/>
+                <a:ea typeface="Georgia" pitchFamily="34" charset="-122"/>
+                <a:cs typeface="Georgia" pitchFamily="34" charset="-120"/>
+              </a:rPr>
+              <a:t>You’re now an Orchestrator.</a:t>
+            </a:r>
+            <a:endParaRPr lang="en-US" sz="2400" dirty="0"/>
           </a:p>
         </p:txBody>
       </p:sp>
@@ -8679,830 +9385,6 @@
 <file path=ppt/slides/slide28.xml><?xml version="1.0" encoding="utf-8"?>
 <p:sld xmlns:a="http://schemas.openxmlformats.org/drawingml/2006/main" xmlns:r="http://schemas.openxmlformats.org/officeDocument/2006/relationships" xmlns:p="http://schemas.openxmlformats.org/presentationml/2006/main">
   <p:cSld name="Slide 28">
-    <p:bg>
-      <p:bgPr>
-        <a:solidFill>
-          <a:srgbClr val="0A2540"/>
-        </a:solidFill>
-      </p:bgPr>
-    </p:bg>
-    <p:spTree>
-      <p:nvGrpSpPr>
-        <p:cNvPr id="1" name=""/>
-        <p:cNvGrpSpPr/>
-        <p:nvPr/>
-      </p:nvGrpSpPr>
-      <p:grpSpPr>
-        <a:xfrm>
-          <a:off x="0" y="0"/>
-          <a:ext cx="0" cy="0"/>
-          <a:chOff x="0" y="0"/>
-          <a:chExt cx="0" cy="0"/>
-        </a:xfrm>
-      </p:grpSpPr>
-      <p:sp>
-        <p:nvSpPr>
-          <p:cNvPr id="2" name="Shape 0"/>
-          <p:cNvSpPr/>
-          <p:nvPr/>
-        </p:nvSpPr>
-        <p:spPr>
-          <a:xfrm>
-            <a:off x="4572000" y="2286000"/>
-            <a:ext cx="7315200" cy="5486400"/>
-          </a:xfrm>
-          <a:prstGeom prst="ellipse">
-            <a:avLst/>
-          </a:prstGeom>
-          <a:solidFill>
-            <a:srgbClr val="635BFF">
-              <a:alpha val="4000"/>
-            </a:srgbClr>
-          </a:solidFill>
-          <a:ln/>
-        </p:spPr>
-      </p:sp>
-      <p:sp>
-        <p:nvSpPr>
-          <p:cNvPr id="3" name="Shape 1"/>
-          <p:cNvSpPr/>
-          <p:nvPr/>
-        </p:nvSpPr>
-        <p:spPr>
-          <a:xfrm>
-            <a:off x="192024" y="2011680"/>
-            <a:ext cx="1188720" cy="640080"/>
-          </a:xfrm>
-          <a:prstGeom prst="roundRect">
-            <a:avLst>
-              <a:gd name="adj" fmla="val 11429"/>
-            </a:avLst>
-          </a:prstGeom>
-          <a:solidFill>
-            <a:srgbClr val="0A2540">
-              <a:alpha val="50000"/>
-            </a:srgbClr>
-          </a:solidFill>
-          <a:ln w="19050">
-            <a:solidFill>
-              <a:srgbClr val="8B95A5"/>
-            </a:solidFill>
-            <a:prstDash val="solid"/>
-          </a:ln>
-        </p:spPr>
-      </p:sp>
-      <p:sp>
-        <p:nvSpPr>
-          <p:cNvPr id="4" name="Text 2"/>
-          <p:cNvSpPr/>
-          <p:nvPr/>
-        </p:nvSpPr>
-        <p:spPr>
-          <a:xfrm>
-            <a:off x="192024" y="2011680"/>
-            <a:ext cx="1188720" cy="640080"/>
-          </a:xfrm>
-          <a:prstGeom prst="rect">
-            <a:avLst/>
-          </a:prstGeom>
-          <a:noFill/>
-          <a:ln/>
-        </p:spPr>
-        <p:txBody>
-          <a:bodyPr wrap="square" lIns="0" tIns="0" rIns="0" bIns="0" rtlCol="0" anchor="ctr">
-            <a:normAutofit/>
-          </a:bodyPr>
-          <a:lstStyle/>
-          <a:p>
-            <a:pPr algn="ctr" indent="0" marL="0">
-              <a:buNone/>
-            </a:pPr>
-            <a:r>
-              <a:rPr lang="en-US" sz="1100" b="1" dirty="0">
-                <a:solidFill>
-                  <a:srgbClr val="8B95A5"/>
-                </a:solidFill>
-                <a:latin typeface="Verdana" pitchFamily="34" charset="0"/>
-                <a:ea typeface="Verdana" pitchFamily="34" charset="-122"/>
-                <a:cs typeface="Verdana" pitchFamily="34" charset="-120"/>
-              </a:rPr>
-              <a:t>Skeptic</a:t>
-            </a:r>
-            <a:endParaRPr lang="en-US" sz="1100" dirty="0"/>
-          </a:p>
-        </p:txBody>
-      </p:sp>
-      <p:sp>
-        <p:nvSpPr>
-          <p:cNvPr id="5" name="Text 3"/>
-          <p:cNvSpPr/>
-          <p:nvPr/>
-        </p:nvSpPr>
-        <p:spPr>
-          <a:xfrm>
-            <a:off x="1380744" y="2011680"/>
-            <a:ext cx="73152" cy="640080"/>
-          </a:xfrm>
-          <a:prstGeom prst="rect">
-            <a:avLst/>
-          </a:prstGeom>
-          <a:noFill/>
-          <a:ln/>
-        </p:spPr>
-        <p:txBody>
-          <a:bodyPr wrap="square" lIns="0" tIns="0" rIns="0" bIns="0" rtlCol="0" anchor="ctr"/>
-          <a:lstStyle/>
-          <a:p>
-            <a:pPr algn="ctr" indent="0" marL="0">
-              <a:buNone/>
-            </a:pPr>
-            <a:r>
-              <a:rPr lang="en-US" sz="1100" dirty="0">
-                <a:solidFill>
-                  <a:srgbClr val="8B95A5"/>
-                </a:solidFill>
-                <a:latin typeface="Verdana" pitchFamily="34" charset="0"/>
-                <a:ea typeface="Verdana" pitchFamily="34" charset="-122"/>
-                <a:cs typeface="Verdana" pitchFamily="34" charset="-120"/>
-              </a:rPr>
-              <a:t>→</a:t>
-            </a:r>
-            <a:endParaRPr lang="en-US" sz="1100" dirty="0"/>
-          </a:p>
-        </p:txBody>
-      </p:sp>
-      <p:sp>
-        <p:nvSpPr>
-          <p:cNvPr id="6" name="Shape 4"/>
-          <p:cNvSpPr/>
-          <p:nvPr/>
-        </p:nvSpPr>
-        <p:spPr>
-          <a:xfrm>
-            <a:off x="1453896" y="2011680"/>
-            <a:ext cx="1188720" cy="640080"/>
-          </a:xfrm>
-          <a:prstGeom prst="roundRect">
-            <a:avLst>
-              <a:gd name="adj" fmla="val 11429"/>
-            </a:avLst>
-          </a:prstGeom>
-          <a:solidFill>
-            <a:srgbClr val="635BFF"/>
-          </a:solidFill>
-          <a:ln w="19050">
-            <a:solidFill>
-              <a:srgbClr val="635BFF"/>
-            </a:solidFill>
-            <a:prstDash val="solid"/>
-          </a:ln>
-        </p:spPr>
-      </p:sp>
-      <p:sp>
-        <p:nvSpPr>
-          <p:cNvPr id="7" name="Text 5"/>
-          <p:cNvSpPr/>
-          <p:nvPr/>
-        </p:nvSpPr>
-        <p:spPr>
-          <a:xfrm>
-            <a:off x="1453896" y="2011680"/>
-            <a:ext cx="1188720" cy="640080"/>
-          </a:xfrm>
-          <a:prstGeom prst="rect">
-            <a:avLst/>
-          </a:prstGeom>
-          <a:noFill/>
-          <a:ln/>
-        </p:spPr>
-        <p:txBody>
-          <a:bodyPr wrap="square" lIns="0" tIns="0" rIns="0" bIns="0" rtlCol="0" anchor="ctr">
-            <a:normAutofit/>
-          </a:bodyPr>
-          <a:lstStyle/>
-          <a:p>
-            <a:pPr algn="ctr" indent="0" marL="0">
-              <a:buNone/>
-            </a:pPr>
-            <a:r>
-              <a:rPr lang="en-US" sz="1100" b="1" dirty="0">
-                <a:solidFill>
-                  <a:srgbClr val="FFFFFF"/>
-                </a:solidFill>
-                <a:latin typeface="Verdana" pitchFamily="34" charset="0"/>
-                <a:ea typeface="Verdana" pitchFamily="34" charset="-122"/>
-                <a:cs typeface="Verdana" pitchFamily="34" charset="-120"/>
-              </a:rPr>
-              <a:t>Explorer</a:t>
-            </a:r>
-            <a:endParaRPr lang="en-US" sz="1100" dirty="0"/>
-          </a:p>
-        </p:txBody>
-      </p:sp>
-      <p:sp>
-        <p:nvSpPr>
-          <p:cNvPr id="8" name="Text 6"/>
-          <p:cNvSpPr/>
-          <p:nvPr/>
-        </p:nvSpPr>
-        <p:spPr>
-          <a:xfrm>
-            <a:off x="2642616" y="2011680"/>
-            <a:ext cx="73152" cy="640080"/>
-          </a:xfrm>
-          <a:prstGeom prst="rect">
-            <a:avLst/>
-          </a:prstGeom>
-          <a:noFill/>
-          <a:ln/>
-        </p:spPr>
-        <p:txBody>
-          <a:bodyPr wrap="square" lIns="0" tIns="0" rIns="0" bIns="0" rtlCol="0" anchor="ctr"/>
-          <a:lstStyle/>
-          <a:p>
-            <a:pPr algn="ctr" indent="0" marL="0">
-              <a:buNone/>
-            </a:pPr>
-            <a:r>
-              <a:rPr lang="en-US" sz="1100" dirty="0">
-                <a:solidFill>
-                  <a:srgbClr val="8B95A5"/>
-                </a:solidFill>
-                <a:latin typeface="Verdana" pitchFamily="34" charset="0"/>
-                <a:ea typeface="Verdana" pitchFamily="34" charset="-122"/>
-                <a:cs typeface="Verdana" pitchFamily="34" charset="-120"/>
-              </a:rPr>
-              <a:t>→</a:t>
-            </a:r>
-            <a:endParaRPr lang="en-US" sz="1100" dirty="0"/>
-          </a:p>
-        </p:txBody>
-      </p:sp>
-      <p:sp>
-        <p:nvSpPr>
-          <p:cNvPr id="9" name="Shape 7"/>
-          <p:cNvSpPr/>
-          <p:nvPr/>
-        </p:nvSpPr>
-        <p:spPr>
-          <a:xfrm>
-            <a:off x="2715768" y="2011680"/>
-            <a:ext cx="1188720" cy="640080"/>
-          </a:xfrm>
-          <a:prstGeom prst="roundRect">
-            <a:avLst>
-              <a:gd name="adj" fmla="val 11429"/>
-            </a:avLst>
-          </a:prstGeom>
-          <a:solidFill>
-            <a:srgbClr val="635BFF"/>
-          </a:solidFill>
-          <a:ln w="19050">
-            <a:solidFill>
-              <a:srgbClr val="635BFF"/>
-            </a:solidFill>
-            <a:prstDash val="solid"/>
-          </a:ln>
-        </p:spPr>
-      </p:sp>
-      <p:sp>
-        <p:nvSpPr>
-          <p:cNvPr id="10" name="Text 8"/>
-          <p:cNvSpPr/>
-          <p:nvPr/>
-        </p:nvSpPr>
-        <p:spPr>
-          <a:xfrm>
-            <a:off x="2715768" y="2011680"/>
-            <a:ext cx="1188720" cy="640080"/>
-          </a:xfrm>
-          <a:prstGeom prst="rect">
-            <a:avLst/>
-          </a:prstGeom>
-          <a:noFill/>
-          <a:ln/>
-        </p:spPr>
-        <p:txBody>
-          <a:bodyPr wrap="square" lIns="0" tIns="0" rIns="0" bIns="0" rtlCol="0" anchor="ctr">
-            <a:normAutofit/>
-          </a:bodyPr>
-          <a:lstStyle/>
-          <a:p>
-            <a:pPr algn="ctr" indent="0" marL="0">
-              <a:buNone/>
-            </a:pPr>
-            <a:r>
-              <a:rPr lang="en-US" sz="1100" b="1" dirty="0">
-                <a:solidFill>
-                  <a:srgbClr val="FFFFFF"/>
-                </a:solidFill>
-                <a:latin typeface="Verdana" pitchFamily="34" charset="0"/>
-                <a:ea typeface="Verdana" pitchFamily="34" charset="-122"/>
-                <a:cs typeface="Verdana" pitchFamily="34" charset="-120"/>
-              </a:rPr>
-              <a:t>Whisperer</a:t>
-            </a:r>
-            <a:endParaRPr lang="en-US" sz="1100" dirty="0"/>
-          </a:p>
-        </p:txBody>
-      </p:sp>
-      <p:sp>
-        <p:nvSpPr>
-          <p:cNvPr id="11" name="Text 9"/>
-          <p:cNvSpPr/>
-          <p:nvPr/>
-        </p:nvSpPr>
-        <p:spPr>
-          <a:xfrm>
-            <a:off x="3904488" y="2011680"/>
-            <a:ext cx="73152" cy="640080"/>
-          </a:xfrm>
-          <a:prstGeom prst="rect">
-            <a:avLst/>
-          </a:prstGeom>
-          <a:noFill/>
-          <a:ln/>
-        </p:spPr>
-        <p:txBody>
-          <a:bodyPr wrap="square" lIns="0" tIns="0" rIns="0" bIns="0" rtlCol="0" anchor="ctr"/>
-          <a:lstStyle/>
-          <a:p>
-            <a:pPr algn="ctr" indent="0" marL="0">
-              <a:buNone/>
-            </a:pPr>
-            <a:r>
-              <a:rPr lang="en-US" sz="1100" dirty="0">
-                <a:solidFill>
-                  <a:srgbClr val="8B95A5"/>
-                </a:solidFill>
-                <a:latin typeface="Verdana" pitchFamily="34" charset="0"/>
-                <a:ea typeface="Verdana" pitchFamily="34" charset="-122"/>
-                <a:cs typeface="Verdana" pitchFamily="34" charset="-120"/>
-              </a:rPr>
-              <a:t>→</a:t>
-            </a:r>
-            <a:endParaRPr lang="en-US" sz="1100" dirty="0"/>
-          </a:p>
-        </p:txBody>
-      </p:sp>
-      <p:sp>
-        <p:nvSpPr>
-          <p:cNvPr id="12" name="Shape 10"/>
-          <p:cNvSpPr/>
-          <p:nvPr/>
-        </p:nvSpPr>
-        <p:spPr>
-          <a:xfrm>
-            <a:off x="3977640" y="2011680"/>
-            <a:ext cx="1188720" cy="640080"/>
-          </a:xfrm>
-          <a:prstGeom prst="roundRect">
-            <a:avLst>
-              <a:gd name="adj" fmla="val 11429"/>
-            </a:avLst>
-          </a:prstGeom>
-          <a:solidFill>
-            <a:srgbClr val="635BFF"/>
-          </a:solidFill>
-          <a:ln w="19050">
-            <a:solidFill>
-              <a:srgbClr val="635BFF"/>
-            </a:solidFill>
-            <a:prstDash val="solid"/>
-          </a:ln>
-        </p:spPr>
-      </p:sp>
-      <p:sp>
-        <p:nvSpPr>
-          <p:cNvPr id="13" name="Text 11"/>
-          <p:cNvSpPr/>
-          <p:nvPr/>
-        </p:nvSpPr>
-        <p:spPr>
-          <a:xfrm>
-            <a:off x="3977640" y="2011680"/>
-            <a:ext cx="1188720" cy="640080"/>
-          </a:xfrm>
-          <a:prstGeom prst="rect">
-            <a:avLst/>
-          </a:prstGeom>
-          <a:noFill/>
-          <a:ln/>
-        </p:spPr>
-        <p:txBody>
-          <a:bodyPr wrap="square" lIns="0" tIns="0" rIns="0" bIns="0" rtlCol="0" anchor="ctr">
-            <a:normAutofit/>
-          </a:bodyPr>
-          <a:lstStyle/>
-          <a:p>
-            <a:pPr algn="ctr" indent="0" marL="0">
-              <a:buNone/>
-            </a:pPr>
-            <a:r>
-              <a:rPr lang="en-US" sz="1100" b="1" dirty="0">
-                <a:solidFill>
-                  <a:srgbClr val="FFFFFF"/>
-                </a:solidFill>
-                <a:latin typeface="Verdana" pitchFamily="34" charset="0"/>
-                <a:ea typeface="Verdana" pitchFamily="34" charset="-122"/>
-                <a:cs typeface="Verdana" pitchFamily="34" charset="-120"/>
-              </a:rPr>
-              <a:t>Strategist</a:t>
-            </a:r>
-            <a:endParaRPr lang="en-US" sz="1100" dirty="0"/>
-          </a:p>
-        </p:txBody>
-      </p:sp>
-      <p:sp>
-        <p:nvSpPr>
-          <p:cNvPr id="14" name="Text 12"/>
-          <p:cNvSpPr/>
-          <p:nvPr/>
-        </p:nvSpPr>
-        <p:spPr>
-          <a:xfrm>
-            <a:off x="5166360" y="2011680"/>
-            <a:ext cx="73152" cy="640080"/>
-          </a:xfrm>
-          <a:prstGeom prst="rect">
-            <a:avLst/>
-          </a:prstGeom>
-          <a:noFill/>
-          <a:ln/>
-        </p:spPr>
-        <p:txBody>
-          <a:bodyPr wrap="square" lIns="0" tIns="0" rIns="0" bIns="0" rtlCol="0" anchor="ctr"/>
-          <a:lstStyle/>
-          <a:p>
-            <a:pPr algn="ctr" indent="0" marL="0">
-              <a:buNone/>
-            </a:pPr>
-            <a:r>
-              <a:rPr lang="en-US" sz="1100" dirty="0">
-                <a:solidFill>
-                  <a:srgbClr val="8B95A5"/>
-                </a:solidFill>
-                <a:latin typeface="Verdana" pitchFamily="34" charset="0"/>
-                <a:ea typeface="Verdana" pitchFamily="34" charset="-122"/>
-                <a:cs typeface="Verdana" pitchFamily="34" charset="-120"/>
-              </a:rPr>
-              <a:t>→</a:t>
-            </a:r>
-            <a:endParaRPr lang="en-US" sz="1100" dirty="0"/>
-          </a:p>
-        </p:txBody>
-      </p:sp>
-      <p:sp>
-        <p:nvSpPr>
-          <p:cNvPr id="15" name="Shape 13"/>
-          <p:cNvSpPr/>
-          <p:nvPr/>
-        </p:nvSpPr>
-        <p:spPr>
-          <a:xfrm>
-            <a:off x="5239512" y="2011680"/>
-            <a:ext cx="1188720" cy="640080"/>
-          </a:xfrm>
-          <a:prstGeom prst="roundRect">
-            <a:avLst>
-              <a:gd name="adj" fmla="val 11429"/>
-            </a:avLst>
-          </a:prstGeom>
-          <a:solidFill>
-            <a:srgbClr val="635BFF"/>
-          </a:solidFill>
-          <a:ln w="19050">
-            <a:solidFill>
-              <a:srgbClr val="635BFF"/>
-            </a:solidFill>
-            <a:prstDash val="solid"/>
-          </a:ln>
-        </p:spPr>
-      </p:sp>
-      <p:sp>
-        <p:nvSpPr>
-          <p:cNvPr id="16" name="Text 14"/>
-          <p:cNvSpPr/>
-          <p:nvPr/>
-        </p:nvSpPr>
-        <p:spPr>
-          <a:xfrm>
-            <a:off x="5239512" y="2011680"/>
-            <a:ext cx="1188720" cy="640080"/>
-          </a:xfrm>
-          <a:prstGeom prst="rect">
-            <a:avLst/>
-          </a:prstGeom>
-          <a:noFill/>
-          <a:ln/>
-        </p:spPr>
-        <p:txBody>
-          <a:bodyPr wrap="square" lIns="0" tIns="0" rIns="0" bIns="0" rtlCol="0" anchor="ctr">
-            <a:normAutofit/>
-          </a:bodyPr>
-          <a:lstStyle/>
-          <a:p>
-            <a:pPr algn="ctr" indent="0" marL="0">
-              <a:buNone/>
-            </a:pPr>
-            <a:r>
-              <a:rPr lang="en-US" sz="1100" b="1" dirty="0">
-                <a:solidFill>
-                  <a:srgbClr val="FFFFFF"/>
-                </a:solidFill>
-                <a:latin typeface="Verdana" pitchFamily="34" charset="0"/>
-                <a:ea typeface="Verdana" pitchFamily="34" charset="-122"/>
-                <a:cs typeface="Verdana" pitchFamily="34" charset="-120"/>
-              </a:rPr>
-              <a:t>Operator</a:t>
-            </a:r>
-            <a:endParaRPr lang="en-US" sz="1100" dirty="0"/>
-          </a:p>
-        </p:txBody>
-      </p:sp>
-      <p:sp>
-        <p:nvSpPr>
-          <p:cNvPr id="17" name="Text 15"/>
-          <p:cNvSpPr/>
-          <p:nvPr/>
-        </p:nvSpPr>
-        <p:spPr>
-          <a:xfrm>
-            <a:off x="6428232" y="2011680"/>
-            <a:ext cx="73152" cy="640080"/>
-          </a:xfrm>
-          <a:prstGeom prst="rect">
-            <a:avLst/>
-          </a:prstGeom>
-          <a:noFill/>
-          <a:ln/>
-        </p:spPr>
-        <p:txBody>
-          <a:bodyPr wrap="square" lIns="0" tIns="0" rIns="0" bIns="0" rtlCol="0" anchor="ctr"/>
-          <a:lstStyle/>
-          <a:p>
-            <a:pPr algn="ctr" indent="0" marL="0">
-              <a:buNone/>
-            </a:pPr>
-            <a:r>
-              <a:rPr lang="en-US" sz="1100" dirty="0">
-                <a:solidFill>
-                  <a:srgbClr val="8B95A5"/>
-                </a:solidFill>
-                <a:latin typeface="Verdana" pitchFamily="34" charset="0"/>
-                <a:ea typeface="Verdana" pitchFamily="34" charset="-122"/>
-                <a:cs typeface="Verdana" pitchFamily="34" charset="-120"/>
-              </a:rPr>
-              <a:t>→</a:t>
-            </a:r>
-            <a:endParaRPr lang="en-US" sz="1100" dirty="0"/>
-          </a:p>
-        </p:txBody>
-      </p:sp>
-      <p:sp>
-        <p:nvSpPr>
-          <p:cNvPr id="18" name="Shape 16"/>
-          <p:cNvSpPr/>
-          <p:nvPr/>
-        </p:nvSpPr>
-        <p:spPr>
-          <a:xfrm>
-            <a:off x="6501384" y="2011680"/>
-            <a:ext cx="1188720" cy="640080"/>
-          </a:xfrm>
-          <a:prstGeom prst="roundRect">
-            <a:avLst>
-              <a:gd name="adj" fmla="val 11429"/>
-            </a:avLst>
-          </a:prstGeom>
-          <a:solidFill>
-            <a:srgbClr val="635BFF"/>
-          </a:solidFill>
-          <a:ln w="19050">
-            <a:solidFill>
-              <a:srgbClr val="635BFF"/>
-            </a:solidFill>
-            <a:prstDash val="solid"/>
-          </a:ln>
-        </p:spPr>
-      </p:sp>
-      <p:sp>
-        <p:nvSpPr>
-          <p:cNvPr id="19" name="Text 17"/>
-          <p:cNvSpPr/>
-          <p:nvPr/>
-        </p:nvSpPr>
-        <p:spPr>
-          <a:xfrm>
-            <a:off x="6501384" y="2011680"/>
-            <a:ext cx="1188720" cy="640080"/>
-          </a:xfrm>
-          <a:prstGeom prst="rect">
-            <a:avLst/>
-          </a:prstGeom>
-          <a:noFill/>
-          <a:ln/>
-        </p:spPr>
-        <p:txBody>
-          <a:bodyPr wrap="square" lIns="0" tIns="0" rIns="0" bIns="0" rtlCol="0" anchor="ctr">
-            <a:normAutofit/>
-          </a:bodyPr>
-          <a:lstStyle/>
-          <a:p>
-            <a:pPr algn="ctr" indent="0" marL="0">
-              <a:buNone/>
-            </a:pPr>
-            <a:r>
-              <a:rPr lang="en-US" sz="1100" b="1" dirty="0">
-                <a:solidFill>
-                  <a:srgbClr val="FFFFFF"/>
-                </a:solidFill>
-                <a:latin typeface="Verdana" pitchFamily="34" charset="0"/>
-                <a:ea typeface="Verdana" pitchFamily="34" charset="-122"/>
-                <a:cs typeface="Verdana" pitchFamily="34" charset="-120"/>
-              </a:rPr>
-              <a:t>Orchestrator</a:t>
-            </a:r>
-            <a:endParaRPr lang="en-US" sz="1100" dirty="0"/>
-          </a:p>
-        </p:txBody>
-      </p:sp>
-      <p:sp>
-        <p:nvSpPr>
-          <p:cNvPr id="20" name="Text 18"/>
-          <p:cNvSpPr/>
-          <p:nvPr/>
-        </p:nvSpPr>
-        <p:spPr>
-          <a:xfrm>
-            <a:off x="7690104" y="2011680"/>
-            <a:ext cx="73152" cy="640080"/>
-          </a:xfrm>
-          <a:prstGeom prst="rect">
-            <a:avLst/>
-          </a:prstGeom>
-          <a:noFill/>
-          <a:ln/>
-        </p:spPr>
-        <p:txBody>
-          <a:bodyPr wrap="square" lIns="0" tIns="0" rIns="0" bIns="0" rtlCol="0" anchor="ctr"/>
-          <a:lstStyle/>
-          <a:p>
-            <a:pPr algn="ctr" indent="0" marL="0">
-              <a:buNone/>
-            </a:pPr>
-            <a:r>
-              <a:rPr lang="en-US" sz="1100" dirty="0">
-                <a:solidFill>
-                  <a:srgbClr val="8B95A5"/>
-                </a:solidFill>
-                <a:latin typeface="Verdana" pitchFamily="34" charset="0"/>
-                <a:ea typeface="Verdana" pitchFamily="34" charset="-122"/>
-                <a:cs typeface="Verdana" pitchFamily="34" charset="-120"/>
-              </a:rPr>
-              <a:t>→</a:t>
-            </a:r>
-            <a:endParaRPr lang="en-US" sz="1100" dirty="0"/>
-          </a:p>
-        </p:txBody>
-      </p:sp>
-      <p:sp>
-        <p:nvSpPr>
-          <p:cNvPr id="21" name="Shape 19"/>
-          <p:cNvSpPr/>
-          <p:nvPr/>
-        </p:nvSpPr>
-        <p:spPr>
-          <a:xfrm>
-            <a:off x="7763256" y="2011680"/>
-            <a:ext cx="1188720" cy="640080"/>
-          </a:xfrm>
-          <a:prstGeom prst="roundRect">
-            <a:avLst>
-              <a:gd name="adj" fmla="val 11429"/>
-            </a:avLst>
-          </a:prstGeom>
-          <a:solidFill>
-            <a:srgbClr val="0A2540">
-              <a:alpha val="50000"/>
-            </a:srgbClr>
-          </a:solidFill>
-          <a:ln w="19050">
-            <a:solidFill>
-              <a:srgbClr val="8B95A5"/>
-            </a:solidFill>
-            <a:prstDash val="dash"/>
-          </a:ln>
-        </p:spPr>
-      </p:sp>
-      <p:sp>
-        <p:nvSpPr>
-          <p:cNvPr id="22" name="Text 20"/>
-          <p:cNvSpPr/>
-          <p:nvPr/>
-        </p:nvSpPr>
-        <p:spPr>
-          <a:xfrm>
-            <a:off x="7763256" y="2011680"/>
-            <a:ext cx="1188720" cy="640080"/>
-          </a:xfrm>
-          <a:prstGeom prst="rect">
-            <a:avLst/>
-          </a:prstGeom>
-          <a:noFill/>
-          <a:ln/>
-        </p:spPr>
-        <p:txBody>
-          <a:bodyPr wrap="square" lIns="0" tIns="0" rIns="0" bIns="0" rtlCol="0" anchor="ctr">
-            <a:normAutofit/>
-          </a:bodyPr>
-          <a:lstStyle/>
-          <a:p>
-            <a:pPr algn="ctr" indent="0" marL="0">
-              <a:buNone/>
-            </a:pPr>
-            <a:r>
-              <a:rPr lang="en-US" sz="1100" b="1" dirty="0">
-                <a:solidFill>
-                  <a:srgbClr val="8B95A5"/>
-                </a:solidFill>
-                <a:latin typeface="Verdana" pitchFamily="34" charset="0"/>
-                <a:ea typeface="Verdana" pitchFamily="34" charset="-122"/>
-                <a:cs typeface="Verdana" pitchFamily="34" charset="-120"/>
-              </a:rPr>
-              <a:t>Builder</a:t>
-            </a:r>
-            <a:endParaRPr lang="en-US" sz="1100" dirty="0"/>
-          </a:p>
-        </p:txBody>
-      </p:sp>
-      <p:sp>
-        <p:nvSpPr>
-          <p:cNvPr id="23" name="Text 21"/>
-          <p:cNvSpPr/>
-          <p:nvPr/>
-        </p:nvSpPr>
-        <p:spPr>
-          <a:xfrm>
-            <a:off x="914400" y="3108960"/>
-            <a:ext cx="7315200" cy="548640"/>
-          </a:xfrm>
-          <a:prstGeom prst="rect">
-            <a:avLst/>
-          </a:prstGeom>
-          <a:noFill/>
-          <a:ln/>
-        </p:spPr>
-        <p:txBody>
-          <a:bodyPr wrap="square" lIns="0" tIns="0" rIns="0" bIns="0" rtlCol="0" anchor="ctr"/>
-          <a:lstStyle/>
-          <a:p>
-            <a:pPr algn="ctr" indent="0" marL="0">
-              <a:buNone/>
-            </a:pPr>
-            <a:r>
-              <a:rPr lang="en-US" sz="2400" b="1" dirty="0">
-                <a:solidFill>
-                  <a:srgbClr val="635BFF"/>
-                </a:solidFill>
-                <a:latin typeface="Georgia" pitchFamily="34" charset="0"/>
-                <a:ea typeface="Georgia" pitchFamily="34" charset="-122"/>
-                <a:cs typeface="Georgia" pitchFamily="34" charset="-120"/>
-              </a:rPr>
-              <a:t>You started as an Explorer.</a:t>
-            </a:r>
-            <a:endParaRPr lang="en-US" sz="2400" dirty="0"/>
-          </a:p>
-          <a:p>
-            <a:pPr algn="ctr" indent="0" marL="0">
-              <a:buNone/>
-            </a:pPr>
-            <a:r>
-              <a:rPr lang="en-US" sz="2400" b="1" dirty="0">
-                <a:solidFill>
-                  <a:srgbClr val="635BFF"/>
-                </a:solidFill>
-                <a:latin typeface="Georgia" pitchFamily="34" charset="0"/>
-                <a:ea typeface="Georgia" pitchFamily="34" charset="-122"/>
-                <a:cs typeface="Georgia" pitchFamily="34" charset="-120"/>
-              </a:rPr>
-              <a:t>You’re now an Orchestrator.</a:t>
-            </a:r>
-            <a:endParaRPr lang="en-US" sz="2400" dirty="0"/>
-          </a:p>
-        </p:txBody>
-      </p:sp>
-    </p:spTree>
-  </p:cSld>
-  <p:clrMapOvr>
-    <a:masterClrMapping/>
-  </p:clrMapOvr>
-</p:sld>
-</file>
-
-<file path=ppt/slides/slide29.xml><?xml version="1.0" encoding="utf-8"?>
-<p:sld xmlns:a="http://schemas.openxmlformats.org/drawingml/2006/main" xmlns:r="http://schemas.openxmlformats.org/officeDocument/2006/relationships" xmlns:p="http://schemas.openxmlformats.org/presentationml/2006/main">
-  <p:cSld name="Slide 29">
     <p:bg>
       <p:bgPr>
         <a:solidFill>
